--- a/第四週(10-01)/第四週_第2節_簡報.pptx
+++ b/第四週(10-01)/第四週_第2節_簡報.pptx
@@ -6853,7 +6853,7 @@
         <p:spPr>
           <a:xfrm>
             <a:off x="502920" y="1572768"/>
-            <a:ext cx="7498080" cy="1371600"/>
+            <a:ext cx="7498080" cy="885499"/>
           </a:xfrm>
           <a:prstGeom prst="rect">
             <a:avLst/>
@@ -6914,7 +6914,7 @@
         </p:nvSpPr>
         <p:spPr>
           <a:xfrm>
-            <a:off x="502920" y="3218688"/>
+            <a:off x="502920" y="2787554"/>
             <a:ext cx="1371600" cy="41148"/>
           </a:xfrm>
           <a:prstGeom prst="rect">
@@ -6934,8 +6934,8 @@
         </p:nvSpPr>
         <p:spPr>
           <a:xfrm>
-            <a:off x="502920" y="3419856"/>
-            <a:ext cx="7132320" cy="731520"/>
+            <a:off x="502920" y="2988722"/>
+            <a:ext cx="7132320" cy="833470"/>
           </a:xfrm>
           <a:prstGeom prst="rect">
             <a:avLst/>
@@ -8500,22 +8500,15 @@
         </p:nvSpPr>
         <p:spPr>
           <a:xfrm>
-            <a:off x="1085393" y="1848917"/>
-            <a:ext cx="1303934" cy="1020470"/>
-          </a:xfrm>
-          <a:prstGeom prst="roundRect">
-            <a:avLst>
-              <a:gd name="adj" fmla="val 5376"/>
-            </a:avLst>
-          </a:prstGeom>
-          <a:solidFill>
-            <a:srgbClr val="FFFFFF">
-              <a:alpha val="0"/>
-            </a:srgbClr>
-          </a:solidFill>
-          <a:ln w="25400">
+            <a:off x="1073506" y="1695298"/>
+            <a:ext cx="1327709" cy="1327709"/>
+          </a:xfrm>
+          <a:prstGeom prst="ellipse">
+            <a:avLst/>
+          </a:prstGeom>
+          <a:ln w="76200">
             <a:solidFill>
-              <a:srgbClr val="00A896"/>
+              <a:srgbClr val="1F6F5C"/>
             </a:solidFill>
             <a:prstDash val="solid"/>
           </a:ln>
@@ -8529,16 +8522,14 @@
         </p:nvSpPr>
         <p:spPr>
           <a:xfrm>
-            <a:off x="1085393" y="2104034"/>
-            <a:ext cx="1303934" cy="21260"/>
+            <a:off x="1166445" y="2306044"/>
+            <a:ext cx="1141830" cy="106217"/>
           </a:xfrm>
           <a:prstGeom prst="rect">
             <a:avLst/>
           </a:prstGeom>
           <a:solidFill>
-            <a:srgbClr val="00A896">
-              <a:alpha val="30000"/>
-            </a:srgbClr>
+            <a:srgbClr val="1F6F5C"/>
           </a:solidFill>
           <a:ln/>
         </p:spPr>
@@ -8551,16 +8542,14 @@
         </p:nvSpPr>
         <p:spPr>
           <a:xfrm>
-            <a:off x="1085393" y="2359152"/>
-            <a:ext cx="1303934" cy="21260"/>
+            <a:off x="1684252" y="2359152"/>
+            <a:ext cx="106217" cy="570915"/>
           </a:xfrm>
           <a:prstGeom prst="rect">
             <a:avLst/>
           </a:prstGeom>
           <a:solidFill>
-            <a:srgbClr val="00A896">
-              <a:alpha val="30000"/>
-            </a:srgbClr>
+            <a:srgbClr val="1F6F5C"/>
           </a:solidFill>
           <a:ln/>
         </p:spPr>
@@ -8573,16 +8562,14 @@
         </p:nvSpPr>
         <p:spPr>
           <a:xfrm>
-            <a:off x="1085393" y="2614270"/>
-            <a:ext cx="1303934" cy="21260"/>
-          </a:xfrm>
-          <a:prstGeom prst="rect">
+            <a:off x="1604589" y="2226381"/>
+            <a:ext cx="265542" cy="265542"/>
+          </a:xfrm>
+          <a:prstGeom prst="ellipse">
             <a:avLst/>
           </a:prstGeom>
           <a:solidFill>
-            <a:srgbClr val="00A896">
-              <a:alpha val="30000"/>
-            </a:srgbClr>
+            <a:srgbClr val="1F6F5C"/>
           </a:solidFill>
           <a:ln/>
         </p:spPr>
@@ -8595,109 +8582,60 @@
         </p:nvSpPr>
         <p:spPr>
           <a:xfrm>
-            <a:off x="1453896" y="1848917"/>
-            <a:ext cx="21260" cy="1020470"/>
+            <a:off x="2082564" y="1814791"/>
+            <a:ext cx="398313" cy="398313"/>
+          </a:xfrm>
+          <a:prstGeom prst="ellipse">
+            <a:avLst/>
+          </a:prstGeom>
+          <a:solidFill>
+            <a:srgbClr val="D9463E"/>
+          </a:solidFill>
+          <a:ln/>
+        </p:spPr>
+      </p:sp>
+      <p:sp>
+        <p:nvSpPr>
+          <p:cNvPr id="9" name="Text 7"/>
+          <p:cNvSpPr txBox="1"/>
+          <p:nvPr/>
+        </p:nvSpPr>
+        <p:spPr>
+          <a:xfrm>
+            <a:off x="2082564" y="1814791"/>
+            <a:ext cx="398313" cy="398313"/>
           </a:xfrm>
           <a:prstGeom prst="rect">
             <a:avLst/>
           </a:prstGeom>
-          <a:solidFill>
-            <a:srgbClr val="00A896">
-              <a:alpha val="30000"/>
-            </a:srgbClr>
-          </a:solidFill>
-          <a:ln/>
-        </p:spPr>
-      </p:sp>
-      <p:sp>
-        <p:nvSpPr>
-          <p:cNvPr id="9" name="Shape 7"/>
-          <p:cNvSpPr/>
-          <p:nvPr/>
-        </p:nvSpPr>
-        <p:spPr>
-          <a:xfrm>
-            <a:off x="1808226" y="1848917"/>
-            <a:ext cx="21260" cy="1020470"/>
-          </a:xfrm>
-          <a:prstGeom prst="rect">
-            <a:avLst/>
-          </a:prstGeom>
-          <a:solidFill>
-            <a:srgbClr val="00A896">
-              <a:alpha val="30000"/>
-            </a:srgbClr>
-          </a:solidFill>
-          <a:ln/>
-        </p:spPr>
-      </p:sp>
-      <p:sp>
-        <p:nvSpPr>
-          <p:cNvPr id="10" name="Shape 8"/>
-          <p:cNvSpPr/>
-          <p:nvPr/>
-        </p:nvSpPr>
-        <p:spPr>
-          <a:xfrm>
-            <a:off x="2162556" y="1848917"/>
-            <a:ext cx="21260" cy="1020470"/>
-          </a:xfrm>
-          <a:prstGeom prst="rect">
-            <a:avLst/>
-          </a:prstGeom>
-          <a:solidFill>
-            <a:srgbClr val="00A896">
-              <a:alpha val="30000"/>
-            </a:srgbClr>
-          </a:solidFill>
-          <a:ln/>
-        </p:spPr>
-      </p:sp>
-      <p:sp>
-        <p:nvSpPr>
-          <p:cNvPr id="11" name="Shape 9"/>
-          <p:cNvSpPr/>
-          <p:nvPr/>
-        </p:nvSpPr>
-        <p:spPr>
-          <a:xfrm>
-            <a:off x="1085393" y="2302459"/>
-            <a:ext cx="1303934" cy="141732"/>
-          </a:xfrm>
-          <a:prstGeom prst="rect">
-            <a:avLst/>
-          </a:prstGeom>
-          <a:solidFill>
-            <a:srgbClr val="00A896">
-              <a:alpha val="75000"/>
-            </a:srgbClr>
-          </a:solidFill>
-          <a:ln/>
-        </p:spPr>
-      </p:sp>
-      <p:sp>
-        <p:nvSpPr>
-          <p:cNvPr id="12" name="Shape 10"/>
-          <p:cNvSpPr/>
-          <p:nvPr/>
-        </p:nvSpPr>
-        <p:spPr>
-          <a:xfrm>
-            <a:off x="1879092" y="2245766"/>
-            <a:ext cx="255118" cy="255118"/>
-          </a:xfrm>
-          <a:prstGeom prst="ellipse">
-            <a:avLst/>
-          </a:prstGeom>
-          <a:solidFill>
-            <a:srgbClr val="00A896"/>
-          </a:solidFill>
-          <a:ln/>
-        </p:spPr>
-      </p:sp>
-      <p:sp>
-        <p:nvSpPr>
-          <p:cNvPr id="13" name="Text 11"/>
+          <a:noFill/>
+          <a:ln/>
+        </p:spPr>
+        <p:txBody>
+          <a:bodyPr wrap="square" lIns="0" tIns="0" rIns="0" bIns="0" rtlCol="0" anchor="ctr"/>
+          <a:lstStyle/>
+          <a:p>
+            <a:pPr algn="ctr" indent="0" marL="0">
+              <a:buNone/>
+            </a:pPr>
+            <a:r>
+              <a:rPr lang="en-US" sz="1000" b="1" dirty="0">
+                <a:solidFill>
+                  <a:srgbClr val="FFFFFF"/>
+                </a:solidFill>
+                <a:latin typeface="Arial" pitchFamily="34" charset="0"/>
+                <a:ea typeface="Arial" pitchFamily="34" charset="-122"/>
+                <a:cs typeface="Arial" pitchFamily="34" charset="-120"/>
+              </a:rPr>
+              <a:t>!</a:t>
+            </a:r>
+            <a:endParaRPr lang="en-US" sz="1000" dirty="0"/>
+          </a:p>
+        </p:txBody>
+      </p:sp>
+      <p:sp>
+        <p:nvSpPr>
+          <p:cNvPr id="10" name="Text 8"/>
           <p:cNvSpPr txBox="1"/>
           <p:nvPr/>
         </p:nvSpPr>
@@ -8759,7 +8697,7 @@
       </p:sp>
       <p:sp>
         <p:nvSpPr>
-          <p:cNvPr id="14" name="Text 12"/>
+          <p:cNvPr id="11" name="Text 9"/>
           <p:cNvSpPr txBox="1"/>
           <p:nvPr/>
         </p:nvSpPr>
@@ -8821,7 +8759,7 @@
       </p:sp>
       <p:sp>
         <p:nvSpPr>
-          <p:cNvPr id="15" name="Shape 13"/>
+          <p:cNvPr id="12" name="Shape 10"/>
           <p:cNvSpPr/>
           <p:nvPr/>
         </p:nvSpPr>
@@ -8848,7 +8786,7 @@
       </p:sp>
       <p:sp>
         <p:nvSpPr>
-          <p:cNvPr id="16" name="Text 14"/>
+          <p:cNvPr id="13" name="Text 11"/>
           <p:cNvSpPr txBox="1"/>
           <p:nvPr/>
         </p:nvSpPr>
@@ -8910,7 +8848,7 @@
       </p:sp>
       <p:pic>
         <p:nvPicPr>
-          <p:cNvPr id="18" name="Image 0" descr="/Users/tsengchenghsun/Class/carClass/Claude outputs/第四週(10-1)/src/logo.png">    </p:cNvPr>
+          <p:cNvPr id="15" name="Image 0" descr="/Users/tsengchenghsun/Class/carClass/Claude outputs/第四週(10-1)/src/logo.png">    </p:cNvPr>
           <p:cNvPicPr>
             <a:picLocks noChangeAspect="1"/>
           </p:cNvPicPr>
@@ -8934,7 +8872,7 @@
       </p:pic>
       <p:sp>
         <p:nvSpPr>
-          <p:cNvPr id="19" name="Text 15"/>
+          <p:cNvPr id="16" name="Text 12"/>
           <p:cNvSpPr txBox="1"/>
           <p:nvPr/>
         </p:nvSpPr>
@@ -8973,7 +8911,7 @@
       </p:sp>
       <p:sp>
         <p:nvSpPr>
-          <p:cNvPr id="20" name="Text 16"/>
+          <p:cNvPr id="17" name="Text 13"/>
           <p:cNvSpPr txBox="1"/>
           <p:nvPr/>
         </p:nvSpPr>
@@ -9507,14 +9445,16 @@
         </p:nvSpPr>
         <p:spPr>
           <a:xfrm>
-            <a:off x="5509809" y="2192000"/>
-            <a:ext cx="136063" cy="136063"/>
-          </a:xfrm>
-          <a:prstGeom prst="ellipse">
-            <a:avLst/>
+            <a:off x="5671566" y="2337984"/>
+            <a:ext cx="370332" cy="170353"/>
+          </a:xfrm>
+          <a:prstGeom prst="roundRect">
+            <a:avLst>
+              <a:gd name="adj" fmla="val 22000"/>
+            </a:avLst>
           </a:prstGeom>
           <a:solidFill>
-            <a:srgbClr val="9AA6B0"/>
+            <a:srgbClr val="5F7183"/>
           </a:solidFill>
           <a:ln/>
         </p:spPr>
@@ -9527,16 +9467,16 @@
         </p:nvSpPr>
         <p:spPr>
           <a:xfrm>
-            <a:off x="5487132" y="2345070"/>
-            <a:ext cx="181417" cy="204094"/>
+            <a:off x="5812292" y="2372054"/>
+            <a:ext cx="125913" cy="102212"/>
           </a:xfrm>
           <a:prstGeom prst="roundRect">
             <a:avLst>
-              <a:gd name="adj" fmla="val 151210"/>
+              <a:gd name="adj" fmla="val 23333"/>
             </a:avLst>
           </a:prstGeom>
           <a:solidFill>
-            <a:srgbClr val="9AA6B0"/>
+            <a:srgbClr val="FFFFFF"/>
           </a:solidFill>
           <a:ln/>
         </p:spPr>
@@ -9548,15 +9488,17 @@
           <p:nvPr/>
         </p:nvSpPr>
         <p:spPr>
-          <a:xfrm rot="480000">
-            <a:off x="5498470" y="2543495"/>
-            <a:ext cx="51024" cy="147401"/>
-          </a:xfrm>
-          <a:prstGeom prst="rect">
-            <a:avLst/>
+          <a:xfrm>
+            <a:off x="6238077" y="2506937"/>
+            <a:ext cx="86411" cy="71323"/>
+          </a:xfrm>
+          <a:prstGeom prst="roundRect">
+            <a:avLst>
+              <a:gd name="adj" fmla="val 25962"/>
+            </a:avLst>
           </a:prstGeom>
           <a:solidFill>
-            <a:srgbClr val="9AA6B0"/>
+            <a:srgbClr val="D9463E"/>
           </a:solidFill>
           <a:ln/>
         </p:spPr>
@@ -9568,15 +9510,17 @@
           <p:nvPr/>
         </p:nvSpPr>
         <p:spPr>
-          <a:xfrm rot="-480000">
-            <a:off x="5606186" y="2543495"/>
-            <a:ext cx="51024" cy="147401"/>
-          </a:xfrm>
-          <a:prstGeom prst="rect">
-            <a:avLst/>
+          <a:xfrm>
+            <a:off x="6115533" y="2683992"/>
+            <a:ext cx="86411" cy="71323"/>
+          </a:xfrm>
+          <a:prstGeom prst="roundRect">
+            <a:avLst>
+              <a:gd name="adj" fmla="val 25962"/>
+            </a:avLst>
           </a:prstGeom>
           <a:solidFill>
-            <a:srgbClr val="9AA6B0"/>
+            <a:srgbClr val="D9463E"/>
           </a:solidFill>
           <a:ln/>
         </p:spPr>
@@ -9589,16 +9533,16 @@
         </p:nvSpPr>
         <p:spPr>
           <a:xfrm>
-            <a:off x="5916168" y="2286000"/>
-            <a:ext cx="384048" cy="438912"/>
+            <a:off x="5912068" y="2781602"/>
+            <a:ext cx="86411" cy="71323"/>
           </a:xfrm>
           <a:prstGeom prst="roundRect">
             <a:avLst>
-              <a:gd name="adj" fmla="val 11905"/>
+              <a:gd name="adj" fmla="val 25962"/>
             </a:avLst>
           </a:prstGeom>
           <a:solidFill>
-            <a:srgbClr val="9AA6B0"/>
+            <a:srgbClr val="D9463E"/>
           </a:solidFill>
           <a:ln/>
         </p:spPr>
@@ -9611,67 +9555,268 @@
         </p:nvSpPr>
         <p:spPr>
           <a:xfrm>
-            <a:off x="5870448" y="2221992"/>
-            <a:ext cx="475488" cy="73152"/>
+            <a:off x="5682198" y="2773612"/>
+            <a:ext cx="86411" cy="71323"/>
+          </a:xfrm>
+          <a:prstGeom prst="roundRect">
+            <a:avLst>
+              <a:gd name="adj" fmla="val 25962"/>
+            </a:avLst>
+          </a:prstGeom>
+          <a:solidFill>
+            <a:srgbClr val="D9463E"/>
+          </a:solidFill>
+          <a:ln/>
+        </p:spPr>
+      </p:sp>
+      <p:sp>
+        <p:nvSpPr>
+          <p:cNvPr id="19" name="Shape 17"/>
+          <p:cNvSpPr/>
+          <p:nvPr/>
+        </p:nvSpPr>
+        <p:spPr>
+          <a:xfrm>
+            <a:off x="5487518" y="2662163"/>
+            <a:ext cx="86411" cy="71323"/>
+          </a:xfrm>
+          <a:prstGeom prst="roundRect">
+            <a:avLst>
+              <a:gd name="adj" fmla="val 25962"/>
+            </a:avLst>
+          </a:prstGeom>
+          <a:solidFill>
+            <a:srgbClr val="D9463E"/>
+          </a:solidFill>
+          <a:ln/>
+        </p:spPr>
+      </p:sp>
+      <p:sp>
+        <p:nvSpPr>
+          <p:cNvPr id="20" name="Shape 18"/>
+          <p:cNvSpPr/>
+          <p:nvPr/>
+        </p:nvSpPr>
+        <p:spPr>
+          <a:xfrm>
+            <a:off x="5380191" y="2477118"/>
+            <a:ext cx="86411" cy="71323"/>
+          </a:xfrm>
+          <a:prstGeom prst="roundRect">
+            <a:avLst>
+              <a:gd name="adj" fmla="val 25962"/>
+            </a:avLst>
+          </a:prstGeom>
+          <a:solidFill>
+            <a:srgbClr val="D9463E"/>
+          </a:solidFill>
+          <a:ln/>
+        </p:spPr>
+      </p:sp>
+      <p:sp>
+        <p:nvSpPr>
+          <p:cNvPr id="21" name="Shape 19"/>
+          <p:cNvSpPr/>
+          <p:nvPr/>
+        </p:nvSpPr>
+        <p:spPr>
+          <a:xfrm>
+            <a:off x="5388977" y="2268060"/>
+            <a:ext cx="86411" cy="71323"/>
+          </a:xfrm>
+          <a:prstGeom prst="roundRect">
+            <a:avLst>
+              <a:gd name="adj" fmla="val 25962"/>
+            </a:avLst>
+          </a:prstGeom>
+          <a:solidFill>
+            <a:srgbClr val="D9463E"/>
+          </a:solidFill>
+          <a:ln/>
+        </p:spPr>
+      </p:sp>
+      <p:sp>
+        <p:nvSpPr>
+          <p:cNvPr id="22" name="Shape 20"/>
+          <p:cNvSpPr/>
+          <p:nvPr/>
+        </p:nvSpPr>
+        <p:spPr>
+          <a:xfrm>
+            <a:off x="5511520" y="2091005"/>
+            <a:ext cx="86411" cy="71323"/>
+          </a:xfrm>
+          <a:prstGeom prst="roundRect">
+            <a:avLst>
+              <a:gd name="adj" fmla="val 25962"/>
+            </a:avLst>
+          </a:prstGeom>
+          <a:solidFill>
+            <a:srgbClr val="D9463E"/>
+          </a:solidFill>
+          <a:ln/>
+        </p:spPr>
+      </p:sp>
+      <p:sp>
+        <p:nvSpPr>
+          <p:cNvPr id="23" name="Shape 21"/>
+          <p:cNvSpPr/>
+          <p:nvPr/>
+        </p:nvSpPr>
+        <p:spPr>
+          <a:xfrm>
+            <a:off x="5714986" y="1993395"/>
+            <a:ext cx="86411" cy="71323"/>
+          </a:xfrm>
+          <a:prstGeom prst="roundRect">
+            <a:avLst>
+              <a:gd name="adj" fmla="val 25962"/>
+            </a:avLst>
+          </a:prstGeom>
+          <a:solidFill>
+            <a:srgbClr val="D9463E"/>
+          </a:solidFill>
+          <a:ln/>
+        </p:spPr>
+      </p:sp>
+      <p:sp>
+        <p:nvSpPr>
+          <p:cNvPr id="24" name="Shape 22"/>
+          <p:cNvSpPr/>
+          <p:nvPr/>
+        </p:nvSpPr>
+        <p:spPr>
+          <a:xfrm>
+            <a:off x="5944855" y="2001385"/>
+            <a:ext cx="86411" cy="71323"/>
+          </a:xfrm>
+          <a:prstGeom prst="roundRect">
+            <a:avLst>
+              <a:gd name="adj" fmla="val 25962"/>
+            </a:avLst>
+          </a:prstGeom>
+          <a:solidFill>
+            <a:srgbClr val="D9463E"/>
+          </a:solidFill>
+          <a:ln/>
+        </p:spPr>
+      </p:sp>
+      <p:sp>
+        <p:nvSpPr>
+          <p:cNvPr id="25" name="Shape 23"/>
+          <p:cNvSpPr/>
+          <p:nvPr/>
+        </p:nvSpPr>
+        <p:spPr>
+          <a:xfrm>
+            <a:off x="6139536" y="2112834"/>
+            <a:ext cx="86411" cy="71323"/>
+          </a:xfrm>
+          <a:prstGeom prst="roundRect">
+            <a:avLst>
+              <a:gd name="adj" fmla="val 25962"/>
+            </a:avLst>
+          </a:prstGeom>
+          <a:solidFill>
+            <a:srgbClr val="D9463E"/>
+          </a:solidFill>
+          <a:ln/>
+        </p:spPr>
+      </p:sp>
+      <p:sp>
+        <p:nvSpPr>
+          <p:cNvPr id="26" name="Shape 24"/>
+          <p:cNvSpPr/>
+          <p:nvPr/>
+        </p:nvSpPr>
+        <p:spPr>
+          <a:xfrm>
+            <a:off x="6246862" y="2297879"/>
+            <a:ext cx="86411" cy="71323"/>
+          </a:xfrm>
+          <a:prstGeom prst="roundRect">
+            <a:avLst>
+              <a:gd name="adj" fmla="val 25962"/>
+            </a:avLst>
+          </a:prstGeom>
+          <a:solidFill>
+            <a:srgbClr val="D9463E"/>
+          </a:solidFill>
+          <a:ln/>
+        </p:spPr>
+      </p:sp>
+      <p:sp>
+        <p:nvSpPr>
+          <p:cNvPr id="27" name="Text 25"/>
+          <p:cNvSpPr txBox="1"/>
+          <p:nvPr/>
+        </p:nvSpPr>
+        <p:spPr>
+          <a:xfrm>
+            <a:off x="6373368" y="1883664"/>
+            <a:ext cx="2103120" cy="731520"/>
           </a:xfrm>
           <a:prstGeom prst="rect">
             <a:avLst/>
           </a:prstGeom>
-          <a:solidFill>
-            <a:srgbClr val="8593A0"/>
-          </a:solidFill>
-          <a:ln/>
-        </p:spPr>
-      </p:sp>
-      <p:sp>
-        <p:nvSpPr>
-          <p:cNvPr id="19" name="Text 17"/>
-          <p:cNvSpPr txBox="1"/>
-          <p:nvPr/>
-        </p:nvSpPr>
-        <p:spPr>
-          <a:xfrm>
-            <a:off x="5513832" y="1865376"/>
-            <a:ext cx="457200" cy="402336"/>
-          </a:xfrm>
-          <a:prstGeom prst="rect">
-            <a:avLst/>
-          </a:prstGeom>
           <a:noFill/>
           <a:ln/>
         </p:spPr>
         <p:txBody>
-          <a:bodyPr wrap="square" lIns="0" tIns="0" rIns="0" bIns="0" rtlCol="0" anchor="ctr"/>
+          <a:bodyPr wrap="square" lIns="0" tIns="0" rIns="0" bIns="0" rtlCol="0" anchor="t"/>
           <a:lstStyle/>
           <a:p>
-            <a:pPr algn="ctr" indent="0" marL="0">
-              <a:buNone/>
-            </a:pPr>
-            <a:r>
-              <a:rPr lang="en-US" sz="2400" b="1" dirty="0">
-                <a:solidFill>
-                  <a:srgbClr val="D9463E"/>
+            <a:pPr indent="0" marL="0">
+              <a:lnSpc>
+                <a:spcPct val="112000"/>
+              </a:lnSpc>
+              <a:buNone/>
+            </a:pPr>
+            <a:r>
+              <a:rPr lang="en-US" sz="1300" b="1" dirty="0">
+                <a:solidFill>
+                  <a:srgbClr val="A32C25"/>
                 </a:solidFill>
                 <a:latin typeface="Arial" pitchFamily="34" charset="0"/>
                 <a:ea typeface="Arial" pitchFamily="34" charset="-122"/>
                 <a:cs typeface="Arial" pitchFamily="34" charset="-120"/>
               </a:rPr>
-              <a:t>?</a:t>
-            </a:r>
-            <a:endParaRPr lang="en-US" sz="2400" dirty="0"/>
+              <a:t>12 xe máy vây quanh</a:t>
+            </a:r>
+            <a:endParaRPr lang="en-US" sz="1300" dirty="0"/>
+          </a:p>
+          <a:p>
+            <a:pPr indent="0" marL="0">
+              <a:lnSpc>
+                <a:spcPct val="112000"/>
+              </a:lnSpc>
+              <a:buNone/>
+            </a:pPr>
+            <a:r>
+              <a:rPr lang="en-US" sz="1100" dirty="0">
+                <a:solidFill>
+                  <a:srgbClr val="A32C25"/>
+                </a:solidFill>
+                <a:latin typeface="微軟正黑體" pitchFamily="34" charset="0"/>
+                <a:ea typeface="微軟正黑體" pitchFamily="34" charset="-122"/>
+                <a:cs typeface="微軟正黑體" pitchFamily="34" charset="-120"/>
+              </a:rPr>
+              <a:t>十二台機車圍著你</a:t>
+            </a:r>
+            <a:endParaRPr lang="en-US" sz="1300" dirty="0"/>
           </a:p>
         </p:txBody>
       </p:sp>
       <p:sp>
         <p:nvSpPr>
-          <p:cNvPr id="20" name="Text 18"/>
+          <p:cNvPr id="28" name="Text 26"/>
           <p:cNvSpPr txBox="1"/>
           <p:nvPr/>
         </p:nvSpPr>
         <p:spPr>
           <a:xfrm>
-            <a:off x="6281928" y="1883664"/>
-            <a:ext cx="2194560" cy="731520"/>
+            <a:off x="5239512" y="3017520"/>
+            <a:ext cx="3236976" cy="402336"/>
           </a:xfrm>
           <a:prstGeom prst="rect">
             <a:avLst/>
@@ -9685,12 +9830,12 @@
           <a:p>
             <a:pPr indent="0" marL="0">
               <a:lnSpc>
-                <a:spcPct val="112000"/>
-              </a:lnSpc>
-              <a:buNone/>
-            </a:pPr>
-            <a:r>
-              <a:rPr lang="en-US" sz="1300" b="1" dirty="0">
+                <a:spcPct val="104000"/>
+              </a:lnSpc>
+              <a:buNone/>
+            </a:pPr>
+            <a:r>
+              <a:rPr lang="en-US" sz="1000" b="1" dirty="0">
                 <a:solidFill>
                   <a:srgbClr val="A32C25"/>
                 </a:solidFill>
@@ -9698,19 +9843,19 @@
                 <a:ea typeface="Arial" pitchFamily="34" charset="-122"/>
                 <a:cs typeface="Arial" pitchFamily="34" charset="-120"/>
               </a:rPr>
-              <a:t>12 xe máy vây quanh</a:t>
-            </a:r>
-            <a:endParaRPr lang="en-US" sz="1300" dirty="0"/>
+              <a:t>Euro NCAP có kịch bản MỘT xe máy. Không nơi nào có kịch bản này.</a:t>
+            </a:r>
+            <a:endParaRPr lang="en-US" sz="1000" dirty="0"/>
           </a:p>
           <a:p>
             <a:pPr indent="0" marL="0">
               <a:lnSpc>
-                <a:spcPct val="112000"/>
-              </a:lnSpc>
-              <a:buNone/>
-            </a:pPr>
-            <a:r>
-              <a:rPr lang="en-US" sz="1100" dirty="0">
+                <a:spcPct val="104000"/>
+              </a:lnSpc>
+              <a:buNone/>
+            </a:pPr>
+            <a:r>
+              <a:rPr lang="en-US" sz="900" dirty="0">
                 <a:solidFill>
                   <a:srgbClr val="A32C25"/>
                 </a:solidFill>
@@ -9718,77 +9863,15 @@
                 <a:ea typeface="微軟正黑體" pitchFamily="34" charset="-122"/>
                 <a:cs typeface="微軟正黑體" pitchFamily="34" charset="-120"/>
               </a:rPr>
-              <a:t>十二台機車圍著你</a:t>
-            </a:r>
-            <a:endParaRPr lang="en-US" sz="1300" dirty="0"/>
+              <a:t>Euro NCAP 有「一台機車」的場景。這個場景哪裡都沒有。</a:t>
+            </a:r>
+            <a:endParaRPr lang="en-US" sz="1000" dirty="0"/>
           </a:p>
         </p:txBody>
       </p:sp>
       <p:sp>
         <p:nvSpPr>
-          <p:cNvPr id="21" name="Text 19"/>
-          <p:cNvSpPr txBox="1"/>
-          <p:nvPr/>
-        </p:nvSpPr>
-        <p:spPr>
-          <a:xfrm>
-            <a:off x="5239512" y="3017520"/>
-            <a:ext cx="3236976" cy="402336"/>
-          </a:xfrm>
-          <a:prstGeom prst="rect">
-            <a:avLst/>
-          </a:prstGeom>
-          <a:noFill/>
-          <a:ln/>
-        </p:spPr>
-        <p:txBody>
-          <a:bodyPr wrap="square" lIns="0" tIns="0" rIns="0" bIns="0" rtlCol="0" anchor="t"/>
-          <a:lstStyle/>
-          <a:p>
-            <a:pPr indent="0" marL="0">
-              <a:lnSpc>
-                <a:spcPct val="104000"/>
-              </a:lnSpc>
-              <a:buNone/>
-            </a:pPr>
-            <a:r>
-              <a:rPr lang="en-US" sz="1000" b="1" dirty="0">
-                <a:solidFill>
-                  <a:srgbClr val="A32C25"/>
-                </a:solidFill>
-                <a:latin typeface="Arial" pitchFamily="34" charset="0"/>
-                <a:ea typeface="Arial" pitchFamily="34" charset="-122"/>
-                <a:cs typeface="Arial" pitchFamily="34" charset="-120"/>
-              </a:rPr>
-              <a:t>Euro NCAP có kịch bản MỘT xe máy. Không nơi nào có kịch bản này.</a:t>
-            </a:r>
-            <a:endParaRPr lang="en-US" sz="1000" dirty="0"/>
-          </a:p>
-          <a:p>
-            <a:pPr indent="0" marL="0">
-              <a:lnSpc>
-                <a:spcPct val="104000"/>
-              </a:lnSpc>
-              <a:buNone/>
-            </a:pPr>
-            <a:r>
-              <a:rPr lang="en-US" sz="900" dirty="0">
-                <a:solidFill>
-                  <a:srgbClr val="A32C25"/>
-                </a:solidFill>
-                <a:latin typeface="微軟正黑體" pitchFamily="34" charset="0"/>
-                <a:ea typeface="微軟正黑體" pitchFamily="34" charset="-122"/>
-                <a:cs typeface="微軟正黑體" pitchFamily="34" charset="-120"/>
-              </a:rPr>
-              <a:t>Euro NCAP 有「一台機車」的場景。這個場景哪裡都沒有。</a:t>
-            </a:r>
-            <a:endParaRPr lang="en-US" sz="1000" dirty="0"/>
-          </a:p>
-        </p:txBody>
-      </p:sp>
-      <p:sp>
-        <p:nvSpPr>
-          <p:cNvPr id="22" name="Shape 20"/>
+          <p:cNvPr id="29" name="Shape 27"/>
           <p:cNvSpPr/>
           <p:nvPr/>
         </p:nvSpPr>
@@ -9815,7 +9898,7 @@
       </p:sp>
       <p:sp>
         <p:nvSpPr>
-          <p:cNvPr id="23" name="Text 21"/>
+          <p:cNvPr id="30" name="Text 28"/>
           <p:cNvSpPr txBox="1"/>
           <p:nvPr/>
         </p:nvSpPr>
@@ -9877,7 +9960,7 @@
       </p:sp>
       <p:pic>
         <p:nvPicPr>
-          <p:cNvPr id="25" name="Image 0" descr="/Users/tsengchenghsun/Class/carClass/Claude outputs/第四週(10-1)/src/logo.png">    </p:cNvPr>
+          <p:cNvPr id="32" name="Image 0" descr="/Users/tsengchenghsun/Class/carClass/Claude outputs/第四週(10-1)/src/logo.png">    </p:cNvPr>
           <p:cNvPicPr>
             <a:picLocks noChangeAspect="1"/>
           </p:cNvPicPr>
@@ -9901,7 +9984,7 @@
       </p:pic>
       <p:sp>
         <p:nvSpPr>
-          <p:cNvPr id="26" name="Text 22"/>
+          <p:cNvPr id="33" name="Text 29"/>
           <p:cNvSpPr txBox="1"/>
           <p:nvPr/>
         </p:nvSpPr>
@@ -9940,7 +10023,7 @@
       </p:sp>
       <p:sp>
         <p:nvSpPr>
-          <p:cNvPr id="27" name="Text 23"/>
+          <p:cNvPr id="34" name="Text 30"/>
           <p:cNvSpPr txBox="1"/>
           <p:nvPr/>
         </p:nvSpPr>
@@ -10935,7 +11018,7 @@
         <p:spPr>
           <a:xfrm>
             <a:off x="722376" y="1938528"/>
-            <a:ext cx="7863840" cy="603504"/>
+            <a:ext cx="7863840" cy="621792"/>
           </a:xfrm>
           <a:prstGeom prst="rect">
             <a:avLst/>
@@ -10996,7 +11079,7 @@
         </p:nvSpPr>
         <p:spPr>
           <a:xfrm>
-            <a:off x="502920" y="2633472"/>
+            <a:off x="502920" y="2688336"/>
             <a:ext cx="45720" cy="512064"/>
           </a:xfrm>
           <a:prstGeom prst="rect">
@@ -11016,8 +11099,8 @@
         </p:nvSpPr>
         <p:spPr>
           <a:xfrm>
-            <a:off x="722376" y="2596896"/>
-            <a:ext cx="7863840" cy="603504"/>
+            <a:off x="722376" y="2651760"/>
+            <a:ext cx="7863840" cy="621792"/>
           </a:xfrm>
           <a:prstGeom prst="rect">
             <a:avLst/>
@@ -11078,8 +11161,8 @@
         </p:nvSpPr>
         <p:spPr>
           <a:xfrm>
-            <a:off x="502920" y="3291840"/>
-            <a:ext cx="45720" cy="512064"/>
+            <a:off x="502920" y="3401568"/>
+            <a:ext cx="45720" cy="672713"/>
           </a:xfrm>
           <a:prstGeom prst="rect">
             <a:avLst/>
@@ -11098,8 +11181,8 @@
         </p:nvSpPr>
         <p:spPr>
           <a:xfrm>
-            <a:off x="722376" y="3255264"/>
-            <a:ext cx="7863840" cy="603504"/>
+            <a:off x="722376" y="3364992"/>
+            <a:ext cx="7863840" cy="782441"/>
           </a:xfrm>
           <a:prstGeom prst="rect">
             <a:avLst/>
@@ -11328,21 +11411,17 @@
           <p:nvPr/>
         </p:nvSpPr>
         <p:spPr>
-          <a:xfrm>
-            <a:off x="1113739" y="1735531"/>
-            <a:ext cx="1247242" cy="1247242"/>
-          </a:xfrm>
-          <a:prstGeom prst="ellipse">
-            <a:avLst/>
-          </a:prstGeom>
-          <a:solidFill>
-            <a:srgbClr val="FFFFFF">
-              <a:alpha val="0"/>
-            </a:srgbClr>
-          </a:solidFill>
-          <a:ln w="38100">
+          <a:xfrm flipV="1">
+            <a:off x="1073506" y="1736994"/>
+            <a:ext cx="531084" cy="1244316"/>
+          </a:xfrm>
+          <a:prstGeom prst="line">
+            <a:avLst/>
+          </a:prstGeom>
+          <a:noFill/>
+          <a:ln w="17780">
             <a:solidFill>
-              <a:srgbClr val="D9463E"/>
+              <a:srgbClr val="9AA6B0"/>
             </a:solidFill>
             <a:prstDash val="solid"/>
           </a:ln>
@@ -11355,17 +11434,20 @@
           <p:nvPr/>
         </p:nvSpPr>
         <p:spPr>
-          <a:xfrm>
-            <a:off x="1694840" y="1990649"/>
-            <a:ext cx="85039" cy="396850"/>
-          </a:xfrm>
-          <a:prstGeom prst="rect">
-            <a:avLst/>
-          </a:prstGeom>
-          <a:solidFill>
-            <a:srgbClr val="D9463E"/>
-          </a:solidFill>
-          <a:ln/>
+          <a:xfrm flipH="1" flipV="1">
+            <a:off x="1870131" y="1736994"/>
+            <a:ext cx="531084" cy="1244316"/>
+          </a:xfrm>
+          <a:prstGeom prst="line">
+            <a:avLst/>
+          </a:prstGeom>
+          <a:noFill/>
+          <a:ln w="17780">
+            <a:solidFill>
+              <a:srgbClr val="9AA6B0"/>
+            </a:solidFill>
+            <a:prstDash val="solid"/>
+          </a:ln>
         </p:spPr>
       </p:sp>
       <p:sp>
@@ -11376,14 +11458,14 @@
         </p:nvSpPr>
         <p:spPr>
           <a:xfrm>
-            <a:off x="1737360" y="2316632"/>
-            <a:ext cx="340157" cy="85039"/>
+            <a:off x="1710806" y="2870210"/>
+            <a:ext cx="53108" cy="111100"/>
           </a:xfrm>
           <a:prstGeom prst="rect">
             <a:avLst/>
           </a:prstGeom>
           <a:solidFill>
-            <a:srgbClr val="D9463E"/>
+            <a:srgbClr val="C8D3DE"/>
           </a:solidFill>
           <a:ln/>
         </p:spPr>
@@ -11396,21 +11478,100 @@
         </p:nvSpPr>
         <p:spPr>
           <a:xfrm>
-            <a:off x="1652321" y="2274113"/>
-            <a:ext cx="170078" cy="170078"/>
-          </a:xfrm>
-          <a:prstGeom prst="ellipse">
+            <a:off x="1715453" y="2578574"/>
+            <a:ext cx="43814" cy="91657"/>
+          </a:xfrm>
+          <a:prstGeom prst="rect">
             <a:avLst/>
           </a:prstGeom>
           <a:solidFill>
-            <a:srgbClr val="D9463E"/>
+            <a:srgbClr val="C8D3DE"/>
           </a:solidFill>
           <a:ln/>
         </p:spPr>
       </p:sp>
       <p:sp>
         <p:nvSpPr>
-          <p:cNvPr id="8" name="Text 6"/>
+          <p:cNvPr id="8" name="Shape 6"/>
+          <p:cNvSpPr/>
+          <p:nvPr/>
+        </p:nvSpPr>
+        <p:spPr>
+          <a:xfrm>
+            <a:off x="1720100" y="2286937"/>
+            <a:ext cx="34520" cy="72215"/>
+          </a:xfrm>
+          <a:prstGeom prst="rect">
+            <a:avLst/>
+          </a:prstGeom>
+          <a:solidFill>
+            <a:srgbClr val="C8D3DE"/>
+          </a:solidFill>
+          <a:ln/>
+        </p:spPr>
+      </p:sp>
+      <p:sp>
+        <p:nvSpPr>
+          <p:cNvPr id="9" name="Shape 7"/>
+          <p:cNvSpPr/>
+          <p:nvPr/>
+        </p:nvSpPr>
+        <p:spPr>
+          <a:xfrm>
+            <a:off x="1724747" y="1995301"/>
+            <a:ext cx="25226" cy="52772"/>
+          </a:xfrm>
+          <a:prstGeom prst="rect">
+            <a:avLst/>
+          </a:prstGeom>
+          <a:solidFill>
+            <a:srgbClr val="C8D3DE"/>
+          </a:solidFill>
+          <a:ln/>
+        </p:spPr>
+      </p:sp>
+      <p:sp>
+        <p:nvSpPr>
+          <p:cNvPr id="10" name="Text 8"/>
+          <p:cNvSpPr txBox="1"/>
+          <p:nvPr/>
+        </p:nvSpPr>
+        <p:spPr>
+          <a:xfrm>
+            <a:off x="630936" y="1425915"/>
+            <a:ext cx="2212848" cy="355519"/>
+          </a:xfrm>
+          <a:prstGeom prst="rect">
+            <a:avLst/>
+          </a:prstGeom>
+          <a:noFill/>
+          <a:ln/>
+        </p:spPr>
+        <p:txBody>
+          <a:bodyPr wrap="square" lIns="0" tIns="0" rIns="0" bIns="0" rtlCol="0" anchor="ctr"/>
+          <a:lstStyle/>
+          <a:p>
+            <a:pPr algn="ctr" indent="0" marL="0">
+              <a:buNone/>
+            </a:pPr>
+            <a:r>
+              <a:rPr lang="en-US" sz="1000" b="1" dirty="0">
+                <a:solidFill>
+                  <a:srgbClr val="A3382F"/>
+                </a:solidFill>
+                <a:latin typeface="Arial" pitchFamily="34" charset="0"/>
+                <a:ea typeface="Arial" pitchFamily="34" charset="-122"/>
+                <a:cs typeface="Arial" pitchFamily="34" charset="-120"/>
+              </a:rPr>
+              <a:t>10 000 km</a:t>
+            </a:r>
+            <a:endParaRPr lang="en-US" sz="1000" dirty="0"/>
+          </a:p>
+        </p:txBody>
+      </p:sp>
+      <p:sp>
+        <p:nvSpPr>
+          <p:cNvPr id="11" name="Text 9"/>
           <p:cNvSpPr txBox="1"/>
           <p:nvPr/>
         </p:nvSpPr>
@@ -11472,7 +11633,7 @@
       </p:sp>
       <p:sp>
         <p:nvSpPr>
-          <p:cNvPr id="9" name="Text 7"/>
+          <p:cNvPr id="12" name="Text 10"/>
           <p:cNvSpPr txBox="1"/>
           <p:nvPr/>
         </p:nvSpPr>
@@ -11534,7 +11695,7 @@
       </p:sp>
       <p:sp>
         <p:nvSpPr>
-          <p:cNvPr id="10" name="Shape 8"/>
+          <p:cNvPr id="13" name="Shape 11"/>
           <p:cNvSpPr/>
           <p:nvPr/>
         </p:nvSpPr>
@@ -11561,7 +11722,7 @@
       </p:sp>
       <p:sp>
         <p:nvSpPr>
-          <p:cNvPr id="11" name="Text 9"/>
+          <p:cNvPr id="14" name="Text 12"/>
           <p:cNvSpPr txBox="1"/>
           <p:nvPr/>
         </p:nvSpPr>
@@ -11623,7 +11784,7 @@
       </p:sp>
       <p:pic>
         <p:nvPicPr>
-          <p:cNvPr id="13" name="Image 0" descr="/Users/tsengchenghsun/Class/carClass/Claude outputs/第四週(10-1)/src/logo.png">    </p:cNvPr>
+          <p:cNvPr id="16" name="Image 0" descr="/Users/tsengchenghsun/Class/carClass/Claude outputs/第四週(10-1)/src/logo.png">    </p:cNvPr>
           <p:cNvPicPr>
             <a:picLocks noChangeAspect="1"/>
           </p:cNvPicPr>
@@ -11647,7 +11808,7 @@
       </p:pic>
       <p:sp>
         <p:nvSpPr>
-          <p:cNvPr id="14" name="Text 10"/>
+          <p:cNvPr id="17" name="Text 13"/>
           <p:cNvSpPr txBox="1"/>
           <p:nvPr/>
         </p:nvSpPr>
@@ -11686,7 +11847,7 @@
       </p:sp>
       <p:sp>
         <p:nvSpPr>
-          <p:cNvPr id="15" name="Text 11"/>
+          <p:cNvPr id="18" name="Text 14"/>
           <p:cNvSpPr txBox="1"/>
           <p:nvPr/>
         </p:nvSpPr>
@@ -12612,16 +12773,16 @@
         </p:nvSpPr>
         <p:spPr>
           <a:xfrm>
-            <a:off x="1312164" y="1933956"/>
-            <a:ext cx="850392" cy="850392"/>
+            <a:off x="940735" y="1821430"/>
+            <a:ext cx="1593251" cy="97768"/>
           </a:xfrm>
           <a:prstGeom prst="roundRect">
             <a:avLst>
-              <a:gd name="adj" fmla="val 12903"/>
+              <a:gd name="adj" fmla="val 50000"/>
             </a:avLst>
           </a:prstGeom>
           <a:solidFill>
-            <a:srgbClr val="4FA8FF"/>
+            <a:srgbClr val="D5DEE6"/>
           </a:solidFill>
           <a:ln/>
         </p:spPr>
@@ -12634,18 +12795,16 @@
         </p:nvSpPr>
         <p:spPr>
           <a:xfrm>
-            <a:off x="1510589" y="2132381"/>
-            <a:ext cx="453542" cy="453542"/>
+            <a:off x="1227520" y="1821430"/>
+            <a:ext cx="860355" cy="97768"/>
           </a:xfrm>
           <a:prstGeom prst="roundRect">
             <a:avLst>
-              <a:gd name="adj" fmla="val 20161"/>
+              <a:gd name="adj" fmla="val 50000"/>
             </a:avLst>
           </a:prstGeom>
           <a:solidFill>
-            <a:srgbClr val="FFFFFF">
-              <a:alpha val="75000"/>
-            </a:srgbClr>
+            <a:srgbClr val="1F4E79"/>
           </a:solidFill>
           <a:ln/>
         </p:spPr>
@@ -12658,16 +12817,16 @@
         </p:nvSpPr>
         <p:spPr>
           <a:xfrm>
-            <a:off x="1453896" y="1735531"/>
-            <a:ext cx="113386" cy="198425"/>
-          </a:xfrm>
-          <a:prstGeom prst="rect">
-            <a:avLst/>
+            <a:off x="940735" y="2310268"/>
+            <a:ext cx="1593251" cy="97768"/>
+          </a:xfrm>
+          <a:prstGeom prst="roundRect">
+            <a:avLst>
+              <a:gd name="adj" fmla="val 50000"/>
+            </a:avLst>
           </a:prstGeom>
           <a:solidFill>
-            <a:srgbClr val="4FA8FF">
-              <a:alpha val="70000"/>
-            </a:srgbClr>
+            <a:srgbClr val="D5DEE6"/>
           </a:solidFill>
           <a:ln/>
         </p:spPr>
@@ -12680,16 +12839,16 @@
         </p:nvSpPr>
         <p:spPr>
           <a:xfrm>
-            <a:off x="1453896" y="2784348"/>
-            <a:ext cx="113386" cy="198425"/>
-          </a:xfrm>
-          <a:prstGeom prst="rect">
-            <a:avLst/>
+            <a:off x="1482440" y="2310268"/>
+            <a:ext cx="892220" cy="97768"/>
+          </a:xfrm>
+          <a:prstGeom prst="roundRect">
+            <a:avLst>
+              <a:gd name="adj" fmla="val 50000"/>
+            </a:avLst>
           </a:prstGeom>
           <a:solidFill>
-            <a:srgbClr val="4FA8FF">
-              <a:alpha val="70000"/>
-            </a:srgbClr>
+            <a:srgbClr val="1F4E79"/>
           </a:solidFill>
           <a:ln/>
         </p:spPr>
@@ -12702,16 +12861,16 @@
         </p:nvSpPr>
         <p:spPr>
           <a:xfrm>
-            <a:off x="1113739" y="2075688"/>
-            <a:ext cx="198425" cy="113386"/>
-          </a:xfrm>
-          <a:prstGeom prst="rect">
-            <a:avLst/>
+            <a:off x="940735" y="2799106"/>
+            <a:ext cx="1593251" cy="97768"/>
+          </a:xfrm>
+          <a:prstGeom prst="roundRect">
+            <a:avLst>
+              <a:gd name="adj" fmla="val 50000"/>
+            </a:avLst>
           </a:prstGeom>
           <a:solidFill>
-            <a:srgbClr val="4FA8FF">
-              <a:alpha val="70000"/>
-            </a:srgbClr>
+            <a:srgbClr val="D5DEE6"/>
           </a:solidFill>
           <a:ln/>
         </p:spPr>
@@ -12724,199 +12883,23 @@
         </p:nvSpPr>
         <p:spPr>
           <a:xfrm>
-            <a:off x="2162556" y="2075688"/>
-            <a:ext cx="198425" cy="113386"/>
-          </a:xfrm>
-          <a:prstGeom prst="rect">
-            <a:avLst/>
+            <a:off x="1100060" y="2799106"/>
+            <a:ext cx="828490" cy="97768"/>
+          </a:xfrm>
+          <a:prstGeom prst="roundRect">
+            <a:avLst>
+              <a:gd name="adj" fmla="val 50000"/>
+            </a:avLst>
           </a:prstGeom>
           <a:solidFill>
-            <a:srgbClr val="4FA8FF">
-              <a:alpha val="70000"/>
-            </a:srgbClr>
+            <a:srgbClr val="1F4E79"/>
           </a:solidFill>
           <a:ln/>
         </p:spPr>
       </p:sp>
       <p:sp>
         <p:nvSpPr>
-          <p:cNvPr id="10" name="Shape 8"/>
-          <p:cNvSpPr/>
-          <p:nvPr/>
-        </p:nvSpPr>
-        <p:spPr>
-          <a:xfrm>
-            <a:off x="1680667" y="1735531"/>
-            <a:ext cx="113386" cy="198425"/>
-          </a:xfrm>
-          <a:prstGeom prst="rect">
-            <a:avLst/>
-          </a:prstGeom>
-          <a:solidFill>
-            <a:srgbClr val="4FA8FF">
-              <a:alpha val="70000"/>
-            </a:srgbClr>
-          </a:solidFill>
-          <a:ln/>
-        </p:spPr>
-      </p:sp>
-      <p:sp>
-        <p:nvSpPr>
-          <p:cNvPr id="11" name="Shape 9"/>
-          <p:cNvSpPr/>
-          <p:nvPr/>
-        </p:nvSpPr>
-        <p:spPr>
-          <a:xfrm>
-            <a:off x="1680667" y="2784348"/>
-            <a:ext cx="113386" cy="198425"/>
-          </a:xfrm>
-          <a:prstGeom prst="rect">
-            <a:avLst/>
-          </a:prstGeom>
-          <a:solidFill>
-            <a:srgbClr val="4FA8FF">
-              <a:alpha val="70000"/>
-            </a:srgbClr>
-          </a:solidFill>
-          <a:ln/>
-        </p:spPr>
-      </p:sp>
-      <p:sp>
-        <p:nvSpPr>
-          <p:cNvPr id="12" name="Shape 10"/>
-          <p:cNvSpPr/>
-          <p:nvPr/>
-        </p:nvSpPr>
-        <p:spPr>
-          <a:xfrm>
-            <a:off x="1113739" y="2302459"/>
-            <a:ext cx="198425" cy="113386"/>
-          </a:xfrm>
-          <a:prstGeom prst="rect">
-            <a:avLst/>
-          </a:prstGeom>
-          <a:solidFill>
-            <a:srgbClr val="4FA8FF">
-              <a:alpha val="70000"/>
-            </a:srgbClr>
-          </a:solidFill>
-          <a:ln/>
-        </p:spPr>
-      </p:sp>
-      <p:sp>
-        <p:nvSpPr>
-          <p:cNvPr id="13" name="Shape 11"/>
-          <p:cNvSpPr/>
-          <p:nvPr/>
-        </p:nvSpPr>
-        <p:spPr>
-          <a:xfrm>
-            <a:off x="2162556" y="2302459"/>
-            <a:ext cx="198425" cy="113386"/>
-          </a:xfrm>
-          <a:prstGeom prst="rect">
-            <a:avLst/>
-          </a:prstGeom>
-          <a:solidFill>
-            <a:srgbClr val="4FA8FF">
-              <a:alpha val="70000"/>
-            </a:srgbClr>
-          </a:solidFill>
-          <a:ln/>
-        </p:spPr>
-      </p:sp>
-      <p:sp>
-        <p:nvSpPr>
-          <p:cNvPr id="14" name="Shape 12"/>
-          <p:cNvSpPr/>
-          <p:nvPr/>
-        </p:nvSpPr>
-        <p:spPr>
-          <a:xfrm>
-            <a:off x="1907438" y="1735531"/>
-            <a:ext cx="113386" cy="198425"/>
-          </a:xfrm>
-          <a:prstGeom prst="rect">
-            <a:avLst/>
-          </a:prstGeom>
-          <a:solidFill>
-            <a:srgbClr val="4FA8FF">
-              <a:alpha val="70000"/>
-            </a:srgbClr>
-          </a:solidFill>
-          <a:ln/>
-        </p:spPr>
-      </p:sp>
-      <p:sp>
-        <p:nvSpPr>
-          <p:cNvPr id="15" name="Shape 13"/>
-          <p:cNvSpPr/>
-          <p:nvPr/>
-        </p:nvSpPr>
-        <p:spPr>
-          <a:xfrm>
-            <a:off x="1907438" y="2784348"/>
-            <a:ext cx="113386" cy="198425"/>
-          </a:xfrm>
-          <a:prstGeom prst="rect">
-            <a:avLst/>
-          </a:prstGeom>
-          <a:solidFill>
-            <a:srgbClr val="4FA8FF">
-              <a:alpha val="70000"/>
-            </a:srgbClr>
-          </a:solidFill>
-          <a:ln/>
-        </p:spPr>
-      </p:sp>
-      <p:sp>
-        <p:nvSpPr>
-          <p:cNvPr id="16" name="Shape 14"/>
-          <p:cNvSpPr/>
-          <p:nvPr/>
-        </p:nvSpPr>
-        <p:spPr>
-          <a:xfrm>
-            <a:off x="1113739" y="2529230"/>
-            <a:ext cx="198425" cy="113386"/>
-          </a:xfrm>
-          <a:prstGeom prst="rect">
-            <a:avLst/>
-          </a:prstGeom>
-          <a:solidFill>
-            <a:srgbClr val="4FA8FF">
-              <a:alpha val="70000"/>
-            </a:srgbClr>
-          </a:solidFill>
-          <a:ln/>
-        </p:spPr>
-      </p:sp>
-      <p:sp>
-        <p:nvSpPr>
-          <p:cNvPr id="17" name="Shape 15"/>
-          <p:cNvSpPr/>
-          <p:nvPr/>
-        </p:nvSpPr>
-        <p:spPr>
-          <a:xfrm>
-            <a:off x="2162556" y="2529230"/>
-            <a:ext cx="198425" cy="113386"/>
-          </a:xfrm>
-          <a:prstGeom prst="rect">
-            <a:avLst/>
-          </a:prstGeom>
-          <a:solidFill>
-            <a:srgbClr val="4FA8FF">
-              <a:alpha val="70000"/>
-            </a:srgbClr>
-          </a:solidFill>
-          <a:ln/>
-        </p:spPr>
-      </p:sp>
-      <p:sp>
-        <p:nvSpPr>
-          <p:cNvPr id="18" name="Text 16"/>
+          <p:cNvPr id="10" name="Text 8"/>
           <p:cNvSpPr txBox="1"/>
           <p:nvPr/>
         </p:nvSpPr>
@@ -12978,7 +12961,7 @@
       </p:sp>
       <p:sp>
         <p:nvSpPr>
-          <p:cNvPr id="19" name="Text 17"/>
+          <p:cNvPr id="11" name="Text 9"/>
           <p:cNvSpPr txBox="1"/>
           <p:nvPr/>
         </p:nvSpPr>
@@ -13040,7 +13023,7 @@
       </p:sp>
       <p:sp>
         <p:nvSpPr>
-          <p:cNvPr id="20" name="Shape 18"/>
+          <p:cNvPr id="12" name="Shape 10"/>
           <p:cNvSpPr/>
           <p:nvPr/>
         </p:nvSpPr>
@@ -13067,7 +13050,7 @@
       </p:sp>
       <p:sp>
         <p:nvSpPr>
-          <p:cNvPr id="21" name="Text 19"/>
+          <p:cNvPr id="13" name="Text 11"/>
           <p:cNvSpPr txBox="1"/>
           <p:nvPr/>
         </p:nvSpPr>
@@ -13129,7 +13112,7 @@
       </p:sp>
       <p:pic>
         <p:nvPicPr>
-          <p:cNvPr id="23" name="Image 0" descr="/Users/tsengchenghsun/Class/carClass/Claude outputs/第四週(10-1)/src/logo.png">    </p:cNvPr>
+          <p:cNvPr id="15" name="Image 0" descr="/Users/tsengchenghsun/Class/carClass/Claude outputs/第四週(10-1)/src/logo.png">    </p:cNvPr>
           <p:cNvPicPr>
             <a:picLocks noChangeAspect="1"/>
           </p:cNvPicPr>
@@ -13153,7 +13136,7 @@
       </p:pic>
       <p:sp>
         <p:nvSpPr>
-          <p:cNvPr id="24" name="Text 20"/>
+          <p:cNvPr id="16" name="Text 12"/>
           <p:cNvSpPr txBox="1"/>
           <p:nvPr/>
         </p:nvSpPr>
@@ -13192,7 +13175,7 @@
       </p:sp>
       <p:sp>
         <p:nvSpPr>
-          <p:cNvPr id="25" name="Text 21"/>
+          <p:cNvPr id="17" name="Text 13"/>
           <p:cNvSpPr txBox="1"/>
           <p:nvPr/>
         </p:nvSpPr>
@@ -13327,15 +13310,17 @@
           <p:nvPr/>
         </p:nvSpPr>
         <p:spPr>
-          <a:xfrm rot="3000000">
-            <a:off x="1170432" y="2444191"/>
-            <a:ext cx="481889" cy="184252"/>
-          </a:xfrm>
-          <a:prstGeom prst="rect">
-            <a:avLst/>
+          <a:xfrm>
+            <a:off x="940735" y="1821430"/>
+            <a:ext cx="1593251" cy="97768"/>
+          </a:xfrm>
+          <a:prstGeom prst="roundRect">
+            <a:avLst>
+              <a:gd name="adj" fmla="val 50000"/>
+            </a:avLst>
           </a:prstGeom>
           <a:solidFill>
-            <a:srgbClr val="FFB020"/>
+            <a:srgbClr val="D5DEE6"/>
           </a:solidFill>
           <a:ln/>
         </p:spPr>
@@ -13347,22 +13332,106 @@
           <p:nvPr/>
         </p:nvSpPr>
         <p:spPr>
-          <a:xfrm rot="-2520000">
-            <a:off x="1453896" y="2274113"/>
-            <a:ext cx="878738" cy="184252"/>
-          </a:xfrm>
-          <a:prstGeom prst="rect">
+          <a:xfrm>
+            <a:off x="1525464" y="1785878"/>
+            <a:ext cx="168871" cy="168871"/>
+          </a:xfrm>
+          <a:prstGeom prst="ellipse">
             <a:avLst/>
           </a:prstGeom>
           <a:solidFill>
-            <a:srgbClr val="FFB020"/>
+            <a:srgbClr val="8A5A00"/>
           </a:solidFill>
           <a:ln/>
         </p:spPr>
       </p:sp>
       <p:sp>
         <p:nvSpPr>
-          <p:cNvPr id="6" name="Text 4"/>
+          <p:cNvPr id="6" name="Shape 4"/>
+          <p:cNvSpPr/>
+          <p:nvPr/>
+        </p:nvSpPr>
+        <p:spPr>
+          <a:xfrm>
+            <a:off x="940735" y="2310268"/>
+            <a:ext cx="1593251" cy="97768"/>
+          </a:xfrm>
+          <a:prstGeom prst="roundRect">
+            <a:avLst>
+              <a:gd name="adj" fmla="val 50000"/>
+            </a:avLst>
+          </a:prstGeom>
+          <a:solidFill>
+            <a:srgbClr val="D5DEE6"/>
+          </a:solidFill>
+          <a:ln/>
+        </p:spPr>
+      </p:sp>
+      <p:sp>
+        <p:nvSpPr>
+          <p:cNvPr id="7" name="Shape 5"/>
+          <p:cNvSpPr/>
+          <p:nvPr/>
+        </p:nvSpPr>
+        <p:spPr>
+          <a:xfrm>
+            <a:off x="1907844" y="2274716"/>
+            <a:ext cx="168871" cy="168871"/>
+          </a:xfrm>
+          <a:prstGeom prst="ellipse">
+            <a:avLst/>
+          </a:prstGeom>
+          <a:solidFill>
+            <a:srgbClr val="8A5A00"/>
+          </a:solidFill>
+          <a:ln/>
+        </p:spPr>
+      </p:sp>
+      <p:sp>
+        <p:nvSpPr>
+          <p:cNvPr id="8" name="Shape 6"/>
+          <p:cNvSpPr/>
+          <p:nvPr/>
+        </p:nvSpPr>
+        <p:spPr>
+          <a:xfrm>
+            <a:off x="940735" y="2799106"/>
+            <a:ext cx="1593251" cy="97768"/>
+          </a:xfrm>
+          <a:prstGeom prst="roundRect">
+            <a:avLst>
+              <a:gd name="adj" fmla="val 50000"/>
+            </a:avLst>
+          </a:prstGeom>
+          <a:solidFill>
+            <a:srgbClr val="D5DEE6"/>
+          </a:solidFill>
+          <a:ln/>
+        </p:spPr>
+      </p:sp>
+      <p:sp>
+        <p:nvSpPr>
+          <p:cNvPr id="9" name="Shape 7"/>
+          <p:cNvSpPr/>
+          <p:nvPr/>
+        </p:nvSpPr>
+        <p:spPr>
+          <a:xfrm>
+            <a:off x="1334274" y="2763555"/>
+            <a:ext cx="168871" cy="168871"/>
+          </a:xfrm>
+          <a:prstGeom prst="ellipse">
+            <a:avLst/>
+          </a:prstGeom>
+          <a:solidFill>
+            <a:srgbClr val="8A5A00"/>
+          </a:solidFill>
+          <a:ln/>
+        </p:spPr>
+      </p:sp>
+      <p:sp>
+        <p:nvSpPr>
+          <p:cNvPr id="10" name="Text 8"/>
           <p:cNvSpPr txBox="1"/>
           <p:nvPr/>
         </p:nvSpPr>
@@ -13424,7 +13493,7 @@
       </p:sp>
       <p:sp>
         <p:nvSpPr>
-          <p:cNvPr id="7" name="Text 5"/>
+          <p:cNvPr id="11" name="Text 9"/>
           <p:cNvSpPr txBox="1"/>
           <p:nvPr/>
         </p:nvSpPr>
@@ -13486,7 +13555,7 @@
       </p:sp>
       <p:sp>
         <p:nvSpPr>
-          <p:cNvPr id="8" name="Shape 6"/>
+          <p:cNvPr id="12" name="Shape 10"/>
           <p:cNvSpPr/>
           <p:nvPr/>
         </p:nvSpPr>
@@ -13513,7 +13582,7 @@
       </p:sp>
       <p:sp>
         <p:nvSpPr>
-          <p:cNvPr id="9" name="Text 7"/>
+          <p:cNvPr id="13" name="Text 11"/>
           <p:cNvSpPr txBox="1"/>
           <p:nvPr/>
         </p:nvSpPr>
@@ -13575,7 +13644,7 @@
       </p:sp>
       <p:pic>
         <p:nvPicPr>
-          <p:cNvPr id="11" name="Image 0" descr="/Users/tsengchenghsun/Class/carClass/Claude outputs/第四週(10-1)/src/logo.png">    </p:cNvPr>
+          <p:cNvPr id="15" name="Image 0" descr="/Users/tsengchenghsun/Class/carClass/Claude outputs/第四週(10-1)/src/logo.png">    </p:cNvPr>
           <p:cNvPicPr>
             <a:picLocks noChangeAspect="1"/>
           </p:cNvPicPr>
@@ -13599,7 +13668,7 @@
       </p:pic>
       <p:sp>
         <p:nvSpPr>
-          <p:cNvPr id="12" name="Text 8"/>
+          <p:cNvPr id="16" name="Text 12"/>
           <p:cNvSpPr txBox="1"/>
           <p:nvPr/>
         </p:nvSpPr>
@@ -13638,7 +13707,7 @@
       </p:sp>
       <p:sp>
         <p:nvSpPr>
-          <p:cNvPr id="13" name="Text 9"/>
+          <p:cNvPr id="17" name="Text 13"/>
           <p:cNvSpPr txBox="1"/>
           <p:nvPr/>
         </p:nvSpPr>
@@ -13774,16 +13843,16 @@
         </p:nvSpPr>
         <p:spPr>
           <a:xfrm>
-            <a:off x="1312164" y="1933956"/>
-            <a:ext cx="850392" cy="850392"/>
+            <a:off x="940735" y="1821430"/>
+            <a:ext cx="1593251" cy="97768"/>
           </a:xfrm>
           <a:prstGeom prst="roundRect">
             <a:avLst>
-              <a:gd name="adj" fmla="val 12903"/>
+              <a:gd name="adj" fmla="val 50000"/>
             </a:avLst>
           </a:prstGeom>
           <a:solidFill>
-            <a:srgbClr val="00A896"/>
+            <a:srgbClr val="D5DEE6"/>
           </a:solidFill>
           <a:ln/>
         </p:spPr>
@@ -13796,106 +13865,96 @@
         </p:nvSpPr>
         <p:spPr>
           <a:xfrm>
-            <a:off x="1510589" y="2132381"/>
-            <a:ext cx="453542" cy="453542"/>
+            <a:off x="1192725" y="1803654"/>
+            <a:ext cx="133320" cy="133320"/>
+          </a:xfrm>
+          <a:prstGeom prst="ellipse">
+            <a:avLst/>
+          </a:prstGeom>
+          <a:solidFill>
+            <a:srgbClr val="1F6F5C"/>
+          </a:solidFill>
+          <a:ln/>
+        </p:spPr>
+      </p:sp>
+      <p:sp>
+        <p:nvSpPr>
+          <p:cNvPr id="6" name="Shape 4"/>
+          <p:cNvSpPr/>
+          <p:nvPr/>
+        </p:nvSpPr>
+        <p:spPr>
+          <a:xfrm>
+            <a:off x="1447645" y="1803654"/>
+            <a:ext cx="133320" cy="133320"/>
+          </a:xfrm>
+          <a:prstGeom prst="ellipse">
+            <a:avLst/>
+          </a:prstGeom>
+          <a:solidFill>
+            <a:srgbClr val="1F6F5C"/>
+          </a:solidFill>
+          <a:ln/>
+        </p:spPr>
+      </p:sp>
+      <p:sp>
+        <p:nvSpPr>
+          <p:cNvPr id="7" name="Shape 5"/>
+          <p:cNvSpPr/>
+          <p:nvPr/>
+        </p:nvSpPr>
+        <p:spPr>
+          <a:xfrm>
+            <a:off x="1702565" y="1803654"/>
+            <a:ext cx="133320" cy="133320"/>
+          </a:xfrm>
+          <a:prstGeom prst="ellipse">
+            <a:avLst/>
+          </a:prstGeom>
+          <a:solidFill>
+            <a:srgbClr val="1F6F5C"/>
+          </a:solidFill>
+          <a:ln/>
+        </p:spPr>
+      </p:sp>
+      <p:sp>
+        <p:nvSpPr>
+          <p:cNvPr id="8" name="Shape 6"/>
+          <p:cNvSpPr/>
+          <p:nvPr/>
+        </p:nvSpPr>
+        <p:spPr>
+          <a:xfrm>
+            <a:off x="1957485" y="1803654"/>
+            <a:ext cx="133320" cy="133320"/>
+          </a:xfrm>
+          <a:prstGeom prst="ellipse">
+            <a:avLst/>
+          </a:prstGeom>
+          <a:solidFill>
+            <a:srgbClr val="1F6F5C"/>
+          </a:solidFill>
+          <a:ln/>
+        </p:spPr>
+      </p:sp>
+      <p:sp>
+        <p:nvSpPr>
+          <p:cNvPr id="9" name="Shape 7"/>
+          <p:cNvSpPr/>
+          <p:nvPr/>
+        </p:nvSpPr>
+        <p:spPr>
+          <a:xfrm>
+            <a:off x="940735" y="2310268"/>
+            <a:ext cx="1593251" cy="97768"/>
           </a:xfrm>
           <a:prstGeom prst="roundRect">
             <a:avLst>
-              <a:gd name="adj" fmla="val 20161"/>
+              <a:gd name="adj" fmla="val 50000"/>
             </a:avLst>
           </a:prstGeom>
           <a:solidFill>
-            <a:srgbClr val="FFFFFF">
-              <a:alpha val="75000"/>
-            </a:srgbClr>
-          </a:solidFill>
-          <a:ln/>
-        </p:spPr>
-      </p:sp>
-      <p:sp>
-        <p:nvSpPr>
-          <p:cNvPr id="6" name="Shape 4"/>
-          <p:cNvSpPr/>
-          <p:nvPr/>
-        </p:nvSpPr>
-        <p:spPr>
-          <a:xfrm>
-            <a:off x="1453896" y="1735531"/>
-            <a:ext cx="113386" cy="198425"/>
-          </a:xfrm>
-          <a:prstGeom prst="rect">
-            <a:avLst/>
-          </a:prstGeom>
-          <a:solidFill>
-            <a:srgbClr val="00A896">
-              <a:alpha val="70000"/>
-            </a:srgbClr>
-          </a:solidFill>
-          <a:ln/>
-        </p:spPr>
-      </p:sp>
-      <p:sp>
-        <p:nvSpPr>
-          <p:cNvPr id="7" name="Shape 5"/>
-          <p:cNvSpPr/>
-          <p:nvPr/>
-        </p:nvSpPr>
-        <p:spPr>
-          <a:xfrm>
-            <a:off x="1453896" y="2784348"/>
-            <a:ext cx="113386" cy="198425"/>
-          </a:xfrm>
-          <a:prstGeom prst="rect">
-            <a:avLst/>
-          </a:prstGeom>
-          <a:solidFill>
-            <a:srgbClr val="00A896">
-              <a:alpha val="70000"/>
-            </a:srgbClr>
-          </a:solidFill>
-          <a:ln/>
-        </p:spPr>
-      </p:sp>
-      <p:sp>
-        <p:nvSpPr>
-          <p:cNvPr id="8" name="Shape 6"/>
-          <p:cNvSpPr/>
-          <p:nvPr/>
-        </p:nvSpPr>
-        <p:spPr>
-          <a:xfrm>
-            <a:off x="1113739" y="2075688"/>
-            <a:ext cx="198425" cy="113386"/>
-          </a:xfrm>
-          <a:prstGeom prst="rect">
-            <a:avLst/>
-          </a:prstGeom>
-          <a:solidFill>
-            <a:srgbClr val="00A896">
-              <a:alpha val="70000"/>
-            </a:srgbClr>
-          </a:solidFill>
-          <a:ln/>
-        </p:spPr>
-      </p:sp>
-      <p:sp>
-        <p:nvSpPr>
-          <p:cNvPr id="9" name="Shape 7"/>
-          <p:cNvSpPr/>
-          <p:nvPr/>
-        </p:nvSpPr>
-        <p:spPr>
-          <a:xfrm>
-            <a:off x="2162556" y="2075688"/>
-            <a:ext cx="198425" cy="113386"/>
-          </a:xfrm>
-          <a:prstGeom prst="rect">
-            <a:avLst/>
-          </a:prstGeom>
-          <a:solidFill>
-            <a:srgbClr val="00A896">
-              <a:alpha val="70000"/>
-            </a:srgbClr>
+            <a:srgbClr val="D5DEE6"/>
           </a:solidFill>
           <a:ln/>
         </p:spPr>
@@ -13908,16 +13967,14 @@
         </p:nvSpPr>
         <p:spPr>
           <a:xfrm>
-            <a:off x="1680667" y="1735531"/>
-            <a:ext cx="113386" cy="198425"/>
-          </a:xfrm>
-          <a:prstGeom prst="rect">
+            <a:off x="1192725" y="2292492"/>
+            <a:ext cx="133320" cy="133320"/>
+          </a:xfrm>
+          <a:prstGeom prst="ellipse">
             <a:avLst/>
           </a:prstGeom>
           <a:solidFill>
-            <a:srgbClr val="00A896">
-              <a:alpha val="70000"/>
-            </a:srgbClr>
+            <a:srgbClr val="1F6F5C"/>
           </a:solidFill>
           <a:ln/>
         </p:spPr>
@@ -13930,16 +13987,14 @@
         </p:nvSpPr>
         <p:spPr>
           <a:xfrm>
-            <a:off x="1680667" y="2784348"/>
-            <a:ext cx="113386" cy="198425"/>
-          </a:xfrm>
-          <a:prstGeom prst="rect">
+            <a:off x="1447645" y="2292492"/>
+            <a:ext cx="133320" cy="133320"/>
+          </a:xfrm>
+          <a:prstGeom prst="ellipse">
             <a:avLst/>
           </a:prstGeom>
           <a:solidFill>
-            <a:srgbClr val="00A896">
-              <a:alpha val="70000"/>
-            </a:srgbClr>
+            <a:srgbClr val="1F6F5C"/>
           </a:solidFill>
           <a:ln/>
         </p:spPr>
@@ -13952,16 +14007,14 @@
         </p:nvSpPr>
         <p:spPr>
           <a:xfrm>
-            <a:off x="1113739" y="2302459"/>
-            <a:ext cx="198425" cy="113386"/>
-          </a:xfrm>
-          <a:prstGeom prst="rect">
+            <a:off x="1702565" y="2292492"/>
+            <a:ext cx="133320" cy="133320"/>
+          </a:xfrm>
+          <a:prstGeom prst="ellipse">
             <a:avLst/>
           </a:prstGeom>
           <a:solidFill>
-            <a:srgbClr val="00A896">
-              <a:alpha val="70000"/>
-            </a:srgbClr>
+            <a:srgbClr val="1F6F5C"/>
           </a:solidFill>
           <a:ln/>
         </p:spPr>
@@ -13974,16 +14027,14 @@
         </p:nvSpPr>
         <p:spPr>
           <a:xfrm>
-            <a:off x="2162556" y="2302459"/>
-            <a:ext cx="198425" cy="113386"/>
-          </a:xfrm>
-          <a:prstGeom prst="rect">
+            <a:off x="1957485" y="2292492"/>
+            <a:ext cx="133320" cy="133320"/>
+          </a:xfrm>
+          <a:prstGeom prst="ellipse">
             <a:avLst/>
           </a:prstGeom>
           <a:solidFill>
-            <a:srgbClr val="00A896">
-              <a:alpha val="70000"/>
-            </a:srgbClr>
+            <a:srgbClr val="D9463E"/>
           </a:solidFill>
           <a:ln/>
         </p:spPr>
@@ -13996,18 +14047,20 @@
         </p:nvSpPr>
         <p:spPr>
           <a:xfrm>
-            <a:off x="1907438" y="1735531"/>
-            <a:ext cx="113386" cy="198425"/>
-          </a:xfrm>
-          <a:prstGeom prst="rect">
-            <a:avLst/>
-          </a:prstGeom>
-          <a:solidFill>
-            <a:srgbClr val="00A896">
-              <a:alpha val="70000"/>
-            </a:srgbClr>
-          </a:solidFill>
-          <a:ln/>
+            <a:off x="2119740" y="2359152"/>
+            <a:ext cx="286785" cy="0"/>
+          </a:xfrm>
+          <a:prstGeom prst="line">
+            <a:avLst/>
+          </a:prstGeom>
+          <a:noFill/>
+          <a:ln w="20320">
+            <a:solidFill>
+              <a:srgbClr val="D9463E"/>
+            </a:solidFill>
+            <a:prstDash val="solid"/>
+            <a:tailEnd type="triangle"/>
+          </a:ln>
         </p:spPr>
       </p:sp>
       <p:sp>
@@ -14018,16 +14071,16 @@
         </p:nvSpPr>
         <p:spPr>
           <a:xfrm>
-            <a:off x="1907438" y="2784348"/>
-            <a:ext cx="113386" cy="198425"/>
-          </a:xfrm>
-          <a:prstGeom prst="rect">
-            <a:avLst/>
+            <a:off x="940735" y="2799106"/>
+            <a:ext cx="1593251" cy="97768"/>
+          </a:xfrm>
+          <a:prstGeom prst="roundRect">
+            <a:avLst>
+              <a:gd name="adj" fmla="val 50000"/>
+            </a:avLst>
           </a:prstGeom>
           <a:solidFill>
-            <a:srgbClr val="00A896">
-              <a:alpha val="70000"/>
-            </a:srgbClr>
+            <a:srgbClr val="D5DEE6"/>
           </a:solidFill>
           <a:ln/>
         </p:spPr>
@@ -14040,16 +14093,14 @@
         </p:nvSpPr>
         <p:spPr>
           <a:xfrm>
-            <a:off x="1113739" y="2529230"/>
-            <a:ext cx="198425" cy="113386"/>
-          </a:xfrm>
-          <a:prstGeom prst="rect">
+            <a:off x="1192725" y="2781330"/>
+            <a:ext cx="133320" cy="133320"/>
+          </a:xfrm>
+          <a:prstGeom prst="ellipse">
             <a:avLst/>
           </a:prstGeom>
           <a:solidFill>
-            <a:srgbClr val="00A896">
-              <a:alpha val="70000"/>
-            </a:srgbClr>
+            <a:srgbClr val="1F6F5C"/>
           </a:solidFill>
           <a:ln/>
         </p:spPr>
@@ -14062,23 +14113,61 @@
         </p:nvSpPr>
         <p:spPr>
           <a:xfrm>
-            <a:off x="2162556" y="2529230"/>
-            <a:ext cx="198425" cy="113386"/>
-          </a:xfrm>
-          <a:prstGeom prst="rect">
+            <a:off x="1447645" y="2781330"/>
+            <a:ext cx="133320" cy="133320"/>
+          </a:xfrm>
+          <a:prstGeom prst="ellipse">
             <a:avLst/>
           </a:prstGeom>
           <a:solidFill>
-            <a:srgbClr val="00A896">
-              <a:alpha val="70000"/>
-            </a:srgbClr>
+            <a:srgbClr val="1F6F5C"/>
           </a:solidFill>
           <a:ln/>
         </p:spPr>
       </p:sp>
       <p:sp>
         <p:nvSpPr>
-          <p:cNvPr id="18" name="Text 16"/>
+          <p:cNvPr id="18" name="Shape 16"/>
+          <p:cNvSpPr/>
+          <p:nvPr/>
+        </p:nvSpPr>
+        <p:spPr>
+          <a:xfrm>
+            <a:off x="1702565" y="2781330"/>
+            <a:ext cx="133320" cy="133320"/>
+          </a:xfrm>
+          <a:prstGeom prst="ellipse">
+            <a:avLst/>
+          </a:prstGeom>
+          <a:solidFill>
+            <a:srgbClr val="1F6F5C"/>
+          </a:solidFill>
+          <a:ln/>
+        </p:spPr>
+      </p:sp>
+      <p:sp>
+        <p:nvSpPr>
+          <p:cNvPr id="19" name="Shape 17"/>
+          <p:cNvSpPr/>
+          <p:nvPr/>
+        </p:nvSpPr>
+        <p:spPr>
+          <a:xfrm>
+            <a:off x="1957485" y="2781330"/>
+            <a:ext cx="133320" cy="133320"/>
+          </a:xfrm>
+          <a:prstGeom prst="ellipse">
+            <a:avLst/>
+          </a:prstGeom>
+          <a:solidFill>
+            <a:srgbClr val="1F6F5C"/>
+          </a:solidFill>
+          <a:ln/>
+        </p:spPr>
+      </p:sp>
+      <p:sp>
+        <p:nvSpPr>
+          <p:cNvPr id="20" name="Text 18"/>
           <p:cNvSpPr txBox="1"/>
           <p:nvPr/>
         </p:nvSpPr>
@@ -14140,7 +14229,7 @@
       </p:sp>
       <p:sp>
         <p:nvSpPr>
-          <p:cNvPr id="19" name="Text 17"/>
+          <p:cNvPr id="21" name="Text 19"/>
           <p:cNvSpPr txBox="1"/>
           <p:nvPr/>
         </p:nvSpPr>
@@ -14202,7 +14291,7 @@
       </p:sp>
       <p:sp>
         <p:nvSpPr>
-          <p:cNvPr id="20" name="Shape 18"/>
+          <p:cNvPr id="22" name="Shape 20"/>
           <p:cNvSpPr/>
           <p:nvPr/>
         </p:nvSpPr>
@@ -14229,7 +14318,7 @@
       </p:sp>
       <p:sp>
         <p:nvSpPr>
-          <p:cNvPr id="21" name="Text 19"/>
+          <p:cNvPr id="23" name="Text 21"/>
           <p:cNvSpPr txBox="1"/>
           <p:nvPr/>
         </p:nvSpPr>
@@ -14291,7 +14380,7 @@
       </p:sp>
       <p:pic>
         <p:nvPicPr>
-          <p:cNvPr id="23" name="Image 0" descr="/Users/tsengchenghsun/Class/carClass/Claude outputs/第四週(10-1)/src/logo.png">    </p:cNvPr>
+          <p:cNvPr id="25" name="Image 0" descr="/Users/tsengchenghsun/Class/carClass/Claude outputs/第四週(10-1)/src/logo.png">    </p:cNvPr>
           <p:cNvPicPr>
             <a:picLocks noChangeAspect="1"/>
           </p:cNvPicPr>
@@ -14315,7 +14404,7 @@
       </p:pic>
       <p:sp>
         <p:nvSpPr>
-          <p:cNvPr id="24" name="Text 20"/>
+          <p:cNvPr id="26" name="Text 22"/>
           <p:cNvSpPr txBox="1"/>
           <p:nvPr/>
         </p:nvSpPr>
@@ -14354,7 +14443,7 @@
       </p:sp>
       <p:sp>
         <p:nvSpPr>
-          <p:cNvPr id="25" name="Text 21"/>
+          <p:cNvPr id="27" name="Text 23"/>
           <p:cNvSpPr txBox="1"/>
           <p:nvPr/>
         </p:nvSpPr>
@@ -15612,38 +15701,39 @@
         </p:nvSpPr>
         <p:spPr>
           <a:xfrm>
-            <a:off x="1352398" y="2335378"/>
-            <a:ext cx="925373" cy="281635"/>
+            <a:off x="999622" y="2714671"/>
+            <a:ext cx="2911084" cy="0"/>
+          </a:xfrm>
+          <a:prstGeom prst="line">
+            <a:avLst/>
+          </a:prstGeom>
+          <a:noFill/>
+          <a:ln w="15240">
+            <a:solidFill>
+              <a:srgbClr val="9AA6B0"/>
+            </a:solidFill>
+            <a:prstDash val="solid"/>
+          </a:ln>
+        </p:spPr>
+      </p:sp>
+      <p:sp>
+        <p:nvSpPr>
+          <p:cNvPr id="6" name="Shape 4"/>
+          <p:cNvSpPr/>
+          <p:nvPr/>
+        </p:nvSpPr>
+        <p:spPr>
+          <a:xfrm>
+            <a:off x="1103589" y="2251701"/>
+            <a:ext cx="1039673" cy="478249"/>
           </a:xfrm>
           <a:prstGeom prst="roundRect">
             <a:avLst>
-              <a:gd name="adj" fmla="val 97403"/>
+              <a:gd name="adj" fmla="val 22000"/>
             </a:avLst>
           </a:prstGeom>
           <a:solidFill>
-            <a:srgbClr val="0B1F3A"/>
-          </a:solidFill>
-          <a:ln/>
-        </p:spPr>
-      </p:sp>
-      <p:sp>
-        <p:nvSpPr>
-          <p:cNvPr id="6" name="Shape 4"/>
-          <p:cNvSpPr/>
-          <p:nvPr/>
-        </p:nvSpPr>
-        <p:spPr>
-          <a:xfrm>
-            <a:off x="1553566" y="2134210"/>
-            <a:ext cx="502920" cy="221285"/>
-          </a:xfrm>
-          <a:prstGeom prst="trapezoid">
-            <a:avLst/>
-          </a:prstGeom>
-          <a:solidFill>
-            <a:srgbClr val="0B1F3A">
-              <a:alpha val="70000"/>
-            </a:srgbClr>
+            <a:srgbClr val="8FA3B5"/>
           </a:solidFill>
           <a:ln/>
         </p:spPr>
@@ -15656,51 +15746,13 @@
         </p:nvSpPr>
         <p:spPr>
           <a:xfrm>
-            <a:off x="1473098" y="2556662"/>
-            <a:ext cx="201168" cy="201168"/>
-          </a:xfrm>
-          <a:prstGeom prst="ellipse">
-            <a:avLst/>
-          </a:prstGeom>
-          <a:solidFill>
-            <a:srgbClr val="0B1F3A"/>
-          </a:solidFill>
-          <a:ln/>
-        </p:spPr>
-      </p:sp>
-      <p:sp>
-        <p:nvSpPr>
-          <p:cNvPr id="8" name="Shape 6"/>
-          <p:cNvSpPr/>
-          <p:nvPr/>
-        </p:nvSpPr>
-        <p:spPr>
-          <a:xfrm>
-            <a:off x="1955902" y="2556662"/>
-            <a:ext cx="201168" cy="201168"/>
-          </a:xfrm>
-          <a:prstGeom prst="ellipse">
-            <a:avLst/>
-          </a:prstGeom>
-          <a:solidFill>
-            <a:srgbClr val="0B1F3A"/>
-          </a:solidFill>
-          <a:ln/>
-        </p:spPr>
-      </p:sp>
-      <p:sp>
-        <p:nvSpPr>
-          <p:cNvPr id="9" name="Shape 7"/>
-          <p:cNvSpPr/>
-          <p:nvPr/>
-        </p:nvSpPr>
-        <p:spPr>
-          <a:xfrm>
-            <a:off x="1523390" y="2606954"/>
-            <a:ext cx="100584" cy="100584"/>
-          </a:xfrm>
-          <a:prstGeom prst="ellipse">
-            <a:avLst/>
+            <a:off x="1498665" y="2347351"/>
+            <a:ext cx="353489" cy="286950"/>
+          </a:xfrm>
+          <a:prstGeom prst="roundRect">
+            <a:avLst>
+              <a:gd name="adj" fmla="val 23333"/>
+            </a:avLst>
           </a:prstGeom>
           <a:solidFill>
             <a:srgbClr val="FFFFFF"/>
@@ -15710,34 +15762,194 @@
       </p:sp>
       <p:sp>
         <p:nvSpPr>
+          <p:cNvPr id="8" name="Shape 6"/>
+          <p:cNvSpPr/>
+          <p:nvPr/>
+        </p:nvSpPr>
+        <p:spPr>
+          <a:xfrm>
+            <a:off x="2247229" y="2490826"/>
+            <a:ext cx="415869" cy="0"/>
+          </a:xfrm>
+          <a:prstGeom prst="line">
+            <a:avLst/>
+          </a:prstGeom>
+          <a:noFill/>
+          <a:ln w="17780">
+            <a:solidFill>
+              <a:srgbClr val="5F7183"/>
+            </a:solidFill>
+            <a:prstDash val="solid"/>
+            <a:tailEnd type="triangle"/>
+          </a:ln>
+        </p:spPr>
+      </p:sp>
+      <p:sp>
+        <p:nvSpPr>
+          <p:cNvPr id="9" name="Shape 7"/>
+          <p:cNvSpPr/>
+          <p:nvPr/>
+        </p:nvSpPr>
+        <p:spPr>
+          <a:xfrm>
+            <a:off x="2705801" y="2453518"/>
+            <a:ext cx="261153" cy="261153"/>
+          </a:xfrm>
+          <a:prstGeom prst="ellipse">
+            <a:avLst/>
+          </a:prstGeom>
+          <a:ln w="20320">
+            <a:solidFill>
+              <a:srgbClr val="1F4E79"/>
+            </a:solidFill>
+            <a:prstDash val="solid"/>
+          </a:ln>
+        </p:spPr>
+      </p:sp>
+      <p:sp>
+        <p:nvSpPr>
           <p:cNvPr id="10" name="Shape 8"/>
           <p:cNvSpPr/>
           <p:nvPr/>
         </p:nvSpPr>
         <p:spPr>
           <a:xfrm>
-            <a:off x="2006194" y="2606954"/>
-            <a:ext cx="100584" cy="100584"/>
+            <a:off x="3190982" y="2453518"/>
+            <a:ext cx="261153" cy="261153"/>
           </a:xfrm>
           <a:prstGeom prst="ellipse">
             <a:avLst/>
           </a:prstGeom>
+          <a:ln w="20320">
+            <a:solidFill>
+              <a:srgbClr val="1F4E79"/>
+            </a:solidFill>
+            <a:prstDash val="solid"/>
+          </a:ln>
+        </p:spPr>
+      </p:sp>
+      <p:sp>
+        <p:nvSpPr>
+          <p:cNvPr id="11" name="Shape 9"/>
+          <p:cNvSpPr/>
+          <p:nvPr/>
+        </p:nvSpPr>
+        <p:spPr>
+          <a:xfrm flipV="1">
+            <a:off x="2836377" y="2434864"/>
+            <a:ext cx="242590" cy="149230"/>
+          </a:xfrm>
+          <a:prstGeom prst="line">
+            <a:avLst/>
+          </a:prstGeom>
+          <a:noFill/>
+          <a:ln w="17780">
+            <a:solidFill>
+              <a:srgbClr val="1F4E79"/>
+            </a:solidFill>
+            <a:prstDash val="solid"/>
+          </a:ln>
+        </p:spPr>
+      </p:sp>
+      <p:sp>
+        <p:nvSpPr>
+          <p:cNvPr id="12" name="Shape 10"/>
+          <p:cNvSpPr/>
+          <p:nvPr/>
+        </p:nvSpPr>
+        <p:spPr>
+          <a:xfrm flipH="1" flipV="1">
+            <a:off x="3078968" y="2434864"/>
+            <a:ext cx="242590" cy="149230"/>
+          </a:xfrm>
+          <a:prstGeom prst="line">
+            <a:avLst/>
+          </a:prstGeom>
+          <a:noFill/>
+          <a:ln w="17780">
+            <a:solidFill>
+              <a:srgbClr val="1F4E79"/>
+            </a:solidFill>
+            <a:prstDash val="solid"/>
+          </a:ln>
+        </p:spPr>
+      </p:sp>
+      <p:sp>
+        <p:nvSpPr>
+          <p:cNvPr id="13" name="Shape 11"/>
+          <p:cNvSpPr/>
+          <p:nvPr/>
+        </p:nvSpPr>
+        <p:spPr>
+          <a:xfrm>
+            <a:off x="3009656" y="2155058"/>
+            <a:ext cx="155951" cy="242499"/>
+          </a:xfrm>
+          <a:prstGeom prst="roundRect">
+            <a:avLst>
+              <a:gd name="adj" fmla="val 33333"/>
+            </a:avLst>
+          </a:prstGeom>
           <a:solidFill>
-            <a:srgbClr val="FFFFFF"/>
+            <a:srgbClr val="1F4E79"/>
           </a:solidFill>
           <a:ln/>
         </p:spPr>
       </p:sp>
       <p:sp>
         <p:nvSpPr>
-          <p:cNvPr id="11" name="Text 9"/>
+          <p:cNvPr id="14" name="Shape 12"/>
+          <p:cNvSpPr/>
+          <p:nvPr/>
+        </p:nvSpPr>
+        <p:spPr>
+          <a:xfrm>
+            <a:off x="2995026" y="1996501"/>
+            <a:ext cx="167884" cy="167884"/>
+          </a:xfrm>
+          <a:prstGeom prst="ellipse">
+            <a:avLst/>
+          </a:prstGeom>
+          <a:solidFill>
+            <a:srgbClr val="1F4E79"/>
+          </a:solidFill>
+          <a:ln/>
+        </p:spPr>
+      </p:sp>
+      <p:sp>
+        <p:nvSpPr>
+          <p:cNvPr id="15" name="Shape 13"/>
+          <p:cNvSpPr/>
+          <p:nvPr/>
+        </p:nvSpPr>
+        <p:spPr>
+          <a:xfrm>
+            <a:off x="3078968" y="2826593"/>
+            <a:ext cx="0" cy="186538"/>
+          </a:xfrm>
+          <a:prstGeom prst="line">
+            <a:avLst/>
+          </a:prstGeom>
+          <a:noFill/>
+          <a:ln w="20320">
+            <a:solidFill>
+              <a:srgbClr val="D9463E"/>
+            </a:solidFill>
+            <a:prstDash val="solid"/>
+            <a:tailEnd type="triangle"/>
+          </a:ln>
+        </p:spPr>
+      </p:sp>
+      <p:sp>
+        <p:nvSpPr>
+          <p:cNvPr id="16" name="Text 14"/>
           <p:cNvSpPr txBox="1"/>
           <p:nvPr/>
         </p:nvSpPr>
         <p:spPr>
           <a:xfrm>
-            <a:off x="2318004" y="2212848"/>
-            <a:ext cx="274320" cy="365760"/>
+            <a:off x="685800" y="3273552"/>
+            <a:ext cx="3538728" cy="475488"/>
           </a:xfrm>
           <a:prstGeom prst="rect">
             <a:avLst/>
@@ -15746,14 +15958,37 @@
           <a:ln/>
         </p:spPr>
         <p:txBody>
-          <a:bodyPr wrap="square" lIns="0" tIns="0" rIns="0" bIns="0" rtlCol="0" anchor="ctr"/>
+          <a:bodyPr wrap="square" lIns="0" tIns="0" rIns="0" bIns="0" rtlCol="0" anchor="t"/>
           <a:lstStyle/>
           <a:p>
             <a:pPr algn="ctr" indent="0" marL="0">
-              <a:buNone/>
-            </a:pPr>
-            <a:r>
-              <a:rPr lang="en-US" sz="1700" b="1" dirty="0">
+              <a:lnSpc>
+                <a:spcPct val="110000"/>
+              </a:lnSpc>
+              <a:buNone/>
+            </a:pPr>
+            <a:r>
+              <a:rPr lang="en-US" sz="950" dirty="0">
+                <a:solidFill>
+                  <a:srgbClr val="5F7183"/>
+                </a:solidFill>
+                <a:latin typeface="Arial" pitchFamily="34" charset="0"/>
+                <a:ea typeface="Arial" pitchFamily="34" charset="-122"/>
+                <a:cs typeface="Arial" pitchFamily="34" charset="-120"/>
+              </a:rPr>
+              <a:t>Búp bê xe đạp cắt ngang — cùng tốc độ, cùng vị trí, lần nào cũng thế.</a:t>
+            </a:r>
+            <a:endParaRPr lang="en-US" sz="950" dirty="0"/>
+          </a:p>
+          <a:p>
+            <a:pPr algn="ctr" indent="0" marL="0">
+              <a:lnSpc>
+                <a:spcPct val="110000"/>
+              </a:lnSpc>
+              <a:buNone/>
+            </a:pPr>
+            <a:r>
+              <a:rPr lang="en-US" sz="900" dirty="0">
                 <a:solidFill>
                   <a:srgbClr val="5F7183"/>
                 </a:solidFill>
@@ -15761,153 +15996,9 @@
                 <a:ea typeface="微軟正黑體" pitchFamily="34" charset="-122"/>
                 <a:cs typeface="微軟正黑體" pitchFamily="34" charset="-120"/>
               </a:rPr>
-              <a:t>→</a:t>
-            </a:r>
-            <a:endParaRPr lang="en-US" sz="1700" dirty="0"/>
-          </a:p>
-        </p:txBody>
-      </p:sp>
-      <p:sp>
-        <p:nvSpPr>
-          <p:cNvPr id="12" name="Shape 10"/>
-          <p:cNvSpPr/>
-          <p:nvPr/>
-        </p:nvSpPr>
-        <p:spPr>
-          <a:xfrm>
-            <a:off x="2974543" y="1953158"/>
-            <a:ext cx="241402" cy="241402"/>
-          </a:xfrm>
-          <a:prstGeom prst="ellipse">
-            <a:avLst/>
-          </a:prstGeom>
-          <a:solidFill>
-            <a:srgbClr val="0B1F3A"/>
-          </a:solidFill>
-          <a:ln/>
-        </p:spPr>
-      </p:sp>
-      <p:sp>
-        <p:nvSpPr>
-          <p:cNvPr id="13" name="Shape 11"/>
-          <p:cNvSpPr/>
-          <p:nvPr/>
-        </p:nvSpPr>
-        <p:spPr>
-          <a:xfrm>
-            <a:off x="2934310" y="2224735"/>
-            <a:ext cx="321869" cy="362102"/>
-          </a:xfrm>
-          <a:prstGeom prst="roundRect">
-            <a:avLst>
-              <a:gd name="adj" fmla="val 85227"/>
-            </a:avLst>
-          </a:prstGeom>
-          <a:solidFill>
-            <a:srgbClr val="0B1F3A"/>
-          </a:solidFill>
-          <a:ln/>
-        </p:spPr>
-      </p:sp>
-      <p:sp>
-        <p:nvSpPr>
-          <p:cNvPr id="14" name="Shape 12"/>
-          <p:cNvSpPr/>
-          <p:nvPr/>
-        </p:nvSpPr>
-        <p:spPr>
-          <a:xfrm rot="480000">
-            <a:off x="2954426" y="2576779"/>
-            <a:ext cx="90526" cy="261518"/>
-          </a:xfrm>
-          <a:prstGeom prst="rect">
-            <a:avLst/>
-          </a:prstGeom>
-          <a:solidFill>
-            <a:srgbClr val="0B1F3A"/>
-          </a:solidFill>
-          <a:ln/>
-        </p:spPr>
-      </p:sp>
-      <p:sp>
-        <p:nvSpPr>
-          <p:cNvPr id="15" name="Shape 13"/>
-          <p:cNvSpPr/>
-          <p:nvPr/>
-        </p:nvSpPr>
-        <p:spPr>
-          <a:xfrm rot="-480000">
-            <a:off x="3145536" y="2576779"/>
-            <a:ext cx="90526" cy="261518"/>
-          </a:xfrm>
-          <a:prstGeom prst="rect">
-            <a:avLst/>
-          </a:prstGeom>
-          <a:solidFill>
-            <a:srgbClr val="0B1F3A"/>
-          </a:solidFill>
-          <a:ln/>
-        </p:spPr>
-      </p:sp>
-      <p:sp>
-        <p:nvSpPr>
-          <p:cNvPr id="16" name="Text 14"/>
-          <p:cNvSpPr txBox="1"/>
-          <p:nvPr/>
-        </p:nvSpPr>
-        <p:spPr>
-          <a:xfrm>
-            <a:off x="685800" y="3346704"/>
-            <a:ext cx="3538728" cy="365760"/>
-          </a:xfrm>
-          <a:prstGeom prst="rect">
-            <a:avLst/>
-          </a:prstGeom>
-          <a:noFill/>
-          <a:ln/>
-        </p:spPr>
-        <p:txBody>
-          <a:bodyPr wrap="square" lIns="0" tIns="0" rIns="0" bIns="0" rtlCol="0" anchor="t"/>
-          <a:lstStyle/>
-          <a:p>
-            <a:pPr algn="ctr" indent="0" marL="0">
-              <a:lnSpc>
-                <a:spcPct val="110000"/>
-              </a:lnSpc>
-              <a:buNone/>
-            </a:pPr>
-            <a:r>
-              <a:rPr lang="en-US" sz="1000" dirty="0">
-                <a:solidFill>
-                  <a:srgbClr val="5F7183"/>
-                </a:solidFill>
-                <a:latin typeface="Arial" pitchFamily="34" charset="0"/>
-                <a:ea typeface="Arial" pitchFamily="34" charset="-122"/>
-                <a:cs typeface="Arial" pitchFamily="34" charset="-120"/>
-              </a:rPr>
-              <a:t>Chưa có ảnh thiết bị</a:t>
-            </a:r>
-            <a:endParaRPr lang="en-US" sz="1000" dirty="0"/>
-          </a:p>
-          <a:p>
-            <a:pPr algn="ctr" indent="0" marL="0">
-              <a:lnSpc>
-                <a:spcPct val="110000"/>
-              </a:lnSpc>
-              <a:buNone/>
-            </a:pPr>
-            <a:r>
-              <a:rPr lang="en-US" sz="950" dirty="0">
-                <a:solidFill>
-                  <a:srgbClr val="5F7183"/>
-                </a:solidFill>
-                <a:latin typeface="微軟正黑體" pitchFamily="34" charset="0"/>
-                <a:ea typeface="微軟正黑體" pitchFamily="34" charset="-122"/>
-                <a:cs typeface="微軟正黑體" pitchFamily="34" charset="-120"/>
-              </a:rPr>
-              <a:t>尚未取得實體照片</a:t>
-            </a:r>
-            <a:endParaRPr lang="en-US" sz="1000" dirty="0"/>
+              <a:t>腳踏車假人橫切過去——同樣速度、同樣位置，每次都一樣。</a:t>
+            </a:r>
+            <a:endParaRPr lang="en-US" sz="950" dirty="0"/>
           </a:p>
         </p:txBody>
       </p:sp>

--- a/第四週(10-01)/第四週_第2節_簡報.pptx
+++ b/第四週(10-01)/第四週_第2節_簡報.pptx
@@ -16160,7 +16160,7 @@
                 <a:ea typeface="Arial" pitchFamily="34" charset="-122"/>
                 <a:cs typeface="Arial" pitchFamily="34" charset="-120"/>
               </a:rPr>
-              <a:t>Euro NCAP（官方）　·　≈2:00</a:t>
+              <a:t>Euro NCAP（官方）　·　4:39，播 2 分鐘就夠</a:t>
             </a:r>
             <a:endParaRPr lang="en-US" sz="900" dirty="0"/>
           </a:p>

--- a/第四週(10-01)/第四週_第2節_簡報.pptx
+++ b/第四週(10-01)/第四週_第2節_簡報.pptx
@@ -15613,7 +15613,7 @@
         <p:spPr>
           <a:xfrm>
             <a:off x="502920" y="676656"/>
-            <a:ext cx="8138160" cy="713232"/>
+            <a:ext cx="8138160" cy="560684"/>
           </a:xfrm>
           <a:prstGeom prst="rect">
             <a:avLst/>
@@ -15674,12 +15674,12 @@
         </p:nvSpPr>
         <p:spPr>
           <a:xfrm>
-            <a:off x="502920" y="1243584"/>
-            <a:ext cx="3904488" cy="2578608"/>
+            <a:off x="502920" y="1255628"/>
+            <a:ext cx="3904488" cy="2566564"/>
           </a:xfrm>
           <a:prstGeom prst="roundRect">
             <a:avLst>
-              <a:gd name="adj" fmla="val 3546"/>
+              <a:gd name="adj" fmla="val 3563"/>
             </a:avLst>
           </a:prstGeom>
           <a:solidFill>
@@ -15701,7 +15701,7 @@
         </p:nvSpPr>
         <p:spPr>
           <a:xfrm>
-            <a:off x="999622" y="2714671"/>
+            <a:off x="999622" y="2718043"/>
             <a:ext cx="2911084" cy="0"/>
           </a:xfrm>
           <a:prstGeom prst="line">
@@ -15724,7 +15724,7 @@
         </p:nvSpPr>
         <p:spPr>
           <a:xfrm>
-            <a:off x="1103589" y="2251701"/>
+            <a:off x="1103589" y="2256519"/>
             <a:ext cx="1039673" cy="478249"/>
           </a:xfrm>
           <a:prstGeom prst="roundRect">
@@ -15746,7 +15746,7 @@
         </p:nvSpPr>
         <p:spPr>
           <a:xfrm>
-            <a:off x="1498665" y="2347351"/>
+            <a:off x="1498665" y="2352168"/>
             <a:ext cx="353489" cy="286950"/>
           </a:xfrm>
           <a:prstGeom prst="roundRect">
@@ -15768,7 +15768,7 @@
         </p:nvSpPr>
         <p:spPr>
           <a:xfrm>
-            <a:off x="2247229" y="2490826"/>
+            <a:off x="2247229" y="2495643"/>
             <a:ext cx="415869" cy="0"/>
           </a:xfrm>
           <a:prstGeom prst="line">
@@ -15792,8 +15792,8 @@
         </p:nvSpPr>
         <p:spPr>
           <a:xfrm>
-            <a:off x="2705801" y="2453518"/>
-            <a:ext cx="261153" cy="261153"/>
+            <a:off x="2706644" y="2458577"/>
+            <a:ext cx="259466" cy="259466"/>
           </a:xfrm>
           <a:prstGeom prst="ellipse">
             <a:avLst/>
@@ -15814,8 +15814,8 @@
         </p:nvSpPr>
         <p:spPr>
           <a:xfrm>
-            <a:off x="3190982" y="2453518"/>
-            <a:ext cx="261153" cy="261153"/>
+            <a:off x="3191825" y="2458577"/>
+            <a:ext cx="259466" cy="259466"/>
           </a:xfrm>
           <a:prstGeom prst="ellipse">
             <a:avLst/>
@@ -15836,8 +15836,8 @@
         </p:nvSpPr>
         <p:spPr>
           <a:xfrm flipV="1">
-            <a:off x="2836377" y="2434864"/>
-            <a:ext cx="242590" cy="149230"/>
+            <a:off x="2836377" y="2440043"/>
+            <a:ext cx="242590" cy="148267"/>
           </a:xfrm>
           <a:prstGeom prst="line">
             <a:avLst/>
@@ -15859,8 +15859,8 @@
         </p:nvSpPr>
         <p:spPr>
           <a:xfrm flipH="1" flipV="1">
-            <a:off x="3078968" y="2434864"/>
-            <a:ext cx="242590" cy="149230"/>
+            <a:off x="3078968" y="2440043"/>
+            <a:ext cx="242590" cy="148267"/>
           </a:xfrm>
           <a:prstGeom prst="line">
             <a:avLst/>
@@ -15882,8 +15882,8 @@
         </p:nvSpPr>
         <p:spPr>
           <a:xfrm>
-            <a:off x="3009656" y="2155058"/>
-            <a:ext cx="155951" cy="242499"/>
+            <a:off x="3009656" y="2162044"/>
+            <a:ext cx="155951" cy="240933"/>
           </a:xfrm>
           <a:prstGeom prst="roundRect">
             <a:avLst>
@@ -15904,8 +15904,8 @@
         </p:nvSpPr>
         <p:spPr>
           <a:xfrm>
-            <a:off x="2995026" y="1996501"/>
-            <a:ext cx="167884" cy="167884"/>
+            <a:off x="2995568" y="2004510"/>
+            <a:ext cx="166800" cy="166800"/>
           </a:xfrm>
           <a:prstGeom prst="ellipse">
             <a:avLst/>
@@ -15924,8 +15924,8 @@
         </p:nvSpPr>
         <p:spPr>
           <a:xfrm>
-            <a:off x="3078968" y="2826593"/>
-            <a:ext cx="0" cy="186538"/>
+            <a:off x="3078968" y="2829243"/>
+            <a:ext cx="0" cy="185333"/>
           </a:xfrm>
           <a:prstGeom prst="line">
             <a:avLst/>
@@ -16010,12 +16010,12 @@
         </p:nvSpPr>
         <p:spPr>
           <a:xfrm>
-            <a:off x="4736592" y="1243584"/>
-            <a:ext cx="3904488" cy="2578608"/>
+            <a:off x="4736592" y="1255628"/>
+            <a:ext cx="3904488" cy="2566564"/>
           </a:xfrm>
           <a:prstGeom prst="roundRect">
             <a:avLst>
-              <a:gd name="adj" fmla="val 3546"/>
+              <a:gd name="adj" fmla="val 3563"/>
             </a:avLst>
           </a:prstGeom>
           <a:solidFill>
@@ -16037,7 +16037,7 @@
         </p:nvSpPr>
         <p:spPr>
           <a:xfrm>
-            <a:off x="4919472" y="1408176"/>
+            <a:off x="4919472" y="1420220"/>
             <a:ext cx="347472" cy="347472"/>
           </a:xfrm>
           <a:prstGeom prst="ellipse">
@@ -16057,7 +16057,7 @@
         </p:nvSpPr>
         <p:spPr>
           <a:xfrm>
-            <a:off x="4919472" y="1453896"/>
+            <a:off x="4919472" y="1465940"/>
             <a:ext cx="347472" cy="256032"/>
           </a:xfrm>
           <a:prstGeom prst="rect">
@@ -16096,7 +16096,7 @@
         </p:nvSpPr>
         <p:spPr>
           <a:xfrm>
-            <a:off x="5340096" y="1389888"/>
+            <a:off x="5340096" y="1401932"/>
             <a:ext cx="3118104" cy="420624"/>
           </a:xfrm>
           <a:prstGeom prst="rect">
@@ -16135,7 +16135,7 @@
         </p:nvSpPr>
         <p:spPr>
           <a:xfrm>
-            <a:off x="4919472" y="1847088"/>
+            <a:off x="4919472" y="1859132"/>
             <a:ext cx="3538728" cy="201168"/>
           </a:xfrm>
           <a:prstGeom prst="rect">
@@ -16176,7 +16176,7 @@
         </p:nvSpPr>
         <p:spPr>
           <a:xfrm>
-            <a:off x="4919472" y="2029968"/>
+            <a:off x="4919472" y="2042012"/>
             <a:ext cx="3538728" cy="201168"/>
           </a:xfrm>
           <a:prstGeom prst="rect">
@@ -16222,7 +16222,7 @@
         </p:nvSpPr>
         <p:spPr>
           <a:xfrm>
-            <a:off x="4919472" y="2304288"/>
+            <a:off x="4919472" y="2316332"/>
             <a:ext cx="36576" cy="237744"/>
           </a:xfrm>
           <a:prstGeom prst="rect">
@@ -16242,7 +16242,7 @@
         </p:nvSpPr>
         <p:spPr>
           <a:xfrm>
-            <a:off x="5047488" y="2267712"/>
+            <a:off x="5047488" y="2279756"/>
             <a:ext cx="3429000" cy="456079"/>
           </a:xfrm>
           <a:prstGeom prst="rect">
@@ -16304,7 +16304,7 @@
         </p:nvSpPr>
         <p:spPr>
           <a:xfrm>
-            <a:off x="4919472" y="2796943"/>
+            <a:off x="4919472" y="2808987"/>
             <a:ext cx="36576" cy="237744"/>
           </a:xfrm>
           <a:prstGeom prst="rect">
@@ -16324,7 +16324,7 @@
         </p:nvSpPr>
         <p:spPr>
           <a:xfrm>
-            <a:off x="5047488" y="2760367"/>
+            <a:off x="5047488" y="2772411"/>
             <a:ext cx="3429000" cy="456079"/>
           </a:xfrm>
           <a:prstGeom prst="rect">
@@ -16386,7 +16386,7 @@
         </p:nvSpPr>
         <p:spPr>
           <a:xfrm>
-            <a:off x="4919472" y="3289598"/>
+            <a:off x="4919472" y="3301642"/>
             <a:ext cx="36576" cy="237744"/>
           </a:xfrm>
           <a:prstGeom prst="rect">
@@ -16406,7 +16406,7 @@
         </p:nvSpPr>
         <p:spPr>
           <a:xfrm>
-            <a:off x="5047488" y="3253022"/>
+            <a:off x="5047488" y="3265066"/>
             <a:ext cx="3429000" cy="456079"/>
           </a:xfrm>
           <a:prstGeom prst="rect">

--- a/第四週(10-01)/第四週_第2節_簡報.pptx
+++ b/第四週(10-01)/第四週_第2節_簡報.pptx
@@ -993,7 +993,7 @@
                 <a:ea typeface="Arial Unicode MS"/>
                 <a:cs typeface="Arial Unicode MS"/>
               </a:rPr>
-              <a:t>（預期答案：明確、大家都要做、可以比較。）
+              <a:t>答案是：明確、大家都要做、可以比較。
 </a:t>
             </a:r>
           </a:p>
@@ -1037,7 +1037,7 @@
                 <a:ea typeface="Arial Unicode MS"/>
                 <a:cs typeface="Arial Unicode MS"/>
               </a:rPr>
-              <a:t>（這題比較難，可以提示。）
+              <a:t>這題比較難，我給一點提示。
 </a:t>
             </a:r>
           </a:p>
@@ -1334,7 +1334,7 @@
                 <a:ea typeface="Arial Unicode MS"/>
                 <a:cs typeface="Arial Unicode MS"/>
               </a:rPr>
-              <a:t>做法是：</a:t>
+              <a:t>它的做法是</a:t>
             </a:r>
             <a:r>
               <a:rPr sz="1200" b="1" lang="zh-TW" dirty="0">
@@ -1345,7 +1345,7 @@
                 <a:ea typeface="Arial Unicode MS"/>
                 <a:cs typeface="Arial Unicode MS"/>
               </a:rPr>
-              <a:t>把真實發生過的事故，還原成一個場景</a:t>
+              <a:t>把真實發生過的事故還原成一個場景</a:t>
             </a:r>
             <a:r>
               <a:rPr sz="1200" lang="zh-TW" dirty="0">
@@ -1434,28 +1434,6 @@
                 <a:cs typeface="Arial Unicode MS"/>
               </a:rPr>
               <a:t>所以當一家公司說「我們通過了三千個事故場景的測試」，那句話的意思是：三千件真實的悲劇，被拿來當成檢查表。
-</a:t>
-            </a:r>
-          </a:p>
-          <a:p>
-            <a:pPr algn="l">
-              <a:lnSpc>
-                <a:spcPct val="115000"/>
-              </a:lnSpc>
-              <a:spcAft>
-                <a:spcPts val="600"/>
-              </a:spcAft>
-            </a:pPr>
-            <a:r>
-              <a:rPr sz="1200" lang="zh-TW" dirty="0">
-                <a:solidFill>
-                  <a:srgbClr val="000000"/>
-                </a:solidFill>
-                <a:latin typeface="Arial Unicode MS"/>
-                <a:ea typeface="Arial Unicode MS"/>
-                <a:cs typeface="Arial Unicode MS"/>
-              </a:rPr>
-              <a:t>（這裡可以停兩秒，不要急著往下講。）
 </a:t>
             </a:r>
           </a:p>
@@ -1586,11 +1564,11 @@
                 <a:spcPct val="115000"/>
               </a:lnSpc>
               <a:spcAft>
-                <a:spcPts val="500"/>
+                <a:spcPts val="550"/>
               </a:spcAft>
             </a:pPr>
             <a:r>
-              <a:rPr sz="1000" lang="zh-TW" dirty="0">
+              <a:rPr sz="1100" lang="zh-TW" dirty="0">
                 <a:solidFill>
                   <a:srgbClr val="000000"/>
                 </a:solidFill>
@@ -1601,7 +1579,7 @@
               <a:t>第三個來源，也是最有意思的一個：</a:t>
             </a:r>
             <a:r>
-              <a:rPr sz="1000" b="1" lang="zh-TW" dirty="0">
+              <a:rPr sz="1100" b="1" lang="zh-TW" dirty="0">
                 <a:solidFill>
                   <a:srgbClr val="000000"/>
                 </a:solidFill>
@@ -1612,7 +1590,7 @@
               <a:t>從實際道路上長出來</a:t>
             </a:r>
             <a:r>
-              <a:rPr sz="1000" lang="zh-TW" dirty="0">
+              <a:rPr sz="1100" lang="zh-TW" dirty="0">
                 <a:solidFill>
                   <a:srgbClr val="000000"/>
                 </a:solidFill>
@@ -1630,22 +1608,22 @@
                 <a:spcPct val="115000"/>
               </a:lnSpc>
               <a:spcAft>
-                <a:spcPts val="500"/>
+                <a:spcPts val="550"/>
               </a:spcAft>
             </a:pPr>
             <a:r>
-              <a:rPr sz="1000" lang="zh-TW" dirty="0">
-                <a:solidFill>
-                  <a:srgbClr val="000000"/>
-                </a:solidFill>
-                <a:latin typeface="Arial Unicode MS"/>
-                <a:ea typeface="Arial Unicode MS"/>
-                <a:cs typeface="Arial Unicode MS"/>
-              </a:rPr>
-              <a:t>做法是這樣：測試車在路上跑，車上有安全員。只要安全員</a:t>
-            </a:r>
-            <a:r>
-              <a:rPr sz="1000" b="1" lang="zh-TW" dirty="0">
+              <a:rPr sz="1100" lang="zh-TW" dirty="0">
+                <a:solidFill>
+                  <a:srgbClr val="000000"/>
+                </a:solidFill>
+                <a:latin typeface="Arial Unicode MS"/>
+                <a:ea typeface="Arial Unicode MS"/>
+                <a:cs typeface="Arial Unicode MS"/>
+              </a:rPr>
+              <a:t>它的做法是這樣。測試車在路上跑，車上有安全員。只要安全員</a:t>
+            </a:r>
+            <a:r>
+              <a:rPr sz="1100" b="1" lang="zh-TW" dirty="0">
                 <a:solidFill>
                   <a:srgbClr val="000000"/>
                 </a:solidFill>
@@ -1656,7 +1634,7 @@
               <a:t>手一碰方向盤</a:t>
             </a:r>
             <a:r>
-              <a:rPr sz="1000" lang="zh-TW" dirty="0">
+              <a:rPr sz="1100" lang="zh-TW" dirty="0">
                 <a:solidFill>
                   <a:srgbClr val="000000"/>
                 </a:solidFill>
@@ -1674,11 +1652,11 @@
                 <a:spcPct val="115000"/>
               </a:lnSpc>
               <a:spcAft>
-                <a:spcPts val="500"/>
+                <a:spcPts val="550"/>
               </a:spcAft>
             </a:pPr>
             <a:r>
-              <a:rPr sz="1000" lang="zh-TW" dirty="0">
+              <a:rPr sz="1100" lang="zh-TW" dirty="0">
                 <a:solidFill>
                   <a:srgbClr val="000000"/>
                 </a:solidFill>
@@ -1696,11 +1674,11 @@
                 <a:spcPct val="115000"/>
               </a:lnSpc>
               <a:spcAft>
-                <a:spcPts val="500"/>
+                <a:spcPts val="550"/>
               </a:spcAft>
             </a:pPr>
             <a:r>
-              <a:rPr sz="1000" lang="zh-TW" dirty="0">
+              <a:rPr sz="1100" lang="zh-TW" dirty="0">
                 <a:solidFill>
                   <a:srgbClr val="000000"/>
                 </a:solidFill>
@@ -1718,19 +1696,19 @@
                 <a:spcPct val="115000"/>
               </a:lnSpc>
               <a:spcAft>
-                <a:spcPts val="500"/>
+                <a:spcPts val="550"/>
               </a:spcAft>
             </a:pPr>
             <a:r>
-              <a:rPr sz="1000" lang="zh-TW" dirty="0">
-                <a:solidFill>
-                  <a:srgbClr val="000000"/>
-                </a:solidFill>
-                <a:latin typeface="Arial Unicode MS"/>
-                <a:ea typeface="Arial Unicode MS"/>
-                <a:cs typeface="Arial Unicode MS"/>
-              </a:rPr>
-              <a:t>（讓學生想。答案是：因為安全員介入，代表「有一個人覺得這台車做得不夠好」。那正是你想蒐集的東西。）
+              <a:rPr sz="1100" lang="zh-TW" dirty="0">
+                <a:solidFill>
+                  <a:srgbClr val="000000"/>
+                </a:solidFill>
+                <a:latin typeface="Arial Unicode MS"/>
+                <a:ea typeface="Arial Unicode MS"/>
+                <a:cs typeface="Arial Unicode MS"/>
+              </a:rPr>
+              <a:t>大家想一下。答案是：安全員介入代表「有一個人覺得這台車做得不夠好」，那正是你最想蒐集的東西。
 </a:t>
             </a:r>
           </a:p>
@@ -1740,11 +1718,11 @@
                 <a:spcPct val="115000"/>
               </a:lnSpc>
               <a:spcAft>
-                <a:spcPts val="500"/>
+                <a:spcPts val="550"/>
               </a:spcAft>
             </a:pPr>
             <a:r>
-              <a:rPr sz="1000" lang="zh-TW" dirty="0">
+              <a:rPr sz="1100" lang="zh-TW" dirty="0">
                 <a:solidFill>
                   <a:srgbClr val="000000"/>
                 </a:solidFill>
@@ -1755,7 +1733,7 @@
               <a:t>這個做法有個很漂亮的地方：</a:t>
             </a:r>
             <a:r>
-              <a:rPr sz="1000" b="1" lang="zh-TW" dirty="0">
+              <a:rPr sz="1100" b="1" lang="zh-TW" dirty="0">
                 <a:solidFill>
                   <a:srgbClr val="000000"/>
                 </a:solidFill>
@@ -1766,7 +1744,7 @@
               <a:t>它會自己成長。</a:t>
             </a:r>
             <a:r>
-              <a:rPr sz="1000" lang="zh-TW" dirty="0">
+              <a:rPr sz="1100" lang="zh-TW" dirty="0">
                 <a:solidFill>
                   <a:srgbClr val="000000"/>
                 </a:solidFill>
@@ -1784,11 +1762,11 @@
                 <a:spcPct val="115000"/>
               </a:lnSpc>
               <a:spcAft>
-                <a:spcPts val="500"/>
+                <a:spcPts val="550"/>
               </a:spcAft>
             </a:pPr>
             <a:r>
-              <a:rPr sz="1000" lang="zh-TW" dirty="0">
+              <a:rPr sz="1100" lang="zh-TW" dirty="0">
                 <a:solidFill>
                   <a:srgbClr val="000000"/>
                 </a:solidFill>
@@ -1799,7 +1777,7 @@
               <a:t>Waymo 和 Cruise 的場景庫以</a:t>
             </a:r>
             <a:r>
-              <a:rPr sz="1000" b="1" lang="zh-TW" dirty="0">
+              <a:rPr sz="1100" b="1" lang="zh-TW" dirty="0">
                 <a:solidFill>
                   <a:srgbClr val="000000"/>
                 </a:solidFill>
@@ -1810,7 +1788,7 @@
               <a:t>數萬計</a:t>
             </a:r>
             <a:r>
-              <a:rPr sz="1000" lang="zh-TW" dirty="0">
+              <a:rPr sz="1100" lang="zh-TW" dirty="0">
                 <a:solidFill>
                   <a:srgbClr val="000000"/>
                 </a:solidFill>
@@ -1828,19 +1806,19 @@
                 <a:spcPct val="115000"/>
               </a:lnSpc>
               <a:spcAft>
-                <a:spcPts val="500"/>
+                <a:spcPts val="550"/>
               </a:spcAft>
             </a:pPr>
             <a:r>
-              <a:rPr sz="1000" lang="zh-TW" dirty="0">
-                <a:solidFill>
-                  <a:srgbClr val="000000"/>
-                </a:solidFill>
-                <a:latin typeface="Arial Unicode MS"/>
-                <a:ea typeface="Arial Unicode MS"/>
-                <a:cs typeface="Arial Unicode MS"/>
-              </a:rPr>
-              <a:t>（補一個今年的發展，如果時間夠：Waymo 二〇二六年二月發表了一套生成式的模擬模型，建立在 DeepMind 的 Genie 3 上面，可以自己「長」出沒發生過的罕見狀況——龍捲風、淹水的街道，甚至路上有一頭大象。
+              <a:rPr sz="1100" lang="zh-TW" dirty="0">
+                <a:solidFill>
+                  <a:srgbClr val="000000"/>
+                </a:solidFill>
+                <a:latin typeface="Arial Unicode MS"/>
+                <a:ea typeface="Arial Unicode MS"/>
+                <a:cs typeface="Arial Unicode MS"/>
+              </a:rPr>
+              <a:t>我補一個今年的發展。Waymo 在二〇二六年二月發表了一套生成式的模擬模型，建立在 DeepMind 的 Genie 3 上面，可以自己「長」出沒發生過的罕見狀況——龍捲風、淹水的街道，甚至路上有一頭大象。
 </a:t>
             </a:r>
           </a:p>
@@ -1850,22 +1828,22 @@
                 <a:spcPct val="115000"/>
               </a:lnSpc>
               <a:spcAft>
-                <a:spcPts val="500"/>
+                <a:spcPts val="550"/>
               </a:spcAft>
             </a:pPr>
             <a:r>
-              <a:rPr sz="1000" lang="zh-TW" dirty="0">
-                <a:solidFill>
-                  <a:srgbClr val="000000"/>
-                </a:solidFill>
-                <a:latin typeface="Arial Unicode MS"/>
-                <a:ea typeface="Arial Unicode MS"/>
-                <a:cs typeface="Arial Unicode MS"/>
-              </a:rPr>
-              <a:t>規模的數字也值得唸給學生聽：</a:t>
-            </a:r>
-            <a:r>
-              <a:rPr sz="1000" b="1" lang="zh-TW" dirty="0">
+              <a:rPr sz="1100" lang="zh-TW" dirty="0">
+                <a:solidFill>
+                  <a:srgbClr val="000000"/>
+                </a:solidFill>
+                <a:latin typeface="Arial Unicode MS"/>
+                <a:ea typeface="Arial Unicode MS"/>
+                <a:cs typeface="Arial Unicode MS"/>
+              </a:rPr>
+              <a:t>規模的數字也值得記一下：</a:t>
+            </a:r>
+            <a:r>
+              <a:rPr sz="1100" b="1" lang="zh-TW" dirty="0">
                 <a:solidFill>
                   <a:srgbClr val="000000"/>
                 </a:solidFill>
@@ -1876,37 +1854,15 @@
               <a:t>每天有兩萬五千台虛擬的 Waymo 在跑，一天跑一千萬英里</a:t>
             </a:r>
             <a:r>
-              <a:rPr sz="1000" lang="zh-TW" dirty="0">
-                <a:solidFill>
-                  <a:srgbClr val="000000"/>
-                </a:solidFill>
-                <a:latin typeface="Arial Unicode MS"/>
-                <a:ea typeface="Arial Unicode MS"/>
-                <a:cs typeface="Arial Unicode MS"/>
-              </a:rPr>
-              <a:t>。拿來跟第一章那個「一百一十億英里」對照——用模擬，一千多天就跑完了；用真車，要五百年。
-</a:t>
-            </a:r>
-          </a:p>
-          <a:p>
-            <a:pPr algn="l">
-              <a:lnSpc>
-                <a:spcPct val="115000"/>
-              </a:lnSpc>
-              <a:spcAft>
-                <a:spcPts val="500"/>
-              </a:spcAft>
-            </a:pPr>
-            <a:r>
-              <a:rPr sz="1000" lang="zh-TW" dirty="0">
-                <a:solidFill>
-                  <a:srgbClr val="000000"/>
-                </a:solidFill>
-                <a:latin typeface="Arial Unicode MS"/>
-                <a:ea typeface="Arial Unicode MS"/>
-                <a:cs typeface="Arial Unicode MS"/>
-              </a:rPr>
-              <a:t>想放影片的話：The Information 有一支三分鐘的報導，youtube.com/watch?v=93i4i9MlXx8，由 Waymo 的工程師親自說明。這支不是必播，時間不夠就跳過。）</a:t>
+              <a:rPr sz="1100" lang="zh-TW" dirty="0">
+                <a:solidFill>
+                  <a:srgbClr val="000000"/>
+                </a:solidFill>
+                <a:latin typeface="Arial Unicode MS"/>
+                <a:ea typeface="Arial Unicode MS"/>
+                <a:cs typeface="Arial Unicode MS"/>
+              </a:rPr>
+              <a:t>。拿來跟第一章那個一百一十億英里對照——用模擬，一千多天就跑完了；用真車，要五百年。</a:t>
             </a:r>
           </a:p>
         </p:txBody>
@@ -2015,11 +1971,11 @@
                 <a:spcPct val="115000"/>
               </a:lnSpc>
               <a:spcAft>
-                <a:spcPts val="500"/>
+                <a:spcPts val="525"/>
               </a:spcAft>
             </a:pPr>
             <a:r>
-              <a:rPr sz="1000" lang="zh-TW" dirty="0">
+              <a:rPr sz="1050" lang="zh-TW" dirty="0">
                 <a:solidFill>
                   <a:srgbClr val="000000"/>
                 </a:solidFill>
@@ -2037,19 +1993,19 @@
                 <a:spcPct val="115000"/>
               </a:lnSpc>
               <a:spcAft>
-                <a:spcPts val="500"/>
+                <a:spcPts val="525"/>
               </a:spcAft>
             </a:pPr>
             <a:r>
-              <a:rPr sz="1000" lang="zh-TW" dirty="0">
-                <a:solidFill>
-                  <a:srgbClr val="000000"/>
-                </a:solidFill>
-                <a:latin typeface="Arial Unicode MS"/>
-                <a:ea typeface="Arial Unicode MS"/>
-                <a:cs typeface="Arial Unicode MS"/>
-              </a:rPr>
-              <a:t>左邊：現成的場景庫，一萬個以上的場景，完整、驗證過、拿來就能用。聽起來很夠了。
+              <a:rPr sz="1050" lang="zh-TW" dirty="0">
+                <a:solidFill>
+                  <a:srgbClr val="000000"/>
+                </a:solidFill>
+                <a:latin typeface="Arial Unicode MS"/>
+                <a:ea typeface="Arial Unicode MS"/>
+                <a:cs typeface="Arial Unicode MS"/>
+              </a:rPr>
+              <a:t>先看左邊，現成的場景庫，一萬個以上的場景，完整、驗證過、拿來就能用。聽起來很夠了。
 </a:t>
             </a:r>
           </a:p>
@@ -2059,11 +2015,11 @@
                 <a:spcPct val="115000"/>
               </a:lnSpc>
               <a:spcAft>
-                <a:spcPts val="500"/>
+                <a:spcPts val="525"/>
               </a:spcAft>
             </a:pPr>
             <a:r>
-              <a:rPr sz="1000" lang="zh-TW" dirty="0">
+              <a:rPr sz="1050" lang="zh-TW" dirty="0">
                 <a:solidFill>
                   <a:srgbClr val="000000"/>
                 </a:solidFill>
@@ -2081,11 +2037,11 @@
                 <a:spcPct val="115000"/>
               </a:lnSpc>
               <a:spcAft>
-                <a:spcPts val="500"/>
+                <a:spcPts val="525"/>
               </a:spcAft>
             </a:pPr>
             <a:r>
-              <a:rPr sz="1000" lang="zh-TW" dirty="0">
+              <a:rPr sz="1050" lang="zh-TW" dirty="0">
                 <a:solidFill>
                   <a:srgbClr val="000000"/>
                 </a:solidFill>
@@ -2096,7 +2052,7 @@
               <a:t>（指右邊）各位每天在路上遇到的那件事，</a:t>
             </a:r>
             <a:r>
-              <a:rPr sz="1000" b="1" lang="zh-TW" dirty="0">
+              <a:rPr sz="1050" b="1" lang="zh-TW" dirty="0">
                 <a:solidFill>
                   <a:srgbClr val="000000"/>
                 </a:solidFill>
@@ -2107,7 +2063,7 @@
               <a:t>哪一個場景庫裡有？</a:t>
             </a:r>
             <a:r>
-              <a:rPr sz="1000" lang="zh-TW" dirty="0">
+              <a:rPr sz="1050" lang="zh-TW" dirty="0">
                 <a:solidFill>
                   <a:srgbClr val="000000"/>
                 </a:solidFill>
@@ -2125,11 +2081,11 @@
                 <a:spcPct val="115000"/>
               </a:lnSpc>
               <a:spcAft>
-                <a:spcPts val="500"/>
+                <a:spcPts val="525"/>
               </a:spcAft>
             </a:pPr>
             <a:r>
-              <a:rPr sz="1000" lang="zh-TW" dirty="0">
+              <a:rPr sz="1050" lang="zh-TW" dirty="0">
                 <a:solidFill>
                   <a:srgbClr val="000000"/>
                 </a:solidFill>
@@ -2147,19 +2103,19 @@
                 <a:spcPct val="115000"/>
               </a:lnSpc>
               <a:spcAft>
-                <a:spcPts val="500"/>
+                <a:spcPts val="525"/>
               </a:spcAft>
             </a:pPr>
             <a:r>
-              <a:rPr sz="1000" lang="zh-TW" dirty="0">
-                <a:solidFill>
-                  <a:srgbClr val="000000"/>
-                </a:solidFill>
-                <a:latin typeface="Arial Unicode MS"/>
-                <a:ea typeface="Arial Unicode MS"/>
-                <a:cs typeface="Arial Unicode MS"/>
-              </a:rPr>
-              <a:t>法規標準：Euro NCAP 有「一台機車」，二〇二三年加的。沒有「十二台圍著你」。
+              <a:rPr sz="1050" lang="zh-TW" dirty="0">
+                <a:solidFill>
+                  <a:srgbClr val="000000"/>
+                </a:solidFill>
+                <a:latin typeface="Arial Unicode MS"/>
+                <a:ea typeface="Arial Unicode MS"/>
+                <a:cs typeface="Arial Unicode MS"/>
+              </a:rPr>
+              <a:t>先看法規標準。Euro NCAP 有「一台機車」，二〇二三年才加的，沒有「十二台圍著你」。
 </a:t>
             </a:r>
           </a:p>
@@ -2169,19 +2125,19 @@
                 <a:spcPct val="115000"/>
               </a:lnSpc>
               <a:spcAft>
-                <a:spcPts val="500"/>
+                <a:spcPts val="525"/>
               </a:spcAft>
             </a:pPr>
             <a:r>
-              <a:rPr sz="1000" lang="zh-TW" dirty="0">
-                <a:solidFill>
-                  <a:srgbClr val="000000"/>
-                </a:solidFill>
-                <a:latin typeface="Arial Unicode MS"/>
-                <a:ea typeface="Arial Unicode MS"/>
-                <a:cs typeface="Arial Unicode MS"/>
-              </a:rPr>
-              <a:t>事故資料庫：GIDAS 是德國的，NHTSA 是美國的。德國和美國的街上，沒有機車海。
+              <a:rPr sz="1050" lang="zh-TW" dirty="0">
+                <a:solidFill>
+                  <a:srgbClr val="000000"/>
+                </a:solidFill>
+                <a:latin typeface="Arial Unicode MS"/>
+                <a:ea typeface="Arial Unicode MS"/>
+                <a:cs typeface="Arial Unicode MS"/>
+              </a:rPr>
+              <a:t>再看事故資料庫。GIDAS 是德國的，NHTSA 是美國的。德國和美國的街上，沒有機車海。
 </a:t>
             </a:r>
           </a:p>
@@ -2191,19 +2147,19 @@
                 <a:spcPct val="115000"/>
               </a:lnSpc>
               <a:spcAft>
-                <a:spcPts val="500"/>
+                <a:spcPts val="525"/>
               </a:spcAft>
             </a:pPr>
             <a:r>
-              <a:rPr sz="1000" lang="zh-TW" dirty="0">
-                <a:solidFill>
-                  <a:srgbClr val="000000"/>
-                </a:solidFill>
-                <a:latin typeface="Arial Unicode MS"/>
-                <a:ea typeface="Arial Unicode MS"/>
-                <a:cs typeface="Arial Unicode MS"/>
-              </a:rPr>
-              <a:t>實路收集：Waymo 在鳳凰城、舊金山收集。那裡也沒有機車海。
+              <a:rPr sz="1050" lang="zh-TW" dirty="0">
+                <a:solidFill>
+                  <a:srgbClr val="000000"/>
+                </a:solidFill>
+                <a:latin typeface="Arial Unicode MS"/>
+                <a:ea typeface="Arial Unicode MS"/>
+                <a:cs typeface="Arial Unicode MS"/>
+              </a:rPr>
+              <a:t>最後看實路收集。Waymo 是在鳳凰城和舊金山收集的，那裡也沒有機車海。
 </a:t>
             </a:r>
           </a:p>
@@ -2213,11 +2169,11 @@
                 <a:spcPct val="115000"/>
               </a:lnSpc>
               <a:spcAft>
-                <a:spcPts val="500"/>
+                <a:spcPts val="525"/>
               </a:spcAft>
             </a:pPr>
             <a:r>
-              <a:rPr sz="1000" b="1" lang="zh-TW" dirty="0">
+              <a:rPr sz="1050" b="1" lang="zh-TW" dirty="0">
                 <a:solidFill>
                   <a:srgbClr val="000000"/>
                 </a:solidFill>
@@ -2228,7 +2184,7 @@
               <a:t>所以這一塊，三個來源都補不到。</a:t>
             </a:r>
             <a:r>
-              <a:rPr sz="1000" lang="zh-TW" dirty="0">
+              <a:rPr sz="1050" lang="zh-TW" dirty="0">
                 <a:solidFill>
                   <a:srgbClr val="000000"/>
                 </a:solidFill>
@@ -2246,33 +2202,11 @@
                 <a:spcPct val="115000"/>
               </a:lnSpc>
               <a:spcAft>
-                <a:spcPts val="500"/>
+                <a:spcPts val="525"/>
               </a:spcAft>
             </a:pPr>
             <a:r>
-              <a:rPr sz="1000" lang="zh-TW" dirty="0">
-                <a:solidFill>
-                  <a:srgbClr val="000000"/>
-                </a:solidFill>
-                <a:latin typeface="Arial Unicode MS"/>
-                <a:ea typeface="Arial Unicode MS"/>
-                <a:cs typeface="Arial Unicode MS"/>
-              </a:rPr>
-              <a:t>（停一下，然後把語氣轉過來。）
-</a:t>
-            </a:r>
-          </a:p>
-          <a:p>
-            <a:pPr algn="l">
-              <a:lnSpc>
-                <a:spcPct val="115000"/>
-              </a:lnSpc>
-              <a:spcAft>
-                <a:spcPts val="500"/>
-              </a:spcAft>
-            </a:pPr>
-            <a:r>
-              <a:rPr sz="1000" lang="zh-TW" dirty="0">
+              <a:rPr sz="1050" lang="zh-TW" dirty="0">
                 <a:solidFill>
                   <a:srgbClr val="000000"/>
                 </a:solidFill>
@@ -2290,11 +2224,11 @@
                 <a:spcPct val="115000"/>
               </a:lnSpc>
               <a:spcAft>
-                <a:spcPts val="500"/>
+                <a:spcPts val="525"/>
               </a:spcAft>
             </a:pPr>
             <a:r>
-              <a:rPr sz="1000" b="1" lang="zh-TW" dirty="0">
+              <a:rPr sz="1050" b="1" lang="zh-TW" dirty="0">
                 <a:solidFill>
                   <a:srgbClr val="000000"/>
                 </a:solidFill>
@@ -2305,7 +2239,7 @@
               <a:t>如果一個問題，全世界的資料庫裡都沒有答案，而你剛好每天都在現場——那就是你的題目。</a:t>
             </a:r>
             <a:r>
-              <a:rPr sz="1000" lang="zh-TW" dirty="0">
+              <a:rPr sz="1050" lang="zh-TW" dirty="0">
                 <a:solidFill>
                   <a:srgbClr val="000000"/>
                 </a:solidFill>
@@ -2323,11 +2257,11 @@
                 <a:spcPct val="115000"/>
               </a:lnSpc>
               <a:spcAft>
-                <a:spcPts val="500"/>
+                <a:spcPts val="525"/>
               </a:spcAft>
             </a:pPr>
             <a:r>
-              <a:rPr sz="1000" lang="zh-TW" dirty="0">
+              <a:rPr sz="1050" lang="zh-TW" dirty="0">
                 <a:solidFill>
                   <a:srgbClr val="000000"/>
                 </a:solidFill>
@@ -2753,7 +2687,7 @@
                 <a:ea typeface="Arial Unicode MS"/>
                 <a:cs typeface="Arial Unicode MS"/>
               </a:rPr>
-              <a:t>（在白板上寫出來，讓學生看清楚「一句話」怎麼變成「四個範圍」。）
+              <a:t>我在白板上寫出來，讓大家看清楚一句話怎麼變成四個範圍。
 </a:t>
             </a:r>
           </a:p>
@@ -2885,7 +2819,7 @@
                 <a:ea typeface="Arial Unicode MS"/>
                 <a:cs typeface="Arial Unicode MS"/>
               </a:rPr>
-              <a:t>（再示範一個，如果時間夠：第七段「圓環，沒有號誌」→ 進入速度十到二十五公里、同時進入兩到六台、讓與不讓的機率各半。）
+              <a:t>我再示範一個。第七段「圓環，沒有號誌」，可以寫成：進入速度十到二十五公里、同時進入兩到六台、讓與不讓的機率各半。
 </a:t>
             </a:r>
           </a:p>
@@ -2951,7 +2885,7 @@
                 <a:ea typeface="Arial Unicode MS"/>
                 <a:cs typeface="Arial Unicode MS"/>
               </a:rPr>
-              <a:t>回家作業：挑一個</a:t>
+              <a:t>回家作業是這樣：挑一個</a:t>
             </a:r>
             <a:r>
               <a:rPr sz="1000" b="1" lang="zh-TW" dirty="0">
@@ -2995,7 +2929,7 @@
                 <a:ea typeface="Arial Unicode MS"/>
                 <a:cs typeface="Arial Unicode MS"/>
               </a:rPr>
-              <a:t>（這一題下週要收，會影響期末專題的起手式。）</a:t>
+              <a:t>這一題下週要收，它會影響各位期末專題的起手式。</a:t>
             </a:r>
           </a:p>
         </p:txBody>
@@ -3468,7 +3402,7 @@
                 <a:ea typeface="Arial Unicode MS"/>
                 <a:cs typeface="Arial Unicode MS"/>
               </a:rPr>
-              <a:t>（等學生回答。會有人說安全，有人說不一定。）
+              <a:t>會有人說安全，也會有人說不一定。
 </a:t>
             </a:r>
           </a:p>
@@ -3611,7 +3545,7 @@
                 <a:ea typeface="Arial Unicode MS"/>
                 <a:cs typeface="Arial Unicode MS"/>
               </a:rPr>
-              <a:t>（回頭指第一章那個數字）這就是為什麼需要一百一十億英里——因為你得靠「跑很多」來換「碰巧遇到」。這太沒效率了。
+              <a:t>我們回頭看第一章那個數字。這就是為什麼需要一百一十億英里——因為你得靠「跑很多」來換「碰巧遇到」。這太沒效率了。
 </a:t>
             </a:r>
           </a:p>
@@ -3699,7 +3633,7 @@
                 <a:ea typeface="Arial Unicode MS"/>
                 <a:cs typeface="Arial Unicode MS"/>
               </a:rPr>
-              <a:t>（scenario）。</a:t>
+              <a:t>英文叫 scenario。。</a:t>
             </a:r>
           </a:p>
         </p:txBody>
@@ -4073,7 +4007,7 @@
                 <a:ea typeface="Arial Unicode MS"/>
                 <a:cs typeface="Arial Unicode MS"/>
               </a:rPr>
-              <a:t>（預期答案：看得懂。）
+              <a:t>答案是看得懂。
 </a:t>
             </a:r>
           </a:p>
@@ -4227,7 +4161,7 @@
                 <a:ea typeface="Arial Unicode MS"/>
                 <a:cs typeface="Arial Unicode MS"/>
               </a:rPr>
-              <a:t>（一個實務例子：Waymo 的工程師每次安全駕駛介入，都要寫一句話描述發生什麼事。那一句話就是功能場景。）</a:t>
+              <a:t>講一個實際的例子。Waymo 的工程師每次安全員介入，都要寫一句話描述發生了什麼事。那一句話就是功能場景。</a:t>
             </a:r>
           </a:p>
         </p:txBody>
@@ -4568,7 +4502,7 @@
                 <a:ea typeface="Arial Unicode MS"/>
                 <a:cs typeface="Arial Unicode MS"/>
               </a:rPr>
-              <a:t>（讓學生想。這題有點難。）
+              <a:t>這題有點難，大家先想一下。
 </a:t>
             </a:r>
           </a:p>
@@ -5415,7 +5349,7 @@
                 <a:ea typeface="Arial Unicode MS"/>
                 <a:cs typeface="Arial Unicode MS"/>
               </a:rPr>
-              <a:t>（這句話值得寫在白板上。）
+              <a:t>這句話我寫在白板上。
 </a:t>
             </a:r>
           </a:p>
@@ -5855,7 +5789,7 @@
                 <a:ea typeface="Arial Unicode MS"/>
                 <a:cs typeface="Arial Unicode MS"/>
               </a:rPr>
-              <a:t>（讓學生看著自己的螢幕對照一次，這比講十遍有用。）
+              <a:t>請大家看著自己的螢幕對照一次，這比我講十遍有用。
 </a:t>
             </a:r>
           </a:p>
@@ -6119,7 +6053,7 @@
                 <a:ea typeface="Arial Unicode MS"/>
                 <a:cs typeface="Arial Unicode MS"/>
               </a:rPr>
-              <a:t>（播 2 分鐘。沒網路就跳過，用下面的問題討論。）
+              <a:t>我們播兩分鐘。
 </a:t>
             </a:r>
           </a:p>
@@ -6262,7 +6196,7 @@
                 <a:ea typeface="Arial Unicode MS"/>
                 <a:cs typeface="Arial Unicode MS"/>
               </a:rPr>
-              <a:t>（預期答案：危險。這就呼應第一節講的「模擬能做真實做不到的事」——這裡是用假人來達到類似的效果。）
+              <a:t>答案是危險。這就呼應第一節講的「模擬能做真實做不到的事」——在真實世界裡，他們是用假人來達到類似的效果。
 </a:t>
             </a:r>
           </a:p>
@@ -6328,7 +6262,7 @@
                 <a:ea typeface="Arial Unicode MS"/>
                 <a:cs typeface="Arial Unicode MS"/>
               </a:rPr>
-              <a:t>（答案：沒有。它有「一台機車」的場景，二〇二三年才加的。）
+              <a:t>答案是沒有。它有「一台機車」的場景，而且是二〇二三年才加進去的。
 </a:t>
             </a:r>
           </a:p>
@@ -6372,7 +6306,7 @@
                 <a:ea typeface="Arial Unicode MS"/>
                 <a:cs typeface="Arial Unicode MS"/>
               </a:rPr>
-              <a:t>（讓學生自己說出「不一定」。這是下一段的引子。）</a:t>
+              <a:t>這一句我想聽大家自己說出「不一定」，那就是下一段要講的事。</a:t>
             </a:r>
           </a:p>
         </p:txBody>

--- a/第四週(10-01)/第四週_第2節_簡報.pptx
+++ b/第四週(10-01)/第四週_第2節_簡報.pptx
@@ -6075,7 +6075,7 @@
                 <a:ea typeface="Arial Unicode MS"/>
                 <a:cs typeface="Arial Unicode MS"/>
               </a:rPr>
-              <a:t>看的時候注意一件事：那個假人腳踏車，是用</a:t>
+              <a:t>看的時候注意一件事：Euro NCAP 的測試規程裡，那個假人腳踏車是用</a:t>
             </a:r>
             <a:r>
               <a:rPr sz="1000" b="1" lang="zh-TW" dirty="0">
@@ -16204,7 +16204,7 @@
                 <a:ea typeface="Arial" pitchFamily="34" charset="-122"/>
                 <a:cs typeface="Arial" pitchFamily="34" charset="-120"/>
               </a:rPr>
-              <a:t>Chú ý: con búp bê xe đạp chạy ra ở đúng một tốc độ, đúng một vị trí</a:t>
+              <a:t>Quy trình quy định: búp bê xe đạp chạy ra ở đúng một tốc độ, một vị trí</a:t>
             </a:r>
             <a:endParaRPr lang="en-US" sz="950" dirty="0"/>
           </a:p>
@@ -16224,7 +16224,7 @@
                 <a:ea typeface="微軟正黑體" pitchFamily="34" charset="-122"/>
                 <a:cs typeface="微軟正黑體" pitchFamily="34" charset="-120"/>
               </a:rPr>
-              <a:t>注意看：那個假人腳踏車是用固定的速度、固定的位置衝出來的</a:t>
+              <a:t>測試規程訂死：假人腳踏車固定速度、固定位置衝出來</a:t>
             </a:r>
             <a:endParaRPr lang="en-US" sz="950" dirty="0"/>
           </a:p>

--- a/第四週(10-01)/第四週_第2節_簡報.pptx
+++ b/第四週(10-01)/第四週_第2節_簡報.pptx
@@ -6700,8 +6700,8 @@
         </p:nvSpPr>
         <p:spPr>
           <a:xfrm>
-            <a:off x="6766560" y="-1371600"/>
-            <a:ext cx="4206240" cy="4206240"/>
+            <a:off x="6130753" y="-947729"/>
+            <a:ext cx="2987610" cy="2987610"/>
           </a:xfrm>
           <a:prstGeom prst="ellipse">
             <a:avLst/>
@@ -6725,8 +6725,8 @@
         </p:nvSpPr>
         <p:spPr>
           <a:xfrm>
-            <a:off x="7863840" y="3108960"/>
-            <a:ext cx="2560320" cy="2560320"/>
+            <a:off x="7104973" y="1520297"/>
+            <a:ext cx="1688649" cy="1688649"/>
           </a:xfrm>
           <a:prstGeom prst="ellipse">
             <a:avLst/>
@@ -6747,8 +6747,8 @@
         </p:nvSpPr>
         <p:spPr>
           <a:xfrm>
-            <a:off x="502920" y="1207008"/>
-            <a:ext cx="6949440" cy="274320"/>
+            <a:off x="1681812" y="883806"/>
+            <a:ext cx="4936051" cy="194844"/>
           </a:xfrm>
           <a:prstGeom prst="rect">
             <a:avLst/>
@@ -6764,7 +6764,7 @@
               <a:buNone/>
             </a:pPr>
             <a:r>
-              <a:rPr lang="en-US" sz="1250" b="1" dirty="0">
+              <a:rPr lang="en-US" sz="890" b="1" dirty="0">
                 <a:solidFill>
                   <a:srgbClr val="00A896"/>
                 </a:solidFill>
@@ -6774,7 +6774,7 @@
               </a:rPr>
               <a:t>MITUST · Nguyên lý xe tự lái · Tuần 4</a:t>
             </a:r>
-            <a:endParaRPr lang="en-US" sz="1250" dirty="0"/>
+            <a:endParaRPr lang="en-US" sz="890" dirty="0"/>
           </a:p>
         </p:txBody>
       </p:sp>
@@ -6786,8 +6786,8 @@
         </p:nvSpPr>
         <p:spPr>
           <a:xfrm>
-            <a:off x="502920" y="1572768"/>
-            <a:ext cx="7498080" cy="885499"/>
+            <a:off x="1681812" y="1143598"/>
+            <a:ext cx="5325739" cy="628953"/>
           </a:xfrm>
           <a:prstGeom prst="rect">
             <a:avLst/>
@@ -6806,7 +6806,7 @@
               <a:buNone/>
             </a:pPr>
             <a:r>
-              <a:rPr lang="en-US" sz="3400" b="1" dirty="0">
+              <a:rPr lang="en-US" sz="2410" b="1" dirty="0">
                 <a:solidFill>
                   <a:srgbClr val="FFFFFF"/>
                 </a:solidFill>
@@ -6816,7 +6816,7 @@
               </a:rPr>
               <a:t>Đo bằng số km là sai đơn vị</a:t>
             </a:r>
-            <a:endParaRPr lang="en-US" sz="3400" dirty="0"/>
+            <a:endParaRPr lang="en-US" sz="2410" dirty="0"/>
           </a:p>
           <a:p>
             <a:pPr indent="0" marL="0">
@@ -6826,7 +6826,7 @@
               <a:buNone/>
             </a:pPr>
             <a:r>
-              <a:rPr lang="en-US" sz="1900" dirty="0">
+              <a:rPr lang="en-US" sz="1350" dirty="0">
                 <a:solidFill>
                   <a:srgbClr val="C8D6E2"/>
                 </a:solidFill>
@@ -6836,7 +6836,7 @@
               </a:rPr>
               <a:t>用「跑了幾公里」來衡量，單位就選錯了</a:t>
             </a:r>
-            <a:endParaRPr lang="en-US" sz="3400" dirty="0"/>
+            <a:endParaRPr lang="en-US" sz="2410" dirty="0"/>
           </a:p>
         </p:txBody>
       </p:sp>
@@ -6848,8 +6848,8 @@
         </p:nvSpPr>
         <p:spPr>
           <a:xfrm>
-            <a:off x="502920" y="2787554"/>
-            <a:ext cx="1371600" cy="41148"/>
+            <a:off x="1681812" y="2006437"/>
+            <a:ext cx="974221" cy="29227"/>
           </a:xfrm>
           <a:prstGeom prst="rect">
             <a:avLst/>
@@ -6868,8 +6868,8 @@
         </p:nvSpPr>
         <p:spPr>
           <a:xfrm>
-            <a:off x="502920" y="2988722"/>
-            <a:ext cx="7132320" cy="833470"/>
+            <a:off x="1681812" y="2149323"/>
+            <a:ext cx="5065947" cy="591997"/>
           </a:xfrm>
           <a:prstGeom prst="rect">
             <a:avLst/>
@@ -6888,7 +6888,7 @@
               <a:buNone/>
             </a:pPr>
             <a:r>
-              <a:rPr lang="en-US" sz="1450" dirty="0">
+              <a:rPr lang="en-US" sz="1030" dirty="0">
                 <a:solidFill>
                   <a:srgbClr val="C8D6E2"/>
                 </a:solidFill>
@@ -6898,7 +6898,7 @@
               </a:rPr>
               <a:t>Đơn vị đúng là kịch bản — và cách dùng mô phỏng là quét tham số, không phải chạy đường dài</a:t>
             </a:r>
-            <a:endParaRPr lang="en-US" sz="1450" dirty="0"/>
+            <a:endParaRPr lang="en-US" sz="1030" dirty="0"/>
           </a:p>
           <a:p>
             <a:pPr indent="0" marL="0">
@@ -6908,7 +6908,7 @@
               <a:buNone/>
             </a:pPr>
             <a:r>
-              <a:rPr lang="en-US" sz="1250" dirty="0">
+              <a:rPr lang="en-US" sz="890" dirty="0">
                 <a:solidFill>
                   <a:srgbClr val="8AA0B4"/>
                 </a:solidFill>
@@ -6918,7 +6918,7 @@
               </a:rPr>
               <a:t>正確的單位是「場景」——模擬的用法是掃參數，不是跑里程</a:t>
             </a:r>
-            <a:endParaRPr lang="en-US" sz="1450" dirty="0"/>
+            <a:endParaRPr lang="en-US" sz="1030" dirty="0"/>
           </a:p>
         </p:txBody>
       </p:sp>
@@ -6930,8 +6930,8 @@
         </p:nvSpPr>
         <p:spPr>
           <a:xfrm>
-            <a:off x="502920" y="3895344"/>
-            <a:ext cx="5943600" cy="384048"/>
+            <a:off x="1681812" y="2793278"/>
+            <a:ext cx="4221622" cy="272782"/>
           </a:xfrm>
           <a:prstGeom prst="roundRect">
             <a:avLst>
@@ -6952,8 +6952,8 @@
         </p:nvSpPr>
         <p:spPr>
           <a:xfrm>
-            <a:off x="630936" y="3941064"/>
-            <a:ext cx="5687568" cy="292608"/>
+            <a:off x="1772740" y="2825752"/>
+            <a:ext cx="4039768" cy="207834"/>
           </a:xfrm>
           <a:prstGeom prst="rect">
             <a:avLst/>
@@ -6969,7 +6969,7 @@
               <a:buNone/>
             </a:pPr>
             <a:r>
-              <a:rPr lang="en-US" sz="1050" b="1" dirty="0">
+              <a:rPr lang="en-US" sz="750" b="1" dirty="0">
                 <a:solidFill>
                   <a:srgbClr val="9FD6CE"/>
                 </a:solidFill>
@@ -6979,7 +6979,7 @@
               </a:rPr>
               <a:t>工具｜Công cụ： ch-neural.github.io/MITUST-Principles-of-Self-Driving-Cars/week4/sim/</a:t>
             </a:r>
-            <a:endParaRPr lang="en-US" sz="1050" dirty="0"/>
+            <a:endParaRPr lang="en-US" sz="750" dirty="0"/>
           </a:p>
         </p:txBody>
       </p:sp>
@@ -6991,8 +6991,8 @@
         </p:nvSpPr>
         <p:spPr>
           <a:xfrm>
-            <a:off x="502920" y="4370832"/>
-            <a:ext cx="6949440" cy="274320"/>
+            <a:off x="1681812" y="3131008"/>
+            <a:ext cx="4936051" cy="194844"/>
           </a:xfrm>
           <a:prstGeom prst="rect">
             <a:avLst/>
@@ -7008,7 +7008,7 @@
               <a:buNone/>
             </a:pPr>
             <a:r>
-              <a:rPr lang="en-US" sz="1150" dirty="0">
+              <a:rPr lang="en-US" sz="820" dirty="0">
                 <a:solidFill>
                   <a:srgbClr val="8AA0B4"/>
                 </a:solidFill>
@@ -7018,7 +7018,7 @@
               </a:rPr>
               <a:t>第四週 第 2 節　2026/10/01（四）10:10–11:00　CH Tseng</a:t>
             </a:r>
-            <a:endParaRPr lang="en-US" sz="1150" dirty="0"/>
+            <a:endParaRPr lang="en-US" sz="820" dirty="0"/>
           </a:p>
         </p:txBody>
       </p:sp>
@@ -7030,8 +7030,8 @@
         </p:nvSpPr>
         <p:spPr>
           <a:xfrm>
-            <a:off x="356616" y="310896"/>
-            <a:ext cx="2212848" cy="749808"/>
+            <a:off x="1577895" y="247315"/>
+            <a:ext cx="1571743" cy="532574"/>
           </a:xfrm>
           <a:prstGeom prst="roundRect">
             <a:avLst>
@@ -7060,8 +7060,8 @@
         </p:blipFill>
         <p:spPr>
           <a:xfrm>
-            <a:off x="502920" y="475488"/>
-            <a:ext cx="1920240" cy="424269"/>
+            <a:off x="1681812" y="364222"/>
+            <a:ext cx="1363909" cy="301350"/>
           </a:xfrm>
           <a:prstGeom prst="rect">
             <a:avLst/>
@@ -7108,8 +7108,8 @@
         </p:nvSpPr>
         <p:spPr>
           <a:xfrm>
-            <a:off x="6766560" y="-1371600"/>
-            <a:ext cx="4206240" cy="4206240"/>
+            <a:off x="6130753" y="-947729"/>
+            <a:ext cx="2987610" cy="2987610"/>
           </a:xfrm>
           <a:prstGeom prst="ellipse">
             <a:avLst/>
@@ -7133,8 +7133,8 @@
         </p:nvSpPr>
         <p:spPr>
           <a:xfrm>
-            <a:off x="7863840" y="3108960"/>
-            <a:ext cx="2560320" cy="2560320"/>
+            <a:off x="7104973" y="1520297"/>
+            <a:ext cx="1688649" cy="1688649"/>
           </a:xfrm>
           <a:prstGeom prst="ellipse">
             <a:avLst/>
@@ -7155,8 +7155,8 @@
         </p:nvSpPr>
         <p:spPr>
           <a:xfrm>
-            <a:off x="502920" y="1691640"/>
-            <a:ext cx="4572000" cy="310896"/>
+            <a:off x="1681812" y="1228031"/>
+            <a:ext cx="3247402" cy="220823"/>
           </a:xfrm>
           <a:prstGeom prst="rect">
             <a:avLst/>
@@ -7171,7 +7171,7 @@
             <a:pPr indent="0" marL="0">
               <a:buNone/>
             </a:pPr>
-            <a:endParaRPr lang="en-US" sz="1350" dirty="0"/>
+            <a:endParaRPr lang="en-US" sz="960" dirty="0"/>
           </a:p>
         </p:txBody>
       </p:sp>
@@ -7183,8 +7183,8 @@
         </p:nvSpPr>
         <p:spPr>
           <a:xfrm>
-            <a:off x="502920" y="2048256"/>
-            <a:ext cx="7315200" cy="1188720"/>
+            <a:off x="1681812" y="1481328"/>
+            <a:ext cx="5195843" cy="844324"/>
           </a:xfrm>
           <a:prstGeom prst="rect">
             <a:avLst/>
@@ -7203,7 +7203,7 @@
               <a:buNone/>
             </a:pPr>
             <a:r>
-              <a:rPr lang="en-US" sz="2900" b="1" dirty="0">
+              <a:rPr lang="en-US" sz="2060" b="1" dirty="0">
                 <a:solidFill>
                   <a:srgbClr val="FFFFFF"/>
                 </a:solidFill>
@@ -7213,7 +7213,7 @@
               </a:rPr>
               <a:t>Kịch bản lấy từ đâu ra</a:t>
             </a:r>
-            <a:endParaRPr lang="en-US" sz="2900" dirty="0"/>
+            <a:endParaRPr lang="en-US" sz="2060" dirty="0"/>
           </a:p>
           <a:p>
             <a:pPr indent="0" marL="0">
@@ -7223,7 +7223,7 @@
               <a:buNone/>
             </a:pPr>
             <a:r>
-              <a:rPr lang="en-US" sz="1700" dirty="0">
+              <a:rPr lang="en-US" sz="1210" dirty="0">
                 <a:solidFill>
                   <a:srgbClr val="AFC3D4"/>
                 </a:solidFill>
@@ -7233,7 +7233,7 @@
               </a:rPr>
               <a:t>場景是從哪裡來的</a:t>
             </a:r>
-            <a:endParaRPr lang="en-US" sz="2900" dirty="0"/>
+            <a:endParaRPr lang="en-US" sz="2060" dirty="0"/>
           </a:p>
         </p:txBody>
       </p:sp>
@@ -7245,8 +7245,8 @@
         </p:nvSpPr>
         <p:spPr>
           <a:xfrm>
-            <a:off x="109728" y="4791456"/>
-            <a:ext cx="822960" cy="256032"/>
+            <a:off x="1402536" y="3390800"/>
+            <a:ext cx="584532" cy="181855"/>
           </a:xfrm>
           <a:prstGeom prst="rect">
             <a:avLst/>
@@ -7262,7 +7262,7 @@
               <a:buNone/>
             </a:pPr>
             <a:r>
-              <a:rPr lang="en-US" sz="900" dirty="0">
+              <a:rPr lang="en-US" sz="640" dirty="0">
                 <a:solidFill>
                   <a:srgbClr val="9FB3C8"/>
                 </a:solidFill>
@@ -7272,7 +7272,7 @@
               </a:rPr>
               <a:t>10 / 16</a:t>
             </a:r>
-            <a:endParaRPr lang="en-US" sz="900" dirty="0"/>
+            <a:endParaRPr lang="en-US" sz="640" dirty="0"/>
           </a:p>
         </p:txBody>
       </p:sp>
@@ -7284,8 +7284,8 @@
         </p:nvSpPr>
         <p:spPr>
           <a:xfrm>
-            <a:off x="960120" y="4791456"/>
-            <a:ext cx="2011680" cy="256032"/>
+            <a:off x="2006553" y="3390800"/>
+            <a:ext cx="1428857" cy="181855"/>
           </a:xfrm>
           <a:prstGeom prst="rect">
             <a:avLst/>
@@ -7301,7 +7301,7 @@
               <a:buNone/>
             </a:pPr>
             <a:r>
-              <a:rPr lang="en-US" sz="900" dirty="0">
+              <a:rPr lang="en-US" sz="640" dirty="0">
                 <a:solidFill>
                   <a:srgbClr val="9FB3C8"/>
                 </a:solidFill>
@@ -7311,7 +7311,7 @@
               </a:rPr>
               <a:t>Tiết 2 · 第 2 節</a:t>
             </a:r>
-            <a:endParaRPr lang="en-US" sz="900" dirty="0"/>
+            <a:endParaRPr lang="en-US" sz="640" dirty="0"/>
           </a:p>
         </p:txBody>
       </p:sp>
@@ -7348,8 +7348,8 @@
         </p:nvSpPr>
         <p:spPr>
           <a:xfrm>
-            <a:off x="502920" y="420624"/>
-            <a:ext cx="8138160" cy="274320"/>
+            <a:off x="1681812" y="325253"/>
+            <a:ext cx="5780375" cy="194844"/>
           </a:xfrm>
           <a:prstGeom prst="rect">
             <a:avLst/>
@@ -7365,7 +7365,7 @@
               <a:buNone/>
             </a:pPr>
             <a:r>
-              <a:rPr lang="en-US" sz="1250" b="1" dirty="0">
+              <a:rPr lang="en-US" sz="890" b="1" dirty="0">
                 <a:solidFill>
                   <a:srgbClr val="007F72"/>
                 </a:solidFill>
@@ -7375,7 +7375,7 @@
               </a:rPr>
               <a:t>Nguồn 1 / 3 · 來源之一</a:t>
             </a:r>
-            <a:endParaRPr lang="en-US" sz="1250" dirty="0"/>
+            <a:endParaRPr lang="en-US" sz="890" dirty="0"/>
           </a:p>
         </p:txBody>
       </p:sp>
@@ -7387,8 +7387,8 @@
         </p:nvSpPr>
         <p:spPr>
           <a:xfrm>
-            <a:off x="502920" y="1101852"/>
-            <a:ext cx="2468880" cy="2514600"/>
+            <a:off x="1681812" y="809116"/>
+            <a:ext cx="1753597" cy="1786071"/>
           </a:xfrm>
           <a:prstGeom prst="roundRect">
             <a:avLst>
@@ -7414,8 +7414,8 @@
         </p:nvSpPr>
         <p:spPr>
           <a:xfrm>
-            <a:off x="1113739" y="1820570"/>
-            <a:ext cx="1247242" cy="340157"/>
+            <a:off x="2115665" y="1319607"/>
+            <a:ext cx="885891" cy="241607"/>
           </a:xfrm>
           <a:prstGeom prst="triangle">
             <a:avLst/>
@@ -7434,8 +7434,8 @@
         </p:nvSpPr>
         <p:spPr>
           <a:xfrm>
-            <a:off x="1113739" y="2189074"/>
-            <a:ext cx="1247242" cy="99212"/>
+            <a:off x="2115665" y="1581348"/>
+            <a:ext cx="885891" cy="70469"/>
           </a:xfrm>
           <a:prstGeom prst="rect">
             <a:avLst/>
@@ -7454,8 +7454,8 @@
         </p:nvSpPr>
         <p:spPr>
           <a:xfrm>
-            <a:off x="1255471" y="2316632"/>
-            <a:ext cx="141732" cy="453542"/>
+            <a:off x="2216335" y="1671950"/>
+            <a:ext cx="100669" cy="322142"/>
           </a:xfrm>
           <a:prstGeom prst="rect">
             <a:avLst/>
@@ -7476,8 +7476,8 @@
         </p:nvSpPr>
         <p:spPr>
           <a:xfrm>
-            <a:off x="1538935" y="2316632"/>
-            <a:ext cx="141732" cy="453542"/>
+            <a:off x="2417674" y="1671950"/>
+            <a:ext cx="100669" cy="322142"/>
           </a:xfrm>
           <a:prstGeom prst="rect">
             <a:avLst/>
@@ -7498,8 +7498,8 @@
         </p:nvSpPr>
         <p:spPr>
           <a:xfrm>
-            <a:off x="1822399" y="2316632"/>
-            <a:ext cx="141732" cy="453542"/>
+            <a:off x="2619013" y="1671950"/>
+            <a:ext cx="100669" cy="322142"/>
           </a:xfrm>
           <a:prstGeom prst="rect">
             <a:avLst/>
@@ -7520,8 +7520,8 @@
         </p:nvSpPr>
         <p:spPr>
           <a:xfrm>
-            <a:off x="2105863" y="2316632"/>
-            <a:ext cx="141732" cy="453542"/>
+            <a:off x="2820351" y="1671950"/>
+            <a:ext cx="100669" cy="322142"/>
           </a:xfrm>
           <a:prstGeom prst="rect">
             <a:avLst/>
@@ -7542,8 +7542,8 @@
         </p:nvSpPr>
         <p:spPr>
           <a:xfrm>
-            <a:off x="1085393" y="2784348"/>
-            <a:ext cx="1303934" cy="127559"/>
+            <a:off x="2095531" y="2004160"/>
+            <a:ext cx="926159" cy="90603"/>
           </a:xfrm>
           <a:prstGeom prst="rect">
             <a:avLst/>
@@ -7562,8 +7562,8 @@
         </p:nvSpPr>
         <p:spPr>
           <a:xfrm>
-            <a:off x="3429000" y="1319005"/>
-            <a:ext cx="5212080" cy="1005611"/>
+            <a:off x="3760150" y="963355"/>
+            <a:ext cx="3702038" cy="714266"/>
           </a:xfrm>
           <a:prstGeom prst="rect">
             <a:avLst/>
@@ -7582,7 +7582,7 @@
               <a:buNone/>
             </a:pPr>
             <a:r>
-              <a:rPr lang="en-US" sz="2300" b="1" dirty="0">
+              <a:rPr lang="en-US" sz="1630" b="1" dirty="0">
                 <a:solidFill>
                   <a:srgbClr val="0B1F3A"/>
                 </a:solidFill>
@@ -7592,7 +7592,7 @@
               </a:rPr>
               <a:t>Từ quy định và tiêu chuẩn: ai muốn bán xe thì bắt buộc phải qua</a:t>
             </a:r>
-            <a:endParaRPr lang="en-US" sz="2300" dirty="0"/>
+            <a:endParaRPr lang="en-US" sz="1630" dirty="0"/>
           </a:p>
           <a:p>
             <a:pPr indent="0" marL="0">
@@ -7602,7 +7602,7 @@
               <a:buNone/>
             </a:pPr>
             <a:r>
-              <a:rPr lang="en-US" sz="1400" dirty="0">
+              <a:rPr lang="en-US" sz="990" dirty="0">
                 <a:solidFill>
                   <a:srgbClr val="007F72"/>
                 </a:solidFill>
@@ -7612,7 +7612,7 @@
               </a:rPr>
               <a:t>來自法規與標準：想賣車就一定要通過</a:t>
             </a:r>
-            <a:endParaRPr lang="en-US" sz="2300" dirty="0"/>
+            <a:endParaRPr lang="en-US" sz="1630" dirty="0"/>
           </a:p>
         </p:txBody>
       </p:sp>
@@ -7624,8 +7624,8 @@
         </p:nvSpPr>
         <p:spPr>
           <a:xfrm>
-            <a:off x="3429000" y="2416057"/>
-            <a:ext cx="5212080" cy="1074682"/>
+            <a:off x="3760150" y="1742570"/>
+            <a:ext cx="3702038" cy="763326"/>
           </a:xfrm>
           <a:prstGeom prst="rect">
             <a:avLst/>
@@ -7644,7 +7644,7 @@
               <a:buNone/>
             </a:pPr>
             <a:r>
-              <a:rPr lang="en-US" sz="1250" dirty="0">
+              <a:rPr lang="en-US" sz="890" dirty="0">
                 <a:solidFill>
                   <a:srgbClr val="5F7183"/>
                 </a:solidFill>
@@ -7654,7 +7654,7 @@
               </a:rPr>
               <a:t>Euro NCAP kiểm tra phanh tự động với xe, với người đi bộ, và từ 2023 thêm xe máy. Còn có ISO 34502 — một bộ khung quy định kịch bản phải viết như thế nào.</a:t>
             </a:r>
-            <a:endParaRPr lang="en-US" sz="1250" dirty="0"/>
+            <a:endParaRPr lang="en-US" sz="890" dirty="0"/>
           </a:p>
           <a:p>
             <a:pPr indent="0" marL="0">
@@ -7664,7 +7664,7 @@
               <a:buNone/>
             </a:pPr>
             <a:r>
-              <a:rPr lang="en-US" sz="1150" dirty="0">
+              <a:rPr lang="en-US" sz="820" dirty="0">
                 <a:solidFill>
                   <a:srgbClr val="5F7183"/>
                 </a:solidFill>
@@ -7674,7 +7674,7 @@
               </a:rPr>
               <a:t>Euro NCAP 測自動緊急煞車：對車、對行人，2023 年起加上機車。另外還有 ISO 34502，規定場景要怎麼寫的框架。</a:t>
             </a:r>
-            <a:endParaRPr lang="en-US" sz="1250" dirty="0"/>
+            <a:endParaRPr lang="en-US" sz="890" dirty="0"/>
           </a:p>
         </p:txBody>
       </p:sp>
@@ -7686,8 +7686,8 @@
         </p:nvSpPr>
         <p:spPr>
           <a:xfrm>
-            <a:off x="502920" y="3913632"/>
-            <a:ext cx="8138160" cy="621792"/>
+            <a:off x="1681812" y="2806268"/>
+            <a:ext cx="5780375" cy="441647"/>
           </a:xfrm>
           <a:prstGeom prst="roundRect">
             <a:avLst>
@@ -7713,8 +7713,8 @@
         </p:nvSpPr>
         <p:spPr>
           <a:xfrm>
-            <a:off x="685800" y="3986784"/>
-            <a:ext cx="7772400" cy="493776"/>
+            <a:off x="1811708" y="2858226"/>
+            <a:ext cx="5520583" cy="350719"/>
           </a:xfrm>
           <a:prstGeom prst="rect">
             <a:avLst/>
@@ -7733,7 +7733,7 @@
               <a:buNone/>
             </a:pPr>
             <a:r>
-              <a:rPr lang="en-US" sz="1250" b="1" dirty="0">
+              <a:rPr lang="en-US" sz="890" b="1" dirty="0">
                 <a:solidFill>
                   <a:srgbClr val="7A4E00"/>
                 </a:solidFill>
@@ -7743,7 +7743,7 @@
               </a:rPr>
               <a:t>Ưu điểm: rõ ràng, ai cũng phải theo. Nhược điểm: ít, và luôn chậm hơn thực tế vài năm.</a:t>
             </a:r>
-            <a:endParaRPr lang="en-US" sz="1250" dirty="0"/>
+            <a:endParaRPr lang="en-US" sz="890" dirty="0"/>
           </a:p>
           <a:p>
             <a:pPr indent="0" marL="0">
@@ -7753,7 +7753,7 @@
               <a:buNone/>
             </a:pPr>
             <a:r>
-              <a:rPr lang="en-US" sz="1150" dirty="0">
+              <a:rPr lang="en-US" sz="820" dirty="0">
                 <a:solidFill>
                   <a:srgbClr val="7A4E00"/>
                 </a:solidFill>
@@ -7763,7 +7763,7 @@
               </a:rPr>
               <a:t>優點：明確，大家都得照做。缺點：數量少，而且永遠落後現實好幾年。</a:t>
             </a:r>
-            <a:endParaRPr lang="en-US" sz="1250" dirty="0"/>
+            <a:endParaRPr lang="en-US" sz="890" dirty="0"/>
           </a:p>
         </p:txBody>
       </p:sp>
@@ -7783,8 +7783,8 @@
         </p:blipFill>
         <p:spPr>
           <a:xfrm>
-            <a:off x="7516368" y="4718304"/>
-            <a:ext cx="1097280" cy="242439"/>
+            <a:off x="6663327" y="3338842"/>
+            <a:ext cx="779376" cy="172200"/>
           </a:xfrm>
           <a:prstGeom prst="rect">
             <a:avLst/>
@@ -7799,8 +7799,8 @@
         </p:nvSpPr>
         <p:spPr>
           <a:xfrm>
-            <a:off x="109728" y="4791456"/>
-            <a:ext cx="822960" cy="256032"/>
+            <a:off x="1402536" y="3390800"/>
+            <a:ext cx="584532" cy="181855"/>
           </a:xfrm>
           <a:prstGeom prst="rect">
             <a:avLst/>
@@ -7816,7 +7816,7 @@
               <a:buNone/>
             </a:pPr>
             <a:r>
-              <a:rPr lang="en-US" sz="900" dirty="0">
+              <a:rPr lang="en-US" sz="640" dirty="0">
                 <a:solidFill>
                   <a:srgbClr val="5F7183"/>
                 </a:solidFill>
@@ -7826,7 +7826,7 @@
               </a:rPr>
               <a:t>11 / 16</a:t>
             </a:r>
-            <a:endParaRPr lang="en-US" sz="900" dirty="0"/>
+            <a:endParaRPr lang="en-US" sz="640" dirty="0"/>
           </a:p>
         </p:txBody>
       </p:sp>
@@ -7838,8 +7838,8 @@
         </p:nvSpPr>
         <p:spPr>
           <a:xfrm>
-            <a:off x="960120" y="4791456"/>
-            <a:ext cx="2011680" cy="256032"/>
+            <a:off x="2006553" y="3390800"/>
+            <a:ext cx="1428857" cy="181855"/>
           </a:xfrm>
           <a:prstGeom prst="rect">
             <a:avLst/>
@@ -7855,7 +7855,7 @@
               <a:buNone/>
             </a:pPr>
             <a:r>
-              <a:rPr lang="en-US" sz="900" dirty="0">
+              <a:rPr lang="en-US" sz="640" dirty="0">
                 <a:solidFill>
                   <a:srgbClr val="5F7183"/>
                 </a:solidFill>
@@ -7865,7 +7865,7 @@
               </a:rPr>
               <a:t>Tiết 2 · 第 2 節</a:t>
             </a:r>
-            <a:endParaRPr lang="en-US" sz="900" dirty="0"/>
+            <a:endParaRPr lang="en-US" sz="640" dirty="0"/>
           </a:p>
         </p:txBody>
       </p:sp>
@@ -7902,8 +7902,8 @@
         </p:nvSpPr>
         <p:spPr>
           <a:xfrm>
-            <a:off x="502920" y="420624"/>
-            <a:ext cx="8138160" cy="274320"/>
+            <a:off x="1681812" y="325253"/>
+            <a:ext cx="5780375" cy="194844"/>
           </a:xfrm>
           <a:prstGeom prst="rect">
             <a:avLst/>
@@ -7919,7 +7919,7 @@
               <a:buNone/>
             </a:pPr>
             <a:r>
-              <a:rPr lang="en-US" sz="1250" b="1" dirty="0">
+              <a:rPr lang="en-US" sz="890" b="1" dirty="0">
                 <a:solidFill>
                   <a:srgbClr val="007F72"/>
                 </a:solidFill>
@@ -7929,7 +7929,7 @@
               </a:rPr>
               <a:t>Nguồn 2 / 3 · 來源之二</a:t>
             </a:r>
-            <a:endParaRPr lang="en-US" sz="1250" dirty="0"/>
+            <a:endParaRPr lang="en-US" sz="890" dirty="0"/>
           </a:p>
         </p:txBody>
       </p:sp>
@@ -7941,8 +7941,8 @@
         </p:nvSpPr>
         <p:spPr>
           <a:xfrm>
-            <a:off x="502920" y="1101852"/>
-            <a:ext cx="2468880" cy="2514600"/>
+            <a:off x="1681812" y="809116"/>
+            <a:ext cx="1753597" cy="1786071"/>
           </a:xfrm>
           <a:prstGeom prst="roundRect">
             <a:avLst>
@@ -7968,8 +7968,8 @@
         </p:nvSpPr>
         <p:spPr>
           <a:xfrm>
-            <a:off x="1085393" y="1792224"/>
-            <a:ext cx="1303934" cy="1133856"/>
+            <a:off x="2095531" y="1299473"/>
+            <a:ext cx="926159" cy="805356"/>
           </a:xfrm>
           <a:prstGeom prst="triangle">
             <a:avLst/>
@@ -7988,8 +7988,8 @@
         </p:nvSpPr>
         <p:spPr>
           <a:xfrm>
-            <a:off x="1680667" y="2189074"/>
-            <a:ext cx="113386" cy="368503"/>
+            <a:off x="2518343" y="1581348"/>
+            <a:ext cx="80536" cy="261741"/>
           </a:xfrm>
           <a:prstGeom prst="rect">
             <a:avLst/>
@@ -8008,8 +8008,8 @@
         </p:nvSpPr>
         <p:spPr>
           <a:xfrm>
-            <a:off x="1666494" y="2642616"/>
-            <a:ext cx="141732" cy="141732"/>
+            <a:off x="2508276" y="1903490"/>
+            <a:ext cx="100669" cy="100669"/>
           </a:xfrm>
           <a:prstGeom prst="ellipse">
             <a:avLst/>
@@ -8028,8 +8028,8 @@
         </p:nvSpPr>
         <p:spPr>
           <a:xfrm>
-            <a:off x="3429000" y="1319005"/>
-            <a:ext cx="5212080" cy="1005611"/>
+            <a:off x="3760150" y="963355"/>
+            <a:ext cx="3702038" cy="714266"/>
           </a:xfrm>
           <a:prstGeom prst="rect">
             <a:avLst/>
@@ -8048,7 +8048,7 @@
               <a:buNone/>
             </a:pPr>
             <a:r>
-              <a:rPr lang="en-US" sz="2300" b="1" dirty="0">
+              <a:rPr lang="en-US" sz="1630" b="1" dirty="0">
                 <a:solidFill>
                   <a:srgbClr val="0B1F3A"/>
                 </a:solidFill>
@@ -8058,7 +8058,7 @@
               </a:rPr>
               <a:t>Từ cơ sở dữ liệu tai nạn: lấy tai nạn thật dựng lại thành kịch bản</a:t>
             </a:r>
-            <a:endParaRPr lang="en-US" sz="2300" dirty="0"/>
+            <a:endParaRPr lang="en-US" sz="1630" dirty="0"/>
           </a:p>
           <a:p>
             <a:pPr indent="0" marL="0">
@@ -8068,7 +8068,7 @@
               <a:buNone/>
             </a:pPr>
             <a:r>
-              <a:rPr lang="en-US" sz="1400" dirty="0">
+              <a:rPr lang="en-US" sz="990" dirty="0">
                 <a:solidFill>
                   <a:srgbClr val="007F72"/>
                 </a:solidFill>
@@ -8078,7 +8078,7 @@
               </a:rPr>
               <a:t>來自事故資料庫：把真實發生過的事故還原成場景</a:t>
             </a:r>
-            <a:endParaRPr lang="en-US" sz="2300" dirty="0"/>
+            <a:endParaRPr lang="en-US" sz="1630" dirty="0"/>
           </a:p>
         </p:txBody>
       </p:sp>
@@ -8090,8 +8090,8 @@
         </p:nvSpPr>
         <p:spPr>
           <a:xfrm>
-            <a:off x="3429000" y="2416057"/>
-            <a:ext cx="5212080" cy="1074682"/>
+            <a:off x="3760150" y="1742570"/>
+            <a:ext cx="3702038" cy="763326"/>
           </a:xfrm>
           <a:prstGeom prst="rect">
             <a:avLst/>
@@ -8110,7 +8110,7 @@
               <a:buNone/>
             </a:pPr>
             <a:r>
-              <a:rPr lang="en-US" sz="1250" dirty="0">
+              <a:rPr lang="en-US" sz="890" dirty="0">
                 <a:solidFill>
                   <a:srgbClr val="5F7183"/>
                 </a:solidFill>
@@ -8120,7 +8120,7 @@
               </a:rPr>
               <a:t>GIDAS của Đức ghi chi tiết từng vụ tai nạn: xe chạy bao nhiêu, va chạm ở góc nào, tầm nhìn bị che ra sao. NHTSA của Mỹ cũng có kho tương tự.</a:t>
             </a:r>
-            <a:endParaRPr lang="en-US" sz="1250" dirty="0"/>
+            <a:endParaRPr lang="en-US" sz="890" dirty="0"/>
           </a:p>
           <a:p>
             <a:pPr indent="0" marL="0">
@@ -8130,7 +8130,7 @@
               <a:buNone/>
             </a:pPr>
             <a:r>
-              <a:rPr lang="en-US" sz="1150" dirty="0">
+              <a:rPr lang="en-US" sz="820" dirty="0">
                 <a:solidFill>
                   <a:srgbClr val="5F7183"/>
                 </a:solidFill>
@@ -8140,7 +8140,7 @@
               </a:rPr>
               <a:t>德國的 GIDAS 詳細記錄每一起事故：車速多少、從哪個角度撞上、視線被什麼擋住。美國 NHTSA 也有類似的資料庫。</a:t>
             </a:r>
-            <a:endParaRPr lang="en-US" sz="1250" dirty="0"/>
+            <a:endParaRPr lang="en-US" sz="890" dirty="0"/>
           </a:p>
         </p:txBody>
       </p:sp>
@@ -8152,8 +8152,8 @@
         </p:nvSpPr>
         <p:spPr>
           <a:xfrm>
-            <a:off x="502920" y="3913632"/>
-            <a:ext cx="8138160" cy="621792"/>
+            <a:off x="1681812" y="2806268"/>
+            <a:ext cx="5780375" cy="441647"/>
           </a:xfrm>
           <a:prstGeom prst="roundRect">
             <a:avLst>
@@ -8179,8 +8179,8 @@
         </p:nvSpPr>
         <p:spPr>
           <a:xfrm>
-            <a:off x="685800" y="3986784"/>
-            <a:ext cx="7772400" cy="493776"/>
+            <a:off x="1811708" y="2858226"/>
+            <a:ext cx="5520583" cy="350719"/>
           </a:xfrm>
           <a:prstGeom prst="rect">
             <a:avLst/>
@@ -8199,7 +8199,7 @@
               <a:buNone/>
             </a:pPr>
             <a:r>
-              <a:rPr lang="en-US" sz="1250" b="1" dirty="0">
+              <a:rPr lang="en-US" sz="890" b="1" dirty="0">
                 <a:solidFill>
                   <a:srgbClr val="7A4E00"/>
                 </a:solidFill>
@@ -8209,7 +8209,7 @@
               </a:rPr>
               <a:t>Điểm mạnh: mỗi kịch bản đều từng làm ai đó bị thương — không phải do ai ngồi tưởng tượng ra.</a:t>
             </a:r>
-            <a:endParaRPr lang="en-US" sz="1250" dirty="0"/>
+            <a:endParaRPr lang="en-US" sz="890" dirty="0"/>
           </a:p>
           <a:p>
             <a:pPr indent="0" marL="0">
@@ -8219,7 +8219,7 @@
               <a:buNone/>
             </a:pPr>
             <a:r>
-              <a:rPr lang="en-US" sz="1150" dirty="0">
+              <a:rPr lang="en-US" sz="820" dirty="0">
                 <a:solidFill>
                   <a:srgbClr val="7A4E00"/>
                 </a:solidFill>
@@ -8229,7 +8229,7 @@
               </a:rPr>
               <a:t>這個來源的份量在於：每一個場景都真的傷過人——不是誰坐在辦公室想出來的。</a:t>
             </a:r>
-            <a:endParaRPr lang="en-US" sz="1250" dirty="0"/>
+            <a:endParaRPr lang="en-US" sz="890" dirty="0"/>
           </a:p>
         </p:txBody>
       </p:sp>
@@ -8249,8 +8249,8 @@
         </p:blipFill>
         <p:spPr>
           <a:xfrm>
-            <a:off x="7516368" y="4718304"/>
-            <a:ext cx="1097280" cy="242439"/>
+            <a:off x="6663327" y="3338842"/>
+            <a:ext cx="779376" cy="172200"/>
           </a:xfrm>
           <a:prstGeom prst="rect">
             <a:avLst/>
@@ -8265,8 +8265,8 @@
         </p:nvSpPr>
         <p:spPr>
           <a:xfrm>
-            <a:off x="109728" y="4791456"/>
-            <a:ext cx="822960" cy="256032"/>
+            <a:off x="1402536" y="3390800"/>
+            <a:ext cx="584532" cy="181855"/>
           </a:xfrm>
           <a:prstGeom prst="rect">
             <a:avLst/>
@@ -8282,7 +8282,7 @@
               <a:buNone/>
             </a:pPr>
             <a:r>
-              <a:rPr lang="en-US" sz="900" dirty="0">
+              <a:rPr lang="en-US" sz="640" dirty="0">
                 <a:solidFill>
                   <a:srgbClr val="5F7183"/>
                 </a:solidFill>
@@ -8292,7 +8292,7 @@
               </a:rPr>
               <a:t>12 / 16</a:t>
             </a:r>
-            <a:endParaRPr lang="en-US" sz="900" dirty="0"/>
+            <a:endParaRPr lang="en-US" sz="640" dirty="0"/>
           </a:p>
         </p:txBody>
       </p:sp>
@@ -8304,8 +8304,8 @@
         </p:nvSpPr>
         <p:spPr>
           <a:xfrm>
-            <a:off x="960120" y="4791456"/>
-            <a:ext cx="2011680" cy="256032"/>
+            <a:off x="2006553" y="3390800"/>
+            <a:ext cx="1428857" cy="181855"/>
           </a:xfrm>
           <a:prstGeom prst="rect">
             <a:avLst/>
@@ -8321,7 +8321,7 @@
               <a:buNone/>
             </a:pPr>
             <a:r>
-              <a:rPr lang="en-US" sz="900" dirty="0">
+              <a:rPr lang="en-US" sz="640" dirty="0">
                 <a:solidFill>
                   <a:srgbClr val="5F7183"/>
                 </a:solidFill>
@@ -8331,7 +8331,7 @@
               </a:rPr>
               <a:t>Tiết 2 · 第 2 節</a:t>
             </a:r>
-            <a:endParaRPr lang="en-US" sz="900" dirty="0"/>
+            <a:endParaRPr lang="en-US" sz="640" dirty="0"/>
           </a:p>
         </p:txBody>
       </p:sp>
@@ -8368,8 +8368,8 @@
         </p:nvSpPr>
         <p:spPr>
           <a:xfrm>
-            <a:off x="502920" y="420624"/>
-            <a:ext cx="8138160" cy="274320"/>
+            <a:off x="1681812" y="325253"/>
+            <a:ext cx="5780375" cy="194844"/>
           </a:xfrm>
           <a:prstGeom prst="rect">
             <a:avLst/>
@@ -8385,7 +8385,7 @@
               <a:buNone/>
             </a:pPr>
             <a:r>
-              <a:rPr lang="en-US" sz="1250" b="1" dirty="0">
+              <a:rPr lang="en-US" sz="890" b="1" dirty="0">
                 <a:solidFill>
                   <a:srgbClr val="007F72"/>
                 </a:solidFill>
@@ -8395,7 +8395,7 @@
               </a:rPr>
               <a:t>Nguồn 3 / 3 · 來源之三</a:t>
             </a:r>
-            <a:endParaRPr lang="en-US" sz="1250" dirty="0"/>
+            <a:endParaRPr lang="en-US" sz="890" dirty="0"/>
           </a:p>
         </p:txBody>
       </p:sp>
@@ -8407,8 +8407,8 @@
         </p:nvSpPr>
         <p:spPr>
           <a:xfrm>
-            <a:off x="502920" y="1101852"/>
-            <a:ext cx="2468880" cy="2514600"/>
+            <a:off x="1681812" y="809116"/>
+            <a:ext cx="1753597" cy="1786071"/>
           </a:xfrm>
           <a:prstGeom prst="roundRect">
             <a:avLst>
@@ -8434,8 +8434,8 @@
         </p:nvSpPr>
         <p:spPr>
           <a:xfrm>
-            <a:off x="1073506" y="1695298"/>
-            <a:ext cx="1327709" cy="1327709"/>
+            <a:off x="2087088" y="1230629"/>
+            <a:ext cx="943046" cy="943046"/>
           </a:xfrm>
           <a:prstGeom prst="ellipse">
             <a:avLst/>
@@ -8456,8 +8456,8 @@
         </p:nvSpPr>
         <p:spPr>
           <a:xfrm>
-            <a:off x="1166445" y="2306044"/>
-            <a:ext cx="1141830" cy="106217"/>
+            <a:off x="2153101" y="1664430"/>
+            <a:ext cx="811019" cy="75444"/>
           </a:xfrm>
           <a:prstGeom prst="rect">
             <a:avLst/>
@@ -8476,8 +8476,8 @@
         </p:nvSpPr>
         <p:spPr>
           <a:xfrm>
-            <a:off x="1684252" y="2359152"/>
-            <a:ext cx="106217" cy="570915"/>
+            <a:off x="2520889" y="1702151"/>
+            <a:ext cx="75444" cy="405510"/>
           </a:xfrm>
           <a:prstGeom prst="rect">
             <a:avLst/>
@@ -8496,8 +8496,8 @@
         </p:nvSpPr>
         <p:spPr>
           <a:xfrm>
-            <a:off x="1604589" y="2226381"/>
-            <a:ext cx="265542" cy="265542"/>
+            <a:off x="2464306" y="1607847"/>
+            <a:ext cx="188609" cy="188609"/>
           </a:xfrm>
           <a:prstGeom prst="ellipse">
             <a:avLst/>
@@ -8516,8 +8516,8 @@
         </p:nvSpPr>
         <p:spPr>
           <a:xfrm>
-            <a:off x="2082564" y="1814791"/>
-            <a:ext cx="398313" cy="398313"/>
+            <a:off x="2803803" y="1315503"/>
+            <a:ext cx="282914" cy="282914"/>
           </a:xfrm>
           <a:prstGeom prst="ellipse">
             <a:avLst/>
@@ -8536,8 +8536,8 @@
         </p:nvSpPr>
         <p:spPr>
           <a:xfrm>
-            <a:off x="2082564" y="1814791"/>
-            <a:ext cx="398313" cy="398313"/>
+            <a:off x="2803803" y="1315503"/>
+            <a:ext cx="282914" cy="282914"/>
           </a:xfrm>
           <a:prstGeom prst="rect">
             <a:avLst/>
@@ -8553,7 +8553,7 @@
               <a:buNone/>
             </a:pPr>
             <a:r>
-              <a:rPr lang="en-US" sz="1000" b="1" dirty="0">
+              <a:rPr lang="en-US" sz="710" b="1" dirty="0">
                 <a:solidFill>
                   <a:srgbClr val="FFFFFF"/>
                 </a:solidFill>
@@ -8563,7 +8563,7 @@
               </a:rPr>
               <a:t>!</a:t>
             </a:r>
-            <a:endParaRPr lang="en-US" sz="1000" dirty="0"/>
+            <a:endParaRPr lang="en-US" sz="710" dirty="0"/>
           </a:p>
         </p:txBody>
       </p:sp>
@@ -8575,8 +8575,8 @@
         </p:nvSpPr>
         <p:spPr>
           <a:xfrm>
-            <a:off x="3429000" y="1319005"/>
-            <a:ext cx="5212080" cy="1005611"/>
+            <a:off x="3760150" y="963355"/>
+            <a:ext cx="3702038" cy="714266"/>
           </a:xfrm>
           <a:prstGeom prst="rect">
             <a:avLst/>
@@ -8595,7 +8595,7 @@
               <a:buNone/>
             </a:pPr>
             <a:r>
-              <a:rPr lang="en-US" sz="2300" b="1" dirty="0">
+              <a:rPr lang="en-US" sz="1630" b="1" dirty="0">
                 <a:solidFill>
                   <a:srgbClr val="0B1F3A"/>
                 </a:solidFill>
@@ -8605,7 +8605,7 @@
               </a:rPr>
               <a:t>Từ đường thật: mỗi lần tài xế an toàn can thiệp là một kịch bản mới</a:t>
             </a:r>
-            <a:endParaRPr lang="en-US" sz="2300" dirty="0"/>
+            <a:endParaRPr lang="en-US" sz="1630" dirty="0"/>
           </a:p>
           <a:p>
             <a:pPr indent="0" marL="0">
@@ -8615,7 +8615,7 @@
               <a:buNone/>
             </a:pPr>
             <a:r>
-              <a:rPr lang="en-US" sz="1400" dirty="0">
+              <a:rPr lang="en-US" sz="990" dirty="0">
                 <a:solidFill>
                   <a:srgbClr val="007F72"/>
                 </a:solidFill>
@@ -8625,7 +8625,7 @@
               </a:rPr>
               <a:t>來自實際道路：安全員每介入一次，就多一個場景</a:t>
             </a:r>
-            <a:endParaRPr lang="en-US" sz="2300" dirty="0"/>
+            <a:endParaRPr lang="en-US" sz="1630" dirty="0"/>
           </a:p>
         </p:txBody>
       </p:sp>
@@ -8637,8 +8637,8 @@
         </p:nvSpPr>
         <p:spPr>
           <a:xfrm>
-            <a:off x="3429000" y="2416057"/>
-            <a:ext cx="5212080" cy="1074682"/>
+            <a:off x="3760150" y="1742570"/>
+            <a:ext cx="3702038" cy="763326"/>
           </a:xfrm>
           <a:prstGeom prst="rect">
             <a:avLst/>
@@ -8657,7 +8657,7 @@
               <a:buNone/>
             </a:pPr>
             <a:r>
-              <a:rPr lang="en-US" sz="1250" dirty="0">
+              <a:rPr lang="en-US" sz="890" dirty="0">
                 <a:solidFill>
                   <a:srgbClr val="5F7183"/>
                 </a:solidFill>
@@ -8667,7 +8667,7 @@
               </a:rPr>
               <a:t>Xe đang chạy thử, tài xế an toàn vừa chạm vô lăng — hệ thống tự động cắt đoạn đó ra, dựng thành kịch bản, lưu vào kho. Mỗi lần phanh gấp cũng vậy.</a:t>
             </a:r>
-            <a:endParaRPr lang="en-US" sz="1250" dirty="0"/>
+            <a:endParaRPr lang="en-US" sz="890" dirty="0"/>
           </a:p>
           <a:p>
             <a:pPr indent="0" marL="0">
@@ -8677,7 +8677,7 @@
               <a:buNone/>
             </a:pPr>
             <a:r>
-              <a:rPr lang="en-US" sz="1150" dirty="0">
+              <a:rPr lang="en-US" sz="820" dirty="0">
                 <a:solidFill>
                   <a:srgbClr val="5F7183"/>
                 </a:solidFill>
@@ -8687,7 +8687,7 @@
               </a:rPr>
               <a:t>測試車在路上跑，安全員手一碰方向盤——系統自動把那一段切出來，做成場景，存進資料庫。每一次急煞也一樣。</a:t>
             </a:r>
-            <a:endParaRPr lang="en-US" sz="1250" dirty="0"/>
+            <a:endParaRPr lang="en-US" sz="890" dirty="0"/>
           </a:p>
         </p:txBody>
       </p:sp>
@@ -8699,8 +8699,8 @@
         </p:nvSpPr>
         <p:spPr>
           <a:xfrm>
-            <a:off x="502920" y="3913632"/>
-            <a:ext cx="8138160" cy="621792"/>
+            <a:off x="1681812" y="2806268"/>
+            <a:ext cx="5780375" cy="441647"/>
           </a:xfrm>
           <a:prstGeom prst="roundRect">
             <a:avLst>
@@ -8726,8 +8726,8 @@
         </p:nvSpPr>
         <p:spPr>
           <a:xfrm>
-            <a:off x="685800" y="3986784"/>
-            <a:ext cx="7772400" cy="493776"/>
+            <a:off x="1811708" y="2858226"/>
+            <a:ext cx="5520583" cy="350719"/>
           </a:xfrm>
           <a:prstGeom prst="rect">
             <a:avLst/>
@@ -8746,7 +8746,7 @@
               <a:buNone/>
             </a:pPr>
             <a:r>
-              <a:rPr lang="en-US" sz="1250" b="1" dirty="0">
+              <a:rPr lang="en-US" sz="890" b="1" dirty="0">
                 <a:solidFill>
                   <a:srgbClr val="7A4E00"/>
                 </a:solidFill>
@@ -8756,7 +8756,7 @@
               </a:rPr>
               <a:t>Kho kịch bản của Waymo và Cruise tính bằng hàng chục nghìn, và mỗi ngày vẫn dài thêm.</a:t>
             </a:r>
-            <a:endParaRPr lang="en-US" sz="1250" dirty="0"/>
+            <a:endParaRPr lang="en-US" sz="890" dirty="0"/>
           </a:p>
           <a:p>
             <a:pPr indent="0" marL="0">
@@ -8766,7 +8766,7 @@
               <a:buNone/>
             </a:pPr>
             <a:r>
-              <a:rPr lang="en-US" sz="1150" dirty="0">
+              <a:rPr lang="en-US" sz="820" dirty="0">
                 <a:solidFill>
                   <a:srgbClr val="7A4E00"/>
                 </a:solidFill>
@@ -8776,7 +8776,7 @@
               </a:rPr>
               <a:t>Waymo 和 Cruise 的場景庫以數萬計，而且每天還在增加。</a:t>
             </a:r>
-            <a:endParaRPr lang="en-US" sz="1250" dirty="0"/>
+            <a:endParaRPr lang="en-US" sz="890" dirty="0"/>
           </a:p>
         </p:txBody>
       </p:sp>
@@ -8796,8 +8796,8 @@
         </p:blipFill>
         <p:spPr>
           <a:xfrm>
-            <a:off x="7516368" y="4718304"/>
-            <a:ext cx="1097280" cy="242439"/>
+            <a:off x="6663327" y="3338842"/>
+            <a:ext cx="779376" cy="172200"/>
           </a:xfrm>
           <a:prstGeom prst="rect">
             <a:avLst/>
@@ -8812,8 +8812,8 @@
         </p:nvSpPr>
         <p:spPr>
           <a:xfrm>
-            <a:off x="109728" y="4791456"/>
-            <a:ext cx="822960" cy="256032"/>
+            <a:off x="1402536" y="3390800"/>
+            <a:ext cx="584532" cy="181855"/>
           </a:xfrm>
           <a:prstGeom prst="rect">
             <a:avLst/>
@@ -8829,7 +8829,7 @@
               <a:buNone/>
             </a:pPr>
             <a:r>
-              <a:rPr lang="en-US" sz="900" dirty="0">
+              <a:rPr lang="en-US" sz="640" dirty="0">
                 <a:solidFill>
                   <a:srgbClr val="5F7183"/>
                 </a:solidFill>
@@ -8839,7 +8839,7 @@
               </a:rPr>
               <a:t>13 / 16</a:t>
             </a:r>
-            <a:endParaRPr lang="en-US" sz="900" dirty="0"/>
+            <a:endParaRPr lang="en-US" sz="640" dirty="0"/>
           </a:p>
         </p:txBody>
       </p:sp>
@@ -8851,8 +8851,8 @@
         </p:nvSpPr>
         <p:spPr>
           <a:xfrm>
-            <a:off x="960120" y="4791456"/>
-            <a:ext cx="2011680" cy="256032"/>
+            <a:off x="2006553" y="3390800"/>
+            <a:ext cx="1428857" cy="181855"/>
           </a:xfrm>
           <a:prstGeom prst="rect">
             <a:avLst/>
@@ -8868,7 +8868,7 @@
               <a:buNone/>
             </a:pPr>
             <a:r>
-              <a:rPr lang="en-US" sz="900" dirty="0">
+              <a:rPr lang="en-US" sz="640" dirty="0">
                 <a:solidFill>
                   <a:srgbClr val="5F7183"/>
                 </a:solidFill>
@@ -8878,7 +8878,7 @@
               </a:rPr>
               <a:t>Tiết 2 · 第 2 節</a:t>
             </a:r>
-            <a:endParaRPr lang="en-US" sz="900" dirty="0"/>
+            <a:endParaRPr lang="en-US" sz="640" dirty="0"/>
           </a:p>
         </p:txBody>
       </p:sp>
@@ -8915,8 +8915,8 @@
         </p:nvSpPr>
         <p:spPr>
           <a:xfrm>
-            <a:off x="502920" y="292608"/>
-            <a:ext cx="8138160" cy="841248"/>
+            <a:off x="1681812" y="234326"/>
+            <a:ext cx="5780375" cy="597522"/>
           </a:xfrm>
           <a:prstGeom prst="rect">
             <a:avLst/>
@@ -8935,7 +8935,7 @@
               <a:buNone/>
             </a:pPr>
             <a:r>
-              <a:rPr lang="en-US" sz="2200" b="1" dirty="0">
+              <a:rPr lang="en-US" sz="1560" b="1" dirty="0">
                 <a:solidFill>
                   <a:srgbClr val="0B1F3A"/>
                 </a:solidFill>
@@ -8945,7 +8945,7 @@
               </a:rPr>
               <a:t>Ba nguồn đó đều không có cái các bạn gặp hằng ngày</a:t>
             </a:r>
-            <a:endParaRPr lang="en-US" sz="2200" dirty="0"/>
+            <a:endParaRPr lang="en-US" sz="1560" dirty="0"/>
           </a:p>
           <a:p>
             <a:pPr indent="0" marL="0">
@@ -8955,7 +8955,7 @@
               <a:buNone/>
             </a:pPr>
             <a:r>
-              <a:rPr lang="en-US" sz="1350" dirty="0">
+              <a:rPr lang="en-US" sz="960" dirty="0">
                 <a:solidFill>
                   <a:srgbClr val="5F7183"/>
                 </a:solidFill>
@@ -8965,7 +8965,7 @@
               </a:rPr>
               <a:t>這三個來源，都沒有各位每天遇到的那件事</a:t>
             </a:r>
-            <a:endParaRPr lang="en-US" sz="2200" dirty="0"/>
+            <a:endParaRPr lang="en-US" sz="1560" dirty="0"/>
           </a:p>
         </p:txBody>
       </p:sp>
@@ -8977,8 +8977,8 @@
         </p:nvSpPr>
         <p:spPr>
           <a:xfrm>
-            <a:off x="502920" y="1316736"/>
-            <a:ext cx="3566160" cy="2249424"/>
+            <a:off x="1681812" y="961744"/>
+            <a:ext cx="2532973" cy="1597722"/>
           </a:xfrm>
           <a:prstGeom prst="roundRect">
             <a:avLst>
@@ -8999,8 +8999,8 @@
         </p:nvSpPr>
         <p:spPr>
           <a:xfrm>
-            <a:off x="667512" y="1444752"/>
-            <a:ext cx="3236976" cy="329184"/>
+            <a:off x="1798719" y="1052671"/>
+            <a:ext cx="2299161" cy="233813"/>
           </a:xfrm>
           <a:prstGeom prst="rect">
             <a:avLst/>
@@ -9019,7 +9019,7 @@
               <a:buNone/>
             </a:pPr>
             <a:r>
-              <a:rPr lang="en-US" sz="1050" b="1" dirty="0">
+              <a:rPr lang="en-US" sz="750" b="1" dirty="0">
                 <a:solidFill>
                   <a:srgbClr val="00A896"/>
                 </a:solidFill>
@@ -9029,7 +9029,7 @@
               </a:rPr>
               <a:t>Kho kịch bản có sẵn cho bạn</a:t>
             </a:r>
-            <a:endParaRPr lang="en-US" sz="1050" dirty="0"/>
+            <a:endParaRPr lang="en-US" sz="750" dirty="0"/>
           </a:p>
           <a:p>
             <a:pPr indent="0" marL="0">
@@ -9039,7 +9039,7 @@
               <a:buNone/>
             </a:pPr>
             <a:r>
-              <a:rPr lang="en-US" sz="950" dirty="0">
+              <a:rPr lang="en-US" sz="670" dirty="0">
                 <a:solidFill>
                   <a:srgbClr val="00A896"/>
                 </a:solidFill>
@@ -9049,7 +9049,7 @@
               </a:rPr>
               <a:t>現成的場景庫給你的</a:t>
             </a:r>
-            <a:endParaRPr lang="en-US" sz="1050" dirty="0"/>
+            <a:endParaRPr lang="en-US" sz="750" dirty="0"/>
           </a:p>
         </p:txBody>
       </p:sp>
@@ -9061,8 +9061,8 @@
         </p:nvSpPr>
         <p:spPr>
           <a:xfrm>
-            <a:off x="667512" y="1847088"/>
-            <a:ext cx="3236976" cy="566928"/>
+            <a:off x="1798719" y="1338442"/>
+            <a:ext cx="2299161" cy="402678"/>
           </a:xfrm>
           <a:prstGeom prst="rect">
             <a:avLst/>
@@ -9078,7 +9078,7 @@
               <a:buNone/>
             </a:pPr>
             <a:r>
-              <a:rPr lang="en-US" sz="2700" b="1" dirty="0">
+              <a:rPr lang="en-US" sz="1920" b="1" dirty="0">
                 <a:solidFill>
                   <a:srgbClr val="FFFFFF"/>
                 </a:solidFill>
@@ -9088,7 +9088,7 @@
               </a:rPr>
               <a:t>10 000+</a:t>
             </a:r>
-            <a:endParaRPr lang="en-US" sz="2700" dirty="0"/>
+            <a:endParaRPr lang="en-US" sz="1920" dirty="0"/>
           </a:p>
         </p:txBody>
       </p:sp>
@@ -9100,8 +9100,8 @@
         </p:nvSpPr>
         <p:spPr>
           <a:xfrm>
-            <a:off x="667512" y="2450592"/>
-            <a:ext cx="3236976" cy="402336"/>
+            <a:off x="1798719" y="1767099"/>
+            <a:ext cx="2299161" cy="285771"/>
           </a:xfrm>
           <a:prstGeom prst="rect">
             <a:avLst/>
@@ -9120,7 +9120,7 @@
               <a:buNone/>
             </a:pPr>
             <a:r>
-              <a:rPr lang="en-US" sz="1150" b="1" dirty="0">
+              <a:rPr lang="en-US" sz="820" b="1" dirty="0">
                 <a:solidFill>
                   <a:srgbClr val="AFC3D4"/>
                 </a:solidFill>
@@ -9130,7 +9130,7 @@
               </a:rPr>
               <a:t>kịch bản, phần lớn từ Âu Mỹ</a:t>
             </a:r>
-            <a:endParaRPr lang="en-US" sz="1150" dirty="0"/>
+            <a:endParaRPr lang="en-US" sz="820" dirty="0"/>
           </a:p>
           <a:p>
             <a:pPr indent="0" marL="0">
@@ -9140,7 +9140,7 @@
               <a:buNone/>
             </a:pPr>
             <a:r>
-              <a:rPr lang="en-US" sz="1050" dirty="0">
+              <a:rPr lang="en-US" sz="750" dirty="0">
                 <a:solidFill>
                   <a:srgbClr val="8AA0B4"/>
                 </a:solidFill>
@@ -9150,7 +9150,7 @@
               </a:rPr>
               <a:t>個場景，大部分來自歐美</a:t>
             </a:r>
-            <a:endParaRPr lang="en-US" sz="1150" dirty="0"/>
+            <a:endParaRPr lang="en-US" sz="820" dirty="0"/>
           </a:p>
         </p:txBody>
       </p:sp>
@@ -9162,8 +9162,8 @@
         </p:nvSpPr>
         <p:spPr>
           <a:xfrm>
-            <a:off x="667512" y="3017520"/>
-            <a:ext cx="3236976" cy="402336"/>
+            <a:off x="1798719" y="2169777"/>
+            <a:ext cx="2299161" cy="285771"/>
           </a:xfrm>
           <a:prstGeom prst="rect">
             <a:avLst/>
@@ -9182,7 +9182,7 @@
               <a:buNone/>
             </a:pPr>
             <a:r>
-              <a:rPr lang="en-US" sz="1000" b="1" dirty="0">
+              <a:rPr lang="en-US" sz="710" b="1" dirty="0">
                 <a:solidFill>
                   <a:srgbClr val="7E93A6"/>
                 </a:solidFill>
@@ -9192,7 +9192,7 @@
               </a:rPr>
               <a:t>Đầy đủ, được kiểm chứng, dùng được ngay.</a:t>
             </a:r>
-            <a:endParaRPr lang="en-US" sz="1000" dirty="0"/>
+            <a:endParaRPr lang="en-US" sz="710" dirty="0"/>
           </a:p>
           <a:p>
             <a:pPr indent="0" marL="0">
@@ -9202,7 +9202,7 @@
               <a:buNone/>
             </a:pPr>
             <a:r>
-              <a:rPr lang="en-US" sz="900" dirty="0">
+              <a:rPr lang="en-US" sz="640" dirty="0">
                 <a:solidFill>
                   <a:srgbClr val="7E93A6"/>
                 </a:solidFill>
@@ -9212,7 +9212,7 @@
               </a:rPr>
               <a:t>完整、經過驗證、拿來就能用。</a:t>
             </a:r>
-            <a:endParaRPr lang="en-US" sz="1000" dirty="0"/>
+            <a:endParaRPr lang="en-US" sz="710" dirty="0"/>
           </a:p>
         </p:txBody>
       </p:sp>
@@ -9224,8 +9224,8 @@
         </p:nvSpPr>
         <p:spPr>
           <a:xfrm>
-            <a:off x="4187952" y="2295144"/>
-            <a:ext cx="768096" cy="292608"/>
+            <a:off x="4299218" y="1656688"/>
+            <a:ext cx="545564" cy="207834"/>
           </a:xfrm>
           <a:prstGeom prst="rightArrow">
             <a:avLst/>
@@ -9244,8 +9244,8 @@
         </p:nvSpPr>
         <p:spPr>
           <a:xfrm flipH="1">
-            <a:off x="4370832" y="2240280"/>
-            <a:ext cx="402336" cy="402336"/>
+            <a:off x="4429114" y="1617719"/>
+            <a:ext cx="285771" cy="285771"/>
           </a:xfrm>
           <a:prstGeom prst="line">
             <a:avLst/>
@@ -9267,8 +9267,8 @@
         </p:nvSpPr>
         <p:spPr>
           <a:xfrm>
-            <a:off x="4370832" y="2240280"/>
-            <a:ext cx="402336" cy="402336"/>
+            <a:off x="4429114" y="1617719"/>
+            <a:ext cx="285771" cy="285771"/>
           </a:xfrm>
           <a:prstGeom prst="line">
             <a:avLst/>
@@ -9290,8 +9290,8 @@
         </p:nvSpPr>
         <p:spPr>
           <a:xfrm>
-            <a:off x="5074920" y="1316736"/>
-            <a:ext cx="3566160" cy="2249424"/>
+            <a:off x="4929214" y="961744"/>
+            <a:ext cx="2532973" cy="1597722"/>
           </a:xfrm>
           <a:prstGeom prst="roundRect">
             <a:avLst>
@@ -9317,8 +9317,8 @@
         </p:nvSpPr>
         <p:spPr>
           <a:xfrm>
-            <a:off x="5239512" y="1444752"/>
-            <a:ext cx="3236976" cy="329184"/>
+            <a:off x="5046121" y="1052671"/>
+            <a:ext cx="2299161" cy="233813"/>
           </a:xfrm>
           <a:prstGeom prst="rect">
             <a:avLst/>
@@ -9337,7 +9337,7 @@
               <a:buNone/>
             </a:pPr>
             <a:r>
-              <a:rPr lang="en-US" sz="1050" b="1" dirty="0">
+              <a:rPr lang="en-US" sz="750" b="1" dirty="0">
                 <a:solidFill>
                   <a:srgbClr val="D9463E"/>
                 </a:solidFill>
@@ -9347,7 +9347,7 @@
               </a:rPr>
               <a:t>Nhưng thứ bạn cần là…</a:t>
             </a:r>
-            <a:endParaRPr lang="en-US" sz="1050" dirty="0"/>
+            <a:endParaRPr lang="en-US" sz="750" dirty="0"/>
           </a:p>
           <a:p>
             <a:pPr indent="0" marL="0">
@@ -9357,7 +9357,7 @@
               <a:buNone/>
             </a:pPr>
             <a:r>
-              <a:rPr lang="en-US" sz="950" dirty="0">
+              <a:rPr lang="en-US" sz="670" dirty="0">
                 <a:solidFill>
                   <a:srgbClr val="D9463E"/>
                 </a:solidFill>
@@ -9367,7 +9367,7 @@
               </a:rPr>
               <a:t>但你需要的是……</a:t>
             </a:r>
-            <a:endParaRPr lang="en-US" sz="1050" dirty="0"/>
+            <a:endParaRPr lang="en-US" sz="750" dirty="0"/>
           </a:p>
         </p:txBody>
       </p:sp>
@@ -9379,8 +9379,8 @@
         </p:nvSpPr>
         <p:spPr>
           <a:xfrm>
-            <a:off x="5671566" y="2337984"/>
-            <a:ext cx="370332" cy="170353"/>
+            <a:off x="5353000" y="1687116"/>
+            <a:ext cx="263040" cy="120998"/>
           </a:xfrm>
           <a:prstGeom prst="roundRect">
             <a:avLst>
@@ -9401,8 +9401,8 @@
         </p:nvSpPr>
         <p:spPr>
           <a:xfrm>
-            <a:off x="5812292" y="2372054"/>
-            <a:ext cx="125913" cy="102212"/>
+            <a:off x="5452955" y="1711315"/>
+            <a:ext cx="89433" cy="72599"/>
           </a:xfrm>
           <a:prstGeom prst="roundRect">
             <a:avLst>
@@ -9423,8 +9423,8 @@
         </p:nvSpPr>
         <p:spPr>
           <a:xfrm>
-            <a:off x="6238077" y="2506937"/>
-            <a:ext cx="86411" cy="71323"/>
+            <a:off x="5755382" y="1807120"/>
+            <a:ext cx="61376" cy="50659"/>
           </a:xfrm>
           <a:prstGeom prst="roundRect">
             <a:avLst>
@@ -9445,8 +9445,8 @@
         </p:nvSpPr>
         <p:spPr>
           <a:xfrm>
-            <a:off x="6115533" y="2683992"/>
-            <a:ext cx="86411" cy="71323"/>
+            <a:off x="5668341" y="1932879"/>
+            <a:ext cx="61376" cy="50659"/>
           </a:xfrm>
           <a:prstGeom prst="roundRect">
             <a:avLst>
@@ -9467,8 +9467,8 @@
         </p:nvSpPr>
         <p:spPr>
           <a:xfrm>
-            <a:off x="5912068" y="2781602"/>
-            <a:ext cx="86411" cy="71323"/>
+            <a:off x="5523824" y="2002209"/>
+            <a:ext cx="61376" cy="50659"/>
           </a:xfrm>
           <a:prstGeom prst="roundRect">
             <a:avLst>
@@ -9489,8 +9489,8 @@
         </p:nvSpPr>
         <p:spPr>
           <a:xfrm>
-            <a:off x="5682198" y="2773612"/>
-            <a:ext cx="86411" cy="71323"/>
+            <a:off x="5360552" y="1996534"/>
+            <a:ext cx="61376" cy="50659"/>
           </a:xfrm>
           <a:prstGeom prst="roundRect">
             <a:avLst>
@@ -9511,8 +9511,8 @@
         </p:nvSpPr>
         <p:spPr>
           <a:xfrm>
-            <a:off x="5487518" y="2662163"/>
-            <a:ext cx="86411" cy="71323"/>
+            <a:off x="5222274" y="1917374"/>
+            <a:ext cx="61376" cy="50659"/>
           </a:xfrm>
           <a:prstGeom prst="roundRect">
             <a:avLst>
@@ -9533,8 +9533,8 @@
         </p:nvSpPr>
         <p:spPr>
           <a:xfrm>
-            <a:off x="5380191" y="2477118"/>
-            <a:ext cx="86411" cy="71323"/>
+            <a:off x="5146042" y="1785940"/>
+            <a:ext cx="61376" cy="50659"/>
           </a:xfrm>
           <a:prstGeom prst="roundRect">
             <a:avLst>
@@ -9555,8 +9555,8 @@
         </p:nvSpPr>
         <p:spPr>
           <a:xfrm>
-            <a:off x="5388977" y="2268060"/>
-            <a:ext cx="86411" cy="71323"/>
+            <a:off x="5152282" y="1637450"/>
+            <a:ext cx="61376" cy="50659"/>
           </a:xfrm>
           <a:prstGeom prst="roundRect">
             <a:avLst>
@@ -9577,8 +9577,8 @@
         </p:nvSpPr>
         <p:spPr>
           <a:xfrm>
-            <a:off x="5511520" y="2091005"/>
-            <a:ext cx="86411" cy="71323"/>
+            <a:off x="5239323" y="1511692"/>
+            <a:ext cx="61376" cy="50659"/>
           </a:xfrm>
           <a:prstGeom prst="roundRect">
             <a:avLst>
@@ -9599,8 +9599,8 @@
         </p:nvSpPr>
         <p:spPr>
           <a:xfrm>
-            <a:off x="5714986" y="1993395"/>
-            <a:ext cx="86411" cy="71323"/>
+            <a:off x="5383840" y="1442361"/>
+            <a:ext cx="61376" cy="50659"/>
           </a:xfrm>
           <a:prstGeom prst="roundRect">
             <a:avLst>
@@ -9621,8 +9621,8 @@
         </p:nvSpPr>
         <p:spPr>
           <a:xfrm>
-            <a:off x="5944855" y="2001385"/>
-            <a:ext cx="86411" cy="71323"/>
+            <a:off x="5547112" y="1448036"/>
+            <a:ext cx="61376" cy="50659"/>
           </a:xfrm>
           <a:prstGeom prst="roundRect">
             <a:avLst>
@@ -9643,8 +9643,8 @@
         </p:nvSpPr>
         <p:spPr>
           <a:xfrm>
-            <a:off x="6139536" y="2112834"/>
-            <a:ext cx="86411" cy="71323"/>
+            <a:off x="5685390" y="1527196"/>
+            <a:ext cx="61376" cy="50659"/>
           </a:xfrm>
           <a:prstGeom prst="roundRect">
             <a:avLst>
@@ -9665,8 +9665,8 @@
         </p:nvSpPr>
         <p:spPr>
           <a:xfrm>
-            <a:off x="6246862" y="2297879"/>
-            <a:ext cx="86411" cy="71323"/>
+            <a:off x="5761622" y="1658630"/>
+            <a:ext cx="61376" cy="50659"/>
           </a:xfrm>
           <a:prstGeom prst="roundRect">
             <a:avLst>
@@ -9687,8 +9687,8 @@
         </p:nvSpPr>
         <p:spPr>
           <a:xfrm>
-            <a:off x="6373368" y="1883664"/>
-            <a:ext cx="2103120" cy="731520"/>
+            <a:off x="5851476" y="1364422"/>
+            <a:ext cx="1493805" cy="519584"/>
           </a:xfrm>
           <a:prstGeom prst="rect">
             <a:avLst/>
@@ -9707,7 +9707,7 @@
               <a:buNone/>
             </a:pPr>
             <a:r>
-              <a:rPr lang="en-US" sz="1300" b="1" dirty="0">
+              <a:rPr lang="en-US" sz="920" b="1" dirty="0">
                 <a:solidFill>
                   <a:srgbClr val="A32C25"/>
                 </a:solidFill>
@@ -9717,7 +9717,7 @@
               </a:rPr>
               <a:t>12 xe máy vây quanh</a:t>
             </a:r>
-            <a:endParaRPr lang="en-US" sz="1300" dirty="0"/>
+            <a:endParaRPr lang="en-US" sz="920" dirty="0"/>
           </a:p>
           <a:p>
             <a:pPr indent="0" marL="0">
@@ -9727,7 +9727,7 @@
               <a:buNone/>
             </a:pPr>
             <a:r>
-              <a:rPr lang="en-US" sz="1100" dirty="0">
+              <a:rPr lang="en-US" sz="780" dirty="0">
                 <a:solidFill>
                   <a:srgbClr val="A32C25"/>
                 </a:solidFill>
@@ -9737,7 +9737,7 @@
               </a:rPr>
               <a:t>十二台機車圍著你</a:t>
             </a:r>
-            <a:endParaRPr lang="en-US" sz="1300" dirty="0"/>
+            <a:endParaRPr lang="en-US" sz="920" dirty="0"/>
           </a:p>
         </p:txBody>
       </p:sp>
@@ -9749,8 +9749,8 @@
         </p:nvSpPr>
         <p:spPr>
           <a:xfrm>
-            <a:off x="5239512" y="3017520"/>
-            <a:ext cx="3236976" cy="402336"/>
+            <a:off x="5046121" y="2169777"/>
+            <a:ext cx="2299161" cy="285771"/>
           </a:xfrm>
           <a:prstGeom prst="rect">
             <a:avLst/>
@@ -9769,7 +9769,7 @@
               <a:buNone/>
             </a:pPr>
             <a:r>
-              <a:rPr lang="en-US" sz="1000" b="1" dirty="0">
+              <a:rPr lang="en-US" sz="710" b="1" dirty="0">
                 <a:solidFill>
                   <a:srgbClr val="A32C25"/>
                 </a:solidFill>
@@ -9779,7 +9779,7 @@
               </a:rPr>
               <a:t>Euro NCAP có kịch bản MỘT xe máy. Không nơi nào có kịch bản này.</a:t>
             </a:r>
-            <a:endParaRPr lang="en-US" sz="1000" dirty="0"/>
+            <a:endParaRPr lang="en-US" sz="710" dirty="0"/>
           </a:p>
           <a:p>
             <a:pPr indent="0" marL="0">
@@ -9789,7 +9789,7 @@
               <a:buNone/>
             </a:pPr>
             <a:r>
-              <a:rPr lang="en-US" sz="900" dirty="0">
+              <a:rPr lang="en-US" sz="640" dirty="0">
                 <a:solidFill>
                   <a:srgbClr val="A32C25"/>
                 </a:solidFill>
@@ -9799,7 +9799,7 @@
               </a:rPr>
               <a:t>Euro NCAP 有「一台機車」的場景。這個場景哪裡都沒有。</a:t>
             </a:r>
-            <a:endParaRPr lang="en-US" sz="1000" dirty="0"/>
+            <a:endParaRPr lang="en-US" sz="710" dirty="0"/>
           </a:p>
         </p:txBody>
       </p:sp>
@@ -9811,8 +9811,8 @@
         </p:nvSpPr>
         <p:spPr>
           <a:xfrm>
-            <a:off x="502920" y="3913632"/>
-            <a:ext cx="8138160" cy="603504"/>
+            <a:off x="1681812" y="2806268"/>
+            <a:ext cx="5780375" cy="428657"/>
           </a:xfrm>
           <a:prstGeom prst="roundRect">
             <a:avLst>
@@ -9838,8 +9838,8 @@
         </p:nvSpPr>
         <p:spPr>
           <a:xfrm>
-            <a:off x="685800" y="3977640"/>
-            <a:ext cx="7772400" cy="493776"/>
+            <a:off x="1811708" y="2851732"/>
+            <a:ext cx="5520583" cy="350719"/>
           </a:xfrm>
           <a:prstGeom prst="rect">
             <a:avLst/>
@@ -9858,7 +9858,7 @@
               <a:buNone/>
             </a:pPr>
             <a:r>
-              <a:rPr lang="en-US" sz="1200" b="1" dirty="0">
+              <a:rPr lang="en-US" sz="850" b="1" dirty="0">
                 <a:solidFill>
                   <a:srgbClr val="7A4E00"/>
                 </a:solidFill>
@@ -9868,7 +9868,7 @@
               </a:rPr>
               <a:t>Đây không phải lời than — đây là chỗ trống, và là cơ hội cho đề tài cuối kỳ của các bạn.</a:t>
             </a:r>
-            <a:endParaRPr lang="en-US" sz="1200" dirty="0"/>
+            <a:endParaRPr lang="en-US" sz="850" dirty="0"/>
           </a:p>
           <a:p>
             <a:pPr indent="0" marL="0">
@@ -9878,7 +9878,7 @@
               <a:buNone/>
             </a:pPr>
             <a:r>
-              <a:rPr lang="en-US" sz="1100" dirty="0">
+              <a:rPr lang="en-US" sz="780" dirty="0">
                 <a:solidFill>
                   <a:srgbClr val="7A4E00"/>
                 </a:solidFill>
@@ -9888,7 +9888,7 @@
               </a:rPr>
               <a:t>這不是抱怨——這是一個空缺，也是各位期末專題的機會。</a:t>
             </a:r>
-            <a:endParaRPr lang="en-US" sz="1200" dirty="0"/>
+            <a:endParaRPr lang="en-US" sz="850" dirty="0"/>
           </a:p>
         </p:txBody>
       </p:sp>
@@ -9908,8 +9908,8 @@
         </p:blipFill>
         <p:spPr>
           <a:xfrm>
-            <a:off x="7516368" y="4718304"/>
-            <a:ext cx="1097280" cy="242439"/>
+            <a:off x="6663327" y="3338842"/>
+            <a:ext cx="779376" cy="172200"/>
           </a:xfrm>
           <a:prstGeom prst="rect">
             <a:avLst/>
@@ -9924,8 +9924,8 @@
         </p:nvSpPr>
         <p:spPr>
           <a:xfrm>
-            <a:off x="109728" y="4791456"/>
-            <a:ext cx="822960" cy="256032"/>
+            <a:off x="1402536" y="3390800"/>
+            <a:ext cx="584532" cy="181855"/>
           </a:xfrm>
           <a:prstGeom prst="rect">
             <a:avLst/>
@@ -9941,7 +9941,7 @@
               <a:buNone/>
             </a:pPr>
             <a:r>
-              <a:rPr lang="en-US" sz="900" dirty="0">
+              <a:rPr lang="en-US" sz="640" dirty="0">
                 <a:solidFill>
                   <a:srgbClr val="5F7183"/>
                 </a:solidFill>
@@ -9951,7 +9951,7 @@
               </a:rPr>
               <a:t>14 / 16</a:t>
             </a:r>
-            <a:endParaRPr lang="en-US" sz="900" dirty="0"/>
+            <a:endParaRPr lang="en-US" sz="640" dirty="0"/>
           </a:p>
         </p:txBody>
       </p:sp>
@@ -9963,8 +9963,8 @@
         </p:nvSpPr>
         <p:spPr>
           <a:xfrm>
-            <a:off x="960120" y="4791456"/>
-            <a:ext cx="2011680" cy="256032"/>
+            <a:off x="2006553" y="3390800"/>
+            <a:ext cx="1428857" cy="181855"/>
           </a:xfrm>
           <a:prstGeom prst="rect">
             <a:avLst/>
@@ -9980,7 +9980,7 @@
               <a:buNone/>
             </a:pPr>
             <a:r>
-              <a:rPr lang="en-US" sz="900" dirty="0">
+              <a:rPr lang="en-US" sz="640" dirty="0">
                 <a:solidFill>
                   <a:srgbClr val="5F7183"/>
                 </a:solidFill>
@@ -9990,7 +9990,7 @@
               </a:rPr>
               <a:t>Tiết 2 · 第 2 節</a:t>
             </a:r>
-            <a:endParaRPr lang="en-US" sz="900" dirty="0"/>
+            <a:endParaRPr lang="en-US" sz="640" dirty="0"/>
           </a:p>
         </p:txBody>
       </p:sp>
@@ -10034,8 +10034,8 @@
         </p:nvSpPr>
         <p:spPr>
           <a:xfrm>
-            <a:off x="6766560" y="-1371600"/>
-            <a:ext cx="4206240" cy="4206240"/>
+            <a:off x="6130753" y="-947729"/>
+            <a:ext cx="2987610" cy="2987610"/>
           </a:xfrm>
           <a:prstGeom prst="ellipse">
             <a:avLst/>
@@ -10059,8 +10059,8 @@
         </p:nvSpPr>
         <p:spPr>
           <a:xfrm>
-            <a:off x="7863840" y="3108960"/>
-            <a:ext cx="2560320" cy="2560320"/>
+            <a:off x="7104973" y="1520297"/>
+            <a:ext cx="1688649" cy="1688649"/>
           </a:xfrm>
           <a:prstGeom prst="ellipse">
             <a:avLst/>
@@ -10081,8 +10081,8 @@
         </p:nvSpPr>
         <p:spPr>
           <a:xfrm>
-            <a:off x="502920" y="475488"/>
-            <a:ext cx="6766560" cy="274320"/>
+            <a:off x="1681812" y="364222"/>
+            <a:ext cx="4806155" cy="194844"/>
           </a:xfrm>
           <a:prstGeom prst="rect">
             <a:avLst/>
@@ -10098,7 +10098,7 @@
               <a:buNone/>
             </a:pPr>
             <a:r>
-              <a:rPr lang="en-US" sz="1250" b="1" dirty="0">
+              <a:rPr lang="en-US" sz="890" b="1" dirty="0">
                 <a:solidFill>
                   <a:srgbClr val="FFB020"/>
                 </a:solidFill>
@@ -10108,7 +10108,7 @@
               </a:rPr>
               <a:t>Ví dụ · 從影片字幕變成邏輯場景</a:t>
             </a:r>
-            <a:endParaRPr lang="en-US" sz="1250" dirty="0"/>
+            <a:endParaRPr lang="en-US" sz="890" dirty="0"/>
           </a:p>
         </p:txBody>
       </p:sp>
@@ -10120,8 +10120,8 @@
         </p:nvSpPr>
         <p:spPr>
           <a:xfrm>
-            <a:off x="502920" y="786384"/>
-            <a:ext cx="8046720" cy="1225296"/>
+            <a:off x="1681812" y="585045"/>
+            <a:ext cx="5715427" cy="870304"/>
           </a:xfrm>
           <a:prstGeom prst="rect">
             <a:avLst/>
@@ -10140,7 +10140,7 @@
               <a:buNone/>
             </a:pPr>
             <a:r>
-              <a:rPr lang="en-US" sz="2300" b="1" dirty="0">
+              <a:rPr lang="en-US" sz="1630" b="1" dirty="0">
                 <a:solidFill>
                   <a:srgbClr val="FFFFFF"/>
                 </a:solidFill>
@@ -10150,7 +10150,7 @@
               </a:rPr>
               <a:t>Mười câu phụ đề trong video Hà Nội ở chương 1 — đó chính là mười kịch bản chức năng.</a:t>
             </a:r>
-            <a:endParaRPr lang="en-US" sz="2300" dirty="0"/>
+            <a:endParaRPr lang="en-US" sz="1630" dirty="0"/>
           </a:p>
           <a:p>
             <a:pPr indent="0" marL="0">
@@ -10160,7 +10160,7 @@
               <a:buNone/>
             </a:pPr>
             <a:r>
-              <a:rPr lang="en-US" sz="1500" dirty="0">
+              <a:rPr lang="en-US" sz="1070" dirty="0">
                 <a:solidFill>
                   <a:srgbClr val="AFC3D4"/>
                 </a:solidFill>
@@ -10170,7 +10170,7 @@
               </a:rPr>
               <a:t>第一章那支河內影片的十段字幕，就是十個功能場景。</a:t>
             </a:r>
-            <a:endParaRPr lang="en-US" sz="2300" dirty="0"/>
+            <a:endParaRPr lang="en-US" sz="1630" dirty="0"/>
           </a:p>
         </p:txBody>
       </p:sp>
@@ -10182,8 +10182,8 @@
         </p:nvSpPr>
         <p:spPr>
           <a:xfrm>
-            <a:off x="502920" y="1880384"/>
-            <a:ext cx="8138160" cy="621792"/>
+            <a:off x="1681812" y="1362092"/>
+            <a:ext cx="5780375" cy="441647"/>
           </a:xfrm>
           <a:prstGeom prst="roundRect">
             <a:avLst>
@@ -10204,8 +10204,8 @@
         </p:nvSpPr>
         <p:spPr>
           <a:xfrm>
-            <a:off x="667512" y="2026688"/>
-            <a:ext cx="329184" cy="329184"/>
+            <a:off x="1798719" y="1466008"/>
+            <a:ext cx="233813" cy="233813"/>
           </a:xfrm>
           <a:prstGeom prst="ellipse">
             <a:avLst/>
@@ -10224,8 +10224,8 @@
         </p:nvSpPr>
         <p:spPr>
           <a:xfrm>
-            <a:off x="667512" y="2054120"/>
-            <a:ext cx="329184" cy="274320"/>
+            <a:off x="1798719" y="1485493"/>
+            <a:ext cx="233813" cy="194844"/>
           </a:xfrm>
           <a:prstGeom prst="rect">
             <a:avLst/>
@@ -10241,7 +10241,7 @@
               <a:buNone/>
             </a:pPr>
             <a:r>
-              <a:rPr lang="en-US" sz="1200" b="1" dirty="0">
+              <a:rPr lang="en-US" sz="850" b="1" dirty="0">
                 <a:solidFill>
                   <a:srgbClr val="FFFFFF"/>
                 </a:solidFill>
@@ -10251,7 +10251,7 @@
               </a:rPr>
               <a:t>1</a:t>
             </a:r>
-            <a:endParaRPr lang="en-US" sz="1200" dirty="0"/>
+            <a:endParaRPr lang="en-US" sz="850" dirty="0"/>
           </a:p>
         </p:txBody>
       </p:sp>
@@ -10263,8 +10263,8 @@
         </p:nvSpPr>
         <p:spPr>
           <a:xfrm>
-            <a:off x="1161288" y="1926104"/>
-            <a:ext cx="7296912" cy="548640"/>
+            <a:off x="2149438" y="1394566"/>
+            <a:ext cx="5182853" cy="389688"/>
           </a:xfrm>
           <a:prstGeom prst="rect">
             <a:avLst/>
@@ -10283,7 +10283,7 @@
               <a:buNone/>
             </a:pPr>
             <a:r>
-              <a:rPr lang="en-US" sz="1250" b="1" dirty="0">
+              <a:rPr lang="en-US" sz="890" b="1" dirty="0">
                 <a:solidFill>
                   <a:srgbClr val="FFFFFF"/>
                 </a:solidFill>
@@ -10293,7 +10293,7 @@
               </a:rPr>
               <a:t>«Trước mặt bạn 5 m có 12 xe máy» → viết thành: 3–8 m, 8–15 xe, 15–35 km/h, cách nhau 0,5–1,5 m</a:t>
             </a:r>
-            <a:endParaRPr lang="en-US" sz="1250" dirty="0"/>
+            <a:endParaRPr lang="en-US" sz="890" dirty="0"/>
           </a:p>
           <a:p>
             <a:pPr indent="0" marL="0">
@@ -10303,7 +10303,7 @@
               <a:buNone/>
             </a:pPr>
             <a:r>
-              <a:rPr lang="en-US" sz="1150" dirty="0">
+              <a:rPr lang="en-US" sz="820" dirty="0">
                 <a:solidFill>
                   <a:srgbClr val="AFC3D4"/>
                 </a:solidFill>
@@ -10313,7 +10313,7 @@
               </a:rPr>
               <a:t>「你前方五公尺內有十二台機車」→ 寫成：3–8 公尺內、8–15 台、時速 15–35、橫向間距 0.5–1.5 公尺</a:t>
             </a:r>
-            <a:endParaRPr lang="en-US" sz="1250" dirty="0"/>
+            <a:endParaRPr lang="en-US" sz="890" dirty="0"/>
           </a:p>
         </p:txBody>
       </p:sp>
@@ -10325,8 +10325,8 @@
         </p:nvSpPr>
         <p:spPr>
           <a:xfrm>
-            <a:off x="502920" y="2593616"/>
-            <a:ext cx="8138160" cy="621792"/>
+            <a:off x="1681812" y="1868686"/>
+            <a:ext cx="5780375" cy="441647"/>
           </a:xfrm>
           <a:prstGeom prst="roundRect">
             <a:avLst>
@@ -10347,8 +10347,8 @@
         </p:nvSpPr>
         <p:spPr>
           <a:xfrm>
-            <a:off x="667512" y="2739920"/>
-            <a:ext cx="329184" cy="329184"/>
+            <a:off x="1798719" y="1972603"/>
+            <a:ext cx="233813" cy="233813"/>
           </a:xfrm>
           <a:prstGeom prst="ellipse">
             <a:avLst/>
@@ -10367,8 +10367,8 @@
         </p:nvSpPr>
         <p:spPr>
           <a:xfrm>
-            <a:off x="667512" y="2767352"/>
-            <a:ext cx="329184" cy="274320"/>
+            <a:off x="1798719" y="1992087"/>
+            <a:ext cx="233813" cy="194844"/>
           </a:xfrm>
           <a:prstGeom prst="rect">
             <a:avLst/>
@@ -10384,7 +10384,7 @@
               <a:buNone/>
             </a:pPr>
             <a:r>
-              <a:rPr lang="en-US" sz="1200" b="1" dirty="0">
+              <a:rPr lang="en-US" sz="850" b="1" dirty="0">
                 <a:solidFill>
                   <a:srgbClr val="FFFFFF"/>
                 </a:solidFill>
@@ -10394,7 +10394,7 @@
               </a:rPr>
               <a:t>2</a:t>
             </a:r>
-            <a:endParaRPr lang="en-US" sz="1200" dirty="0"/>
+            <a:endParaRPr lang="en-US" sz="850" dirty="0"/>
           </a:p>
         </p:txBody>
       </p:sp>
@@ -10406,8 +10406,8 @@
         </p:nvSpPr>
         <p:spPr>
           <a:xfrm>
-            <a:off x="1161288" y="2639336"/>
-            <a:ext cx="7296912" cy="548640"/>
+            <a:off x="2149438" y="1901160"/>
+            <a:ext cx="5182853" cy="389688"/>
           </a:xfrm>
           <a:prstGeom prst="rect">
             <a:avLst/>
@@ -10426,7 +10426,7 @@
               <a:buNone/>
             </a:pPr>
             <a:r>
-              <a:rPr lang="en-US" sz="1250" b="1" dirty="0">
+              <a:rPr lang="en-US" sz="890" b="1" dirty="0">
                 <a:solidFill>
                   <a:srgbClr val="FFFFFF"/>
                 </a:solidFill>
@@ -10436,7 +10436,7 @@
               </a:rPr>
               <a:t>«Một xe tải đỗ sai» → chiếm 30–60% làn, cách 10–40 m, làn bên cạnh mỗi 10 m có 0–3 xe máy</a:t>
             </a:r>
-            <a:endParaRPr lang="en-US" sz="1250" dirty="0"/>
+            <a:endParaRPr lang="en-US" sz="890" dirty="0"/>
           </a:p>
           <a:p>
             <a:pPr indent="0" marL="0">
@@ -10446,7 +10446,7 @@
               <a:buNone/>
             </a:pPr>
             <a:r>
-              <a:rPr lang="en-US" sz="1150" dirty="0">
+              <a:rPr lang="en-US" sz="820" dirty="0">
                 <a:solidFill>
                   <a:srgbClr val="AFC3D4"/>
                 </a:solidFill>
@@ -10456,7 +10456,7 @@
               </a:rPr>
               <a:t>「一台違停的貨車」→ 佔車道 30–60%、距離 10–40 公尺、旁邊車道每 10 公尺 0–3 台機車</a:t>
             </a:r>
-            <a:endParaRPr lang="en-US" sz="1250" dirty="0"/>
+            <a:endParaRPr lang="en-US" sz="890" dirty="0"/>
           </a:p>
         </p:txBody>
       </p:sp>
@@ -10468,8 +10468,8 @@
         </p:nvSpPr>
         <p:spPr>
           <a:xfrm>
-            <a:off x="502920" y="3306848"/>
-            <a:ext cx="8138160" cy="621792"/>
+            <a:off x="1681812" y="2375281"/>
+            <a:ext cx="5780375" cy="441647"/>
           </a:xfrm>
           <a:prstGeom prst="roundRect">
             <a:avLst>
@@ -10490,8 +10490,8 @@
         </p:nvSpPr>
         <p:spPr>
           <a:xfrm>
-            <a:off x="667512" y="3453152"/>
-            <a:ext cx="329184" cy="329184"/>
+            <a:off x="1798719" y="2479198"/>
+            <a:ext cx="233813" cy="233813"/>
           </a:xfrm>
           <a:prstGeom prst="ellipse">
             <a:avLst/>
@@ -10510,8 +10510,8 @@
         </p:nvSpPr>
         <p:spPr>
           <a:xfrm>
-            <a:off x="667512" y="3480584"/>
-            <a:ext cx="329184" cy="274320"/>
+            <a:off x="1798719" y="2498682"/>
+            <a:ext cx="233813" cy="194844"/>
           </a:xfrm>
           <a:prstGeom prst="rect">
             <a:avLst/>
@@ -10527,7 +10527,7 @@
               <a:buNone/>
             </a:pPr>
             <a:r>
-              <a:rPr lang="en-US" sz="1200" b="1" dirty="0">
+              <a:rPr lang="en-US" sz="850" b="1" dirty="0">
                 <a:solidFill>
                   <a:srgbClr val="FFFFFF"/>
                 </a:solidFill>
@@ -10537,7 +10537,7 @@
               </a:rPr>
               <a:t>3</a:t>
             </a:r>
-            <a:endParaRPr lang="en-US" sz="1200" dirty="0"/>
+            <a:endParaRPr lang="en-US" sz="850" dirty="0"/>
           </a:p>
         </p:txBody>
       </p:sp>
@@ -10549,8 +10549,8 @@
         </p:nvSpPr>
         <p:spPr>
           <a:xfrm>
-            <a:off x="1161288" y="3352568"/>
-            <a:ext cx="7296912" cy="548640"/>
+            <a:off x="2149438" y="2407755"/>
+            <a:ext cx="5182853" cy="389688"/>
           </a:xfrm>
           <a:prstGeom prst="rect">
             <a:avLst/>
@@ -10569,7 +10569,7 @@
               <a:buNone/>
             </a:pPr>
             <a:r>
-              <a:rPr lang="en-US" sz="1250" b="1" dirty="0">
+              <a:rPr lang="en-US" sz="890" b="1" dirty="0">
                 <a:solidFill>
                   <a:srgbClr val="FFFFFF"/>
                 </a:solidFill>
@@ -10579,7 +10579,7 @@
               </a:rPr>
               <a:t>Bài về nhà: chọn một cảnh Đài Loan, viết thành kịch bản logic như trên</a:t>
             </a:r>
-            <a:endParaRPr lang="en-US" sz="1250" dirty="0"/>
+            <a:endParaRPr lang="en-US" sz="890" dirty="0"/>
           </a:p>
           <a:p>
             <a:pPr indent="0" marL="0">
@@ -10589,7 +10589,7 @@
               <a:buNone/>
             </a:pPr>
             <a:r>
-              <a:rPr lang="en-US" sz="1150" dirty="0">
+              <a:rPr lang="en-US" sz="820" dirty="0">
                 <a:solidFill>
                   <a:srgbClr val="AFC3D4"/>
                 </a:solidFill>
@@ -10599,7 +10599,7 @@
               </a:rPr>
               <a:t>回家作業：挑一個台灣的場景，照上面的格式寫成邏輯場景</a:t>
             </a:r>
-            <a:endParaRPr lang="en-US" sz="1250" dirty="0"/>
+            <a:endParaRPr lang="en-US" sz="890" dirty="0"/>
           </a:p>
         </p:txBody>
       </p:sp>
@@ -10611,8 +10611,8 @@
         </p:nvSpPr>
         <p:spPr>
           <a:xfrm>
-            <a:off x="502920" y="4056656"/>
-            <a:ext cx="8046720" cy="457200"/>
+            <a:off x="1681812" y="2907855"/>
+            <a:ext cx="5715427" cy="324740"/>
           </a:xfrm>
           <a:prstGeom prst="rect">
             <a:avLst/>
@@ -10631,7 +10631,7 @@
               <a:buNone/>
             </a:pPr>
             <a:r>
-              <a:rPr lang="en-US" sz="1250" b="1" dirty="0">
+              <a:rPr lang="en-US" sz="890" b="1" dirty="0">
                 <a:solidFill>
                   <a:srgbClr val="FFB020"/>
                 </a:solidFill>
@@ -10641,7 +10641,7 @@
               </a:rPr>
               <a:t>Viết được kịch bản logic — kỹ năng cụ thể nhất của buổi hôm nay.</a:t>
             </a:r>
-            <a:endParaRPr lang="en-US" sz="1250" dirty="0"/>
+            <a:endParaRPr lang="en-US" sz="890" dirty="0"/>
           </a:p>
           <a:p>
             <a:pPr indent="0" marL="0">
@@ -10651,7 +10651,7 @@
               <a:buNone/>
             </a:pPr>
             <a:r>
-              <a:rPr lang="en-US" sz="1150" dirty="0">
+              <a:rPr lang="en-US" sz="820" dirty="0">
                 <a:solidFill>
                   <a:srgbClr val="FFB020"/>
                 </a:solidFill>
@@ -10661,7 +10661,7 @@
               </a:rPr>
               <a:t>會寫邏輯場景，是今天最具體的一項技能。</a:t>
             </a:r>
-            <a:endParaRPr lang="en-US" sz="1250" dirty="0"/>
+            <a:endParaRPr lang="en-US" sz="890" dirty="0"/>
           </a:p>
         </p:txBody>
       </p:sp>
@@ -10673,8 +10673,8 @@
         </p:nvSpPr>
         <p:spPr>
           <a:xfrm>
-            <a:off x="109728" y="4791456"/>
-            <a:ext cx="822960" cy="256032"/>
+            <a:off x="1402536" y="3390800"/>
+            <a:ext cx="584532" cy="181855"/>
           </a:xfrm>
           <a:prstGeom prst="rect">
             <a:avLst/>
@@ -10690,7 +10690,7 @@
               <a:buNone/>
             </a:pPr>
             <a:r>
-              <a:rPr lang="en-US" sz="900" dirty="0">
+              <a:rPr lang="en-US" sz="640" dirty="0">
                 <a:solidFill>
                   <a:srgbClr val="9FB3C8"/>
                 </a:solidFill>
@@ -10700,7 +10700,7 @@
               </a:rPr>
               <a:t>15 / 16</a:t>
             </a:r>
-            <a:endParaRPr lang="en-US" sz="900" dirty="0"/>
+            <a:endParaRPr lang="en-US" sz="640" dirty="0"/>
           </a:p>
         </p:txBody>
       </p:sp>
@@ -10712,8 +10712,8 @@
         </p:nvSpPr>
         <p:spPr>
           <a:xfrm>
-            <a:off x="960120" y="4791456"/>
-            <a:ext cx="2011680" cy="256032"/>
+            <a:off x="2006553" y="3390800"/>
+            <a:ext cx="1428857" cy="181855"/>
           </a:xfrm>
           <a:prstGeom prst="rect">
             <a:avLst/>
@@ -10729,7 +10729,7 @@
               <a:buNone/>
             </a:pPr>
             <a:r>
-              <a:rPr lang="en-US" sz="900" dirty="0">
+              <a:rPr lang="en-US" sz="640" dirty="0">
                 <a:solidFill>
                   <a:srgbClr val="9FB3C8"/>
                 </a:solidFill>
@@ -10739,7 +10739,7 @@
               </a:rPr>
               <a:t>Tiết 2 · 第 2 節</a:t>
             </a:r>
-            <a:endParaRPr lang="en-US" sz="900" dirty="0"/>
+            <a:endParaRPr lang="en-US" sz="640" dirty="0"/>
           </a:p>
         </p:txBody>
       </p:sp>
@@ -10783,8 +10783,8 @@
         </p:nvSpPr>
         <p:spPr>
           <a:xfrm>
-            <a:off x="6766560" y="-1371600"/>
-            <a:ext cx="4206240" cy="4206240"/>
+            <a:off x="6130753" y="-947729"/>
+            <a:ext cx="2987610" cy="2987610"/>
           </a:xfrm>
           <a:prstGeom prst="ellipse">
             <a:avLst/>
@@ -10808,8 +10808,8 @@
         </p:nvSpPr>
         <p:spPr>
           <a:xfrm>
-            <a:off x="7863840" y="3108960"/>
-            <a:ext cx="2560320" cy="2560320"/>
+            <a:off x="7104973" y="1520297"/>
+            <a:ext cx="1688649" cy="1688649"/>
           </a:xfrm>
           <a:prstGeom prst="ellipse">
             <a:avLst/>
@@ -10830,8 +10830,8 @@
         </p:nvSpPr>
         <p:spPr>
           <a:xfrm>
-            <a:off x="502920" y="475488"/>
-            <a:ext cx="6766560" cy="274320"/>
+            <a:off x="1681812" y="364222"/>
+            <a:ext cx="4806155" cy="194844"/>
           </a:xfrm>
           <a:prstGeom prst="rect">
             <a:avLst/>
@@ -10847,7 +10847,7 @@
               <a:buNone/>
             </a:pPr>
             <a:r>
-              <a:rPr lang="en-US" sz="1250" b="1" dirty="0">
+              <a:rPr lang="en-US" sz="890" b="1" dirty="0">
                 <a:solidFill>
                   <a:srgbClr val="FFB020"/>
                 </a:solidFill>
@@ -10857,7 +10857,7 @@
               </a:rPr>
               <a:t>Tiết 2 · 第二節小結</a:t>
             </a:r>
-            <a:endParaRPr lang="en-US" sz="1250" dirty="0"/>
+            <a:endParaRPr lang="en-US" sz="890" dirty="0"/>
           </a:p>
         </p:txBody>
       </p:sp>
@@ -10869,8 +10869,8 @@
         </p:nvSpPr>
         <p:spPr>
           <a:xfrm>
-            <a:off x="502920" y="822960"/>
-            <a:ext cx="8046720" cy="1060704"/>
+            <a:off x="1681812" y="611024"/>
+            <a:ext cx="5715427" cy="753397"/>
           </a:xfrm>
           <a:prstGeom prst="rect">
             <a:avLst/>
@@ -10889,7 +10889,7 @@
               <a:buNone/>
             </a:pPr>
             <a:r>
-              <a:rPr lang="en-US" sz="2500" b="1" dirty="0">
+              <a:rPr lang="en-US" sz="1780" b="1" dirty="0">
                 <a:solidFill>
                   <a:srgbClr val="FFFFFF"/>
                 </a:solidFill>
@@ -10899,7 +10899,7 @@
               </a:rPr>
               <a:t>Mang ba câu này lên máy</a:t>
             </a:r>
-            <a:endParaRPr lang="en-US" sz="2500" dirty="0"/>
+            <a:endParaRPr lang="en-US" sz="1780" dirty="0"/>
           </a:p>
           <a:p>
             <a:pPr indent="0" marL="0">
@@ -10909,7 +10909,7 @@
               <a:buNone/>
             </a:pPr>
             <a:r>
-              <a:rPr lang="en-US" sz="1500" dirty="0">
+              <a:rPr lang="en-US" sz="1070" dirty="0">
                 <a:solidFill>
                   <a:srgbClr val="AFC3D4"/>
                 </a:solidFill>
@@ -10919,7 +10919,7 @@
               </a:rPr>
               <a:t>帶三句話上機</a:t>
             </a:r>
-            <a:endParaRPr lang="en-US" sz="2500" dirty="0"/>
+            <a:endParaRPr lang="en-US" sz="1780" dirty="0"/>
           </a:p>
         </p:txBody>
       </p:sp>
@@ -10931,8 +10931,8 @@
         </p:nvSpPr>
         <p:spPr>
           <a:xfrm>
-            <a:off x="502920" y="1975104"/>
-            <a:ext cx="45720" cy="512064"/>
+            <a:off x="1681812" y="1429370"/>
+            <a:ext cx="32474" cy="363709"/>
           </a:xfrm>
           <a:prstGeom prst="rect">
             <a:avLst/>
@@ -10951,8 +10951,8 @@
         </p:nvSpPr>
         <p:spPr>
           <a:xfrm>
-            <a:off x="722376" y="1938528"/>
-            <a:ext cx="7863840" cy="621792"/>
+            <a:off x="1837688" y="1403390"/>
+            <a:ext cx="5585531" cy="441647"/>
           </a:xfrm>
           <a:prstGeom prst="rect">
             <a:avLst/>
@@ -10971,7 +10971,7 @@
               <a:buNone/>
             </a:pPr>
             <a:r>
-              <a:rPr lang="en-US" sz="1350" b="1" dirty="0">
+              <a:rPr lang="en-US" sz="960" b="1" dirty="0">
                 <a:solidFill>
                   <a:srgbClr val="FFFFFF"/>
                 </a:solidFill>
@@ -10981,7 +10981,7 @@
               </a:rPr>
               <a:t>Kịch bản có ba tầng: chức năng (tiếng người) → logic (khoảng) → cụ thể (một giá trị).</a:t>
             </a:r>
-            <a:endParaRPr lang="en-US" sz="1350" dirty="0"/>
+            <a:endParaRPr lang="en-US" sz="960" dirty="0"/>
           </a:p>
           <a:p>
             <a:pPr indent="0" marL="0">
@@ -10991,7 +10991,7 @@
               <a:buNone/>
             </a:pPr>
             <a:r>
-              <a:rPr lang="en-US" sz="1200" dirty="0">
+              <a:rPr lang="en-US" sz="850" dirty="0">
                 <a:solidFill>
                   <a:srgbClr val="AFC3D4"/>
                 </a:solidFill>
@@ -11001,7 +11001,7 @@
               </a:rPr>
               <a:t>場景三層：功能（人話）→ 邏輯（範圍）→ 具體（一個值）。</a:t>
             </a:r>
-            <a:endParaRPr lang="en-US" sz="1350" dirty="0"/>
+            <a:endParaRPr lang="en-US" sz="960" dirty="0"/>
           </a:p>
         </p:txBody>
       </p:sp>
@@ -11013,8 +11013,8 @@
         </p:nvSpPr>
         <p:spPr>
           <a:xfrm>
-            <a:off x="502920" y="2688336"/>
-            <a:ext cx="45720" cy="512064"/>
+            <a:off x="1681812" y="1935964"/>
+            <a:ext cx="32474" cy="363709"/>
           </a:xfrm>
           <a:prstGeom prst="rect">
             <a:avLst/>
@@ -11033,8 +11033,8 @@
         </p:nvSpPr>
         <p:spPr>
           <a:xfrm>
-            <a:off x="722376" y="2651760"/>
-            <a:ext cx="7863840" cy="621792"/>
+            <a:off x="1837688" y="1909985"/>
+            <a:ext cx="5585531" cy="441647"/>
           </a:xfrm>
           <a:prstGeom prst="rect">
             <a:avLst/>
@@ -11053,7 +11053,7 @@
               <a:buNone/>
             </a:pPr>
             <a:r>
-              <a:rPr lang="en-US" sz="1350" b="1" dirty="0">
+              <a:rPr lang="en-US" sz="960" b="1" dirty="0">
                 <a:solidFill>
                   <a:srgbClr val="FFFFFF"/>
                 </a:solidFill>
@@ -11063,7 +11063,7 @@
               </a:rPr>
               <a:t>Cách dùng mô phỏng là quét tham số để tìm ranh giới, không phải chạy cho nhiều km.</a:t>
             </a:r>
-            <a:endParaRPr lang="en-US" sz="1350" dirty="0"/>
+            <a:endParaRPr lang="en-US" sz="960" dirty="0"/>
           </a:p>
           <a:p>
             <a:pPr indent="0" marL="0">
@@ -11073,7 +11073,7 @@
               <a:buNone/>
             </a:pPr>
             <a:r>
-              <a:rPr lang="en-US" sz="1200" dirty="0">
+              <a:rPr lang="en-US" sz="850" dirty="0">
                 <a:solidFill>
                   <a:srgbClr val="AFC3D4"/>
                 </a:solidFill>
@@ -11083,7 +11083,7 @@
               </a:rPr>
               <a:t>模擬的用法是掃參數、找出界線，不是拚里程。</a:t>
             </a:r>
-            <a:endParaRPr lang="en-US" sz="1350" dirty="0"/>
+            <a:endParaRPr lang="en-US" sz="960" dirty="0"/>
           </a:p>
         </p:txBody>
       </p:sp>
@@ -11095,8 +11095,8 @@
         </p:nvSpPr>
         <p:spPr>
           <a:xfrm>
-            <a:off x="502920" y="3401568"/>
-            <a:ext cx="45720" cy="672713"/>
+            <a:off x="1681812" y="2442559"/>
+            <a:ext cx="32474" cy="477815"/>
           </a:xfrm>
           <a:prstGeom prst="rect">
             <a:avLst/>
@@ -11115,8 +11115,8 @@
         </p:nvSpPr>
         <p:spPr>
           <a:xfrm>
-            <a:off x="722376" y="3364992"/>
-            <a:ext cx="7863840" cy="782441"/>
+            <a:off x="1837688" y="2416580"/>
+            <a:ext cx="5585531" cy="555752"/>
           </a:xfrm>
           <a:prstGeom prst="rect">
             <a:avLst/>
@@ -11135,7 +11135,7 @@
               <a:buNone/>
             </a:pPr>
             <a:r>
-              <a:rPr lang="en-US" sz="1350" b="1" dirty="0">
+              <a:rPr lang="en-US" sz="960" b="1" dirty="0">
                 <a:solidFill>
                   <a:srgbClr val="FFFFFF"/>
                 </a:solidFill>
@@ -11145,7 +11145,7 @@
               </a:rPr>
               <a:t>Kịch bản đến từ quy định, cơ sở dữ liệu tai nạn và đường thật — nhưng «biển xe máy» thì không nguồn nào có.</a:t>
             </a:r>
-            <a:endParaRPr lang="en-US" sz="1350" dirty="0"/>
+            <a:endParaRPr lang="en-US" sz="960" dirty="0"/>
           </a:p>
           <a:p>
             <a:pPr indent="0" marL="0">
@@ -11155,7 +11155,7 @@
               <a:buNone/>
             </a:pPr>
             <a:r>
-              <a:rPr lang="en-US" sz="1200" dirty="0">
+              <a:rPr lang="en-US" sz="850" dirty="0">
                 <a:solidFill>
                   <a:srgbClr val="AFC3D4"/>
                 </a:solidFill>
@@ -11165,7 +11165,7 @@
               </a:rPr>
               <a:t>場景來自法規、事故資料庫、實路收集——但「機車海」哪一個來源都沒有。</a:t>
             </a:r>
-            <a:endParaRPr lang="en-US" sz="1350" dirty="0"/>
+            <a:endParaRPr lang="en-US" sz="960" dirty="0"/>
           </a:p>
         </p:txBody>
       </p:sp>
@@ -11177,8 +11177,8 @@
         </p:nvSpPr>
         <p:spPr>
           <a:xfrm>
-            <a:off x="109728" y="4791456"/>
-            <a:ext cx="822960" cy="256032"/>
+            <a:off x="1402536" y="3390800"/>
+            <a:ext cx="584532" cy="181855"/>
           </a:xfrm>
           <a:prstGeom prst="rect">
             <a:avLst/>
@@ -11194,7 +11194,7 @@
               <a:buNone/>
             </a:pPr>
             <a:r>
-              <a:rPr lang="en-US" sz="900" dirty="0">
+              <a:rPr lang="en-US" sz="640" dirty="0">
                 <a:solidFill>
                   <a:srgbClr val="9FB3C8"/>
                 </a:solidFill>
@@ -11204,7 +11204,7 @@
               </a:rPr>
               <a:t>16 / 16</a:t>
             </a:r>
-            <a:endParaRPr lang="en-US" sz="900" dirty="0"/>
+            <a:endParaRPr lang="en-US" sz="640" dirty="0"/>
           </a:p>
         </p:txBody>
       </p:sp>
@@ -11216,8 +11216,8 @@
         </p:nvSpPr>
         <p:spPr>
           <a:xfrm>
-            <a:off x="960120" y="4791456"/>
-            <a:ext cx="2011680" cy="256032"/>
+            <a:off x="2006553" y="3390800"/>
+            <a:ext cx="1428857" cy="181855"/>
           </a:xfrm>
           <a:prstGeom prst="rect">
             <a:avLst/>
@@ -11233,7 +11233,7 @@
               <a:buNone/>
             </a:pPr>
             <a:r>
-              <a:rPr lang="en-US" sz="900" dirty="0">
+              <a:rPr lang="en-US" sz="640" dirty="0">
                 <a:solidFill>
                   <a:srgbClr val="9FB3C8"/>
                 </a:solidFill>
@@ -11243,7 +11243,7 @@
               </a:rPr>
               <a:t>Tiết 2 · 第 2 節</a:t>
             </a:r>
-            <a:endParaRPr lang="en-US" sz="900" dirty="0"/>
+            <a:endParaRPr lang="en-US" sz="640" dirty="0"/>
           </a:p>
         </p:txBody>
       </p:sp>
@@ -11280,8 +11280,8 @@
         </p:nvSpPr>
         <p:spPr>
           <a:xfrm>
-            <a:off x="502920" y="420624"/>
-            <a:ext cx="8138160" cy="274320"/>
+            <a:off x="1681812" y="325253"/>
+            <a:ext cx="5780375" cy="194844"/>
           </a:xfrm>
           <a:prstGeom prst="rect">
             <a:avLst/>
@@ -11297,7 +11297,7 @@
               <a:buNone/>
             </a:pPr>
             <a:r>
-              <a:rPr lang="en-US" sz="1250" b="1" dirty="0">
+              <a:rPr lang="en-US" sz="890" b="1" dirty="0">
                 <a:solidFill>
                   <a:srgbClr val="007F72"/>
                 </a:solidFill>
@@ -11307,7 +11307,7 @@
               </a:rPr>
               <a:t>Vấn đề · 問題在哪</a:t>
             </a:r>
-            <a:endParaRPr lang="en-US" sz="1250" dirty="0"/>
+            <a:endParaRPr lang="en-US" sz="890" dirty="0"/>
           </a:p>
         </p:txBody>
       </p:sp>
@@ -11319,8 +11319,8 @@
         </p:nvSpPr>
         <p:spPr>
           <a:xfrm>
-            <a:off x="502920" y="1101852"/>
-            <a:ext cx="2468880" cy="2514600"/>
+            <a:off x="1681812" y="809116"/>
+            <a:ext cx="1753597" cy="1786071"/>
           </a:xfrm>
           <a:prstGeom prst="roundRect">
             <a:avLst>
@@ -11346,8 +11346,8 @@
         </p:nvSpPr>
         <p:spPr>
           <a:xfrm flipV="1">
-            <a:off x="1073506" y="1736994"/>
-            <a:ext cx="531084" cy="1244316"/>
+            <a:off x="2087088" y="1260245"/>
+            <a:ext cx="377218" cy="883813"/>
           </a:xfrm>
           <a:prstGeom prst="line">
             <a:avLst/>
@@ -11369,8 +11369,8 @@
         </p:nvSpPr>
         <p:spPr>
           <a:xfrm flipH="1" flipV="1">
-            <a:off x="1870131" y="1736994"/>
-            <a:ext cx="531084" cy="1244316"/>
+            <a:off x="2652915" y="1260245"/>
+            <a:ext cx="377218" cy="883813"/>
           </a:xfrm>
           <a:prstGeom prst="line">
             <a:avLst/>
@@ -11392,8 +11392,8 @@
         </p:nvSpPr>
         <p:spPr>
           <a:xfrm>
-            <a:off x="1710806" y="2870210"/>
-            <a:ext cx="53108" cy="111100"/>
+            <a:off x="2539750" y="2065146"/>
+            <a:ext cx="37722" cy="78912"/>
           </a:xfrm>
           <a:prstGeom prst="rect">
             <a:avLst/>
@@ -11412,8 +11412,8 @@
         </p:nvSpPr>
         <p:spPr>
           <a:xfrm>
-            <a:off x="1715453" y="2578574"/>
-            <a:ext cx="43814" cy="91657"/>
+            <a:off x="2543051" y="1858002"/>
+            <a:ext cx="31121" cy="65102"/>
           </a:xfrm>
           <a:prstGeom prst="rect">
             <a:avLst/>
@@ -11432,8 +11432,8 @@
         </p:nvSpPr>
         <p:spPr>
           <a:xfrm>
-            <a:off x="1720100" y="2286937"/>
-            <a:ext cx="34520" cy="72215"/>
+            <a:off x="2546351" y="1650859"/>
+            <a:ext cx="24519" cy="51293"/>
           </a:xfrm>
           <a:prstGeom prst="rect">
             <a:avLst/>
@@ -11452,8 +11452,8 @@
         </p:nvSpPr>
         <p:spPr>
           <a:xfrm>
-            <a:off x="1724747" y="1995301"/>
-            <a:ext cx="25226" cy="52772"/>
+            <a:off x="2549652" y="1443715"/>
+            <a:ext cx="17918" cy="37483"/>
           </a:xfrm>
           <a:prstGeom prst="rect">
             <a:avLst/>
@@ -11472,8 +11472,8 @@
         </p:nvSpPr>
         <p:spPr>
           <a:xfrm>
-            <a:off x="630936" y="1425915"/>
-            <a:ext cx="2212848" cy="355519"/>
+            <a:off x="1772740" y="1039292"/>
+            <a:ext cx="1571743" cy="252518"/>
           </a:xfrm>
           <a:prstGeom prst="rect">
             <a:avLst/>
@@ -11489,7 +11489,7 @@
               <a:buNone/>
             </a:pPr>
             <a:r>
-              <a:rPr lang="en-US" sz="1000" b="1" dirty="0">
+              <a:rPr lang="en-US" sz="710" b="1" dirty="0">
                 <a:solidFill>
                   <a:srgbClr val="A3382F"/>
                 </a:solidFill>
@@ -11499,7 +11499,7 @@
               </a:rPr>
               <a:t>10 000 km</a:t>
             </a:r>
-            <a:endParaRPr lang="en-US" sz="1000" dirty="0"/>
+            <a:endParaRPr lang="en-US" sz="710" dirty="0"/>
           </a:p>
         </p:txBody>
       </p:sp>
@@ -11511,8 +11511,8 @@
         </p:nvSpPr>
         <p:spPr>
           <a:xfrm>
-            <a:off x="3429000" y="1217431"/>
-            <a:ext cx="5212080" cy="1005611"/>
+            <a:off x="3760150" y="891209"/>
+            <a:ext cx="3702038" cy="714266"/>
           </a:xfrm>
           <a:prstGeom prst="rect">
             <a:avLst/>
@@ -11531,7 +11531,7 @@
               <a:buNone/>
             </a:pPr>
             <a:r>
-              <a:rPr lang="en-US" sz="2300" b="1" dirty="0">
+              <a:rPr lang="en-US" sz="1630" b="1" dirty="0">
                 <a:solidFill>
                   <a:srgbClr val="0B1F3A"/>
                 </a:solidFill>
@@ -11541,7 +11541,7 @@
               </a:rPr>
               <a:t>Chạy mười nghìn km đường thẳng không chứng minh được gì cả</a:t>
             </a:r>
-            <a:endParaRPr lang="en-US" sz="2300" dirty="0"/>
+            <a:endParaRPr lang="en-US" sz="1630" dirty="0"/>
           </a:p>
           <a:p>
             <a:pPr indent="0" marL="0">
@@ -11551,7 +11551,7 @@
               <a:buNone/>
             </a:pPr>
             <a:r>
-              <a:rPr lang="en-US" sz="1400" dirty="0">
+              <a:rPr lang="en-US" sz="990" dirty="0">
                 <a:solidFill>
                   <a:srgbClr val="007F72"/>
                 </a:solidFill>
@@ -11561,7 +11561,7 @@
               </a:rPr>
               <a:t>在直路上跑一萬公里，什麼都證明不了</a:t>
             </a:r>
-            <a:endParaRPr lang="en-US" sz="2300" dirty="0"/>
+            <a:endParaRPr lang="en-US" sz="1630" dirty="0"/>
           </a:p>
         </p:txBody>
       </p:sp>
@@ -11573,8 +11573,8 @@
         </p:nvSpPr>
         <p:spPr>
           <a:xfrm>
-            <a:off x="3429000" y="2314482"/>
-            <a:ext cx="5212080" cy="1277831"/>
+            <a:off x="3760150" y="1670423"/>
+            <a:ext cx="3702038" cy="907619"/>
           </a:xfrm>
           <a:prstGeom prst="rect">
             <a:avLst/>
@@ -11593,7 +11593,7 @@
               <a:buNone/>
             </a:pPr>
             <a:r>
-              <a:rPr lang="en-US" sz="1250" dirty="0">
+              <a:rPr lang="en-US" sz="890" dirty="0">
                 <a:solidFill>
                   <a:srgbClr val="5F7183"/>
                 </a:solidFill>
@@ -11603,7 +11603,7 @@
               </a:rPr>
               <a:t>Phần lớn quãng đường trên đường thật là những đoạn buồn tẻ: đi thẳng, không ai cắt ngang, không có gì xảy ra. Thứ quyết định an toàn lại là vài giây hiếm hoi — mà chạy dài chưa chắc gặp được.</a:t>
             </a:r>
-            <a:endParaRPr lang="en-US" sz="1250" dirty="0"/>
+            <a:endParaRPr lang="en-US" sz="890" dirty="0"/>
           </a:p>
           <a:p>
             <a:pPr indent="0" marL="0">
@@ -11613,7 +11613,7 @@
               <a:buNone/>
             </a:pPr>
             <a:r>
-              <a:rPr lang="en-US" sz="1150" dirty="0">
+              <a:rPr lang="en-US" sz="820" dirty="0">
                 <a:solidFill>
                   <a:srgbClr val="5F7183"/>
                 </a:solidFill>
@@ -11623,7 +11623,7 @@
               </a:rPr>
               <a:t>真實道路上的里程，絕大部分是無聊的：直行、沒人切進來、什麼都沒發生。決定安不安全的是那幾秒鐘的罕見狀況——而一直跑，不保證遇得到。</a:t>
             </a:r>
-            <a:endParaRPr lang="en-US" sz="1250" dirty="0"/>
+            <a:endParaRPr lang="en-US" sz="890" dirty="0"/>
           </a:p>
         </p:txBody>
       </p:sp>
@@ -11635,8 +11635,8 @@
         </p:nvSpPr>
         <p:spPr>
           <a:xfrm>
-            <a:off x="502920" y="3913632"/>
-            <a:ext cx="8138160" cy="621792"/>
+            <a:off x="1681812" y="2806268"/>
+            <a:ext cx="5780375" cy="441647"/>
           </a:xfrm>
           <a:prstGeom prst="roundRect">
             <a:avLst>
@@ -11662,8 +11662,8 @@
         </p:nvSpPr>
         <p:spPr>
           <a:xfrm>
-            <a:off x="685800" y="3986784"/>
-            <a:ext cx="7772400" cy="493776"/>
+            <a:off x="1811708" y="2858226"/>
+            <a:ext cx="5520583" cy="350719"/>
           </a:xfrm>
           <a:prstGeom prst="rect">
             <a:avLst/>
@@ -11682,7 +11682,7 @@
               <a:buNone/>
             </a:pPr>
             <a:r>
-              <a:rPr lang="en-US" sz="1250" b="1" dirty="0">
+              <a:rPr lang="en-US" sz="890" b="1" dirty="0">
                 <a:solidFill>
                   <a:srgbClr val="7A4E00"/>
                 </a:solidFill>
@@ -11692,7 +11692,7 @@
               </a:rPr>
               <a:t>Vậy nên câu hỏi không phải «chạy được bao nhiêu km», mà là «đã gặp qua những tình huống nào».</a:t>
             </a:r>
-            <a:endParaRPr lang="en-US" sz="1250" dirty="0"/>
+            <a:endParaRPr lang="en-US" sz="890" dirty="0"/>
           </a:p>
           <a:p>
             <a:pPr indent="0" marL="0">
@@ -11702,7 +11702,7 @@
               <a:buNone/>
             </a:pPr>
             <a:r>
-              <a:rPr lang="en-US" sz="1150" dirty="0">
+              <a:rPr lang="en-US" sz="820" dirty="0">
                 <a:solidFill>
                   <a:srgbClr val="7A4E00"/>
                 </a:solidFill>
@@ -11712,7 +11712,7 @@
               </a:rPr>
               <a:t>所以問題不是「跑了幾公里」，而是「遇過哪些狀況」。</a:t>
             </a:r>
-            <a:endParaRPr lang="en-US" sz="1250" dirty="0"/>
+            <a:endParaRPr lang="en-US" sz="890" dirty="0"/>
           </a:p>
         </p:txBody>
       </p:sp>
@@ -11732,8 +11732,8 @@
         </p:blipFill>
         <p:spPr>
           <a:xfrm>
-            <a:off x="7516368" y="4718304"/>
-            <a:ext cx="1097280" cy="242439"/>
+            <a:off x="6663327" y="3338842"/>
+            <a:ext cx="779376" cy="172200"/>
           </a:xfrm>
           <a:prstGeom prst="rect">
             <a:avLst/>
@@ -11748,8 +11748,8 @@
         </p:nvSpPr>
         <p:spPr>
           <a:xfrm>
-            <a:off x="109728" y="4791456"/>
-            <a:ext cx="822960" cy="256032"/>
+            <a:off x="1402536" y="3390800"/>
+            <a:ext cx="584532" cy="181855"/>
           </a:xfrm>
           <a:prstGeom prst="rect">
             <a:avLst/>
@@ -11765,7 +11765,7 @@
               <a:buNone/>
             </a:pPr>
             <a:r>
-              <a:rPr lang="en-US" sz="900" dirty="0">
+              <a:rPr lang="en-US" sz="640" dirty="0">
                 <a:solidFill>
                   <a:srgbClr val="5F7183"/>
                 </a:solidFill>
@@ -11775,7 +11775,7 @@
               </a:rPr>
               <a:t>2 / 16</a:t>
             </a:r>
-            <a:endParaRPr lang="en-US" sz="900" dirty="0"/>
+            <a:endParaRPr lang="en-US" sz="640" dirty="0"/>
           </a:p>
         </p:txBody>
       </p:sp>
@@ -11787,8 +11787,8 @@
         </p:nvSpPr>
         <p:spPr>
           <a:xfrm>
-            <a:off x="960120" y="4791456"/>
-            <a:ext cx="2011680" cy="256032"/>
+            <a:off x="2006553" y="3390800"/>
+            <a:ext cx="1428857" cy="181855"/>
           </a:xfrm>
           <a:prstGeom prst="rect">
             <a:avLst/>
@@ -11804,7 +11804,7 @@
               <a:buNone/>
             </a:pPr>
             <a:r>
-              <a:rPr lang="en-US" sz="900" dirty="0">
+              <a:rPr lang="en-US" sz="640" dirty="0">
                 <a:solidFill>
                   <a:srgbClr val="5F7183"/>
                 </a:solidFill>
@@ -11814,7 +11814,7 @@
               </a:rPr>
               <a:t>Tiết 2 · 第 2 節</a:t>
             </a:r>
-            <a:endParaRPr lang="en-US" sz="900" dirty="0"/>
+            <a:endParaRPr lang="en-US" sz="640" dirty="0"/>
           </a:p>
         </p:txBody>
       </p:sp>
@@ -11858,8 +11858,8 @@
         </p:nvSpPr>
         <p:spPr>
           <a:xfrm>
-            <a:off x="6766560" y="-1371600"/>
-            <a:ext cx="4206240" cy="4206240"/>
+            <a:off x="6130753" y="-947729"/>
+            <a:ext cx="2987610" cy="2987610"/>
           </a:xfrm>
           <a:prstGeom prst="ellipse">
             <a:avLst/>
@@ -11883,8 +11883,8 @@
         </p:nvSpPr>
         <p:spPr>
           <a:xfrm>
-            <a:off x="7863840" y="3108960"/>
-            <a:ext cx="2560320" cy="2560320"/>
+            <a:off x="7104973" y="1520297"/>
+            <a:ext cx="1688649" cy="1688649"/>
           </a:xfrm>
           <a:prstGeom prst="ellipse">
             <a:avLst/>
@@ -11905,8 +11905,8 @@
         </p:nvSpPr>
         <p:spPr>
           <a:xfrm>
-            <a:off x="502920" y="1691640"/>
-            <a:ext cx="4572000" cy="310896"/>
+            <a:off x="1681812" y="1228031"/>
+            <a:ext cx="3247402" cy="220823"/>
           </a:xfrm>
           <a:prstGeom prst="rect">
             <a:avLst/>
@@ -11921,7 +11921,7 @@
             <a:pPr indent="0" marL="0">
               <a:buNone/>
             </a:pPr>
-            <a:endParaRPr lang="en-US" sz="1350" dirty="0"/>
+            <a:endParaRPr lang="en-US" sz="960" dirty="0"/>
           </a:p>
         </p:txBody>
       </p:sp>
@@ -11933,8 +11933,8 @@
         </p:nvSpPr>
         <p:spPr>
           <a:xfrm>
-            <a:off x="502920" y="2048256"/>
-            <a:ext cx="7315200" cy="1188720"/>
+            <a:off x="1681812" y="1481328"/>
+            <a:ext cx="5195843" cy="844324"/>
           </a:xfrm>
           <a:prstGeom prst="rect">
             <a:avLst/>
@@ -11953,7 +11953,7 @@
               <a:buNone/>
             </a:pPr>
             <a:r>
-              <a:rPr lang="en-US" sz="2900" b="1" dirty="0">
+              <a:rPr lang="en-US" sz="2060" b="1" dirty="0">
                 <a:solidFill>
                   <a:srgbClr val="FFFFFF"/>
                 </a:solidFill>
@@ -11963,7 +11963,7 @@
               </a:rPr>
               <a:t>Kịch bản có ba tầng</a:t>
             </a:r>
-            <a:endParaRPr lang="en-US" sz="2900" dirty="0"/>
+            <a:endParaRPr lang="en-US" sz="2060" dirty="0"/>
           </a:p>
           <a:p>
             <a:pPr indent="0" marL="0">
@@ -11973,7 +11973,7 @@
               <a:buNone/>
             </a:pPr>
             <a:r>
-              <a:rPr lang="en-US" sz="1700" dirty="0">
+              <a:rPr lang="en-US" sz="1210" dirty="0">
                 <a:solidFill>
                   <a:srgbClr val="AFC3D4"/>
                 </a:solidFill>
@@ -11983,7 +11983,7 @@
               </a:rPr>
               <a:t>場景分成三層</a:t>
             </a:r>
-            <a:endParaRPr lang="en-US" sz="2900" dirty="0"/>
+            <a:endParaRPr lang="en-US" sz="2060" dirty="0"/>
           </a:p>
         </p:txBody>
       </p:sp>
@@ -11995,8 +11995,8 @@
         </p:nvSpPr>
         <p:spPr>
           <a:xfrm>
-            <a:off x="109728" y="4791456"/>
-            <a:ext cx="822960" cy="256032"/>
+            <a:off x="1402536" y="3390800"/>
+            <a:ext cx="584532" cy="181855"/>
           </a:xfrm>
           <a:prstGeom prst="rect">
             <a:avLst/>
@@ -12012,7 +12012,7 @@
               <a:buNone/>
             </a:pPr>
             <a:r>
-              <a:rPr lang="en-US" sz="900" dirty="0">
+              <a:rPr lang="en-US" sz="640" dirty="0">
                 <a:solidFill>
                   <a:srgbClr val="9FB3C8"/>
                 </a:solidFill>
@@ -12022,7 +12022,7 @@
               </a:rPr>
               <a:t>3 / 16</a:t>
             </a:r>
-            <a:endParaRPr lang="en-US" sz="900" dirty="0"/>
+            <a:endParaRPr lang="en-US" sz="640" dirty="0"/>
           </a:p>
         </p:txBody>
       </p:sp>
@@ -12034,8 +12034,8 @@
         </p:nvSpPr>
         <p:spPr>
           <a:xfrm>
-            <a:off x="960120" y="4791456"/>
-            <a:ext cx="2011680" cy="256032"/>
+            <a:off x="2006553" y="3390800"/>
+            <a:ext cx="1428857" cy="181855"/>
           </a:xfrm>
           <a:prstGeom prst="rect">
             <a:avLst/>
@@ -12051,7 +12051,7 @@
               <a:buNone/>
             </a:pPr>
             <a:r>
-              <a:rPr lang="en-US" sz="900" dirty="0">
+              <a:rPr lang="en-US" sz="640" dirty="0">
                 <a:solidFill>
                   <a:srgbClr val="9FB3C8"/>
                 </a:solidFill>
@@ -12061,7 +12061,7 @@
               </a:rPr>
               <a:t>Tiết 2 · 第 2 節</a:t>
             </a:r>
-            <a:endParaRPr lang="en-US" sz="900" dirty="0"/>
+            <a:endParaRPr lang="en-US" sz="640" dirty="0"/>
           </a:p>
         </p:txBody>
       </p:sp>
@@ -12098,8 +12098,8 @@
         </p:nvSpPr>
         <p:spPr>
           <a:xfrm>
-            <a:off x="502920" y="420624"/>
-            <a:ext cx="8138160" cy="274320"/>
+            <a:off x="1681812" y="325253"/>
+            <a:ext cx="5780375" cy="194844"/>
           </a:xfrm>
           <a:prstGeom prst="rect">
             <a:avLst/>
@@ -12115,7 +12115,7 @@
               <a:buNone/>
             </a:pPr>
             <a:r>
-              <a:rPr lang="en-US" sz="1250" b="1" dirty="0">
+              <a:rPr lang="en-US" sz="890" b="1" dirty="0">
                 <a:solidFill>
                   <a:srgbClr val="007F72"/>
                 </a:solidFill>
@@ -12125,7 +12125,7 @@
               </a:rPr>
               <a:t>Tầng 1 / 3 · 第一層</a:t>
             </a:r>
-            <a:endParaRPr lang="en-US" sz="1250" dirty="0"/>
+            <a:endParaRPr lang="en-US" sz="890" dirty="0"/>
           </a:p>
         </p:txBody>
       </p:sp>
@@ -12137,8 +12137,8 @@
         </p:nvSpPr>
         <p:spPr>
           <a:xfrm>
-            <a:off x="502920" y="1101852"/>
-            <a:ext cx="2468880" cy="2514600"/>
+            <a:off x="1681812" y="809116"/>
+            <a:ext cx="1753597" cy="1786071"/>
           </a:xfrm>
           <a:prstGeom prst="roundRect">
             <a:avLst>
@@ -12164,8 +12164,8 @@
         </p:nvSpPr>
         <p:spPr>
           <a:xfrm>
-            <a:off x="1255471" y="1735531"/>
-            <a:ext cx="963778" cy="1247242"/>
+            <a:off x="2216335" y="1259206"/>
+            <a:ext cx="684552" cy="885891"/>
           </a:xfrm>
           <a:prstGeom prst="roundRect">
             <a:avLst>
@@ -12193,8 +12193,8 @@
         </p:nvSpPr>
         <p:spPr>
           <a:xfrm>
-            <a:off x="1397203" y="1990649"/>
-            <a:ext cx="680314" cy="70866"/>
+            <a:off x="2317004" y="1440411"/>
+            <a:ext cx="483213" cy="50335"/>
           </a:xfrm>
           <a:prstGeom prst="rect">
             <a:avLst/>
@@ -12215,8 +12215,8 @@
         </p:nvSpPr>
         <p:spPr>
           <a:xfrm>
-            <a:off x="1397203" y="2189074"/>
-            <a:ext cx="680314" cy="70866"/>
+            <a:off x="2317004" y="1581348"/>
+            <a:ext cx="483213" cy="50335"/>
           </a:xfrm>
           <a:prstGeom prst="rect">
             <a:avLst/>
@@ -12237,8 +12237,8 @@
         </p:nvSpPr>
         <p:spPr>
           <a:xfrm>
-            <a:off x="1397203" y="2387498"/>
-            <a:ext cx="680314" cy="70866"/>
+            <a:off x="2317004" y="1722285"/>
+            <a:ext cx="483213" cy="50335"/>
           </a:xfrm>
           <a:prstGeom prst="rect">
             <a:avLst/>
@@ -12259,8 +12259,8 @@
         </p:nvSpPr>
         <p:spPr>
           <a:xfrm>
-            <a:off x="1397203" y="2585923"/>
-            <a:ext cx="680314" cy="70866"/>
+            <a:off x="2317004" y="1863222"/>
+            <a:ext cx="483213" cy="50335"/>
           </a:xfrm>
           <a:prstGeom prst="rect">
             <a:avLst/>
@@ -12281,8 +12281,8 @@
         </p:nvSpPr>
         <p:spPr>
           <a:xfrm>
-            <a:off x="1397203" y="2784348"/>
-            <a:ext cx="340157" cy="70866"/>
+            <a:off x="2317004" y="2004160"/>
+            <a:ext cx="241607" cy="50335"/>
           </a:xfrm>
           <a:prstGeom prst="rect">
             <a:avLst/>
@@ -12301,8 +12301,8 @@
         </p:nvSpPr>
         <p:spPr>
           <a:xfrm>
-            <a:off x="3429000" y="1319005"/>
-            <a:ext cx="5212080" cy="1005611"/>
+            <a:off x="3760150" y="963355"/>
+            <a:ext cx="3702038" cy="714266"/>
           </a:xfrm>
           <a:prstGeom prst="rect">
             <a:avLst/>
@@ -12321,7 +12321,7 @@
               <a:buNone/>
             </a:pPr>
             <a:r>
-              <a:rPr lang="en-US" sz="2300" b="1" dirty="0">
+              <a:rPr lang="en-US" sz="1630" b="1" dirty="0">
                 <a:solidFill>
                   <a:srgbClr val="0B1F3A"/>
                 </a:solidFill>
@@ -12331,7 +12331,7 @@
               </a:rPr>
               <a:t>Kịch bản chức năng: viết bằng tiếng người, không có con số</a:t>
             </a:r>
-            <a:endParaRPr lang="en-US" sz="2300" dirty="0"/>
+            <a:endParaRPr lang="en-US" sz="1630" dirty="0"/>
           </a:p>
           <a:p>
             <a:pPr indent="0" marL="0">
@@ -12341,7 +12341,7 @@
               <a:buNone/>
             </a:pPr>
             <a:r>
-              <a:rPr lang="en-US" sz="1400" dirty="0">
+              <a:rPr lang="en-US" sz="990" dirty="0">
                 <a:solidFill>
                   <a:srgbClr val="007F72"/>
                 </a:solidFill>
@@ -12351,7 +12351,7 @@
               </a:rPr>
               <a:t>功能場景：用人話寫，沒有數字</a:t>
             </a:r>
-            <a:endParaRPr lang="en-US" sz="2300" dirty="0"/>
+            <a:endParaRPr lang="en-US" sz="1630" dirty="0"/>
           </a:p>
         </p:txBody>
       </p:sp>
@@ -12363,8 +12363,8 @@
         </p:nvSpPr>
         <p:spPr>
           <a:xfrm>
-            <a:off x="3429000" y="2416057"/>
-            <a:ext cx="5212080" cy="1074682"/>
+            <a:off x="3760150" y="1742570"/>
+            <a:ext cx="3702038" cy="763326"/>
           </a:xfrm>
           <a:prstGeom prst="rect">
             <a:avLst/>
@@ -12383,7 +12383,7 @@
               <a:buNone/>
             </a:pPr>
             <a:r>
-              <a:rPr lang="en-US" sz="1250" dirty="0">
+              <a:rPr lang="en-US" sz="890" dirty="0">
                 <a:solidFill>
                   <a:srgbClr val="5F7183"/>
                 </a:solidFill>
@@ -12393,7 +12393,7 @@
               </a:rPr>
               <a:t>Ví dụ: «xe phía trước phanh gấp». Ai đọc cũng hiểu, kể cả người không làm kỹ thuật. Nhưng chưa test được, vì chưa có con số nào.</a:t>
             </a:r>
-            <a:endParaRPr lang="en-US" sz="1250" dirty="0"/>
+            <a:endParaRPr lang="en-US" sz="890" dirty="0"/>
           </a:p>
           <a:p>
             <a:pPr indent="0" marL="0">
@@ -12403,7 +12403,7 @@
               <a:buNone/>
             </a:pPr>
             <a:r>
-              <a:rPr lang="en-US" sz="1150" dirty="0">
+              <a:rPr lang="en-US" sz="820" dirty="0">
                 <a:solidFill>
                   <a:srgbClr val="5F7183"/>
                 </a:solidFill>
@@ -12413,7 +12413,7 @@
               </a:rPr>
               <a:t>例子：「前車急煞」。任何人都看得懂，連不是工程師的人也懂。但還沒辦法拿來測，因為還沒有任何數字。</a:t>
             </a:r>
-            <a:endParaRPr lang="en-US" sz="1250" dirty="0"/>
+            <a:endParaRPr lang="en-US" sz="890" dirty="0"/>
           </a:p>
         </p:txBody>
       </p:sp>
@@ -12425,8 +12425,8 @@
         </p:nvSpPr>
         <p:spPr>
           <a:xfrm>
-            <a:off x="502920" y="3913632"/>
-            <a:ext cx="8138160" cy="621792"/>
+            <a:off x="1681812" y="2806268"/>
+            <a:ext cx="5780375" cy="441647"/>
           </a:xfrm>
           <a:prstGeom prst="roundRect">
             <a:avLst>
@@ -12452,8 +12452,8 @@
         </p:nvSpPr>
         <p:spPr>
           <a:xfrm>
-            <a:off x="685800" y="3986784"/>
-            <a:ext cx="7772400" cy="493776"/>
+            <a:off x="1811708" y="2858226"/>
+            <a:ext cx="5520583" cy="350719"/>
           </a:xfrm>
           <a:prstGeom prst="rect">
             <a:avLst/>
@@ -12472,7 +12472,7 @@
               <a:buNone/>
             </a:pPr>
             <a:r>
-              <a:rPr lang="en-US" sz="1250" b="1" dirty="0">
+              <a:rPr lang="en-US" sz="890" b="1" dirty="0">
                 <a:solidFill>
                   <a:srgbClr val="7A4E00"/>
                 </a:solidFill>
@@ -12482,7 +12482,7 @@
               </a:rPr>
               <a:t>Dùng để làm gì: liệt kê ra hết những chuyện có thể xảy ra. Giai đoạn này càng nhiều càng tốt.</a:t>
             </a:r>
-            <a:endParaRPr lang="en-US" sz="1250" dirty="0"/>
+            <a:endParaRPr lang="en-US" sz="890" dirty="0"/>
           </a:p>
           <a:p>
             <a:pPr indent="0" marL="0">
@@ -12492,7 +12492,7 @@
               <a:buNone/>
             </a:pPr>
             <a:r>
-              <a:rPr lang="en-US" sz="1150" dirty="0">
+              <a:rPr lang="en-US" sz="820" dirty="0">
                 <a:solidFill>
                   <a:srgbClr val="7A4E00"/>
                 </a:solidFill>
@@ -12502,7 +12502,7 @@
               </a:rPr>
               <a:t>用途：把所有可能發生的事列出來。這個階段愈多愈好。</a:t>
             </a:r>
-            <a:endParaRPr lang="en-US" sz="1250" dirty="0"/>
+            <a:endParaRPr lang="en-US" sz="890" dirty="0"/>
           </a:p>
         </p:txBody>
       </p:sp>
@@ -12522,8 +12522,8 @@
         </p:blipFill>
         <p:spPr>
           <a:xfrm>
-            <a:off x="7516368" y="4718304"/>
-            <a:ext cx="1097280" cy="242439"/>
+            <a:off x="6663327" y="3338842"/>
+            <a:ext cx="779376" cy="172200"/>
           </a:xfrm>
           <a:prstGeom prst="rect">
             <a:avLst/>
@@ -12538,8 +12538,8 @@
         </p:nvSpPr>
         <p:spPr>
           <a:xfrm>
-            <a:off x="109728" y="4791456"/>
-            <a:ext cx="822960" cy="256032"/>
+            <a:off x="1402536" y="3390800"/>
+            <a:ext cx="584532" cy="181855"/>
           </a:xfrm>
           <a:prstGeom prst="rect">
             <a:avLst/>
@@ -12555,7 +12555,7 @@
               <a:buNone/>
             </a:pPr>
             <a:r>
-              <a:rPr lang="en-US" sz="900" dirty="0">
+              <a:rPr lang="en-US" sz="640" dirty="0">
                 <a:solidFill>
                   <a:srgbClr val="5F7183"/>
                 </a:solidFill>
@@ -12565,7 +12565,7 @@
               </a:rPr>
               <a:t>4 / 16</a:t>
             </a:r>
-            <a:endParaRPr lang="en-US" sz="900" dirty="0"/>
+            <a:endParaRPr lang="en-US" sz="640" dirty="0"/>
           </a:p>
         </p:txBody>
       </p:sp>
@@ -12577,8 +12577,8 @@
         </p:nvSpPr>
         <p:spPr>
           <a:xfrm>
-            <a:off x="960120" y="4791456"/>
-            <a:ext cx="2011680" cy="256032"/>
+            <a:off x="2006553" y="3390800"/>
+            <a:ext cx="1428857" cy="181855"/>
           </a:xfrm>
           <a:prstGeom prst="rect">
             <a:avLst/>
@@ -12594,7 +12594,7 @@
               <a:buNone/>
             </a:pPr>
             <a:r>
-              <a:rPr lang="en-US" sz="900" dirty="0">
+              <a:rPr lang="en-US" sz="640" dirty="0">
                 <a:solidFill>
                   <a:srgbClr val="5F7183"/>
                 </a:solidFill>
@@ -12604,7 +12604,7 @@
               </a:rPr>
               <a:t>Tiết 2 · 第 2 節</a:t>
             </a:r>
-            <a:endParaRPr lang="en-US" sz="900" dirty="0"/>
+            <a:endParaRPr lang="en-US" sz="640" dirty="0"/>
           </a:p>
         </p:txBody>
       </p:sp>
@@ -12641,8 +12641,8 @@
         </p:nvSpPr>
         <p:spPr>
           <a:xfrm>
-            <a:off x="502920" y="420624"/>
-            <a:ext cx="8138160" cy="274320"/>
+            <a:off x="1681812" y="325253"/>
+            <a:ext cx="5780375" cy="194844"/>
           </a:xfrm>
           <a:prstGeom prst="rect">
             <a:avLst/>
@@ -12658,7 +12658,7 @@
               <a:buNone/>
             </a:pPr>
             <a:r>
-              <a:rPr lang="en-US" sz="1250" b="1" dirty="0">
+              <a:rPr lang="en-US" sz="890" b="1" dirty="0">
                 <a:solidFill>
                   <a:srgbClr val="007F72"/>
                 </a:solidFill>
@@ -12668,7 +12668,7 @@
               </a:rPr>
               <a:t>Tầng 2 / 3 · 第二層</a:t>
             </a:r>
-            <a:endParaRPr lang="en-US" sz="1250" dirty="0"/>
+            <a:endParaRPr lang="en-US" sz="890" dirty="0"/>
           </a:p>
         </p:txBody>
       </p:sp>
@@ -12680,8 +12680,8 @@
         </p:nvSpPr>
         <p:spPr>
           <a:xfrm>
-            <a:off x="502920" y="1101852"/>
-            <a:ext cx="2468880" cy="2514600"/>
+            <a:off x="1681812" y="809116"/>
+            <a:ext cx="1753597" cy="1786071"/>
           </a:xfrm>
           <a:prstGeom prst="roundRect">
             <a:avLst>
@@ -12707,8 +12707,8 @@
         </p:nvSpPr>
         <p:spPr>
           <a:xfrm>
-            <a:off x="940735" y="1821430"/>
-            <a:ext cx="1593251" cy="97768"/>
+            <a:off x="1992784" y="1320218"/>
+            <a:ext cx="1131655" cy="69442"/>
           </a:xfrm>
           <a:prstGeom prst="roundRect">
             <a:avLst>
@@ -12729,8 +12729,8 @@
         </p:nvSpPr>
         <p:spPr>
           <a:xfrm>
-            <a:off x="1227520" y="1821430"/>
-            <a:ext cx="860355" cy="97768"/>
+            <a:off x="2196481" y="1320218"/>
+            <a:ext cx="611093" cy="69442"/>
           </a:xfrm>
           <a:prstGeom prst="roundRect">
             <a:avLst>
@@ -12751,8 +12751,8 @@
         </p:nvSpPr>
         <p:spPr>
           <a:xfrm>
-            <a:off x="940735" y="2310268"/>
-            <a:ext cx="1593251" cy="97768"/>
+            <a:off x="1992784" y="1667430"/>
+            <a:ext cx="1131655" cy="69442"/>
           </a:xfrm>
           <a:prstGeom prst="roundRect">
             <a:avLst>
@@ -12773,8 +12773,8 @@
         </p:nvSpPr>
         <p:spPr>
           <a:xfrm>
-            <a:off x="1482440" y="2310268"/>
-            <a:ext cx="892220" cy="97768"/>
+            <a:off x="2377546" y="1667430"/>
+            <a:ext cx="633727" cy="69442"/>
           </a:xfrm>
           <a:prstGeom prst="roundRect">
             <a:avLst>
@@ -12795,8 +12795,8 @@
         </p:nvSpPr>
         <p:spPr>
           <a:xfrm>
-            <a:off x="940735" y="2799106"/>
-            <a:ext cx="1593251" cy="97768"/>
+            <a:off x="1992784" y="2014642"/>
+            <a:ext cx="1131655" cy="69442"/>
           </a:xfrm>
           <a:prstGeom prst="roundRect">
             <a:avLst>
@@ -12817,8 +12817,8 @@
         </p:nvSpPr>
         <p:spPr>
           <a:xfrm>
-            <a:off x="1100060" y="2799106"/>
-            <a:ext cx="828490" cy="97768"/>
+            <a:off x="2105949" y="2014642"/>
+            <a:ext cx="588460" cy="69442"/>
           </a:xfrm>
           <a:prstGeom prst="roundRect">
             <a:avLst>
@@ -12839,8 +12839,8 @@
         </p:nvSpPr>
         <p:spPr>
           <a:xfrm>
-            <a:off x="3429000" y="1319005"/>
-            <a:ext cx="5212080" cy="1005611"/>
+            <a:off x="3760150" y="963355"/>
+            <a:ext cx="3702038" cy="714266"/>
           </a:xfrm>
           <a:prstGeom prst="rect">
             <a:avLst/>
@@ -12859,7 +12859,7 @@
               <a:buNone/>
             </a:pPr>
             <a:r>
-              <a:rPr lang="en-US" sz="2300" b="1" dirty="0">
+              <a:rPr lang="en-US" sz="1630" b="1" dirty="0">
                 <a:solidFill>
                   <a:srgbClr val="0B1F3A"/>
                 </a:solidFill>
@@ -12869,7 +12869,7 @@
               </a:rPr>
               <a:t>Kịch bản logic: thêm tham số, nhưng mỗi tham số là một KHOẢNG</a:t>
             </a:r>
-            <a:endParaRPr lang="en-US" sz="2300" dirty="0"/>
+            <a:endParaRPr lang="en-US" sz="1630" dirty="0"/>
           </a:p>
           <a:p>
             <a:pPr indent="0" marL="0">
@@ -12879,7 +12879,7 @@
               <a:buNone/>
             </a:pPr>
             <a:r>
-              <a:rPr lang="en-US" sz="1400" dirty="0">
+              <a:rPr lang="en-US" sz="990" dirty="0">
                 <a:solidFill>
                   <a:srgbClr val="007F72"/>
                 </a:solidFill>
@@ -12889,7 +12889,7 @@
               </a:rPr>
               <a:t>邏輯場景：加上參數，但每個參數是一個「範圍」</a:t>
             </a:r>
-            <a:endParaRPr lang="en-US" sz="2300" dirty="0"/>
+            <a:endParaRPr lang="en-US" sz="1630" dirty="0"/>
           </a:p>
         </p:txBody>
       </p:sp>
@@ -12901,8 +12901,8 @@
         </p:nvSpPr>
         <p:spPr>
           <a:xfrm>
-            <a:off x="3429000" y="2416057"/>
-            <a:ext cx="5212080" cy="1074682"/>
+            <a:off x="3760150" y="1742570"/>
+            <a:ext cx="3702038" cy="763326"/>
           </a:xfrm>
           <a:prstGeom prst="rect">
             <a:avLst/>
@@ -12921,7 +12921,7 @@
               <a:buNone/>
             </a:pPr>
             <a:r>
-              <a:rPr lang="en-US" sz="1250" dirty="0">
+              <a:rPr lang="en-US" sz="890" dirty="0">
                 <a:solidFill>
                   <a:srgbClr val="5F7183"/>
                 </a:solidFill>
@@ -12931,7 +12931,7 @@
               </a:rPr>
               <a:t>Ví dụ: xe phía trước ở cách 20 đến 60 m, giảm tốc 3 đến 8 m/s², xe mình chạy 40 đến 70 km/h. Vẫn chưa test được, nhưng đã đủ chính xác để máy hiểu.</a:t>
             </a:r>
-            <a:endParaRPr lang="en-US" sz="1250" dirty="0"/>
+            <a:endParaRPr lang="en-US" sz="890" dirty="0"/>
           </a:p>
           <a:p>
             <a:pPr indent="0" marL="0">
@@ -12941,7 +12941,7 @@
               <a:buNone/>
             </a:pPr>
             <a:r>
-              <a:rPr lang="en-US" sz="1150" dirty="0">
+              <a:rPr lang="en-US" sz="820" dirty="0">
                 <a:solidFill>
                   <a:srgbClr val="5F7183"/>
                 </a:solidFill>
@@ -12951,7 +12951,7 @@
               </a:rPr>
               <a:t>例子：前車在 20 到 60 公尺處，以 3 到 8 m/s² 減速，自車時速 40 到 70。還是不能直接測，但已經精確到電腦看得懂。</a:t>
             </a:r>
-            <a:endParaRPr lang="en-US" sz="1250" dirty="0"/>
+            <a:endParaRPr lang="en-US" sz="890" dirty="0"/>
           </a:p>
         </p:txBody>
       </p:sp>
@@ -12963,8 +12963,8 @@
         </p:nvSpPr>
         <p:spPr>
           <a:xfrm>
-            <a:off x="502920" y="3913632"/>
-            <a:ext cx="8138160" cy="621792"/>
+            <a:off x="1681812" y="2806268"/>
+            <a:ext cx="5780375" cy="441647"/>
           </a:xfrm>
           <a:prstGeom prst="roundRect">
             <a:avLst>
@@ -12990,8 +12990,8 @@
         </p:nvSpPr>
         <p:spPr>
           <a:xfrm>
-            <a:off x="685800" y="3986784"/>
-            <a:ext cx="7772400" cy="493776"/>
+            <a:off x="1811708" y="2858226"/>
+            <a:ext cx="5520583" cy="350719"/>
           </a:xfrm>
           <a:prstGeom prst="rect">
             <a:avLst/>
@@ -13010,7 +13010,7 @@
               <a:buNone/>
             </a:pPr>
             <a:r>
-              <a:rPr lang="en-US" sz="1250" b="1" dirty="0">
+              <a:rPr lang="en-US" sz="890" b="1" dirty="0">
                 <a:solidFill>
                   <a:srgbClr val="7A4E00"/>
                 </a:solidFill>
@@ -13020,7 +13020,7 @@
               </a:rPr>
               <a:t>Đây là tầng quan trọng nhất — và cũng là tầng bài cuối kỳ yêu cầu các bạn viết.</a:t>
             </a:r>
-            <a:endParaRPr lang="en-US" sz="1250" dirty="0"/>
+            <a:endParaRPr lang="en-US" sz="890" dirty="0"/>
           </a:p>
           <a:p>
             <a:pPr indent="0" marL="0">
@@ -13030,7 +13030,7 @@
               <a:buNone/>
             </a:pPr>
             <a:r>
-              <a:rPr lang="en-US" sz="1150" dirty="0">
+              <a:rPr lang="en-US" sz="820" dirty="0">
                 <a:solidFill>
                   <a:srgbClr val="7A4E00"/>
                 </a:solidFill>
@@ -13040,7 +13040,7 @@
               </a:rPr>
               <a:t>這是最重要的一層——也是期末專題要各位寫的那一層。</a:t>
             </a:r>
-            <a:endParaRPr lang="en-US" sz="1250" dirty="0"/>
+            <a:endParaRPr lang="en-US" sz="890" dirty="0"/>
           </a:p>
         </p:txBody>
       </p:sp>
@@ -13060,8 +13060,8 @@
         </p:blipFill>
         <p:spPr>
           <a:xfrm>
-            <a:off x="7516368" y="4718304"/>
-            <a:ext cx="1097280" cy="242439"/>
+            <a:off x="6663327" y="3338842"/>
+            <a:ext cx="779376" cy="172200"/>
           </a:xfrm>
           <a:prstGeom prst="rect">
             <a:avLst/>
@@ -13076,8 +13076,8 @@
         </p:nvSpPr>
         <p:spPr>
           <a:xfrm>
-            <a:off x="109728" y="4791456"/>
-            <a:ext cx="822960" cy="256032"/>
+            <a:off x="1402536" y="3390800"/>
+            <a:ext cx="584532" cy="181855"/>
           </a:xfrm>
           <a:prstGeom prst="rect">
             <a:avLst/>
@@ -13093,7 +13093,7 @@
               <a:buNone/>
             </a:pPr>
             <a:r>
-              <a:rPr lang="en-US" sz="900" dirty="0">
+              <a:rPr lang="en-US" sz="640" dirty="0">
                 <a:solidFill>
                   <a:srgbClr val="5F7183"/>
                 </a:solidFill>
@@ -13103,7 +13103,7 @@
               </a:rPr>
               <a:t>5 / 16</a:t>
             </a:r>
-            <a:endParaRPr lang="en-US" sz="900" dirty="0"/>
+            <a:endParaRPr lang="en-US" sz="640" dirty="0"/>
           </a:p>
         </p:txBody>
       </p:sp>
@@ -13115,8 +13115,8 @@
         </p:nvSpPr>
         <p:spPr>
           <a:xfrm>
-            <a:off x="960120" y="4791456"/>
-            <a:ext cx="2011680" cy="256032"/>
+            <a:off x="2006553" y="3390800"/>
+            <a:ext cx="1428857" cy="181855"/>
           </a:xfrm>
           <a:prstGeom prst="rect">
             <a:avLst/>
@@ -13132,7 +13132,7 @@
               <a:buNone/>
             </a:pPr>
             <a:r>
-              <a:rPr lang="en-US" sz="900" dirty="0">
+              <a:rPr lang="en-US" sz="640" dirty="0">
                 <a:solidFill>
                   <a:srgbClr val="5F7183"/>
                 </a:solidFill>
@@ -13142,7 +13142,7 @@
               </a:rPr>
               <a:t>Tiết 2 · 第 2 節</a:t>
             </a:r>
-            <a:endParaRPr lang="en-US" sz="900" dirty="0"/>
+            <a:endParaRPr lang="en-US" sz="640" dirty="0"/>
           </a:p>
         </p:txBody>
       </p:sp>
@@ -13179,8 +13179,8 @@
         </p:nvSpPr>
         <p:spPr>
           <a:xfrm>
-            <a:off x="502920" y="420624"/>
-            <a:ext cx="8138160" cy="274320"/>
+            <a:off x="1681812" y="325253"/>
+            <a:ext cx="5780375" cy="194844"/>
           </a:xfrm>
           <a:prstGeom prst="rect">
             <a:avLst/>
@@ -13196,7 +13196,7 @@
               <a:buNone/>
             </a:pPr>
             <a:r>
-              <a:rPr lang="en-US" sz="1250" b="1" dirty="0">
+              <a:rPr lang="en-US" sz="890" b="1" dirty="0">
                 <a:solidFill>
                   <a:srgbClr val="007F72"/>
                 </a:solidFill>
@@ -13206,7 +13206,7 @@
               </a:rPr>
               <a:t>Tầng 3 / 3 · 第三層</a:t>
             </a:r>
-            <a:endParaRPr lang="en-US" sz="1250" dirty="0"/>
+            <a:endParaRPr lang="en-US" sz="890" dirty="0"/>
           </a:p>
         </p:txBody>
       </p:sp>
@@ -13218,8 +13218,8 @@
         </p:nvSpPr>
         <p:spPr>
           <a:xfrm>
-            <a:off x="502920" y="1101852"/>
-            <a:ext cx="2468880" cy="2514600"/>
+            <a:off x="1681812" y="809116"/>
+            <a:ext cx="1753597" cy="1786071"/>
           </a:xfrm>
           <a:prstGeom prst="roundRect">
             <a:avLst>
@@ -13245,8 +13245,8 @@
         </p:nvSpPr>
         <p:spPr>
           <a:xfrm>
-            <a:off x="940735" y="1821430"/>
-            <a:ext cx="1593251" cy="97768"/>
+            <a:off x="1992784" y="1320218"/>
+            <a:ext cx="1131655" cy="69442"/>
           </a:xfrm>
           <a:prstGeom prst="roundRect">
             <a:avLst>
@@ -13267,8 +13267,8 @@
         </p:nvSpPr>
         <p:spPr>
           <a:xfrm>
-            <a:off x="1525464" y="1785878"/>
-            <a:ext cx="168871" cy="168871"/>
+            <a:off x="2408105" y="1294966"/>
+            <a:ext cx="119946" cy="119946"/>
           </a:xfrm>
           <a:prstGeom prst="ellipse">
             <a:avLst/>
@@ -13287,8 +13287,8 @@
         </p:nvSpPr>
         <p:spPr>
           <a:xfrm>
-            <a:off x="940735" y="2310268"/>
-            <a:ext cx="1593251" cy="97768"/>
+            <a:off x="1992784" y="1667430"/>
+            <a:ext cx="1131655" cy="69442"/>
           </a:xfrm>
           <a:prstGeom prst="roundRect">
             <a:avLst>
@@ -13309,8 +13309,8 @@
         </p:nvSpPr>
         <p:spPr>
           <a:xfrm>
-            <a:off x="1907844" y="2274716"/>
-            <a:ext cx="168871" cy="168871"/>
+            <a:off x="2679703" y="1642178"/>
+            <a:ext cx="119946" cy="119946"/>
           </a:xfrm>
           <a:prstGeom prst="ellipse">
             <a:avLst/>
@@ -13329,8 +13329,8 @@
         </p:nvSpPr>
         <p:spPr>
           <a:xfrm>
-            <a:off x="940735" y="2799106"/>
-            <a:ext cx="1593251" cy="97768"/>
+            <a:off x="1992784" y="2014642"/>
+            <a:ext cx="1131655" cy="69442"/>
           </a:xfrm>
           <a:prstGeom prst="roundRect">
             <a:avLst>
@@ -13351,8 +13351,8 @@
         </p:nvSpPr>
         <p:spPr>
           <a:xfrm>
-            <a:off x="1334274" y="2763555"/>
-            <a:ext cx="168871" cy="168871"/>
+            <a:off x="2272307" y="1989391"/>
+            <a:ext cx="119946" cy="119946"/>
           </a:xfrm>
           <a:prstGeom prst="ellipse">
             <a:avLst/>
@@ -13371,8 +13371,8 @@
         </p:nvSpPr>
         <p:spPr>
           <a:xfrm>
-            <a:off x="3429000" y="1319005"/>
-            <a:ext cx="5212080" cy="1005611"/>
+            <a:off x="3760150" y="963355"/>
+            <a:ext cx="3702038" cy="714266"/>
           </a:xfrm>
           <a:prstGeom prst="rect">
             <a:avLst/>
@@ -13391,7 +13391,7 @@
               <a:buNone/>
             </a:pPr>
             <a:r>
-              <a:rPr lang="en-US" sz="2300" b="1" dirty="0">
+              <a:rPr lang="en-US" sz="1630" b="1" dirty="0">
                 <a:solidFill>
                   <a:srgbClr val="0B1F3A"/>
                 </a:solidFill>
@@ -13401,7 +13401,7 @@
               </a:rPr>
               <a:t>Kịch bản cụ thể: mỗi tham số chốt đúng một giá trị</a:t>
             </a:r>
-            <a:endParaRPr lang="en-US" sz="2300" dirty="0"/>
+            <a:endParaRPr lang="en-US" sz="1630" dirty="0"/>
           </a:p>
           <a:p>
             <a:pPr indent="0" marL="0">
@@ -13411,7 +13411,7 @@
               <a:buNone/>
             </a:pPr>
             <a:r>
-              <a:rPr lang="en-US" sz="1400" dirty="0">
+              <a:rPr lang="en-US" sz="990" dirty="0">
                 <a:solidFill>
                   <a:srgbClr val="007F72"/>
                 </a:solidFill>
@@ -13421,7 +13421,7 @@
               </a:rPr>
               <a:t>具體場景：每個參數固定成一個值</a:t>
             </a:r>
-            <a:endParaRPr lang="en-US" sz="2300" dirty="0"/>
+            <a:endParaRPr lang="en-US" sz="1630" dirty="0"/>
           </a:p>
         </p:txBody>
       </p:sp>
@@ -13433,8 +13433,8 @@
         </p:nvSpPr>
         <p:spPr>
           <a:xfrm>
-            <a:off x="3429000" y="2416057"/>
-            <a:ext cx="5212080" cy="1074682"/>
+            <a:off x="3760150" y="1742570"/>
+            <a:ext cx="3702038" cy="763326"/>
           </a:xfrm>
           <a:prstGeom prst="rect">
             <a:avLst/>
@@ -13453,7 +13453,7 @@
               <a:buNone/>
             </a:pPr>
             <a:r>
-              <a:rPr lang="en-US" sz="1250" dirty="0">
+              <a:rPr lang="en-US" sz="890" dirty="0">
                 <a:solidFill>
                   <a:srgbClr val="5F7183"/>
                 </a:solidFill>
@@ -13463,7 +13463,7 @@
               </a:rPr>
               <a:t>Ví dụ: xe phía trước cách đúng 35 m, giảm tốc đúng 6 m/s², xe mình chạy đúng 50 km/h. Đây mới là thứ chạy được trong mô phỏng — chạy một lần ra một kết quả.</a:t>
             </a:r>
-            <a:endParaRPr lang="en-US" sz="1250" dirty="0"/>
+            <a:endParaRPr lang="en-US" sz="890" dirty="0"/>
           </a:p>
           <a:p>
             <a:pPr indent="0" marL="0">
@@ -13473,7 +13473,7 @@
               <a:buNone/>
             </a:pPr>
             <a:r>
-              <a:rPr lang="en-US" sz="1150" dirty="0">
+              <a:rPr lang="en-US" sz="820" dirty="0">
                 <a:solidFill>
                   <a:srgbClr val="5F7183"/>
                 </a:solidFill>
@@ -13483,7 +13483,7 @@
               </a:rPr>
               <a:t>例子：前車剛好 35 公尺，減速度剛好 6 m/s²，自車剛好時速 50。這才是模擬器真的跑得起來的東西——跑一次，出一個結果。</a:t>
             </a:r>
-            <a:endParaRPr lang="en-US" sz="1250" dirty="0"/>
+            <a:endParaRPr lang="en-US" sz="890" dirty="0"/>
           </a:p>
         </p:txBody>
       </p:sp>
@@ -13495,8 +13495,8 @@
         </p:nvSpPr>
         <p:spPr>
           <a:xfrm>
-            <a:off x="502920" y="3913632"/>
-            <a:ext cx="8138160" cy="621792"/>
+            <a:off x="1681812" y="2806268"/>
+            <a:ext cx="5780375" cy="441647"/>
           </a:xfrm>
           <a:prstGeom prst="roundRect">
             <a:avLst>
@@ -13522,8 +13522,8 @@
         </p:nvSpPr>
         <p:spPr>
           <a:xfrm>
-            <a:off x="685800" y="3986784"/>
-            <a:ext cx="7772400" cy="493776"/>
+            <a:off x="1811708" y="2858226"/>
+            <a:ext cx="5520583" cy="350719"/>
           </a:xfrm>
           <a:prstGeom prst="rect">
             <a:avLst/>
@@ -13542,7 +13542,7 @@
               <a:buNone/>
             </a:pPr>
             <a:r>
-              <a:rPr lang="en-US" sz="1250" b="1" dirty="0">
+              <a:rPr lang="en-US" sz="890" b="1" dirty="0">
                 <a:solidFill>
                   <a:srgbClr val="7A4E00"/>
                 </a:solidFill>
@@ -13552,7 +13552,7 @@
               </a:rPr>
               <a:t>Một kịch bản logic có thể bung ra hàng nghìn, hàng chục nghìn kịch bản cụ thể.</a:t>
             </a:r>
-            <a:endParaRPr lang="en-US" sz="1250" dirty="0"/>
+            <a:endParaRPr lang="en-US" sz="890" dirty="0"/>
           </a:p>
           <a:p>
             <a:pPr indent="0" marL="0">
@@ -13562,7 +13562,7 @@
               <a:buNone/>
             </a:pPr>
             <a:r>
-              <a:rPr lang="en-US" sz="1150" dirty="0">
+              <a:rPr lang="en-US" sz="820" dirty="0">
                 <a:solidFill>
                   <a:srgbClr val="7A4E00"/>
                 </a:solidFill>
@@ -13572,7 +13572,7 @@
               </a:rPr>
               <a:t>一個邏輯場景，可以展開成成千上萬個具體場景。</a:t>
             </a:r>
-            <a:endParaRPr lang="en-US" sz="1250" dirty="0"/>
+            <a:endParaRPr lang="en-US" sz="890" dirty="0"/>
           </a:p>
         </p:txBody>
       </p:sp>
@@ -13592,8 +13592,8 @@
         </p:blipFill>
         <p:spPr>
           <a:xfrm>
-            <a:off x="7516368" y="4718304"/>
-            <a:ext cx="1097280" cy="242439"/>
+            <a:off x="6663327" y="3338842"/>
+            <a:ext cx="779376" cy="172200"/>
           </a:xfrm>
           <a:prstGeom prst="rect">
             <a:avLst/>
@@ -13608,8 +13608,8 @@
         </p:nvSpPr>
         <p:spPr>
           <a:xfrm>
-            <a:off x="109728" y="4791456"/>
-            <a:ext cx="822960" cy="256032"/>
+            <a:off x="1402536" y="3390800"/>
+            <a:ext cx="584532" cy="181855"/>
           </a:xfrm>
           <a:prstGeom prst="rect">
             <a:avLst/>
@@ -13625,7 +13625,7 @@
               <a:buNone/>
             </a:pPr>
             <a:r>
-              <a:rPr lang="en-US" sz="900" dirty="0">
+              <a:rPr lang="en-US" sz="640" dirty="0">
                 <a:solidFill>
                   <a:srgbClr val="5F7183"/>
                 </a:solidFill>
@@ -13635,7 +13635,7 @@
               </a:rPr>
               <a:t>6 / 16</a:t>
             </a:r>
-            <a:endParaRPr lang="en-US" sz="900" dirty="0"/>
+            <a:endParaRPr lang="en-US" sz="640" dirty="0"/>
           </a:p>
         </p:txBody>
       </p:sp>
@@ -13647,8 +13647,8 @@
         </p:nvSpPr>
         <p:spPr>
           <a:xfrm>
-            <a:off x="960120" y="4791456"/>
-            <a:ext cx="2011680" cy="256032"/>
+            <a:off x="2006553" y="3390800"/>
+            <a:ext cx="1428857" cy="181855"/>
           </a:xfrm>
           <a:prstGeom prst="rect">
             <a:avLst/>
@@ -13664,7 +13664,7 @@
               <a:buNone/>
             </a:pPr>
             <a:r>
-              <a:rPr lang="en-US" sz="900" dirty="0">
+              <a:rPr lang="en-US" sz="640" dirty="0">
                 <a:solidFill>
                   <a:srgbClr val="5F7183"/>
                 </a:solidFill>
@@ -13674,7 +13674,7 @@
               </a:rPr>
               <a:t>Tiết 2 · 第 2 節</a:t>
             </a:r>
-            <a:endParaRPr lang="en-US" sz="900" dirty="0"/>
+            <a:endParaRPr lang="en-US" sz="640" dirty="0"/>
           </a:p>
         </p:txBody>
       </p:sp>
@@ -13711,8 +13711,8 @@
         </p:nvSpPr>
         <p:spPr>
           <a:xfrm>
-            <a:off x="502920" y="420624"/>
-            <a:ext cx="8138160" cy="274320"/>
+            <a:off x="1681812" y="325253"/>
+            <a:ext cx="5780375" cy="194844"/>
           </a:xfrm>
           <a:prstGeom prst="rect">
             <a:avLst/>
@@ -13728,7 +13728,7 @@
               <a:buNone/>
             </a:pPr>
             <a:r>
-              <a:rPr lang="en-US" sz="1250" b="1" dirty="0">
+              <a:rPr lang="en-US" sz="890" b="1" dirty="0">
                 <a:solidFill>
                   <a:srgbClr val="007F72"/>
                 </a:solidFill>
@@ -13738,7 +13738,7 @@
               </a:rPr>
               <a:t>Cách dùng · 模擬真正的用法</a:t>
             </a:r>
-            <a:endParaRPr lang="en-US" sz="1250" dirty="0"/>
+            <a:endParaRPr lang="en-US" sz="890" dirty="0"/>
           </a:p>
         </p:txBody>
       </p:sp>
@@ -13750,8 +13750,8 @@
         </p:nvSpPr>
         <p:spPr>
           <a:xfrm>
-            <a:off x="502920" y="1101852"/>
-            <a:ext cx="2468880" cy="2514600"/>
+            <a:off x="1681812" y="809116"/>
+            <a:ext cx="1753597" cy="1786071"/>
           </a:xfrm>
           <a:prstGeom prst="roundRect">
             <a:avLst>
@@ -13777,8 +13777,8 @@
         </p:nvSpPr>
         <p:spPr>
           <a:xfrm>
-            <a:off x="940735" y="1821430"/>
-            <a:ext cx="1593251" cy="97768"/>
+            <a:off x="1992784" y="1320218"/>
+            <a:ext cx="1131655" cy="69442"/>
           </a:xfrm>
           <a:prstGeom prst="roundRect">
             <a:avLst>
@@ -13799,8 +13799,8 @@
         </p:nvSpPr>
         <p:spPr>
           <a:xfrm>
-            <a:off x="1192725" y="1803654"/>
-            <a:ext cx="133320" cy="133320"/>
+            <a:off x="2171767" y="1307592"/>
+            <a:ext cx="94694" cy="94694"/>
           </a:xfrm>
           <a:prstGeom prst="ellipse">
             <a:avLst/>
@@ -13819,8 +13819,8 @@
         </p:nvSpPr>
         <p:spPr>
           <a:xfrm>
-            <a:off x="1447645" y="1803654"/>
-            <a:ext cx="133320" cy="133320"/>
+            <a:off x="2352832" y="1307592"/>
+            <a:ext cx="94694" cy="94694"/>
           </a:xfrm>
           <a:prstGeom prst="ellipse">
             <a:avLst/>
@@ -13839,8 +13839,8 @@
         </p:nvSpPr>
         <p:spPr>
           <a:xfrm>
-            <a:off x="1702565" y="1803654"/>
-            <a:ext cx="133320" cy="133320"/>
+            <a:off x="2533897" y="1307592"/>
+            <a:ext cx="94694" cy="94694"/>
           </a:xfrm>
           <a:prstGeom prst="ellipse">
             <a:avLst/>
@@ -13859,8 +13859,8 @@
         </p:nvSpPr>
         <p:spPr>
           <a:xfrm>
-            <a:off x="1957485" y="1803654"/>
-            <a:ext cx="133320" cy="133320"/>
+            <a:off x="2714962" y="1307592"/>
+            <a:ext cx="94694" cy="94694"/>
           </a:xfrm>
           <a:prstGeom prst="ellipse">
             <a:avLst/>
@@ -13879,8 +13879,8 @@
         </p:nvSpPr>
         <p:spPr>
           <a:xfrm>
-            <a:off x="940735" y="2310268"/>
-            <a:ext cx="1593251" cy="97768"/>
+            <a:off x="1992784" y="1667430"/>
+            <a:ext cx="1131655" cy="69442"/>
           </a:xfrm>
           <a:prstGeom prst="roundRect">
             <a:avLst>
@@ -13901,8 +13901,8 @@
         </p:nvSpPr>
         <p:spPr>
           <a:xfrm>
-            <a:off x="1192725" y="2292492"/>
-            <a:ext cx="133320" cy="133320"/>
+            <a:off x="2171767" y="1654804"/>
+            <a:ext cx="94694" cy="94694"/>
           </a:xfrm>
           <a:prstGeom prst="ellipse">
             <a:avLst/>
@@ -13921,8 +13921,8 @@
         </p:nvSpPr>
         <p:spPr>
           <a:xfrm>
-            <a:off x="1447645" y="2292492"/>
-            <a:ext cx="133320" cy="133320"/>
+            <a:off x="2352832" y="1654804"/>
+            <a:ext cx="94694" cy="94694"/>
           </a:xfrm>
           <a:prstGeom prst="ellipse">
             <a:avLst/>
@@ -13941,8 +13941,8 @@
         </p:nvSpPr>
         <p:spPr>
           <a:xfrm>
-            <a:off x="1702565" y="2292492"/>
-            <a:ext cx="133320" cy="133320"/>
+            <a:off x="2533897" y="1654804"/>
+            <a:ext cx="94694" cy="94694"/>
           </a:xfrm>
           <a:prstGeom prst="ellipse">
             <a:avLst/>
@@ -13961,8 +13961,8 @@
         </p:nvSpPr>
         <p:spPr>
           <a:xfrm>
-            <a:off x="1957485" y="2292492"/>
-            <a:ext cx="133320" cy="133320"/>
+            <a:off x="2714962" y="1654804"/>
+            <a:ext cx="94694" cy="94694"/>
           </a:xfrm>
           <a:prstGeom prst="ellipse">
             <a:avLst/>
@@ -13981,8 +13981,8 @@
         </p:nvSpPr>
         <p:spPr>
           <a:xfrm>
-            <a:off x="2119740" y="2359152"/>
-            <a:ext cx="286785" cy="0"/>
+            <a:off x="2830208" y="1702151"/>
+            <a:ext cx="203698" cy="0"/>
           </a:xfrm>
           <a:prstGeom prst="line">
             <a:avLst/>
@@ -14005,8 +14005,8 @@
         </p:nvSpPr>
         <p:spPr>
           <a:xfrm>
-            <a:off x="940735" y="2799106"/>
-            <a:ext cx="1593251" cy="97768"/>
+            <a:off x="1992784" y="2014642"/>
+            <a:ext cx="1131655" cy="69442"/>
           </a:xfrm>
           <a:prstGeom prst="roundRect">
             <a:avLst>
@@ -14027,8 +14027,8 @@
         </p:nvSpPr>
         <p:spPr>
           <a:xfrm>
-            <a:off x="1192725" y="2781330"/>
-            <a:ext cx="133320" cy="133320"/>
+            <a:off x="2171767" y="2002016"/>
+            <a:ext cx="94694" cy="94694"/>
           </a:xfrm>
           <a:prstGeom prst="ellipse">
             <a:avLst/>
@@ -14047,8 +14047,8 @@
         </p:nvSpPr>
         <p:spPr>
           <a:xfrm>
-            <a:off x="1447645" y="2781330"/>
-            <a:ext cx="133320" cy="133320"/>
+            <a:off x="2352832" y="2002016"/>
+            <a:ext cx="94694" cy="94694"/>
           </a:xfrm>
           <a:prstGeom prst="ellipse">
             <a:avLst/>
@@ -14067,8 +14067,8 @@
         </p:nvSpPr>
         <p:spPr>
           <a:xfrm>
-            <a:off x="1702565" y="2781330"/>
-            <a:ext cx="133320" cy="133320"/>
+            <a:off x="2533897" y="2002016"/>
+            <a:ext cx="94694" cy="94694"/>
           </a:xfrm>
           <a:prstGeom prst="ellipse">
             <a:avLst/>
@@ -14087,8 +14087,8 @@
         </p:nvSpPr>
         <p:spPr>
           <a:xfrm>
-            <a:off x="1957485" y="2781330"/>
-            <a:ext cx="133320" cy="133320"/>
+            <a:off x="2714962" y="2002016"/>
+            <a:ext cx="94694" cy="94694"/>
           </a:xfrm>
           <a:prstGeom prst="ellipse">
             <a:avLst/>
@@ -14107,8 +14107,8 @@
         </p:nvSpPr>
         <p:spPr>
           <a:xfrm>
-            <a:off x="3429000" y="1319005"/>
-            <a:ext cx="5212080" cy="1005611"/>
+            <a:off x="3760150" y="963355"/>
+            <a:ext cx="3702038" cy="714266"/>
           </a:xfrm>
           <a:prstGeom prst="rect">
             <a:avLst/>
@@ -14127,7 +14127,7 @@
               <a:buNone/>
             </a:pPr>
             <a:r>
-              <a:rPr lang="en-US" sz="2300" b="1" dirty="0">
+              <a:rPr lang="en-US" sz="1630" b="1" dirty="0">
                 <a:solidFill>
                   <a:srgbClr val="0B1F3A"/>
                 </a:solidFill>
@@ -14137,7 +14137,7 @@
               </a:rPr>
               <a:t>Dùng mô phỏng không phải để chạy nhiều km, mà để quét tham số</a:t>
             </a:r>
-            <a:endParaRPr lang="en-US" sz="2300" dirty="0"/>
+            <a:endParaRPr lang="en-US" sz="1630" dirty="0"/>
           </a:p>
           <a:p>
             <a:pPr indent="0" marL="0">
@@ -14147,7 +14147,7 @@
               <a:buNone/>
             </a:pPr>
             <a:r>
-              <a:rPr lang="en-US" sz="1400" dirty="0">
+              <a:rPr lang="en-US" sz="990" dirty="0">
                 <a:solidFill>
                   <a:srgbClr val="007F72"/>
                 </a:solidFill>
@@ -14157,7 +14157,7 @@
               </a:rPr>
               <a:t>模擬的用法不是跑里程，是掃參數</a:t>
             </a:r>
-            <a:endParaRPr lang="en-US" sz="2300" dirty="0"/>
+            <a:endParaRPr lang="en-US" sz="1630" dirty="0"/>
           </a:p>
         </p:txBody>
       </p:sp>
@@ -14169,8 +14169,8 @@
         </p:nvSpPr>
         <p:spPr>
           <a:xfrm>
-            <a:off x="3429000" y="2416057"/>
-            <a:ext cx="5212080" cy="1074682"/>
+            <a:off x="3760150" y="1742570"/>
+            <a:ext cx="3702038" cy="763326"/>
           </a:xfrm>
           <a:prstGeom prst="rect">
             <a:avLst/>
@@ -14189,7 +14189,7 @@
               <a:buNone/>
             </a:pPr>
             <a:r>
-              <a:rPr lang="en-US" sz="1250" dirty="0">
+              <a:rPr lang="en-US" sz="890" dirty="0">
                 <a:solidFill>
                   <a:srgbClr val="5F7183"/>
                 </a:solidFill>
@@ -14199,7 +14199,7 @@
               </a:rPr>
               <a:t>Giữ nguyên một kịch bản, đổi một tham số một chút, chạy lại. Rồi lại đổi, lại chạy. Ba nghìn lần chạy xong, bạn biết chính xác ranh giới nằm ở đâu: đến giá trị nào thì bắt đầu đâm.</a:t>
             </a:r>
-            <a:endParaRPr lang="en-US" sz="1250" dirty="0"/>
+            <a:endParaRPr lang="en-US" sz="890" dirty="0"/>
           </a:p>
           <a:p>
             <a:pPr indent="0" marL="0">
@@ -14209,7 +14209,7 @@
               <a:buNone/>
             </a:pPr>
             <a:r>
-              <a:rPr lang="en-US" sz="1150" dirty="0">
+              <a:rPr lang="en-US" sz="820" dirty="0">
                 <a:solidFill>
                   <a:srgbClr val="5F7183"/>
                 </a:solidFill>
@@ -14219,7 +14219,7 @@
               </a:rPr>
               <a:t>固定一個場景，把一個參數改一點點，重跑。再改，再跑。跑完三千次，你就知道界線在哪裡：那個值到多少就開始撞。</a:t>
             </a:r>
-            <a:endParaRPr lang="en-US" sz="1250" dirty="0"/>
+            <a:endParaRPr lang="en-US" sz="890" dirty="0"/>
           </a:p>
         </p:txBody>
       </p:sp>
@@ -14231,8 +14231,8 @@
         </p:nvSpPr>
         <p:spPr>
           <a:xfrm>
-            <a:off x="502920" y="3913632"/>
-            <a:ext cx="8138160" cy="621792"/>
+            <a:off x="1681812" y="2806268"/>
+            <a:ext cx="5780375" cy="441647"/>
           </a:xfrm>
           <a:prstGeom prst="roundRect">
             <a:avLst>
@@ -14258,8 +14258,8 @@
         </p:nvSpPr>
         <p:spPr>
           <a:xfrm>
-            <a:off x="685800" y="3986784"/>
-            <a:ext cx="7772400" cy="493776"/>
+            <a:off x="1811708" y="2858226"/>
+            <a:ext cx="5520583" cy="350719"/>
           </a:xfrm>
           <a:prstGeom prst="rect">
             <a:avLst/>
@@ -14278,7 +14278,7 @@
               <a:buNone/>
             </a:pPr>
             <a:r>
-              <a:rPr lang="en-US" sz="1250" b="1" dirty="0">
+              <a:rPr lang="en-US" sz="890" b="1" dirty="0">
                 <a:solidFill>
                   <a:srgbClr val="7A4E00"/>
                 </a:solidFill>
@@ -14288,7 +14288,7 @@
               </a:rPr>
               <a:t>Đường thật không làm được: không thể bắt cùng một xe máy tạt vào ba nghìn lần.</a:t>
             </a:r>
-            <a:endParaRPr lang="en-US" sz="1250" dirty="0"/>
+            <a:endParaRPr lang="en-US" sz="890" dirty="0"/>
           </a:p>
           <a:p>
             <a:pPr indent="0" marL="0">
@@ -14298,7 +14298,7 @@
               <a:buNone/>
             </a:pPr>
             <a:r>
-              <a:rPr lang="en-US" sz="1150" dirty="0">
+              <a:rPr lang="en-US" sz="820" dirty="0">
                 <a:solidFill>
                   <a:srgbClr val="7A4E00"/>
                 </a:solidFill>
@@ -14308,7 +14308,7 @@
               </a:rPr>
               <a:t>真實道路做不到：你沒辦法叫同一台機車切進來三千次。</a:t>
             </a:r>
-            <a:endParaRPr lang="en-US" sz="1250" dirty="0"/>
+            <a:endParaRPr lang="en-US" sz="890" dirty="0"/>
           </a:p>
         </p:txBody>
       </p:sp>
@@ -14328,8 +14328,8 @@
         </p:blipFill>
         <p:spPr>
           <a:xfrm>
-            <a:off x="7516368" y="4718304"/>
-            <a:ext cx="1097280" cy="242439"/>
+            <a:off x="6663327" y="3338842"/>
+            <a:ext cx="779376" cy="172200"/>
           </a:xfrm>
           <a:prstGeom prst="rect">
             <a:avLst/>
@@ -14344,8 +14344,8 @@
         </p:nvSpPr>
         <p:spPr>
           <a:xfrm>
-            <a:off x="109728" y="4791456"/>
-            <a:ext cx="822960" cy="256032"/>
+            <a:off x="1402536" y="3390800"/>
+            <a:ext cx="584532" cy="181855"/>
           </a:xfrm>
           <a:prstGeom prst="rect">
             <a:avLst/>
@@ -14361,7 +14361,7 @@
               <a:buNone/>
             </a:pPr>
             <a:r>
-              <a:rPr lang="en-US" sz="900" dirty="0">
+              <a:rPr lang="en-US" sz="640" dirty="0">
                 <a:solidFill>
                   <a:srgbClr val="5F7183"/>
                 </a:solidFill>
@@ -14371,7 +14371,7 @@
               </a:rPr>
               <a:t>7 / 16</a:t>
             </a:r>
-            <a:endParaRPr lang="en-US" sz="900" dirty="0"/>
+            <a:endParaRPr lang="en-US" sz="640" dirty="0"/>
           </a:p>
         </p:txBody>
       </p:sp>
@@ -14383,8 +14383,8 @@
         </p:nvSpPr>
         <p:spPr>
           <a:xfrm>
-            <a:off x="960120" y="4791456"/>
-            <a:ext cx="2011680" cy="256032"/>
+            <a:off x="2006553" y="3390800"/>
+            <a:ext cx="1428857" cy="181855"/>
           </a:xfrm>
           <a:prstGeom prst="rect">
             <a:avLst/>
@@ -14400,7 +14400,7 @@
               <a:buNone/>
             </a:pPr>
             <a:r>
-              <a:rPr lang="en-US" sz="900" dirty="0">
+              <a:rPr lang="en-US" sz="640" dirty="0">
                 <a:solidFill>
                   <a:srgbClr val="5F7183"/>
                 </a:solidFill>
@@ -14410,7 +14410,7 @@
               </a:rPr>
               <a:t>Tiết 2 · 第 2 節</a:t>
             </a:r>
-            <a:endParaRPr lang="en-US" sz="900" dirty="0"/>
+            <a:endParaRPr lang="en-US" sz="640" dirty="0"/>
           </a:p>
         </p:txBody>
       </p:sp>
@@ -14447,8 +14447,8 @@
         </p:nvSpPr>
         <p:spPr>
           <a:xfrm>
-            <a:off x="502920" y="292608"/>
-            <a:ext cx="8138160" cy="841248"/>
+            <a:off x="1681812" y="234326"/>
+            <a:ext cx="5780375" cy="597522"/>
           </a:xfrm>
           <a:prstGeom prst="rect">
             <a:avLst/>
@@ -14467,7 +14467,7 @@
               <a:buNone/>
             </a:pPr>
             <a:r>
-              <a:rPr lang="en-US" sz="2200" b="1" dirty="0">
+              <a:rPr lang="en-US" sz="1560" b="1" dirty="0">
                 <a:solidFill>
                   <a:srgbClr val="0B1F3A"/>
                 </a:solidFill>
@@ -14477,7 +14477,7 @@
               </a:rPr>
               <a:t>Ba tầng đó, trong mô phỏng của ta là ba thứ bạn đã dùng rồi</a:t>
             </a:r>
-            <a:endParaRPr lang="en-US" sz="2200" dirty="0"/>
+            <a:endParaRPr lang="en-US" sz="1560" dirty="0"/>
           </a:p>
           <a:p>
             <a:pPr indent="0" marL="0">
@@ -14487,7 +14487,7 @@
               <a:buNone/>
             </a:pPr>
             <a:r>
-              <a:rPr lang="en-US" sz="1350" dirty="0">
+              <a:rPr lang="en-US" sz="960" dirty="0">
                 <a:solidFill>
                   <a:srgbClr val="5F7183"/>
                 </a:solidFill>
@@ -14497,7 +14497,7 @@
               </a:rPr>
               <a:t>這三層，在我們的模擬器裡就是三個你已經用過的東西</a:t>
             </a:r>
-            <a:endParaRPr lang="en-US" sz="2200" dirty="0"/>
+            <a:endParaRPr lang="en-US" sz="1560" dirty="0"/>
           </a:p>
         </p:txBody>
       </p:sp>
@@ -14509,8 +14509,8 @@
         </p:nvSpPr>
         <p:spPr>
           <a:xfrm>
-            <a:off x="502920" y="1322366"/>
-            <a:ext cx="2529840" cy="2724912"/>
+            <a:off x="1681812" y="965743"/>
+            <a:ext cx="1796896" cy="1935452"/>
           </a:xfrm>
           <a:prstGeom prst="roundRect">
             <a:avLst>
@@ -14543,8 +14543,8 @@
         </p:nvSpPr>
         <p:spPr>
           <a:xfrm>
-            <a:off x="1530096" y="1505246"/>
-            <a:ext cx="475488" cy="475488"/>
+            <a:off x="2411395" y="1095639"/>
+            <a:ext cx="337730" cy="337730"/>
           </a:xfrm>
           <a:prstGeom prst="ellipse">
             <a:avLst/>
@@ -14563,8 +14563,8 @@
         </p:nvSpPr>
         <p:spPr>
           <a:xfrm>
-            <a:off x="1530096" y="1605830"/>
-            <a:ext cx="475488" cy="274320"/>
+            <a:off x="2411395" y="1167082"/>
+            <a:ext cx="337730" cy="194844"/>
           </a:xfrm>
           <a:prstGeom prst="rect">
             <a:avLst/>
@@ -14580,7 +14580,7 @@
               <a:buNone/>
             </a:pPr>
             <a:r>
-              <a:rPr lang="en-US" sz="1500" b="1" dirty="0">
+              <a:rPr lang="en-US" sz="1070" b="1" dirty="0">
                 <a:solidFill>
                   <a:srgbClr val="FFFFFF"/>
                 </a:solidFill>
@@ -14590,7 +14590,7 @@
               </a:rPr>
               <a:t>1</a:t>
             </a:r>
-            <a:endParaRPr lang="en-US" sz="1500" dirty="0"/>
+            <a:endParaRPr lang="en-US" sz="1070" dirty="0"/>
           </a:p>
         </p:txBody>
       </p:sp>
@@ -14602,8 +14602,8 @@
         </p:nvSpPr>
         <p:spPr>
           <a:xfrm>
-            <a:off x="630936" y="2072174"/>
-            <a:ext cx="2273808" cy="658368"/>
+            <a:off x="1772740" y="1498317"/>
+            <a:ext cx="1615041" cy="467626"/>
           </a:xfrm>
           <a:prstGeom prst="rect">
             <a:avLst/>
@@ -14622,7 +14622,7 @@
               <a:buNone/>
             </a:pPr>
             <a:r>
-              <a:rPr lang="en-US" sz="1400" b="1" dirty="0">
+              <a:rPr lang="en-US" sz="990" b="1" dirty="0">
                 <a:solidFill>
                   <a:srgbClr val="0B1F3A"/>
                 </a:solidFill>
@@ -14632,7 +14632,7 @@
               </a:rPr>
               <a:t>Sáu nút cài sẵn</a:t>
             </a:r>
-            <a:endParaRPr lang="en-US" sz="1400" dirty="0"/>
+            <a:endParaRPr lang="en-US" sz="990" dirty="0"/>
           </a:p>
           <a:p>
             <a:pPr algn="ctr" indent="0" marL="0">
@@ -14642,7 +14642,7 @@
               <a:buNone/>
             </a:pPr>
             <a:r>
-              <a:rPr lang="en-US" sz="1200" dirty="0">
+              <a:rPr lang="en-US" sz="850" dirty="0">
                 <a:solidFill>
                   <a:srgbClr val="007F72"/>
                 </a:solidFill>
@@ -14652,7 +14652,7 @@
               </a:rPr>
               <a:t>六個預設按鈕</a:t>
             </a:r>
-            <a:endParaRPr lang="en-US" sz="1400" dirty="0"/>
+            <a:endParaRPr lang="en-US" sz="990" dirty="0"/>
           </a:p>
         </p:txBody>
       </p:sp>
@@ -14664,8 +14664,8 @@
         </p:nvSpPr>
         <p:spPr>
           <a:xfrm>
-            <a:off x="630936" y="2767118"/>
-            <a:ext cx="2273808" cy="1170432"/>
+            <a:off x="1772740" y="1991922"/>
+            <a:ext cx="1615041" cy="831335"/>
           </a:xfrm>
           <a:prstGeom prst="rect">
             <a:avLst/>
@@ -14684,7 +14684,7 @@
               <a:buNone/>
             </a:pPr>
             <a:r>
-              <a:rPr lang="en-US" sz="1150" dirty="0">
+              <a:rPr lang="en-US" sz="820" dirty="0">
                 <a:solidFill>
                   <a:srgbClr val="5F7183"/>
                 </a:solidFill>
@@ -14694,7 +14694,7 @@
               </a:rPr>
               <a:t>«Giờ cao điểm Hà Nội»</a:t>
             </a:r>
-            <a:endParaRPr lang="en-US" sz="1150" dirty="0"/>
+            <a:endParaRPr lang="en-US" sz="820" dirty="0"/>
           </a:p>
           <a:p>
             <a:pPr algn="ctr" indent="0" marL="0">
@@ -14704,7 +14704,7 @@
               <a:buNone/>
             </a:pPr>
             <a:r>
-              <a:rPr lang="en-US" sz="1150" dirty="0">
+              <a:rPr lang="en-US" sz="820" dirty="0">
                 <a:solidFill>
                   <a:srgbClr val="5F7183"/>
                 </a:solidFill>
@@ -14714,7 +14714,7 @@
               </a:rPr>
               <a:t>→ CHỨC NĂNG</a:t>
             </a:r>
-            <a:endParaRPr lang="en-US" sz="1150" dirty="0"/>
+            <a:endParaRPr lang="en-US" sz="820" dirty="0"/>
           </a:p>
           <a:p>
             <a:pPr algn="ctr" indent="0" marL="0">
@@ -14724,7 +14724,7 @@
               <a:buNone/>
             </a:pPr>
             <a:r>
-              <a:rPr lang="en-US" sz="1050" dirty="0">
+              <a:rPr lang="en-US" sz="750" dirty="0">
                 <a:solidFill>
                   <a:srgbClr val="5F7183"/>
                 </a:solidFill>
@@ -14734,7 +14734,7 @@
               </a:rPr>
               <a:t>「河內尖峰」「雨夜」</a:t>
             </a:r>
-            <a:endParaRPr lang="en-US" sz="1150" dirty="0"/>
+            <a:endParaRPr lang="en-US" sz="820" dirty="0"/>
           </a:p>
           <a:p>
             <a:pPr algn="ctr" indent="0" marL="0">
@@ -14744,7 +14744,7 @@
               <a:buNone/>
             </a:pPr>
             <a:r>
-              <a:rPr lang="en-US" sz="1050" dirty="0">
+              <a:rPr lang="en-US" sz="750" dirty="0">
                 <a:solidFill>
                   <a:srgbClr val="5F7183"/>
                 </a:solidFill>
@@ -14754,7 +14754,7 @@
               </a:rPr>
               <a:t>→ 功能場景</a:t>
             </a:r>
-            <a:endParaRPr lang="en-US" sz="1150" dirty="0"/>
+            <a:endParaRPr lang="en-US" sz="820" dirty="0"/>
           </a:p>
         </p:txBody>
       </p:sp>
@@ -14766,8 +14766,8 @@
         </p:nvSpPr>
         <p:spPr>
           <a:xfrm>
-            <a:off x="3032760" y="2236766"/>
-            <a:ext cx="274320" cy="365760"/>
+            <a:off x="3478708" y="1615223"/>
+            <a:ext cx="194844" cy="259792"/>
           </a:xfrm>
           <a:prstGeom prst="rect">
             <a:avLst/>
@@ -14783,7 +14783,7 @@
               <a:buNone/>
             </a:pPr>
             <a:r>
-              <a:rPr lang="en-US" sz="1900" b="1" dirty="0">
+              <a:rPr lang="en-US" sz="1350" b="1" dirty="0">
                 <a:solidFill>
                   <a:srgbClr val="00A896"/>
                 </a:solidFill>
@@ -14793,7 +14793,7 @@
               </a:rPr>
               <a:t>→</a:t>
             </a:r>
-            <a:endParaRPr lang="en-US" sz="1900" dirty="0"/>
+            <a:endParaRPr lang="en-US" sz="1350" dirty="0"/>
           </a:p>
         </p:txBody>
       </p:sp>
@@ -14805,8 +14805,8 @@
         </p:nvSpPr>
         <p:spPr>
           <a:xfrm>
-            <a:off x="3307080" y="1322366"/>
-            <a:ext cx="2529840" cy="2724912"/>
+            <a:off x="3673552" y="965743"/>
+            <a:ext cx="1796896" cy="1935452"/>
           </a:xfrm>
           <a:prstGeom prst="roundRect">
             <a:avLst>
@@ -14839,8 +14839,8 @@
         </p:nvSpPr>
         <p:spPr>
           <a:xfrm>
-            <a:off x="4334256" y="1505246"/>
-            <a:ext cx="475488" cy="475488"/>
+            <a:off x="4403135" y="1095639"/>
+            <a:ext cx="337730" cy="337730"/>
           </a:xfrm>
           <a:prstGeom prst="ellipse">
             <a:avLst/>
@@ -14859,8 +14859,8 @@
         </p:nvSpPr>
         <p:spPr>
           <a:xfrm>
-            <a:off x="4334256" y="1605830"/>
-            <a:ext cx="475488" cy="274320"/>
+            <a:off x="4403135" y="1167082"/>
+            <a:ext cx="337730" cy="194844"/>
           </a:xfrm>
           <a:prstGeom prst="rect">
             <a:avLst/>
@@ -14876,7 +14876,7 @@
               <a:buNone/>
             </a:pPr>
             <a:r>
-              <a:rPr lang="en-US" sz="1500" b="1" dirty="0">
+              <a:rPr lang="en-US" sz="1070" b="1" dirty="0">
                 <a:solidFill>
                   <a:srgbClr val="FFFFFF"/>
                 </a:solidFill>
@@ -14886,7 +14886,7 @@
               </a:rPr>
               <a:t>2</a:t>
             </a:r>
-            <a:endParaRPr lang="en-US" sz="1500" dirty="0"/>
+            <a:endParaRPr lang="en-US" sz="1070" dirty="0"/>
           </a:p>
         </p:txBody>
       </p:sp>
@@ -14898,8 +14898,8 @@
         </p:nvSpPr>
         <p:spPr>
           <a:xfrm>
-            <a:off x="3435096" y="2072174"/>
-            <a:ext cx="2273808" cy="658368"/>
+            <a:off x="3764479" y="1498317"/>
+            <a:ext cx="1615041" cy="467626"/>
           </a:xfrm>
           <a:prstGeom prst="rect">
             <a:avLst/>
@@ -14918,7 +14918,7 @@
               <a:buNone/>
             </a:pPr>
             <a:r>
-              <a:rPr lang="en-US" sz="1400" b="1" dirty="0">
+              <a:rPr lang="en-US" sz="990" b="1" dirty="0">
                 <a:solidFill>
                   <a:srgbClr val="0B1F3A"/>
                 </a:solidFill>
@@ -14928,7 +14928,7 @@
               </a:rPr>
               <a:t>Khoảng kéo được</a:t>
             </a:r>
-            <a:endParaRPr lang="en-US" sz="1400" dirty="0"/>
+            <a:endParaRPr lang="en-US" sz="990" dirty="0"/>
           </a:p>
           <a:p>
             <a:pPr algn="ctr" indent="0" marL="0">
@@ -14938,7 +14938,7 @@
               <a:buNone/>
             </a:pPr>
             <a:r>
-              <a:rPr lang="en-US" sz="1200" dirty="0">
+              <a:rPr lang="en-US" sz="850" dirty="0">
                 <a:solidFill>
                   <a:srgbClr val="007F72"/>
                 </a:solidFill>
@@ -14948,7 +14948,7 @@
               </a:rPr>
               <a:t>滑桿的範圍</a:t>
             </a:r>
-            <a:endParaRPr lang="en-US" sz="1400" dirty="0"/>
+            <a:endParaRPr lang="en-US" sz="990" dirty="0"/>
           </a:p>
         </p:txBody>
       </p:sp>
@@ -14960,8 +14960,8 @@
         </p:nvSpPr>
         <p:spPr>
           <a:xfrm>
-            <a:off x="3435096" y="2767118"/>
-            <a:ext cx="2273808" cy="1170432"/>
+            <a:off x="3764479" y="1991922"/>
+            <a:ext cx="1615041" cy="831335"/>
           </a:xfrm>
           <a:prstGeom prst="rect">
             <a:avLst/>
@@ -14980,7 +14980,7 @@
               <a:buNone/>
             </a:pPr>
             <a:r>
-              <a:rPr lang="en-US" sz="1150" dirty="0">
+              <a:rPr lang="en-US" sz="820" dirty="0">
                 <a:solidFill>
                   <a:srgbClr val="5F7183"/>
                 </a:solidFill>
@@ -14990,7 +14990,7 @@
               </a:rPr>
               <a:t>3–60 tia · 10–120 m · 20–180°</a:t>
             </a:r>
-            <a:endParaRPr lang="en-US" sz="1150" dirty="0"/>
+            <a:endParaRPr lang="en-US" sz="820" dirty="0"/>
           </a:p>
           <a:p>
             <a:pPr algn="ctr" indent="0" marL="0">
@@ -15000,7 +15000,7 @@
               <a:buNone/>
             </a:pPr>
             <a:r>
-              <a:rPr lang="en-US" sz="1150" dirty="0">
+              <a:rPr lang="en-US" sz="820" dirty="0">
                 <a:solidFill>
                   <a:srgbClr val="5F7183"/>
                 </a:solidFill>
@@ -15010,7 +15010,7 @@
               </a:rPr>
               <a:t>→ LOGIC</a:t>
             </a:r>
-            <a:endParaRPr lang="en-US" sz="1150" dirty="0"/>
+            <a:endParaRPr lang="en-US" sz="820" dirty="0"/>
           </a:p>
           <a:p>
             <a:pPr algn="ctr" indent="0" marL="0">
@@ -15020,7 +15020,7 @@
               <a:buNone/>
             </a:pPr>
             <a:r>
-              <a:rPr lang="en-US" sz="1050" dirty="0">
+              <a:rPr lang="en-US" sz="750" dirty="0">
                 <a:solidFill>
                   <a:srgbClr val="5F7183"/>
                 </a:solidFill>
@@ -15030,7 +15030,7 @@
               </a:rPr>
               <a:t>→ 邏輯場景</a:t>
             </a:r>
-            <a:endParaRPr lang="en-US" sz="1150" dirty="0"/>
+            <a:endParaRPr lang="en-US" sz="820" dirty="0"/>
           </a:p>
         </p:txBody>
       </p:sp>
@@ -15042,8 +15042,8 @@
         </p:nvSpPr>
         <p:spPr>
           <a:xfrm>
-            <a:off x="5836920" y="2236766"/>
-            <a:ext cx="274320" cy="365760"/>
+            <a:off x="5470448" y="1615223"/>
+            <a:ext cx="194844" cy="259792"/>
           </a:xfrm>
           <a:prstGeom prst="rect">
             <a:avLst/>
@@ -15059,7 +15059,7 @@
               <a:buNone/>
             </a:pPr>
             <a:r>
-              <a:rPr lang="en-US" sz="1900" b="1" dirty="0">
+              <a:rPr lang="en-US" sz="1350" b="1" dirty="0">
                 <a:solidFill>
                   <a:srgbClr val="00A896"/>
                 </a:solidFill>
@@ -15069,7 +15069,7 @@
               </a:rPr>
               <a:t>→</a:t>
             </a:r>
-            <a:endParaRPr lang="en-US" sz="1900" dirty="0"/>
+            <a:endParaRPr lang="en-US" sz="1350" dirty="0"/>
           </a:p>
         </p:txBody>
       </p:sp>
@@ -15081,8 +15081,8 @@
         </p:nvSpPr>
         <p:spPr>
           <a:xfrm>
-            <a:off x="6111240" y="1322366"/>
-            <a:ext cx="2529840" cy="2724912"/>
+            <a:off x="5665292" y="965743"/>
+            <a:ext cx="1796896" cy="1935452"/>
           </a:xfrm>
           <a:prstGeom prst="roundRect">
             <a:avLst>
@@ -15115,8 +15115,8 @@
         </p:nvSpPr>
         <p:spPr>
           <a:xfrm>
-            <a:off x="7138416" y="1505246"/>
-            <a:ext cx="475488" cy="475488"/>
+            <a:off x="6394875" y="1095639"/>
+            <a:ext cx="337730" cy="337730"/>
           </a:xfrm>
           <a:prstGeom prst="ellipse">
             <a:avLst/>
@@ -15135,8 +15135,8 @@
         </p:nvSpPr>
         <p:spPr>
           <a:xfrm>
-            <a:off x="7138416" y="1605830"/>
-            <a:ext cx="475488" cy="274320"/>
+            <a:off x="6394875" y="1167082"/>
+            <a:ext cx="337730" cy="194844"/>
           </a:xfrm>
           <a:prstGeom prst="rect">
             <a:avLst/>
@@ -15152,7 +15152,7 @@
               <a:buNone/>
             </a:pPr>
             <a:r>
-              <a:rPr lang="en-US" sz="1500" b="1" dirty="0">
+              <a:rPr lang="en-US" sz="1070" b="1" dirty="0">
                 <a:solidFill>
                   <a:srgbClr val="FFFFFF"/>
                 </a:solidFill>
@@ -15162,7 +15162,7 @@
               </a:rPr>
               <a:t>3</a:t>
             </a:r>
-            <a:endParaRPr lang="en-US" sz="1500" dirty="0"/>
+            <a:endParaRPr lang="en-US" sz="1070" dirty="0"/>
           </a:p>
         </p:txBody>
       </p:sp>
@@ -15174,8 +15174,8 @@
         </p:nvSpPr>
         <p:spPr>
           <a:xfrm>
-            <a:off x="6239256" y="2072174"/>
-            <a:ext cx="2273808" cy="658368"/>
+            <a:off x="5756219" y="1498317"/>
+            <a:ext cx="1615041" cy="467626"/>
           </a:xfrm>
           <a:prstGeom prst="rect">
             <a:avLst/>
@@ -15194,7 +15194,7 @@
               <a:buNone/>
             </a:pPr>
             <a:r>
-              <a:rPr lang="en-US" sz="1400" b="1" dirty="0">
+              <a:rPr lang="en-US" sz="990" b="1" dirty="0">
                 <a:solidFill>
                   <a:srgbClr val="0B1F3A"/>
                 </a:solidFill>
@@ -15204,7 +15204,7 @@
               </a:rPr>
               <a:t>Dừng ở một vị trí</a:t>
             </a:r>
-            <a:endParaRPr lang="en-US" sz="1400" dirty="0"/>
+            <a:endParaRPr lang="en-US" sz="990" dirty="0"/>
           </a:p>
           <a:p>
             <a:pPr algn="ctr" indent="0" marL="0">
@@ -15214,7 +15214,7 @@
               <a:buNone/>
             </a:pPr>
             <a:r>
-              <a:rPr lang="en-US" sz="1200" dirty="0">
+              <a:rPr lang="en-US" sz="850" dirty="0">
                 <a:solidFill>
                   <a:srgbClr val="007F72"/>
                 </a:solidFill>
@@ -15224,7 +15224,7 @@
               </a:rPr>
               <a:t>停在一個位置</a:t>
             </a:r>
-            <a:endParaRPr lang="en-US" sz="1400" dirty="0"/>
+            <a:endParaRPr lang="en-US" sz="990" dirty="0"/>
           </a:p>
         </p:txBody>
       </p:sp>
@@ -15236,8 +15236,8 @@
         </p:nvSpPr>
         <p:spPr>
           <a:xfrm>
-            <a:off x="6239256" y="2767118"/>
-            <a:ext cx="2273808" cy="1170432"/>
+            <a:off x="5756219" y="1991922"/>
+            <a:ext cx="1615041" cy="831335"/>
           </a:xfrm>
           <a:prstGeom prst="rect">
             <a:avLst/>
@@ -15256,7 +15256,7 @@
               <a:buNone/>
             </a:pPr>
             <a:r>
-              <a:rPr lang="en-US" sz="1150" dirty="0">
+              <a:rPr lang="en-US" sz="820" dirty="0">
                 <a:solidFill>
                   <a:srgbClr val="5F7183"/>
                 </a:solidFill>
@@ -15266,7 +15266,7 @@
               </a:rPr>
               <a:t>12 tia · 40 m · 90°</a:t>
             </a:r>
-            <a:endParaRPr lang="en-US" sz="1150" dirty="0"/>
+            <a:endParaRPr lang="en-US" sz="820" dirty="0"/>
           </a:p>
           <a:p>
             <a:pPr algn="ctr" indent="0" marL="0">
@@ -15276,7 +15276,7 @@
               <a:buNone/>
             </a:pPr>
             <a:r>
-              <a:rPr lang="en-US" sz="1150" dirty="0">
+              <a:rPr lang="en-US" sz="820" dirty="0">
                 <a:solidFill>
                   <a:srgbClr val="5F7183"/>
                 </a:solidFill>
@@ -15286,7 +15286,7 @@
               </a:rPr>
               <a:t>→ CỤ THỂ</a:t>
             </a:r>
-            <a:endParaRPr lang="en-US" sz="1150" dirty="0"/>
+            <a:endParaRPr lang="en-US" sz="820" dirty="0"/>
           </a:p>
           <a:p>
             <a:pPr algn="ctr" indent="0" marL="0">
@@ -15296,7 +15296,7 @@
               <a:buNone/>
             </a:pPr>
             <a:r>
-              <a:rPr lang="en-US" sz="1050" dirty="0">
+              <a:rPr lang="en-US" sz="750" dirty="0">
                 <a:solidFill>
                   <a:srgbClr val="5F7183"/>
                 </a:solidFill>
@@ -15306,7 +15306,7 @@
               </a:rPr>
               <a:t>→ 具體場景</a:t>
             </a:r>
-            <a:endParaRPr lang="en-US" sz="1150" dirty="0"/>
+            <a:endParaRPr lang="en-US" sz="820" dirty="0"/>
           </a:p>
         </p:txBody>
       </p:sp>
@@ -15318,8 +15318,8 @@
         </p:nvSpPr>
         <p:spPr>
           <a:xfrm>
-            <a:off x="502920" y="4193582"/>
-            <a:ext cx="8138160" cy="566928"/>
+            <a:off x="1681812" y="3005111"/>
+            <a:ext cx="5780375" cy="402678"/>
           </a:xfrm>
           <a:prstGeom prst="rect">
             <a:avLst/>
@@ -15338,7 +15338,7 @@
               <a:buNone/>
             </a:pPr>
             <a:r>
-              <a:rPr lang="en-US" sz="1250" b="1" dirty="0">
+              <a:rPr lang="en-US" sz="890" b="1" dirty="0">
                 <a:solidFill>
                   <a:srgbClr val="0B1F3A"/>
                 </a:solidFill>
@@ -15348,7 +15348,7 @@
               </a:rPr>
               <a:t>Bài tập 2 của tiết 3 chính là «quét tham số»: giữ nguyên giờ cao điểm Hà Nội, chỉ đổi ba con số.</a:t>
             </a:r>
-            <a:endParaRPr lang="en-US" sz="1250" dirty="0"/>
+            <a:endParaRPr lang="en-US" sz="890" dirty="0"/>
           </a:p>
           <a:p>
             <a:pPr indent="0" marL="0">
@@ -15358,7 +15358,7 @@
               <a:buNone/>
             </a:pPr>
             <a:r>
-              <a:rPr lang="en-US" sz="1150" dirty="0">
+              <a:rPr lang="en-US" sz="820" dirty="0">
                 <a:solidFill>
                   <a:srgbClr val="007F72"/>
                 </a:solidFill>
@@ -15368,7 +15368,7 @@
               </a:rPr>
               <a:t>第三節的任務二就是在「掃參數」：河內尖峰不動，只改那三個數字。</a:t>
             </a:r>
-            <a:endParaRPr lang="en-US" sz="1250" dirty="0"/>
+            <a:endParaRPr lang="en-US" sz="890" dirty="0"/>
           </a:p>
         </p:txBody>
       </p:sp>
@@ -15388,8 +15388,8 @@
         </p:blipFill>
         <p:spPr>
           <a:xfrm>
-            <a:off x="7516368" y="4718304"/>
-            <a:ext cx="1097280" cy="242439"/>
+            <a:off x="6663327" y="3338842"/>
+            <a:ext cx="779376" cy="172200"/>
           </a:xfrm>
           <a:prstGeom prst="rect">
             <a:avLst/>
@@ -15404,8 +15404,8 @@
         </p:nvSpPr>
         <p:spPr>
           <a:xfrm>
-            <a:off x="109728" y="4791456"/>
-            <a:ext cx="822960" cy="256032"/>
+            <a:off x="1402536" y="3390800"/>
+            <a:ext cx="584532" cy="181855"/>
           </a:xfrm>
           <a:prstGeom prst="rect">
             <a:avLst/>
@@ -15421,7 +15421,7 @@
               <a:buNone/>
             </a:pPr>
             <a:r>
-              <a:rPr lang="en-US" sz="900" dirty="0">
+              <a:rPr lang="en-US" sz="640" dirty="0">
                 <a:solidFill>
                   <a:srgbClr val="5F7183"/>
                 </a:solidFill>
@@ -15431,7 +15431,7 @@
               </a:rPr>
               <a:t>8 / 16</a:t>
             </a:r>
-            <a:endParaRPr lang="en-US" sz="900" dirty="0"/>
+            <a:endParaRPr lang="en-US" sz="640" dirty="0"/>
           </a:p>
         </p:txBody>
       </p:sp>
@@ -15443,8 +15443,8 @@
         </p:nvSpPr>
         <p:spPr>
           <a:xfrm>
-            <a:off x="960120" y="4791456"/>
-            <a:ext cx="2011680" cy="256032"/>
+            <a:off x="2006553" y="3390800"/>
+            <a:ext cx="1428857" cy="181855"/>
           </a:xfrm>
           <a:prstGeom prst="rect">
             <a:avLst/>
@@ -15460,7 +15460,7 @@
               <a:buNone/>
             </a:pPr>
             <a:r>
-              <a:rPr lang="en-US" sz="900" dirty="0">
+              <a:rPr lang="en-US" sz="640" dirty="0">
                 <a:solidFill>
                   <a:srgbClr val="5F7183"/>
                 </a:solidFill>
@@ -15470,7 +15470,7 @@
               </a:rPr>
               <a:t>Tiết 2 · 第 2 節</a:t>
             </a:r>
-            <a:endParaRPr lang="en-US" sz="900" dirty="0"/>
+            <a:endParaRPr lang="en-US" sz="640" dirty="0"/>
           </a:p>
         </p:txBody>
       </p:sp>
@@ -15507,8 +15507,8 @@
         </p:nvSpPr>
         <p:spPr>
           <a:xfrm>
-            <a:off x="502920" y="365760"/>
-            <a:ext cx="8138160" cy="274320"/>
+            <a:off x="1681812" y="286284"/>
+            <a:ext cx="5780375" cy="194844"/>
           </a:xfrm>
           <a:prstGeom prst="rect">
             <a:avLst/>
@@ -15524,7 +15524,7 @@
               <a:buNone/>
             </a:pPr>
             <a:r>
-              <a:rPr lang="en-US" sz="1300" b="1" dirty="0">
+              <a:rPr lang="en-US" sz="920" b="1" dirty="0">
                 <a:solidFill>
                   <a:srgbClr val="007F72"/>
                 </a:solidFill>
@@ -15534,7 +15534,7 @@
               </a:rPr>
               <a:t>▶ Video · 一個場景在真實世界長什麼樣</a:t>
             </a:r>
-            <a:endParaRPr lang="en-US" sz="1300" dirty="0"/>
+            <a:endParaRPr lang="en-US" sz="920" dirty="0"/>
           </a:p>
         </p:txBody>
       </p:sp>
@@ -15546,8 +15546,8 @@
         </p:nvSpPr>
         <p:spPr>
           <a:xfrm>
-            <a:off x="502920" y="676656"/>
-            <a:ext cx="8138160" cy="560684"/>
+            <a:off x="1681812" y="507107"/>
+            <a:ext cx="5780375" cy="398243"/>
           </a:xfrm>
           <a:prstGeom prst="rect">
             <a:avLst/>
@@ -15566,7 +15566,7 @@
               <a:buNone/>
             </a:pPr>
             <a:r>
-              <a:rPr lang="en-US" sz="1700" b="1" dirty="0">
+              <a:rPr lang="en-US" sz="1210" b="1" dirty="0">
                 <a:solidFill>
                   <a:srgbClr val="0B1F3A"/>
                 </a:solidFill>
@@ -15576,7 +15576,7 @@
               </a:rPr>
               <a:t>Euro NCAP: cùng một kịch bản, lặp lại y hệt, cho mọi mẫu xe</a:t>
             </a:r>
-            <a:endParaRPr lang="en-US" sz="1700" dirty="0"/>
+            <a:endParaRPr lang="en-US" sz="1210" dirty="0"/>
           </a:p>
           <a:p>
             <a:pPr indent="0" marL="0">
@@ -15586,7 +15586,7 @@
               <a:buNone/>
             </a:pPr>
             <a:r>
-              <a:rPr lang="en-US" sz="1250" dirty="0">
+              <a:rPr lang="en-US" sz="890" dirty="0">
                 <a:solidFill>
                   <a:srgbClr val="5F7183"/>
                 </a:solidFill>
@@ -15596,7 +15596,7 @@
               </a:rPr>
               <a:t>Euro NCAP：同一個場景，一模一樣地重複，對每一款車都做</a:t>
             </a:r>
-            <a:endParaRPr lang="en-US" sz="1700" dirty="0"/>
+            <a:endParaRPr lang="en-US" sz="1210" dirty="0"/>
           </a:p>
         </p:txBody>
       </p:sp>
@@ -15608,8 +15608,8 @@
         </p:nvSpPr>
         <p:spPr>
           <a:xfrm>
-            <a:off x="502920" y="1255628"/>
-            <a:ext cx="3904488" cy="2566564"/>
+            <a:off x="1681812" y="918340"/>
+            <a:ext cx="2773281" cy="1822980"/>
           </a:xfrm>
           <a:prstGeom prst="roundRect">
             <a:avLst>
@@ -15635,8 +15635,8 @@
         </p:nvSpPr>
         <p:spPr>
           <a:xfrm>
-            <a:off x="999622" y="2718043"/>
-            <a:ext cx="2911084" cy="0"/>
+            <a:off x="2034610" y="1957065"/>
+            <a:ext cx="2067686" cy="0"/>
           </a:xfrm>
           <a:prstGeom prst="line">
             <a:avLst/>
@@ -15658,8 +15658,8 @@
         </p:nvSpPr>
         <p:spPr>
           <a:xfrm>
-            <a:off x="1103589" y="2256519"/>
-            <a:ext cx="1039673" cy="478249"/>
+            <a:off x="2108456" y="1629253"/>
+            <a:ext cx="738459" cy="339691"/>
           </a:xfrm>
           <a:prstGeom prst="roundRect">
             <a:avLst>
@@ -15680,8 +15680,8 @@
         </p:nvSpPr>
         <p:spPr>
           <a:xfrm>
-            <a:off x="1498665" y="2352168"/>
-            <a:ext cx="353489" cy="286950"/>
+            <a:off x="2389070" y="1697191"/>
+            <a:ext cx="251076" cy="203815"/>
           </a:xfrm>
           <a:prstGeom prst="roundRect">
             <a:avLst>
@@ -15702,8 +15702,8 @@
         </p:nvSpPr>
         <p:spPr>
           <a:xfrm>
-            <a:off x="2247229" y="2495643"/>
-            <a:ext cx="415869" cy="0"/>
+            <a:off x="2920761" y="1799098"/>
+            <a:ext cx="295384" cy="0"/>
           </a:xfrm>
           <a:prstGeom prst="line">
             <a:avLst/>
@@ -15726,8 +15726,8 @@
         </p:nvSpPr>
         <p:spPr>
           <a:xfrm>
-            <a:off x="2706644" y="2458577"/>
-            <a:ext cx="259466" cy="259466"/>
+            <a:off x="3247074" y="1772771"/>
+            <a:ext cx="184294" cy="184294"/>
           </a:xfrm>
           <a:prstGeom prst="ellipse">
             <a:avLst/>
@@ -15748,8 +15748,8 @@
         </p:nvSpPr>
         <p:spPr>
           <a:xfrm>
-            <a:off x="3191825" y="2458577"/>
-            <a:ext cx="259466" cy="259466"/>
+            <a:off x="3591689" y="1772771"/>
+            <a:ext cx="184294" cy="184294"/>
           </a:xfrm>
           <a:prstGeom prst="ellipse">
             <a:avLst/>
@@ -15770,8 +15770,8 @@
         </p:nvSpPr>
         <p:spPr>
           <a:xfrm flipV="1">
-            <a:off x="2836377" y="2440043"/>
-            <a:ext cx="242590" cy="148267"/>
+            <a:off x="3339221" y="1759607"/>
+            <a:ext cx="172307" cy="105311"/>
           </a:xfrm>
           <a:prstGeom prst="line">
             <a:avLst/>
@@ -15793,8 +15793,8 @@
         </p:nvSpPr>
         <p:spPr>
           <a:xfrm flipH="1" flipV="1">
-            <a:off x="3078968" y="2440043"/>
-            <a:ext cx="242590" cy="148267"/>
+            <a:off x="3511528" y="1759607"/>
+            <a:ext cx="172307" cy="105311"/>
           </a:xfrm>
           <a:prstGeom prst="line">
             <a:avLst/>
@@ -15816,8 +15816,8 @@
         </p:nvSpPr>
         <p:spPr>
           <a:xfrm>
-            <a:off x="3009656" y="2162044"/>
-            <a:ext cx="155951" cy="240933"/>
+            <a:off x="3462298" y="1562149"/>
+            <a:ext cx="110769" cy="171130"/>
           </a:xfrm>
           <a:prstGeom prst="roundRect">
             <a:avLst>
@@ -15838,8 +15838,8 @@
         </p:nvSpPr>
         <p:spPr>
           <a:xfrm>
-            <a:off x="2995568" y="2004510"/>
-            <a:ext cx="166800" cy="166800"/>
+            <a:off x="3452291" y="1450256"/>
+            <a:ext cx="118475" cy="118475"/>
           </a:xfrm>
           <a:prstGeom prst="ellipse">
             <a:avLst/>
@@ -15858,8 +15858,8 @@
         </p:nvSpPr>
         <p:spPr>
           <a:xfrm>
-            <a:off x="3078968" y="2829243"/>
-            <a:ext cx="0" cy="185333"/>
+            <a:off x="3511528" y="2036048"/>
+            <a:ext cx="0" cy="131639"/>
           </a:xfrm>
           <a:prstGeom prst="line">
             <a:avLst/>
@@ -15882,8 +15882,8 @@
         </p:nvSpPr>
         <p:spPr>
           <a:xfrm>
-            <a:off x="685800" y="3273552"/>
-            <a:ext cx="3538728" cy="475488"/>
+            <a:off x="1811708" y="2351632"/>
+            <a:ext cx="2513489" cy="337730"/>
           </a:xfrm>
           <a:prstGeom prst="rect">
             <a:avLst/>
@@ -15902,7 +15902,7 @@
               <a:buNone/>
             </a:pPr>
             <a:r>
-              <a:rPr lang="en-US" sz="950" dirty="0">
+              <a:rPr lang="en-US" sz="670" dirty="0">
                 <a:solidFill>
                   <a:srgbClr val="5F7183"/>
                 </a:solidFill>
@@ -15912,7 +15912,7 @@
               </a:rPr>
               <a:t>Búp bê xe đạp cắt ngang — cùng tốc độ, cùng vị trí, lần nào cũng thế.</a:t>
             </a:r>
-            <a:endParaRPr lang="en-US" sz="950" dirty="0"/>
+            <a:endParaRPr lang="en-US" sz="670" dirty="0"/>
           </a:p>
           <a:p>
             <a:pPr algn="ctr" indent="0" marL="0">
@@ -15922,7 +15922,7 @@
               <a:buNone/>
             </a:pPr>
             <a:r>
-              <a:rPr lang="en-US" sz="900" dirty="0">
+              <a:rPr lang="en-US" sz="640" dirty="0">
                 <a:solidFill>
                   <a:srgbClr val="5F7183"/>
                 </a:solidFill>
@@ -15932,7 +15932,7 @@
               </a:rPr>
               <a:t>腳踏車假人橫切過去——同樣速度、同樣位置，每次都一樣。</a:t>
             </a:r>
-            <a:endParaRPr lang="en-US" sz="950" dirty="0"/>
+            <a:endParaRPr lang="en-US" sz="670" dirty="0"/>
           </a:p>
         </p:txBody>
       </p:sp>
@@ -15944,8 +15944,8 @@
         </p:nvSpPr>
         <p:spPr>
           <a:xfrm>
-            <a:off x="4736592" y="1255628"/>
-            <a:ext cx="3904488" cy="2566564"/>
+            <a:off x="4688906" y="918340"/>
+            <a:ext cx="2773281" cy="1822980"/>
           </a:xfrm>
           <a:prstGeom prst="roundRect">
             <a:avLst>
@@ -15971,8 +15971,8 @@
         </p:nvSpPr>
         <p:spPr>
           <a:xfrm>
-            <a:off x="4919472" y="1420220"/>
-            <a:ext cx="347472" cy="347472"/>
+            <a:off x="4818803" y="1035246"/>
+            <a:ext cx="246803" cy="246803"/>
           </a:xfrm>
           <a:prstGeom prst="ellipse">
             <a:avLst/>
@@ -15991,8 +15991,8 @@
         </p:nvSpPr>
         <p:spPr>
           <a:xfrm>
-            <a:off x="4919472" y="1465940"/>
-            <a:ext cx="347472" cy="256032"/>
+            <a:off x="4818803" y="1067721"/>
+            <a:ext cx="246803" cy="181855"/>
           </a:xfrm>
           <a:prstGeom prst="rect">
             <a:avLst/>
@@ -16008,7 +16008,7 @@
               <a:buNone/>
             </a:pPr>
             <a:r>
-              <a:rPr lang="en-US" sz="1200" b="1" dirty="0">
+              <a:rPr lang="en-US" sz="850" b="1" dirty="0">
                 <a:solidFill>
                   <a:srgbClr val="FFFFFF"/>
                 </a:solidFill>
@@ -16018,7 +16018,7 @@
               </a:rPr>
               <a:t>▶</a:t>
             </a:r>
-            <a:endParaRPr lang="en-US" sz="1200" dirty="0"/>
+            <a:endParaRPr lang="en-US" sz="850" dirty="0"/>
           </a:p>
         </p:txBody>
       </p:sp>
@@ -16030,8 +16030,8 @@
         </p:nvSpPr>
         <p:spPr>
           <a:xfrm>
-            <a:off x="5340096" y="1401932"/>
-            <a:ext cx="3118104" cy="420624"/>
+            <a:off x="5117564" y="1022257"/>
+            <a:ext cx="2214728" cy="298761"/>
           </a:xfrm>
           <a:prstGeom prst="rect">
             <a:avLst/>
@@ -16047,7 +16047,7 @@
               <a:buNone/>
             </a:pPr>
             <a:r>
-              <a:rPr lang="en-US" sz="1050" b="1" dirty="0">
+              <a:rPr lang="en-US" sz="750" b="1" dirty="0">
                 <a:solidFill>
                   <a:srgbClr val="0B1F3A"/>
                 </a:solidFill>
@@ -16057,7 +16057,7 @@
               </a:rPr>
               <a:t>AEB for cyclists</a:t>
             </a:r>
-            <a:endParaRPr lang="en-US" sz="1050" dirty="0"/>
+            <a:endParaRPr lang="en-US" sz="750" dirty="0"/>
           </a:p>
         </p:txBody>
       </p:sp>
@@ -16069,8 +16069,8 @@
         </p:nvSpPr>
         <p:spPr>
           <a:xfrm>
-            <a:off x="4919472" y="1859132"/>
-            <a:ext cx="3538728" cy="201168"/>
+            <a:off x="4818803" y="1346997"/>
+            <a:ext cx="2513489" cy="142886"/>
           </a:xfrm>
           <a:prstGeom prst="rect">
             <a:avLst/>
@@ -16086,7 +16086,7 @@
               <a:buNone/>
             </a:pPr>
             <a:r>
-              <a:rPr lang="en-US" sz="900" dirty="0">
+              <a:rPr lang="en-US" sz="640" dirty="0">
                 <a:solidFill>
                   <a:srgbClr val="5F7183"/>
                 </a:solidFill>
@@ -16096,7 +16096,7 @@
               </a:rPr>
               <a:t>Euro NCAP（官方）　·　4:39，播 2 分鐘就夠</a:t>
             </a:r>
-            <a:endParaRPr lang="en-US" sz="900" dirty="0"/>
+            <a:endParaRPr lang="en-US" sz="640" dirty="0"/>
           </a:p>
         </p:txBody>
       </p:sp>
@@ -16110,8 +16110,8 @@
         </p:nvSpPr>
         <p:spPr>
           <a:xfrm>
-            <a:off x="4919472" y="2042012"/>
-            <a:ext cx="3538728" cy="201168"/>
+            <a:off x="4818803" y="1476893"/>
+            <a:ext cx="2513489" cy="142886"/>
           </a:xfrm>
           <a:prstGeom prst="rect">
             <a:avLst/>
@@ -16127,7 +16127,7 @@
               <a:buNone/>
             </a:pPr>
             <a:r>
-              <a:rPr lang="en-US" sz="850" u="sng" dirty="0">
+              <a:rPr lang="en-US" sz="600" u="sng" dirty="0">
                 <a:solidFill>
                   <a:srgbClr val="1F6FBF"/>
                 </a:solidFill>
@@ -16144,7 +16144,7 @@
               </a:rPr>
               <a:t>https://www.youtube.com/watch?v=fWZQGcMN3Vc</a:t>
             </a:r>
-            <a:endParaRPr lang="en-US" sz="850" dirty="0"/>
+            <a:endParaRPr lang="en-US" sz="600" dirty="0"/>
           </a:p>
         </p:txBody>
       </p:sp>
@@ -16156,8 +16156,8 @@
         </p:nvSpPr>
         <p:spPr>
           <a:xfrm>
-            <a:off x="4919472" y="2316332"/>
-            <a:ext cx="36576" cy="237744"/>
+            <a:off x="4818803" y="1671737"/>
+            <a:ext cx="25979" cy="168865"/>
           </a:xfrm>
           <a:prstGeom prst="rect">
             <a:avLst/>
@@ -16176,8 +16176,8 @@
         </p:nvSpPr>
         <p:spPr>
           <a:xfrm>
-            <a:off x="5047488" y="2279756"/>
-            <a:ext cx="3429000" cy="456079"/>
+            <a:off x="4909730" y="1645758"/>
+            <a:ext cx="2435551" cy="323944"/>
           </a:xfrm>
           <a:prstGeom prst="rect">
             <a:avLst/>
@@ -16196,7 +16196,7 @@
               <a:buNone/>
             </a:pPr>
             <a:r>
-              <a:rPr lang="en-US" sz="950" dirty="0">
+              <a:rPr lang="en-US" sz="670" dirty="0">
                 <a:solidFill>
                   <a:srgbClr val="1A2733"/>
                 </a:solidFill>
@@ -16206,7 +16206,7 @@
               </a:rPr>
               <a:t>Quy trình quy định: búp bê xe đạp chạy ra ở đúng một tốc độ, một vị trí</a:t>
             </a:r>
-            <a:endParaRPr lang="en-US" sz="950" dirty="0"/>
+            <a:endParaRPr lang="en-US" sz="670" dirty="0"/>
           </a:p>
           <a:p>
             <a:pPr indent="0" marL="0">
@@ -16216,7 +16216,7 @@
               <a:buNone/>
             </a:pPr>
             <a:r>
-              <a:rPr lang="en-US" sz="900" dirty="0">
+              <a:rPr lang="en-US" sz="640" dirty="0">
                 <a:solidFill>
                   <a:srgbClr val="5F7183"/>
                 </a:solidFill>
@@ -16226,7 +16226,7 @@
               </a:rPr>
               <a:t>測試規程訂死：假人腳踏車固定速度、固定位置衝出來</a:t>
             </a:r>
-            <a:endParaRPr lang="en-US" sz="950" dirty="0"/>
+            <a:endParaRPr lang="en-US" sz="670" dirty="0"/>
           </a:p>
         </p:txBody>
       </p:sp>
@@ -16238,8 +16238,8 @@
         </p:nvSpPr>
         <p:spPr>
           <a:xfrm>
-            <a:off x="4919472" y="2808987"/>
-            <a:ext cx="36576" cy="237744"/>
+            <a:off x="4818803" y="2021660"/>
+            <a:ext cx="25979" cy="168865"/>
           </a:xfrm>
           <a:prstGeom prst="rect">
             <a:avLst/>
@@ -16258,8 +16258,8 @@
         </p:nvSpPr>
         <p:spPr>
           <a:xfrm>
-            <a:off x="5047488" y="2772411"/>
-            <a:ext cx="3429000" cy="456079"/>
+            <a:off x="4909730" y="1995681"/>
+            <a:ext cx="2435551" cy="323944"/>
           </a:xfrm>
           <a:prstGeom prst="rect">
             <a:avLst/>
@@ -16278,7 +16278,7 @@
               <a:buNone/>
             </a:pPr>
             <a:r>
-              <a:rPr lang="en-US" sz="950" dirty="0">
+              <a:rPr lang="en-US" sz="670" dirty="0">
                 <a:solidFill>
                   <a:srgbClr val="1A2733"/>
                 </a:solidFill>
@@ -16288,7 +16288,7 @@
               </a:rPr>
               <a:t>Đó chính là «kịch bản cụ thể» — mỗi lần chạy đều phải giống hệt lần trước</a:t>
             </a:r>
-            <a:endParaRPr lang="en-US" sz="950" dirty="0"/>
+            <a:endParaRPr lang="en-US" sz="670" dirty="0"/>
           </a:p>
           <a:p>
             <a:pPr indent="0" marL="0">
@@ -16298,7 +16298,7 @@
               <a:buNone/>
             </a:pPr>
             <a:r>
-              <a:rPr lang="en-US" sz="900" dirty="0">
+              <a:rPr lang="en-US" sz="640" dirty="0">
                 <a:solidFill>
                   <a:srgbClr val="5F7183"/>
                 </a:solidFill>
@@ -16308,7 +16308,7 @@
               </a:rPr>
               <a:t>那就是「具體場景」——每一次跑都必須跟上一次一模一樣</a:t>
             </a:r>
-            <a:endParaRPr lang="en-US" sz="950" dirty="0"/>
+            <a:endParaRPr lang="en-US" sz="670" dirty="0"/>
           </a:p>
         </p:txBody>
       </p:sp>
@@ -16320,8 +16320,8 @@
         </p:nvSpPr>
         <p:spPr>
           <a:xfrm>
-            <a:off x="4919472" y="3301642"/>
-            <a:ext cx="36576" cy="237744"/>
+            <a:off x="4818803" y="2371584"/>
+            <a:ext cx="25979" cy="168865"/>
           </a:xfrm>
           <a:prstGeom prst="rect">
             <a:avLst/>
@@ -16340,8 +16340,8 @@
         </p:nvSpPr>
         <p:spPr>
           <a:xfrm>
-            <a:off x="5047488" y="3265066"/>
-            <a:ext cx="3429000" cy="456079"/>
+            <a:off x="4909730" y="2345605"/>
+            <a:ext cx="2435551" cy="323944"/>
           </a:xfrm>
           <a:prstGeom prst="rect">
             <a:avLst/>
@@ -16360,7 +16360,7 @@
               <a:buNone/>
             </a:pPr>
             <a:r>
-              <a:rPr lang="en-US" sz="950" dirty="0">
+              <a:rPr lang="en-US" sz="670" dirty="0">
                 <a:solidFill>
                   <a:srgbClr val="1A2733"/>
                 </a:solidFill>
@@ -16370,7 +16370,7 @@
               </a:rPr>
               <a:t>Câu hỏi: vì sao phải dùng búp bê, không dùng người thật?</a:t>
             </a:r>
-            <a:endParaRPr lang="en-US" sz="950" dirty="0"/>
+            <a:endParaRPr lang="en-US" sz="670" dirty="0"/>
           </a:p>
           <a:p>
             <a:pPr indent="0" marL="0">
@@ -16380,7 +16380,7 @@
               <a:buNone/>
             </a:pPr>
             <a:r>
-              <a:rPr lang="en-US" sz="900" dirty="0">
+              <a:rPr lang="en-US" sz="640" dirty="0">
                 <a:solidFill>
                   <a:srgbClr val="5F7183"/>
                 </a:solidFill>
@@ -16390,7 +16390,7 @@
               </a:rPr>
               <a:t>問題：為什麼要用假人，不用真人？</a:t>
             </a:r>
-            <a:endParaRPr lang="en-US" sz="950" dirty="0"/>
+            <a:endParaRPr lang="en-US" sz="670" dirty="0"/>
           </a:p>
         </p:txBody>
       </p:sp>
@@ -16402,8 +16402,8 @@
         </p:nvSpPr>
         <p:spPr>
           <a:xfrm>
-            <a:off x="502920" y="3931920"/>
-            <a:ext cx="8138160" cy="548640"/>
+            <a:off x="1681812" y="2819258"/>
+            <a:ext cx="5780375" cy="389688"/>
           </a:xfrm>
           <a:prstGeom prst="roundRect">
             <a:avLst>
@@ -16429,8 +16429,8 @@
         </p:nvSpPr>
         <p:spPr>
           <a:xfrm>
-            <a:off x="685800" y="3995928"/>
-            <a:ext cx="7772400" cy="438912"/>
+            <a:off x="1811708" y="2864721"/>
+            <a:ext cx="5520583" cy="311751"/>
           </a:xfrm>
           <a:prstGeom prst="rect">
             <a:avLst/>
@@ -16449,7 +16449,7 @@
               <a:buNone/>
             </a:pPr>
             <a:r>
-              <a:rPr lang="en-US" sz="1150" b="1" dirty="0">
+              <a:rPr lang="en-US" sz="820" b="1" dirty="0">
                 <a:solidFill>
                   <a:srgbClr val="7A4E00"/>
                 </a:solidFill>
@@ -16459,7 +16459,7 @@
               </a:rPr>
               <a:t>Euro NCAP có kịch bản «một xe máy». Không có kịch bản «mười hai xe máy vây quanh bạn».</a:t>
             </a:r>
-            <a:endParaRPr lang="en-US" sz="1150" dirty="0"/>
+            <a:endParaRPr lang="en-US" sz="820" dirty="0"/>
           </a:p>
           <a:p>
             <a:pPr indent="0" marL="0">
@@ -16469,7 +16469,7 @@
               <a:buNone/>
             </a:pPr>
             <a:r>
-              <a:rPr lang="en-US" sz="1050" dirty="0">
+              <a:rPr lang="en-US" sz="750" dirty="0">
                 <a:solidFill>
                   <a:srgbClr val="7A4E00"/>
                 </a:solidFill>
@@ -16479,7 +16479,7 @@
               </a:rPr>
               <a:t>Euro NCAP 有「一台機車」的場景。沒有「十二台機車圍著你」的場景。</a:t>
             </a:r>
-            <a:endParaRPr lang="en-US" sz="1150" dirty="0"/>
+            <a:endParaRPr lang="en-US" sz="820" dirty="0"/>
           </a:p>
         </p:txBody>
       </p:sp>
@@ -16499,8 +16499,8 @@
         </p:blipFill>
         <p:spPr>
           <a:xfrm>
-            <a:off x="7516368" y="4718304"/>
-            <a:ext cx="1097280" cy="242439"/>
+            <a:off x="6663327" y="3338842"/>
+            <a:ext cx="779376" cy="172200"/>
           </a:xfrm>
           <a:prstGeom prst="rect">
             <a:avLst/>
@@ -16515,8 +16515,8 @@
         </p:nvSpPr>
         <p:spPr>
           <a:xfrm>
-            <a:off x="109728" y="4791456"/>
-            <a:ext cx="822960" cy="256032"/>
+            <a:off x="1402536" y="3390800"/>
+            <a:ext cx="584532" cy="181855"/>
           </a:xfrm>
           <a:prstGeom prst="rect">
             <a:avLst/>
@@ -16532,7 +16532,7 @@
               <a:buNone/>
             </a:pPr>
             <a:r>
-              <a:rPr lang="en-US" sz="900" dirty="0">
+              <a:rPr lang="en-US" sz="640" dirty="0">
                 <a:solidFill>
                   <a:srgbClr val="5F7183"/>
                 </a:solidFill>
@@ -16542,7 +16542,7 @@
               </a:rPr>
               <a:t>9 / 16</a:t>
             </a:r>
-            <a:endParaRPr lang="en-US" sz="900" dirty="0"/>
+            <a:endParaRPr lang="en-US" sz="640" dirty="0"/>
           </a:p>
         </p:txBody>
       </p:sp>
@@ -16554,8 +16554,8 @@
         </p:nvSpPr>
         <p:spPr>
           <a:xfrm>
-            <a:off x="960120" y="4791456"/>
-            <a:ext cx="2011680" cy="256032"/>
+            <a:off x="2006553" y="3390800"/>
+            <a:ext cx="1428857" cy="181855"/>
           </a:xfrm>
           <a:prstGeom prst="rect">
             <a:avLst/>
@@ -16571,7 +16571,7 @@
               <a:buNone/>
             </a:pPr>
             <a:r>
-              <a:rPr lang="en-US" sz="900" dirty="0">
+              <a:rPr lang="en-US" sz="640" dirty="0">
                 <a:solidFill>
                   <a:srgbClr val="5F7183"/>
                 </a:solidFill>
@@ -16581,7 +16581,7 @@
               </a:rPr>
               <a:t>Tiết 2 · 第 2 節</a:t>
             </a:r>
-            <a:endParaRPr lang="en-US" sz="900" dirty="0"/>
+            <a:endParaRPr lang="en-US" sz="640" dirty="0"/>
           </a:p>
         </p:txBody>
       </p:sp>

--- a/第四週(10-01)/第四週_第2節_簡報.pptx
+++ b/第四週(10-01)/第四週_第2節_簡報.pptx
@@ -6686,8 +6686,8 @@
       </p:nvGrpSpPr>
       <p:grpSpPr>
         <a:xfrm>
-          <a:off x="0" y="0"/>
-          <a:ext cx="0" cy="0"/>
+          <a:off x="1028250" y="0"/>
+          <a:ext cx="1" cy="1"/>
           <a:chOff x="0" y="0"/>
           <a:chExt cx="0" cy="0"/>
         </a:xfrm>
@@ -6700,8 +6700,8 @@
         </p:nvSpPr>
         <p:spPr>
           <a:xfrm>
-            <a:off x="6130753" y="-947729"/>
-            <a:ext cx="2987610" cy="2987610"/>
+            <a:off x="6273000" y="-1063125"/>
+            <a:ext cx="3260250" cy="3260250"/>
           </a:xfrm>
           <a:prstGeom prst="ellipse">
             <a:avLst/>
@@ -6725,8 +6725,8 @@
         </p:nvSpPr>
         <p:spPr>
           <a:xfrm>
-            <a:off x="7104973" y="1520297"/>
-            <a:ext cx="1688649" cy="1688649"/>
+            <a:off x="7336125" y="1630125"/>
+            <a:ext cx="1842750" cy="1842750"/>
           </a:xfrm>
           <a:prstGeom prst="ellipse">
             <a:avLst/>
@@ -6747,8 +6747,8 @@
         </p:nvSpPr>
         <p:spPr>
           <a:xfrm>
-            <a:off x="1681812" y="883806"/>
-            <a:ext cx="4936051" cy="194844"/>
+            <a:off x="1418063" y="935550"/>
+            <a:ext cx="5386500" cy="212625"/>
           </a:xfrm>
           <a:prstGeom prst="rect">
             <a:avLst/>
@@ -6764,7 +6764,7 @@
               <a:buNone/>
             </a:pPr>
             <a:r>
-              <a:rPr lang="en-US" sz="890" b="1" dirty="0">
+              <a:rPr lang="en-US" sz="970" b="1" dirty="0">
                 <a:solidFill>
                   <a:srgbClr val="00A896"/>
                 </a:solidFill>
@@ -6774,7 +6774,7 @@
               </a:rPr>
               <a:t>MITUST · Nguyên lý xe tự lái · Tuần 4</a:t>
             </a:r>
-            <a:endParaRPr lang="en-US" sz="890" dirty="0"/>
+            <a:endParaRPr lang="en-US" sz="970" dirty="0"/>
           </a:p>
         </p:txBody>
       </p:sp>
@@ -6786,8 +6786,8 @@
         </p:nvSpPr>
         <p:spPr>
           <a:xfrm>
-            <a:off x="1681812" y="1143598"/>
-            <a:ext cx="5325739" cy="628953"/>
+            <a:off x="1418063" y="1219050"/>
+            <a:ext cx="5811750" cy="686349"/>
           </a:xfrm>
           <a:prstGeom prst="rect">
             <a:avLst/>
@@ -6806,7 +6806,7 @@
               <a:buNone/>
             </a:pPr>
             <a:r>
-              <a:rPr lang="en-US" sz="2410" b="1" dirty="0">
+              <a:rPr lang="en-US" sz="2640" b="1" dirty="0">
                 <a:solidFill>
                   <a:srgbClr val="FFFFFF"/>
                 </a:solidFill>
@@ -6816,7 +6816,7 @@
               </a:rPr>
               <a:t>Đo bằng số km là sai đơn vị</a:t>
             </a:r>
-            <a:endParaRPr lang="en-US" sz="2410" dirty="0"/>
+            <a:endParaRPr lang="en-US" sz="2640" dirty="0"/>
           </a:p>
           <a:p>
             <a:pPr indent="0" marL="0">
@@ -6826,7 +6826,7 @@
               <a:buNone/>
             </a:pPr>
             <a:r>
-              <a:rPr lang="en-US" sz="1350" dirty="0">
+              <a:rPr lang="en-US" sz="1470" dirty="0">
                 <a:solidFill>
                   <a:srgbClr val="C8D6E2"/>
                 </a:solidFill>
@@ -6836,7 +6836,7 @@
               </a:rPr>
               <a:t>用「跑了幾公里」來衡量，單位就選錯了</a:t>
             </a:r>
-            <a:endParaRPr lang="en-US" sz="2410" dirty="0"/>
+            <a:endParaRPr lang="en-US" sz="2640" dirty="0"/>
           </a:p>
         </p:txBody>
       </p:sp>
@@ -6848,8 +6848,8 @@
         </p:nvSpPr>
         <p:spPr>
           <a:xfrm>
-            <a:off x="1681812" y="2006437"/>
-            <a:ext cx="974221" cy="29227"/>
+            <a:off x="1418063" y="2160629"/>
+            <a:ext cx="1063125" cy="31894"/>
           </a:xfrm>
           <a:prstGeom prst="rect">
             <a:avLst/>
@@ -6868,8 +6868,8 @@
         </p:nvSpPr>
         <p:spPr>
           <a:xfrm>
-            <a:off x="1681812" y="2149323"/>
-            <a:ext cx="5065947" cy="591997"/>
+            <a:off x="1418063" y="2316554"/>
+            <a:ext cx="5528250" cy="646021"/>
           </a:xfrm>
           <a:prstGeom prst="rect">
             <a:avLst/>
@@ -6888,7 +6888,7 @@
               <a:buNone/>
             </a:pPr>
             <a:r>
-              <a:rPr lang="en-US" sz="1030" dirty="0">
+              <a:rPr lang="en-US" sz="1120" dirty="0">
                 <a:solidFill>
                   <a:srgbClr val="C8D6E2"/>
                 </a:solidFill>
@@ -6898,7 +6898,7 @@
               </a:rPr>
               <a:t>Đơn vị đúng là kịch bản — và cách dùng mô phỏng là quét tham số, không phải chạy đường dài</a:t>
             </a:r>
-            <a:endParaRPr lang="en-US" sz="1030" dirty="0"/>
+            <a:endParaRPr lang="en-US" sz="1120" dirty="0"/>
           </a:p>
           <a:p>
             <a:pPr indent="0" marL="0">
@@ -6908,7 +6908,7 @@
               <a:buNone/>
             </a:pPr>
             <a:r>
-              <a:rPr lang="en-US" sz="890" dirty="0">
+              <a:rPr lang="en-US" sz="970" dirty="0">
                 <a:solidFill>
                   <a:srgbClr val="8AA0B4"/>
                 </a:solidFill>
@@ -6918,7 +6918,7 @@
               </a:rPr>
               <a:t>正確的單位是「場景」——模擬的用法是掃參數，不是跑里程</a:t>
             </a:r>
-            <a:endParaRPr lang="en-US" sz="1030" dirty="0"/>
+            <a:endParaRPr lang="en-US" sz="1120" dirty="0"/>
           </a:p>
         </p:txBody>
       </p:sp>
@@ -6930,8 +6930,8 @@
         </p:nvSpPr>
         <p:spPr>
           <a:xfrm>
-            <a:off x="1681812" y="2793278"/>
-            <a:ext cx="4221622" cy="272782"/>
+            <a:off x="1418063" y="3019275"/>
+            <a:ext cx="4606875" cy="297675"/>
           </a:xfrm>
           <a:prstGeom prst="roundRect">
             <a:avLst>
@@ -6952,8 +6952,8 @@
         </p:nvSpPr>
         <p:spPr>
           <a:xfrm>
-            <a:off x="1772740" y="2825752"/>
-            <a:ext cx="4039768" cy="207834"/>
+            <a:off x="1517288" y="3054713"/>
+            <a:ext cx="4408425" cy="226800"/>
           </a:xfrm>
           <a:prstGeom prst="rect">
             <a:avLst/>
@@ -6969,7 +6969,7 @@
               <a:buNone/>
             </a:pPr>
             <a:r>
-              <a:rPr lang="en-US" sz="750" b="1" dirty="0">
+              <a:rPr lang="en-US" sz="810" b="1" dirty="0">
                 <a:solidFill>
                   <a:srgbClr val="9FD6CE"/>
                 </a:solidFill>
@@ -6979,7 +6979,7 @@
               </a:rPr>
               <a:t>工具｜Công cụ： ch-neural.github.io/MITUST-Principles-of-Self-Driving-Cars/week4/sim/</a:t>
             </a:r>
-            <a:endParaRPr lang="en-US" sz="750" dirty="0"/>
+            <a:endParaRPr lang="en-US" sz="810" dirty="0"/>
           </a:p>
         </p:txBody>
       </p:sp>
@@ -6991,8 +6991,8 @@
         </p:nvSpPr>
         <p:spPr>
           <a:xfrm>
-            <a:off x="1681812" y="3131008"/>
-            <a:ext cx="4936051" cy="194844"/>
+            <a:off x="1418063" y="3387825"/>
+            <a:ext cx="5386500" cy="212625"/>
           </a:xfrm>
           <a:prstGeom prst="rect">
             <a:avLst/>
@@ -7008,7 +7008,7 @@
               <a:buNone/>
             </a:pPr>
             <a:r>
-              <a:rPr lang="en-US" sz="820" dirty="0">
+              <a:rPr lang="en-US" sz="890" dirty="0">
                 <a:solidFill>
                   <a:srgbClr val="8AA0B4"/>
                 </a:solidFill>
@@ -7018,7 +7018,7 @@
               </a:rPr>
               <a:t>第四週 第 2 節　2026/10/01（四）10:10–11:00　CH Tseng</a:t>
             </a:r>
-            <a:endParaRPr lang="en-US" sz="820" dirty="0"/>
+            <a:endParaRPr lang="en-US" sz="890" dirty="0"/>
           </a:p>
         </p:txBody>
       </p:sp>
@@ -7030,8 +7030,8 @@
         </p:nvSpPr>
         <p:spPr>
           <a:xfrm>
-            <a:off x="1577895" y="247315"/>
-            <a:ext cx="1571743" cy="532574"/>
+            <a:off x="1304663" y="240975"/>
+            <a:ext cx="1715175" cy="581175"/>
           </a:xfrm>
           <a:prstGeom prst="roundRect">
             <a:avLst>
@@ -7060,8 +7060,8 @@
         </p:blipFill>
         <p:spPr>
           <a:xfrm>
-            <a:off x="1681812" y="364222"/>
-            <a:ext cx="1363909" cy="301350"/>
+            <a:off x="502920" y="475488"/>
+            <a:ext cx="1920240" cy="424269"/>
           </a:xfrm>
           <a:prstGeom prst="rect">
             <a:avLst/>
@@ -7094,8 +7094,8 @@
       </p:nvGrpSpPr>
       <p:grpSpPr>
         <a:xfrm>
-          <a:off x="0" y="0"/>
-          <a:ext cx="0" cy="0"/>
+          <a:off x="898071" y="0"/>
+          <a:ext cx="1" cy="1"/>
           <a:chOff x="0" y="0"/>
           <a:chExt cx="0" cy="0"/>
         </a:xfrm>
@@ -7108,8 +7108,8 @@
         </p:nvSpPr>
         <p:spPr>
           <a:xfrm>
-            <a:off x="6130753" y="-947729"/>
-            <a:ext cx="2987610" cy="2987610"/>
+            <a:off x="6335486" y="-1102179"/>
+            <a:ext cx="3380014" cy="3380014"/>
           </a:xfrm>
           <a:prstGeom prst="ellipse">
             <a:avLst/>
@@ -7133,8 +7133,8 @@
         </p:nvSpPr>
         <p:spPr>
           <a:xfrm>
-            <a:off x="7104973" y="1520297"/>
-            <a:ext cx="1688649" cy="1688649"/>
+            <a:off x="7437664" y="1690007"/>
+            <a:ext cx="1910443" cy="1910443"/>
           </a:xfrm>
           <a:prstGeom prst="ellipse">
             <a:avLst/>
@@ -7155,8 +7155,8 @@
         </p:nvSpPr>
         <p:spPr>
           <a:xfrm>
-            <a:off x="1681812" y="1228031"/>
-            <a:ext cx="3247402" cy="220823"/>
+            <a:off x="1302204" y="1359354"/>
+            <a:ext cx="3673929" cy="249827"/>
           </a:xfrm>
           <a:prstGeom prst="rect">
             <a:avLst/>
@@ -7171,7 +7171,7 @@
             <a:pPr indent="0" marL="0">
               <a:buNone/>
             </a:pPr>
-            <a:endParaRPr lang="en-US" sz="960" dirty="0"/>
+            <a:endParaRPr lang="en-US" sz="1080" dirty="0"/>
           </a:p>
         </p:txBody>
       </p:sp>
@@ -7183,8 +7183,8 @@
         </p:nvSpPr>
         <p:spPr>
           <a:xfrm>
-            <a:off x="1681812" y="1481328"/>
-            <a:ext cx="5195843" cy="844324"/>
+            <a:off x="1302204" y="1645920"/>
+            <a:ext cx="5878286" cy="955221"/>
           </a:xfrm>
           <a:prstGeom prst="rect">
             <a:avLst/>
@@ -7203,7 +7203,7 @@
               <a:buNone/>
             </a:pPr>
             <a:r>
-              <a:rPr lang="en-US" sz="2060" b="1" dirty="0">
+              <a:rPr lang="en-US" sz="2330" b="1" dirty="0">
                 <a:solidFill>
                   <a:srgbClr val="FFFFFF"/>
                 </a:solidFill>
@@ -7213,7 +7213,7 @@
               </a:rPr>
               <a:t>Kịch bản lấy từ đâu ra</a:t>
             </a:r>
-            <a:endParaRPr lang="en-US" sz="2060" dirty="0"/>
+            <a:endParaRPr lang="en-US" sz="2330" dirty="0"/>
           </a:p>
           <a:p>
             <a:pPr indent="0" marL="0">
@@ -7223,7 +7223,7 @@
               <a:buNone/>
             </a:pPr>
             <a:r>
-              <a:rPr lang="en-US" sz="1210" dirty="0">
+              <a:rPr lang="en-US" sz="1370" dirty="0">
                 <a:solidFill>
                   <a:srgbClr val="AFC3D4"/>
                 </a:solidFill>
@@ -7233,7 +7233,7 @@
               </a:rPr>
               <a:t>場景是從哪裡來的</a:t>
             </a:r>
-            <a:endParaRPr lang="en-US" sz="2060" dirty="0"/>
+            <a:endParaRPr lang="en-US" sz="2330" dirty="0"/>
           </a:p>
         </p:txBody>
       </p:sp>
@@ -7245,8 +7245,8 @@
         </p:nvSpPr>
         <p:spPr>
           <a:xfrm>
-            <a:off x="1402536" y="3390800"/>
-            <a:ext cx="584532" cy="181855"/>
+            <a:off x="986246" y="102870"/>
+            <a:ext cx="661307" cy="205740"/>
           </a:xfrm>
           <a:prstGeom prst="rect">
             <a:avLst/>
@@ -7262,7 +7262,7 @@
               <a:buNone/>
             </a:pPr>
             <a:r>
-              <a:rPr lang="en-US" sz="640" dirty="0">
+              <a:rPr lang="en-US" sz="720" dirty="0">
                 <a:solidFill>
                   <a:srgbClr val="9FB3C8"/>
                 </a:solidFill>
@@ -7272,7 +7272,7 @@
               </a:rPr>
               <a:t>10 / 16</a:t>
             </a:r>
-            <a:endParaRPr lang="en-US" sz="640" dirty="0"/>
+            <a:endParaRPr lang="en-US" sz="720" dirty="0"/>
           </a:p>
         </p:txBody>
       </p:sp>
@@ -7284,8 +7284,8 @@
         </p:nvSpPr>
         <p:spPr>
           <a:xfrm>
-            <a:off x="2006553" y="3390800"/>
-            <a:ext cx="1428857" cy="181855"/>
+            <a:off x="1669596" y="102870"/>
+            <a:ext cx="1616529" cy="205740"/>
           </a:xfrm>
           <a:prstGeom prst="rect">
             <a:avLst/>
@@ -7301,7 +7301,7 @@
               <a:buNone/>
             </a:pPr>
             <a:r>
-              <a:rPr lang="en-US" sz="640" dirty="0">
+              <a:rPr lang="en-US" sz="720" dirty="0">
                 <a:solidFill>
                   <a:srgbClr val="9FB3C8"/>
                 </a:solidFill>
@@ -7311,7 +7311,7 @@
               </a:rPr>
               <a:t>Tiết 2 · 第 2 節</a:t>
             </a:r>
-            <a:endParaRPr lang="en-US" sz="640" dirty="0"/>
+            <a:endParaRPr lang="en-US" sz="720" dirty="0"/>
           </a:p>
         </p:txBody>
       </p:sp>
@@ -7334,8 +7334,8 @@
       </p:nvGrpSpPr>
       <p:grpSpPr>
         <a:xfrm>
-          <a:off x="0" y="0"/>
-          <a:ext cx="0" cy="0"/>
+          <a:off x="942514" y="0"/>
+          <a:ext cx="1" cy="1"/>
           <a:chOff x="0" y="0"/>
           <a:chExt cx="0" cy="0"/>
         </a:xfrm>
@@ -7348,8 +7348,8 @@
         </p:nvSpPr>
         <p:spPr>
           <a:xfrm>
-            <a:off x="1681812" y="325253"/>
-            <a:ext cx="5780375" cy="194844"/>
+            <a:off x="1341758" y="333913"/>
+            <a:ext cx="6460485" cy="217769"/>
           </a:xfrm>
           <a:prstGeom prst="rect">
             <a:avLst/>
@@ -7365,7 +7365,7 @@
               <a:buNone/>
             </a:pPr>
             <a:r>
-              <a:rPr lang="en-US" sz="890" b="1" dirty="0">
+              <a:rPr lang="en-US" sz="990" b="1" dirty="0">
                 <a:solidFill>
                   <a:srgbClr val="007F72"/>
                 </a:solidFill>
@@ -7375,7 +7375,7 @@
               </a:rPr>
               <a:t>Nguồn 1 / 3 · 來源之一</a:t>
             </a:r>
-            <a:endParaRPr lang="en-US" sz="890" dirty="0"/>
+            <a:endParaRPr lang="en-US" sz="990" dirty="0"/>
           </a:p>
         </p:txBody>
       </p:sp>
@@ -7387,8 +7387,8 @@
         </p:nvSpPr>
         <p:spPr>
           <a:xfrm>
-            <a:off x="1681812" y="809116"/>
-            <a:ext cx="1753597" cy="1786071"/>
+            <a:off x="1341758" y="874706"/>
+            <a:ext cx="1959922" cy="1996217"/>
           </a:xfrm>
           <a:prstGeom prst="roundRect">
             <a:avLst>
@@ -7414,8 +7414,8 @@
         </p:nvSpPr>
         <p:spPr>
           <a:xfrm>
-            <a:off x="2115665" y="1319607"/>
-            <a:ext cx="885891" cy="241607"/>
+            <a:off x="1826657" y="1445261"/>
+            <a:ext cx="990124" cy="270034"/>
           </a:xfrm>
           <a:prstGeom prst="triangle">
             <a:avLst/>
@@ -7434,8 +7434,8 @@
         </p:nvSpPr>
         <p:spPr>
           <a:xfrm>
-            <a:off x="2115665" y="1581348"/>
-            <a:ext cx="885891" cy="70469"/>
+            <a:off x="1826657" y="1737798"/>
+            <a:ext cx="990124" cy="78760"/>
           </a:xfrm>
           <a:prstGeom prst="rect">
             <a:avLst/>
@@ -7454,8 +7454,8 @@
         </p:nvSpPr>
         <p:spPr>
           <a:xfrm>
-            <a:off x="2216335" y="1671950"/>
-            <a:ext cx="100669" cy="322142"/>
+            <a:off x="1939171" y="1839060"/>
+            <a:ext cx="112514" cy="360045"/>
           </a:xfrm>
           <a:prstGeom prst="rect">
             <a:avLst/>
@@ -7476,8 +7476,8 @@
         </p:nvSpPr>
         <p:spPr>
           <a:xfrm>
-            <a:off x="2417674" y="1671950"/>
-            <a:ext cx="100669" cy="322142"/>
+            <a:off x="2164199" y="1839060"/>
+            <a:ext cx="112514" cy="360045"/>
           </a:xfrm>
           <a:prstGeom prst="rect">
             <a:avLst/>
@@ -7498,8 +7498,8 @@
         </p:nvSpPr>
         <p:spPr>
           <a:xfrm>
-            <a:off x="2619013" y="1671950"/>
-            <a:ext cx="100669" cy="322142"/>
+            <a:off x="2389227" y="1839060"/>
+            <a:ext cx="112514" cy="360045"/>
           </a:xfrm>
           <a:prstGeom prst="rect">
             <a:avLst/>
@@ -7520,8 +7520,8 @@
         </p:nvSpPr>
         <p:spPr>
           <a:xfrm>
-            <a:off x="2820351" y="1671950"/>
-            <a:ext cx="100669" cy="322142"/>
+            <a:off x="2614255" y="1839060"/>
+            <a:ext cx="112514" cy="360045"/>
           </a:xfrm>
           <a:prstGeom prst="rect">
             <a:avLst/>
@@ -7542,8 +7542,8 @@
         </p:nvSpPr>
         <p:spPr>
           <a:xfrm>
-            <a:off x="2095531" y="2004160"/>
-            <a:ext cx="926159" cy="90603"/>
+            <a:off x="1804154" y="2210357"/>
+            <a:ext cx="1035129" cy="101263"/>
           </a:xfrm>
           <a:prstGeom prst="rect">
             <a:avLst/>
@@ -7562,8 +7562,8 @@
         </p:nvSpPr>
         <p:spPr>
           <a:xfrm>
-            <a:off x="3760150" y="963355"/>
-            <a:ext cx="3702038" cy="714266"/>
+            <a:off x="3664629" y="1047093"/>
+            <a:ext cx="4137614" cy="798305"/>
           </a:xfrm>
           <a:prstGeom prst="rect">
             <a:avLst/>
@@ -7582,7 +7582,7 @@
               <a:buNone/>
             </a:pPr>
             <a:r>
-              <a:rPr lang="en-US" sz="1630" b="1" dirty="0">
+              <a:rPr lang="en-US" sz="1830" b="1" dirty="0">
                 <a:solidFill>
                   <a:srgbClr val="0B1F3A"/>
                 </a:solidFill>
@@ -7592,7 +7592,7 @@
               </a:rPr>
               <a:t>Từ quy định và tiêu chuẩn: ai muốn bán xe thì bắt buộc phải qua</a:t>
             </a:r>
-            <a:endParaRPr lang="en-US" sz="1630" dirty="0"/>
+            <a:endParaRPr lang="en-US" sz="1830" dirty="0"/>
           </a:p>
           <a:p>
             <a:pPr indent="0" marL="0">
@@ -7602,7 +7602,7 @@
               <a:buNone/>
             </a:pPr>
             <a:r>
-              <a:rPr lang="en-US" sz="990" dirty="0">
+              <a:rPr lang="en-US" sz="1110" dirty="0">
                 <a:solidFill>
                   <a:srgbClr val="007F72"/>
                 </a:solidFill>
@@ -7612,7 +7612,7 @@
               </a:rPr>
               <a:t>來自法規與標準：想賣車就一定要通過</a:t>
             </a:r>
-            <a:endParaRPr lang="en-US" sz="1630" dirty="0"/>
+            <a:endParaRPr lang="en-US" sz="1830" dirty="0"/>
           </a:p>
         </p:txBody>
       </p:sp>
@@ -7624,8 +7624,8 @@
         </p:nvSpPr>
         <p:spPr>
           <a:xfrm>
-            <a:off x="3760150" y="1742570"/>
-            <a:ext cx="3702038" cy="763326"/>
+            <a:off x="3664629" y="1917989"/>
+            <a:ext cx="4137614" cy="853137"/>
           </a:xfrm>
           <a:prstGeom prst="rect">
             <a:avLst/>
@@ -7644,7 +7644,7 @@
               <a:buNone/>
             </a:pPr>
             <a:r>
-              <a:rPr lang="en-US" sz="890" dirty="0">
+              <a:rPr lang="en-US" sz="990" dirty="0">
                 <a:solidFill>
                   <a:srgbClr val="5F7183"/>
                 </a:solidFill>
@@ -7654,7 +7654,7 @@
               </a:rPr>
               <a:t>Euro NCAP kiểm tra phanh tự động với xe, với người đi bộ, và từ 2023 thêm xe máy. Còn có ISO 34502 — một bộ khung quy định kịch bản phải viết như thế nào.</a:t>
             </a:r>
-            <a:endParaRPr lang="en-US" sz="890" dirty="0"/>
+            <a:endParaRPr lang="en-US" sz="990" dirty="0"/>
           </a:p>
           <a:p>
             <a:pPr indent="0" marL="0">
@@ -7664,7 +7664,7 @@
               <a:buNone/>
             </a:pPr>
             <a:r>
-              <a:rPr lang="en-US" sz="820" dirty="0">
+              <a:rPr lang="en-US" sz="910" dirty="0">
                 <a:solidFill>
                   <a:srgbClr val="5F7183"/>
                 </a:solidFill>
@@ -7674,7 +7674,7 @@
               </a:rPr>
               <a:t>Euro NCAP 測自動緊急煞車：對車、對行人，2023 年起加上機車。另外還有 ISO 34502，規定場景要怎麼寫的框架。</a:t>
             </a:r>
-            <a:endParaRPr lang="en-US" sz="890" dirty="0"/>
+            <a:endParaRPr lang="en-US" sz="990" dirty="0"/>
           </a:p>
         </p:txBody>
       </p:sp>
@@ -7686,8 +7686,8 @@
         </p:nvSpPr>
         <p:spPr>
           <a:xfrm>
-            <a:off x="1681812" y="2806268"/>
-            <a:ext cx="5780375" cy="441647"/>
+            <a:off x="1341758" y="3106840"/>
+            <a:ext cx="6460485" cy="493610"/>
           </a:xfrm>
           <a:prstGeom prst="roundRect">
             <a:avLst>
@@ -7713,8 +7713,8 @@
         </p:nvSpPr>
         <p:spPr>
           <a:xfrm>
-            <a:off x="1811708" y="2858226"/>
-            <a:ext cx="5520583" cy="350719"/>
+            <a:off x="1486937" y="3164912"/>
+            <a:ext cx="6170126" cy="391984"/>
           </a:xfrm>
           <a:prstGeom prst="rect">
             <a:avLst/>
@@ -7733,7 +7733,7 @@
               <a:buNone/>
             </a:pPr>
             <a:r>
-              <a:rPr lang="en-US" sz="890" b="1" dirty="0">
+              <a:rPr lang="en-US" sz="990" b="1" dirty="0">
                 <a:solidFill>
                   <a:srgbClr val="7A4E00"/>
                 </a:solidFill>
@@ -7743,7 +7743,7 @@
               </a:rPr>
               <a:t>Ưu điểm: rõ ràng, ai cũng phải theo. Nhược điểm: ít, và luôn chậm hơn thực tế vài năm.</a:t>
             </a:r>
-            <a:endParaRPr lang="en-US" sz="890" dirty="0"/>
+            <a:endParaRPr lang="en-US" sz="990" dirty="0"/>
           </a:p>
           <a:p>
             <a:pPr indent="0" marL="0">
@@ -7753,7 +7753,7 @@
               <a:buNone/>
             </a:pPr>
             <a:r>
-              <a:rPr lang="en-US" sz="820" dirty="0">
+              <a:rPr lang="en-US" sz="910" dirty="0">
                 <a:solidFill>
                   <a:srgbClr val="7A4E00"/>
                 </a:solidFill>
@@ -7763,7 +7763,7 @@
               </a:rPr>
               <a:t>優點：明確，大家都得照做。缺點：數量少，而且永遠落後現實好幾年。</a:t>
             </a:r>
-            <a:endParaRPr lang="en-US" sz="890" dirty="0"/>
+            <a:endParaRPr lang="en-US" sz="990" dirty="0"/>
           </a:p>
         </p:txBody>
       </p:sp>
@@ -7783,8 +7783,8 @@
         </p:blipFill>
         <p:spPr>
           <a:xfrm>
-            <a:off x="6663327" y="3338842"/>
-            <a:ext cx="779376" cy="172200"/>
+            <a:off x="7882128" y="109728"/>
+            <a:ext cx="1097280" cy="242439"/>
           </a:xfrm>
           <a:prstGeom prst="rect">
             <a:avLst/>
@@ -7799,8 +7799,8 @@
         </p:nvSpPr>
         <p:spPr>
           <a:xfrm>
-            <a:off x="1402536" y="3390800"/>
-            <a:ext cx="584532" cy="181855"/>
+            <a:off x="1029622" y="101626"/>
+            <a:ext cx="653307" cy="203251"/>
           </a:xfrm>
           <a:prstGeom prst="rect">
             <a:avLst/>
@@ -7816,7 +7816,7 @@
               <a:buNone/>
             </a:pPr>
             <a:r>
-              <a:rPr lang="en-US" sz="640" dirty="0">
+              <a:rPr lang="en-US" sz="710" dirty="0">
                 <a:solidFill>
                   <a:srgbClr val="5F7183"/>
                 </a:solidFill>
@@ -7826,7 +7826,7 @@
               </a:rPr>
               <a:t>11 / 16</a:t>
             </a:r>
-            <a:endParaRPr lang="en-US" sz="640" dirty="0"/>
+            <a:endParaRPr lang="en-US" sz="710" dirty="0"/>
           </a:p>
         </p:txBody>
       </p:sp>
@@ -7838,8 +7838,8 @@
         </p:nvSpPr>
         <p:spPr>
           <a:xfrm>
-            <a:off x="2006553" y="3390800"/>
-            <a:ext cx="1428857" cy="181855"/>
+            <a:off x="1704706" y="101626"/>
+            <a:ext cx="1596974" cy="203251"/>
           </a:xfrm>
           <a:prstGeom prst="rect">
             <a:avLst/>
@@ -7855,7 +7855,7 @@
               <a:buNone/>
             </a:pPr>
             <a:r>
-              <a:rPr lang="en-US" sz="640" dirty="0">
+              <a:rPr lang="en-US" sz="710" dirty="0">
                 <a:solidFill>
                   <a:srgbClr val="5F7183"/>
                 </a:solidFill>
@@ -7865,7 +7865,7 @@
               </a:rPr>
               <a:t>Tiết 2 · 第 2 節</a:t>
             </a:r>
-            <a:endParaRPr lang="en-US" sz="640" dirty="0"/>
+            <a:endParaRPr lang="en-US" sz="710" dirty="0"/>
           </a:p>
         </p:txBody>
       </p:sp>
@@ -7888,8 +7888,8 @@
       </p:nvGrpSpPr>
       <p:grpSpPr>
         <a:xfrm>
-          <a:off x="0" y="0"/>
-          <a:ext cx="0" cy="0"/>
+          <a:off x="942514" y="0"/>
+          <a:ext cx="1" cy="1"/>
           <a:chOff x="0" y="0"/>
           <a:chExt cx="0" cy="0"/>
         </a:xfrm>
@@ -7902,8 +7902,8 @@
         </p:nvSpPr>
         <p:spPr>
           <a:xfrm>
-            <a:off x="1681812" y="325253"/>
-            <a:ext cx="5780375" cy="194844"/>
+            <a:off x="1341758" y="333913"/>
+            <a:ext cx="6460485" cy="217769"/>
           </a:xfrm>
           <a:prstGeom prst="rect">
             <a:avLst/>
@@ -7919,7 +7919,7 @@
               <a:buNone/>
             </a:pPr>
             <a:r>
-              <a:rPr lang="en-US" sz="890" b="1" dirty="0">
+              <a:rPr lang="en-US" sz="990" b="1" dirty="0">
                 <a:solidFill>
                   <a:srgbClr val="007F72"/>
                 </a:solidFill>
@@ -7929,7 +7929,7 @@
               </a:rPr>
               <a:t>Nguồn 2 / 3 · 來源之二</a:t>
             </a:r>
-            <a:endParaRPr lang="en-US" sz="890" dirty="0"/>
+            <a:endParaRPr lang="en-US" sz="990" dirty="0"/>
           </a:p>
         </p:txBody>
       </p:sp>
@@ -7941,8 +7941,8 @@
         </p:nvSpPr>
         <p:spPr>
           <a:xfrm>
-            <a:off x="1681812" y="809116"/>
-            <a:ext cx="1753597" cy="1786071"/>
+            <a:off x="1341758" y="874706"/>
+            <a:ext cx="1959922" cy="1996217"/>
           </a:xfrm>
           <a:prstGeom prst="roundRect">
             <a:avLst>
@@ -7968,8 +7968,8 @@
         </p:nvSpPr>
         <p:spPr>
           <a:xfrm>
-            <a:off x="2095531" y="1299473"/>
-            <a:ext cx="926159" cy="805356"/>
+            <a:off x="1804154" y="1422758"/>
+            <a:ext cx="1035129" cy="900113"/>
           </a:xfrm>
           <a:prstGeom prst="triangle">
             <a:avLst/>
@@ -7988,8 +7988,8 @@
         </p:nvSpPr>
         <p:spPr>
           <a:xfrm>
-            <a:off x="2518343" y="1581348"/>
-            <a:ext cx="80536" cy="261741"/>
+            <a:off x="2276713" y="1737798"/>
+            <a:ext cx="90012" cy="292536"/>
           </a:xfrm>
           <a:prstGeom prst="rect">
             <a:avLst/>
@@ -8008,8 +8008,8 @@
         </p:nvSpPr>
         <p:spPr>
           <a:xfrm>
-            <a:off x="2508276" y="1903490"/>
-            <a:ext cx="100669" cy="100669"/>
+            <a:off x="2265462" y="2097843"/>
+            <a:ext cx="112514" cy="112514"/>
           </a:xfrm>
           <a:prstGeom prst="ellipse">
             <a:avLst/>
@@ -8028,8 +8028,8 @@
         </p:nvSpPr>
         <p:spPr>
           <a:xfrm>
-            <a:off x="3760150" y="963355"/>
-            <a:ext cx="3702038" cy="714266"/>
+            <a:off x="3664629" y="1047093"/>
+            <a:ext cx="4137614" cy="798305"/>
           </a:xfrm>
           <a:prstGeom prst="rect">
             <a:avLst/>
@@ -8048,7 +8048,7 @@
               <a:buNone/>
             </a:pPr>
             <a:r>
-              <a:rPr lang="en-US" sz="1630" b="1" dirty="0">
+              <a:rPr lang="en-US" sz="1830" b="1" dirty="0">
                 <a:solidFill>
                   <a:srgbClr val="0B1F3A"/>
                 </a:solidFill>
@@ -8058,7 +8058,7 @@
               </a:rPr>
               <a:t>Từ cơ sở dữ liệu tai nạn: lấy tai nạn thật dựng lại thành kịch bản</a:t>
             </a:r>
-            <a:endParaRPr lang="en-US" sz="1630" dirty="0"/>
+            <a:endParaRPr lang="en-US" sz="1830" dirty="0"/>
           </a:p>
           <a:p>
             <a:pPr indent="0" marL="0">
@@ -8068,7 +8068,7 @@
               <a:buNone/>
             </a:pPr>
             <a:r>
-              <a:rPr lang="en-US" sz="990" dirty="0">
+              <a:rPr lang="en-US" sz="1110" dirty="0">
                 <a:solidFill>
                   <a:srgbClr val="007F72"/>
                 </a:solidFill>
@@ -8078,7 +8078,7 @@
               </a:rPr>
               <a:t>來自事故資料庫：把真實發生過的事故還原成場景</a:t>
             </a:r>
-            <a:endParaRPr lang="en-US" sz="1630" dirty="0"/>
+            <a:endParaRPr lang="en-US" sz="1830" dirty="0"/>
           </a:p>
         </p:txBody>
       </p:sp>
@@ -8090,8 +8090,8 @@
         </p:nvSpPr>
         <p:spPr>
           <a:xfrm>
-            <a:off x="3760150" y="1742570"/>
-            <a:ext cx="3702038" cy="763326"/>
+            <a:off x="3664629" y="1917989"/>
+            <a:ext cx="4137614" cy="853137"/>
           </a:xfrm>
           <a:prstGeom prst="rect">
             <a:avLst/>
@@ -8110,7 +8110,7 @@
               <a:buNone/>
             </a:pPr>
             <a:r>
-              <a:rPr lang="en-US" sz="890" dirty="0">
+              <a:rPr lang="en-US" sz="990" dirty="0">
                 <a:solidFill>
                   <a:srgbClr val="5F7183"/>
                 </a:solidFill>
@@ -8120,7 +8120,7 @@
               </a:rPr>
               <a:t>GIDAS của Đức ghi chi tiết từng vụ tai nạn: xe chạy bao nhiêu, va chạm ở góc nào, tầm nhìn bị che ra sao. NHTSA của Mỹ cũng có kho tương tự.</a:t>
             </a:r>
-            <a:endParaRPr lang="en-US" sz="890" dirty="0"/>
+            <a:endParaRPr lang="en-US" sz="990" dirty="0"/>
           </a:p>
           <a:p>
             <a:pPr indent="0" marL="0">
@@ -8130,7 +8130,7 @@
               <a:buNone/>
             </a:pPr>
             <a:r>
-              <a:rPr lang="en-US" sz="820" dirty="0">
+              <a:rPr lang="en-US" sz="910" dirty="0">
                 <a:solidFill>
                   <a:srgbClr val="5F7183"/>
                 </a:solidFill>
@@ -8140,7 +8140,7 @@
               </a:rPr>
               <a:t>德國的 GIDAS 詳細記錄每一起事故：車速多少、從哪個角度撞上、視線被什麼擋住。美國 NHTSA 也有類似的資料庫。</a:t>
             </a:r>
-            <a:endParaRPr lang="en-US" sz="890" dirty="0"/>
+            <a:endParaRPr lang="en-US" sz="990" dirty="0"/>
           </a:p>
         </p:txBody>
       </p:sp>
@@ -8152,8 +8152,8 @@
         </p:nvSpPr>
         <p:spPr>
           <a:xfrm>
-            <a:off x="1681812" y="2806268"/>
-            <a:ext cx="5780375" cy="441647"/>
+            <a:off x="1341758" y="3106840"/>
+            <a:ext cx="6460485" cy="493610"/>
           </a:xfrm>
           <a:prstGeom prst="roundRect">
             <a:avLst>
@@ -8179,8 +8179,8 @@
         </p:nvSpPr>
         <p:spPr>
           <a:xfrm>
-            <a:off x="1811708" y="2858226"/>
-            <a:ext cx="5520583" cy="350719"/>
+            <a:off x="1486937" y="3164912"/>
+            <a:ext cx="6170126" cy="391984"/>
           </a:xfrm>
           <a:prstGeom prst="rect">
             <a:avLst/>
@@ -8199,7 +8199,7 @@
               <a:buNone/>
             </a:pPr>
             <a:r>
-              <a:rPr lang="en-US" sz="890" b="1" dirty="0">
+              <a:rPr lang="en-US" sz="990" b="1" dirty="0">
                 <a:solidFill>
                   <a:srgbClr val="7A4E00"/>
                 </a:solidFill>
@@ -8209,7 +8209,7 @@
               </a:rPr>
               <a:t>Điểm mạnh: mỗi kịch bản đều từng làm ai đó bị thương — không phải do ai ngồi tưởng tượng ra.</a:t>
             </a:r>
-            <a:endParaRPr lang="en-US" sz="890" dirty="0"/>
+            <a:endParaRPr lang="en-US" sz="990" dirty="0"/>
           </a:p>
           <a:p>
             <a:pPr indent="0" marL="0">
@@ -8219,7 +8219,7 @@
               <a:buNone/>
             </a:pPr>
             <a:r>
-              <a:rPr lang="en-US" sz="820" dirty="0">
+              <a:rPr lang="en-US" sz="910" dirty="0">
                 <a:solidFill>
                   <a:srgbClr val="7A4E00"/>
                 </a:solidFill>
@@ -8229,7 +8229,7 @@
               </a:rPr>
               <a:t>這個來源的份量在於：每一個場景都真的傷過人——不是誰坐在辦公室想出來的。</a:t>
             </a:r>
-            <a:endParaRPr lang="en-US" sz="890" dirty="0"/>
+            <a:endParaRPr lang="en-US" sz="990" dirty="0"/>
           </a:p>
         </p:txBody>
       </p:sp>
@@ -8249,8 +8249,8 @@
         </p:blipFill>
         <p:spPr>
           <a:xfrm>
-            <a:off x="6663327" y="3338842"/>
-            <a:ext cx="779376" cy="172200"/>
+            <a:off x="7882128" y="109728"/>
+            <a:ext cx="1097280" cy="242439"/>
           </a:xfrm>
           <a:prstGeom prst="rect">
             <a:avLst/>
@@ -8265,8 +8265,8 @@
         </p:nvSpPr>
         <p:spPr>
           <a:xfrm>
-            <a:off x="1402536" y="3390800"/>
-            <a:ext cx="584532" cy="181855"/>
+            <a:off x="1029622" y="101626"/>
+            <a:ext cx="653307" cy="203251"/>
           </a:xfrm>
           <a:prstGeom prst="rect">
             <a:avLst/>
@@ -8282,7 +8282,7 @@
               <a:buNone/>
             </a:pPr>
             <a:r>
-              <a:rPr lang="en-US" sz="640" dirty="0">
+              <a:rPr lang="en-US" sz="710" dirty="0">
                 <a:solidFill>
                   <a:srgbClr val="5F7183"/>
                 </a:solidFill>
@@ -8292,7 +8292,7 @@
               </a:rPr>
               <a:t>12 / 16</a:t>
             </a:r>
-            <a:endParaRPr lang="en-US" sz="640" dirty="0"/>
+            <a:endParaRPr lang="en-US" sz="710" dirty="0"/>
           </a:p>
         </p:txBody>
       </p:sp>
@@ -8304,8 +8304,8 @@
         </p:nvSpPr>
         <p:spPr>
           <a:xfrm>
-            <a:off x="2006553" y="3390800"/>
-            <a:ext cx="1428857" cy="181855"/>
+            <a:off x="1704706" y="101626"/>
+            <a:ext cx="1596974" cy="203251"/>
           </a:xfrm>
           <a:prstGeom prst="rect">
             <a:avLst/>
@@ -8321,7 +8321,7 @@
               <a:buNone/>
             </a:pPr>
             <a:r>
-              <a:rPr lang="en-US" sz="640" dirty="0">
+              <a:rPr lang="en-US" sz="710" dirty="0">
                 <a:solidFill>
                   <a:srgbClr val="5F7183"/>
                 </a:solidFill>
@@ -8331,7 +8331,7 @@
               </a:rPr>
               <a:t>Tiết 2 · 第 2 節</a:t>
             </a:r>
-            <a:endParaRPr lang="en-US" sz="640" dirty="0"/>
+            <a:endParaRPr lang="en-US" sz="710" dirty="0"/>
           </a:p>
         </p:txBody>
       </p:sp>
@@ -8354,8 +8354,8 @@
       </p:nvGrpSpPr>
       <p:grpSpPr>
         <a:xfrm>
-          <a:off x="0" y="0"/>
-          <a:ext cx="0" cy="0"/>
+          <a:off x="942514" y="0"/>
+          <a:ext cx="1" cy="1"/>
           <a:chOff x="0" y="0"/>
           <a:chExt cx="0" cy="0"/>
         </a:xfrm>
@@ -8368,8 +8368,8 @@
         </p:nvSpPr>
         <p:spPr>
           <a:xfrm>
-            <a:off x="1681812" y="325253"/>
-            <a:ext cx="5780375" cy="194844"/>
+            <a:off x="1341758" y="333913"/>
+            <a:ext cx="6460485" cy="217769"/>
           </a:xfrm>
           <a:prstGeom prst="rect">
             <a:avLst/>
@@ -8385,7 +8385,7 @@
               <a:buNone/>
             </a:pPr>
             <a:r>
-              <a:rPr lang="en-US" sz="890" b="1" dirty="0">
+              <a:rPr lang="en-US" sz="990" b="1" dirty="0">
                 <a:solidFill>
                   <a:srgbClr val="007F72"/>
                 </a:solidFill>
@@ -8395,7 +8395,7 @@
               </a:rPr>
               <a:t>Nguồn 3 / 3 · 來源之三</a:t>
             </a:r>
-            <a:endParaRPr lang="en-US" sz="890" dirty="0"/>
+            <a:endParaRPr lang="en-US" sz="990" dirty="0"/>
           </a:p>
         </p:txBody>
       </p:sp>
@@ -8407,8 +8407,8 @@
         </p:nvSpPr>
         <p:spPr>
           <a:xfrm>
-            <a:off x="1681812" y="809116"/>
-            <a:ext cx="1753597" cy="1786071"/>
+            <a:off x="1341758" y="874706"/>
+            <a:ext cx="1959922" cy="1996217"/>
           </a:xfrm>
           <a:prstGeom prst="roundRect">
             <a:avLst>
@@ -8434,8 +8434,8 @@
         </p:nvSpPr>
         <p:spPr>
           <a:xfrm>
-            <a:off x="2087088" y="1230629"/>
-            <a:ext cx="943046" cy="943046"/>
+            <a:off x="1794718" y="1345814"/>
+            <a:ext cx="1054003" cy="1054003"/>
           </a:xfrm>
           <a:prstGeom prst="ellipse">
             <a:avLst/>
@@ -8456,8 +8456,8 @@
         </p:nvSpPr>
         <p:spPr>
           <a:xfrm>
-            <a:off x="2153101" y="1664430"/>
-            <a:ext cx="811019" cy="75444"/>
+            <a:off x="1868497" y="1830655"/>
+            <a:ext cx="906443" cy="84320"/>
           </a:xfrm>
           <a:prstGeom prst="rect">
             <a:avLst/>
@@ -8476,8 +8476,8 @@
         </p:nvSpPr>
         <p:spPr>
           <a:xfrm>
-            <a:off x="2520889" y="1702151"/>
-            <a:ext cx="75444" cy="405510"/>
+            <a:off x="2279559" y="1872815"/>
+            <a:ext cx="84320" cy="453221"/>
           </a:xfrm>
           <a:prstGeom prst="rect">
             <a:avLst/>
@@ -8496,8 +8496,8 @@
         </p:nvSpPr>
         <p:spPr>
           <a:xfrm>
-            <a:off x="2464306" y="1607847"/>
-            <a:ext cx="188609" cy="188609"/>
+            <a:off x="2216318" y="1767414"/>
+            <a:ext cx="210801" cy="210801"/>
           </a:xfrm>
           <a:prstGeom prst="ellipse">
             <a:avLst/>
@@ -8516,8 +8516,8 @@
         </p:nvSpPr>
         <p:spPr>
           <a:xfrm>
-            <a:off x="2803803" y="1315503"/>
-            <a:ext cx="282914" cy="282914"/>
+            <a:off x="2595759" y="1440673"/>
+            <a:ext cx="316201" cy="316201"/>
           </a:xfrm>
           <a:prstGeom prst="ellipse">
             <a:avLst/>
@@ -8536,8 +8536,8 @@
         </p:nvSpPr>
         <p:spPr>
           <a:xfrm>
-            <a:off x="2803803" y="1315503"/>
-            <a:ext cx="282914" cy="282914"/>
+            <a:off x="2595759" y="1440673"/>
+            <a:ext cx="316201" cy="316201"/>
           </a:xfrm>
           <a:prstGeom prst="rect">
             <a:avLst/>
@@ -8553,7 +8553,7 @@
               <a:buNone/>
             </a:pPr>
             <a:r>
-              <a:rPr lang="en-US" sz="710" b="1" dirty="0">
+              <a:rPr lang="en-US" sz="790" b="1" dirty="0">
                 <a:solidFill>
                   <a:srgbClr val="FFFFFF"/>
                 </a:solidFill>
@@ -8563,7 +8563,7 @@
               </a:rPr>
               <a:t>!</a:t>
             </a:r>
-            <a:endParaRPr lang="en-US" sz="710" dirty="0"/>
+            <a:endParaRPr lang="en-US" sz="790" dirty="0"/>
           </a:p>
         </p:txBody>
       </p:sp>
@@ -8575,8 +8575,8 @@
         </p:nvSpPr>
         <p:spPr>
           <a:xfrm>
-            <a:off x="3760150" y="963355"/>
-            <a:ext cx="3702038" cy="714266"/>
+            <a:off x="3664629" y="1047093"/>
+            <a:ext cx="4137614" cy="798305"/>
           </a:xfrm>
           <a:prstGeom prst="rect">
             <a:avLst/>
@@ -8595,7 +8595,7 @@
               <a:buNone/>
             </a:pPr>
             <a:r>
-              <a:rPr lang="en-US" sz="1630" b="1" dirty="0">
+              <a:rPr lang="en-US" sz="1830" b="1" dirty="0">
                 <a:solidFill>
                   <a:srgbClr val="0B1F3A"/>
                 </a:solidFill>
@@ -8605,7 +8605,7 @@
               </a:rPr>
               <a:t>Từ đường thật: mỗi lần tài xế an toàn can thiệp là một kịch bản mới</a:t>
             </a:r>
-            <a:endParaRPr lang="en-US" sz="1630" dirty="0"/>
+            <a:endParaRPr lang="en-US" sz="1830" dirty="0"/>
           </a:p>
           <a:p>
             <a:pPr indent="0" marL="0">
@@ -8615,7 +8615,7 @@
               <a:buNone/>
             </a:pPr>
             <a:r>
-              <a:rPr lang="en-US" sz="990" dirty="0">
+              <a:rPr lang="en-US" sz="1110" dirty="0">
                 <a:solidFill>
                   <a:srgbClr val="007F72"/>
                 </a:solidFill>
@@ -8625,7 +8625,7 @@
               </a:rPr>
               <a:t>來自實際道路：安全員每介入一次，就多一個場景</a:t>
             </a:r>
-            <a:endParaRPr lang="en-US" sz="1630" dirty="0"/>
+            <a:endParaRPr lang="en-US" sz="1830" dirty="0"/>
           </a:p>
         </p:txBody>
       </p:sp>
@@ -8637,8 +8637,8 @@
         </p:nvSpPr>
         <p:spPr>
           <a:xfrm>
-            <a:off x="3760150" y="1742570"/>
-            <a:ext cx="3702038" cy="763326"/>
+            <a:off x="3664629" y="1917989"/>
+            <a:ext cx="4137614" cy="853137"/>
           </a:xfrm>
           <a:prstGeom prst="rect">
             <a:avLst/>
@@ -8657,7 +8657,7 @@
               <a:buNone/>
             </a:pPr>
             <a:r>
-              <a:rPr lang="en-US" sz="890" dirty="0">
+              <a:rPr lang="en-US" sz="990" dirty="0">
                 <a:solidFill>
                   <a:srgbClr val="5F7183"/>
                 </a:solidFill>
@@ -8667,7 +8667,7 @@
               </a:rPr>
               <a:t>Xe đang chạy thử, tài xế an toàn vừa chạm vô lăng — hệ thống tự động cắt đoạn đó ra, dựng thành kịch bản, lưu vào kho. Mỗi lần phanh gấp cũng vậy.</a:t>
             </a:r>
-            <a:endParaRPr lang="en-US" sz="890" dirty="0"/>
+            <a:endParaRPr lang="en-US" sz="990" dirty="0"/>
           </a:p>
           <a:p>
             <a:pPr indent="0" marL="0">
@@ -8677,7 +8677,7 @@
               <a:buNone/>
             </a:pPr>
             <a:r>
-              <a:rPr lang="en-US" sz="820" dirty="0">
+              <a:rPr lang="en-US" sz="910" dirty="0">
                 <a:solidFill>
                   <a:srgbClr val="5F7183"/>
                 </a:solidFill>
@@ -8687,7 +8687,7 @@
               </a:rPr>
               <a:t>測試車在路上跑，安全員手一碰方向盤——系統自動把那一段切出來，做成場景，存進資料庫。每一次急煞也一樣。</a:t>
             </a:r>
-            <a:endParaRPr lang="en-US" sz="890" dirty="0"/>
+            <a:endParaRPr lang="en-US" sz="990" dirty="0"/>
           </a:p>
         </p:txBody>
       </p:sp>
@@ -8699,8 +8699,8 @@
         </p:nvSpPr>
         <p:spPr>
           <a:xfrm>
-            <a:off x="1681812" y="2806268"/>
-            <a:ext cx="5780375" cy="441647"/>
+            <a:off x="1341758" y="3106840"/>
+            <a:ext cx="6460485" cy="493610"/>
           </a:xfrm>
           <a:prstGeom prst="roundRect">
             <a:avLst>
@@ -8726,8 +8726,8 @@
         </p:nvSpPr>
         <p:spPr>
           <a:xfrm>
-            <a:off x="1811708" y="2858226"/>
-            <a:ext cx="5520583" cy="350719"/>
+            <a:off x="1486937" y="3164912"/>
+            <a:ext cx="6170126" cy="391984"/>
           </a:xfrm>
           <a:prstGeom prst="rect">
             <a:avLst/>
@@ -8746,7 +8746,7 @@
               <a:buNone/>
             </a:pPr>
             <a:r>
-              <a:rPr lang="en-US" sz="890" b="1" dirty="0">
+              <a:rPr lang="en-US" sz="990" b="1" dirty="0">
                 <a:solidFill>
                   <a:srgbClr val="7A4E00"/>
                 </a:solidFill>
@@ -8756,7 +8756,7 @@
               </a:rPr>
               <a:t>Kho kịch bản của Waymo và Cruise tính bằng hàng chục nghìn, và mỗi ngày vẫn dài thêm.</a:t>
             </a:r>
-            <a:endParaRPr lang="en-US" sz="890" dirty="0"/>
+            <a:endParaRPr lang="en-US" sz="990" dirty="0"/>
           </a:p>
           <a:p>
             <a:pPr indent="0" marL="0">
@@ -8766,7 +8766,7 @@
               <a:buNone/>
             </a:pPr>
             <a:r>
-              <a:rPr lang="en-US" sz="820" dirty="0">
+              <a:rPr lang="en-US" sz="910" dirty="0">
                 <a:solidFill>
                   <a:srgbClr val="7A4E00"/>
                 </a:solidFill>
@@ -8776,7 +8776,7 @@
               </a:rPr>
               <a:t>Waymo 和 Cruise 的場景庫以數萬計，而且每天還在增加。</a:t>
             </a:r>
-            <a:endParaRPr lang="en-US" sz="890" dirty="0"/>
+            <a:endParaRPr lang="en-US" sz="990" dirty="0"/>
           </a:p>
         </p:txBody>
       </p:sp>
@@ -8796,8 +8796,8 @@
         </p:blipFill>
         <p:spPr>
           <a:xfrm>
-            <a:off x="6663327" y="3338842"/>
-            <a:ext cx="779376" cy="172200"/>
+            <a:off x="7882128" y="109728"/>
+            <a:ext cx="1097280" cy="242439"/>
           </a:xfrm>
           <a:prstGeom prst="rect">
             <a:avLst/>
@@ -8812,8 +8812,8 @@
         </p:nvSpPr>
         <p:spPr>
           <a:xfrm>
-            <a:off x="1402536" y="3390800"/>
-            <a:ext cx="584532" cy="181855"/>
+            <a:off x="1029622" y="101626"/>
+            <a:ext cx="653307" cy="203251"/>
           </a:xfrm>
           <a:prstGeom prst="rect">
             <a:avLst/>
@@ -8829,7 +8829,7 @@
               <a:buNone/>
             </a:pPr>
             <a:r>
-              <a:rPr lang="en-US" sz="640" dirty="0">
+              <a:rPr lang="en-US" sz="710" dirty="0">
                 <a:solidFill>
                   <a:srgbClr val="5F7183"/>
                 </a:solidFill>
@@ -8839,7 +8839,7 @@
               </a:rPr>
               <a:t>13 / 16</a:t>
             </a:r>
-            <a:endParaRPr lang="en-US" sz="640" dirty="0"/>
+            <a:endParaRPr lang="en-US" sz="710" dirty="0"/>
           </a:p>
         </p:txBody>
       </p:sp>
@@ -8851,8 +8851,8 @@
         </p:nvSpPr>
         <p:spPr>
           <a:xfrm>
-            <a:off x="2006553" y="3390800"/>
-            <a:ext cx="1428857" cy="181855"/>
+            <a:off x="1704706" y="101626"/>
+            <a:ext cx="1596974" cy="203251"/>
           </a:xfrm>
           <a:prstGeom prst="rect">
             <a:avLst/>
@@ -8868,7 +8868,7 @@
               <a:buNone/>
             </a:pPr>
             <a:r>
-              <a:rPr lang="en-US" sz="640" dirty="0">
+              <a:rPr lang="en-US" sz="710" dirty="0">
                 <a:solidFill>
                   <a:srgbClr val="5F7183"/>
                 </a:solidFill>
@@ -8878,7 +8878,7 @@
               </a:rPr>
               <a:t>Tiết 2 · 第 2 節</a:t>
             </a:r>
-            <a:endParaRPr lang="en-US" sz="640" dirty="0"/>
+            <a:endParaRPr lang="en-US" sz="710" dirty="0"/>
           </a:p>
         </p:txBody>
       </p:sp>
@@ -8901,8 +8901,8 @@
       </p:nvGrpSpPr>
       <p:grpSpPr>
         <a:xfrm>
-          <a:off x="0" y="0"/>
-          <a:ext cx="0" cy="0"/>
+          <a:off x="927820" y="0"/>
+          <a:ext cx="1" cy="1"/>
           <a:chOff x="0" y="0"/>
           <a:chExt cx="0" cy="0"/>
         </a:xfrm>
@@ -8915,8 +8915,8 @@
         </p:nvSpPr>
         <p:spPr>
           <a:xfrm>
-            <a:off x="1681812" y="234326"/>
-            <a:ext cx="5780375" cy="597522"/>
+            <a:off x="1328680" y="233228"/>
+            <a:ext cx="6486641" cy="670529"/>
           </a:xfrm>
           <a:prstGeom prst="rect">
             <a:avLst/>
@@ -8935,7 +8935,7 @@
               <a:buNone/>
             </a:pPr>
             <a:r>
-              <a:rPr lang="en-US" sz="1560" b="1" dirty="0">
+              <a:rPr lang="en-US" sz="1750" b="1" dirty="0">
                 <a:solidFill>
                   <a:srgbClr val="0B1F3A"/>
                 </a:solidFill>
@@ -8945,7 +8945,7 @@
               </a:rPr>
               <a:t>Ba nguồn đó đều không có cái các bạn gặp hằng ngày</a:t>
             </a:r>
-            <a:endParaRPr lang="en-US" sz="1560" dirty="0"/>
+            <a:endParaRPr lang="en-US" sz="1750" dirty="0"/>
           </a:p>
           <a:p>
             <a:pPr indent="0" marL="0">
@@ -8955,7 +8955,7 @@
               <a:buNone/>
             </a:pPr>
             <a:r>
-              <a:rPr lang="en-US" sz="960" dirty="0">
+              <a:rPr lang="en-US" sz="1080" dirty="0">
                 <a:solidFill>
                   <a:srgbClr val="5F7183"/>
                 </a:solidFill>
@@ -8965,7 +8965,7 @@
               </a:rPr>
               <a:t>這三個來源，都沒有各位每天遇到的那件事</a:t>
             </a:r>
-            <a:endParaRPr lang="en-US" sz="1560" dirty="0"/>
+            <a:endParaRPr lang="en-US" sz="1750" dirty="0"/>
           </a:p>
         </p:txBody>
       </p:sp>
@@ -8977,8 +8977,8 @@
         </p:nvSpPr>
         <p:spPr>
           <a:xfrm>
-            <a:off x="1681812" y="961744"/>
-            <a:ext cx="2532973" cy="1597722"/>
+            <a:off x="1328680" y="1049524"/>
+            <a:ext cx="2842461" cy="1792937"/>
           </a:xfrm>
           <a:prstGeom prst="roundRect">
             <a:avLst>
@@ -8999,8 +8999,8 @@
         </p:nvSpPr>
         <p:spPr>
           <a:xfrm>
-            <a:off x="1798719" y="1052671"/>
-            <a:ext cx="2299161" cy="233813"/>
+            <a:off x="1459870" y="1151561"/>
+            <a:ext cx="2580080" cy="262381"/>
           </a:xfrm>
           <a:prstGeom prst="rect">
             <a:avLst/>
@@ -9019,7 +9019,7 @@
               <a:buNone/>
             </a:pPr>
             <a:r>
-              <a:rPr lang="en-US" sz="750" b="1" dirty="0">
+              <a:rPr lang="en-US" sz="840" b="1" dirty="0">
                 <a:solidFill>
                   <a:srgbClr val="00A896"/>
                 </a:solidFill>
@@ -9029,7 +9029,7 @@
               </a:rPr>
               <a:t>Kho kịch bản có sẵn cho bạn</a:t>
             </a:r>
-            <a:endParaRPr lang="en-US" sz="750" dirty="0"/>
+            <a:endParaRPr lang="en-US" sz="840" dirty="0"/>
           </a:p>
           <a:p>
             <a:pPr indent="0" marL="0">
@@ -9039,7 +9039,7 @@
               <a:buNone/>
             </a:pPr>
             <a:r>
-              <a:rPr lang="en-US" sz="670" dirty="0">
+              <a:rPr lang="en-US" sz="760" dirty="0">
                 <a:solidFill>
                   <a:srgbClr val="00A896"/>
                 </a:solidFill>
@@ -9049,7 +9049,7 @@
               </a:rPr>
               <a:t>現成的場景庫給你的</a:t>
             </a:r>
-            <a:endParaRPr lang="en-US" sz="750" dirty="0"/>
+            <a:endParaRPr lang="en-US" sz="840" dirty="0"/>
           </a:p>
         </p:txBody>
       </p:sp>
@@ -9061,8 +9061,8 @@
         </p:nvSpPr>
         <p:spPr>
           <a:xfrm>
-            <a:off x="1798719" y="1338442"/>
-            <a:ext cx="2299161" cy="402678"/>
+            <a:off x="1459870" y="1472249"/>
+            <a:ext cx="2580080" cy="451878"/>
           </a:xfrm>
           <a:prstGeom prst="rect">
             <a:avLst/>
@@ -9078,7 +9078,7 @@
               <a:buNone/>
             </a:pPr>
             <a:r>
-              <a:rPr lang="en-US" sz="1920" b="1" dirty="0">
+              <a:rPr lang="en-US" sz="2150" b="1" dirty="0">
                 <a:solidFill>
                   <a:srgbClr val="FFFFFF"/>
                 </a:solidFill>
@@ -9088,7 +9088,7 @@
               </a:rPr>
               <a:t>10 000+</a:t>
             </a:r>
-            <a:endParaRPr lang="en-US" sz="1920" dirty="0"/>
+            <a:endParaRPr lang="en-US" sz="2150" dirty="0"/>
           </a:p>
         </p:txBody>
       </p:sp>
@@ -9100,8 +9100,8 @@
         </p:nvSpPr>
         <p:spPr>
           <a:xfrm>
-            <a:off x="1798719" y="1767099"/>
-            <a:ext cx="2299161" cy="285771"/>
+            <a:off x="1459870" y="1953281"/>
+            <a:ext cx="2580080" cy="320688"/>
           </a:xfrm>
           <a:prstGeom prst="rect">
             <a:avLst/>
@@ -9120,7 +9120,7 @@
               <a:buNone/>
             </a:pPr>
             <a:r>
-              <a:rPr lang="en-US" sz="820" b="1" dirty="0">
+              <a:rPr lang="en-US" sz="920" b="1" dirty="0">
                 <a:solidFill>
                   <a:srgbClr val="AFC3D4"/>
                 </a:solidFill>
@@ -9130,7 +9130,7 @@
               </a:rPr>
               <a:t>kịch bản, phần lớn từ Âu Mỹ</a:t>
             </a:r>
-            <a:endParaRPr lang="en-US" sz="820" dirty="0"/>
+            <a:endParaRPr lang="en-US" sz="920" dirty="0"/>
           </a:p>
           <a:p>
             <a:pPr indent="0" marL="0">
@@ -9140,7 +9140,7 @@
               <a:buNone/>
             </a:pPr>
             <a:r>
-              <a:rPr lang="en-US" sz="750" dirty="0">
+              <a:rPr lang="en-US" sz="840" dirty="0">
                 <a:solidFill>
                   <a:srgbClr val="8AA0B4"/>
                 </a:solidFill>
@@ -9150,7 +9150,7 @@
               </a:rPr>
               <a:t>個場景，大部分來自歐美</a:t>
             </a:r>
-            <a:endParaRPr lang="en-US" sz="820" dirty="0"/>
+            <a:endParaRPr lang="en-US" sz="920" dirty="0"/>
           </a:p>
         </p:txBody>
       </p:sp>
@@ -9162,8 +9162,8 @@
         </p:nvSpPr>
         <p:spPr>
           <a:xfrm>
-            <a:off x="1798719" y="2169777"/>
-            <a:ext cx="2299161" cy="285771"/>
+            <a:off x="1459870" y="2405159"/>
+            <a:ext cx="2580080" cy="320688"/>
           </a:xfrm>
           <a:prstGeom prst="rect">
             <a:avLst/>
@@ -9182,7 +9182,7 @@
               <a:buNone/>
             </a:pPr>
             <a:r>
-              <a:rPr lang="en-US" sz="710" b="1" dirty="0">
+              <a:rPr lang="en-US" sz="800" b="1" dirty="0">
                 <a:solidFill>
                   <a:srgbClr val="7E93A6"/>
                 </a:solidFill>
@@ -9192,7 +9192,7 @@
               </a:rPr>
               <a:t>Đầy đủ, được kiểm chứng, dùng được ngay.</a:t>
             </a:r>
-            <a:endParaRPr lang="en-US" sz="710" dirty="0"/>
+            <a:endParaRPr lang="en-US" sz="800" dirty="0"/>
           </a:p>
           <a:p>
             <a:pPr indent="0" marL="0">
@@ -9202,7 +9202,7 @@
               <a:buNone/>
             </a:pPr>
             <a:r>
-              <a:rPr lang="en-US" sz="640" dirty="0">
+              <a:rPr lang="en-US" sz="720" dirty="0">
                 <a:solidFill>
                   <a:srgbClr val="7E93A6"/>
                 </a:solidFill>
@@ -9212,7 +9212,7 @@
               </a:rPr>
               <a:t>完整、經過驗證、拿來就能用。</a:t>
             </a:r>
-            <a:endParaRPr lang="en-US" sz="710" dirty="0"/>
+            <a:endParaRPr lang="en-US" sz="800" dirty="0"/>
           </a:p>
         </p:txBody>
       </p:sp>
@@ -9224,8 +9224,8 @@
         </p:nvSpPr>
         <p:spPr>
           <a:xfrm>
-            <a:off x="4299218" y="1656688"/>
-            <a:ext cx="545564" cy="207834"/>
+            <a:off x="4265889" y="1829378"/>
+            <a:ext cx="612222" cy="233228"/>
           </a:xfrm>
           <a:prstGeom prst="rightArrow">
             <a:avLst/>
@@ -9244,8 +9244,8 @@
         </p:nvSpPr>
         <p:spPr>
           <a:xfrm flipH="1">
-            <a:off x="4429114" y="1617719"/>
-            <a:ext cx="285771" cy="285771"/>
+            <a:off x="4411656" y="1785648"/>
+            <a:ext cx="320688" cy="320688"/>
           </a:xfrm>
           <a:prstGeom prst="line">
             <a:avLst/>
@@ -9267,8 +9267,8 @@
         </p:nvSpPr>
         <p:spPr>
           <a:xfrm>
-            <a:off x="4429114" y="1617719"/>
-            <a:ext cx="285771" cy="285771"/>
+            <a:off x="4411656" y="1785648"/>
+            <a:ext cx="320688" cy="320688"/>
           </a:xfrm>
           <a:prstGeom prst="line">
             <a:avLst/>
@@ -9290,8 +9290,8 @@
         </p:nvSpPr>
         <p:spPr>
           <a:xfrm>
-            <a:off x="4929214" y="961744"/>
-            <a:ext cx="2532973" cy="1597722"/>
+            <a:off x="4972860" y="1049524"/>
+            <a:ext cx="2842461" cy="1792937"/>
           </a:xfrm>
           <a:prstGeom prst="roundRect">
             <a:avLst>
@@ -9317,8 +9317,8 @@
         </p:nvSpPr>
         <p:spPr>
           <a:xfrm>
-            <a:off x="5046121" y="1052671"/>
-            <a:ext cx="2299161" cy="233813"/>
+            <a:off x="5104050" y="1151561"/>
+            <a:ext cx="2580080" cy="262381"/>
           </a:xfrm>
           <a:prstGeom prst="rect">
             <a:avLst/>
@@ -9337,7 +9337,7 @@
               <a:buNone/>
             </a:pPr>
             <a:r>
-              <a:rPr lang="en-US" sz="750" b="1" dirty="0">
+              <a:rPr lang="en-US" sz="840" b="1" dirty="0">
                 <a:solidFill>
                   <a:srgbClr val="D9463E"/>
                 </a:solidFill>
@@ -9347,7 +9347,7 @@
               </a:rPr>
               <a:t>Nhưng thứ bạn cần là…</a:t>
             </a:r>
-            <a:endParaRPr lang="en-US" sz="750" dirty="0"/>
+            <a:endParaRPr lang="en-US" sz="840" dirty="0"/>
           </a:p>
           <a:p>
             <a:pPr indent="0" marL="0">
@@ -9357,7 +9357,7 @@
               <a:buNone/>
             </a:pPr>
             <a:r>
-              <a:rPr lang="en-US" sz="670" dirty="0">
+              <a:rPr lang="en-US" sz="760" dirty="0">
                 <a:solidFill>
                   <a:srgbClr val="D9463E"/>
                 </a:solidFill>
@@ -9367,7 +9367,7 @@
               </a:rPr>
               <a:t>但你需要的是……</a:t>
             </a:r>
-            <a:endParaRPr lang="en-US" sz="750" dirty="0"/>
+            <a:endParaRPr lang="en-US" sz="840" dirty="0"/>
           </a:p>
         </p:txBody>
       </p:sp>
@@ -9379,8 +9379,8 @@
         </p:nvSpPr>
         <p:spPr>
           <a:xfrm>
-            <a:off x="5353000" y="1687116"/>
-            <a:ext cx="263040" cy="120998"/>
+            <a:off x="5448425" y="1863525"/>
+            <a:ext cx="295179" cy="135782"/>
           </a:xfrm>
           <a:prstGeom prst="roundRect">
             <a:avLst>
@@ -9401,8 +9401,8 @@
         </p:nvSpPr>
         <p:spPr>
           <a:xfrm>
-            <a:off x="5452955" y="1711315"/>
-            <a:ext cx="89433" cy="72599"/>
+            <a:off x="5560593" y="1890681"/>
+            <a:ext cx="100361" cy="81470"/>
           </a:xfrm>
           <a:prstGeom prst="roundRect">
             <a:avLst>
@@ -9423,8 +9423,8 @@
         </p:nvSpPr>
         <p:spPr>
           <a:xfrm>
-            <a:off x="5755382" y="1807120"/>
-            <a:ext cx="61376" cy="50659"/>
+            <a:off x="5899971" y="1998191"/>
+            <a:ext cx="68875" cy="56849"/>
           </a:xfrm>
           <a:prstGeom prst="roundRect">
             <a:avLst>
@@ -9445,8 +9445,8 @@
         </p:nvSpPr>
         <p:spPr>
           <a:xfrm>
-            <a:off x="5668341" y="1932879"/>
-            <a:ext cx="61376" cy="50659"/>
+            <a:off x="5802296" y="2139315"/>
+            <a:ext cx="68875" cy="56849"/>
           </a:xfrm>
           <a:prstGeom prst="roundRect">
             <a:avLst>
@@ -9467,8 +9467,8 @@
         </p:nvSpPr>
         <p:spPr>
           <a:xfrm>
-            <a:off x="5523824" y="2002209"/>
-            <a:ext cx="61376" cy="50659"/>
+            <a:off x="5640121" y="2217117"/>
+            <a:ext cx="68875" cy="56849"/>
           </a:xfrm>
           <a:prstGeom prst="roundRect">
             <a:avLst>
@@ -9489,8 +9489,8 @@
         </p:nvSpPr>
         <p:spPr>
           <a:xfrm>
-            <a:off x="5360552" y="1996534"/>
-            <a:ext cx="61376" cy="50659"/>
+            <a:off x="5456900" y="2210748"/>
+            <a:ext cx="68875" cy="56849"/>
           </a:xfrm>
           <a:prstGeom prst="roundRect">
             <a:avLst>
@@ -9511,8 +9511,8 @@
         </p:nvSpPr>
         <p:spPr>
           <a:xfrm>
-            <a:off x="5222274" y="1917374"/>
-            <a:ext cx="61376" cy="50659"/>
+            <a:off x="5301727" y="2121916"/>
+            <a:ext cx="68875" cy="56849"/>
           </a:xfrm>
           <a:prstGeom prst="roundRect">
             <a:avLst>
@@ -9533,8 +9533,8 @@
         </p:nvSpPr>
         <p:spPr>
           <a:xfrm>
-            <a:off x="5146042" y="1785940"/>
-            <a:ext cx="61376" cy="50659"/>
+            <a:off x="5216181" y="1974424"/>
+            <a:ext cx="68875" cy="56849"/>
           </a:xfrm>
           <a:prstGeom prst="roundRect">
             <a:avLst>
@@ -9555,8 +9555,8 @@
         </p:nvSpPr>
         <p:spPr>
           <a:xfrm>
-            <a:off x="5152282" y="1637450"/>
-            <a:ext cx="61376" cy="50659"/>
+            <a:off x="5223184" y="1807791"/>
+            <a:ext cx="68875" cy="56849"/>
           </a:xfrm>
           <a:prstGeom prst="roundRect">
             <a:avLst>
@@ -9577,8 +9577,8 @@
         </p:nvSpPr>
         <p:spPr>
           <a:xfrm>
-            <a:off x="5239323" y="1511692"/>
-            <a:ext cx="61376" cy="50659"/>
+            <a:off x="5320858" y="1666666"/>
+            <a:ext cx="68875" cy="56849"/>
           </a:xfrm>
           <a:prstGeom prst="roundRect">
             <a:avLst>
@@ -9599,8 +9599,8 @@
         </p:nvSpPr>
         <p:spPr>
           <a:xfrm>
-            <a:off x="5383840" y="1442361"/>
-            <a:ext cx="61376" cy="50659"/>
+            <a:off x="5483034" y="1588865"/>
+            <a:ext cx="68875" cy="56849"/>
           </a:xfrm>
           <a:prstGeom prst="roundRect">
             <a:avLst>
@@ -9621,8 +9621,8 @@
         </p:nvSpPr>
         <p:spPr>
           <a:xfrm>
-            <a:off x="5547112" y="1448036"/>
-            <a:ext cx="61376" cy="50659"/>
+            <a:off x="5666254" y="1595233"/>
+            <a:ext cx="68875" cy="56849"/>
           </a:xfrm>
           <a:prstGeom prst="roundRect">
             <a:avLst>
@@ -9643,8 +9643,8 @@
         </p:nvSpPr>
         <p:spPr>
           <a:xfrm>
-            <a:off x="5685390" y="1527196"/>
-            <a:ext cx="61376" cy="50659"/>
+            <a:off x="5821428" y="1684066"/>
+            <a:ext cx="68875" cy="56849"/>
           </a:xfrm>
           <a:prstGeom prst="roundRect">
             <a:avLst>
@@ -9665,8 +9665,8 @@
         </p:nvSpPr>
         <p:spPr>
           <a:xfrm>
-            <a:off x="5761622" y="1658630"/>
-            <a:ext cx="61376" cy="50659"/>
+            <a:off x="5906974" y="1831558"/>
+            <a:ext cx="68875" cy="56849"/>
           </a:xfrm>
           <a:prstGeom prst="roundRect">
             <a:avLst>
@@ -9687,8 +9687,8 @@
         </p:nvSpPr>
         <p:spPr>
           <a:xfrm>
-            <a:off x="5851476" y="1364422"/>
-            <a:ext cx="1493805" cy="519584"/>
+            <a:off x="6007807" y="1501402"/>
+            <a:ext cx="1676323" cy="583069"/>
           </a:xfrm>
           <a:prstGeom prst="rect">
             <a:avLst/>
@@ -9707,7 +9707,7 @@
               <a:buNone/>
             </a:pPr>
             <a:r>
-              <a:rPr lang="en-US" sz="920" b="1" dirty="0">
+              <a:rPr lang="en-US" sz="1040" b="1" dirty="0">
                 <a:solidFill>
                   <a:srgbClr val="A32C25"/>
                 </a:solidFill>
@@ -9717,7 +9717,7 @@
               </a:rPr>
               <a:t>12 xe máy vây quanh</a:t>
             </a:r>
-            <a:endParaRPr lang="en-US" sz="920" dirty="0"/>
+            <a:endParaRPr lang="en-US" sz="1040" dirty="0"/>
           </a:p>
           <a:p>
             <a:pPr indent="0" marL="0">
@@ -9727,7 +9727,7 @@
               <a:buNone/>
             </a:pPr>
             <a:r>
-              <a:rPr lang="en-US" sz="780" dirty="0">
+              <a:rPr lang="en-US" sz="880" dirty="0">
                 <a:solidFill>
                   <a:srgbClr val="A32C25"/>
                 </a:solidFill>
@@ -9737,7 +9737,7 @@
               </a:rPr>
               <a:t>十二台機車圍著你</a:t>
             </a:r>
-            <a:endParaRPr lang="en-US" sz="920" dirty="0"/>
+            <a:endParaRPr lang="en-US" sz="1040" dirty="0"/>
           </a:p>
         </p:txBody>
       </p:sp>
@@ -9749,8 +9749,8 @@
         </p:nvSpPr>
         <p:spPr>
           <a:xfrm>
-            <a:off x="5046121" y="2169777"/>
-            <a:ext cx="2299161" cy="285771"/>
+            <a:off x="5104050" y="2405159"/>
+            <a:ext cx="2580080" cy="320688"/>
           </a:xfrm>
           <a:prstGeom prst="rect">
             <a:avLst/>
@@ -9769,7 +9769,7 @@
               <a:buNone/>
             </a:pPr>
             <a:r>
-              <a:rPr lang="en-US" sz="710" b="1" dirty="0">
+              <a:rPr lang="en-US" sz="800" b="1" dirty="0">
                 <a:solidFill>
                   <a:srgbClr val="A32C25"/>
                 </a:solidFill>
@@ -9779,7 +9779,7 @@
               </a:rPr>
               <a:t>Euro NCAP có kịch bản MỘT xe máy. Không nơi nào có kịch bản này.</a:t>
             </a:r>
-            <a:endParaRPr lang="en-US" sz="710" dirty="0"/>
+            <a:endParaRPr lang="en-US" sz="800" dirty="0"/>
           </a:p>
           <a:p>
             <a:pPr indent="0" marL="0">
@@ -9789,7 +9789,7 @@
               <a:buNone/>
             </a:pPr>
             <a:r>
-              <a:rPr lang="en-US" sz="640" dirty="0">
+              <a:rPr lang="en-US" sz="720" dirty="0">
                 <a:solidFill>
                   <a:srgbClr val="A32C25"/>
                 </a:solidFill>
@@ -9799,7 +9799,7 @@
               </a:rPr>
               <a:t>Euro NCAP 有「一台機車」的場景。這個場景哪裡都沒有。</a:t>
             </a:r>
-            <a:endParaRPr lang="en-US" sz="710" dirty="0"/>
+            <a:endParaRPr lang="en-US" sz="800" dirty="0"/>
           </a:p>
         </p:txBody>
       </p:sp>
@@ -9811,8 +9811,8 @@
         </p:nvSpPr>
         <p:spPr>
           <a:xfrm>
-            <a:off x="1681812" y="2806268"/>
-            <a:ext cx="5780375" cy="428657"/>
+            <a:off x="1328680" y="3119418"/>
+            <a:ext cx="6486641" cy="481032"/>
           </a:xfrm>
           <a:prstGeom prst="roundRect">
             <a:avLst>
@@ -9838,8 +9838,8 @@
         </p:nvSpPr>
         <p:spPr>
           <a:xfrm>
-            <a:off x="1811708" y="2851732"/>
-            <a:ext cx="5520583" cy="350719"/>
+            <a:off x="1474447" y="3170437"/>
+            <a:ext cx="6195106" cy="393571"/>
           </a:xfrm>
           <a:prstGeom prst="rect">
             <a:avLst/>
@@ -9858,7 +9858,7 @@
               <a:buNone/>
             </a:pPr>
             <a:r>
-              <a:rPr lang="en-US" sz="850" b="1" dirty="0">
+              <a:rPr lang="en-US" sz="960" b="1" dirty="0">
                 <a:solidFill>
                   <a:srgbClr val="7A4E00"/>
                 </a:solidFill>
@@ -9868,7 +9868,7 @@
               </a:rPr>
               <a:t>Đây không phải lời than — đây là chỗ trống, và là cơ hội cho đề tài cuối kỳ của các bạn.</a:t>
             </a:r>
-            <a:endParaRPr lang="en-US" sz="850" dirty="0"/>
+            <a:endParaRPr lang="en-US" sz="960" dirty="0"/>
           </a:p>
           <a:p>
             <a:pPr indent="0" marL="0">
@@ -9878,7 +9878,7 @@
               <a:buNone/>
             </a:pPr>
             <a:r>
-              <a:rPr lang="en-US" sz="780" dirty="0">
+              <a:rPr lang="en-US" sz="880" dirty="0">
                 <a:solidFill>
                   <a:srgbClr val="7A4E00"/>
                 </a:solidFill>
@@ -9888,7 +9888,7 @@
               </a:rPr>
               <a:t>這不是抱怨——這是一個空缺，也是各位期末專題的機會。</a:t>
             </a:r>
-            <a:endParaRPr lang="en-US" sz="850" dirty="0"/>
+            <a:endParaRPr lang="en-US" sz="960" dirty="0"/>
           </a:p>
         </p:txBody>
       </p:sp>
@@ -9908,8 +9908,8 @@
         </p:blipFill>
         <p:spPr>
           <a:xfrm>
-            <a:off x="6663327" y="3338842"/>
-            <a:ext cx="779376" cy="172200"/>
+            <a:off x="7882128" y="109728"/>
+            <a:ext cx="1097280" cy="242439"/>
           </a:xfrm>
           <a:prstGeom prst="rect">
             <a:avLst/>
@@ -9924,8 +9924,8 @@
         </p:nvSpPr>
         <p:spPr>
           <a:xfrm>
-            <a:off x="1402536" y="3390800"/>
-            <a:ext cx="584532" cy="181855"/>
+            <a:off x="1015280" y="102037"/>
+            <a:ext cx="655952" cy="204074"/>
           </a:xfrm>
           <a:prstGeom prst="rect">
             <a:avLst/>
@@ -9941,7 +9941,7 @@
               <a:buNone/>
             </a:pPr>
             <a:r>
-              <a:rPr lang="en-US" sz="640" dirty="0">
+              <a:rPr lang="en-US" sz="720" dirty="0">
                 <a:solidFill>
                   <a:srgbClr val="5F7183"/>
                 </a:solidFill>
@@ -9951,7 +9951,7 @@
               </a:rPr>
               <a:t>14 / 16</a:t>
             </a:r>
-            <a:endParaRPr lang="en-US" sz="640" dirty="0"/>
+            <a:endParaRPr lang="en-US" sz="720" dirty="0"/>
           </a:p>
         </p:txBody>
       </p:sp>
@@ -9963,8 +9963,8 @@
         </p:nvSpPr>
         <p:spPr>
           <a:xfrm>
-            <a:off x="2006553" y="3390800"/>
-            <a:ext cx="1428857" cy="181855"/>
+            <a:off x="1693098" y="102037"/>
+            <a:ext cx="1603439" cy="204074"/>
           </a:xfrm>
           <a:prstGeom prst="rect">
             <a:avLst/>
@@ -9980,7 +9980,7 @@
               <a:buNone/>
             </a:pPr>
             <a:r>
-              <a:rPr lang="en-US" sz="640" dirty="0">
+              <a:rPr lang="en-US" sz="720" dirty="0">
                 <a:solidFill>
                   <a:srgbClr val="5F7183"/>
                 </a:solidFill>
@@ -9990,7 +9990,7 @@
               </a:rPr>
               <a:t>Tiết 2 · 第 2 節</a:t>
             </a:r>
-            <a:endParaRPr lang="en-US" sz="640" dirty="0"/>
+            <a:endParaRPr lang="en-US" sz="720" dirty="0"/>
           </a:p>
         </p:txBody>
       </p:sp>
@@ -10020,8 +10020,8 @@
       </p:nvGrpSpPr>
       <p:grpSpPr>
         <a:xfrm>
-          <a:off x="0" y="0"/>
-          <a:ext cx="0" cy="0"/>
+          <a:off x="925172" y="0"/>
+          <a:ext cx="1" cy="1"/>
           <a:chOff x="0" y="0"/>
           <a:chExt cx="0" cy="0"/>
         </a:xfrm>
@@ -10034,8 +10034,8 @@
         </p:nvSpPr>
         <p:spPr>
           <a:xfrm>
-            <a:off x="6130753" y="-947729"/>
-            <a:ext cx="2987610" cy="2987610"/>
+            <a:off x="6322478" y="-1094048"/>
+            <a:ext cx="3355082" cy="3355082"/>
           </a:xfrm>
           <a:prstGeom prst="ellipse">
             <a:avLst/>
@@ -10059,8 +10059,8 @@
         </p:nvSpPr>
         <p:spPr>
           <a:xfrm>
-            <a:off x="7104973" y="1520297"/>
-            <a:ext cx="1688649" cy="1688649"/>
+            <a:off x="7416526" y="1677541"/>
+            <a:ext cx="1896351" cy="1896351"/>
           </a:xfrm>
           <a:prstGeom prst="ellipse">
             <a:avLst/>
@@ -10081,8 +10081,8 @@
         </p:nvSpPr>
         <p:spPr>
           <a:xfrm>
-            <a:off x="1681812" y="364222"/>
-            <a:ext cx="4806155" cy="194844"/>
+            <a:off x="1326323" y="379270"/>
+            <a:ext cx="5397306" cy="218810"/>
           </a:xfrm>
           <a:prstGeom prst="rect">
             <a:avLst/>
@@ -10098,7 +10098,7 @@
               <a:buNone/>
             </a:pPr>
             <a:r>
-              <a:rPr lang="en-US" sz="890" b="1" dirty="0">
+              <a:rPr lang="en-US" sz="1000" b="1" dirty="0">
                 <a:solidFill>
                   <a:srgbClr val="FFB020"/>
                 </a:solidFill>
@@ -10108,7 +10108,7 @@
               </a:rPr>
               <a:t>Ví dụ · 從影片字幕變成邏輯場景</a:t>
             </a:r>
-            <a:endParaRPr lang="en-US" sz="890" dirty="0"/>
+            <a:endParaRPr lang="en-US" sz="1000" dirty="0"/>
           </a:p>
         </p:txBody>
       </p:sp>
@@ -10120,8 +10120,8 @@
         </p:nvSpPr>
         <p:spPr>
           <a:xfrm>
-            <a:off x="1681812" y="585045"/>
-            <a:ext cx="5715427" cy="870304"/>
+            <a:off x="1326323" y="627254"/>
+            <a:ext cx="6418418" cy="977350"/>
           </a:xfrm>
           <a:prstGeom prst="rect">
             <a:avLst/>
@@ -10140,7 +10140,7 @@
               <a:buNone/>
             </a:pPr>
             <a:r>
-              <a:rPr lang="en-US" sz="1630" b="1" dirty="0">
+              <a:rPr lang="en-US" sz="1830" b="1" dirty="0">
                 <a:solidFill>
                   <a:srgbClr val="FFFFFF"/>
                 </a:solidFill>
@@ -10150,7 +10150,7 @@
               </a:rPr>
               <a:t>Mười câu phụ đề trong video Hà Nội ở chương 1 — đó chính là mười kịch bản chức năng.</a:t>
             </a:r>
-            <a:endParaRPr lang="en-US" sz="1630" dirty="0"/>
+            <a:endParaRPr lang="en-US" sz="1830" dirty="0"/>
           </a:p>
           <a:p>
             <a:pPr indent="0" marL="0">
@@ -10160,7 +10160,7 @@
               <a:buNone/>
             </a:pPr>
             <a:r>
-              <a:rPr lang="en-US" sz="1070" dirty="0">
+              <a:rPr lang="en-US" sz="1200" dirty="0">
                 <a:solidFill>
                   <a:srgbClr val="AFC3D4"/>
                 </a:solidFill>
@@ -10170,7 +10170,7 @@
               </a:rPr>
               <a:t>第一章那支河內影片的十段字幕，就是十個功能場景。</a:t>
             </a:r>
-            <a:endParaRPr lang="en-US" sz="1630" dirty="0"/>
+            <a:endParaRPr lang="en-US" sz="1830" dirty="0"/>
           </a:p>
         </p:txBody>
       </p:sp>
@@ -10182,8 +10182,8 @@
         </p:nvSpPr>
         <p:spPr>
           <a:xfrm>
-            <a:off x="1681812" y="1362092"/>
-            <a:ext cx="5780375" cy="441647"/>
+            <a:off x="1326323" y="1499877"/>
+            <a:ext cx="6491354" cy="495969"/>
           </a:xfrm>
           <a:prstGeom prst="roundRect">
             <a:avLst>
@@ -10204,8 +10204,8 @@
         </p:nvSpPr>
         <p:spPr>
           <a:xfrm>
-            <a:off x="1798719" y="1466008"/>
-            <a:ext cx="233813" cy="233813"/>
+            <a:off x="1457609" y="1616575"/>
+            <a:ext cx="262572" cy="262572"/>
           </a:xfrm>
           <a:prstGeom prst="ellipse">
             <a:avLst/>
@@ -10224,8 +10224,8 @@
         </p:nvSpPr>
         <p:spPr>
           <a:xfrm>
-            <a:off x="1798719" y="1485493"/>
-            <a:ext cx="233813" cy="194844"/>
+            <a:off x="1457609" y="1638456"/>
+            <a:ext cx="262572" cy="218810"/>
           </a:xfrm>
           <a:prstGeom prst="rect">
             <a:avLst/>
@@ -10241,7 +10241,7 @@
               <a:buNone/>
             </a:pPr>
             <a:r>
-              <a:rPr lang="en-US" sz="850" b="1" dirty="0">
+              <a:rPr lang="en-US" sz="960" b="1" dirty="0">
                 <a:solidFill>
                   <a:srgbClr val="FFFFFF"/>
                 </a:solidFill>
@@ -10251,7 +10251,7 @@
               </a:rPr>
               <a:t>1</a:t>
             </a:r>
-            <a:endParaRPr lang="en-US" sz="850" dirty="0"/>
+            <a:endParaRPr lang="en-US" sz="960" dirty="0"/>
           </a:p>
         </p:txBody>
       </p:sp>
@@ -10263,8 +10263,8 @@
         </p:nvSpPr>
         <p:spPr>
           <a:xfrm>
-            <a:off x="2149438" y="1394566"/>
-            <a:ext cx="5182853" cy="389688"/>
+            <a:off x="1851466" y="1536345"/>
+            <a:ext cx="5820338" cy="437619"/>
           </a:xfrm>
           <a:prstGeom prst="rect">
             <a:avLst/>
@@ -10283,7 +10283,7 @@
               <a:buNone/>
             </a:pPr>
             <a:r>
-              <a:rPr lang="en-US" sz="890" b="1" dirty="0">
+              <a:rPr lang="en-US" sz="1000" b="1" dirty="0">
                 <a:solidFill>
                   <a:srgbClr val="FFFFFF"/>
                 </a:solidFill>
@@ -10293,7 +10293,7 @@
               </a:rPr>
               <a:t>«Trước mặt bạn 5 m có 12 xe máy» → viết thành: 3–8 m, 8–15 xe, 15–35 km/h, cách nhau 0,5–1,5 m</a:t>
             </a:r>
-            <a:endParaRPr lang="en-US" sz="890" dirty="0"/>
+            <a:endParaRPr lang="en-US" sz="1000" dirty="0"/>
           </a:p>
           <a:p>
             <a:pPr indent="0" marL="0">
@@ -10303,7 +10303,7 @@
               <a:buNone/>
             </a:pPr>
             <a:r>
-              <a:rPr lang="en-US" sz="820" dirty="0">
+              <a:rPr lang="en-US" sz="920" dirty="0">
                 <a:solidFill>
                   <a:srgbClr val="AFC3D4"/>
                 </a:solidFill>
@@ -10313,7 +10313,7 @@
               </a:rPr>
               <a:t>「你前方五公尺內有十二台機車」→ 寫成：3–8 公尺內、8–15 台、時速 15–35、橫向間距 0.5–1.5 公尺</a:t>
             </a:r>
-            <a:endParaRPr lang="en-US" sz="890" dirty="0"/>
+            <a:endParaRPr lang="en-US" sz="1000" dirty="0"/>
           </a:p>
         </p:txBody>
       </p:sp>
@@ -10325,8 +10325,8 @@
         </p:nvSpPr>
         <p:spPr>
           <a:xfrm>
-            <a:off x="1681812" y="1868686"/>
-            <a:ext cx="5780375" cy="441647"/>
+            <a:off x="1326323" y="2068782"/>
+            <a:ext cx="6491354" cy="495969"/>
           </a:xfrm>
           <a:prstGeom prst="roundRect">
             <a:avLst>
@@ -10347,8 +10347,8 @@
         </p:nvSpPr>
         <p:spPr>
           <a:xfrm>
-            <a:off x="1798719" y="1972603"/>
-            <a:ext cx="233813" cy="233813"/>
+            <a:off x="1457609" y="2185481"/>
+            <a:ext cx="262572" cy="262572"/>
           </a:xfrm>
           <a:prstGeom prst="ellipse">
             <a:avLst/>
@@ -10367,8 +10367,8 @@
         </p:nvSpPr>
         <p:spPr>
           <a:xfrm>
-            <a:off x="1798719" y="1992087"/>
-            <a:ext cx="233813" cy="194844"/>
+            <a:off x="1457609" y="2207362"/>
+            <a:ext cx="262572" cy="218810"/>
           </a:xfrm>
           <a:prstGeom prst="rect">
             <a:avLst/>
@@ -10384,7 +10384,7 @@
               <a:buNone/>
             </a:pPr>
             <a:r>
-              <a:rPr lang="en-US" sz="850" b="1" dirty="0">
+              <a:rPr lang="en-US" sz="960" b="1" dirty="0">
                 <a:solidFill>
                   <a:srgbClr val="FFFFFF"/>
                 </a:solidFill>
@@ -10394,7 +10394,7 @@
               </a:rPr>
               <a:t>2</a:t>
             </a:r>
-            <a:endParaRPr lang="en-US" sz="850" dirty="0"/>
+            <a:endParaRPr lang="en-US" sz="960" dirty="0"/>
           </a:p>
         </p:txBody>
       </p:sp>
@@ -10406,8 +10406,8 @@
         </p:nvSpPr>
         <p:spPr>
           <a:xfrm>
-            <a:off x="2149438" y="1901160"/>
-            <a:ext cx="5182853" cy="389688"/>
+            <a:off x="1851466" y="2105250"/>
+            <a:ext cx="5820338" cy="437619"/>
           </a:xfrm>
           <a:prstGeom prst="rect">
             <a:avLst/>
@@ -10426,7 +10426,7 @@
               <a:buNone/>
             </a:pPr>
             <a:r>
-              <a:rPr lang="en-US" sz="890" b="1" dirty="0">
+              <a:rPr lang="en-US" sz="1000" b="1" dirty="0">
                 <a:solidFill>
                   <a:srgbClr val="FFFFFF"/>
                 </a:solidFill>
@@ -10436,7 +10436,7 @@
               </a:rPr>
               <a:t>«Một xe tải đỗ sai» → chiếm 30–60% làn, cách 10–40 m, làn bên cạnh mỗi 10 m có 0–3 xe máy</a:t>
             </a:r>
-            <a:endParaRPr lang="en-US" sz="890" dirty="0"/>
+            <a:endParaRPr lang="en-US" sz="1000" dirty="0"/>
           </a:p>
           <a:p>
             <a:pPr indent="0" marL="0">
@@ -10446,7 +10446,7 @@
               <a:buNone/>
             </a:pPr>
             <a:r>
-              <a:rPr lang="en-US" sz="820" dirty="0">
+              <a:rPr lang="en-US" sz="920" dirty="0">
                 <a:solidFill>
                   <a:srgbClr val="AFC3D4"/>
                 </a:solidFill>
@@ -10456,7 +10456,7 @@
               </a:rPr>
               <a:t>「一台違停的貨車」→ 佔車道 30–60%、距離 10–40 公尺、旁邊車道每 10 公尺 0–3 台機車</a:t>
             </a:r>
-            <a:endParaRPr lang="en-US" sz="890" dirty="0"/>
+            <a:endParaRPr lang="en-US" sz="1000" dirty="0"/>
           </a:p>
         </p:txBody>
       </p:sp>
@@ -10468,8 +10468,8 @@
         </p:nvSpPr>
         <p:spPr>
           <a:xfrm>
-            <a:off x="1681812" y="2375281"/>
-            <a:ext cx="5780375" cy="441647"/>
+            <a:off x="1326323" y="2637687"/>
+            <a:ext cx="6491354" cy="495969"/>
           </a:xfrm>
           <a:prstGeom prst="roundRect">
             <a:avLst>
@@ -10490,8 +10490,8 @@
         </p:nvSpPr>
         <p:spPr>
           <a:xfrm>
-            <a:off x="1798719" y="2479198"/>
-            <a:ext cx="233813" cy="233813"/>
+            <a:off x="1457609" y="2754386"/>
+            <a:ext cx="262572" cy="262572"/>
           </a:xfrm>
           <a:prstGeom prst="ellipse">
             <a:avLst/>
@@ -10510,8 +10510,8 @@
         </p:nvSpPr>
         <p:spPr>
           <a:xfrm>
-            <a:off x="1798719" y="2498682"/>
-            <a:ext cx="233813" cy="194844"/>
+            <a:off x="1457609" y="2776267"/>
+            <a:ext cx="262572" cy="218810"/>
           </a:xfrm>
           <a:prstGeom prst="rect">
             <a:avLst/>
@@ -10527,7 +10527,7 @@
               <a:buNone/>
             </a:pPr>
             <a:r>
-              <a:rPr lang="en-US" sz="850" b="1" dirty="0">
+              <a:rPr lang="en-US" sz="960" b="1" dirty="0">
                 <a:solidFill>
                   <a:srgbClr val="FFFFFF"/>
                 </a:solidFill>
@@ -10537,7 +10537,7 @@
               </a:rPr>
               <a:t>3</a:t>
             </a:r>
-            <a:endParaRPr lang="en-US" sz="850" dirty="0"/>
+            <a:endParaRPr lang="en-US" sz="960" dirty="0"/>
           </a:p>
         </p:txBody>
       </p:sp>
@@ -10549,8 +10549,8 @@
         </p:nvSpPr>
         <p:spPr>
           <a:xfrm>
-            <a:off x="2149438" y="2407755"/>
-            <a:ext cx="5182853" cy="389688"/>
+            <a:off x="1851466" y="2674156"/>
+            <a:ext cx="5820338" cy="437619"/>
           </a:xfrm>
           <a:prstGeom prst="rect">
             <a:avLst/>
@@ -10569,7 +10569,7 @@
               <a:buNone/>
             </a:pPr>
             <a:r>
-              <a:rPr lang="en-US" sz="890" b="1" dirty="0">
+              <a:rPr lang="en-US" sz="1000" b="1" dirty="0">
                 <a:solidFill>
                   <a:srgbClr val="FFFFFF"/>
                 </a:solidFill>
@@ -10579,7 +10579,7 @@
               </a:rPr>
               <a:t>Bài về nhà: chọn một cảnh Đài Loan, viết thành kịch bản logic như trên</a:t>
             </a:r>
-            <a:endParaRPr lang="en-US" sz="890" dirty="0"/>
+            <a:endParaRPr lang="en-US" sz="1000" dirty="0"/>
           </a:p>
           <a:p>
             <a:pPr indent="0" marL="0">
@@ -10589,7 +10589,7 @@
               <a:buNone/>
             </a:pPr>
             <a:r>
-              <a:rPr lang="en-US" sz="820" dirty="0">
+              <a:rPr lang="en-US" sz="920" dirty="0">
                 <a:solidFill>
                   <a:srgbClr val="AFC3D4"/>
                 </a:solidFill>
@@ -10599,7 +10599,7 @@
               </a:rPr>
               <a:t>回家作業：挑一個台灣的場景，照上面的格式寫成邏輯場景</a:t>
             </a:r>
-            <a:endParaRPr lang="en-US" sz="890" dirty="0"/>
+            <a:endParaRPr lang="en-US" sz="1000" dirty="0"/>
           </a:p>
         </p:txBody>
       </p:sp>
@@ -10611,8 +10611,8 @@
         </p:nvSpPr>
         <p:spPr>
           <a:xfrm>
-            <a:off x="1681812" y="2907855"/>
-            <a:ext cx="5715427" cy="324740"/>
+            <a:off x="1326323" y="3235767"/>
+            <a:ext cx="6418418" cy="364683"/>
           </a:xfrm>
           <a:prstGeom prst="rect">
             <a:avLst/>
@@ -10631,7 +10631,7 @@
               <a:buNone/>
             </a:pPr>
             <a:r>
-              <a:rPr lang="en-US" sz="890" b="1" dirty="0">
+              <a:rPr lang="en-US" sz="1000" b="1" dirty="0">
                 <a:solidFill>
                   <a:srgbClr val="FFB020"/>
                 </a:solidFill>
@@ -10641,7 +10641,7 @@
               </a:rPr>
               <a:t>Viết được kịch bản logic — kỹ năng cụ thể nhất của buổi hôm nay.</a:t>
             </a:r>
-            <a:endParaRPr lang="en-US" sz="890" dirty="0"/>
+            <a:endParaRPr lang="en-US" sz="1000" dirty="0"/>
           </a:p>
           <a:p>
             <a:pPr indent="0" marL="0">
@@ -10651,7 +10651,7 @@
               <a:buNone/>
             </a:pPr>
             <a:r>
-              <a:rPr lang="en-US" sz="820" dirty="0">
+              <a:rPr lang="en-US" sz="920" dirty="0">
                 <a:solidFill>
                   <a:srgbClr val="FFB020"/>
                 </a:solidFill>
@@ -10661,7 +10661,7 @@
               </a:rPr>
               <a:t>會寫邏輯場景，是今天最具體的一項技能。</a:t>
             </a:r>
-            <a:endParaRPr lang="en-US" sz="890" dirty="0"/>
+            <a:endParaRPr lang="en-US" sz="1000" dirty="0"/>
           </a:p>
         </p:txBody>
       </p:sp>
@@ -10673,8 +10673,8 @@
         </p:nvSpPr>
         <p:spPr>
           <a:xfrm>
-            <a:off x="1402536" y="3390800"/>
-            <a:ext cx="584532" cy="181855"/>
+            <a:off x="1012696" y="102111"/>
+            <a:ext cx="656429" cy="204222"/>
           </a:xfrm>
           <a:prstGeom prst="rect">
             <a:avLst/>
@@ -10690,7 +10690,7 @@
               <a:buNone/>
             </a:pPr>
             <a:r>
-              <a:rPr lang="en-US" sz="640" dirty="0">
+              <a:rPr lang="en-US" sz="720" dirty="0">
                 <a:solidFill>
                   <a:srgbClr val="9FB3C8"/>
                 </a:solidFill>
@@ -10700,7 +10700,7 @@
               </a:rPr>
               <a:t>15 / 16</a:t>
             </a:r>
-            <a:endParaRPr lang="en-US" sz="640" dirty="0"/>
+            <a:endParaRPr lang="en-US" sz="720" dirty="0"/>
           </a:p>
         </p:txBody>
       </p:sp>
@@ -10712,8 +10712,8 @@
         </p:nvSpPr>
         <p:spPr>
           <a:xfrm>
-            <a:off x="2006553" y="3390800"/>
-            <a:ext cx="1428857" cy="181855"/>
+            <a:off x="1691006" y="102111"/>
+            <a:ext cx="1604604" cy="204222"/>
           </a:xfrm>
           <a:prstGeom prst="rect">
             <a:avLst/>
@@ -10729,7 +10729,7 @@
               <a:buNone/>
             </a:pPr>
             <a:r>
-              <a:rPr lang="en-US" sz="640" dirty="0">
+              <a:rPr lang="en-US" sz="720" dirty="0">
                 <a:solidFill>
                   <a:srgbClr val="9FB3C8"/>
                 </a:solidFill>
@@ -10739,7 +10739,7 @@
               </a:rPr>
               <a:t>Tiết 2 · 第 2 節</a:t>
             </a:r>
-            <a:endParaRPr lang="en-US" sz="640" dirty="0"/>
+            <a:endParaRPr lang="en-US" sz="720" dirty="0"/>
           </a:p>
         </p:txBody>
       </p:sp>
@@ -10769,8 +10769,8 @@
       </p:nvGrpSpPr>
       <p:grpSpPr>
         <a:xfrm>
-          <a:off x="0" y="0"/>
-          <a:ext cx="0" cy="0"/>
+          <a:off x="898071" y="0"/>
+          <a:ext cx="1" cy="1"/>
           <a:chOff x="0" y="0"/>
           <a:chExt cx="0" cy="0"/>
         </a:xfrm>
@@ -10783,8 +10783,8 @@
         </p:nvSpPr>
         <p:spPr>
           <a:xfrm>
-            <a:off x="6130753" y="-947729"/>
-            <a:ext cx="2987610" cy="2987610"/>
+            <a:off x="6335486" y="-1102179"/>
+            <a:ext cx="3380014" cy="3380014"/>
           </a:xfrm>
           <a:prstGeom prst="ellipse">
             <a:avLst/>
@@ -10808,8 +10808,8 @@
         </p:nvSpPr>
         <p:spPr>
           <a:xfrm>
-            <a:off x="7104973" y="1520297"/>
-            <a:ext cx="1688649" cy="1688649"/>
+            <a:off x="7437664" y="1690007"/>
+            <a:ext cx="1910443" cy="1910443"/>
           </a:xfrm>
           <a:prstGeom prst="ellipse">
             <a:avLst/>
@@ -10830,8 +10830,8 @@
         </p:nvSpPr>
         <p:spPr>
           <a:xfrm>
-            <a:off x="1681812" y="364222"/>
-            <a:ext cx="4806155" cy="194844"/>
+            <a:off x="1302204" y="382089"/>
+            <a:ext cx="5437414" cy="220436"/>
           </a:xfrm>
           <a:prstGeom prst="rect">
             <a:avLst/>
@@ -10847,7 +10847,7 @@
               <a:buNone/>
             </a:pPr>
             <a:r>
-              <a:rPr lang="en-US" sz="890" b="1" dirty="0">
+              <a:rPr lang="en-US" sz="1000" b="1" dirty="0">
                 <a:solidFill>
                   <a:srgbClr val="FFB020"/>
                 </a:solidFill>
@@ -10857,7 +10857,7 @@
               </a:rPr>
               <a:t>Tiết 2 · 第二節小結</a:t>
             </a:r>
-            <a:endParaRPr lang="en-US" sz="890" dirty="0"/>
+            <a:endParaRPr lang="en-US" sz="1000" dirty="0"/>
           </a:p>
         </p:txBody>
       </p:sp>
@@ -10869,8 +10869,8 @@
         </p:nvSpPr>
         <p:spPr>
           <a:xfrm>
-            <a:off x="1681812" y="611024"/>
-            <a:ext cx="5715427" cy="753397"/>
+            <a:off x="1302204" y="661307"/>
+            <a:ext cx="6466114" cy="852351"/>
           </a:xfrm>
           <a:prstGeom prst="rect">
             <a:avLst/>
@@ -10889,7 +10889,7 @@
               <a:buNone/>
             </a:pPr>
             <a:r>
-              <a:rPr lang="en-US" sz="1780" b="1" dirty="0">
+              <a:rPr lang="en-US" sz="2010" b="1" dirty="0">
                 <a:solidFill>
                   <a:srgbClr val="FFFFFF"/>
                 </a:solidFill>
@@ -10899,7 +10899,7 @@
               </a:rPr>
               <a:t>Mang ba câu này lên máy</a:t>
             </a:r>
-            <a:endParaRPr lang="en-US" sz="1780" dirty="0"/>
+            <a:endParaRPr lang="en-US" sz="2010" dirty="0"/>
           </a:p>
           <a:p>
             <a:pPr indent="0" marL="0">
@@ -10909,7 +10909,7 @@
               <a:buNone/>
             </a:pPr>
             <a:r>
-              <a:rPr lang="en-US" sz="1070" dirty="0">
+              <a:rPr lang="en-US" sz="1210" dirty="0">
                 <a:solidFill>
                   <a:srgbClr val="AFC3D4"/>
                 </a:solidFill>
@@ -10919,7 +10919,7 @@
               </a:rPr>
               <a:t>帶三句話上機</a:t>
             </a:r>
-            <a:endParaRPr lang="en-US" sz="1780" dirty="0"/>
+            <a:endParaRPr lang="en-US" sz="2010" dirty="0"/>
           </a:p>
         </p:txBody>
       </p:sp>
@@ -10931,8 +10931,8 @@
         </p:nvSpPr>
         <p:spPr>
           <a:xfrm>
-            <a:off x="1681812" y="1429370"/>
-            <a:ext cx="32474" cy="363709"/>
+            <a:off x="1302204" y="1587137"/>
+            <a:ext cx="36739" cy="411480"/>
           </a:xfrm>
           <a:prstGeom prst="rect">
             <a:avLst/>
@@ -10951,8 +10951,8 @@
         </p:nvSpPr>
         <p:spPr>
           <a:xfrm>
-            <a:off x="1837688" y="1403390"/>
-            <a:ext cx="5585531" cy="441647"/>
+            <a:off x="1478552" y="1557746"/>
+            <a:ext cx="6319157" cy="499654"/>
           </a:xfrm>
           <a:prstGeom prst="rect">
             <a:avLst/>
@@ -10971,7 +10971,7 @@
               <a:buNone/>
             </a:pPr>
             <a:r>
-              <a:rPr lang="en-US" sz="960" b="1" dirty="0">
+              <a:rPr lang="en-US" sz="1080" b="1" dirty="0">
                 <a:solidFill>
                   <a:srgbClr val="FFFFFF"/>
                 </a:solidFill>
@@ -10981,7 +10981,7 @@
               </a:rPr>
               <a:t>Kịch bản có ba tầng: chức năng (tiếng người) → logic (khoảng) → cụ thể (một giá trị).</a:t>
             </a:r>
-            <a:endParaRPr lang="en-US" sz="960" dirty="0"/>
+            <a:endParaRPr lang="en-US" sz="1080" dirty="0"/>
           </a:p>
           <a:p>
             <a:pPr indent="0" marL="0">
@@ -10991,7 +10991,7 @@
               <a:buNone/>
             </a:pPr>
             <a:r>
-              <a:rPr lang="en-US" sz="850" dirty="0">
+              <a:rPr lang="en-US" sz="960" dirty="0">
                 <a:solidFill>
                   <a:srgbClr val="AFC3D4"/>
                 </a:solidFill>
@@ -11001,7 +11001,7 @@
               </a:rPr>
               <a:t>場景三層：功能（人話）→ 邏輯（範圍）→ 具體（一個值）。</a:t>
             </a:r>
-            <a:endParaRPr lang="en-US" sz="960" dirty="0"/>
+            <a:endParaRPr lang="en-US" sz="1080" dirty="0"/>
           </a:p>
         </p:txBody>
       </p:sp>
@@ -11013,8 +11013,8 @@
         </p:nvSpPr>
         <p:spPr>
           <a:xfrm>
-            <a:off x="1681812" y="1935964"/>
-            <a:ext cx="32474" cy="363709"/>
+            <a:off x="1302204" y="2160270"/>
+            <a:ext cx="36739" cy="411480"/>
           </a:xfrm>
           <a:prstGeom prst="rect">
             <a:avLst/>
@@ -11033,8 +11033,8 @@
         </p:nvSpPr>
         <p:spPr>
           <a:xfrm>
-            <a:off x="1837688" y="1909985"/>
-            <a:ext cx="5585531" cy="441647"/>
+            <a:off x="1478552" y="2130879"/>
+            <a:ext cx="6319157" cy="499654"/>
           </a:xfrm>
           <a:prstGeom prst="rect">
             <a:avLst/>
@@ -11053,7 +11053,7 @@
               <a:buNone/>
             </a:pPr>
             <a:r>
-              <a:rPr lang="en-US" sz="960" b="1" dirty="0">
+              <a:rPr lang="en-US" sz="1080" b="1" dirty="0">
                 <a:solidFill>
                   <a:srgbClr val="FFFFFF"/>
                 </a:solidFill>
@@ -11063,7 +11063,7 @@
               </a:rPr>
               <a:t>Cách dùng mô phỏng là quét tham số để tìm ranh giới, không phải chạy cho nhiều km.</a:t>
             </a:r>
-            <a:endParaRPr lang="en-US" sz="960" dirty="0"/>
+            <a:endParaRPr lang="en-US" sz="1080" dirty="0"/>
           </a:p>
           <a:p>
             <a:pPr indent="0" marL="0">
@@ -11073,7 +11073,7 @@
               <a:buNone/>
             </a:pPr>
             <a:r>
-              <a:rPr lang="en-US" sz="850" dirty="0">
+              <a:rPr lang="en-US" sz="960" dirty="0">
                 <a:solidFill>
                   <a:srgbClr val="AFC3D4"/>
                 </a:solidFill>
@@ -11083,7 +11083,7 @@
               </a:rPr>
               <a:t>模擬的用法是掃參數、找出界線，不是拚里程。</a:t>
             </a:r>
-            <a:endParaRPr lang="en-US" sz="960" dirty="0"/>
+            <a:endParaRPr lang="en-US" sz="1080" dirty="0"/>
           </a:p>
         </p:txBody>
       </p:sp>
@@ -11095,8 +11095,8 @@
         </p:nvSpPr>
         <p:spPr>
           <a:xfrm>
-            <a:off x="1681812" y="2442559"/>
-            <a:ext cx="32474" cy="477815"/>
+            <a:off x="1302204" y="2733403"/>
+            <a:ext cx="36739" cy="540573"/>
           </a:xfrm>
           <a:prstGeom prst="rect">
             <a:avLst/>
@@ -11115,8 +11115,8 @@
         </p:nvSpPr>
         <p:spPr>
           <a:xfrm>
-            <a:off x="1837688" y="2416580"/>
-            <a:ext cx="5585531" cy="555752"/>
+            <a:off x="1478552" y="2704011"/>
+            <a:ext cx="6319157" cy="628747"/>
           </a:xfrm>
           <a:prstGeom prst="rect">
             <a:avLst/>
@@ -11135,7 +11135,7 @@
               <a:buNone/>
             </a:pPr>
             <a:r>
-              <a:rPr lang="en-US" sz="960" b="1" dirty="0">
+              <a:rPr lang="en-US" sz="1080" b="1" dirty="0">
                 <a:solidFill>
                   <a:srgbClr val="FFFFFF"/>
                 </a:solidFill>
@@ -11145,7 +11145,7 @@
               </a:rPr>
               <a:t>Kịch bản đến từ quy định, cơ sở dữ liệu tai nạn và đường thật — nhưng «biển xe máy» thì không nguồn nào có.</a:t>
             </a:r>
-            <a:endParaRPr lang="en-US" sz="960" dirty="0"/>
+            <a:endParaRPr lang="en-US" sz="1080" dirty="0"/>
           </a:p>
           <a:p>
             <a:pPr indent="0" marL="0">
@@ -11155,7 +11155,7 @@
               <a:buNone/>
             </a:pPr>
             <a:r>
-              <a:rPr lang="en-US" sz="850" dirty="0">
+              <a:rPr lang="en-US" sz="960" dirty="0">
                 <a:solidFill>
                   <a:srgbClr val="AFC3D4"/>
                 </a:solidFill>
@@ -11165,7 +11165,7 @@
               </a:rPr>
               <a:t>場景來自法規、事故資料庫、實路收集——但「機車海」哪一個來源都沒有。</a:t>
             </a:r>
-            <a:endParaRPr lang="en-US" sz="960" dirty="0"/>
+            <a:endParaRPr lang="en-US" sz="1080" dirty="0"/>
           </a:p>
         </p:txBody>
       </p:sp>
@@ -11177,8 +11177,8 @@
         </p:nvSpPr>
         <p:spPr>
           <a:xfrm>
-            <a:off x="1402536" y="3390800"/>
-            <a:ext cx="584532" cy="181855"/>
+            <a:off x="986246" y="102870"/>
+            <a:ext cx="661307" cy="205740"/>
           </a:xfrm>
           <a:prstGeom prst="rect">
             <a:avLst/>
@@ -11194,7 +11194,7 @@
               <a:buNone/>
             </a:pPr>
             <a:r>
-              <a:rPr lang="en-US" sz="640" dirty="0">
+              <a:rPr lang="en-US" sz="720" dirty="0">
                 <a:solidFill>
                   <a:srgbClr val="9FB3C8"/>
                 </a:solidFill>
@@ -11204,7 +11204,7 @@
               </a:rPr>
               <a:t>16 / 16</a:t>
             </a:r>
-            <a:endParaRPr lang="en-US" sz="640" dirty="0"/>
+            <a:endParaRPr lang="en-US" sz="720" dirty="0"/>
           </a:p>
         </p:txBody>
       </p:sp>
@@ -11216,8 +11216,8 @@
         </p:nvSpPr>
         <p:spPr>
           <a:xfrm>
-            <a:off x="2006553" y="3390800"/>
-            <a:ext cx="1428857" cy="181855"/>
+            <a:off x="1669596" y="102870"/>
+            <a:ext cx="1616529" cy="205740"/>
           </a:xfrm>
           <a:prstGeom prst="rect">
             <a:avLst/>
@@ -11233,7 +11233,7 @@
               <a:buNone/>
             </a:pPr>
             <a:r>
-              <a:rPr lang="en-US" sz="640" dirty="0">
+              <a:rPr lang="en-US" sz="720" dirty="0">
                 <a:solidFill>
                   <a:srgbClr val="9FB3C8"/>
                 </a:solidFill>
@@ -11243,7 +11243,7 @@
               </a:rPr>
               <a:t>Tiết 2 · 第 2 節</a:t>
             </a:r>
-            <a:endParaRPr lang="en-US" sz="640" dirty="0"/>
+            <a:endParaRPr lang="en-US" sz="720" dirty="0"/>
           </a:p>
         </p:txBody>
       </p:sp>
@@ -11266,8 +11266,8 @@
       </p:nvGrpSpPr>
       <p:grpSpPr>
         <a:xfrm>
-          <a:off x="0" y="0"/>
-          <a:ext cx="0" cy="0"/>
+          <a:off x="942514" y="0"/>
+          <a:ext cx="1" cy="1"/>
           <a:chOff x="0" y="0"/>
           <a:chExt cx="0" cy="0"/>
         </a:xfrm>
@@ -11280,8 +11280,8 @@
         </p:nvSpPr>
         <p:spPr>
           <a:xfrm>
-            <a:off x="1681812" y="325253"/>
-            <a:ext cx="5780375" cy="194844"/>
+            <a:off x="1341758" y="333913"/>
+            <a:ext cx="6460485" cy="217769"/>
           </a:xfrm>
           <a:prstGeom prst="rect">
             <a:avLst/>
@@ -11297,7 +11297,7 @@
               <a:buNone/>
             </a:pPr>
             <a:r>
-              <a:rPr lang="en-US" sz="890" b="1" dirty="0">
+              <a:rPr lang="en-US" sz="990" b="1" dirty="0">
                 <a:solidFill>
                   <a:srgbClr val="007F72"/>
                 </a:solidFill>
@@ -11307,7 +11307,7 @@
               </a:rPr>
               <a:t>Vấn đề · 問題在哪</a:t>
             </a:r>
-            <a:endParaRPr lang="en-US" sz="890" dirty="0"/>
+            <a:endParaRPr lang="en-US" sz="990" dirty="0"/>
           </a:p>
         </p:txBody>
       </p:sp>
@@ -11319,8 +11319,8 @@
         </p:nvSpPr>
         <p:spPr>
           <a:xfrm>
-            <a:off x="1681812" y="809116"/>
-            <a:ext cx="1753597" cy="1786071"/>
+            <a:off x="1341758" y="874706"/>
+            <a:ext cx="1959922" cy="1996217"/>
           </a:xfrm>
           <a:prstGeom prst="roundRect">
             <a:avLst>
@@ -11346,8 +11346,8 @@
         </p:nvSpPr>
         <p:spPr>
           <a:xfrm flipV="1">
-            <a:off x="2087088" y="1260245"/>
-            <a:ext cx="377218" cy="883813"/>
+            <a:off x="1794718" y="1378914"/>
+            <a:ext cx="421601" cy="987801"/>
           </a:xfrm>
           <a:prstGeom prst="line">
             <a:avLst/>
@@ -11369,8 +11369,8 @@
         </p:nvSpPr>
         <p:spPr>
           <a:xfrm flipH="1" flipV="1">
-            <a:off x="2652915" y="1260245"/>
-            <a:ext cx="377218" cy="883813"/>
+            <a:off x="2427119" y="1378914"/>
+            <a:ext cx="421601" cy="987801"/>
           </a:xfrm>
           <a:prstGeom prst="line">
             <a:avLst/>
@@ -11392,8 +11392,8 @@
         </p:nvSpPr>
         <p:spPr>
           <a:xfrm>
-            <a:off x="2539750" y="2065146"/>
-            <a:ext cx="37722" cy="78912"/>
+            <a:off x="2300639" y="2278519"/>
+            <a:ext cx="42160" cy="88197"/>
           </a:xfrm>
           <a:prstGeom prst="rect">
             <a:avLst/>
@@ -11412,8 +11412,8 @@
         </p:nvSpPr>
         <p:spPr>
           <a:xfrm>
-            <a:off x="2543051" y="1858002"/>
-            <a:ext cx="31121" cy="65102"/>
+            <a:off x="2304328" y="2047003"/>
+            <a:ext cx="34782" cy="72762"/>
           </a:xfrm>
           <a:prstGeom prst="rect">
             <a:avLst/>
@@ -11432,8 +11432,8 @@
         </p:nvSpPr>
         <p:spPr>
           <a:xfrm>
-            <a:off x="2546351" y="1650859"/>
-            <a:ext cx="24519" cy="51293"/>
+            <a:off x="2308017" y="1815487"/>
+            <a:ext cx="27404" cy="57328"/>
           </a:xfrm>
           <a:prstGeom prst="rect">
             <a:avLst/>
@@ -11452,8 +11452,8 @@
         </p:nvSpPr>
         <p:spPr>
           <a:xfrm>
-            <a:off x="2549652" y="1443715"/>
-            <a:ext cx="17918" cy="37483"/>
+            <a:off x="2311706" y="1583971"/>
+            <a:ext cx="20026" cy="41893"/>
           </a:xfrm>
           <a:prstGeom prst="rect">
             <a:avLst/>
@@ -11472,8 +11472,8 @@
         </p:nvSpPr>
         <p:spPr>
           <a:xfrm>
-            <a:off x="1772740" y="1039292"/>
-            <a:ext cx="1571743" cy="252518"/>
+            <a:off x="1443383" y="1131964"/>
+            <a:ext cx="1756671" cy="282229"/>
           </a:xfrm>
           <a:prstGeom prst="rect">
             <a:avLst/>
@@ -11489,7 +11489,7 @@
               <a:buNone/>
             </a:pPr>
             <a:r>
-              <a:rPr lang="en-US" sz="710" b="1" dirty="0">
+              <a:rPr lang="en-US" sz="790" b="1" dirty="0">
                 <a:solidFill>
                   <a:srgbClr val="A3382F"/>
                 </a:solidFill>
@@ -11499,7 +11499,7 @@
               </a:rPr>
               <a:t>10 000 km</a:t>
             </a:r>
-            <a:endParaRPr lang="en-US" sz="710" dirty="0"/>
+            <a:endParaRPr lang="en-US" sz="790" dirty="0"/>
           </a:p>
         </p:txBody>
       </p:sp>
@@ -11511,8 +11511,8 @@
         </p:nvSpPr>
         <p:spPr>
           <a:xfrm>
-            <a:off x="3760150" y="891209"/>
-            <a:ext cx="3702038" cy="714266"/>
+            <a:off x="3664629" y="966459"/>
+            <a:ext cx="4137614" cy="798305"/>
           </a:xfrm>
           <a:prstGeom prst="rect">
             <a:avLst/>
@@ -11531,7 +11531,7 @@
               <a:buNone/>
             </a:pPr>
             <a:r>
-              <a:rPr lang="en-US" sz="1630" b="1" dirty="0">
+              <a:rPr lang="en-US" sz="1830" b="1" dirty="0">
                 <a:solidFill>
                   <a:srgbClr val="0B1F3A"/>
                 </a:solidFill>
@@ -11541,7 +11541,7 @@
               </a:rPr>
               <a:t>Chạy mười nghìn km đường thẳng không chứng minh được gì cả</a:t>
             </a:r>
-            <a:endParaRPr lang="en-US" sz="1630" dirty="0"/>
+            <a:endParaRPr lang="en-US" sz="1830" dirty="0"/>
           </a:p>
           <a:p>
             <a:pPr indent="0" marL="0">
@@ -11551,7 +11551,7 @@
               <a:buNone/>
             </a:pPr>
             <a:r>
-              <a:rPr lang="en-US" sz="990" dirty="0">
+              <a:rPr lang="en-US" sz="1110" dirty="0">
                 <a:solidFill>
                   <a:srgbClr val="007F72"/>
                 </a:solidFill>
@@ -11561,7 +11561,7 @@
               </a:rPr>
               <a:t>在直路上跑一萬公里，什麼都證明不了</a:t>
             </a:r>
-            <a:endParaRPr lang="en-US" sz="1630" dirty="0"/>
+            <a:endParaRPr lang="en-US" sz="1830" dirty="0"/>
           </a:p>
         </p:txBody>
       </p:sp>
@@ -11573,8 +11573,8 @@
         </p:nvSpPr>
         <p:spPr>
           <a:xfrm>
-            <a:off x="3760150" y="1670423"/>
-            <a:ext cx="3702038" cy="907619"/>
+            <a:off x="3664629" y="1837353"/>
+            <a:ext cx="4137614" cy="1014407"/>
           </a:xfrm>
           <a:prstGeom prst="rect">
             <a:avLst/>
@@ -11593,7 +11593,7 @@
               <a:buNone/>
             </a:pPr>
             <a:r>
-              <a:rPr lang="en-US" sz="890" dirty="0">
+              <a:rPr lang="en-US" sz="990" dirty="0">
                 <a:solidFill>
                   <a:srgbClr val="5F7183"/>
                 </a:solidFill>
@@ -11603,7 +11603,7 @@
               </a:rPr>
               <a:t>Phần lớn quãng đường trên đường thật là những đoạn buồn tẻ: đi thẳng, không ai cắt ngang, không có gì xảy ra. Thứ quyết định an toàn lại là vài giây hiếm hoi — mà chạy dài chưa chắc gặp được.</a:t>
             </a:r>
-            <a:endParaRPr lang="en-US" sz="890" dirty="0"/>
+            <a:endParaRPr lang="en-US" sz="990" dirty="0"/>
           </a:p>
           <a:p>
             <a:pPr indent="0" marL="0">
@@ -11613,7 +11613,7 @@
               <a:buNone/>
             </a:pPr>
             <a:r>
-              <a:rPr lang="en-US" sz="820" dirty="0">
+              <a:rPr lang="en-US" sz="910" dirty="0">
                 <a:solidFill>
                   <a:srgbClr val="5F7183"/>
                 </a:solidFill>
@@ -11623,7 +11623,7 @@
               </a:rPr>
               <a:t>真實道路上的里程，絕大部分是無聊的：直行、沒人切進來、什麼都沒發生。決定安不安全的是那幾秒鐘的罕見狀況——而一直跑，不保證遇得到。</a:t>
             </a:r>
-            <a:endParaRPr lang="en-US" sz="890" dirty="0"/>
+            <a:endParaRPr lang="en-US" sz="990" dirty="0"/>
           </a:p>
         </p:txBody>
       </p:sp>
@@ -11635,8 +11635,8 @@
         </p:nvSpPr>
         <p:spPr>
           <a:xfrm>
-            <a:off x="1681812" y="2806268"/>
-            <a:ext cx="5780375" cy="441647"/>
+            <a:off x="1341758" y="3106840"/>
+            <a:ext cx="6460485" cy="493610"/>
           </a:xfrm>
           <a:prstGeom prst="roundRect">
             <a:avLst>
@@ -11662,8 +11662,8 @@
         </p:nvSpPr>
         <p:spPr>
           <a:xfrm>
-            <a:off x="1811708" y="2858226"/>
-            <a:ext cx="5520583" cy="350719"/>
+            <a:off x="1486937" y="3164912"/>
+            <a:ext cx="6170126" cy="391984"/>
           </a:xfrm>
           <a:prstGeom prst="rect">
             <a:avLst/>
@@ -11682,7 +11682,7 @@
               <a:buNone/>
             </a:pPr>
             <a:r>
-              <a:rPr lang="en-US" sz="890" b="1" dirty="0">
+              <a:rPr lang="en-US" sz="990" b="1" dirty="0">
                 <a:solidFill>
                   <a:srgbClr val="7A4E00"/>
                 </a:solidFill>
@@ -11692,7 +11692,7 @@
               </a:rPr>
               <a:t>Vậy nên câu hỏi không phải «chạy được bao nhiêu km», mà là «đã gặp qua những tình huống nào».</a:t>
             </a:r>
-            <a:endParaRPr lang="en-US" sz="890" dirty="0"/>
+            <a:endParaRPr lang="en-US" sz="990" dirty="0"/>
           </a:p>
           <a:p>
             <a:pPr indent="0" marL="0">
@@ -11702,7 +11702,7 @@
               <a:buNone/>
             </a:pPr>
             <a:r>
-              <a:rPr lang="en-US" sz="820" dirty="0">
+              <a:rPr lang="en-US" sz="910" dirty="0">
                 <a:solidFill>
                   <a:srgbClr val="7A4E00"/>
                 </a:solidFill>
@@ -11712,7 +11712,7 @@
               </a:rPr>
               <a:t>所以問題不是「跑了幾公里」，而是「遇過哪些狀況」。</a:t>
             </a:r>
-            <a:endParaRPr lang="en-US" sz="890" dirty="0"/>
+            <a:endParaRPr lang="en-US" sz="990" dirty="0"/>
           </a:p>
         </p:txBody>
       </p:sp>
@@ -11732,8 +11732,8 @@
         </p:blipFill>
         <p:spPr>
           <a:xfrm>
-            <a:off x="6663327" y="3338842"/>
-            <a:ext cx="779376" cy="172200"/>
+            <a:off x="7882128" y="109728"/>
+            <a:ext cx="1097280" cy="242439"/>
           </a:xfrm>
           <a:prstGeom prst="rect">
             <a:avLst/>
@@ -11748,8 +11748,8 @@
         </p:nvSpPr>
         <p:spPr>
           <a:xfrm>
-            <a:off x="1402536" y="3390800"/>
-            <a:ext cx="584532" cy="181855"/>
+            <a:off x="1029622" y="101626"/>
+            <a:ext cx="653307" cy="203251"/>
           </a:xfrm>
           <a:prstGeom prst="rect">
             <a:avLst/>
@@ -11765,7 +11765,7 @@
               <a:buNone/>
             </a:pPr>
             <a:r>
-              <a:rPr lang="en-US" sz="640" dirty="0">
+              <a:rPr lang="en-US" sz="710" dirty="0">
                 <a:solidFill>
                   <a:srgbClr val="5F7183"/>
                 </a:solidFill>
@@ -11775,7 +11775,7 @@
               </a:rPr>
               <a:t>2 / 16</a:t>
             </a:r>
-            <a:endParaRPr lang="en-US" sz="640" dirty="0"/>
+            <a:endParaRPr lang="en-US" sz="710" dirty="0"/>
           </a:p>
         </p:txBody>
       </p:sp>
@@ -11787,8 +11787,8 @@
         </p:nvSpPr>
         <p:spPr>
           <a:xfrm>
-            <a:off x="2006553" y="3390800"/>
-            <a:ext cx="1428857" cy="181855"/>
+            <a:off x="1704706" y="101626"/>
+            <a:ext cx="1596974" cy="203251"/>
           </a:xfrm>
           <a:prstGeom prst="rect">
             <a:avLst/>
@@ -11804,7 +11804,7 @@
               <a:buNone/>
             </a:pPr>
             <a:r>
-              <a:rPr lang="en-US" sz="640" dirty="0">
+              <a:rPr lang="en-US" sz="710" dirty="0">
                 <a:solidFill>
                   <a:srgbClr val="5F7183"/>
                 </a:solidFill>
@@ -11814,7 +11814,7 @@
               </a:rPr>
               <a:t>Tiết 2 · 第 2 節</a:t>
             </a:r>
-            <a:endParaRPr lang="en-US" sz="640" dirty="0"/>
+            <a:endParaRPr lang="en-US" sz="710" dirty="0"/>
           </a:p>
         </p:txBody>
       </p:sp>
@@ -11844,8 +11844,8 @@
       </p:nvGrpSpPr>
       <p:grpSpPr>
         <a:xfrm>
-          <a:off x="0" y="0"/>
-          <a:ext cx="0" cy="0"/>
+          <a:off x="898071" y="0"/>
+          <a:ext cx="1" cy="1"/>
           <a:chOff x="0" y="0"/>
           <a:chExt cx="0" cy="0"/>
         </a:xfrm>
@@ -11858,8 +11858,8 @@
         </p:nvSpPr>
         <p:spPr>
           <a:xfrm>
-            <a:off x="6130753" y="-947729"/>
-            <a:ext cx="2987610" cy="2987610"/>
+            <a:off x="6335486" y="-1102179"/>
+            <a:ext cx="3380014" cy="3380014"/>
           </a:xfrm>
           <a:prstGeom prst="ellipse">
             <a:avLst/>
@@ -11883,8 +11883,8 @@
         </p:nvSpPr>
         <p:spPr>
           <a:xfrm>
-            <a:off x="7104973" y="1520297"/>
-            <a:ext cx="1688649" cy="1688649"/>
+            <a:off x="7437664" y="1690007"/>
+            <a:ext cx="1910443" cy="1910443"/>
           </a:xfrm>
           <a:prstGeom prst="ellipse">
             <a:avLst/>
@@ -11905,8 +11905,8 @@
         </p:nvSpPr>
         <p:spPr>
           <a:xfrm>
-            <a:off x="1681812" y="1228031"/>
-            <a:ext cx="3247402" cy="220823"/>
+            <a:off x="1302204" y="1359354"/>
+            <a:ext cx="3673929" cy="249827"/>
           </a:xfrm>
           <a:prstGeom prst="rect">
             <a:avLst/>
@@ -11921,7 +11921,7 @@
             <a:pPr indent="0" marL="0">
               <a:buNone/>
             </a:pPr>
-            <a:endParaRPr lang="en-US" sz="960" dirty="0"/>
+            <a:endParaRPr lang="en-US" sz="1080" dirty="0"/>
           </a:p>
         </p:txBody>
       </p:sp>
@@ -11933,8 +11933,8 @@
         </p:nvSpPr>
         <p:spPr>
           <a:xfrm>
-            <a:off x="1681812" y="1481328"/>
-            <a:ext cx="5195843" cy="844324"/>
+            <a:off x="1302204" y="1645920"/>
+            <a:ext cx="5878286" cy="955221"/>
           </a:xfrm>
           <a:prstGeom prst="rect">
             <a:avLst/>
@@ -11953,7 +11953,7 @@
               <a:buNone/>
             </a:pPr>
             <a:r>
-              <a:rPr lang="en-US" sz="2060" b="1" dirty="0">
+              <a:rPr lang="en-US" sz="2330" b="1" dirty="0">
                 <a:solidFill>
                   <a:srgbClr val="FFFFFF"/>
                 </a:solidFill>
@@ -11963,7 +11963,7 @@
               </a:rPr>
               <a:t>Kịch bản có ba tầng</a:t>
             </a:r>
-            <a:endParaRPr lang="en-US" sz="2060" dirty="0"/>
+            <a:endParaRPr lang="en-US" sz="2330" dirty="0"/>
           </a:p>
           <a:p>
             <a:pPr indent="0" marL="0">
@@ -11973,7 +11973,7 @@
               <a:buNone/>
             </a:pPr>
             <a:r>
-              <a:rPr lang="en-US" sz="1210" dirty="0">
+              <a:rPr lang="en-US" sz="1370" dirty="0">
                 <a:solidFill>
                   <a:srgbClr val="AFC3D4"/>
                 </a:solidFill>
@@ -11983,7 +11983,7 @@
               </a:rPr>
               <a:t>場景分成三層</a:t>
             </a:r>
-            <a:endParaRPr lang="en-US" sz="2060" dirty="0"/>
+            <a:endParaRPr lang="en-US" sz="2330" dirty="0"/>
           </a:p>
         </p:txBody>
       </p:sp>
@@ -11995,8 +11995,8 @@
         </p:nvSpPr>
         <p:spPr>
           <a:xfrm>
-            <a:off x="1402536" y="3390800"/>
-            <a:ext cx="584532" cy="181855"/>
+            <a:off x="986246" y="102870"/>
+            <a:ext cx="661307" cy="205740"/>
           </a:xfrm>
           <a:prstGeom prst="rect">
             <a:avLst/>
@@ -12012,7 +12012,7 @@
               <a:buNone/>
             </a:pPr>
             <a:r>
-              <a:rPr lang="en-US" sz="640" dirty="0">
+              <a:rPr lang="en-US" sz="720" dirty="0">
                 <a:solidFill>
                   <a:srgbClr val="9FB3C8"/>
                 </a:solidFill>
@@ -12022,7 +12022,7 @@
               </a:rPr>
               <a:t>3 / 16</a:t>
             </a:r>
-            <a:endParaRPr lang="en-US" sz="640" dirty="0"/>
+            <a:endParaRPr lang="en-US" sz="720" dirty="0"/>
           </a:p>
         </p:txBody>
       </p:sp>
@@ -12034,8 +12034,8 @@
         </p:nvSpPr>
         <p:spPr>
           <a:xfrm>
-            <a:off x="2006553" y="3390800"/>
-            <a:ext cx="1428857" cy="181855"/>
+            <a:off x="1669596" y="102870"/>
+            <a:ext cx="1616529" cy="205740"/>
           </a:xfrm>
           <a:prstGeom prst="rect">
             <a:avLst/>
@@ -12051,7 +12051,7 @@
               <a:buNone/>
             </a:pPr>
             <a:r>
-              <a:rPr lang="en-US" sz="640" dirty="0">
+              <a:rPr lang="en-US" sz="720" dirty="0">
                 <a:solidFill>
                   <a:srgbClr val="9FB3C8"/>
                 </a:solidFill>
@@ -12061,7 +12061,7 @@
               </a:rPr>
               <a:t>Tiết 2 · 第 2 節</a:t>
             </a:r>
-            <a:endParaRPr lang="en-US" sz="640" dirty="0"/>
+            <a:endParaRPr lang="en-US" sz="720" dirty="0"/>
           </a:p>
         </p:txBody>
       </p:sp>
@@ -12084,8 +12084,8 @@
       </p:nvGrpSpPr>
       <p:grpSpPr>
         <a:xfrm>
-          <a:off x="0" y="0"/>
-          <a:ext cx="0" cy="0"/>
+          <a:off x="942514" y="0"/>
+          <a:ext cx="1" cy="1"/>
           <a:chOff x="0" y="0"/>
           <a:chExt cx="0" cy="0"/>
         </a:xfrm>
@@ -12098,8 +12098,8 @@
         </p:nvSpPr>
         <p:spPr>
           <a:xfrm>
-            <a:off x="1681812" y="325253"/>
-            <a:ext cx="5780375" cy="194844"/>
+            <a:off x="1341758" y="333913"/>
+            <a:ext cx="6460485" cy="217769"/>
           </a:xfrm>
           <a:prstGeom prst="rect">
             <a:avLst/>
@@ -12115,7 +12115,7 @@
               <a:buNone/>
             </a:pPr>
             <a:r>
-              <a:rPr lang="en-US" sz="890" b="1" dirty="0">
+              <a:rPr lang="en-US" sz="990" b="1" dirty="0">
                 <a:solidFill>
                   <a:srgbClr val="007F72"/>
                 </a:solidFill>
@@ -12125,7 +12125,7 @@
               </a:rPr>
               <a:t>Tầng 1 / 3 · 第一層</a:t>
             </a:r>
-            <a:endParaRPr lang="en-US" sz="890" dirty="0"/>
+            <a:endParaRPr lang="en-US" sz="990" dirty="0"/>
           </a:p>
         </p:txBody>
       </p:sp>
@@ -12137,8 +12137,8 @@
         </p:nvSpPr>
         <p:spPr>
           <a:xfrm>
-            <a:off x="1681812" y="809116"/>
-            <a:ext cx="1753597" cy="1786071"/>
+            <a:off x="1341758" y="874706"/>
+            <a:ext cx="1959922" cy="1996217"/>
           </a:xfrm>
           <a:prstGeom prst="roundRect">
             <a:avLst>
@@ -12164,8 +12164,8 @@
         </p:nvSpPr>
         <p:spPr>
           <a:xfrm>
-            <a:off x="2216335" y="1259206"/>
-            <a:ext cx="684552" cy="885891"/>
+            <a:off x="1939171" y="1377753"/>
+            <a:ext cx="765096" cy="990124"/>
           </a:xfrm>
           <a:prstGeom prst="roundRect">
             <a:avLst>
@@ -12193,8 +12193,8 @@
         </p:nvSpPr>
         <p:spPr>
           <a:xfrm>
-            <a:off x="2317004" y="1440411"/>
-            <a:ext cx="483213" cy="50335"/>
+            <a:off x="2051685" y="1580278"/>
+            <a:ext cx="540068" cy="56257"/>
           </a:xfrm>
           <a:prstGeom prst="rect">
             <a:avLst/>
@@ -12215,8 +12215,8 @@
         </p:nvSpPr>
         <p:spPr>
           <a:xfrm>
-            <a:off x="2317004" y="1581348"/>
-            <a:ext cx="483213" cy="50335"/>
+            <a:off x="2051685" y="1737798"/>
+            <a:ext cx="540068" cy="56257"/>
           </a:xfrm>
           <a:prstGeom prst="rect">
             <a:avLst/>
@@ -12237,8 +12237,8 @@
         </p:nvSpPr>
         <p:spPr>
           <a:xfrm>
-            <a:off x="2317004" y="1722285"/>
-            <a:ext cx="483213" cy="50335"/>
+            <a:off x="2051685" y="1895317"/>
+            <a:ext cx="540068" cy="56257"/>
           </a:xfrm>
           <a:prstGeom prst="rect">
             <a:avLst/>
@@ -12259,8 +12259,8 @@
         </p:nvSpPr>
         <p:spPr>
           <a:xfrm>
-            <a:off x="2317004" y="1863222"/>
-            <a:ext cx="483213" cy="50335"/>
+            <a:off x="2051685" y="2052837"/>
+            <a:ext cx="540068" cy="56257"/>
           </a:xfrm>
           <a:prstGeom prst="rect">
             <a:avLst/>
@@ -12281,8 +12281,8 @@
         </p:nvSpPr>
         <p:spPr>
           <a:xfrm>
-            <a:off x="2317004" y="2004160"/>
-            <a:ext cx="241607" cy="50335"/>
+            <a:off x="2051685" y="2210357"/>
+            <a:ext cx="270034" cy="56257"/>
           </a:xfrm>
           <a:prstGeom prst="rect">
             <a:avLst/>
@@ -12301,8 +12301,8 @@
         </p:nvSpPr>
         <p:spPr>
           <a:xfrm>
-            <a:off x="3760150" y="963355"/>
-            <a:ext cx="3702038" cy="714266"/>
+            <a:off x="3664629" y="1047093"/>
+            <a:ext cx="4137614" cy="798305"/>
           </a:xfrm>
           <a:prstGeom prst="rect">
             <a:avLst/>
@@ -12321,7 +12321,7 @@
               <a:buNone/>
             </a:pPr>
             <a:r>
-              <a:rPr lang="en-US" sz="1630" b="1" dirty="0">
+              <a:rPr lang="en-US" sz="1830" b="1" dirty="0">
                 <a:solidFill>
                   <a:srgbClr val="0B1F3A"/>
                 </a:solidFill>
@@ -12331,7 +12331,7 @@
               </a:rPr>
               <a:t>Kịch bản chức năng: viết bằng tiếng người, không có con số</a:t>
             </a:r>
-            <a:endParaRPr lang="en-US" sz="1630" dirty="0"/>
+            <a:endParaRPr lang="en-US" sz="1830" dirty="0"/>
           </a:p>
           <a:p>
             <a:pPr indent="0" marL="0">
@@ -12341,7 +12341,7 @@
               <a:buNone/>
             </a:pPr>
             <a:r>
-              <a:rPr lang="en-US" sz="990" dirty="0">
+              <a:rPr lang="en-US" sz="1110" dirty="0">
                 <a:solidFill>
                   <a:srgbClr val="007F72"/>
                 </a:solidFill>
@@ -12351,7 +12351,7 @@
               </a:rPr>
               <a:t>功能場景：用人話寫，沒有數字</a:t>
             </a:r>
-            <a:endParaRPr lang="en-US" sz="1630" dirty="0"/>
+            <a:endParaRPr lang="en-US" sz="1830" dirty="0"/>
           </a:p>
         </p:txBody>
       </p:sp>
@@ -12363,8 +12363,8 @@
         </p:nvSpPr>
         <p:spPr>
           <a:xfrm>
-            <a:off x="3760150" y="1742570"/>
-            <a:ext cx="3702038" cy="763326"/>
+            <a:off x="3664629" y="1917989"/>
+            <a:ext cx="4137614" cy="853137"/>
           </a:xfrm>
           <a:prstGeom prst="rect">
             <a:avLst/>
@@ -12383,7 +12383,7 @@
               <a:buNone/>
             </a:pPr>
             <a:r>
-              <a:rPr lang="en-US" sz="890" dirty="0">
+              <a:rPr lang="en-US" sz="990" dirty="0">
                 <a:solidFill>
                   <a:srgbClr val="5F7183"/>
                 </a:solidFill>
@@ -12393,7 +12393,7 @@
               </a:rPr>
               <a:t>Ví dụ: «xe phía trước phanh gấp». Ai đọc cũng hiểu, kể cả người không làm kỹ thuật. Nhưng chưa test được, vì chưa có con số nào.</a:t>
             </a:r>
-            <a:endParaRPr lang="en-US" sz="890" dirty="0"/>
+            <a:endParaRPr lang="en-US" sz="990" dirty="0"/>
           </a:p>
           <a:p>
             <a:pPr indent="0" marL="0">
@@ -12403,7 +12403,7 @@
               <a:buNone/>
             </a:pPr>
             <a:r>
-              <a:rPr lang="en-US" sz="820" dirty="0">
+              <a:rPr lang="en-US" sz="910" dirty="0">
                 <a:solidFill>
                   <a:srgbClr val="5F7183"/>
                 </a:solidFill>
@@ -12413,7 +12413,7 @@
               </a:rPr>
               <a:t>例子：「前車急煞」。任何人都看得懂，連不是工程師的人也懂。但還沒辦法拿來測，因為還沒有任何數字。</a:t>
             </a:r>
-            <a:endParaRPr lang="en-US" sz="890" dirty="0"/>
+            <a:endParaRPr lang="en-US" sz="990" dirty="0"/>
           </a:p>
         </p:txBody>
       </p:sp>
@@ -12425,8 +12425,8 @@
         </p:nvSpPr>
         <p:spPr>
           <a:xfrm>
-            <a:off x="1681812" y="2806268"/>
-            <a:ext cx="5780375" cy="441647"/>
+            <a:off x="1341758" y="3106840"/>
+            <a:ext cx="6460485" cy="493610"/>
           </a:xfrm>
           <a:prstGeom prst="roundRect">
             <a:avLst>
@@ -12452,8 +12452,8 @@
         </p:nvSpPr>
         <p:spPr>
           <a:xfrm>
-            <a:off x="1811708" y="2858226"/>
-            <a:ext cx="5520583" cy="350719"/>
+            <a:off x="1486937" y="3164912"/>
+            <a:ext cx="6170126" cy="391984"/>
           </a:xfrm>
           <a:prstGeom prst="rect">
             <a:avLst/>
@@ -12472,7 +12472,7 @@
               <a:buNone/>
             </a:pPr>
             <a:r>
-              <a:rPr lang="en-US" sz="890" b="1" dirty="0">
+              <a:rPr lang="en-US" sz="990" b="1" dirty="0">
                 <a:solidFill>
                   <a:srgbClr val="7A4E00"/>
                 </a:solidFill>
@@ -12482,7 +12482,7 @@
               </a:rPr>
               <a:t>Dùng để làm gì: liệt kê ra hết những chuyện có thể xảy ra. Giai đoạn này càng nhiều càng tốt.</a:t>
             </a:r>
-            <a:endParaRPr lang="en-US" sz="890" dirty="0"/>
+            <a:endParaRPr lang="en-US" sz="990" dirty="0"/>
           </a:p>
           <a:p>
             <a:pPr indent="0" marL="0">
@@ -12492,7 +12492,7 @@
               <a:buNone/>
             </a:pPr>
             <a:r>
-              <a:rPr lang="en-US" sz="820" dirty="0">
+              <a:rPr lang="en-US" sz="910" dirty="0">
                 <a:solidFill>
                   <a:srgbClr val="7A4E00"/>
                 </a:solidFill>
@@ -12502,7 +12502,7 @@
               </a:rPr>
               <a:t>用途：把所有可能發生的事列出來。這個階段愈多愈好。</a:t>
             </a:r>
-            <a:endParaRPr lang="en-US" sz="890" dirty="0"/>
+            <a:endParaRPr lang="en-US" sz="990" dirty="0"/>
           </a:p>
         </p:txBody>
       </p:sp>
@@ -12522,8 +12522,8 @@
         </p:blipFill>
         <p:spPr>
           <a:xfrm>
-            <a:off x="6663327" y="3338842"/>
-            <a:ext cx="779376" cy="172200"/>
+            <a:off x="7882128" y="109728"/>
+            <a:ext cx="1097280" cy="242439"/>
           </a:xfrm>
           <a:prstGeom prst="rect">
             <a:avLst/>
@@ -12538,8 +12538,8 @@
         </p:nvSpPr>
         <p:spPr>
           <a:xfrm>
-            <a:off x="1402536" y="3390800"/>
-            <a:ext cx="584532" cy="181855"/>
+            <a:off x="1029622" y="101626"/>
+            <a:ext cx="653307" cy="203251"/>
           </a:xfrm>
           <a:prstGeom prst="rect">
             <a:avLst/>
@@ -12555,7 +12555,7 @@
               <a:buNone/>
             </a:pPr>
             <a:r>
-              <a:rPr lang="en-US" sz="640" dirty="0">
+              <a:rPr lang="en-US" sz="710" dirty="0">
                 <a:solidFill>
                   <a:srgbClr val="5F7183"/>
                 </a:solidFill>
@@ -12565,7 +12565,7 @@
               </a:rPr>
               <a:t>4 / 16</a:t>
             </a:r>
-            <a:endParaRPr lang="en-US" sz="640" dirty="0"/>
+            <a:endParaRPr lang="en-US" sz="710" dirty="0"/>
           </a:p>
         </p:txBody>
       </p:sp>
@@ -12577,8 +12577,8 @@
         </p:nvSpPr>
         <p:spPr>
           <a:xfrm>
-            <a:off x="2006553" y="3390800"/>
-            <a:ext cx="1428857" cy="181855"/>
+            <a:off x="1704706" y="101626"/>
+            <a:ext cx="1596974" cy="203251"/>
           </a:xfrm>
           <a:prstGeom prst="rect">
             <a:avLst/>
@@ -12594,7 +12594,7 @@
               <a:buNone/>
             </a:pPr>
             <a:r>
-              <a:rPr lang="en-US" sz="640" dirty="0">
+              <a:rPr lang="en-US" sz="710" dirty="0">
                 <a:solidFill>
                   <a:srgbClr val="5F7183"/>
                 </a:solidFill>
@@ -12604,7 +12604,7 @@
               </a:rPr>
               <a:t>Tiết 2 · 第 2 節</a:t>
             </a:r>
-            <a:endParaRPr lang="en-US" sz="640" dirty="0"/>
+            <a:endParaRPr lang="en-US" sz="710" dirty="0"/>
           </a:p>
         </p:txBody>
       </p:sp>
@@ -12627,8 +12627,8 @@
       </p:nvGrpSpPr>
       <p:grpSpPr>
         <a:xfrm>
-          <a:off x="0" y="0"/>
-          <a:ext cx="0" cy="0"/>
+          <a:off x="942514" y="0"/>
+          <a:ext cx="1" cy="1"/>
           <a:chOff x="0" y="0"/>
           <a:chExt cx="0" cy="0"/>
         </a:xfrm>
@@ -12641,8 +12641,8 @@
         </p:nvSpPr>
         <p:spPr>
           <a:xfrm>
-            <a:off x="1681812" y="325253"/>
-            <a:ext cx="5780375" cy="194844"/>
+            <a:off x="1341758" y="333913"/>
+            <a:ext cx="6460485" cy="217769"/>
           </a:xfrm>
           <a:prstGeom prst="rect">
             <a:avLst/>
@@ -12658,7 +12658,7 @@
               <a:buNone/>
             </a:pPr>
             <a:r>
-              <a:rPr lang="en-US" sz="890" b="1" dirty="0">
+              <a:rPr lang="en-US" sz="990" b="1" dirty="0">
                 <a:solidFill>
                   <a:srgbClr val="007F72"/>
                 </a:solidFill>
@@ -12668,7 +12668,7 @@
               </a:rPr>
               <a:t>Tầng 2 / 3 · 第二層</a:t>
             </a:r>
-            <a:endParaRPr lang="en-US" sz="890" dirty="0"/>
+            <a:endParaRPr lang="en-US" sz="990" dirty="0"/>
           </a:p>
         </p:txBody>
       </p:sp>
@@ -12680,8 +12680,8 @@
         </p:nvSpPr>
         <p:spPr>
           <a:xfrm>
-            <a:off x="1681812" y="809116"/>
-            <a:ext cx="1753597" cy="1786071"/>
+            <a:off x="1341758" y="874706"/>
+            <a:ext cx="1959922" cy="1996217"/>
           </a:xfrm>
           <a:prstGeom prst="roundRect">
             <a:avLst>
@@ -12707,8 +12707,8 @@
         </p:nvSpPr>
         <p:spPr>
           <a:xfrm>
-            <a:off x="1992784" y="1320218"/>
-            <a:ext cx="1131655" cy="69442"/>
+            <a:off x="1689317" y="1445944"/>
+            <a:ext cx="1264804" cy="77613"/>
           </a:xfrm>
           <a:prstGeom prst="roundRect">
             <a:avLst>
@@ -12729,8 +12729,8 @@
         </p:nvSpPr>
         <p:spPr>
           <a:xfrm>
-            <a:off x="2196481" y="1320218"/>
-            <a:ext cx="611093" cy="69442"/>
+            <a:off x="1916982" y="1445944"/>
+            <a:ext cx="682994" cy="77613"/>
           </a:xfrm>
           <a:prstGeom prst="roundRect">
             <a:avLst>
@@ -12751,8 +12751,8 @@
         </p:nvSpPr>
         <p:spPr>
           <a:xfrm>
-            <a:off x="1992784" y="1667430"/>
-            <a:ext cx="1131655" cy="69442"/>
+            <a:off x="1689317" y="1834008"/>
+            <a:ext cx="1264804" cy="77613"/>
           </a:xfrm>
           <a:prstGeom prst="roundRect">
             <a:avLst>
@@ -12773,8 +12773,8 @@
         </p:nvSpPr>
         <p:spPr>
           <a:xfrm>
-            <a:off x="2377546" y="1667430"/>
-            <a:ext cx="633727" cy="69442"/>
+            <a:off x="2119350" y="1834008"/>
+            <a:ext cx="708290" cy="77613"/>
           </a:xfrm>
           <a:prstGeom prst="roundRect">
             <a:avLst>
@@ -12795,8 +12795,8 @@
         </p:nvSpPr>
         <p:spPr>
           <a:xfrm>
-            <a:off x="1992784" y="2014642"/>
-            <a:ext cx="1131655" cy="69442"/>
+            <a:off x="1689317" y="2222073"/>
+            <a:ext cx="1264804" cy="77613"/>
           </a:xfrm>
           <a:prstGeom prst="roundRect">
             <a:avLst>
@@ -12817,8 +12817,8 @@
         </p:nvSpPr>
         <p:spPr>
           <a:xfrm>
-            <a:off x="2105949" y="2014642"/>
-            <a:ext cx="588460" cy="69442"/>
+            <a:off x="1815798" y="2222073"/>
+            <a:ext cx="657697" cy="77613"/>
           </a:xfrm>
           <a:prstGeom prst="roundRect">
             <a:avLst>
@@ -12839,8 +12839,8 @@
         </p:nvSpPr>
         <p:spPr>
           <a:xfrm>
-            <a:off x="3760150" y="963355"/>
-            <a:ext cx="3702038" cy="714266"/>
+            <a:off x="3664629" y="1047093"/>
+            <a:ext cx="4137614" cy="798305"/>
           </a:xfrm>
           <a:prstGeom prst="rect">
             <a:avLst/>
@@ -12859,7 +12859,7 @@
               <a:buNone/>
             </a:pPr>
             <a:r>
-              <a:rPr lang="en-US" sz="1630" b="1" dirty="0">
+              <a:rPr lang="en-US" sz="1830" b="1" dirty="0">
                 <a:solidFill>
                   <a:srgbClr val="0B1F3A"/>
                 </a:solidFill>
@@ -12869,7 +12869,7 @@
               </a:rPr>
               <a:t>Kịch bản logic: thêm tham số, nhưng mỗi tham số là một KHOẢNG</a:t>
             </a:r>
-            <a:endParaRPr lang="en-US" sz="1630" dirty="0"/>
+            <a:endParaRPr lang="en-US" sz="1830" dirty="0"/>
           </a:p>
           <a:p>
             <a:pPr indent="0" marL="0">
@@ -12879,7 +12879,7 @@
               <a:buNone/>
             </a:pPr>
             <a:r>
-              <a:rPr lang="en-US" sz="990" dirty="0">
+              <a:rPr lang="en-US" sz="1110" dirty="0">
                 <a:solidFill>
                   <a:srgbClr val="007F72"/>
                 </a:solidFill>
@@ -12889,7 +12889,7 @@
               </a:rPr>
               <a:t>邏輯場景：加上參數，但每個參數是一個「範圍」</a:t>
             </a:r>
-            <a:endParaRPr lang="en-US" sz="1630" dirty="0"/>
+            <a:endParaRPr lang="en-US" sz="1830" dirty="0"/>
           </a:p>
         </p:txBody>
       </p:sp>
@@ -12901,8 +12901,8 @@
         </p:nvSpPr>
         <p:spPr>
           <a:xfrm>
-            <a:off x="3760150" y="1742570"/>
-            <a:ext cx="3702038" cy="763326"/>
+            <a:off x="3664629" y="1917989"/>
+            <a:ext cx="4137614" cy="853137"/>
           </a:xfrm>
           <a:prstGeom prst="rect">
             <a:avLst/>
@@ -12921,7 +12921,7 @@
               <a:buNone/>
             </a:pPr>
             <a:r>
-              <a:rPr lang="en-US" sz="890" dirty="0">
+              <a:rPr lang="en-US" sz="990" dirty="0">
                 <a:solidFill>
                   <a:srgbClr val="5F7183"/>
                 </a:solidFill>
@@ -12931,7 +12931,7 @@
               </a:rPr>
               <a:t>Ví dụ: xe phía trước ở cách 20 đến 60 m, giảm tốc 3 đến 8 m/s², xe mình chạy 40 đến 70 km/h. Vẫn chưa test được, nhưng đã đủ chính xác để máy hiểu.</a:t>
             </a:r>
-            <a:endParaRPr lang="en-US" sz="890" dirty="0"/>
+            <a:endParaRPr lang="en-US" sz="990" dirty="0"/>
           </a:p>
           <a:p>
             <a:pPr indent="0" marL="0">
@@ -12941,7 +12941,7 @@
               <a:buNone/>
             </a:pPr>
             <a:r>
-              <a:rPr lang="en-US" sz="820" dirty="0">
+              <a:rPr lang="en-US" sz="910" dirty="0">
                 <a:solidFill>
                   <a:srgbClr val="5F7183"/>
                 </a:solidFill>
@@ -12951,7 +12951,7 @@
               </a:rPr>
               <a:t>例子：前車在 20 到 60 公尺處，以 3 到 8 m/s² 減速，自車時速 40 到 70。還是不能直接測，但已經精確到電腦看得懂。</a:t>
             </a:r>
-            <a:endParaRPr lang="en-US" sz="890" dirty="0"/>
+            <a:endParaRPr lang="en-US" sz="990" dirty="0"/>
           </a:p>
         </p:txBody>
       </p:sp>
@@ -12963,8 +12963,8 @@
         </p:nvSpPr>
         <p:spPr>
           <a:xfrm>
-            <a:off x="1681812" y="2806268"/>
-            <a:ext cx="5780375" cy="441647"/>
+            <a:off x="1341758" y="3106840"/>
+            <a:ext cx="6460485" cy="493610"/>
           </a:xfrm>
           <a:prstGeom prst="roundRect">
             <a:avLst>
@@ -12990,8 +12990,8 @@
         </p:nvSpPr>
         <p:spPr>
           <a:xfrm>
-            <a:off x="1811708" y="2858226"/>
-            <a:ext cx="5520583" cy="350719"/>
+            <a:off x="1486937" y="3164912"/>
+            <a:ext cx="6170126" cy="391984"/>
           </a:xfrm>
           <a:prstGeom prst="rect">
             <a:avLst/>
@@ -13010,7 +13010,7 @@
               <a:buNone/>
             </a:pPr>
             <a:r>
-              <a:rPr lang="en-US" sz="890" b="1" dirty="0">
+              <a:rPr lang="en-US" sz="990" b="1" dirty="0">
                 <a:solidFill>
                   <a:srgbClr val="7A4E00"/>
                 </a:solidFill>
@@ -13020,7 +13020,7 @@
               </a:rPr>
               <a:t>Đây là tầng quan trọng nhất — và cũng là tầng bài cuối kỳ yêu cầu các bạn viết.</a:t>
             </a:r>
-            <a:endParaRPr lang="en-US" sz="890" dirty="0"/>
+            <a:endParaRPr lang="en-US" sz="990" dirty="0"/>
           </a:p>
           <a:p>
             <a:pPr indent="0" marL="0">
@@ -13030,7 +13030,7 @@
               <a:buNone/>
             </a:pPr>
             <a:r>
-              <a:rPr lang="en-US" sz="820" dirty="0">
+              <a:rPr lang="en-US" sz="910" dirty="0">
                 <a:solidFill>
                   <a:srgbClr val="7A4E00"/>
                 </a:solidFill>
@@ -13040,7 +13040,7 @@
               </a:rPr>
               <a:t>這是最重要的一層——也是期末專題要各位寫的那一層。</a:t>
             </a:r>
-            <a:endParaRPr lang="en-US" sz="890" dirty="0"/>
+            <a:endParaRPr lang="en-US" sz="990" dirty="0"/>
           </a:p>
         </p:txBody>
       </p:sp>
@@ -13060,8 +13060,8 @@
         </p:blipFill>
         <p:spPr>
           <a:xfrm>
-            <a:off x="6663327" y="3338842"/>
-            <a:ext cx="779376" cy="172200"/>
+            <a:off x="7882128" y="109728"/>
+            <a:ext cx="1097280" cy="242439"/>
           </a:xfrm>
           <a:prstGeom prst="rect">
             <a:avLst/>
@@ -13076,8 +13076,8 @@
         </p:nvSpPr>
         <p:spPr>
           <a:xfrm>
-            <a:off x="1402536" y="3390800"/>
-            <a:ext cx="584532" cy="181855"/>
+            <a:off x="1029622" y="101626"/>
+            <a:ext cx="653307" cy="203251"/>
           </a:xfrm>
           <a:prstGeom prst="rect">
             <a:avLst/>
@@ -13093,7 +13093,7 @@
               <a:buNone/>
             </a:pPr>
             <a:r>
-              <a:rPr lang="en-US" sz="640" dirty="0">
+              <a:rPr lang="en-US" sz="710" dirty="0">
                 <a:solidFill>
                   <a:srgbClr val="5F7183"/>
                 </a:solidFill>
@@ -13103,7 +13103,7 @@
               </a:rPr>
               <a:t>5 / 16</a:t>
             </a:r>
-            <a:endParaRPr lang="en-US" sz="640" dirty="0"/>
+            <a:endParaRPr lang="en-US" sz="710" dirty="0"/>
           </a:p>
         </p:txBody>
       </p:sp>
@@ -13115,8 +13115,8 @@
         </p:nvSpPr>
         <p:spPr>
           <a:xfrm>
-            <a:off x="2006553" y="3390800"/>
-            <a:ext cx="1428857" cy="181855"/>
+            <a:off x="1704706" y="101626"/>
+            <a:ext cx="1596974" cy="203251"/>
           </a:xfrm>
           <a:prstGeom prst="rect">
             <a:avLst/>
@@ -13132,7 +13132,7 @@
               <a:buNone/>
             </a:pPr>
             <a:r>
-              <a:rPr lang="en-US" sz="640" dirty="0">
+              <a:rPr lang="en-US" sz="710" dirty="0">
                 <a:solidFill>
                   <a:srgbClr val="5F7183"/>
                 </a:solidFill>
@@ -13142,7 +13142,7 @@
               </a:rPr>
               <a:t>Tiết 2 · 第 2 節</a:t>
             </a:r>
-            <a:endParaRPr lang="en-US" sz="640" dirty="0"/>
+            <a:endParaRPr lang="en-US" sz="710" dirty="0"/>
           </a:p>
         </p:txBody>
       </p:sp>
@@ -13165,8 +13165,8 @@
       </p:nvGrpSpPr>
       <p:grpSpPr>
         <a:xfrm>
-          <a:off x="0" y="0"/>
-          <a:ext cx="0" cy="0"/>
+          <a:off x="942514" y="0"/>
+          <a:ext cx="1" cy="1"/>
           <a:chOff x="0" y="0"/>
           <a:chExt cx="0" cy="0"/>
         </a:xfrm>
@@ -13179,8 +13179,8 @@
         </p:nvSpPr>
         <p:spPr>
           <a:xfrm>
-            <a:off x="1681812" y="325253"/>
-            <a:ext cx="5780375" cy="194844"/>
+            <a:off x="1341758" y="333913"/>
+            <a:ext cx="6460485" cy="217769"/>
           </a:xfrm>
           <a:prstGeom prst="rect">
             <a:avLst/>
@@ -13196,7 +13196,7 @@
               <a:buNone/>
             </a:pPr>
             <a:r>
-              <a:rPr lang="en-US" sz="890" b="1" dirty="0">
+              <a:rPr lang="en-US" sz="990" b="1" dirty="0">
                 <a:solidFill>
                   <a:srgbClr val="007F72"/>
                 </a:solidFill>
@@ -13206,7 +13206,7 @@
               </a:rPr>
               <a:t>Tầng 3 / 3 · 第三層</a:t>
             </a:r>
-            <a:endParaRPr lang="en-US" sz="890" dirty="0"/>
+            <a:endParaRPr lang="en-US" sz="990" dirty="0"/>
           </a:p>
         </p:txBody>
       </p:sp>
@@ -13218,8 +13218,8 @@
         </p:nvSpPr>
         <p:spPr>
           <a:xfrm>
-            <a:off x="1681812" y="809116"/>
-            <a:ext cx="1753597" cy="1786071"/>
+            <a:off x="1341758" y="874706"/>
+            <a:ext cx="1959922" cy="1996217"/>
           </a:xfrm>
           <a:prstGeom prst="roundRect">
             <a:avLst>
@@ -13245,8 +13245,8 @@
         </p:nvSpPr>
         <p:spPr>
           <a:xfrm>
-            <a:off x="1992784" y="1320218"/>
-            <a:ext cx="1131655" cy="69442"/>
+            <a:off x="1689317" y="1445944"/>
+            <a:ext cx="1264804" cy="77613"/>
           </a:xfrm>
           <a:prstGeom prst="roundRect">
             <a:avLst>
@@ -13267,8 +13267,8 @@
         </p:nvSpPr>
         <p:spPr>
           <a:xfrm>
-            <a:off x="2408105" y="1294966"/>
-            <a:ext cx="119946" cy="119946"/>
+            <a:off x="2153505" y="1417721"/>
+            <a:ext cx="134058" cy="134058"/>
           </a:xfrm>
           <a:prstGeom prst="ellipse">
             <a:avLst/>
@@ -13287,8 +13287,8 @@
         </p:nvSpPr>
         <p:spPr>
           <a:xfrm>
-            <a:off x="1992784" y="1667430"/>
-            <a:ext cx="1131655" cy="69442"/>
+            <a:off x="1689317" y="1834008"/>
+            <a:ext cx="1264804" cy="77613"/>
           </a:xfrm>
           <a:prstGeom prst="roundRect">
             <a:avLst>
@@ -13309,8 +13309,8 @@
         </p:nvSpPr>
         <p:spPr>
           <a:xfrm>
-            <a:off x="2679703" y="1642178"/>
-            <a:ext cx="119946" cy="119946"/>
+            <a:off x="2457058" y="1805785"/>
+            <a:ext cx="134058" cy="134058"/>
           </a:xfrm>
           <a:prstGeom prst="ellipse">
             <a:avLst/>
@@ -13329,8 +13329,8 @@
         </p:nvSpPr>
         <p:spPr>
           <a:xfrm>
-            <a:off x="1992784" y="2014642"/>
-            <a:ext cx="1131655" cy="69442"/>
+            <a:off x="1689317" y="2222073"/>
+            <a:ext cx="1264804" cy="77613"/>
           </a:xfrm>
           <a:prstGeom prst="roundRect">
             <a:avLst>
@@ -13351,8 +13351,8 @@
         </p:nvSpPr>
         <p:spPr>
           <a:xfrm>
-            <a:off x="2272307" y="1989391"/>
-            <a:ext cx="119946" cy="119946"/>
+            <a:off x="2001729" y="2193850"/>
+            <a:ext cx="134058" cy="134058"/>
           </a:xfrm>
           <a:prstGeom prst="ellipse">
             <a:avLst/>
@@ -13371,8 +13371,8 @@
         </p:nvSpPr>
         <p:spPr>
           <a:xfrm>
-            <a:off x="3760150" y="963355"/>
-            <a:ext cx="3702038" cy="714266"/>
+            <a:off x="3664629" y="1047093"/>
+            <a:ext cx="4137614" cy="798305"/>
           </a:xfrm>
           <a:prstGeom prst="rect">
             <a:avLst/>
@@ -13391,7 +13391,7 @@
               <a:buNone/>
             </a:pPr>
             <a:r>
-              <a:rPr lang="en-US" sz="1630" b="1" dirty="0">
+              <a:rPr lang="en-US" sz="1830" b="1" dirty="0">
                 <a:solidFill>
                   <a:srgbClr val="0B1F3A"/>
                 </a:solidFill>
@@ -13401,7 +13401,7 @@
               </a:rPr>
               <a:t>Kịch bản cụ thể: mỗi tham số chốt đúng một giá trị</a:t>
             </a:r>
-            <a:endParaRPr lang="en-US" sz="1630" dirty="0"/>
+            <a:endParaRPr lang="en-US" sz="1830" dirty="0"/>
           </a:p>
           <a:p>
             <a:pPr indent="0" marL="0">
@@ -13411,7 +13411,7 @@
               <a:buNone/>
             </a:pPr>
             <a:r>
-              <a:rPr lang="en-US" sz="990" dirty="0">
+              <a:rPr lang="en-US" sz="1110" dirty="0">
                 <a:solidFill>
                   <a:srgbClr val="007F72"/>
                 </a:solidFill>
@@ -13421,7 +13421,7 @@
               </a:rPr>
               <a:t>具體場景：每個參數固定成一個值</a:t>
             </a:r>
-            <a:endParaRPr lang="en-US" sz="1630" dirty="0"/>
+            <a:endParaRPr lang="en-US" sz="1830" dirty="0"/>
           </a:p>
         </p:txBody>
       </p:sp>
@@ -13433,8 +13433,8 @@
         </p:nvSpPr>
         <p:spPr>
           <a:xfrm>
-            <a:off x="3760150" y="1742570"/>
-            <a:ext cx="3702038" cy="763326"/>
+            <a:off x="3664629" y="1917989"/>
+            <a:ext cx="4137614" cy="853137"/>
           </a:xfrm>
           <a:prstGeom prst="rect">
             <a:avLst/>
@@ -13453,7 +13453,7 @@
               <a:buNone/>
             </a:pPr>
             <a:r>
-              <a:rPr lang="en-US" sz="890" dirty="0">
+              <a:rPr lang="en-US" sz="990" dirty="0">
                 <a:solidFill>
                   <a:srgbClr val="5F7183"/>
                 </a:solidFill>
@@ -13463,7 +13463,7 @@
               </a:rPr>
               <a:t>Ví dụ: xe phía trước cách đúng 35 m, giảm tốc đúng 6 m/s², xe mình chạy đúng 50 km/h. Đây mới là thứ chạy được trong mô phỏng — chạy một lần ra một kết quả.</a:t>
             </a:r>
-            <a:endParaRPr lang="en-US" sz="890" dirty="0"/>
+            <a:endParaRPr lang="en-US" sz="990" dirty="0"/>
           </a:p>
           <a:p>
             <a:pPr indent="0" marL="0">
@@ -13473,7 +13473,7 @@
               <a:buNone/>
             </a:pPr>
             <a:r>
-              <a:rPr lang="en-US" sz="820" dirty="0">
+              <a:rPr lang="en-US" sz="910" dirty="0">
                 <a:solidFill>
                   <a:srgbClr val="5F7183"/>
                 </a:solidFill>
@@ -13483,7 +13483,7 @@
               </a:rPr>
               <a:t>例子：前車剛好 35 公尺，減速度剛好 6 m/s²，自車剛好時速 50。這才是模擬器真的跑得起來的東西——跑一次，出一個結果。</a:t>
             </a:r>
-            <a:endParaRPr lang="en-US" sz="890" dirty="0"/>
+            <a:endParaRPr lang="en-US" sz="990" dirty="0"/>
           </a:p>
         </p:txBody>
       </p:sp>
@@ -13495,8 +13495,8 @@
         </p:nvSpPr>
         <p:spPr>
           <a:xfrm>
-            <a:off x="1681812" y="2806268"/>
-            <a:ext cx="5780375" cy="441647"/>
+            <a:off x="1341758" y="3106840"/>
+            <a:ext cx="6460485" cy="493610"/>
           </a:xfrm>
           <a:prstGeom prst="roundRect">
             <a:avLst>
@@ -13522,8 +13522,8 @@
         </p:nvSpPr>
         <p:spPr>
           <a:xfrm>
-            <a:off x="1811708" y="2858226"/>
-            <a:ext cx="5520583" cy="350719"/>
+            <a:off x="1486937" y="3164912"/>
+            <a:ext cx="6170126" cy="391984"/>
           </a:xfrm>
           <a:prstGeom prst="rect">
             <a:avLst/>
@@ -13542,7 +13542,7 @@
               <a:buNone/>
             </a:pPr>
             <a:r>
-              <a:rPr lang="en-US" sz="890" b="1" dirty="0">
+              <a:rPr lang="en-US" sz="990" b="1" dirty="0">
                 <a:solidFill>
                   <a:srgbClr val="7A4E00"/>
                 </a:solidFill>
@@ -13552,7 +13552,7 @@
               </a:rPr>
               <a:t>Một kịch bản logic có thể bung ra hàng nghìn, hàng chục nghìn kịch bản cụ thể.</a:t>
             </a:r>
-            <a:endParaRPr lang="en-US" sz="890" dirty="0"/>
+            <a:endParaRPr lang="en-US" sz="990" dirty="0"/>
           </a:p>
           <a:p>
             <a:pPr indent="0" marL="0">
@@ -13562,7 +13562,7 @@
               <a:buNone/>
             </a:pPr>
             <a:r>
-              <a:rPr lang="en-US" sz="820" dirty="0">
+              <a:rPr lang="en-US" sz="910" dirty="0">
                 <a:solidFill>
                   <a:srgbClr val="7A4E00"/>
                 </a:solidFill>
@@ -13572,7 +13572,7 @@
               </a:rPr>
               <a:t>一個邏輯場景，可以展開成成千上萬個具體場景。</a:t>
             </a:r>
-            <a:endParaRPr lang="en-US" sz="890" dirty="0"/>
+            <a:endParaRPr lang="en-US" sz="990" dirty="0"/>
           </a:p>
         </p:txBody>
       </p:sp>
@@ -13592,8 +13592,8 @@
         </p:blipFill>
         <p:spPr>
           <a:xfrm>
-            <a:off x="6663327" y="3338842"/>
-            <a:ext cx="779376" cy="172200"/>
+            <a:off x="7882128" y="109728"/>
+            <a:ext cx="1097280" cy="242439"/>
           </a:xfrm>
           <a:prstGeom prst="rect">
             <a:avLst/>
@@ -13608,8 +13608,8 @@
         </p:nvSpPr>
         <p:spPr>
           <a:xfrm>
-            <a:off x="1402536" y="3390800"/>
-            <a:ext cx="584532" cy="181855"/>
+            <a:off x="1029622" y="101626"/>
+            <a:ext cx="653307" cy="203251"/>
           </a:xfrm>
           <a:prstGeom prst="rect">
             <a:avLst/>
@@ -13625,7 +13625,7 @@
               <a:buNone/>
             </a:pPr>
             <a:r>
-              <a:rPr lang="en-US" sz="640" dirty="0">
+              <a:rPr lang="en-US" sz="710" dirty="0">
                 <a:solidFill>
                   <a:srgbClr val="5F7183"/>
                 </a:solidFill>
@@ -13635,7 +13635,7 @@
               </a:rPr>
               <a:t>6 / 16</a:t>
             </a:r>
-            <a:endParaRPr lang="en-US" sz="640" dirty="0"/>
+            <a:endParaRPr lang="en-US" sz="710" dirty="0"/>
           </a:p>
         </p:txBody>
       </p:sp>
@@ -13647,8 +13647,8 @@
         </p:nvSpPr>
         <p:spPr>
           <a:xfrm>
-            <a:off x="2006553" y="3390800"/>
-            <a:ext cx="1428857" cy="181855"/>
+            <a:off x="1704706" y="101626"/>
+            <a:ext cx="1596974" cy="203251"/>
           </a:xfrm>
           <a:prstGeom prst="rect">
             <a:avLst/>
@@ -13664,7 +13664,7 @@
               <a:buNone/>
             </a:pPr>
             <a:r>
-              <a:rPr lang="en-US" sz="640" dirty="0">
+              <a:rPr lang="en-US" sz="710" dirty="0">
                 <a:solidFill>
                   <a:srgbClr val="5F7183"/>
                 </a:solidFill>
@@ -13674,7 +13674,7 @@
               </a:rPr>
               <a:t>Tiết 2 · 第 2 節</a:t>
             </a:r>
-            <a:endParaRPr lang="en-US" sz="640" dirty="0"/>
+            <a:endParaRPr lang="en-US" sz="710" dirty="0"/>
           </a:p>
         </p:txBody>
       </p:sp>
@@ -13697,8 +13697,8 @@
       </p:nvGrpSpPr>
       <p:grpSpPr>
         <a:xfrm>
-          <a:off x="0" y="0"/>
-          <a:ext cx="0" cy="0"/>
+          <a:off x="942514" y="0"/>
+          <a:ext cx="1" cy="1"/>
           <a:chOff x="0" y="0"/>
           <a:chExt cx="0" cy="0"/>
         </a:xfrm>
@@ -13711,8 +13711,8 @@
         </p:nvSpPr>
         <p:spPr>
           <a:xfrm>
-            <a:off x="1681812" y="325253"/>
-            <a:ext cx="5780375" cy="194844"/>
+            <a:off x="1341758" y="333913"/>
+            <a:ext cx="6460485" cy="217769"/>
           </a:xfrm>
           <a:prstGeom prst="rect">
             <a:avLst/>
@@ -13728,7 +13728,7 @@
               <a:buNone/>
             </a:pPr>
             <a:r>
-              <a:rPr lang="en-US" sz="890" b="1" dirty="0">
+              <a:rPr lang="en-US" sz="990" b="1" dirty="0">
                 <a:solidFill>
                   <a:srgbClr val="007F72"/>
                 </a:solidFill>
@@ -13738,7 +13738,7 @@
               </a:rPr>
               <a:t>Cách dùng · 模擬真正的用法</a:t>
             </a:r>
-            <a:endParaRPr lang="en-US" sz="890" dirty="0"/>
+            <a:endParaRPr lang="en-US" sz="990" dirty="0"/>
           </a:p>
         </p:txBody>
       </p:sp>
@@ -13750,8 +13750,8 @@
         </p:nvSpPr>
         <p:spPr>
           <a:xfrm>
-            <a:off x="1681812" y="809116"/>
-            <a:ext cx="1753597" cy="1786071"/>
+            <a:off x="1341758" y="874706"/>
+            <a:ext cx="1959922" cy="1996217"/>
           </a:xfrm>
           <a:prstGeom prst="roundRect">
             <a:avLst>
@@ -13777,8 +13777,8 @@
         </p:nvSpPr>
         <p:spPr>
           <a:xfrm>
-            <a:off x="1992784" y="1320218"/>
-            <a:ext cx="1131655" cy="69442"/>
+            <a:off x="1689317" y="1445944"/>
+            <a:ext cx="1264804" cy="77613"/>
           </a:xfrm>
           <a:prstGeom prst="roundRect">
             <a:avLst>
@@ -13799,8 +13799,8 @@
         </p:nvSpPr>
         <p:spPr>
           <a:xfrm>
-            <a:off x="2171767" y="1307592"/>
-            <a:ext cx="94694" cy="94694"/>
+            <a:off x="1889360" y="1431832"/>
+            <a:ext cx="105836" cy="105836"/>
           </a:xfrm>
           <a:prstGeom prst="ellipse">
             <a:avLst/>
@@ -13819,8 +13819,8 @@
         </p:nvSpPr>
         <p:spPr>
           <a:xfrm>
-            <a:off x="2352832" y="1307592"/>
-            <a:ext cx="94694" cy="94694"/>
+            <a:off x="2091728" y="1431832"/>
+            <a:ext cx="105836" cy="105836"/>
           </a:xfrm>
           <a:prstGeom prst="ellipse">
             <a:avLst/>
@@ -13839,8 +13839,8 @@
         </p:nvSpPr>
         <p:spPr>
           <a:xfrm>
-            <a:off x="2533897" y="1307592"/>
-            <a:ext cx="94694" cy="94694"/>
+            <a:off x="2294097" y="1431832"/>
+            <a:ext cx="105836" cy="105836"/>
           </a:xfrm>
           <a:prstGeom prst="ellipse">
             <a:avLst/>
@@ -13859,8 +13859,8 @@
         </p:nvSpPr>
         <p:spPr>
           <a:xfrm>
-            <a:off x="2714962" y="1307592"/>
-            <a:ext cx="94694" cy="94694"/>
+            <a:off x="2496465" y="1431832"/>
+            <a:ext cx="105836" cy="105836"/>
           </a:xfrm>
           <a:prstGeom prst="ellipse">
             <a:avLst/>
@@ -13879,8 +13879,8 @@
         </p:nvSpPr>
         <p:spPr>
           <a:xfrm>
-            <a:off x="1992784" y="1667430"/>
-            <a:ext cx="1131655" cy="69442"/>
+            <a:off x="1689317" y="1834008"/>
+            <a:ext cx="1264804" cy="77613"/>
           </a:xfrm>
           <a:prstGeom prst="roundRect">
             <a:avLst>
@@ -13901,8 +13901,8 @@
         </p:nvSpPr>
         <p:spPr>
           <a:xfrm>
-            <a:off x="2171767" y="1654804"/>
-            <a:ext cx="94694" cy="94694"/>
+            <a:off x="1889360" y="1819897"/>
+            <a:ext cx="105836" cy="105836"/>
           </a:xfrm>
           <a:prstGeom prst="ellipse">
             <a:avLst/>
@@ -13921,8 +13921,8 @@
         </p:nvSpPr>
         <p:spPr>
           <a:xfrm>
-            <a:off x="2352832" y="1654804"/>
-            <a:ext cx="94694" cy="94694"/>
+            <a:off x="2091728" y="1819897"/>
+            <a:ext cx="105836" cy="105836"/>
           </a:xfrm>
           <a:prstGeom prst="ellipse">
             <a:avLst/>
@@ -13941,8 +13941,8 @@
         </p:nvSpPr>
         <p:spPr>
           <a:xfrm>
-            <a:off x="2533897" y="1654804"/>
-            <a:ext cx="94694" cy="94694"/>
+            <a:off x="2294097" y="1819897"/>
+            <a:ext cx="105836" cy="105836"/>
           </a:xfrm>
           <a:prstGeom prst="ellipse">
             <a:avLst/>
@@ -13961,8 +13961,8 @@
         </p:nvSpPr>
         <p:spPr>
           <a:xfrm>
-            <a:off x="2714962" y="1654804"/>
-            <a:ext cx="94694" cy="94694"/>
+            <a:off x="2496465" y="1819897"/>
+            <a:ext cx="105836" cy="105836"/>
           </a:xfrm>
           <a:prstGeom prst="ellipse">
             <a:avLst/>
@@ -13981,8 +13981,8 @@
         </p:nvSpPr>
         <p:spPr>
           <a:xfrm>
-            <a:off x="2830208" y="1702151"/>
-            <a:ext cx="203698" cy="0"/>
+            <a:off x="2625271" y="1872815"/>
+            <a:ext cx="227665" cy="1"/>
           </a:xfrm>
           <a:prstGeom prst="line">
             <a:avLst/>
@@ -14005,8 +14005,8 @@
         </p:nvSpPr>
         <p:spPr>
           <a:xfrm>
-            <a:off x="1992784" y="2014642"/>
-            <a:ext cx="1131655" cy="69442"/>
+            <a:off x="1689317" y="2222073"/>
+            <a:ext cx="1264804" cy="77613"/>
           </a:xfrm>
           <a:prstGeom prst="roundRect">
             <a:avLst>
@@ -14027,8 +14027,8 @@
         </p:nvSpPr>
         <p:spPr>
           <a:xfrm>
-            <a:off x="2171767" y="2002016"/>
-            <a:ext cx="94694" cy="94694"/>
+            <a:off x="1889360" y="2207961"/>
+            <a:ext cx="105836" cy="105836"/>
           </a:xfrm>
           <a:prstGeom prst="ellipse">
             <a:avLst/>
@@ -14047,8 +14047,8 @@
         </p:nvSpPr>
         <p:spPr>
           <a:xfrm>
-            <a:off x="2352832" y="2002016"/>
-            <a:ext cx="94694" cy="94694"/>
+            <a:off x="2091728" y="2207961"/>
+            <a:ext cx="105836" cy="105836"/>
           </a:xfrm>
           <a:prstGeom prst="ellipse">
             <a:avLst/>
@@ -14067,8 +14067,8 @@
         </p:nvSpPr>
         <p:spPr>
           <a:xfrm>
-            <a:off x="2533897" y="2002016"/>
-            <a:ext cx="94694" cy="94694"/>
+            <a:off x="2294097" y="2207961"/>
+            <a:ext cx="105836" cy="105836"/>
           </a:xfrm>
           <a:prstGeom prst="ellipse">
             <a:avLst/>
@@ -14087,8 +14087,8 @@
         </p:nvSpPr>
         <p:spPr>
           <a:xfrm>
-            <a:off x="2714962" y="2002016"/>
-            <a:ext cx="94694" cy="94694"/>
+            <a:off x="2496465" y="2207961"/>
+            <a:ext cx="105836" cy="105836"/>
           </a:xfrm>
           <a:prstGeom prst="ellipse">
             <a:avLst/>
@@ -14107,8 +14107,8 @@
         </p:nvSpPr>
         <p:spPr>
           <a:xfrm>
-            <a:off x="3760150" y="963355"/>
-            <a:ext cx="3702038" cy="714266"/>
+            <a:off x="3664629" y="1047093"/>
+            <a:ext cx="4137614" cy="798305"/>
           </a:xfrm>
           <a:prstGeom prst="rect">
             <a:avLst/>
@@ -14127,7 +14127,7 @@
               <a:buNone/>
             </a:pPr>
             <a:r>
-              <a:rPr lang="en-US" sz="1630" b="1" dirty="0">
+              <a:rPr lang="en-US" sz="1830" b="1" dirty="0">
                 <a:solidFill>
                   <a:srgbClr val="0B1F3A"/>
                 </a:solidFill>
@@ -14137,7 +14137,7 @@
               </a:rPr>
               <a:t>Dùng mô phỏng không phải để chạy nhiều km, mà để quét tham số</a:t>
             </a:r>
-            <a:endParaRPr lang="en-US" sz="1630" dirty="0"/>
+            <a:endParaRPr lang="en-US" sz="1830" dirty="0"/>
           </a:p>
           <a:p>
             <a:pPr indent="0" marL="0">
@@ -14147,7 +14147,7 @@
               <a:buNone/>
             </a:pPr>
             <a:r>
-              <a:rPr lang="en-US" sz="990" dirty="0">
+              <a:rPr lang="en-US" sz="1110" dirty="0">
                 <a:solidFill>
                   <a:srgbClr val="007F72"/>
                 </a:solidFill>
@@ -14157,7 +14157,7 @@
               </a:rPr>
               <a:t>模擬的用法不是跑里程，是掃參數</a:t>
             </a:r>
-            <a:endParaRPr lang="en-US" sz="1630" dirty="0"/>
+            <a:endParaRPr lang="en-US" sz="1830" dirty="0"/>
           </a:p>
         </p:txBody>
       </p:sp>
@@ -14169,8 +14169,8 @@
         </p:nvSpPr>
         <p:spPr>
           <a:xfrm>
-            <a:off x="3760150" y="1742570"/>
-            <a:ext cx="3702038" cy="763326"/>
+            <a:off x="3664629" y="1917989"/>
+            <a:ext cx="4137614" cy="853137"/>
           </a:xfrm>
           <a:prstGeom prst="rect">
             <a:avLst/>
@@ -14189,7 +14189,7 @@
               <a:buNone/>
             </a:pPr>
             <a:r>
-              <a:rPr lang="en-US" sz="890" dirty="0">
+              <a:rPr lang="en-US" sz="990" dirty="0">
                 <a:solidFill>
                   <a:srgbClr val="5F7183"/>
                 </a:solidFill>
@@ -14199,7 +14199,7 @@
               </a:rPr>
               <a:t>Giữ nguyên một kịch bản, đổi một tham số một chút, chạy lại. Rồi lại đổi, lại chạy. Ba nghìn lần chạy xong, bạn biết chính xác ranh giới nằm ở đâu: đến giá trị nào thì bắt đầu đâm.</a:t>
             </a:r>
-            <a:endParaRPr lang="en-US" sz="890" dirty="0"/>
+            <a:endParaRPr lang="en-US" sz="990" dirty="0"/>
           </a:p>
           <a:p>
             <a:pPr indent="0" marL="0">
@@ -14209,7 +14209,7 @@
               <a:buNone/>
             </a:pPr>
             <a:r>
-              <a:rPr lang="en-US" sz="820" dirty="0">
+              <a:rPr lang="en-US" sz="910" dirty="0">
                 <a:solidFill>
                   <a:srgbClr val="5F7183"/>
                 </a:solidFill>
@@ -14219,7 +14219,7 @@
               </a:rPr>
               <a:t>固定一個場景，把一個參數改一點點，重跑。再改，再跑。跑完三千次，你就知道界線在哪裡：那個值到多少就開始撞。</a:t>
             </a:r>
-            <a:endParaRPr lang="en-US" sz="890" dirty="0"/>
+            <a:endParaRPr lang="en-US" sz="990" dirty="0"/>
           </a:p>
         </p:txBody>
       </p:sp>
@@ -14231,8 +14231,8 @@
         </p:nvSpPr>
         <p:spPr>
           <a:xfrm>
-            <a:off x="1681812" y="2806268"/>
-            <a:ext cx="5780375" cy="441647"/>
+            <a:off x="1341758" y="3106840"/>
+            <a:ext cx="6460485" cy="493610"/>
           </a:xfrm>
           <a:prstGeom prst="roundRect">
             <a:avLst>
@@ -14258,8 +14258,8 @@
         </p:nvSpPr>
         <p:spPr>
           <a:xfrm>
-            <a:off x="1811708" y="2858226"/>
-            <a:ext cx="5520583" cy="350719"/>
+            <a:off x="1486937" y="3164912"/>
+            <a:ext cx="6170126" cy="391984"/>
           </a:xfrm>
           <a:prstGeom prst="rect">
             <a:avLst/>
@@ -14278,7 +14278,7 @@
               <a:buNone/>
             </a:pPr>
             <a:r>
-              <a:rPr lang="en-US" sz="890" b="1" dirty="0">
+              <a:rPr lang="en-US" sz="990" b="1" dirty="0">
                 <a:solidFill>
                   <a:srgbClr val="7A4E00"/>
                 </a:solidFill>
@@ -14288,7 +14288,7 @@
               </a:rPr>
               <a:t>Đường thật không làm được: không thể bắt cùng một xe máy tạt vào ba nghìn lần.</a:t>
             </a:r>
-            <a:endParaRPr lang="en-US" sz="890" dirty="0"/>
+            <a:endParaRPr lang="en-US" sz="990" dirty="0"/>
           </a:p>
           <a:p>
             <a:pPr indent="0" marL="0">
@@ -14298,7 +14298,7 @@
               <a:buNone/>
             </a:pPr>
             <a:r>
-              <a:rPr lang="en-US" sz="820" dirty="0">
+              <a:rPr lang="en-US" sz="910" dirty="0">
                 <a:solidFill>
                   <a:srgbClr val="7A4E00"/>
                 </a:solidFill>
@@ -14308,7 +14308,7 @@
               </a:rPr>
               <a:t>真實道路做不到：你沒辦法叫同一台機車切進來三千次。</a:t>
             </a:r>
-            <a:endParaRPr lang="en-US" sz="890" dirty="0"/>
+            <a:endParaRPr lang="en-US" sz="990" dirty="0"/>
           </a:p>
         </p:txBody>
       </p:sp>
@@ -14328,8 +14328,8 @@
         </p:blipFill>
         <p:spPr>
           <a:xfrm>
-            <a:off x="6663327" y="3338842"/>
-            <a:ext cx="779376" cy="172200"/>
+            <a:off x="7882128" y="109728"/>
+            <a:ext cx="1097280" cy="242439"/>
           </a:xfrm>
           <a:prstGeom prst="rect">
             <a:avLst/>
@@ -14344,8 +14344,8 @@
         </p:nvSpPr>
         <p:spPr>
           <a:xfrm>
-            <a:off x="1402536" y="3390800"/>
-            <a:ext cx="584532" cy="181855"/>
+            <a:off x="1029622" y="101626"/>
+            <a:ext cx="653307" cy="203251"/>
           </a:xfrm>
           <a:prstGeom prst="rect">
             <a:avLst/>
@@ -14361,7 +14361,7 @@
               <a:buNone/>
             </a:pPr>
             <a:r>
-              <a:rPr lang="en-US" sz="640" dirty="0">
+              <a:rPr lang="en-US" sz="710" dirty="0">
                 <a:solidFill>
                   <a:srgbClr val="5F7183"/>
                 </a:solidFill>
@@ -14371,7 +14371,7 @@
               </a:rPr>
               <a:t>7 / 16</a:t>
             </a:r>
-            <a:endParaRPr lang="en-US" sz="640" dirty="0"/>
+            <a:endParaRPr lang="en-US" sz="710" dirty="0"/>
           </a:p>
         </p:txBody>
       </p:sp>
@@ -14383,8 +14383,8 @@
         </p:nvSpPr>
         <p:spPr>
           <a:xfrm>
-            <a:off x="2006553" y="3390800"/>
-            <a:ext cx="1428857" cy="181855"/>
+            <a:off x="1704706" y="101626"/>
+            <a:ext cx="1596974" cy="203251"/>
           </a:xfrm>
           <a:prstGeom prst="rect">
             <a:avLst/>
@@ -14400,7 +14400,7 @@
               <a:buNone/>
             </a:pPr>
             <a:r>
-              <a:rPr lang="en-US" sz="640" dirty="0">
+              <a:rPr lang="en-US" sz="710" dirty="0">
                 <a:solidFill>
                   <a:srgbClr val="5F7183"/>
                 </a:solidFill>
@@ -14410,7 +14410,7 @@
               </a:rPr>
               <a:t>Tiết 2 · 第 2 節</a:t>
             </a:r>
-            <a:endParaRPr lang="en-US" sz="640" dirty="0"/>
+            <a:endParaRPr lang="en-US" sz="710" dirty="0"/>
           </a:p>
         </p:txBody>
       </p:sp>
@@ -14433,8 +14433,8 @@
       </p:nvGrpSpPr>
       <p:grpSpPr>
         <a:xfrm>
-          <a:off x="0" y="0"/>
-          <a:ext cx="0" cy="0"/>
+          <a:off x="1114123" y="0"/>
+          <a:ext cx="1" cy="1"/>
           <a:chOff x="0" y="0"/>
           <a:chExt cx="0" cy="0"/>
         </a:xfrm>
@@ -14447,8 +14447,8 @@
         </p:nvSpPr>
         <p:spPr>
           <a:xfrm>
-            <a:off x="1681812" y="234326"/>
-            <a:ext cx="5780375" cy="597522"/>
+            <a:off x="1494490" y="221304"/>
+            <a:ext cx="6155021" cy="636249"/>
           </a:xfrm>
           <a:prstGeom prst="rect">
             <a:avLst/>
@@ -14467,7 +14467,7 @@
               <a:buNone/>
             </a:pPr>
             <a:r>
-              <a:rPr lang="en-US" sz="1560" b="1" dirty="0">
+              <a:rPr lang="en-US" sz="1660" b="1" dirty="0">
                 <a:solidFill>
                   <a:srgbClr val="0B1F3A"/>
                 </a:solidFill>
@@ -14477,7 +14477,7 @@
               </a:rPr>
               <a:t>Ba tầng đó, trong mô phỏng của ta là ba thứ bạn đã dùng rồi</a:t>
             </a:r>
-            <a:endParaRPr lang="en-US" sz="1560" dirty="0"/>
+            <a:endParaRPr lang="en-US" sz="1660" dirty="0"/>
           </a:p>
           <a:p>
             <a:pPr indent="0" marL="0">
@@ -14487,7 +14487,7 @@
               <a:buNone/>
             </a:pPr>
             <a:r>
-              <a:rPr lang="en-US" sz="960" dirty="0">
+              <a:rPr lang="en-US" sz="1020" dirty="0">
                 <a:solidFill>
                   <a:srgbClr val="5F7183"/>
                 </a:solidFill>
@@ -14497,7 +14497,7 @@
               </a:rPr>
               <a:t>這三層，在我們的模擬器裡就是三個你已經用過的東西</a:t>
             </a:r>
-            <a:endParaRPr lang="en-US" sz="1560" dirty="0"/>
+            <a:endParaRPr lang="en-US" sz="1660" dirty="0"/>
           </a:p>
         </p:txBody>
       </p:sp>
@@ -14509,8 +14509,8 @@
         </p:nvSpPr>
         <p:spPr>
           <a:xfrm>
-            <a:off x="1681812" y="965743"/>
-            <a:ext cx="1796896" cy="1935452"/>
+            <a:off x="1494490" y="1000127"/>
+            <a:ext cx="1913359" cy="2060895"/>
           </a:xfrm>
           <a:prstGeom prst="roundRect">
             <a:avLst>
@@ -14543,8 +14543,8 @@
         </p:nvSpPr>
         <p:spPr>
           <a:xfrm>
-            <a:off x="2411395" y="1095639"/>
-            <a:ext cx="337730" cy="337730"/>
+            <a:off x="2271359" y="1138442"/>
+            <a:ext cx="359619" cy="359619"/>
           </a:xfrm>
           <a:prstGeom prst="ellipse">
             <a:avLst/>
@@ -14563,8 +14563,8 @@
         </p:nvSpPr>
         <p:spPr>
           <a:xfrm>
-            <a:off x="2411395" y="1167082"/>
-            <a:ext cx="337730" cy="194844"/>
+            <a:off x="2271359" y="1214515"/>
+            <a:ext cx="359619" cy="207473"/>
           </a:xfrm>
           <a:prstGeom prst="rect">
             <a:avLst/>
@@ -14580,7 +14580,7 @@
               <a:buNone/>
             </a:pPr>
             <a:r>
-              <a:rPr lang="en-US" sz="1070" b="1" dirty="0">
+              <a:rPr lang="en-US" sz="1130" b="1" dirty="0">
                 <a:solidFill>
                   <a:srgbClr val="FFFFFF"/>
                 </a:solidFill>
@@ -14590,7 +14590,7 @@
               </a:rPr>
               <a:t>1</a:t>
             </a:r>
-            <a:endParaRPr lang="en-US" sz="1070" dirty="0"/>
+            <a:endParaRPr lang="en-US" sz="1130" dirty="0"/>
           </a:p>
         </p:txBody>
       </p:sp>
@@ -14602,8 +14602,8 @@
         </p:nvSpPr>
         <p:spPr>
           <a:xfrm>
-            <a:off x="1772740" y="1498317"/>
-            <a:ext cx="1615041" cy="467626"/>
+            <a:off x="1591310" y="1567218"/>
+            <a:ext cx="1719717" cy="497934"/>
           </a:xfrm>
           <a:prstGeom prst="rect">
             <a:avLst/>
@@ -14622,7 +14622,7 @@
               <a:buNone/>
             </a:pPr>
             <a:r>
-              <a:rPr lang="en-US" sz="990" b="1" dirty="0">
+              <a:rPr lang="en-US" sz="1060" b="1" dirty="0">
                 <a:solidFill>
                   <a:srgbClr val="0B1F3A"/>
                 </a:solidFill>
@@ -14632,7 +14632,7 @@
               </a:rPr>
               <a:t>Sáu nút cài sẵn</a:t>
             </a:r>
-            <a:endParaRPr lang="en-US" sz="990" dirty="0"/>
+            <a:endParaRPr lang="en-US" sz="1060" dirty="0"/>
           </a:p>
           <a:p>
             <a:pPr algn="ctr" indent="0" marL="0">
@@ -14642,7 +14642,7 @@
               <a:buNone/>
             </a:pPr>
             <a:r>
-              <a:rPr lang="en-US" sz="850" dirty="0">
+              <a:rPr lang="en-US" sz="910" dirty="0">
                 <a:solidFill>
                   <a:srgbClr val="007F72"/>
                 </a:solidFill>
@@ -14652,7 +14652,7 @@
               </a:rPr>
               <a:t>六個預設按鈕</a:t>
             </a:r>
-            <a:endParaRPr lang="en-US" sz="990" dirty="0"/>
+            <a:endParaRPr lang="en-US" sz="1060" dirty="0"/>
           </a:p>
         </p:txBody>
       </p:sp>
@@ -14664,8 +14664,8 @@
         </p:nvSpPr>
         <p:spPr>
           <a:xfrm>
-            <a:off x="1772740" y="1991922"/>
-            <a:ext cx="1615041" cy="831335"/>
+            <a:off x="1591310" y="2092816"/>
+            <a:ext cx="1719717" cy="885216"/>
           </a:xfrm>
           <a:prstGeom prst="rect">
             <a:avLst/>
@@ -14684,7 +14684,7 @@
               <a:buNone/>
             </a:pPr>
             <a:r>
-              <a:rPr lang="en-US" sz="820" dirty="0">
+              <a:rPr lang="en-US" sz="870" dirty="0">
                 <a:solidFill>
                   <a:srgbClr val="5F7183"/>
                 </a:solidFill>
@@ -14694,7 +14694,7 @@
               </a:rPr>
               <a:t>«Giờ cao điểm Hà Nội»</a:t>
             </a:r>
-            <a:endParaRPr lang="en-US" sz="820" dirty="0"/>
+            <a:endParaRPr lang="en-US" sz="870" dirty="0"/>
           </a:p>
           <a:p>
             <a:pPr algn="ctr" indent="0" marL="0">
@@ -14704,7 +14704,7 @@
               <a:buNone/>
             </a:pPr>
             <a:r>
-              <a:rPr lang="en-US" sz="820" dirty="0">
+              <a:rPr lang="en-US" sz="870" dirty="0">
                 <a:solidFill>
                   <a:srgbClr val="5F7183"/>
                 </a:solidFill>
@@ -14714,7 +14714,7 @@
               </a:rPr>
               <a:t>→ CHỨC NĂNG</a:t>
             </a:r>
-            <a:endParaRPr lang="en-US" sz="820" dirty="0"/>
+            <a:endParaRPr lang="en-US" sz="870" dirty="0"/>
           </a:p>
           <a:p>
             <a:pPr algn="ctr" indent="0" marL="0">
@@ -14724,7 +14724,7 @@
               <a:buNone/>
             </a:pPr>
             <a:r>
-              <a:rPr lang="en-US" sz="750" dirty="0">
+              <a:rPr lang="en-US" sz="790" dirty="0">
                 <a:solidFill>
                   <a:srgbClr val="5F7183"/>
                 </a:solidFill>
@@ -14734,7 +14734,7 @@
               </a:rPr>
               <a:t>「河內尖峰」「雨夜」</a:t>
             </a:r>
-            <a:endParaRPr lang="en-US" sz="820" dirty="0"/>
+            <a:endParaRPr lang="en-US" sz="870" dirty="0"/>
           </a:p>
           <a:p>
             <a:pPr algn="ctr" indent="0" marL="0">
@@ -14744,7 +14744,7 @@
               <a:buNone/>
             </a:pPr>
             <a:r>
-              <a:rPr lang="en-US" sz="750" dirty="0">
+              <a:rPr lang="en-US" sz="790" dirty="0">
                 <a:solidFill>
                   <a:srgbClr val="5F7183"/>
                 </a:solidFill>
@@ -14754,7 +14754,7 @@
               </a:rPr>
               <a:t>→ 功能場景</a:t>
             </a:r>
-            <a:endParaRPr lang="en-US" sz="820" dirty="0"/>
+            <a:endParaRPr lang="en-US" sz="870" dirty="0"/>
           </a:p>
         </p:txBody>
       </p:sp>
@@ -14766,8 +14766,8 @@
         </p:nvSpPr>
         <p:spPr>
           <a:xfrm>
-            <a:off x="3478708" y="1615223"/>
-            <a:ext cx="194844" cy="259792"/>
+            <a:off x="3407848" y="1691702"/>
+            <a:ext cx="207473" cy="276630"/>
           </a:xfrm>
           <a:prstGeom prst="rect">
             <a:avLst/>
@@ -14783,7 +14783,7 @@
               <a:buNone/>
             </a:pPr>
             <a:r>
-              <a:rPr lang="en-US" sz="1350" b="1" dirty="0">
+              <a:rPr lang="en-US" sz="1440" b="1" dirty="0">
                 <a:solidFill>
                   <a:srgbClr val="00A896"/>
                 </a:solidFill>
@@ -14793,7 +14793,7 @@
               </a:rPr>
               <a:t>→</a:t>
             </a:r>
-            <a:endParaRPr lang="en-US" sz="1350" dirty="0"/>
+            <a:endParaRPr lang="en-US" sz="1440" dirty="0"/>
           </a:p>
         </p:txBody>
       </p:sp>
@@ -14805,8 +14805,8 @@
         </p:nvSpPr>
         <p:spPr>
           <a:xfrm>
-            <a:off x="3673552" y="965743"/>
-            <a:ext cx="1796896" cy="1935452"/>
+            <a:off x="3615321" y="1000127"/>
+            <a:ext cx="1913359" cy="2060895"/>
           </a:xfrm>
           <a:prstGeom prst="roundRect">
             <a:avLst>
@@ -14839,8 +14839,8 @@
         </p:nvSpPr>
         <p:spPr>
           <a:xfrm>
-            <a:off x="4403135" y="1095639"/>
-            <a:ext cx="337730" cy="337730"/>
+            <a:off x="4392190" y="1138442"/>
+            <a:ext cx="359619" cy="359619"/>
           </a:xfrm>
           <a:prstGeom prst="ellipse">
             <a:avLst/>
@@ -14859,8 +14859,8 @@
         </p:nvSpPr>
         <p:spPr>
           <a:xfrm>
-            <a:off x="4403135" y="1167082"/>
-            <a:ext cx="337730" cy="194844"/>
+            <a:off x="4392190" y="1214515"/>
+            <a:ext cx="359619" cy="207473"/>
           </a:xfrm>
           <a:prstGeom prst="rect">
             <a:avLst/>
@@ -14876,7 +14876,7 @@
               <a:buNone/>
             </a:pPr>
             <a:r>
-              <a:rPr lang="en-US" sz="1070" b="1" dirty="0">
+              <a:rPr lang="en-US" sz="1130" b="1" dirty="0">
                 <a:solidFill>
                   <a:srgbClr val="FFFFFF"/>
                 </a:solidFill>
@@ -14886,7 +14886,7 @@
               </a:rPr>
               <a:t>2</a:t>
             </a:r>
-            <a:endParaRPr lang="en-US" sz="1070" dirty="0"/>
+            <a:endParaRPr lang="en-US" sz="1130" dirty="0"/>
           </a:p>
         </p:txBody>
       </p:sp>
@@ -14898,8 +14898,8 @@
         </p:nvSpPr>
         <p:spPr>
           <a:xfrm>
-            <a:off x="3764479" y="1498317"/>
-            <a:ext cx="1615041" cy="467626"/>
+            <a:off x="3712141" y="1567218"/>
+            <a:ext cx="1719717" cy="497934"/>
           </a:xfrm>
           <a:prstGeom prst="rect">
             <a:avLst/>
@@ -14918,7 +14918,7 @@
               <a:buNone/>
             </a:pPr>
             <a:r>
-              <a:rPr lang="en-US" sz="990" b="1" dirty="0">
+              <a:rPr lang="en-US" sz="1060" b="1" dirty="0">
                 <a:solidFill>
                   <a:srgbClr val="0B1F3A"/>
                 </a:solidFill>
@@ -14928,7 +14928,7 @@
               </a:rPr>
               <a:t>Khoảng kéo được</a:t>
             </a:r>
-            <a:endParaRPr lang="en-US" sz="990" dirty="0"/>
+            <a:endParaRPr lang="en-US" sz="1060" dirty="0"/>
           </a:p>
           <a:p>
             <a:pPr algn="ctr" indent="0" marL="0">
@@ -14938,7 +14938,7 @@
               <a:buNone/>
             </a:pPr>
             <a:r>
-              <a:rPr lang="en-US" sz="850" dirty="0">
+              <a:rPr lang="en-US" sz="910" dirty="0">
                 <a:solidFill>
                   <a:srgbClr val="007F72"/>
                 </a:solidFill>
@@ -14948,7 +14948,7 @@
               </a:rPr>
               <a:t>滑桿的範圍</a:t>
             </a:r>
-            <a:endParaRPr lang="en-US" sz="990" dirty="0"/>
+            <a:endParaRPr lang="en-US" sz="1060" dirty="0"/>
           </a:p>
         </p:txBody>
       </p:sp>
@@ -14960,8 +14960,8 @@
         </p:nvSpPr>
         <p:spPr>
           <a:xfrm>
-            <a:off x="3764479" y="1991922"/>
-            <a:ext cx="1615041" cy="831335"/>
+            <a:off x="3712141" y="2092816"/>
+            <a:ext cx="1719717" cy="885216"/>
           </a:xfrm>
           <a:prstGeom prst="rect">
             <a:avLst/>
@@ -14980,7 +14980,7 @@
               <a:buNone/>
             </a:pPr>
             <a:r>
-              <a:rPr lang="en-US" sz="820" dirty="0">
+              <a:rPr lang="en-US" sz="870" dirty="0">
                 <a:solidFill>
                   <a:srgbClr val="5F7183"/>
                 </a:solidFill>
@@ -14990,7 +14990,7 @@
               </a:rPr>
               <a:t>3–60 tia · 10–120 m · 20–180°</a:t>
             </a:r>
-            <a:endParaRPr lang="en-US" sz="820" dirty="0"/>
+            <a:endParaRPr lang="en-US" sz="870" dirty="0"/>
           </a:p>
           <a:p>
             <a:pPr algn="ctr" indent="0" marL="0">
@@ -15000,7 +15000,7 @@
               <a:buNone/>
             </a:pPr>
             <a:r>
-              <a:rPr lang="en-US" sz="820" dirty="0">
+              <a:rPr lang="en-US" sz="870" dirty="0">
                 <a:solidFill>
                   <a:srgbClr val="5F7183"/>
                 </a:solidFill>
@@ -15010,7 +15010,7 @@
               </a:rPr>
               <a:t>→ LOGIC</a:t>
             </a:r>
-            <a:endParaRPr lang="en-US" sz="820" dirty="0"/>
+            <a:endParaRPr lang="en-US" sz="870" dirty="0"/>
           </a:p>
           <a:p>
             <a:pPr algn="ctr" indent="0" marL="0">
@@ -15020,7 +15020,7 @@
               <a:buNone/>
             </a:pPr>
             <a:r>
-              <a:rPr lang="en-US" sz="750" dirty="0">
+              <a:rPr lang="en-US" sz="790" dirty="0">
                 <a:solidFill>
                   <a:srgbClr val="5F7183"/>
                 </a:solidFill>
@@ -15030,7 +15030,7 @@
               </a:rPr>
               <a:t>→ 邏輯場景</a:t>
             </a:r>
-            <a:endParaRPr lang="en-US" sz="820" dirty="0"/>
+            <a:endParaRPr lang="en-US" sz="870" dirty="0"/>
           </a:p>
         </p:txBody>
       </p:sp>
@@ -15042,8 +15042,8 @@
         </p:nvSpPr>
         <p:spPr>
           <a:xfrm>
-            <a:off x="5470448" y="1615223"/>
-            <a:ext cx="194844" cy="259792"/>
+            <a:off x="5528679" y="1691702"/>
+            <a:ext cx="207473" cy="276630"/>
           </a:xfrm>
           <a:prstGeom prst="rect">
             <a:avLst/>
@@ -15059,7 +15059,7 @@
               <a:buNone/>
             </a:pPr>
             <a:r>
-              <a:rPr lang="en-US" sz="1350" b="1" dirty="0">
+              <a:rPr lang="en-US" sz="1440" b="1" dirty="0">
                 <a:solidFill>
                   <a:srgbClr val="00A896"/>
                 </a:solidFill>
@@ -15069,7 +15069,7 @@
               </a:rPr>
               <a:t>→</a:t>
             </a:r>
-            <a:endParaRPr lang="en-US" sz="1350" dirty="0"/>
+            <a:endParaRPr lang="en-US" sz="1440" dirty="0"/>
           </a:p>
         </p:txBody>
       </p:sp>
@@ -15081,8 +15081,8 @@
         </p:nvSpPr>
         <p:spPr>
           <a:xfrm>
-            <a:off x="5665292" y="965743"/>
-            <a:ext cx="1796896" cy="1935452"/>
+            <a:off x="5736152" y="1000127"/>
+            <a:ext cx="1913359" cy="2060895"/>
           </a:xfrm>
           <a:prstGeom prst="roundRect">
             <a:avLst>
@@ -15115,8 +15115,8 @@
         </p:nvSpPr>
         <p:spPr>
           <a:xfrm>
-            <a:off x="6394875" y="1095639"/>
-            <a:ext cx="337730" cy="337730"/>
+            <a:off x="6513022" y="1138442"/>
+            <a:ext cx="359619" cy="359619"/>
           </a:xfrm>
           <a:prstGeom prst="ellipse">
             <a:avLst/>
@@ -15135,8 +15135,8 @@
         </p:nvSpPr>
         <p:spPr>
           <a:xfrm>
-            <a:off x="6394875" y="1167082"/>
-            <a:ext cx="337730" cy="194844"/>
+            <a:off x="6513022" y="1214515"/>
+            <a:ext cx="359619" cy="207473"/>
           </a:xfrm>
           <a:prstGeom prst="rect">
             <a:avLst/>
@@ -15152,7 +15152,7 @@
               <a:buNone/>
             </a:pPr>
             <a:r>
-              <a:rPr lang="en-US" sz="1070" b="1" dirty="0">
+              <a:rPr lang="en-US" sz="1130" b="1" dirty="0">
                 <a:solidFill>
                   <a:srgbClr val="FFFFFF"/>
                 </a:solidFill>
@@ -15162,7 +15162,7 @@
               </a:rPr>
               <a:t>3</a:t>
             </a:r>
-            <a:endParaRPr lang="en-US" sz="1070" dirty="0"/>
+            <a:endParaRPr lang="en-US" sz="1130" dirty="0"/>
           </a:p>
         </p:txBody>
       </p:sp>
@@ -15174,8 +15174,8 @@
         </p:nvSpPr>
         <p:spPr>
           <a:xfrm>
-            <a:off x="5756219" y="1498317"/>
-            <a:ext cx="1615041" cy="467626"/>
+            <a:off x="5832972" y="1567218"/>
+            <a:ext cx="1719717" cy="497934"/>
           </a:xfrm>
           <a:prstGeom prst="rect">
             <a:avLst/>
@@ -15194,7 +15194,7 @@
               <a:buNone/>
             </a:pPr>
             <a:r>
-              <a:rPr lang="en-US" sz="990" b="1" dirty="0">
+              <a:rPr lang="en-US" sz="1060" b="1" dirty="0">
                 <a:solidFill>
                   <a:srgbClr val="0B1F3A"/>
                 </a:solidFill>
@@ -15204,7 +15204,7 @@
               </a:rPr>
               <a:t>Dừng ở một vị trí</a:t>
             </a:r>
-            <a:endParaRPr lang="en-US" sz="990" dirty="0"/>
+            <a:endParaRPr lang="en-US" sz="1060" dirty="0"/>
           </a:p>
           <a:p>
             <a:pPr algn="ctr" indent="0" marL="0">
@@ -15214,7 +15214,7 @@
               <a:buNone/>
             </a:pPr>
             <a:r>
-              <a:rPr lang="en-US" sz="850" dirty="0">
+              <a:rPr lang="en-US" sz="910" dirty="0">
                 <a:solidFill>
                   <a:srgbClr val="007F72"/>
                 </a:solidFill>
@@ -15224,7 +15224,7 @@
               </a:rPr>
               <a:t>停在一個位置</a:t>
             </a:r>
-            <a:endParaRPr lang="en-US" sz="990" dirty="0"/>
+            <a:endParaRPr lang="en-US" sz="1060" dirty="0"/>
           </a:p>
         </p:txBody>
       </p:sp>
@@ -15236,8 +15236,8 @@
         </p:nvSpPr>
         <p:spPr>
           <a:xfrm>
-            <a:off x="5756219" y="1991922"/>
-            <a:ext cx="1615041" cy="831335"/>
+            <a:off x="5832972" y="2092816"/>
+            <a:ext cx="1719717" cy="885216"/>
           </a:xfrm>
           <a:prstGeom prst="rect">
             <a:avLst/>
@@ -15256,7 +15256,7 @@
               <a:buNone/>
             </a:pPr>
             <a:r>
-              <a:rPr lang="en-US" sz="820" dirty="0">
+              <a:rPr lang="en-US" sz="870" dirty="0">
                 <a:solidFill>
                   <a:srgbClr val="5F7183"/>
                 </a:solidFill>
@@ -15266,7 +15266,7 @@
               </a:rPr>
               <a:t>12 tia · 40 m · 90°</a:t>
             </a:r>
-            <a:endParaRPr lang="en-US" sz="820" dirty="0"/>
+            <a:endParaRPr lang="en-US" sz="870" dirty="0"/>
           </a:p>
           <a:p>
             <a:pPr algn="ctr" indent="0" marL="0">
@@ -15276,7 +15276,7 @@
               <a:buNone/>
             </a:pPr>
             <a:r>
-              <a:rPr lang="en-US" sz="820" dirty="0">
+              <a:rPr lang="en-US" sz="870" dirty="0">
                 <a:solidFill>
                   <a:srgbClr val="5F7183"/>
                 </a:solidFill>
@@ -15286,7 +15286,7 @@
               </a:rPr>
               <a:t>→ CỤ THỂ</a:t>
             </a:r>
-            <a:endParaRPr lang="en-US" sz="820" dirty="0"/>
+            <a:endParaRPr lang="en-US" sz="870" dirty="0"/>
           </a:p>
           <a:p>
             <a:pPr algn="ctr" indent="0" marL="0">
@@ -15296,7 +15296,7 @@
               <a:buNone/>
             </a:pPr>
             <a:r>
-              <a:rPr lang="en-US" sz="750" dirty="0">
+              <a:rPr lang="en-US" sz="790" dirty="0">
                 <a:solidFill>
                   <a:srgbClr val="5F7183"/>
                 </a:solidFill>
@@ -15306,7 +15306,7 @@
               </a:rPr>
               <a:t>→ 具體場景</a:t>
             </a:r>
-            <a:endParaRPr lang="en-US" sz="820" dirty="0"/>
+            <a:endParaRPr lang="en-US" sz="870" dirty="0"/>
           </a:p>
         </p:txBody>
       </p:sp>
@@ -15318,8 +15318,8 @@
         </p:nvSpPr>
         <p:spPr>
           <a:xfrm>
-            <a:off x="1681812" y="3005111"/>
-            <a:ext cx="5780375" cy="402678"/>
+            <a:off x="1494490" y="3171673"/>
+            <a:ext cx="6155021" cy="428777"/>
           </a:xfrm>
           <a:prstGeom prst="rect">
             <a:avLst/>
@@ -15338,7 +15338,7 @@
               <a:buNone/>
             </a:pPr>
             <a:r>
-              <a:rPr lang="en-US" sz="890" b="1" dirty="0">
+              <a:rPr lang="en-US" sz="950" b="1" dirty="0">
                 <a:solidFill>
                   <a:srgbClr val="0B1F3A"/>
                 </a:solidFill>
@@ -15348,7 +15348,7 @@
               </a:rPr>
               <a:t>Bài tập 2 của tiết 3 chính là «quét tham số»: giữ nguyên giờ cao điểm Hà Nội, chỉ đổi ba con số.</a:t>
             </a:r>
-            <a:endParaRPr lang="en-US" sz="890" dirty="0"/>
+            <a:endParaRPr lang="en-US" sz="950" dirty="0"/>
           </a:p>
           <a:p>
             <a:pPr indent="0" marL="0">
@@ -15358,7 +15358,7 @@
               <a:buNone/>
             </a:pPr>
             <a:r>
-              <a:rPr lang="en-US" sz="820" dirty="0">
+              <a:rPr lang="en-US" sz="870" dirty="0">
                 <a:solidFill>
                   <a:srgbClr val="007F72"/>
                 </a:solidFill>
@@ -15368,7 +15368,7 @@
               </a:rPr>
               <a:t>第三節的任務二就是在「掃參數」：河內尖峰不動，只改那三個數字。</a:t>
             </a:r>
-            <a:endParaRPr lang="en-US" sz="890" dirty="0"/>
+            <a:endParaRPr lang="en-US" sz="950" dirty="0"/>
           </a:p>
         </p:txBody>
       </p:sp>
@@ -15388,8 +15388,8 @@
         </p:blipFill>
         <p:spPr>
           <a:xfrm>
-            <a:off x="6663327" y="3338842"/>
-            <a:ext cx="779376" cy="172200"/>
+            <a:off x="7882128" y="109728"/>
+            <a:ext cx="1097280" cy="242439"/>
           </a:xfrm>
           <a:prstGeom prst="rect">
             <a:avLst/>
@@ -15404,8 +15404,8 @@
         </p:nvSpPr>
         <p:spPr>
           <a:xfrm>
-            <a:off x="1402536" y="3390800"/>
-            <a:ext cx="584532" cy="181855"/>
+            <a:off x="1197112" y="96821"/>
+            <a:ext cx="622418" cy="193641"/>
           </a:xfrm>
           <a:prstGeom prst="rect">
             <a:avLst/>
@@ -15421,7 +15421,7 @@
               <a:buNone/>
             </a:pPr>
             <a:r>
-              <a:rPr lang="en-US" sz="640" dirty="0">
+              <a:rPr lang="en-US" sz="680" dirty="0">
                 <a:solidFill>
                   <a:srgbClr val="5F7183"/>
                 </a:solidFill>
@@ -15431,7 +15431,7 @@
               </a:rPr>
               <a:t>8 / 16</a:t>
             </a:r>
-            <a:endParaRPr lang="en-US" sz="640" dirty="0"/>
+            <a:endParaRPr lang="en-US" sz="680" dirty="0"/>
           </a:p>
         </p:txBody>
       </p:sp>
@@ -15443,8 +15443,8 @@
         </p:nvSpPr>
         <p:spPr>
           <a:xfrm>
-            <a:off x="2006553" y="3390800"/>
-            <a:ext cx="1428857" cy="181855"/>
+            <a:off x="1840277" y="96821"/>
+            <a:ext cx="1521466" cy="193641"/>
           </a:xfrm>
           <a:prstGeom prst="rect">
             <a:avLst/>
@@ -15460,7 +15460,7 @@
               <a:buNone/>
             </a:pPr>
             <a:r>
-              <a:rPr lang="en-US" sz="640" dirty="0">
+              <a:rPr lang="en-US" sz="680" dirty="0">
                 <a:solidFill>
                   <a:srgbClr val="5F7183"/>
                 </a:solidFill>
@@ -15470,7 +15470,7 @@
               </a:rPr>
               <a:t>Tiết 2 · 第 2 節</a:t>
             </a:r>
-            <a:endParaRPr lang="en-US" sz="640" dirty="0"/>
+            <a:endParaRPr lang="en-US" sz="680" dirty="0"/>
           </a:p>
         </p:txBody>
       </p:sp>
@@ -15493,8 +15493,8 @@
       </p:nvGrpSpPr>
       <p:grpSpPr>
         <a:xfrm>
-          <a:off x="0" y="0"/>
-          <a:ext cx="0" cy="0"/>
+          <a:off x="898071" y="0"/>
+          <a:ext cx="1" cy="1"/>
           <a:chOff x="0" y="0"/>
           <a:chExt cx="0" cy="0"/>
         </a:xfrm>
@@ -15507,8 +15507,8 @@
         </p:nvSpPr>
         <p:spPr>
           <a:xfrm>
-            <a:off x="1681812" y="286284"/>
-            <a:ext cx="5780375" cy="194844"/>
+            <a:off x="1302204" y="293914"/>
+            <a:ext cx="6539593" cy="220436"/>
           </a:xfrm>
           <a:prstGeom prst="rect">
             <a:avLst/>
@@ -15524,7 +15524,7 @@
               <a:buNone/>
             </a:pPr>
             <a:r>
-              <a:rPr lang="en-US" sz="920" b="1" dirty="0">
+              <a:rPr lang="en-US" sz="1040" b="1" dirty="0">
                 <a:solidFill>
                   <a:srgbClr val="007F72"/>
                 </a:solidFill>
@@ -15534,7 +15534,7 @@
               </a:rPr>
               <a:t>▶ Video · 一個場景在真實世界長什麼樣</a:t>
             </a:r>
-            <a:endParaRPr lang="en-US" sz="920" dirty="0"/>
+            <a:endParaRPr lang="en-US" sz="1040" dirty="0"/>
           </a:p>
         </p:txBody>
       </p:sp>
@@ -15546,8 +15546,8 @@
         </p:nvSpPr>
         <p:spPr>
           <a:xfrm>
-            <a:off x="1681812" y="507107"/>
-            <a:ext cx="5780375" cy="398243"/>
+            <a:off x="1302204" y="543741"/>
+            <a:ext cx="6539593" cy="450550"/>
           </a:xfrm>
           <a:prstGeom prst="rect">
             <a:avLst/>
@@ -15566,7 +15566,7 @@
               <a:buNone/>
             </a:pPr>
             <a:r>
-              <a:rPr lang="en-US" sz="1210" b="1" dirty="0">
+              <a:rPr lang="en-US" sz="1370" b="1" dirty="0">
                 <a:solidFill>
                   <a:srgbClr val="0B1F3A"/>
                 </a:solidFill>
@@ -15576,7 +15576,7 @@
               </a:rPr>
               <a:t>Euro NCAP: cùng một kịch bản, lặp lại y hệt, cho mọi mẫu xe</a:t>
             </a:r>
-            <a:endParaRPr lang="en-US" sz="1210" dirty="0"/>
+            <a:endParaRPr lang="en-US" sz="1370" dirty="0"/>
           </a:p>
           <a:p>
             <a:pPr indent="0" marL="0">
@@ -15586,7 +15586,7 @@
               <a:buNone/>
             </a:pPr>
             <a:r>
-              <a:rPr lang="en-US" sz="890" dirty="0">
+              <a:rPr lang="en-US" sz="1000" dirty="0">
                 <a:solidFill>
                   <a:srgbClr val="5F7183"/>
                 </a:solidFill>
@@ -15596,7 +15596,7 @@
               </a:rPr>
               <a:t>Euro NCAP：同一個場景，一模一樣地重複，對每一款車都做</a:t>
             </a:r>
-            <a:endParaRPr lang="en-US" sz="1210" dirty="0"/>
+            <a:endParaRPr lang="en-US" sz="1370" dirty="0"/>
           </a:p>
         </p:txBody>
       </p:sp>
@@ -15608,8 +15608,8 @@
         </p:nvSpPr>
         <p:spPr>
           <a:xfrm>
-            <a:off x="1681812" y="918340"/>
-            <a:ext cx="2773281" cy="1822980"/>
+            <a:off x="1302204" y="1008987"/>
+            <a:ext cx="3137535" cy="2062418"/>
           </a:xfrm>
           <a:prstGeom prst="roundRect">
             <a:avLst>
@@ -15635,8 +15635,8 @@
         </p:nvSpPr>
         <p:spPr>
           <a:xfrm>
-            <a:off x="2034610" y="1957065"/>
-            <a:ext cx="2067686" cy="0"/>
+            <a:off x="1701339" y="2184142"/>
+            <a:ext cx="2339264" cy="1"/>
           </a:xfrm>
           <a:prstGeom prst="line">
             <a:avLst/>
@@ -15658,8 +15658,8 @@
         </p:nvSpPr>
         <p:spPr>
           <a:xfrm>
-            <a:off x="2108456" y="1629253"/>
-            <a:ext cx="738459" cy="339691"/>
+            <a:off x="1784884" y="1813274"/>
+            <a:ext cx="835452" cy="384307"/>
           </a:xfrm>
           <a:prstGeom prst="roundRect">
             <a:avLst>
@@ -15680,8 +15680,8 @@
         </p:nvSpPr>
         <p:spPr>
           <a:xfrm>
-            <a:off x="2389070" y="1697191"/>
-            <a:ext cx="251076" cy="203815"/>
+            <a:off x="2102356" y="1890135"/>
+            <a:ext cx="284054" cy="230585"/>
           </a:xfrm>
           <a:prstGeom prst="roundRect">
             <a:avLst>
@@ -15702,8 +15702,8 @@
         </p:nvSpPr>
         <p:spPr>
           <a:xfrm>
-            <a:off x="2920761" y="1799098"/>
-            <a:ext cx="295384" cy="0"/>
+            <a:off x="2703880" y="2005427"/>
+            <a:ext cx="334180" cy="1"/>
           </a:xfrm>
           <a:prstGeom prst="line">
             <a:avLst/>
@@ -15726,8 +15726,8 @@
         </p:nvSpPr>
         <p:spPr>
           <a:xfrm>
-            <a:off x="3247074" y="1772771"/>
-            <a:ext cx="184294" cy="184294"/>
+            <a:off x="3073053" y="1975642"/>
+            <a:ext cx="208499" cy="208499"/>
           </a:xfrm>
           <a:prstGeom prst="ellipse">
             <a:avLst/>
@@ -15748,8 +15748,8 @@
         </p:nvSpPr>
         <p:spPr>
           <a:xfrm>
-            <a:off x="3591689" y="1772771"/>
-            <a:ext cx="184294" cy="184294"/>
+            <a:off x="3462931" y="1975642"/>
+            <a:ext cx="208499" cy="208499"/>
           </a:xfrm>
           <a:prstGeom prst="ellipse">
             <a:avLst/>
@@ -15770,8 +15770,8 @@
         </p:nvSpPr>
         <p:spPr>
           <a:xfrm flipV="1">
-            <a:off x="3339221" y="1759607"/>
-            <a:ext cx="172307" cy="105311"/>
+            <a:off x="3177303" y="1960749"/>
+            <a:ext cx="194938" cy="119143"/>
           </a:xfrm>
           <a:prstGeom prst="line">
             <a:avLst/>
@@ -15793,8 +15793,8 @@
         </p:nvSpPr>
         <p:spPr>
           <a:xfrm flipH="1" flipV="1">
-            <a:off x="3511528" y="1759607"/>
-            <a:ext cx="172307" cy="105311"/>
+            <a:off x="3372242" y="1960749"/>
+            <a:ext cx="194938" cy="119143"/>
           </a:xfrm>
           <a:prstGeom prst="line">
             <a:avLst/>
@@ -15816,8 +15816,8 @@
         </p:nvSpPr>
         <p:spPr>
           <a:xfrm>
-            <a:off x="3462298" y="1562149"/>
-            <a:ext cx="110769" cy="171130"/>
+            <a:off x="3316545" y="1737357"/>
+            <a:ext cx="125318" cy="193607"/>
           </a:xfrm>
           <a:prstGeom prst="roundRect">
             <a:avLst>
@@ -15838,8 +15838,8 @@
         </p:nvSpPr>
         <p:spPr>
           <a:xfrm>
-            <a:off x="3452291" y="1450256"/>
-            <a:ext cx="118475" cy="118475"/>
+            <a:off x="3305224" y="1610767"/>
+            <a:ext cx="134036" cy="134036"/>
           </a:xfrm>
           <a:prstGeom prst="ellipse">
             <a:avLst/>
@@ -15858,8 +15858,8 @@
         </p:nvSpPr>
         <p:spPr>
           <a:xfrm>
-            <a:off x="3511528" y="2036048"/>
-            <a:ext cx="0" cy="131639"/>
+            <a:off x="3372242" y="2273499"/>
+            <a:ext cx="1" cy="148928"/>
           </a:xfrm>
           <a:prstGeom prst="line">
             <a:avLst/>
@@ -15882,8 +15882,8 @@
         </p:nvSpPr>
         <p:spPr>
           <a:xfrm>
-            <a:off x="1811708" y="2351632"/>
-            <a:ext cx="2513489" cy="337730"/>
+            <a:off x="1449161" y="2630533"/>
+            <a:ext cx="2843621" cy="382089"/>
           </a:xfrm>
           <a:prstGeom prst="rect">
             <a:avLst/>
@@ -15902,7 +15902,7 @@
               <a:buNone/>
             </a:pPr>
             <a:r>
-              <a:rPr lang="en-US" sz="670" dirty="0">
+              <a:rPr lang="en-US" sz="760" dirty="0">
                 <a:solidFill>
                   <a:srgbClr val="5F7183"/>
                 </a:solidFill>
@@ -15912,7 +15912,7 @@
               </a:rPr>
               <a:t>Búp bê xe đạp cắt ngang — cùng tốc độ, cùng vị trí, lần nào cũng thế.</a:t>
             </a:r>
-            <a:endParaRPr lang="en-US" sz="670" dirty="0"/>
+            <a:endParaRPr lang="en-US" sz="760" dirty="0"/>
           </a:p>
           <a:p>
             <a:pPr algn="ctr" indent="0" marL="0">
@@ -15922,7 +15922,7 @@
               <a:buNone/>
             </a:pPr>
             <a:r>
-              <a:rPr lang="en-US" sz="640" dirty="0">
+              <a:rPr lang="en-US" sz="720" dirty="0">
                 <a:solidFill>
                   <a:srgbClr val="5F7183"/>
                 </a:solidFill>
@@ -15932,7 +15932,7 @@
               </a:rPr>
               <a:t>腳踏車假人橫切過去——同樣速度、同樣位置，每次都一樣。</a:t>
             </a:r>
-            <a:endParaRPr lang="en-US" sz="670" dirty="0"/>
+            <a:endParaRPr lang="en-US" sz="760" dirty="0"/>
           </a:p>
         </p:txBody>
       </p:sp>
@@ -15944,8 +15944,8 @@
         </p:nvSpPr>
         <p:spPr>
           <a:xfrm>
-            <a:off x="4688906" y="918340"/>
-            <a:ext cx="2773281" cy="1822980"/>
+            <a:off x="4704261" y="1008987"/>
+            <a:ext cx="3137535" cy="2062418"/>
           </a:xfrm>
           <a:prstGeom prst="roundRect">
             <a:avLst>
@@ -15971,8 +15971,8 @@
         </p:nvSpPr>
         <p:spPr>
           <a:xfrm>
-            <a:off x="4818803" y="1035246"/>
-            <a:ext cx="246803" cy="246803"/>
+            <a:off x="4851219" y="1141248"/>
+            <a:ext cx="279219" cy="279219"/>
           </a:xfrm>
           <a:prstGeom prst="ellipse">
             <a:avLst/>
@@ -15991,8 +15991,8 @@
         </p:nvSpPr>
         <p:spPr>
           <a:xfrm>
-            <a:off x="4818803" y="1067721"/>
-            <a:ext cx="246803" cy="181855"/>
+            <a:off x="4851219" y="1177988"/>
+            <a:ext cx="279219" cy="205740"/>
           </a:xfrm>
           <a:prstGeom prst="rect">
             <a:avLst/>
@@ -16008,7 +16008,7 @@
               <a:buNone/>
             </a:pPr>
             <a:r>
-              <a:rPr lang="en-US" sz="850" b="1" dirty="0">
+              <a:rPr lang="en-US" sz="960" b="1" dirty="0">
                 <a:solidFill>
                   <a:srgbClr val="FFFFFF"/>
                 </a:solidFill>
@@ -16018,7 +16018,7 @@
               </a:rPr>
               <a:t>▶</a:t>
             </a:r>
-            <a:endParaRPr lang="en-US" sz="850" dirty="0"/>
+            <a:endParaRPr lang="en-US" sz="960" dirty="0"/>
           </a:p>
         </p:txBody>
       </p:sp>
@@ -16030,8 +16030,8 @@
         </p:nvSpPr>
         <p:spPr>
           <a:xfrm>
-            <a:off x="5117564" y="1022257"/>
-            <a:ext cx="2214728" cy="298761"/>
+            <a:off x="5189220" y="1126553"/>
+            <a:ext cx="2505619" cy="338001"/>
           </a:xfrm>
           <a:prstGeom prst="rect">
             <a:avLst/>
@@ -16047,7 +16047,7 @@
               <a:buNone/>
             </a:pPr>
             <a:r>
-              <a:rPr lang="en-US" sz="750" b="1" dirty="0">
+              <a:rPr lang="en-US" sz="840" b="1" dirty="0">
                 <a:solidFill>
                   <a:srgbClr val="0B1F3A"/>
                 </a:solidFill>
@@ -16057,7 +16057,7 @@
               </a:rPr>
               <a:t>AEB for cyclists</a:t>
             </a:r>
-            <a:endParaRPr lang="en-US" sz="750" dirty="0"/>
+            <a:endParaRPr lang="en-US" sz="840" dirty="0"/>
           </a:p>
         </p:txBody>
       </p:sp>
@@ -16069,8 +16069,8 @@
         </p:nvSpPr>
         <p:spPr>
           <a:xfrm>
-            <a:off x="4818803" y="1346997"/>
-            <a:ext cx="2513489" cy="142886"/>
+            <a:off x="4851219" y="1493945"/>
+            <a:ext cx="2843621" cy="161653"/>
           </a:xfrm>
           <a:prstGeom prst="rect">
             <a:avLst/>
@@ -16086,7 +16086,7 @@
               <a:buNone/>
             </a:pPr>
             <a:r>
-              <a:rPr lang="en-US" sz="640" dirty="0">
+              <a:rPr lang="en-US" sz="720" dirty="0">
                 <a:solidFill>
                   <a:srgbClr val="5F7183"/>
                 </a:solidFill>
@@ -16096,7 +16096,7 @@
               </a:rPr>
               <a:t>Euro NCAP（官方）　·　4:39，播 2 分鐘就夠</a:t>
             </a:r>
-            <a:endParaRPr lang="en-US" sz="640" dirty="0"/>
+            <a:endParaRPr lang="en-US" sz="720" dirty="0"/>
           </a:p>
         </p:txBody>
       </p:sp>
@@ -16110,8 +16110,8 @@
         </p:nvSpPr>
         <p:spPr>
           <a:xfrm>
-            <a:off x="4818803" y="1476893"/>
-            <a:ext cx="2513489" cy="142886"/>
+            <a:off x="4851219" y="1640903"/>
+            <a:ext cx="2843621" cy="161653"/>
           </a:xfrm>
           <a:prstGeom prst="rect">
             <a:avLst/>
@@ -16127,7 +16127,7 @@
               <a:buNone/>
             </a:pPr>
             <a:r>
-              <a:rPr lang="en-US" sz="600" u="sng" dirty="0">
+              <a:rPr lang="en-US" sz="680" u="sng" dirty="0">
                 <a:solidFill>
                   <a:srgbClr val="1F6FBF"/>
                 </a:solidFill>
@@ -16144,7 +16144,7 @@
               </a:rPr>
               <a:t>https://www.youtube.com/watch?v=fWZQGcMN3Vc</a:t>
             </a:r>
-            <a:endParaRPr lang="en-US" sz="600" dirty="0"/>
+            <a:endParaRPr lang="en-US" sz="680" dirty="0"/>
           </a:p>
         </p:txBody>
       </p:sp>
@@ -16156,8 +16156,8 @@
         </p:nvSpPr>
         <p:spPr>
           <a:xfrm>
-            <a:off x="4818803" y="1671737"/>
-            <a:ext cx="25979" cy="168865"/>
+            <a:off x="4851219" y="1861338"/>
+            <a:ext cx="29391" cy="191044"/>
           </a:xfrm>
           <a:prstGeom prst="rect">
             <a:avLst/>
@@ -16176,8 +16176,8 @@
         </p:nvSpPr>
         <p:spPr>
           <a:xfrm>
-            <a:off x="4909730" y="1645758"/>
-            <a:ext cx="2435551" cy="323944"/>
+            <a:off x="4954089" y="1831947"/>
+            <a:ext cx="2755446" cy="366492"/>
           </a:xfrm>
           <a:prstGeom prst="rect">
             <a:avLst/>
@@ -16196,7 +16196,7 @@
               <a:buNone/>
             </a:pPr>
             <a:r>
-              <a:rPr lang="en-US" sz="670" dirty="0">
+              <a:rPr lang="en-US" sz="760" dirty="0">
                 <a:solidFill>
                   <a:srgbClr val="1A2733"/>
                 </a:solidFill>
@@ -16206,7 +16206,7 @@
               </a:rPr>
               <a:t>Quy trình quy định: búp bê xe đạp chạy ra ở đúng một tốc độ, một vị trí</a:t>
             </a:r>
-            <a:endParaRPr lang="en-US" sz="670" dirty="0"/>
+            <a:endParaRPr lang="en-US" sz="760" dirty="0"/>
           </a:p>
           <a:p>
             <a:pPr indent="0" marL="0">
@@ -16216,7 +16216,7 @@
               <a:buNone/>
             </a:pPr>
             <a:r>
-              <a:rPr lang="en-US" sz="640" dirty="0">
+              <a:rPr lang="en-US" sz="720" dirty="0">
                 <a:solidFill>
                   <a:srgbClr val="5F7183"/>
                 </a:solidFill>
@@ -16226,7 +16226,7 @@
               </a:rPr>
               <a:t>測試規程訂死：假人腳踏車固定速度、固定位置衝出來</a:t>
             </a:r>
-            <a:endParaRPr lang="en-US" sz="670" dirty="0"/>
+            <a:endParaRPr lang="en-US" sz="760" dirty="0"/>
           </a:p>
         </p:txBody>
       </p:sp>
@@ -16238,8 +16238,8 @@
         </p:nvSpPr>
         <p:spPr>
           <a:xfrm>
-            <a:off x="4818803" y="2021660"/>
-            <a:ext cx="25979" cy="168865"/>
+            <a:off x="4851219" y="2257222"/>
+            <a:ext cx="29391" cy="191044"/>
           </a:xfrm>
           <a:prstGeom prst="rect">
             <a:avLst/>
@@ -16258,8 +16258,8 @@
         </p:nvSpPr>
         <p:spPr>
           <a:xfrm>
-            <a:off x="4909730" y="1995681"/>
-            <a:ext cx="2435551" cy="323944"/>
+            <a:off x="4954089" y="2227830"/>
+            <a:ext cx="2755446" cy="366492"/>
           </a:xfrm>
           <a:prstGeom prst="rect">
             <a:avLst/>
@@ -16278,7 +16278,7 @@
               <a:buNone/>
             </a:pPr>
             <a:r>
-              <a:rPr lang="en-US" sz="670" dirty="0">
+              <a:rPr lang="en-US" sz="760" dirty="0">
                 <a:solidFill>
                   <a:srgbClr val="1A2733"/>
                 </a:solidFill>
@@ -16288,7 +16288,7 @@
               </a:rPr>
               <a:t>Đó chính là «kịch bản cụ thể» — mỗi lần chạy đều phải giống hệt lần trước</a:t>
             </a:r>
-            <a:endParaRPr lang="en-US" sz="670" dirty="0"/>
+            <a:endParaRPr lang="en-US" sz="760" dirty="0"/>
           </a:p>
           <a:p>
             <a:pPr indent="0" marL="0">
@@ -16298,7 +16298,7 @@
               <a:buNone/>
             </a:pPr>
             <a:r>
-              <a:rPr lang="en-US" sz="640" dirty="0">
+              <a:rPr lang="en-US" sz="720" dirty="0">
                 <a:solidFill>
                   <a:srgbClr val="5F7183"/>
                 </a:solidFill>
@@ -16308,7 +16308,7 @@
               </a:rPr>
               <a:t>那就是「具體場景」——每一次跑都必須跟上一次一模一樣</a:t>
             </a:r>
-            <a:endParaRPr lang="en-US" sz="670" dirty="0"/>
+            <a:endParaRPr lang="en-US" sz="760" dirty="0"/>
           </a:p>
         </p:txBody>
       </p:sp>
@@ -16320,8 +16320,8 @@
         </p:nvSpPr>
         <p:spPr>
           <a:xfrm>
-            <a:off x="4818803" y="2371584"/>
-            <a:ext cx="25979" cy="168865"/>
+            <a:off x="4851219" y="2653105"/>
+            <a:ext cx="29391" cy="191044"/>
           </a:xfrm>
           <a:prstGeom prst="rect">
             <a:avLst/>
@@ -16340,8 +16340,8 @@
         </p:nvSpPr>
         <p:spPr>
           <a:xfrm>
-            <a:off x="4909730" y="2345605"/>
-            <a:ext cx="2435551" cy="323944"/>
+            <a:off x="4954089" y="2623714"/>
+            <a:ext cx="2755446" cy="366492"/>
           </a:xfrm>
           <a:prstGeom prst="rect">
             <a:avLst/>
@@ -16360,7 +16360,7 @@
               <a:buNone/>
             </a:pPr>
             <a:r>
-              <a:rPr lang="en-US" sz="670" dirty="0">
+              <a:rPr lang="en-US" sz="760" dirty="0">
                 <a:solidFill>
                   <a:srgbClr val="1A2733"/>
                 </a:solidFill>
@@ -16370,7 +16370,7 @@
               </a:rPr>
               <a:t>Câu hỏi: vì sao phải dùng búp bê, không dùng người thật?</a:t>
             </a:r>
-            <a:endParaRPr lang="en-US" sz="670" dirty="0"/>
+            <a:endParaRPr lang="en-US" sz="760" dirty="0"/>
           </a:p>
           <a:p>
             <a:pPr indent="0" marL="0">
@@ -16380,7 +16380,7 @@
               <a:buNone/>
             </a:pPr>
             <a:r>
-              <a:rPr lang="en-US" sz="640" dirty="0">
+              <a:rPr lang="en-US" sz="720" dirty="0">
                 <a:solidFill>
                   <a:srgbClr val="5F7183"/>
                 </a:solidFill>
@@ -16390,7 +16390,7 @@
               </a:rPr>
               <a:t>問題：為什麼要用假人，不用真人？</a:t>
             </a:r>
-            <a:endParaRPr lang="en-US" sz="670" dirty="0"/>
+            <a:endParaRPr lang="en-US" sz="760" dirty="0"/>
           </a:p>
         </p:txBody>
       </p:sp>
@@ -16402,8 +16402,8 @@
         </p:nvSpPr>
         <p:spPr>
           <a:xfrm>
-            <a:off x="1681812" y="2819258"/>
-            <a:ext cx="5780375" cy="389688"/>
+            <a:off x="1302204" y="3159579"/>
+            <a:ext cx="6539593" cy="440871"/>
           </a:xfrm>
           <a:prstGeom prst="roundRect">
             <a:avLst>
@@ -16429,8 +16429,8 @@
         </p:nvSpPr>
         <p:spPr>
           <a:xfrm>
-            <a:off x="1811708" y="2864721"/>
-            <a:ext cx="5520583" cy="311751"/>
+            <a:off x="1449161" y="3211014"/>
+            <a:ext cx="6245679" cy="352697"/>
           </a:xfrm>
           <a:prstGeom prst="rect">
             <a:avLst/>
@@ -16449,7 +16449,7 @@
               <a:buNone/>
             </a:pPr>
             <a:r>
-              <a:rPr lang="en-US" sz="820" b="1" dirty="0">
+              <a:rPr lang="en-US" sz="920" b="1" dirty="0">
                 <a:solidFill>
                   <a:srgbClr val="7A4E00"/>
                 </a:solidFill>
@@ -16459,7 +16459,7 @@
               </a:rPr>
               <a:t>Euro NCAP có kịch bản «một xe máy». Không có kịch bản «mười hai xe máy vây quanh bạn».</a:t>
             </a:r>
-            <a:endParaRPr lang="en-US" sz="820" dirty="0"/>
+            <a:endParaRPr lang="en-US" sz="920" dirty="0"/>
           </a:p>
           <a:p>
             <a:pPr indent="0" marL="0">
@@ -16469,7 +16469,7 @@
               <a:buNone/>
             </a:pPr>
             <a:r>
-              <a:rPr lang="en-US" sz="750" dirty="0">
+              <a:rPr lang="en-US" sz="840" dirty="0">
                 <a:solidFill>
                   <a:srgbClr val="7A4E00"/>
                 </a:solidFill>
@@ -16479,7 +16479,7 @@
               </a:rPr>
               <a:t>Euro NCAP 有「一台機車」的場景。沒有「十二台機車圍著你」的場景。</a:t>
             </a:r>
-            <a:endParaRPr lang="en-US" sz="820" dirty="0"/>
+            <a:endParaRPr lang="en-US" sz="920" dirty="0"/>
           </a:p>
         </p:txBody>
       </p:sp>
@@ -16499,8 +16499,8 @@
         </p:blipFill>
         <p:spPr>
           <a:xfrm>
-            <a:off x="6663327" y="3338842"/>
-            <a:ext cx="779376" cy="172200"/>
+            <a:off x="7882128" y="109728"/>
+            <a:ext cx="1097280" cy="242439"/>
           </a:xfrm>
           <a:prstGeom prst="rect">
             <a:avLst/>
@@ -16515,8 +16515,8 @@
         </p:nvSpPr>
         <p:spPr>
           <a:xfrm>
-            <a:off x="1402536" y="3390800"/>
-            <a:ext cx="584532" cy="181855"/>
+            <a:off x="986246" y="102870"/>
+            <a:ext cx="661307" cy="205740"/>
           </a:xfrm>
           <a:prstGeom prst="rect">
             <a:avLst/>
@@ -16532,7 +16532,7 @@
               <a:buNone/>
             </a:pPr>
             <a:r>
-              <a:rPr lang="en-US" sz="640" dirty="0">
+              <a:rPr lang="en-US" sz="720" dirty="0">
                 <a:solidFill>
                   <a:srgbClr val="5F7183"/>
                 </a:solidFill>
@@ -16542,7 +16542,7 @@
               </a:rPr>
               <a:t>9 / 16</a:t>
             </a:r>
-            <a:endParaRPr lang="en-US" sz="640" dirty="0"/>
+            <a:endParaRPr lang="en-US" sz="720" dirty="0"/>
           </a:p>
         </p:txBody>
       </p:sp>
@@ -16554,8 +16554,8 @@
         </p:nvSpPr>
         <p:spPr>
           <a:xfrm>
-            <a:off x="2006553" y="3390800"/>
-            <a:ext cx="1428857" cy="181855"/>
+            <a:off x="1669596" y="102870"/>
+            <a:ext cx="1616529" cy="205740"/>
           </a:xfrm>
           <a:prstGeom prst="rect">
             <a:avLst/>
@@ -16571,7 +16571,7 @@
               <a:buNone/>
             </a:pPr>
             <a:r>
-              <a:rPr lang="en-US" sz="640" dirty="0">
+              <a:rPr lang="en-US" sz="720" dirty="0">
                 <a:solidFill>
                   <a:srgbClr val="5F7183"/>
                 </a:solidFill>
@@ -16581,7 +16581,7 @@
               </a:rPr>
               <a:t>Tiết 2 · 第 2 節</a:t>
             </a:r>
-            <a:endParaRPr lang="en-US" sz="640" dirty="0"/>
+            <a:endParaRPr lang="en-US" sz="720" dirty="0"/>
           </a:p>
         </p:txBody>
       </p:sp>

--- a/第四週(10-01)/第四週_第2節_簡報.pptx
+++ b/第四週(10-01)/第四週_第2節_簡報.pptx
@@ -446,6 +446,149 @@
               </a:spcAft>
             </a:pPr>
             <a:r>
+              <a:rPr sz="1200" b="1" lang="zh-TW" dirty="0">
+                <a:solidFill>
+                  <a:srgbClr val="000000"/>
+                </a:solidFill>
+                <a:latin typeface="Arial Unicode MS"/>
+                <a:ea typeface="Arial Unicode MS"/>
+                <a:cs typeface="Arial Unicode MS"/>
+              </a:rPr>
+              <a:t>▍這一張要做什麼</a:t>
+            </a:r>
+            <a:r>
+              <a:rPr sz="1200" lang="zh-TW" dirty="0">
+                <a:solidFill>
+                  <a:srgbClr val="000000"/>
+                </a:solidFill>
+                <a:latin typeface="Arial Unicode MS"/>
+                <a:ea typeface="Arial Unicode MS"/>
+                <a:cs typeface="Arial Unicode MS"/>
+              </a:rPr>
+              <a:t>
+</a:t>
+            </a:r>
+          </a:p>
+          <a:p>
+            <a:pPr algn="l">
+              <a:lnSpc>
+                <a:spcPct val="115000"/>
+              </a:lnSpc>
+              <a:spcAft>
+                <a:spcPts val="600"/>
+              </a:spcAft>
+            </a:pPr>
+            <a:r>
+              <a:rPr sz="1200" lang="zh-TW" dirty="0">
+                <a:solidFill>
+                  <a:srgbClr val="000000"/>
+                </a:solidFill>
+                <a:latin typeface="Arial Unicode MS"/>
+                <a:ea typeface="Arial Unicode MS"/>
+                <a:cs typeface="Arial Unicode MS"/>
+              </a:rPr>
+              <a:t>第二節開場。丟出一個會讓學生愣一下的說法：用里程衡量自駕車，單位就選錯了。
+</a:t>
+            </a:r>
+          </a:p>
+          <a:p>
+            <a:pPr algn="l">
+              <a:lnSpc>
+                <a:spcPct val="115000"/>
+              </a:lnSpc>
+              <a:spcAft>
+                <a:spcPts val="600"/>
+              </a:spcAft>
+            </a:pPr>
+            <a:r>
+              <a:rPr sz="1200" b="1" lang="zh-TW" dirty="0">
+                <a:solidFill>
+                  <a:srgbClr val="000000"/>
+                </a:solidFill>
+                <a:latin typeface="Arial Unicode MS"/>
+                <a:ea typeface="Arial Unicode MS"/>
+                <a:cs typeface="Arial Unicode MS"/>
+              </a:rPr>
+              <a:t>▍畫面上圈這裡</a:t>
+            </a:r>
+            <a:r>
+              <a:rPr sz="1200" lang="zh-TW" dirty="0">
+                <a:solidFill>
+                  <a:srgbClr val="000000"/>
+                </a:solidFill>
+                <a:latin typeface="Arial Unicode MS"/>
+                <a:ea typeface="Arial Unicode MS"/>
+                <a:cs typeface="Arial Unicode MS"/>
+              </a:rPr>
+              <a:t>
+</a:t>
+            </a:r>
+          </a:p>
+          <a:p>
+            <a:pPr algn="l">
+              <a:lnSpc>
+                <a:spcPct val="115000"/>
+              </a:lnSpc>
+              <a:spcAft>
+                <a:spcPts val="600"/>
+              </a:spcAft>
+            </a:pPr>
+            <a:r>
+              <a:rPr sz="1200" lang="zh-TW" dirty="0">
+                <a:solidFill>
+                  <a:srgbClr val="000000"/>
+                </a:solidFill>
+                <a:latin typeface="Arial Unicode MS"/>
+                <a:ea typeface="Arial Unicode MS"/>
+                <a:cs typeface="Arial Unicode MS"/>
+              </a:rPr>
+              <a:t>圈主標裡的「單位就選錯了」。先不要解釋，讓他們帶著疑問聽下一頁。
+</a:t>
+            </a:r>
+          </a:p>
+          <a:p>
+            <a:pPr algn="l">
+              <a:lnSpc>
+                <a:spcPct val="115000"/>
+              </a:lnSpc>
+              <a:spcAft>
+                <a:spcPts val="600"/>
+              </a:spcAft>
+            </a:pPr>
+            <a:r>
+              <a:rPr sz="1200" b="1" lang="zh-TW" dirty="0">
+                <a:solidFill>
+                  <a:srgbClr val="000000"/>
+                </a:solidFill>
+                <a:latin typeface="Arial Unicode MS"/>
+                <a:ea typeface="Arial Unicode MS"/>
+                <a:cs typeface="Arial Unicode MS"/>
+              </a:rPr>
+              <a:t>▍以下照著唸</a:t>
+            </a:r>
+            <a:r>
+              <a:rPr sz="1200" lang="zh-TW" dirty="0">
+                <a:solidFill>
+                  <a:srgbClr val="000000"/>
+                </a:solidFill>
+                <a:latin typeface="Arial Unicode MS"/>
+                <a:ea typeface="Arial Unicode MS"/>
+                <a:cs typeface="Arial Unicode MS"/>
+              </a:rPr>
+              <a:t>
+</a:t>
+            </a:r>
+          </a:p>
+          <a:p>
+            <a:pPr algn="l">
+              <a:lnSpc>
+                <a:spcPct val="115000"/>
+              </a:lnSpc>
+              <a:spcAft>
+                <a:spcPts val="600"/>
+              </a:spcAft>
+            </a:pPr>
+            <a:r>
               <a:rPr sz="1200" lang="zh-TW" dirty="0">
                 <a:solidFill>
                   <a:srgbClr val="000000"/>
@@ -688,6 +831,149 @@
               </a:spcAft>
             </a:pPr>
             <a:r>
+              <a:rPr sz="1200" b="1" lang="zh-TW" dirty="0">
+                <a:solidFill>
+                  <a:srgbClr val="000000"/>
+                </a:solidFill>
+                <a:latin typeface="Arial Unicode MS"/>
+                <a:ea typeface="Arial Unicode MS"/>
+                <a:cs typeface="Arial Unicode MS"/>
+              </a:rPr>
+              <a:t>▍這一張要做什麼</a:t>
+            </a:r>
+            <a:r>
+              <a:rPr sz="1200" lang="zh-TW" dirty="0">
+                <a:solidFill>
+                  <a:srgbClr val="000000"/>
+                </a:solidFill>
+                <a:latin typeface="Arial Unicode MS"/>
+                <a:ea typeface="Arial Unicode MS"/>
+                <a:cs typeface="Arial Unicode MS"/>
+              </a:rPr>
+              <a:t>
+</a:t>
+            </a:r>
+          </a:p>
+          <a:p>
+            <a:pPr algn="l">
+              <a:lnSpc>
+                <a:spcPct val="115000"/>
+              </a:lnSpc>
+              <a:spcAft>
+                <a:spcPts val="600"/>
+              </a:spcAft>
+            </a:pPr>
+            <a:r>
+              <a:rPr sz="1200" lang="zh-TW" dirty="0">
+                <a:solidFill>
+                  <a:srgbClr val="000000"/>
+                </a:solidFill>
+                <a:latin typeface="Arial Unicode MS"/>
+                <a:ea typeface="Arial Unicode MS"/>
+                <a:cs typeface="Arial Unicode MS"/>
+              </a:rPr>
+              <a:t>段落分隔。從「場景是什麼」切到「場景哪裡來」。
+</a:t>
+            </a:r>
+          </a:p>
+          <a:p>
+            <a:pPr algn="l">
+              <a:lnSpc>
+                <a:spcPct val="115000"/>
+              </a:lnSpc>
+              <a:spcAft>
+                <a:spcPts val="600"/>
+              </a:spcAft>
+            </a:pPr>
+            <a:r>
+              <a:rPr sz="1200" b="1" lang="zh-TW" dirty="0">
+                <a:solidFill>
+                  <a:srgbClr val="000000"/>
+                </a:solidFill>
+                <a:latin typeface="Arial Unicode MS"/>
+                <a:ea typeface="Arial Unicode MS"/>
+                <a:cs typeface="Arial Unicode MS"/>
+              </a:rPr>
+              <a:t>▍畫面上圈這裡</a:t>
+            </a:r>
+            <a:r>
+              <a:rPr sz="1200" lang="zh-TW" dirty="0">
+                <a:solidFill>
+                  <a:srgbClr val="000000"/>
+                </a:solidFill>
+                <a:latin typeface="Arial Unicode MS"/>
+                <a:ea typeface="Arial Unicode MS"/>
+                <a:cs typeface="Arial Unicode MS"/>
+              </a:rPr>
+              <a:t>
+</a:t>
+            </a:r>
+          </a:p>
+          <a:p>
+            <a:pPr algn="l">
+              <a:lnSpc>
+                <a:spcPct val="115000"/>
+              </a:lnSpc>
+              <a:spcAft>
+                <a:spcPts val="600"/>
+              </a:spcAft>
+            </a:pPr>
+            <a:r>
+              <a:rPr sz="1200" lang="zh-TW" dirty="0">
+                <a:solidFill>
+                  <a:srgbClr val="000000"/>
+                </a:solidFill>
+                <a:latin typeface="Arial Unicode MS"/>
+                <a:ea typeface="Arial Unicode MS"/>
+                <a:cs typeface="Arial Unicode MS"/>
+              </a:rPr>
+              <a:t>不用圈。
+</a:t>
+            </a:r>
+          </a:p>
+          <a:p>
+            <a:pPr algn="l">
+              <a:lnSpc>
+                <a:spcPct val="115000"/>
+              </a:lnSpc>
+              <a:spcAft>
+                <a:spcPts val="600"/>
+              </a:spcAft>
+            </a:pPr>
+            <a:r>
+              <a:rPr sz="1200" b="1" lang="zh-TW" dirty="0">
+                <a:solidFill>
+                  <a:srgbClr val="000000"/>
+                </a:solidFill>
+                <a:latin typeface="Arial Unicode MS"/>
+                <a:ea typeface="Arial Unicode MS"/>
+                <a:cs typeface="Arial Unicode MS"/>
+              </a:rPr>
+              <a:t>▍以下照著唸</a:t>
+            </a:r>
+            <a:r>
+              <a:rPr sz="1200" lang="zh-TW" dirty="0">
+                <a:solidFill>
+                  <a:srgbClr val="000000"/>
+                </a:solidFill>
+                <a:latin typeface="Arial Unicode MS"/>
+                <a:ea typeface="Arial Unicode MS"/>
+                <a:cs typeface="Arial Unicode MS"/>
+              </a:rPr>
+              <a:t>
+</a:t>
+            </a:r>
+          </a:p>
+          <a:p>
+            <a:pPr algn="l">
+              <a:lnSpc>
+                <a:spcPct val="115000"/>
+              </a:lnSpc>
+              <a:spcAft>
+                <a:spcPts val="600"/>
+              </a:spcAft>
+            </a:pPr>
+            <a:r>
               <a:rPr sz="1200" lang="zh-TW" dirty="0">
                 <a:solidFill>
                   <a:srgbClr val="000000"/>
@@ -849,11 +1135,154 @@
                 <a:spcPct val="115000"/>
               </a:lnSpc>
               <a:spcAft>
-                <a:spcPts val="600"/>
-              </a:spcAft>
-            </a:pPr>
-            <a:r>
-              <a:rPr sz="1200" lang="zh-TW" dirty="0">
+                <a:spcPts val="500"/>
+              </a:spcAft>
+            </a:pPr>
+            <a:r>
+              <a:rPr sz="1000" b="1" lang="zh-TW" dirty="0">
+                <a:solidFill>
+                  <a:srgbClr val="000000"/>
+                </a:solidFill>
+                <a:latin typeface="Arial Unicode MS"/>
+                <a:ea typeface="Arial Unicode MS"/>
+                <a:cs typeface="Arial Unicode MS"/>
+              </a:rPr>
+              <a:t>▍這一張要做什麼</a:t>
+            </a:r>
+            <a:r>
+              <a:rPr sz="1000" lang="zh-TW" dirty="0">
+                <a:solidFill>
+                  <a:srgbClr val="000000"/>
+                </a:solidFill>
+                <a:latin typeface="Arial Unicode MS"/>
+                <a:ea typeface="Arial Unicode MS"/>
+                <a:cs typeface="Arial Unicode MS"/>
+              </a:rPr>
+              <a:t>
+</a:t>
+            </a:r>
+          </a:p>
+          <a:p>
+            <a:pPr algn="l">
+              <a:lnSpc>
+                <a:spcPct val="115000"/>
+              </a:lnSpc>
+              <a:spcAft>
+                <a:spcPts val="500"/>
+              </a:spcAft>
+            </a:pPr>
+            <a:r>
+              <a:rPr sz="1000" lang="zh-TW" dirty="0">
+                <a:solidFill>
+                  <a:srgbClr val="000000"/>
+                </a:solidFill>
+                <a:latin typeface="Arial Unicode MS"/>
+                <a:ea typeface="Arial Unicode MS"/>
+                <a:cs typeface="Arial Unicode MS"/>
+              </a:rPr>
+              <a:t>來源一：法規與標準。想賣車就一定要通過。
+</a:t>
+            </a:r>
+          </a:p>
+          <a:p>
+            <a:pPr algn="l">
+              <a:lnSpc>
+                <a:spcPct val="115000"/>
+              </a:lnSpc>
+              <a:spcAft>
+                <a:spcPts val="500"/>
+              </a:spcAft>
+            </a:pPr>
+            <a:r>
+              <a:rPr sz="1000" b="1" lang="zh-TW" dirty="0">
+                <a:solidFill>
+                  <a:srgbClr val="000000"/>
+                </a:solidFill>
+                <a:latin typeface="Arial Unicode MS"/>
+                <a:ea typeface="Arial Unicode MS"/>
+                <a:cs typeface="Arial Unicode MS"/>
+              </a:rPr>
+              <a:t>▍畫面上圈這裡</a:t>
+            </a:r>
+            <a:r>
+              <a:rPr sz="1000" lang="zh-TW" dirty="0">
+                <a:solidFill>
+                  <a:srgbClr val="000000"/>
+                </a:solidFill>
+                <a:latin typeface="Arial Unicode MS"/>
+                <a:ea typeface="Arial Unicode MS"/>
+                <a:cs typeface="Arial Unicode MS"/>
+              </a:rPr>
+              <a:t>
+</a:t>
+            </a:r>
+          </a:p>
+          <a:p>
+            <a:pPr algn="l">
+              <a:lnSpc>
+                <a:spcPct val="115000"/>
+              </a:lnSpc>
+              <a:spcAft>
+                <a:spcPts val="500"/>
+              </a:spcAft>
+            </a:pPr>
+            <a:r>
+              <a:rPr sz="1000" lang="zh-TW" dirty="0">
+                <a:solidFill>
+                  <a:srgbClr val="000000"/>
+                </a:solidFill>
+                <a:latin typeface="Arial Unicode MS"/>
+                <a:ea typeface="Arial Unicode MS"/>
+                <a:cs typeface="Arial Unicode MS"/>
+              </a:rPr>
+              <a:t>圈主標的「一定要通過」，並說明這一類場景數量有限、但不能不過。
+</a:t>
+            </a:r>
+          </a:p>
+          <a:p>
+            <a:pPr algn="l">
+              <a:lnSpc>
+                <a:spcPct val="115000"/>
+              </a:lnSpc>
+              <a:spcAft>
+                <a:spcPts val="500"/>
+              </a:spcAft>
+            </a:pPr>
+            <a:r>
+              <a:rPr sz="1000" b="1" lang="zh-TW" dirty="0">
+                <a:solidFill>
+                  <a:srgbClr val="000000"/>
+                </a:solidFill>
+                <a:latin typeface="Arial Unicode MS"/>
+                <a:ea typeface="Arial Unicode MS"/>
+                <a:cs typeface="Arial Unicode MS"/>
+              </a:rPr>
+              <a:t>▍以下照著唸</a:t>
+            </a:r>
+            <a:r>
+              <a:rPr sz="1000" lang="zh-TW" dirty="0">
+                <a:solidFill>
+                  <a:srgbClr val="000000"/>
+                </a:solidFill>
+                <a:latin typeface="Arial Unicode MS"/>
+                <a:ea typeface="Arial Unicode MS"/>
+                <a:cs typeface="Arial Unicode MS"/>
+              </a:rPr>
+              <a:t>
+</a:t>
+            </a:r>
+          </a:p>
+          <a:p>
+            <a:pPr algn="l">
+              <a:lnSpc>
+                <a:spcPct val="115000"/>
+              </a:lnSpc>
+              <a:spcAft>
+                <a:spcPts val="500"/>
+              </a:spcAft>
+            </a:pPr>
+            <a:r>
+              <a:rPr sz="1000" lang="zh-TW" dirty="0">
                 <a:solidFill>
                   <a:srgbClr val="000000"/>
                 </a:solidFill>
@@ -864,7 +1293,7 @@
               <a:t>第一個來源：</a:t>
             </a:r>
             <a:r>
-              <a:rPr sz="1200" b="1" lang="zh-TW" dirty="0">
+              <a:rPr sz="1000" b="1" lang="zh-TW" dirty="0">
                 <a:solidFill>
                   <a:srgbClr val="000000"/>
                 </a:solidFill>
@@ -875,7 +1304,7 @@
               <a:t>法規與標準</a:t>
             </a:r>
             <a:r>
-              <a:rPr sz="1200" lang="zh-TW" dirty="0">
+              <a:rPr sz="1000" lang="zh-TW" dirty="0">
                 <a:solidFill>
                   <a:srgbClr val="000000"/>
                 </a:solidFill>
@@ -893,11 +1322,11 @@
                 <a:spcPct val="115000"/>
               </a:lnSpc>
               <a:spcAft>
-                <a:spcPts val="600"/>
-              </a:spcAft>
-            </a:pPr>
-            <a:r>
-              <a:rPr sz="1200" lang="zh-TW" dirty="0">
+                <a:spcPts val="500"/>
+              </a:spcAft>
+            </a:pPr>
+            <a:r>
+              <a:rPr sz="1000" lang="zh-TW" dirty="0">
                 <a:solidFill>
                   <a:srgbClr val="000000"/>
                 </a:solidFill>
@@ -908,7 +1337,7 @@
               <a:t>Euro NCAP 就是一個。它測自動緊急煞車，對車、對行人，</a:t>
             </a:r>
             <a:r>
-              <a:rPr sz="1200" b="1" lang="zh-TW" dirty="0">
+              <a:rPr sz="1000" b="1" lang="zh-TW" dirty="0">
                 <a:solidFill>
                   <a:srgbClr val="000000"/>
                 </a:solidFill>
@@ -919,7 +1348,7 @@
               <a:t>二〇二三年才加上機車</a:t>
             </a:r>
             <a:r>
-              <a:rPr sz="1200" lang="zh-TW" dirty="0">
+              <a:rPr sz="1000" lang="zh-TW" dirty="0">
                 <a:solidFill>
                   <a:srgbClr val="000000"/>
                 </a:solidFill>
@@ -937,11 +1366,11 @@
                 <a:spcPct val="115000"/>
               </a:lnSpc>
               <a:spcAft>
-                <a:spcPts val="600"/>
-              </a:spcAft>
-            </a:pPr>
-            <a:r>
-              <a:rPr sz="1200" lang="zh-TW" dirty="0">
+                <a:spcPts val="500"/>
+              </a:spcAft>
+            </a:pPr>
+            <a:r>
+              <a:rPr sz="1000" lang="zh-TW" dirty="0">
                 <a:solidFill>
                   <a:srgbClr val="000000"/>
                 </a:solidFill>
@@ -959,11 +1388,11 @@
                 <a:spcPct val="115000"/>
               </a:lnSpc>
               <a:spcAft>
-                <a:spcPts val="600"/>
-              </a:spcAft>
-            </a:pPr>
-            <a:r>
-              <a:rPr sz="1200" lang="zh-TW" dirty="0">
+                <a:spcPts val="500"/>
+              </a:spcAft>
+            </a:pPr>
+            <a:r>
+              <a:rPr sz="1000" lang="zh-TW" dirty="0">
                 <a:solidFill>
                   <a:srgbClr val="000000"/>
                 </a:solidFill>
@@ -981,11 +1410,11 @@
                 <a:spcPct val="115000"/>
               </a:lnSpc>
               <a:spcAft>
-                <a:spcPts val="600"/>
-              </a:spcAft>
-            </a:pPr>
-            <a:r>
-              <a:rPr sz="1200" lang="zh-TW" dirty="0">
+                <a:spcPts val="500"/>
+              </a:spcAft>
+            </a:pPr>
+            <a:r>
+              <a:rPr sz="1000" lang="zh-TW" dirty="0">
                 <a:solidFill>
                   <a:srgbClr val="000000"/>
                 </a:solidFill>
@@ -1003,11 +1432,11 @@
                 <a:spcPct val="115000"/>
               </a:lnSpc>
               <a:spcAft>
-                <a:spcPts val="600"/>
-              </a:spcAft>
-            </a:pPr>
-            <a:r>
-              <a:rPr sz="1200" lang="zh-TW" dirty="0">
+                <a:spcPts val="500"/>
+              </a:spcAft>
+            </a:pPr>
+            <a:r>
+              <a:rPr sz="1000" lang="zh-TW" dirty="0">
                 <a:solidFill>
                   <a:srgbClr val="000000"/>
                 </a:solidFill>
@@ -1025,11 +1454,11 @@
                 <a:spcPct val="115000"/>
               </a:lnSpc>
               <a:spcAft>
-                <a:spcPts val="600"/>
-              </a:spcAft>
-            </a:pPr>
-            <a:r>
-              <a:rPr sz="1200" lang="zh-TW" dirty="0">
+                <a:spcPts val="500"/>
+              </a:spcAft>
+            </a:pPr>
+            <a:r>
+              <a:rPr sz="1000" lang="zh-TW" dirty="0">
                 <a:solidFill>
                   <a:srgbClr val="000000"/>
                 </a:solidFill>
@@ -1047,11 +1476,11 @@
                 <a:spcPct val="115000"/>
               </a:lnSpc>
               <a:spcAft>
-                <a:spcPts val="600"/>
-              </a:spcAft>
-            </a:pPr>
-            <a:r>
-              <a:rPr sz="1200" b="1" lang="zh-TW" dirty="0">
+                <a:spcPts val="500"/>
+              </a:spcAft>
+            </a:pPr>
+            <a:r>
+              <a:rPr sz="1000" b="1" lang="zh-TW" dirty="0">
                 <a:solidFill>
                   <a:srgbClr val="000000"/>
                 </a:solidFill>
@@ -1062,7 +1491,7 @@
               <a:t>第一，數量少。</a:t>
             </a:r>
             <a:r>
-              <a:rPr sz="1200" lang="zh-TW" dirty="0">
+              <a:rPr sz="1000" lang="zh-TW" dirty="0">
                 <a:solidFill>
                   <a:srgbClr val="000000"/>
                 </a:solidFill>
@@ -1080,11 +1509,11 @@
                 <a:spcPct val="115000"/>
               </a:lnSpc>
               <a:spcAft>
-                <a:spcPts val="600"/>
-              </a:spcAft>
-            </a:pPr>
-            <a:r>
-              <a:rPr sz="1200" b="1" lang="zh-TW" dirty="0">
+                <a:spcPts val="500"/>
+              </a:spcAft>
+            </a:pPr>
+            <a:r>
+              <a:rPr sz="1000" b="1" lang="zh-TW" dirty="0">
                 <a:solidFill>
                   <a:srgbClr val="000000"/>
                 </a:solidFill>
@@ -1095,7 +1524,7 @@
               <a:t>第二，它永遠落後現實。</a:t>
             </a:r>
             <a:r>
-              <a:rPr sz="1200" lang="zh-TW" dirty="0">
+              <a:rPr sz="1000" lang="zh-TW" dirty="0">
                 <a:solidFill>
                   <a:srgbClr val="000000"/>
                 </a:solidFill>
@@ -1113,11 +1542,11 @@
                 <a:spcPct val="115000"/>
               </a:lnSpc>
               <a:spcAft>
-                <a:spcPts val="600"/>
-              </a:spcAft>
-            </a:pPr>
-            <a:r>
-              <a:rPr sz="1200" lang="zh-TW" dirty="0">
+                <a:spcPts val="500"/>
+              </a:spcAft>
+            </a:pPr>
+            <a:r>
+              <a:rPr sz="1000" lang="zh-TW" dirty="0">
                 <a:solidFill>
                   <a:srgbClr val="000000"/>
                 </a:solidFill>
@@ -1128,7 +1557,7 @@
               <a:t>所以法規是</a:t>
             </a:r>
             <a:r>
-              <a:rPr sz="1200" b="1" lang="zh-TW" dirty="0">
+              <a:rPr sz="1000" b="1" lang="zh-TW" dirty="0">
                 <a:solidFill>
                   <a:srgbClr val="000000"/>
                 </a:solidFill>
@@ -1139,7 +1568,7 @@
               <a:t>地板，不是天花板</a:t>
             </a:r>
             <a:r>
-              <a:rPr sz="1200" lang="zh-TW" dirty="0">
+              <a:rPr sz="1000" lang="zh-TW" dirty="0">
                 <a:solidFill>
                   <a:srgbClr val="000000"/>
                 </a:solidFill>
@@ -1256,11 +1685,154 @@
                 <a:spcPct val="115000"/>
               </a:lnSpc>
               <a:spcAft>
-                <a:spcPts val="600"/>
-              </a:spcAft>
-            </a:pPr>
-            <a:r>
-              <a:rPr sz="1200" lang="zh-TW" dirty="0">
+                <a:spcPts val="500"/>
+              </a:spcAft>
+            </a:pPr>
+            <a:r>
+              <a:rPr sz="1000" b="1" lang="zh-TW" dirty="0">
+                <a:solidFill>
+                  <a:srgbClr val="000000"/>
+                </a:solidFill>
+                <a:latin typeface="Arial Unicode MS"/>
+                <a:ea typeface="Arial Unicode MS"/>
+                <a:cs typeface="Arial Unicode MS"/>
+              </a:rPr>
+              <a:t>▍這一張要做什麼</a:t>
+            </a:r>
+            <a:r>
+              <a:rPr sz="1000" lang="zh-TW" dirty="0">
+                <a:solidFill>
+                  <a:srgbClr val="000000"/>
+                </a:solidFill>
+                <a:latin typeface="Arial Unicode MS"/>
+                <a:ea typeface="Arial Unicode MS"/>
+                <a:cs typeface="Arial Unicode MS"/>
+              </a:rPr>
+              <a:t>
+</a:t>
+            </a:r>
+          </a:p>
+          <a:p>
+            <a:pPr algn="l">
+              <a:lnSpc>
+                <a:spcPct val="115000"/>
+              </a:lnSpc>
+              <a:spcAft>
+                <a:spcPts val="500"/>
+              </a:spcAft>
+            </a:pPr>
+            <a:r>
+              <a:rPr sz="1000" lang="zh-TW" dirty="0">
+                <a:solidFill>
+                  <a:srgbClr val="000000"/>
+                </a:solidFill>
+                <a:latin typeface="Arial Unicode MS"/>
+                <a:ea typeface="Arial Unicode MS"/>
+                <a:cs typeface="Arial Unicode MS"/>
+              </a:rPr>
+              <a:t>來源二：事故資料庫。把真實發生過的事故還原成場景。
+</a:t>
+            </a:r>
+          </a:p>
+          <a:p>
+            <a:pPr algn="l">
+              <a:lnSpc>
+                <a:spcPct val="115000"/>
+              </a:lnSpc>
+              <a:spcAft>
+                <a:spcPts val="500"/>
+              </a:spcAft>
+            </a:pPr>
+            <a:r>
+              <a:rPr sz="1000" b="1" lang="zh-TW" dirty="0">
+                <a:solidFill>
+                  <a:srgbClr val="000000"/>
+                </a:solidFill>
+                <a:latin typeface="Arial Unicode MS"/>
+                <a:ea typeface="Arial Unicode MS"/>
+                <a:cs typeface="Arial Unicode MS"/>
+              </a:rPr>
+              <a:t>▍畫面上圈這裡</a:t>
+            </a:r>
+            <a:r>
+              <a:rPr sz="1000" lang="zh-TW" dirty="0">
+                <a:solidFill>
+                  <a:srgbClr val="000000"/>
+                </a:solidFill>
+                <a:latin typeface="Arial Unicode MS"/>
+                <a:ea typeface="Arial Unicode MS"/>
+                <a:cs typeface="Arial Unicode MS"/>
+              </a:rPr>
+              <a:t>
+</a:t>
+            </a:r>
+          </a:p>
+          <a:p>
+            <a:pPr algn="l">
+              <a:lnSpc>
+                <a:spcPct val="115000"/>
+              </a:lnSpc>
+              <a:spcAft>
+                <a:spcPts val="500"/>
+              </a:spcAft>
+            </a:pPr>
+            <a:r>
+              <a:rPr sz="1000" lang="zh-TW" dirty="0">
+                <a:solidFill>
+                  <a:srgbClr val="000000"/>
+                </a:solidFill>
+                <a:latin typeface="Arial Unicode MS"/>
+                <a:ea typeface="Arial Unicode MS"/>
+                <a:cs typeface="Arial Unicode MS"/>
+              </a:rPr>
+              <a:t>圈「還原」兩個字，強調這些場景是真的有人撞過才留下來的。
+</a:t>
+            </a:r>
+          </a:p>
+          <a:p>
+            <a:pPr algn="l">
+              <a:lnSpc>
+                <a:spcPct val="115000"/>
+              </a:lnSpc>
+              <a:spcAft>
+                <a:spcPts val="500"/>
+              </a:spcAft>
+            </a:pPr>
+            <a:r>
+              <a:rPr sz="1000" b="1" lang="zh-TW" dirty="0">
+                <a:solidFill>
+                  <a:srgbClr val="000000"/>
+                </a:solidFill>
+                <a:latin typeface="Arial Unicode MS"/>
+                <a:ea typeface="Arial Unicode MS"/>
+                <a:cs typeface="Arial Unicode MS"/>
+              </a:rPr>
+              <a:t>▍以下照著唸</a:t>
+            </a:r>
+            <a:r>
+              <a:rPr sz="1000" lang="zh-TW" dirty="0">
+                <a:solidFill>
+                  <a:srgbClr val="000000"/>
+                </a:solidFill>
+                <a:latin typeface="Arial Unicode MS"/>
+                <a:ea typeface="Arial Unicode MS"/>
+                <a:cs typeface="Arial Unicode MS"/>
+              </a:rPr>
+              <a:t>
+</a:t>
+            </a:r>
+          </a:p>
+          <a:p>
+            <a:pPr algn="l">
+              <a:lnSpc>
+                <a:spcPct val="115000"/>
+              </a:lnSpc>
+              <a:spcAft>
+                <a:spcPts val="500"/>
+              </a:spcAft>
+            </a:pPr>
+            <a:r>
+              <a:rPr sz="1000" lang="zh-TW" dirty="0">
                 <a:solidFill>
                   <a:srgbClr val="000000"/>
                 </a:solidFill>
@@ -1271,7 +1843,7 @@
               <a:t>第二個來源：</a:t>
             </a:r>
             <a:r>
-              <a:rPr sz="1200" b="1" lang="zh-TW" dirty="0">
+              <a:rPr sz="1000" b="1" lang="zh-TW" dirty="0">
                 <a:solidFill>
                   <a:srgbClr val="000000"/>
                 </a:solidFill>
@@ -1282,7 +1854,7 @@
               <a:t>事故資料庫</a:t>
             </a:r>
             <a:r>
-              <a:rPr sz="1200" lang="zh-TW" dirty="0">
+              <a:rPr sz="1000" lang="zh-TW" dirty="0">
                 <a:solidFill>
                   <a:srgbClr val="000000"/>
                 </a:solidFill>
@@ -1300,11 +1872,11 @@
                 <a:spcPct val="115000"/>
               </a:lnSpc>
               <a:spcAft>
-                <a:spcPts val="600"/>
-              </a:spcAft>
-            </a:pPr>
-            <a:r>
-              <a:rPr sz="1200" lang="zh-TW" dirty="0">
+                <a:spcPts val="500"/>
+              </a:spcAft>
+            </a:pPr>
+            <a:r>
+              <a:rPr sz="1000" lang="zh-TW" dirty="0">
                 <a:solidFill>
                   <a:srgbClr val="000000"/>
                 </a:solidFill>
@@ -1322,11 +1894,11 @@
                 <a:spcPct val="115000"/>
               </a:lnSpc>
               <a:spcAft>
-                <a:spcPts val="600"/>
-              </a:spcAft>
-            </a:pPr>
-            <a:r>
-              <a:rPr sz="1200" lang="zh-TW" dirty="0">
+                <a:spcPts val="500"/>
+              </a:spcAft>
+            </a:pPr>
+            <a:r>
+              <a:rPr sz="1000" lang="zh-TW" dirty="0">
                 <a:solidFill>
                   <a:srgbClr val="000000"/>
                 </a:solidFill>
@@ -1337,7 +1909,7 @@
               <a:t>它的做法是</a:t>
             </a:r>
             <a:r>
-              <a:rPr sz="1200" b="1" lang="zh-TW" dirty="0">
+              <a:rPr sz="1000" b="1" lang="zh-TW" dirty="0">
                 <a:solidFill>
                   <a:srgbClr val="000000"/>
                 </a:solidFill>
@@ -1348,7 +1920,7 @@
               <a:t>把真實發生過的事故還原成一個場景</a:t>
             </a:r>
             <a:r>
-              <a:rPr sz="1200" lang="zh-TW" dirty="0">
+              <a:rPr sz="1000" lang="zh-TW" dirty="0">
                 <a:solidFill>
                   <a:srgbClr val="000000"/>
                 </a:solidFill>
@@ -1366,11 +1938,11 @@
                 <a:spcPct val="115000"/>
               </a:lnSpc>
               <a:spcAft>
-                <a:spcPts val="600"/>
-              </a:spcAft>
-            </a:pPr>
-            <a:r>
-              <a:rPr sz="1200" lang="zh-TW" dirty="0">
+                <a:spcPts val="500"/>
+              </a:spcAft>
+            </a:pPr>
+            <a:r>
+              <a:rPr sz="1000" lang="zh-TW" dirty="0">
                 <a:solidFill>
                   <a:srgbClr val="000000"/>
                 </a:solidFill>
@@ -1388,11 +1960,11 @@
                 <a:spcPct val="115000"/>
               </a:lnSpc>
               <a:spcAft>
-                <a:spcPts val="600"/>
-              </a:spcAft>
-            </a:pPr>
-            <a:r>
-              <a:rPr sz="1200" b="1" lang="zh-TW" dirty="0">
+                <a:spcPts val="500"/>
+              </a:spcAft>
+            </a:pPr>
+            <a:r>
+              <a:rPr sz="1000" b="1" lang="zh-TW" dirty="0">
                 <a:solidFill>
                   <a:srgbClr val="000000"/>
                 </a:solidFill>
@@ -1403,7 +1975,7 @@
               <a:t>每一個場景，都真的傷過人。</a:t>
             </a:r>
             <a:r>
-              <a:rPr sz="1200" lang="zh-TW" dirty="0">
+              <a:rPr sz="1000" lang="zh-TW" dirty="0">
                 <a:solidFill>
                   <a:srgbClr val="000000"/>
                 </a:solidFill>
@@ -1421,11 +1993,11 @@
                 <a:spcPct val="115000"/>
               </a:lnSpc>
               <a:spcAft>
-                <a:spcPts val="600"/>
-              </a:spcAft>
-            </a:pPr>
-            <a:r>
-              <a:rPr sz="1200" lang="zh-TW" dirty="0">
+                <a:spcPts val="500"/>
+              </a:spcAft>
+            </a:pPr>
+            <a:r>
+              <a:rPr sz="1000" lang="zh-TW" dirty="0">
                 <a:solidFill>
                   <a:srgbClr val="000000"/>
                 </a:solidFill>
@@ -1443,11 +2015,11 @@
                 <a:spcPct val="115000"/>
               </a:lnSpc>
               <a:spcAft>
-                <a:spcPts val="600"/>
-              </a:spcAft>
-            </a:pPr>
-            <a:r>
-              <a:rPr sz="1200" lang="zh-TW" dirty="0">
+                <a:spcPts val="500"/>
+              </a:spcAft>
+            </a:pPr>
+            <a:r>
+              <a:rPr sz="1000" lang="zh-TW" dirty="0">
                 <a:solidFill>
                   <a:srgbClr val="000000"/>
                 </a:solidFill>
@@ -1564,11 +2136,154 @@
                 <a:spcPct val="115000"/>
               </a:lnSpc>
               <a:spcAft>
-                <a:spcPts val="550"/>
-              </a:spcAft>
-            </a:pPr>
-            <a:r>
-              <a:rPr sz="1100" lang="zh-TW" dirty="0">
+                <a:spcPts val="500"/>
+              </a:spcAft>
+            </a:pPr>
+            <a:r>
+              <a:rPr sz="1000" b="1" lang="zh-TW" dirty="0">
+                <a:solidFill>
+                  <a:srgbClr val="000000"/>
+                </a:solidFill>
+                <a:latin typeface="Arial Unicode MS"/>
+                <a:ea typeface="Arial Unicode MS"/>
+                <a:cs typeface="Arial Unicode MS"/>
+              </a:rPr>
+              <a:t>▍這一張要做什麼</a:t>
+            </a:r>
+            <a:r>
+              <a:rPr sz="1000" lang="zh-TW" dirty="0">
+                <a:solidFill>
+                  <a:srgbClr val="000000"/>
+                </a:solidFill>
+                <a:latin typeface="Arial Unicode MS"/>
+                <a:ea typeface="Arial Unicode MS"/>
+                <a:cs typeface="Arial Unicode MS"/>
+              </a:rPr>
+              <a:t>
+</a:t>
+            </a:r>
+          </a:p>
+          <a:p>
+            <a:pPr algn="l">
+              <a:lnSpc>
+                <a:spcPct val="115000"/>
+              </a:lnSpc>
+              <a:spcAft>
+                <a:spcPts val="500"/>
+              </a:spcAft>
+            </a:pPr>
+            <a:r>
+              <a:rPr sz="1000" lang="zh-TW" dirty="0">
+                <a:solidFill>
+                  <a:srgbClr val="000000"/>
+                </a:solidFill>
+                <a:latin typeface="Arial Unicode MS"/>
+                <a:ea typeface="Arial Unicode MS"/>
+                <a:cs typeface="Arial Unicode MS"/>
+              </a:rPr>
+              <a:t>來源三：實際道路。安全員每介入一次，就多一個場景。
+</a:t>
+            </a:r>
+          </a:p>
+          <a:p>
+            <a:pPr algn="l">
+              <a:lnSpc>
+                <a:spcPct val="115000"/>
+              </a:lnSpc>
+              <a:spcAft>
+                <a:spcPts val="500"/>
+              </a:spcAft>
+            </a:pPr>
+            <a:r>
+              <a:rPr sz="1000" b="1" lang="zh-TW" dirty="0">
+                <a:solidFill>
+                  <a:srgbClr val="000000"/>
+                </a:solidFill>
+                <a:latin typeface="Arial Unicode MS"/>
+                <a:ea typeface="Arial Unicode MS"/>
+                <a:cs typeface="Arial Unicode MS"/>
+              </a:rPr>
+              <a:t>▍畫面上圈這裡</a:t>
+            </a:r>
+            <a:r>
+              <a:rPr sz="1000" lang="zh-TW" dirty="0">
+                <a:solidFill>
+                  <a:srgbClr val="000000"/>
+                </a:solidFill>
+                <a:latin typeface="Arial Unicode MS"/>
+                <a:ea typeface="Arial Unicode MS"/>
+                <a:cs typeface="Arial Unicode MS"/>
+              </a:rPr>
+              <a:t>
+</a:t>
+            </a:r>
+          </a:p>
+          <a:p>
+            <a:pPr algn="l">
+              <a:lnSpc>
+                <a:spcPct val="115000"/>
+              </a:lnSpc>
+              <a:spcAft>
+                <a:spcPts val="500"/>
+              </a:spcAft>
+            </a:pPr>
+            <a:r>
+              <a:rPr sz="1000" lang="zh-TW" dirty="0">
+                <a:solidFill>
+                  <a:srgbClr val="000000"/>
+                </a:solidFill>
+                <a:latin typeface="Arial Unicode MS"/>
+                <a:ea typeface="Arial Unicode MS"/>
+                <a:cs typeface="Arial Unicode MS"/>
+              </a:rPr>
+              <a:t>圈「每介入一次」，並回頭提第一章講過的安全員角色。
+</a:t>
+            </a:r>
+          </a:p>
+          <a:p>
+            <a:pPr algn="l">
+              <a:lnSpc>
+                <a:spcPct val="115000"/>
+              </a:lnSpc>
+              <a:spcAft>
+                <a:spcPts val="500"/>
+              </a:spcAft>
+            </a:pPr>
+            <a:r>
+              <a:rPr sz="1000" b="1" lang="zh-TW" dirty="0">
+                <a:solidFill>
+                  <a:srgbClr val="000000"/>
+                </a:solidFill>
+                <a:latin typeface="Arial Unicode MS"/>
+                <a:ea typeface="Arial Unicode MS"/>
+                <a:cs typeface="Arial Unicode MS"/>
+              </a:rPr>
+              <a:t>▍以下照著唸</a:t>
+            </a:r>
+            <a:r>
+              <a:rPr sz="1000" lang="zh-TW" dirty="0">
+                <a:solidFill>
+                  <a:srgbClr val="000000"/>
+                </a:solidFill>
+                <a:latin typeface="Arial Unicode MS"/>
+                <a:ea typeface="Arial Unicode MS"/>
+                <a:cs typeface="Arial Unicode MS"/>
+              </a:rPr>
+              <a:t>
+</a:t>
+            </a:r>
+          </a:p>
+          <a:p>
+            <a:pPr algn="l">
+              <a:lnSpc>
+                <a:spcPct val="115000"/>
+              </a:lnSpc>
+              <a:spcAft>
+                <a:spcPts val="500"/>
+              </a:spcAft>
+            </a:pPr>
+            <a:r>
+              <a:rPr sz="1000" lang="zh-TW" dirty="0">
                 <a:solidFill>
                   <a:srgbClr val="000000"/>
                 </a:solidFill>
@@ -1579,7 +2294,7 @@
               <a:t>第三個來源，也是最有意思的一個：</a:t>
             </a:r>
             <a:r>
-              <a:rPr sz="1100" b="1" lang="zh-TW" dirty="0">
+              <a:rPr sz="1000" b="1" lang="zh-TW" dirty="0">
                 <a:solidFill>
                   <a:srgbClr val="000000"/>
                 </a:solidFill>
@@ -1590,7 +2305,7 @@
               <a:t>從實際道路上長出來</a:t>
             </a:r>
             <a:r>
-              <a:rPr sz="1100" lang="zh-TW" dirty="0">
+              <a:rPr sz="1000" lang="zh-TW" dirty="0">
                 <a:solidFill>
                   <a:srgbClr val="000000"/>
                 </a:solidFill>
@@ -1608,11 +2323,11 @@
                 <a:spcPct val="115000"/>
               </a:lnSpc>
               <a:spcAft>
-                <a:spcPts val="550"/>
-              </a:spcAft>
-            </a:pPr>
-            <a:r>
-              <a:rPr sz="1100" lang="zh-TW" dirty="0">
+                <a:spcPts val="500"/>
+              </a:spcAft>
+            </a:pPr>
+            <a:r>
+              <a:rPr sz="1000" lang="zh-TW" dirty="0">
                 <a:solidFill>
                   <a:srgbClr val="000000"/>
                 </a:solidFill>
@@ -1623,7 +2338,7 @@
               <a:t>它的做法是這樣。測試車在路上跑，車上有安全員。只要安全員</a:t>
             </a:r>
             <a:r>
-              <a:rPr sz="1100" b="1" lang="zh-TW" dirty="0">
+              <a:rPr sz="1000" b="1" lang="zh-TW" dirty="0">
                 <a:solidFill>
                   <a:srgbClr val="000000"/>
                 </a:solidFill>
@@ -1634,7 +2349,7 @@
               <a:t>手一碰方向盤</a:t>
             </a:r>
             <a:r>
-              <a:rPr sz="1100" lang="zh-TW" dirty="0">
+              <a:rPr sz="1000" lang="zh-TW" dirty="0">
                 <a:solidFill>
                   <a:srgbClr val="000000"/>
                 </a:solidFill>
@@ -1652,11 +2367,11 @@
                 <a:spcPct val="115000"/>
               </a:lnSpc>
               <a:spcAft>
-                <a:spcPts val="550"/>
-              </a:spcAft>
-            </a:pPr>
-            <a:r>
-              <a:rPr sz="1100" lang="zh-TW" dirty="0">
+                <a:spcPts val="500"/>
+              </a:spcAft>
+            </a:pPr>
+            <a:r>
+              <a:rPr sz="1000" lang="zh-TW" dirty="0">
                 <a:solidFill>
                   <a:srgbClr val="000000"/>
                 </a:solidFill>
@@ -1674,11 +2389,11 @@
                 <a:spcPct val="115000"/>
               </a:lnSpc>
               <a:spcAft>
-                <a:spcPts val="550"/>
-              </a:spcAft>
-            </a:pPr>
-            <a:r>
-              <a:rPr sz="1100" lang="zh-TW" dirty="0">
+                <a:spcPts val="500"/>
+              </a:spcAft>
+            </a:pPr>
+            <a:r>
+              <a:rPr sz="1000" lang="zh-TW" dirty="0">
                 <a:solidFill>
                   <a:srgbClr val="000000"/>
                 </a:solidFill>
@@ -1696,11 +2411,11 @@
                 <a:spcPct val="115000"/>
               </a:lnSpc>
               <a:spcAft>
-                <a:spcPts val="550"/>
-              </a:spcAft>
-            </a:pPr>
-            <a:r>
-              <a:rPr sz="1100" lang="zh-TW" dirty="0">
+                <a:spcPts val="500"/>
+              </a:spcAft>
+            </a:pPr>
+            <a:r>
+              <a:rPr sz="1000" lang="zh-TW" dirty="0">
                 <a:solidFill>
                   <a:srgbClr val="000000"/>
                 </a:solidFill>
@@ -1718,11 +2433,11 @@
                 <a:spcPct val="115000"/>
               </a:lnSpc>
               <a:spcAft>
-                <a:spcPts val="550"/>
-              </a:spcAft>
-            </a:pPr>
-            <a:r>
-              <a:rPr sz="1100" lang="zh-TW" dirty="0">
+                <a:spcPts val="500"/>
+              </a:spcAft>
+            </a:pPr>
+            <a:r>
+              <a:rPr sz="1000" lang="zh-TW" dirty="0">
                 <a:solidFill>
                   <a:srgbClr val="000000"/>
                 </a:solidFill>
@@ -1733,7 +2448,7 @@
               <a:t>這個做法有個很漂亮的地方：</a:t>
             </a:r>
             <a:r>
-              <a:rPr sz="1100" b="1" lang="zh-TW" dirty="0">
+              <a:rPr sz="1000" b="1" lang="zh-TW" dirty="0">
                 <a:solidFill>
                   <a:srgbClr val="000000"/>
                 </a:solidFill>
@@ -1744,7 +2459,7 @@
               <a:t>它會自己成長。</a:t>
             </a:r>
             <a:r>
-              <a:rPr sz="1100" lang="zh-TW" dirty="0">
+              <a:rPr sz="1000" lang="zh-TW" dirty="0">
                 <a:solidFill>
                   <a:srgbClr val="000000"/>
                 </a:solidFill>
@@ -1762,11 +2477,11 @@
                 <a:spcPct val="115000"/>
               </a:lnSpc>
               <a:spcAft>
-                <a:spcPts val="550"/>
-              </a:spcAft>
-            </a:pPr>
-            <a:r>
-              <a:rPr sz="1100" lang="zh-TW" dirty="0">
+                <a:spcPts val="500"/>
+              </a:spcAft>
+            </a:pPr>
+            <a:r>
+              <a:rPr sz="1000" lang="zh-TW" dirty="0">
                 <a:solidFill>
                   <a:srgbClr val="000000"/>
                 </a:solidFill>
@@ -1777,7 +2492,7 @@
               <a:t>Waymo 和 Cruise 的場景庫以</a:t>
             </a:r>
             <a:r>
-              <a:rPr sz="1100" b="1" lang="zh-TW" dirty="0">
+              <a:rPr sz="1000" b="1" lang="zh-TW" dirty="0">
                 <a:solidFill>
                   <a:srgbClr val="000000"/>
                 </a:solidFill>
@@ -1788,7 +2503,7 @@
               <a:t>數萬計</a:t>
             </a:r>
             <a:r>
-              <a:rPr sz="1100" lang="zh-TW" dirty="0">
+              <a:rPr sz="1000" lang="zh-TW" dirty="0">
                 <a:solidFill>
                   <a:srgbClr val="000000"/>
                 </a:solidFill>
@@ -1806,11 +2521,11 @@
                 <a:spcPct val="115000"/>
               </a:lnSpc>
               <a:spcAft>
-                <a:spcPts val="550"/>
-              </a:spcAft>
-            </a:pPr>
-            <a:r>
-              <a:rPr sz="1100" lang="zh-TW" dirty="0">
+                <a:spcPts val="500"/>
+              </a:spcAft>
+            </a:pPr>
+            <a:r>
+              <a:rPr sz="1000" lang="zh-TW" dirty="0">
                 <a:solidFill>
                   <a:srgbClr val="000000"/>
                 </a:solidFill>
@@ -1828,11 +2543,11 @@
                 <a:spcPct val="115000"/>
               </a:lnSpc>
               <a:spcAft>
-                <a:spcPts val="550"/>
-              </a:spcAft>
-            </a:pPr>
-            <a:r>
-              <a:rPr sz="1100" lang="zh-TW" dirty="0">
+                <a:spcPts val="500"/>
+              </a:spcAft>
+            </a:pPr>
+            <a:r>
+              <a:rPr sz="1000" lang="zh-TW" dirty="0">
                 <a:solidFill>
                   <a:srgbClr val="000000"/>
                 </a:solidFill>
@@ -1843,7 +2558,7 @@
               <a:t>規模的數字也值得記一下：</a:t>
             </a:r>
             <a:r>
-              <a:rPr sz="1100" b="1" lang="zh-TW" dirty="0">
+              <a:rPr sz="1000" b="1" lang="zh-TW" dirty="0">
                 <a:solidFill>
                   <a:srgbClr val="000000"/>
                 </a:solidFill>
@@ -1854,7 +2569,7 @@
               <a:t>每天有兩萬五千台虛擬的 Waymo 在跑，一天跑一千萬英里</a:t>
             </a:r>
             <a:r>
-              <a:rPr sz="1100" lang="zh-TW" dirty="0">
+              <a:rPr sz="1000" lang="zh-TW" dirty="0">
                 <a:solidFill>
                   <a:srgbClr val="000000"/>
                 </a:solidFill>
@@ -1971,11 +2686,154 @@
                 <a:spcPct val="115000"/>
               </a:lnSpc>
               <a:spcAft>
-                <a:spcPts val="525"/>
-              </a:spcAft>
-            </a:pPr>
-            <a:r>
-              <a:rPr sz="1050" lang="zh-TW" dirty="0">
+                <a:spcPts val="500"/>
+              </a:spcAft>
+            </a:pPr>
+            <a:r>
+              <a:rPr sz="1000" b="1" lang="zh-TW" dirty="0">
+                <a:solidFill>
+                  <a:srgbClr val="000000"/>
+                </a:solidFill>
+                <a:latin typeface="Arial Unicode MS"/>
+                <a:ea typeface="Arial Unicode MS"/>
+                <a:cs typeface="Arial Unicode MS"/>
+              </a:rPr>
+              <a:t>▍這一張要做什麼</a:t>
+            </a:r>
+            <a:r>
+              <a:rPr sz="1000" lang="zh-TW" dirty="0">
+                <a:solidFill>
+                  <a:srgbClr val="000000"/>
+                </a:solidFill>
+                <a:latin typeface="Arial Unicode MS"/>
+                <a:ea typeface="Arial Unicode MS"/>
+                <a:cs typeface="Arial Unicode MS"/>
+              </a:rPr>
+              <a:t>
+</a:t>
+            </a:r>
+          </a:p>
+          <a:p>
+            <a:pPr algn="l">
+              <a:lnSpc>
+                <a:spcPct val="115000"/>
+              </a:lnSpc>
+              <a:spcAft>
+                <a:spcPts val="500"/>
+              </a:spcAft>
+            </a:pPr>
+            <a:r>
+              <a:rPr sz="1000" lang="zh-TW" dirty="0">
+                <a:solidFill>
+                  <a:srgbClr val="000000"/>
+                </a:solidFill>
+                <a:latin typeface="Arial Unicode MS"/>
+                <a:ea typeface="Arial Unicode MS"/>
+                <a:cs typeface="Arial Unicode MS"/>
+              </a:rPr>
+              <a:t>本節的收尾伏筆。三個來源都補不到越南班每天遇到的那件事。
+</a:t>
+            </a:r>
+          </a:p>
+          <a:p>
+            <a:pPr algn="l">
+              <a:lnSpc>
+                <a:spcPct val="115000"/>
+              </a:lnSpc>
+              <a:spcAft>
+                <a:spcPts val="500"/>
+              </a:spcAft>
+            </a:pPr>
+            <a:r>
+              <a:rPr sz="1000" b="1" lang="zh-TW" dirty="0">
+                <a:solidFill>
+                  <a:srgbClr val="000000"/>
+                </a:solidFill>
+                <a:latin typeface="Arial Unicode MS"/>
+                <a:ea typeface="Arial Unicode MS"/>
+                <a:cs typeface="Arial Unicode MS"/>
+              </a:rPr>
+              <a:t>▍畫面上圈這裡</a:t>
+            </a:r>
+            <a:r>
+              <a:rPr sz="1000" lang="zh-TW" dirty="0">
+                <a:solidFill>
+                  <a:srgbClr val="000000"/>
+                </a:solidFill>
+                <a:latin typeface="Arial Unicode MS"/>
+                <a:ea typeface="Arial Unicode MS"/>
+                <a:cs typeface="Arial Unicode MS"/>
+              </a:rPr>
+              <a:t>
+</a:t>
+            </a:r>
+          </a:p>
+          <a:p>
+            <a:pPr algn="l">
+              <a:lnSpc>
+                <a:spcPct val="115000"/>
+              </a:lnSpc>
+              <a:spcAft>
+                <a:spcPts val="500"/>
+              </a:spcAft>
+            </a:pPr>
+            <a:r>
+              <a:rPr sz="1000" lang="zh-TW" dirty="0">
+                <a:solidFill>
+                  <a:srgbClr val="000000"/>
+                </a:solidFill>
+                <a:latin typeface="Arial Unicode MS"/>
+                <a:ea typeface="Arial Unicode MS"/>
+                <a:cs typeface="Arial Unicode MS"/>
+              </a:rPr>
+              <a:t>圈中間那個缺口區塊，停久一點。這一頁是要讓他們有感，不要趕。
+</a:t>
+            </a:r>
+          </a:p>
+          <a:p>
+            <a:pPr algn="l">
+              <a:lnSpc>
+                <a:spcPct val="115000"/>
+              </a:lnSpc>
+              <a:spcAft>
+                <a:spcPts val="500"/>
+              </a:spcAft>
+            </a:pPr>
+            <a:r>
+              <a:rPr sz="1000" b="1" lang="zh-TW" dirty="0">
+                <a:solidFill>
+                  <a:srgbClr val="000000"/>
+                </a:solidFill>
+                <a:latin typeface="Arial Unicode MS"/>
+                <a:ea typeface="Arial Unicode MS"/>
+                <a:cs typeface="Arial Unicode MS"/>
+              </a:rPr>
+              <a:t>▍以下照著唸</a:t>
+            </a:r>
+            <a:r>
+              <a:rPr sz="1000" lang="zh-TW" dirty="0">
+                <a:solidFill>
+                  <a:srgbClr val="000000"/>
+                </a:solidFill>
+                <a:latin typeface="Arial Unicode MS"/>
+                <a:ea typeface="Arial Unicode MS"/>
+                <a:cs typeface="Arial Unicode MS"/>
+              </a:rPr>
+              <a:t>
+</a:t>
+            </a:r>
+          </a:p>
+          <a:p>
+            <a:pPr algn="l">
+              <a:lnSpc>
+                <a:spcPct val="115000"/>
+              </a:lnSpc>
+              <a:spcAft>
+                <a:spcPts val="500"/>
+              </a:spcAft>
+            </a:pPr>
+            <a:r>
+              <a:rPr sz="1000" lang="zh-TW" dirty="0">
                 <a:solidFill>
                   <a:srgbClr val="000000"/>
                 </a:solidFill>
@@ -1993,11 +2851,11 @@
                 <a:spcPct val="115000"/>
               </a:lnSpc>
               <a:spcAft>
-                <a:spcPts val="525"/>
-              </a:spcAft>
-            </a:pPr>
-            <a:r>
-              <a:rPr sz="1050" lang="zh-TW" dirty="0">
+                <a:spcPts val="500"/>
+              </a:spcAft>
+            </a:pPr>
+            <a:r>
+              <a:rPr sz="1000" lang="zh-TW" dirty="0">
                 <a:solidFill>
                   <a:srgbClr val="000000"/>
                 </a:solidFill>
@@ -2015,11 +2873,11 @@
                 <a:spcPct val="115000"/>
               </a:lnSpc>
               <a:spcAft>
-                <a:spcPts val="525"/>
-              </a:spcAft>
-            </a:pPr>
-            <a:r>
-              <a:rPr sz="1050" lang="zh-TW" dirty="0">
+                <a:spcPts val="500"/>
+              </a:spcAft>
+            </a:pPr>
+            <a:r>
+              <a:rPr sz="1000" lang="zh-TW" dirty="0">
                 <a:solidFill>
                   <a:srgbClr val="000000"/>
                 </a:solidFill>
@@ -2037,11 +2895,11 @@
                 <a:spcPct val="115000"/>
               </a:lnSpc>
               <a:spcAft>
-                <a:spcPts val="525"/>
-              </a:spcAft>
-            </a:pPr>
-            <a:r>
-              <a:rPr sz="1050" lang="zh-TW" dirty="0">
+                <a:spcPts val="500"/>
+              </a:spcAft>
+            </a:pPr>
+            <a:r>
+              <a:rPr sz="1000" lang="zh-TW" dirty="0">
                 <a:solidFill>
                   <a:srgbClr val="000000"/>
                 </a:solidFill>
@@ -2052,7 +2910,7 @@
               <a:t>（指右邊）各位每天在路上遇到的那件事，</a:t>
             </a:r>
             <a:r>
-              <a:rPr sz="1050" b="1" lang="zh-TW" dirty="0">
+              <a:rPr sz="1000" b="1" lang="zh-TW" dirty="0">
                 <a:solidFill>
                   <a:srgbClr val="000000"/>
                 </a:solidFill>
@@ -2063,7 +2921,7 @@
               <a:t>哪一個場景庫裡有？</a:t>
             </a:r>
             <a:r>
-              <a:rPr sz="1050" lang="zh-TW" dirty="0">
+              <a:rPr sz="1000" lang="zh-TW" dirty="0">
                 <a:solidFill>
                   <a:srgbClr val="000000"/>
                 </a:solidFill>
@@ -2081,11 +2939,11 @@
                 <a:spcPct val="115000"/>
               </a:lnSpc>
               <a:spcAft>
-                <a:spcPts val="525"/>
-              </a:spcAft>
-            </a:pPr>
-            <a:r>
-              <a:rPr sz="1050" lang="zh-TW" dirty="0">
+                <a:spcPts val="500"/>
+              </a:spcAft>
+            </a:pPr>
+            <a:r>
+              <a:rPr sz="1000" lang="zh-TW" dirty="0">
                 <a:solidFill>
                   <a:srgbClr val="000000"/>
                 </a:solidFill>
@@ -2103,11 +2961,11 @@
                 <a:spcPct val="115000"/>
               </a:lnSpc>
               <a:spcAft>
-                <a:spcPts val="525"/>
-              </a:spcAft>
-            </a:pPr>
-            <a:r>
-              <a:rPr sz="1050" lang="zh-TW" dirty="0">
+                <a:spcPts val="500"/>
+              </a:spcAft>
+            </a:pPr>
+            <a:r>
+              <a:rPr sz="1000" lang="zh-TW" dirty="0">
                 <a:solidFill>
                   <a:srgbClr val="000000"/>
                 </a:solidFill>
@@ -2125,11 +2983,11 @@
                 <a:spcPct val="115000"/>
               </a:lnSpc>
               <a:spcAft>
-                <a:spcPts val="525"/>
-              </a:spcAft>
-            </a:pPr>
-            <a:r>
-              <a:rPr sz="1050" lang="zh-TW" dirty="0">
+                <a:spcPts val="500"/>
+              </a:spcAft>
+            </a:pPr>
+            <a:r>
+              <a:rPr sz="1000" lang="zh-TW" dirty="0">
                 <a:solidFill>
                   <a:srgbClr val="000000"/>
                 </a:solidFill>
@@ -2147,11 +3005,11 @@
                 <a:spcPct val="115000"/>
               </a:lnSpc>
               <a:spcAft>
-                <a:spcPts val="525"/>
-              </a:spcAft>
-            </a:pPr>
-            <a:r>
-              <a:rPr sz="1050" lang="zh-TW" dirty="0">
+                <a:spcPts val="500"/>
+              </a:spcAft>
+            </a:pPr>
+            <a:r>
+              <a:rPr sz="1000" lang="zh-TW" dirty="0">
                 <a:solidFill>
                   <a:srgbClr val="000000"/>
                 </a:solidFill>
@@ -2169,11 +3027,11 @@
                 <a:spcPct val="115000"/>
               </a:lnSpc>
               <a:spcAft>
-                <a:spcPts val="525"/>
-              </a:spcAft>
-            </a:pPr>
-            <a:r>
-              <a:rPr sz="1050" b="1" lang="zh-TW" dirty="0">
+                <a:spcPts val="500"/>
+              </a:spcAft>
+            </a:pPr>
+            <a:r>
+              <a:rPr sz="1000" b="1" lang="zh-TW" dirty="0">
                 <a:solidFill>
                   <a:srgbClr val="000000"/>
                 </a:solidFill>
@@ -2184,7 +3042,7 @@
               <a:t>所以這一塊，三個來源都補不到。</a:t>
             </a:r>
             <a:r>
-              <a:rPr sz="1050" lang="zh-TW" dirty="0">
+              <a:rPr sz="1000" lang="zh-TW" dirty="0">
                 <a:solidFill>
                   <a:srgbClr val="000000"/>
                 </a:solidFill>
@@ -2202,11 +3060,11 @@
                 <a:spcPct val="115000"/>
               </a:lnSpc>
               <a:spcAft>
-                <a:spcPts val="525"/>
-              </a:spcAft>
-            </a:pPr>
-            <a:r>
-              <a:rPr sz="1050" lang="zh-TW" dirty="0">
+                <a:spcPts val="500"/>
+              </a:spcAft>
+            </a:pPr>
+            <a:r>
+              <a:rPr sz="1000" lang="zh-TW" dirty="0">
                 <a:solidFill>
                   <a:srgbClr val="000000"/>
                 </a:solidFill>
@@ -2224,11 +3082,11 @@
                 <a:spcPct val="115000"/>
               </a:lnSpc>
               <a:spcAft>
-                <a:spcPts val="525"/>
-              </a:spcAft>
-            </a:pPr>
-            <a:r>
-              <a:rPr sz="1050" b="1" lang="zh-TW" dirty="0">
+                <a:spcPts val="500"/>
+              </a:spcAft>
+            </a:pPr>
+            <a:r>
+              <a:rPr sz="1000" b="1" lang="zh-TW" dirty="0">
                 <a:solidFill>
                   <a:srgbClr val="000000"/>
                 </a:solidFill>
@@ -2239,7 +3097,7 @@
               <a:t>如果一個問題，全世界的資料庫裡都沒有答案，而你剛好每天都在現場——那就是你的題目。</a:t>
             </a:r>
             <a:r>
-              <a:rPr sz="1050" lang="zh-TW" dirty="0">
+              <a:rPr sz="1000" lang="zh-TW" dirty="0">
                 <a:solidFill>
                   <a:srgbClr val="000000"/>
                 </a:solidFill>
@@ -2257,11 +3115,11 @@
                 <a:spcPct val="115000"/>
               </a:lnSpc>
               <a:spcAft>
-                <a:spcPts val="525"/>
-              </a:spcAft>
-            </a:pPr>
-            <a:r>
-              <a:rPr sz="1050" lang="zh-TW" dirty="0">
+                <a:spcPts val="500"/>
+              </a:spcAft>
+            </a:pPr>
+            <a:r>
+              <a:rPr sz="1000" lang="zh-TW" dirty="0">
                 <a:solidFill>
                   <a:srgbClr val="000000"/>
                 </a:solidFill>
@@ -2382,6 +3240,149 @@
               </a:spcAft>
             </a:pPr>
             <a:r>
+              <a:rPr sz="1000" b="1" lang="zh-TW" dirty="0">
+                <a:solidFill>
+                  <a:srgbClr val="000000"/>
+                </a:solidFill>
+                <a:latin typeface="Arial Unicode MS"/>
+                <a:ea typeface="Arial Unicode MS"/>
+                <a:cs typeface="Arial Unicode MS"/>
+              </a:rPr>
+              <a:t>▍這一張要做什麼</a:t>
+            </a:r>
+            <a:r>
+              <a:rPr sz="1000" lang="zh-TW" dirty="0">
+                <a:solidFill>
+                  <a:srgbClr val="000000"/>
+                </a:solidFill>
+                <a:latin typeface="Arial Unicode MS"/>
+                <a:ea typeface="Arial Unicode MS"/>
+                <a:cs typeface="Arial Unicode MS"/>
+              </a:rPr>
+              <a:t>
+</a:t>
+            </a:r>
+          </a:p>
+          <a:p>
+            <a:pPr algn="l">
+              <a:lnSpc>
+                <a:spcPct val="115000"/>
+              </a:lnSpc>
+              <a:spcAft>
+                <a:spcPts val="500"/>
+              </a:spcAft>
+            </a:pPr>
+            <a:r>
+              <a:rPr sz="1000" lang="zh-TW" dirty="0">
+                <a:solidFill>
+                  <a:srgbClr val="000000"/>
+                </a:solidFill>
+                <a:latin typeface="Arial Unicode MS"/>
+                <a:ea typeface="Arial Unicode MS"/>
+                <a:cs typeface="Arial Unicode MS"/>
+              </a:rPr>
+              <a:t>把方法用在自己的素材上：河內影片的十段字幕就是十個功能場景。
+</a:t>
+            </a:r>
+          </a:p>
+          <a:p>
+            <a:pPr algn="l">
+              <a:lnSpc>
+                <a:spcPct val="115000"/>
+              </a:lnSpc>
+              <a:spcAft>
+                <a:spcPts val="500"/>
+              </a:spcAft>
+            </a:pPr>
+            <a:r>
+              <a:rPr sz="1000" b="1" lang="zh-TW" dirty="0">
+                <a:solidFill>
+                  <a:srgbClr val="000000"/>
+                </a:solidFill>
+                <a:latin typeface="Arial Unicode MS"/>
+                <a:ea typeface="Arial Unicode MS"/>
+                <a:cs typeface="Arial Unicode MS"/>
+              </a:rPr>
+              <a:t>▍畫面上圈這裡</a:t>
+            </a:r>
+            <a:r>
+              <a:rPr sz="1000" lang="zh-TW" dirty="0">
+                <a:solidFill>
+                  <a:srgbClr val="000000"/>
+                </a:solidFill>
+                <a:latin typeface="Arial Unicode MS"/>
+                <a:ea typeface="Arial Unicode MS"/>
+                <a:cs typeface="Arial Unicode MS"/>
+              </a:rPr>
+              <a:t>
+</a:t>
+            </a:r>
+          </a:p>
+          <a:p>
+            <a:pPr algn="l">
+              <a:lnSpc>
+                <a:spcPct val="115000"/>
+              </a:lnSpc>
+              <a:spcAft>
+                <a:spcPts val="500"/>
+              </a:spcAft>
+            </a:pPr>
+            <a:r>
+              <a:rPr sz="1000" lang="zh-TW" dirty="0">
+                <a:solidFill>
+                  <a:srgbClr val="000000"/>
+                </a:solidFill>
+                <a:latin typeface="Arial Unicode MS"/>
+                <a:ea typeface="Arial Unicode MS"/>
+                <a:cs typeface="Arial Unicode MS"/>
+              </a:rPr>
+              <a:t>圈第一個例子的箭頭兩側，示範一次「人話 → 帶範圍的參數」。回家作業那條也要圈。
+</a:t>
+            </a:r>
+          </a:p>
+          <a:p>
+            <a:pPr algn="l">
+              <a:lnSpc>
+                <a:spcPct val="115000"/>
+              </a:lnSpc>
+              <a:spcAft>
+                <a:spcPts val="500"/>
+              </a:spcAft>
+            </a:pPr>
+            <a:r>
+              <a:rPr sz="1000" b="1" lang="zh-TW" dirty="0">
+                <a:solidFill>
+                  <a:srgbClr val="000000"/>
+                </a:solidFill>
+                <a:latin typeface="Arial Unicode MS"/>
+                <a:ea typeface="Arial Unicode MS"/>
+                <a:cs typeface="Arial Unicode MS"/>
+              </a:rPr>
+              <a:t>▍以下照著唸</a:t>
+            </a:r>
+            <a:r>
+              <a:rPr sz="1000" lang="zh-TW" dirty="0">
+                <a:solidFill>
+                  <a:srgbClr val="000000"/>
+                </a:solidFill>
+                <a:latin typeface="Arial Unicode MS"/>
+                <a:ea typeface="Arial Unicode MS"/>
+                <a:cs typeface="Arial Unicode MS"/>
+              </a:rPr>
+              <a:t>
+</a:t>
+            </a:r>
+          </a:p>
+          <a:p>
+            <a:pPr algn="l">
+              <a:lnSpc>
+                <a:spcPct val="115000"/>
+              </a:lnSpc>
+              <a:spcAft>
+                <a:spcPts val="500"/>
+              </a:spcAft>
+            </a:pPr>
+            <a:r>
               <a:rPr sz="1000" lang="zh-TW" dirty="0">
                 <a:solidFill>
                   <a:srgbClr val="000000"/>
@@ -3038,11 +4039,154 @@
                 <a:spcPct val="115000"/>
               </a:lnSpc>
               <a:spcAft>
-                <a:spcPts val="600"/>
-              </a:spcAft>
-            </a:pPr>
-            <a:r>
-              <a:rPr sz="1200" lang="zh-TW" dirty="0">
+                <a:spcPts val="525"/>
+              </a:spcAft>
+            </a:pPr>
+            <a:r>
+              <a:rPr sz="1050" b="1" lang="zh-TW" dirty="0">
+                <a:solidFill>
+                  <a:srgbClr val="000000"/>
+                </a:solidFill>
+                <a:latin typeface="Arial Unicode MS"/>
+                <a:ea typeface="Arial Unicode MS"/>
+                <a:cs typeface="Arial Unicode MS"/>
+              </a:rPr>
+              <a:t>▍這一張要做什麼</a:t>
+            </a:r>
+            <a:r>
+              <a:rPr sz="1050" lang="zh-TW" dirty="0">
+                <a:solidFill>
+                  <a:srgbClr val="000000"/>
+                </a:solidFill>
+                <a:latin typeface="Arial Unicode MS"/>
+                <a:ea typeface="Arial Unicode MS"/>
+                <a:cs typeface="Arial Unicode MS"/>
+              </a:rPr>
+              <a:t>
+</a:t>
+            </a:r>
+          </a:p>
+          <a:p>
+            <a:pPr algn="l">
+              <a:lnSpc>
+                <a:spcPct val="115000"/>
+              </a:lnSpc>
+              <a:spcAft>
+                <a:spcPts val="525"/>
+              </a:spcAft>
+            </a:pPr>
+            <a:r>
+              <a:rPr sz="1050" lang="zh-TW" dirty="0">
+                <a:solidFill>
+                  <a:srgbClr val="000000"/>
+                </a:solidFill>
+                <a:latin typeface="Arial Unicode MS"/>
+                <a:ea typeface="Arial Unicode MS"/>
+                <a:cs typeface="Arial Unicode MS"/>
+              </a:rPr>
+              <a:t>第二節小結，三句話帶上機。
+</a:t>
+            </a:r>
+          </a:p>
+          <a:p>
+            <a:pPr algn="l">
+              <a:lnSpc>
+                <a:spcPct val="115000"/>
+              </a:lnSpc>
+              <a:spcAft>
+                <a:spcPts val="525"/>
+              </a:spcAft>
+            </a:pPr>
+            <a:r>
+              <a:rPr sz="1050" b="1" lang="zh-TW" dirty="0">
+                <a:solidFill>
+                  <a:srgbClr val="000000"/>
+                </a:solidFill>
+                <a:latin typeface="Arial Unicode MS"/>
+                <a:ea typeface="Arial Unicode MS"/>
+                <a:cs typeface="Arial Unicode MS"/>
+              </a:rPr>
+              <a:t>▍畫面上圈這裡</a:t>
+            </a:r>
+            <a:r>
+              <a:rPr sz="1050" lang="zh-TW" dirty="0">
+                <a:solidFill>
+                  <a:srgbClr val="000000"/>
+                </a:solidFill>
+                <a:latin typeface="Arial Unicode MS"/>
+                <a:ea typeface="Arial Unicode MS"/>
+                <a:cs typeface="Arial Unicode MS"/>
+              </a:rPr>
+              <a:t>
+</a:t>
+            </a:r>
+          </a:p>
+          <a:p>
+            <a:pPr algn="l">
+              <a:lnSpc>
+                <a:spcPct val="115000"/>
+              </a:lnSpc>
+              <a:spcAft>
+                <a:spcPts val="525"/>
+              </a:spcAft>
+            </a:pPr>
+            <a:r>
+              <a:rPr sz="1050" lang="zh-TW" dirty="0">
+                <a:solidFill>
+                  <a:srgbClr val="000000"/>
+                </a:solidFill>
+                <a:latin typeface="Arial Unicode MS"/>
+                <a:ea typeface="Arial Unicode MS"/>
+                <a:cs typeface="Arial Unicode MS"/>
+              </a:rPr>
+              <a:t>三條一條一條圈。第二條「掃參數、找界線」要念兩次，下一節整節都在做這件事。
+</a:t>
+            </a:r>
+          </a:p>
+          <a:p>
+            <a:pPr algn="l">
+              <a:lnSpc>
+                <a:spcPct val="115000"/>
+              </a:lnSpc>
+              <a:spcAft>
+                <a:spcPts val="525"/>
+              </a:spcAft>
+            </a:pPr>
+            <a:r>
+              <a:rPr sz="1050" b="1" lang="zh-TW" dirty="0">
+                <a:solidFill>
+                  <a:srgbClr val="000000"/>
+                </a:solidFill>
+                <a:latin typeface="Arial Unicode MS"/>
+                <a:ea typeface="Arial Unicode MS"/>
+                <a:cs typeface="Arial Unicode MS"/>
+              </a:rPr>
+              <a:t>▍以下照著唸</a:t>
+            </a:r>
+            <a:r>
+              <a:rPr sz="1050" lang="zh-TW" dirty="0">
+                <a:solidFill>
+                  <a:srgbClr val="000000"/>
+                </a:solidFill>
+                <a:latin typeface="Arial Unicode MS"/>
+                <a:ea typeface="Arial Unicode MS"/>
+                <a:cs typeface="Arial Unicode MS"/>
+              </a:rPr>
+              <a:t>
+</a:t>
+            </a:r>
+          </a:p>
+          <a:p>
+            <a:pPr algn="l">
+              <a:lnSpc>
+                <a:spcPct val="115000"/>
+              </a:lnSpc>
+              <a:spcAft>
+                <a:spcPts val="525"/>
+              </a:spcAft>
+            </a:pPr>
+            <a:r>
+              <a:rPr sz="1050" lang="zh-TW" dirty="0">
                 <a:solidFill>
                   <a:srgbClr val="000000"/>
                 </a:solidFill>
@@ -3060,11 +4204,11 @@
                 <a:spcPct val="115000"/>
               </a:lnSpc>
               <a:spcAft>
-                <a:spcPts val="600"/>
-              </a:spcAft>
-            </a:pPr>
-            <a:r>
-              <a:rPr sz="1200" lang="zh-TW" dirty="0">
+                <a:spcPts val="525"/>
+              </a:spcAft>
+            </a:pPr>
+            <a:r>
+              <a:rPr sz="1050" lang="zh-TW" dirty="0">
                 <a:solidFill>
                   <a:srgbClr val="000000"/>
                 </a:solidFill>
@@ -3075,7 +4219,7 @@
               <a:t>第一句，</a:t>
             </a:r>
             <a:r>
-              <a:rPr sz="1200" b="1" lang="zh-TW" dirty="0">
+              <a:rPr sz="1050" b="1" lang="zh-TW" dirty="0">
                 <a:solidFill>
                   <a:srgbClr val="000000"/>
                 </a:solidFill>
@@ -3086,7 +4230,7 @@
               <a:t>場景三層</a:t>
             </a:r>
             <a:r>
-              <a:rPr sz="1200" lang="zh-TW" dirty="0">
+              <a:rPr sz="1050" lang="zh-TW" dirty="0">
                 <a:solidFill>
                   <a:srgbClr val="000000"/>
                 </a:solidFill>
@@ -3104,11 +4248,11 @@
                 <a:spcPct val="115000"/>
               </a:lnSpc>
               <a:spcAft>
-                <a:spcPts val="600"/>
-              </a:spcAft>
-            </a:pPr>
-            <a:r>
-              <a:rPr sz="1200" lang="zh-TW" dirty="0">
+                <a:spcPts val="525"/>
+              </a:spcAft>
+            </a:pPr>
+            <a:r>
+              <a:rPr sz="1050" lang="zh-TW" dirty="0">
                 <a:solidFill>
                   <a:srgbClr val="000000"/>
                 </a:solidFill>
@@ -3119,7 +4263,7 @@
               <a:t>第二句，</a:t>
             </a:r>
             <a:r>
-              <a:rPr sz="1200" b="1" lang="zh-TW" dirty="0">
+              <a:rPr sz="1050" b="1" lang="zh-TW" dirty="0">
                 <a:solidFill>
                   <a:srgbClr val="000000"/>
                 </a:solidFill>
@@ -3130,7 +4274,7 @@
               <a:t>模擬的用法是掃參數，找出界線</a:t>
             </a:r>
             <a:r>
-              <a:rPr sz="1200" lang="zh-TW" dirty="0">
+              <a:rPr sz="1050" lang="zh-TW" dirty="0">
                 <a:solidFill>
                   <a:srgbClr val="000000"/>
                 </a:solidFill>
@@ -3148,11 +4292,11 @@
                 <a:spcPct val="115000"/>
               </a:lnSpc>
               <a:spcAft>
-                <a:spcPts val="600"/>
-              </a:spcAft>
-            </a:pPr>
-            <a:r>
-              <a:rPr sz="1200" lang="zh-TW" dirty="0">
+                <a:spcPts val="525"/>
+              </a:spcAft>
+            </a:pPr>
+            <a:r>
+              <a:rPr sz="1050" lang="zh-TW" dirty="0">
                 <a:solidFill>
                   <a:srgbClr val="000000"/>
                 </a:solidFill>
@@ -3163,7 +4307,7 @@
               <a:t>第三句，</a:t>
             </a:r>
             <a:r>
-              <a:rPr sz="1200" b="1" lang="zh-TW" dirty="0">
+              <a:rPr sz="1050" b="1" lang="zh-TW" dirty="0">
                 <a:solidFill>
                   <a:srgbClr val="000000"/>
                 </a:solidFill>
@@ -3174,7 +4318,7 @@
               <a:t>場景來自三個地方</a:t>
             </a:r>
             <a:r>
-              <a:rPr sz="1200" lang="zh-TW" dirty="0">
+              <a:rPr sz="1050" lang="zh-TW" dirty="0">
                 <a:solidFill>
                   <a:srgbClr val="000000"/>
                 </a:solidFill>
@@ -3192,11 +4336,11 @@
                 <a:spcPct val="115000"/>
               </a:lnSpc>
               <a:spcAft>
-                <a:spcPts val="600"/>
-              </a:spcAft>
-            </a:pPr>
-            <a:r>
-              <a:rPr sz="1200" lang="zh-TW" dirty="0">
+                <a:spcPts val="525"/>
+              </a:spcAft>
+            </a:pPr>
+            <a:r>
+              <a:rPr sz="1050" lang="zh-TW" dirty="0">
                 <a:solidFill>
                   <a:srgbClr val="000000"/>
                 </a:solidFill>
@@ -3214,11 +4358,11 @@
                 <a:spcPct val="115000"/>
               </a:lnSpc>
               <a:spcAft>
-                <a:spcPts val="600"/>
-              </a:spcAft>
-            </a:pPr>
-            <a:r>
-              <a:rPr sz="1200" lang="zh-TW" dirty="0">
+                <a:spcPts val="525"/>
+              </a:spcAft>
+            </a:pPr>
+            <a:r>
+              <a:rPr sz="1050" lang="zh-TW" dirty="0">
                 <a:solidFill>
                   <a:srgbClr val="000000"/>
                 </a:solidFill>
@@ -3229,7 +4373,7 @@
               <a:t>第三節上機，各位要做的事，現在有正式的名字了：</a:t>
             </a:r>
             <a:r>
-              <a:rPr sz="1200" b="1" lang="zh-TW" dirty="0">
+              <a:rPr sz="1050" b="1" lang="zh-TW" dirty="0">
                 <a:solidFill>
                   <a:srgbClr val="000000"/>
                 </a:solidFill>
@@ -3346,11 +4490,154 @@
                 <a:spcPct val="115000"/>
               </a:lnSpc>
               <a:spcAft>
-                <a:spcPts val="575"/>
-              </a:spcAft>
-            </a:pPr>
-            <a:r>
-              <a:rPr sz="1150" lang="zh-TW" dirty="0">
+                <a:spcPts val="500"/>
+              </a:spcAft>
+            </a:pPr>
+            <a:r>
+              <a:rPr sz="1000" b="1" lang="zh-TW" dirty="0">
+                <a:solidFill>
+                  <a:srgbClr val="000000"/>
+                </a:solidFill>
+                <a:latin typeface="Arial Unicode MS"/>
+                <a:ea typeface="Arial Unicode MS"/>
+                <a:cs typeface="Arial Unicode MS"/>
+              </a:rPr>
+              <a:t>▍這一張要做什麼</a:t>
+            </a:r>
+            <a:r>
+              <a:rPr sz="1000" lang="zh-TW" dirty="0">
+                <a:solidFill>
+                  <a:srgbClr val="000000"/>
+                </a:solidFill>
+                <a:latin typeface="Arial Unicode MS"/>
+                <a:ea typeface="Arial Unicode MS"/>
+                <a:cs typeface="Arial Unicode MS"/>
+              </a:rPr>
+              <a:t>
+</a:t>
+            </a:r>
+          </a:p>
+          <a:p>
+            <a:pPr algn="l">
+              <a:lnSpc>
+                <a:spcPct val="115000"/>
+              </a:lnSpc>
+              <a:spcAft>
+                <a:spcPts val="500"/>
+              </a:spcAft>
+            </a:pPr>
+            <a:r>
+              <a:rPr sz="1000" lang="zh-TW" dirty="0">
+                <a:solidFill>
+                  <a:srgbClr val="000000"/>
+                </a:solidFill>
+                <a:latin typeface="Arial Unicode MS"/>
+                <a:ea typeface="Arial Unicode MS"/>
+                <a:cs typeface="Arial Unicode MS"/>
+              </a:rPr>
+              <a:t>把問題講死：在直路上跑一萬公里，什麼都證明不了。這是整節的地基。
+</a:t>
+            </a:r>
+          </a:p>
+          <a:p>
+            <a:pPr algn="l">
+              <a:lnSpc>
+                <a:spcPct val="115000"/>
+              </a:lnSpc>
+              <a:spcAft>
+                <a:spcPts val="500"/>
+              </a:spcAft>
+            </a:pPr>
+            <a:r>
+              <a:rPr sz="1000" b="1" lang="zh-TW" dirty="0">
+                <a:solidFill>
+                  <a:srgbClr val="000000"/>
+                </a:solidFill>
+                <a:latin typeface="Arial Unicode MS"/>
+                <a:ea typeface="Arial Unicode MS"/>
+                <a:cs typeface="Arial Unicode MS"/>
+              </a:rPr>
+              <a:t>▍畫面上圈這裡</a:t>
+            </a:r>
+            <a:r>
+              <a:rPr sz="1000" lang="zh-TW" dirty="0">
+                <a:solidFill>
+                  <a:srgbClr val="000000"/>
+                </a:solidFill>
+                <a:latin typeface="Arial Unicode MS"/>
+                <a:ea typeface="Arial Unicode MS"/>
+                <a:cs typeface="Arial Unicode MS"/>
+              </a:rPr>
+              <a:t>
+</a:t>
+            </a:r>
+          </a:p>
+          <a:p>
+            <a:pPr algn="l">
+              <a:lnSpc>
+                <a:spcPct val="115000"/>
+              </a:lnSpc>
+              <a:spcAft>
+                <a:spcPts val="500"/>
+              </a:spcAft>
+            </a:pPr>
+            <a:r>
+              <a:rPr sz="1000" lang="zh-TW" dirty="0">
+                <a:solidFill>
+                  <a:srgbClr val="000000"/>
+                </a:solidFill>
+                <a:latin typeface="Arial Unicode MS"/>
+                <a:ea typeface="Arial Unicode MS"/>
+                <a:cs typeface="Arial Unicode MS"/>
+              </a:rPr>
+              <a:t>圈「一萬公里」和「什麼都證明不了」，中間畫一個問號。
+</a:t>
+            </a:r>
+          </a:p>
+          <a:p>
+            <a:pPr algn="l">
+              <a:lnSpc>
+                <a:spcPct val="115000"/>
+              </a:lnSpc>
+              <a:spcAft>
+                <a:spcPts val="500"/>
+              </a:spcAft>
+            </a:pPr>
+            <a:r>
+              <a:rPr sz="1000" b="1" lang="zh-TW" dirty="0">
+                <a:solidFill>
+                  <a:srgbClr val="000000"/>
+                </a:solidFill>
+                <a:latin typeface="Arial Unicode MS"/>
+                <a:ea typeface="Arial Unicode MS"/>
+                <a:cs typeface="Arial Unicode MS"/>
+              </a:rPr>
+              <a:t>▍以下照著唸</a:t>
+            </a:r>
+            <a:r>
+              <a:rPr sz="1000" lang="zh-TW" dirty="0">
+                <a:solidFill>
+                  <a:srgbClr val="000000"/>
+                </a:solidFill>
+                <a:latin typeface="Arial Unicode MS"/>
+                <a:ea typeface="Arial Unicode MS"/>
+                <a:cs typeface="Arial Unicode MS"/>
+              </a:rPr>
+              <a:t>
+</a:t>
+            </a:r>
+          </a:p>
+          <a:p>
+            <a:pPr algn="l">
+              <a:lnSpc>
+                <a:spcPct val="115000"/>
+              </a:lnSpc>
+              <a:spcAft>
+                <a:spcPts val="500"/>
+              </a:spcAft>
+            </a:pPr>
+            <a:r>
+              <a:rPr sz="1000" lang="zh-TW" dirty="0">
                 <a:solidFill>
                   <a:srgbClr val="000000"/>
                 </a:solidFill>
@@ -3368,11 +4655,11 @@
                 <a:spcPct val="115000"/>
               </a:lnSpc>
               <a:spcAft>
-                <a:spcPts val="575"/>
-              </a:spcAft>
-            </a:pPr>
-            <a:r>
-              <a:rPr sz="1150" lang="zh-TW" dirty="0">
+                <a:spcPts val="500"/>
+              </a:spcAft>
+            </a:pPr>
+            <a:r>
+              <a:rPr sz="1000" lang="zh-TW" dirty="0">
                 <a:solidFill>
                   <a:srgbClr val="000000"/>
                 </a:solidFill>
@@ -3390,11 +4677,11 @@
                 <a:spcPct val="115000"/>
               </a:lnSpc>
               <a:spcAft>
-                <a:spcPts val="575"/>
-              </a:spcAft>
-            </a:pPr>
-            <a:r>
-              <a:rPr sz="1150" lang="zh-TW" dirty="0">
+                <a:spcPts val="500"/>
+              </a:spcAft>
+            </a:pPr>
+            <a:r>
+              <a:rPr sz="1000" lang="zh-TW" dirty="0">
                 <a:solidFill>
                   <a:srgbClr val="000000"/>
                 </a:solidFill>
@@ -3412,11 +4699,11 @@
                 <a:spcPct val="115000"/>
               </a:lnSpc>
               <a:spcAft>
-                <a:spcPts val="575"/>
-              </a:spcAft>
-            </a:pPr>
-            <a:r>
-              <a:rPr sz="1150" b="1" lang="zh-TW" dirty="0">
+                <a:spcPts val="500"/>
+              </a:spcAft>
+            </a:pPr>
+            <a:r>
+              <a:rPr sz="1000" b="1" lang="zh-TW" dirty="0">
                 <a:solidFill>
                   <a:srgbClr val="000000"/>
                 </a:solidFill>
@@ -3427,7 +4714,7 @@
               <a:t>它只證明了一件事：它很會走直線。</a:t>
             </a:r>
             <a:r>
-              <a:rPr sz="1150" lang="zh-TW" dirty="0">
+              <a:rPr sz="1000" lang="zh-TW" dirty="0">
                 <a:solidFill>
                   <a:srgbClr val="000000"/>
                 </a:solidFill>
@@ -3445,11 +4732,11 @@
                 <a:spcPct val="115000"/>
               </a:lnSpc>
               <a:spcAft>
-                <a:spcPts val="575"/>
-              </a:spcAft>
-            </a:pPr>
-            <a:r>
-              <a:rPr sz="1150" lang="zh-TW" dirty="0">
+                <a:spcPts val="500"/>
+              </a:spcAft>
+            </a:pPr>
+            <a:r>
+              <a:rPr sz="1000" lang="zh-TW" dirty="0">
                 <a:solidFill>
                   <a:srgbClr val="000000"/>
                 </a:solidFill>
@@ -3460,7 +4747,7 @@
               <a:t>真實道路上的里程，絕大部分是無聊的——直行、沒有人切進來、什麼事都沒發生。而決定一台車安不安全的，是那</a:t>
             </a:r>
             <a:r>
-              <a:rPr sz="1150" b="1" lang="zh-TW" dirty="0">
+              <a:rPr sz="1000" b="1" lang="zh-TW" dirty="0">
                 <a:solidFill>
                   <a:srgbClr val="000000"/>
                 </a:solidFill>
@@ -3471,7 +4758,7 @@
               <a:t>幾秒鐘的罕見狀況</a:t>
             </a:r>
             <a:r>
-              <a:rPr sz="1150" lang="zh-TW" dirty="0">
+              <a:rPr sz="1000" lang="zh-TW" dirty="0">
                 <a:solidFill>
                   <a:srgbClr val="000000"/>
                 </a:solidFill>
@@ -3489,11 +4776,11 @@
                 <a:spcPct val="115000"/>
               </a:lnSpc>
               <a:spcAft>
-                <a:spcPts val="575"/>
-              </a:spcAft>
-            </a:pPr>
-            <a:r>
-              <a:rPr sz="1150" lang="zh-TW" dirty="0">
+                <a:spcPts val="500"/>
+              </a:spcAft>
+            </a:pPr>
+            <a:r>
+              <a:rPr sz="1000" lang="zh-TW" dirty="0">
                 <a:solidFill>
                   <a:srgbClr val="000000"/>
                 </a:solidFill>
@@ -3504,7 +4791,7 @@
               <a:t>這裡有個殘酷的事實：</a:t>
             </a:r>
             <a:r>
-              <a:rPr sz="1150" b="1" lang="zh-TW" dirty="0">
+              <a:rPr sz="1000" b="1" lang="zh-TW" dirty="0">
                 <a:solidFill>
                   <a:srgbClr val="000000"/>
                 </a:solidFill>
@@ -3515,7 +4802,7 @@
               <a:t>你一直跑，不保證遇得到那幾秒鐘。</a:t>
             </a:r>
             <a:r>
-              <a:rPr sz="1150" lang="zh-TW" dirty="0">
+              <a:rPr sz="1000" lang="zh-TW" dirty="0">
                 <a:solidFill>
                   <a:srgbClr val="000000"/>
                 </a:solidFill>
@@ -3533,11 +4820,11 @@
                 <a:spcPct val="115000"/>
               </a:lnSpc>
               <a:spcAft>
-                <a:spcPts val="575"/>
-              </a:spcAft>
-            </a:pPr>
-            <a:r>
-              <a:rPr sz="1150" lang="zh-TW" dirty="0">
+                <a:spcPts val="500"/>
+              </a:spcAft>
+            </a:pPr>
+            <a:r>
+              <a:rPr sz="1000" lang="zh-TW" dirty="0">
                 <a:solidFill>
                   <a:srgbClr val="000000"/>
                 </a:solidFill>
@@ -3555,11 +4842,11 @@
                 <a:spcPct val="115000"/>
               </a:lnSpc>
               <a:spcAft>
-                <a:spcPts val="575"/>
-              </a:spcAft>
-            </a:pPr>
-            <a:r>
-              <a:rPr sz="1150" lang="zh-TW" dirty="0">
+                <a:spcPts val="500"/>
+              </a:spcAft>
+            </a:pPr>
+            <a:r>
+              <a:rPr sz="1000" lang="zh-TW" dirty="0">
                 <a:solidFill>
                   <a:srgbClr val="000000"/>
                 </a:solidFill>
@@ -3570,7 +4857,7 @@
               <a:t>所以問題要改成：</a:t>
             </a:r>
             <a:r>
-              <a:rPr sz="1150" b="1" lang="zh-TW" dirty="0">
+              <a:rPr sz="1000" b="1" lang="zh-TW" dirty="0">
                 <a:solidFill>
                   <a:srgbClr val="000000"/>
                 </a:solidFill>
@@ -3581,7 +4868,7 @@
               <a:t>不是「跑了幾公里」，而是「遇過哪些狀況」。</a:t>
             </a:r>
             <a:r>
-              <a:rPr sz="1150" lang="zh-TW" dirty="0">
+              <a:rPr sz="1000" lang="zh-TW" dirty="0">
                 <a:solidFill>
                   <a:srgbClr val="000000"/>
                 </a:solidFill>
@@ -3599,11 +4886,11 @@
                 <a:spcPct val="115000"/>
               </a:lnSpc>
               <a:spcAft>
-                <a:spcPts val="575"/>
-              </a:spcAft>
-            </a:pPr>
-            <a:r>
-              <a:rPr sz="1150" lang="zh-TW" dirty="0">
+                <a:spcPts val="500"/>
+              </a:spcAft>
+            </a:pPr>
+            <a:r>
+              <a:rPr sz="1000" lang="zh-TW" dirty="0">
                 <a:solidFill>
                   <a:srgbClr val="000000"/>
                 </a:solidFill>
@@ -3614,7 +4901,7 @@
               <a:t>而「狀況」這個詞，在這一行有一個正式的名字：</a:t>
             </a:r>
             <a:r>
-              <a:rPr sz="1150" b="1" lang="zh-TW" dirty="0">
+              <a:rPr sz="1000" b="1" lang="zh-TW" dirty="0">
                 <a:solidFill>
                   <a:srgbClr val="000000"/>
                 </a:solidFill>
@@ -3625,7 +4912,7 @@
               <a:t>場景</a:t>
             </a:r>
             <a:r>
-              <a:rPr sz="1150" lang="zh-TW" dirty="0">
+              <a:rPr sz="1000" lang="zh-TW" dirty="0">
                 <a:solidFill>
                   <a:srgbClr val="000000"/>
                 </a:solidFill>
@@ -3746,6 +5033,149 @@
               </a:spcAft>
             </a:pPr>
             <a:r>
+              <a:rPr sz="1200" b="1" lang="zh-TW" dirty="0">
+                <a:solidFill>
+                  <a:srgbClr val="000000"/>
+                </a:solidFill>
+                <a:latin typeface="Arial Unicode MS"/>
+                <a:ea typeface="Arial Unicode MS"/>
+                <a:cs typeface="Arial Unicode MS"/>
+              </a:rPr>
+              <a:t>▍這一張要做什麼</a:t>
+            </a:r>
+            <a:r>
+              <a:rPr sz="1200" lang="zh-TW" dirty="0">
+                <a:solidFill>
+                  <a:srgbClr val="000000"/>
+                </a:solidFill>
+                <a:latin typeface="Arial Unicode MS"/>
+                <a:ea typeface="Arial Unicode MS"/>
+                <a:cs typeface="Arial Unicode MS"/>
+              </a:rPr>
+              <a:t>
+</a:t>
+            </a:r>
+          </a:p>
+          <a:p>
+            <a:pPr algn="l">
+              <a:lnSpc>
+                <a:spcPct val="115000"/>
+              </a:lnSpc>
+              <a:spcAft>
+                <a:spcPts val="600"/>
+              </a:spcAft>
+            </a:pPr>
+            <a:r>
+              <a:rPr sz="1200" lang="zh-TW" dirty="0">
+                <a:solidFill>
+                  <a:srgbClr val="000000"/>
+                </a:solidFill>
+                <a:latin typeface="Arial Unicode MS"/>
+                <a:ea typeface="Arial Unicode MS"/>
+                <a:cs typeface="Arial Unicode MS"/>
+              </a:rPr>
+              <a:t>段落分隔。宣告接下來要把「場景」拆成三層。
+</a:t>
+            </a:r>
+          </a:p>
+          <a:p>
+            <a:pPr algn="l">
+              <a:lnSpc>
+                <a:spcPct val="115000"/>
+              </a:lnSpc>
+              <a:spcAft>
+                <a:spcPts val="600"/>
+              </a:spcAft>
+            </a:pPr>
+            <a:r>
+              <a:rPr sz="1200" b="1" lang="zh-TW" dirty="0">
+                <a:solidFill>
+                  <a:srgbClr val="000000"/>
+                </a:solidFill>
+                <a:latin typeface="Arial Unicode MS"/>
+                <a:ea typeface="Arial Unicode MS"/>
+                <a:cs typeface="Arial Unicode MS"/>
+              </a:rPr>
+              <a:t>▍畫面上圈這裡</a:t>
+            </a:r>
+            <a:r>
+              <a:rPr sz="1200" lang="zh-TW" dirty="0">
+                <a:solidFill>
+                  <a:srgbClr val="000000"/>
+                </a:solidFill>
+                <a:latin typeface="Arial Unicode MS"/>
+                <a:ea typeface="Arial Unicode MS"/>
+                <a:cs typeface="Arial Unicode MS"/>
+              </a:rPr>
+              <a:t>
+</a:t>
+            </a:r>
+          </a:p>
+          <a:p>
+            <a:pPr algn="l">
+              <a:lnSpc>
+                <a:spcPct val="115000"/>
+              </a:lnSpc>
+              <a:spcAft>
+                <a:spcPts val="600"/>
+              </a:spcAft>
+            </a:pPr>
+            <a:r>
+              <a:rPr sz="1200" lang="zh-TW" dirty="0">
+                <a:solidFill>
+                  <a:srgbClr val="000000"/>
+                </a:solidFill>
+                <a:latin typeface="Arial Unicode MS"/>
+                <a:ea typeface="Arial Unicode MS"/>
+                <a:cs typeface="Arial Unicode MS"/>
+              </a:rPr>
+              <a:t>不用圈。告訴大家這三層等一下會一路用到第三節上機。
+</a:t>
+            </a:r>
+          </a:p>
+          <a:p>
+            <a:pPr algn="l">
+              <a:lnSpc>
+                <a:spcPct val="115000"/>
+              </a:lnSpc>
+              <a:spcAft>
+                <a:spcPts val="600"/>
+              </a:spcAft>
+            </a:pPr>
+            <a:r>
+              <a:rPr sz="1200" b="1" lang="zh-TW" dirty="0">
+                <a:solidFill>
+                  <a:srgbClr val="000000"/>
+                </a:solidFill>
+                <a:latin typeface="Arial Unicode MS"/>
+                <a:ea typeface="Arial Unicode MS"/>
+                <a:cs typeface="Arial Unicode MS"/>
+              </a:rPr>
+              <a:t>▍以下照著唸</a:t>
+            </a:r>
+            <a:r>
+              <a:rPr sz="1200" lang="zh-TW" dirty="0">
+                <a:solidFill>
+                  <a:srgbClr val="000000"/>
+                </a:solidFill>
+                <a:latin typeface="Arial Unicode MS"/>
+                <a:ea typeface="Arial Unicode MS"/>
+                <a:cs typeface="Arial Unicode MS"/>
+              </a:rPr>
+              <a:t>
+</a:t>
+            </a:r>
+          </a:p>
+          <a:p>
+            <a:pPr algn="l">
+              <a:lnSpc>
+                <a:spcPct val="115000"/>
+              </a:lnSpc>
+              <a:spcAft>
+                <a:spcPts val="600"/>
+              </a:spcAft>
+            </a:pPr>
+            <a:r>
               <a:rPr sz="1200" lang="zh-TW" dirty="0">
                 <a:solidFill>
                   <a:srgbClr val="000000"/>
@@ -3907,11 +5337,154 @@
                 <a:spcPct val="115000"/>
               </a:lnSpc>
               <a:spcAft>
-                <a:spcPts val="600"/>
-              </a:spcAft>
-            </a:pPr>
-            <a:r>
-              <a:rPr sz="1200" lang="zh-TW" dirty="0">
+                <a:spcPts val="500"/>
+              </a:spcAft>
+            </a:pPr>
+            <a:r>
+              <a:rPr sz="1000" b="1" lang="zh-TW" dirty="0">
+                <a:solidFill>
+                  <a:srgbClr val="000000"/>
+                </a:solidFill>
+                <a:latin typeface="Arial Unicode MS"/>
+                <a:ea typeface="Arial Unicode MS"/>
+                <a:cs typeface="Arial Unicode MS"/>
+              </a:rPr>
+              <a:t>▍這一張要做什麼</a:t>
+            </a:r>
+            <a:r>
+              <a:rPr sz="1000" lang="zh-TW" dirty="0">
+                <a:solidFill>
+                  <a:srgbClr val="000000"/>
+                </a:solidFill>
+                <a:latin typeface="Arial Unicode MS"/>
+                <a:ea typeface="Arial Unicode MS"/>
+                <a:cs typeface="Arial Unicode MS"/>
+              </a:rPr>
+              <a:t>
+</a:t>
+            </a:r>
+          </a:p>
+          <a:p>
+            <a:pPr algn="l">
+              <a:lnSpc>
+                <a:spcPct val="115000"/>
+              </a:lnSpc>
+              <a:spcAft>
+                <a:spcPts val="500"/>
+              </a:spcAft>
+            </a:pPr>
+            <a:r>
+              <a:rPr sz="1000" lang="zh-TW" dirty="0">
+                <a:solidFill>
+                  <a:srgbClr val="000000"/>
+                </a:solidFill>
+                <a:latin typeface="Arial Unicode MS"/>
+                <a:ea typeface="Arial Unicode MS"/>
+                <a:cs typeface="Arial Unicode MS"/>
+              </a:rPr>
+              <a:t>第一層：功能場景。用人話寫，完全沒有數字。
+</a:t>
+            </a:r>
+          </a:p>
+          <a:p>
+            <a:pPr algn="l">
+              <a:lnSpc>
+                <a:spcPct val="115000"/>
+              </a:lnSpc>
+              <a:spcAft>
+                <a:spcPts val="500"/>
+              </a:spcAft>
+            </a:pPr>
+            <a:r>
+              <a:rPr sz="1000" b="1" lang="zh-TW" dirty="0">
+                <a:solidFill>
+                  <a:srgbClr val="000000"/>
+                </a:solidFill>
+                <a:latin typeface="Arial Unicode MS"/>
+                <a:ea typeface="Arial Unicode MS"/>
+                <a:cs typeface="Arial Unicode MS"/>
+              </a:rPr>
+              <a:t>▍畫面上圈這裡</a:t>
+            </a:r>
+            <a:r>
+              <a:rPr sz="1000" lang="zh-TW" dirty="0">
+                <a:solidFill>
+                  <a:srgbClr val="000000"/>
+                </a:solidFill>
+                <a:latin typeface="Arial Unicode MS"/>
+                <a:ea typeface="Arial Unicode MS"/>
+                <a:cs typeface="Arial Unicode MS"/>
+              </a:rPr>
+              <a:t>
+</a:t>
+            </a:r>
+          </a:p>
+          <a:p>
+            <a:pPr algn="l">
+              <a:lnSpc>
+                <a:spcPct val="115000"/>
+              </a:lnSpc>
+              <a:spcAft>
+                <a:spcPts val="500"/>
+              </a:spcAft>
+            </a:pPr>
+            <a:r>
+              <a:rPr sz="1000" lang="zh-TW" dirty="0">
+                <a:solidFill>
+                  <a:srgbClr val="000000"/>
+                </a:solidFill>
+                <a:latin typeface="Arial Unicode MS"/>
+                <a:ea typeface="Arial Unicode MS"/>
+                <a:cs typeface="Arial Unicode MS"/>
+              </a:rPr>
+              <a:t>圈例句裡的形容詞，例如「一台機車」「從右邊」，指出這些都沒有數字。
+</a:t>
+            </a:r>
+          </a:p>
+          <a:p>
+            <a:pPr algn="l">
+              <a:lnSpc>
+                <a:spcPct val="115000"/>
+              </a:lnSpc>
+              <a:spcAft>
+                <a:spcPts val="500"/>
+              </a:spcAft>
+            </a:pPr>
+            <a:r>
+              <a:rPr sz="1000" b="1" lang="zh-TW" dirty="0">
+                <a:solidFill>
+                  <a:srgbClr val="000000"/>
+                </a:solidFill>
+                <a:latin typeface="Arial Unicode MS"/>
+                <a:ea typeface="Arial Unicode MS"/>
+                <a:cs typeface="Arial Unicode MS"/>
+              </a:rPr>
+              <a:t>▍以下照著唸</a:t>
+            </a:r>
+            <a:r>
+              <a:rPr sz="1000" lang="zh-TW" dirty="0">
+                <a:solidFill>
+                  <a:srgbClr val="000000"/>
+                </a:solidFill>
+                <a:latin typeface="Arial Unicode MS"/>
+                <a:ea typeface="Arial Unicode MS"/>
+                <a:cs typeface="Arial Unicode MS"/>
+              </a:rPr>
+              <a:t>
+</a:t>
+            </a:r>
+          </a:p>
+          <a:p>
+            <a:pPr algn="l">
+              <a:lnSpc>
+                <a:spcPct val="115000"/>
+              </a:lnSpc>
+              <a:spcAft>
+                <a:spcPts val="500"/>
+              </a:spcAft>
+            </a:pPr>
+            <a:r>
+              <a:rPr sz="1000" lang="zh-TW" dirty="0">
                 <a:solidFill>
                   <a:srgbClr val="000000"/>
                 </a:solidFill>
@@ -3922,7 +5495,7 @@
               <a:t>第一層：</a:t>
             </a:r>
             <a:r>
-              <a:rPr sz="1200" b="1" lang="zh-TW" dirty="0">
+              <a:rPr sz="1000" b="1" lang="zh-TW" dirty="0">
                 <a:solidFill>
                   <a:srgbClr val="000000"/>
                 </a:solidFill>
@@ -3933,7 +5506,7 @@
               <a:t>功能場景</a:t>
             </a:r>
             <a:r>
-              <a:rPr sz="1200" lang="zh-TW" dirty="0">
+              <a:rPr sz="1000" lang="zh-TW" dirty="0">
                 <a:solidFill>
                   <a:srgbClr val="000000"/>
                 </a:solidFill>
@@ -3951,11 +5524,11 @@
                 <a:spcPct val="115000"/>
               </a:lnSpc>
               <a:spcAft>
-                <a:spcPts val="600"/>
-              </a:spcAft>
-            </a:pPr>
-            <a:r>
-              <a:rPr sz="1200" lang="zh-TW" dirty="0">
+                <a:spcPts val="500"/>
+              </a:spcAft>
+            </a:pPr>
+            <a:r>
+              <a:rPr sz="1000" lang="zh-TW" dirty="0">
                 <a:solidFill>
                   <a:srgbClr val="000000"/>
                 </a:solidFill>
@@ -3973,11 +5546,11 @@
                 <a:spcPct val="115000"/>
               </a:lnSpc>
               <a:spcAft>
-                <a:spcPts val="600"/>
-              </a:spcAft>
-            </a:pPr>
-            <a:r>
-              <a:rPr sz="1200" lang="zh-TW" dirty="0">
+                <a:spcPts val="500"/>
+              </a:spcAft>
+            </a:pPr>
+            <a:r>
+              <a:rPr sz="1000" lang="zh-TW" dirty="0">
                 <a:solidFill>
                   <a:srgbClr val="000000"/>
                 </a:solidFill>
@@ -3995,11 +5568,11 @@
                 <a:spcPct val="115000"/>
               </a:lnSpc>
               <a:spcAft>
-                <a:spcPts val="600"/>
-              </a:spcAft>
-            </a:pPr>
-            <a:r>
-              <a:rPr sz="1200" lang="zh-TW" dirty="0">
+                <a:spcPts val="500"/>
+              </a:spcAft>
+            </a:pPr>
+            <a:r>
+              <a:rPr sz="1000" lang="zh-TW" dirty="0">
                 <a:solidFill>
                   <a:srgbClr val="000000"/>
                 </a:solidFill>
@@ -4017,11 +5590,11 @@
                 <a:spcPct val="115000"/>
               </a:lnSpc>
               <a:spcAft>
-                <a:spcPts val="600"/>
-              </a:spcAft>
-            </a:pPr>
-            <a:r>
-              <a:rPr sz="1200" lang="zh-TW" dirty="0">
+                <a:spcPts val="500"/>
+              </a:spcAft>
+            </a:pPr>
+            <a:r>
+              <a:rPr sz="1000" lang="zh-TW" dirty="0">
                 <a:solidFill>
                   <a:srgbClr val="000000"/>
                 </a:solidFill>
@@ -4032,7 +5605,7 @@
               <a:t>對，這就是功能場景的價值——</a:t>
             </a:r>
             <a:r>
-              <a:rPr sz="1200" b="1" lang="zh-TW" dirty="0">
+              <a:rPr sz="1000" b="1" lang="zh-TW" dirty="0">
                 <a:solidFill>
                   <a:srgbClr val="000000"/>
                 </a:solidFill>
@@ -4043,7 +5616,7 @@
               <a:t>任何人都能參與</a:t>
             </a:r>
             <a:r>
-              <a:rPr sz="1200" lang="zh-TW" dirty="0">
+              <a:rPr sz="1000" lang="zh-TW" dirty="0">
                 <a:solidFill>
                   <a:srgbClr val="000000"/>
                 </a:solidFill>
@@ -4061,11 +5634,11 @@
                 <a:spcPct val="115000"/>
               </a:lnSpc>
               <a:spcAft>
-                <a:spcPts val="600"/>
-              </a:spcAft>
-            </a:pPr>
-            <a:r>
-              <a:rPr sz="1200" lang="zh-TW" dirty="0">
+                <a:spcPts val="500"/>
+              </a:spcAft>
+            </a:pPr>
+            <a:r>
+              <a:rPr sz="1000" lang="zh-TW" dirty="0">
                 <a:solidFill>
                   <a:srgbClr val="000000"/>
                 </a:solidFill>
@@ -4076,7 +5649,7 @@
               <a:t>但它有個問題：</a:t>
             </a:r>
             <a:r>
-              <a:rPr sz="1200" b="1" lang="zh-TW" dirty="0">
+              <a:rPr sz="1000" b="1" lang="zh-TW" dirty="0">
                 <a:solidFill>
                   <a:srgbClr val="000000"/>
                 </a:solidFill>
@@ -4087,7 +5660,7 @@
               <a:t>你沒辦法拿它來測試。</a:t>
             </a:r>
             <a:r>
-              <a:rPr sz="1200" lang="zh-TW" dirty="0">
+              <a:rPr sz="1000" lang="zh-TW" dirty="0">
                 <a:solidFill>
                   <a:srgbClr val="000000"/>
                 </a:solidFill>
@@ -4105,11 +5678,11 @@
                 <a:spcPct val="115000"/>
               </a:lnSpc>
               <a:spcAft>
-                <a:spcPts val="600"/>
-              </a:spcAft>
-            </a:pPr>
-            <a:r>
-              <a:rPr sz="1200" lang="zh-TW" dirty="0">
+                <a:spcPts val="500"/>
+              </a:spcAft>
+            </a:pPr>
+            <a:r>
+              <a:rPr sz="1000" lang="zh-TW" dirty="0">
                 <a:solidFill>
                   <a:srgbClr val="000000"/>
                 </a:solidFill>
@@ -4120,7 +5693,7 @@
               <a:t>所以功能場景的用途是</a:t>
             </a:r>
             <a:r>
-              <a:rPr sz="1200" b="1" lang="zh-TW" dirty="0">
+              <a:rPr sz="1000" b="1" lang="zh-TW" dirty="0">
                 <a:solidFill>
                   <a:srgbClr val="000000"/>
                 </a:solidFill>
@@ -4131,7 +5704,7 @@
               <a:t>列清單</a:t>
             </a:r>
             <a:r>
-              <a:rPr sz="1200" lang="zh-TW" dirty="0">
+              <a:rPr sz="1000" lang="zh-TW" dirty="0">
                 <a:solidFill>
                   <a:srgbClr val="000000"/>
                 </a:solidFill>
@@ -4149,11 +5722,11 @@
                 <a:spcPct val="115000"/>
               </a:lnSpc>
               <a:spcAft>
-                <a:spcPts val="600"/>
-              </a:spcAft>
-            </a:pPr>
-            <a:r>
-              <a:rPr sz="1200" lang="zh-TW" dirty="0">
+                <a:spcPts val="500"/>
+              </a:spcAft>
+            </a:pPr>
+            <a:r>
+              <a:rPr sz="1000" lang="zh-TW" dirty="0">
                 <a:solidFill>
                   <a:srgbClr val="000000"/>
                 </a:solidFill>
@@ -4270,11 +5843,154 @@
                 <a:spcPct val="115000"/>
               </a:lnSpc>
               <a:spcAft>
-                <a:spcPts val="600"/>
-              </a:spcAft>
-            </a:pPr>
-            <a:r>
-              <a:rPr sz="1200" lang="zh-TW" dirty="0">
+                <a:spcPts val="500"/>
+              </a:spcAft>
+            </a:pPr>
+            <a:r>
+              <a:rPr sz="1000" b="1" lang="zh-TW" dirty="0">
+                <a:solidFill>
+                  <a:srgbClr val="000000"/>
+                </a:solidFill>
+                <a:latin typeface="Arial Unicode MS"/>
+                <a:ea typeface="Arial Unicode MS"/>
+                <a:cs typeface="Arial Unicode MS"/>
+              </a:rPr>
+              <a:t>▍這一張要做什麼</a:t>
+            </a:r>
+            <a:r>
+              <a:rPr sz="1000" lang="zh-TW" dirty="0">
+                <a:solidFill>
+                  <a:srgbClr val="000000"/>
+                </a:solidFill>
+                <a:latin typeface="Arial Unicode MS"/>
+                <a:ea typeface="Arial Unicode MS"/>
+                <a:cs typeface="Arial Unicode MS"/>
+              </a:rPr>
+              <a:t>
+</a:t>
+            </a:r>
+          </a:p>
+          <a:p>
+            <a:pPr algn="l">
+              <a:lnSpc>
+                <a:spcPct val="115000"/>
+              </a:lnSpc>
+              <a:spcAft>
+                <a:spcPts val="500"/>
+              </a:spcAft>
+            </a:pPr>
+            <a:r>
+              <a:rPr sz="1000" lang="zh-TW" dirty="0">
+                <a:solidFill>
+                  <a:srgbClr val="000000"/>
+                </a:solidFill>
+                <a:latin typeface="Arial Unicode MS"/>
+                <a:ea typeface="Arial Unicode MS"/>
+                <a:cs typeface="Arial Unicode MS"/>
+              </a:rPr>
+              <a:t>第二層：邏輯場景。加上參數，但每個參數是一個範圍。
+</a:t>
+            </a:r>
+          </a:p>
+          <a:p>
+            <a:pPr algn="l">
+              <a:lnSpc>
+                <a:spcPct val="115000"/>
+              </a:lnSpc>
+              <a:spcAft>
+                <a:spcPts val="500"/>
+              </a:spcAft>
+            </a:pPr>
+            <a:r>
+              <a:rPr sz="1000" b="1" lang="zh-TW" dirty="0">
+                <a:solidFill>
+                  <a:srgbClr val="000000"/>
+                </a:solidFill>
+                <a:latin typeface="Arial Unicode MS"/>
+                <a:ea typeface="Arial Unicode MS"/>
+                <a:cs typeface="Arial Unicode MS"/>
+              </a:rPr>
+              <a:t>▍畫面上圈這裡</a:t>
+            </a:r>
+            <a:r>
+              <a:rPr sz="1000" lang="zh-TW" dirty="0">
+                <a:solidFill>
+                  <a:srgbClr val="000000"/>
+                </a:solidFill>
+                <a:latin typeface="Arial Unicode MS"/>
+                <a:ea typeface="Arial Unicode MS"/>
+                <a:cs typeface="Arial Unicode MS"/>
+              </a:rPr>
+              <a:t>
+</a:t>
+            </a:r>
+          </a:p>
+          <a:p>
+            <a:pPr algn="l">
+              <a:lnSpc>
+                <a:spcPct val="115000"/>
+              </a:lnSpc>
+              <a:spcAft>
+                <a:spcPts val="500"/>
+              </a:spcAft>
+            </a:pPr>
+            <a:r>
+              <a:rPr sz="1000" lang="zh-TW" dirty="0">
+                <a:solidFill>
+                  <a:srgbClr val="000000"/>
+                </a:solidFill>
+                <a:latin typeface="Arial Unicode MS"/>
+                <a:ea typeface="Arial Unicode MS"/>
+                <a:cs typeface="Arial Unicode MS"/>
+              </a:rPr>
+              <a:t>圈參數後面的範圍符號，例如「30–60 公分」的那個破折號，強調是範圍不是單一值。
+</a:t>
+            </a:r>
+          </a:p>
+          <a:p>
+            <a:pPr algn="l">
+              <a:lnSpc>
+                <a:spcPct val="115000"/>
+              </a:lnSpc>
+              <a:spcAft>
+                <a:spcPts val="500"/>
+              </a:spcAft>
+            </a:pPr>
+            <a:r>
+              <a:rPr sz="1000" b="1" lang="zh-TW" dirty="0">
+                <a:solidFill>
+                  <a:srgbClr val="000000"/>
+                </a:solidFill>
+                <a:latin typeface="Arial Unicode MS"/>
+                <a:ea typeface="Arial Unicode MS"/>
+                <a:cs typeface="Arial Unicode MS"/>
+              </a:rPr>
+              <a:t>▍以下照著唸</a:t>
+            </a:r>
+            <a:r>
+              <a:rPr sz="1000" lang="zh-TW" dirty="0">
+                <a:solidFill>
+                  <a:srgbClr val="000000"/>
+                </a:solidFill>
+                <a:latin typeface="Arial Unicode MS"/>
+                <a:ea typeface="Arial Unicode MS"/>
+                <a:cs typeface="Arial Unicode MS"/>
+              </a:rPr>
+              <a:t>
+</a:t>
+            </a:r>
+          </a:p>
+          <a:p>
+            <a:pPr algn="l">
+              <a:lnSpc>
+                <a:spcPct val="115000"/>
+              </a:lnSpc>
+              <a:spcAft>
+                <a:spcPts val="500"/>
+              </a:spcAft>
+            </a:pPr>
+            <a:r>
+              <a:rPr sz="1000" lang="zh-TW" dirty="0">
                 <a:solidFill>
                   <a:srgbClr val="000000"/>
                 </a:solidFill>
@@ -4285,7 +6001,7 @@
               <a:t>第二層：</a:t>
             </a:r>
             <a:r>
-              <a:rPr sz="1200" b="1" lang="zh-TW" dirty="0">
+              <a:rPr sz="1000" b="1" lang="zh-TW" dirty="0">
                 <a:solidFill>
                   <a:srgbClr val="000000"/>
                 </a:solidFill>
@@ -4296,7 +6012,7 @@
               <a:t>邏輯場景</a:t>
             </a:r>
             <a:r>
-              <a:rPr sz="1200" lang="zh-TW" dirty="0">
+              <a:rPr sz="1000" lang="zh-TW" dirty="0">
                 <a:solidFill>
                   <a:srgbClr val="000000"/>
                 </a:solidFill>
@@ -4314,11 +6030,11 @@
                 <a:spcPct val="115000"/>
               </a:lnSpc>
               <a:spcAft>
-                <a:spcPts val="600"/>
-              </a:spcAft>
-            </a:pPr>
-            <a:r>
-              <a:rPr sz="1200" lang="zh-TW" dirty="0">
+                <a:spcPts val="500"/>
+              </a:spcAft>
+            </a:pPr>
+            <a:r>
+              <a:rPr sz="1000" lang="zh-TW" dirty="0">
                 <a:solidFill>
                   <a:srgbClr val="000000"/>
                 </a:solidFill>
@@ -4329,7 +6045,7 @@
               <a:t>把功能場景加上參數，但每個參數不是一個值，是一個</a:t>
             </a:r>
             <a:r>
-              <a:rPr sz="1200" b="1" lang="zh-TW" dirty="0">
+              <a:rPr sz="1000" b="1" lang="zh-TW" dirty="0">
                 <a:solidFill>
                   <a:srgbClr val="000000"/>
                 </a:solidFill>
@@ -4340,7 +6056,7 @@
               <a:t>範圍</a:t>
             </a:r>
             <a:r>
-              <a:rPr sz="1200" lang="zh-TW" dirty="0">
+              <a:rPr sz="1000" lang="zh-TW" dirty="0">
                 <a:solidFill>
                   <a:srgbClr val="000000"/>
                 </a:solidFill>
@@ -4358,11 +6074,11 @@
                 <a:spcPct val="115000"/>
               </a:lnSpc>
               <a:spcAft>
-                <a:spcPts val="600"/>
-              </a:spcAft>
-            </a:pPr>
-            <a:r>
-              <a:rPr sz="1200" lang="zh-TW" dirty="0">
+                <a:spcPts val="500"/>
+              </a:spcAft>
+            </a:pPr>
+            <a:r>
+              <a:rPr sz="1000" lang="zh-TW" dirty="0">
                 <a:solidFill>
                   <a:srgbClr val="000000"/>
                 </a:solidFill>
@@ -4380,11 +6096,11 @@
                 <a:spcPct val="115000"/>
               </a:lnSpc>
               <a:spcAft>
-                <a:spcPts val="600"/>
-              </a:spcAft>
-            </a:pPr>
-            <a:r>
-              <a:rPr sz="1200" lang="zh-TW" dirty="0">
+                <a:spcPts val="500"/>
+              </a:spcAft>
+            </a:pPr>
+            <a:r>
+              <a:rPr sz="1000" lang="zh-TW" dirty="0">
                 <a:solidFill>
                   <a:srgbClr val="000000"/>
                 </a:solidFill>
@@ -4395,7 +6111,7 @@
               <a:t>前車在</a:t>
             </a:r>
             <a:r>
-              <a:rPr sz="1200" b="1" lang="zh-TW" dirty="0">
+              <a:rPr sz="1000" b="1" lang="zh-TW" dirty="0">
                 <a:solidFill>
                   <a:srgbClr val="000000"/>
                 </a:solidFill>
@@ -4406,7 +6122,7 @@
               <a:t>二十到六十公尺</a:t>
             </a:r>
             <a:r>
-              <a:rPr sz="1200" lang="zh-TW" dirty="0">
+              <a:rPr sz="1000" lang="zh-TW" dirty="0">
                 <a:solidFill>
                   <a:srgbClr val="000000"/>
                 </a:solidFill>
@@ -4417,7 +6133,7 @@
               <a:t>處，以</a:t>
             </a:r>
             <a:r>
-              <a:rPr sz="1200" b="1" lang="zh-TW" dirty="0">
+              <a:rPr sz="1000" b="1" lang="zh-TW" dirty="0">
                 <a:solidFill>
                   <a:srgbClr val="000000"/>
                 </a:solidFill>
@@ -4428,7 +6144,7 @@
               <a:t>三到八</a:t>
             </a:r>
             <a:r>
-              <a:rPr sz="1200" lang="zh-TW" dirty="0">
+              <a:rPr sz="1000" lang="zh-TW" dirty="0">
                 <a:solidFill>
                   <a:srgbClr val="000000"/>
                 </a:solidFill>
@@ -4439,7 +6155,7 @@
               <a:t> m/s² 減速，自車時速</a:t>
             </a:r>
             <a:r>
-              <a:rPr sz="1200" b="1" lang="zh-TW" dirty="0">
+              <a:rPr sz="1000" b="1" lang="zh-TW" dirty="0">
                 <a:solidFill>
                   <a:srgbClr val="000000"/>
                 </a:solidFill>
@@ -4450,7 +6166,7 @@
               <a:t>四十到七十</a:t>
             </a:r>
             <a:r>
-              <a:rPr sz="1200" lang="zh-TW" dirty="0">
+              <a:rPr sz="1000" lang="zh-TW" dirty="0">
                 <a:solidFill>
                   <a:srgbClr val="000000"/>
                 </a:solidFill>
@@ -4468,11 +6184,11 @@
                 <a:spcPct val="115000"/>
               </a:lnSpc>
               <a:spcAft>
-                <a:spcPts val="600"/>
-              </a:spcAft>
-            </a:pPr>
-            <a:r>
-              <a:rPr sz="1200" lang="zh-TW" dirty="0">
+                <a:spcPts val="500"/>
+              </a:spcAft>
+            </a:pPr>
+            <a:r>
+              <a:rPr sz="1000" lang="zh-TW" dirty="0">
                 <a:solidFill>
                   <a:srgbClr val="000000"/>
                 </a:solidFill>
@@ -4490,11 +6206,11 @@
                 <a:spcPct val="115000"/>
               </a:lnSpc>
               <a:spcAft>
-                <a:spcPts val="600"/>
-              </a:spcAft>
-            </a:pPr>
-            <a:r>
-              <a:rPr sz="1200" lang="zh-TW" dirty="0">
+                <a:spcPts val="500"/>
+              </a:spcAft>
+            </a:pPr>
+            <a:r>
+              <a:rPr sz="1000" lang="zh-TW" dirty="0">
                 <a:solidFill>
                   <a:srgbClr val="000000"/>
                 </a:solidFill>
@@ -4512,11 +6228,11 @@
                 <a:spcPct val="115000"/>
               </a:lnSpc>
               <a:spcAft>
-                <a:spcPts val="600"/>
-              </a:spcAft>
-            </a:pPr>
-            <a:r>
-              <a:rPr sz="1200" lang="zh-TW" dirty="0">
+                <a:spcPts val="500"/>
+              </a:spcAft>
+            </a:pPr>
+            <a:r>
+              <a:rPr sz="1000" lang="zh-TW" dirty="0">
                 <a:solidFill>
                   <a:srgbClr val="000000"/>
                 </a:solidFill>
@@ -4527,7 +6243,7 @@
               <a:t>因為真實世界不會剛好是某個數字。前車可能在二十一公尺，也可能在五十九公尺。你要測的是</a:t>
             </a:r>
             <a:r>
-              <a:rPr sz="1200" b="1" lang="zh-TW" dirty="0">
+              <a:rPr sz="1000" b="1" lang="zh-TW" dirty="0">
                 <a:solidFill>
                   <a:srgbClr val="000000"/>
                 </a:solidFill>
@@ -4538,7 +6254,7 @@
               <a:t>整個範圍內都安全</a:t>
             </a:r>
             <a:r>
-              <a:rPr sz="1200" lang="zh-TW" dirty="0">
+              <a:rPr sz="1000" lang="zh-TW" dirty="0">
                 <a:solidFill>
                   <a:srgbClr val="000000"/>
                 </a:solidFill>
@@ -4556,11 +6272,11 @@
                 <a:spcPct val="115000"/>
               </a:lnSpc>
               <a:spcAft>
-                <a:spcPts val="600"/>
-              </a:spcAft>
-            </a:pPr>
-            <a:r>
-              <a:rPr sz="1200" b="1" lang="zh-TW" dirty="0">
+                <a:spcPts val="500"/>
+              </a:spcAft>
+            </a:pPr>
+            <a:r>
+              <a:rPr sz="1000" b="1" lang="zh-TW" dirty="0">
                 <a:solidFill>
                   <a:srgbClr val="000000"/>
                 </a:solidFill>
@@ -4571,7 +6287,7 @@
               <a:t>這一層最重要</a:t>
             </a:r>
             <a:r>
-              <a:rPr sz="1200" lang="zh-TW" dirty="0">
+              <a:rPr sz="1000" lang="zh-TW" dirty="0">
                 <a:solidFill>
                   <a:srgbClr val="000000"/>
                 </a:solidFill>
@@ -4589,11 +6305,11 @@
                 <a:spcPct val="115000"/>
               </a:lnSpc>
               <a:spcAft>
-                <a:spcPts val="600"/>
-              </a:spcAft>
-            </a:pPr>
-            <a:r>
-              <a:rPr sz="1200" lang="zh-TW" dirty="0">
+                <a:spcPts val="500"/>
+              </a:spcAft>
+            </a:pPr>
+            <a:r>
+              <a:rPr sz="1000" lang="zh-TW" dirty="0">
                 <a:solidFill>
                   <a:srgbClr val="000000"/>
                 </a:solidFill>
@@ -4604,7 +6320,7 @@
               <a:t>而且，這也是</a:t>
             </a:r>
             <a:r>
-              <a:rPr sz="1200" b="1" lang="zh-TW" dirty="0">
+              <a:rPr sz="1000" b="1" lang="zh-TW" dirty="0">
                 <a:solidFill>
                   <a:srgbClr val="000000"/>
                 </a:solidFill>
@@ -4615,7 +6331,7 @@
               <a:t>期末專題要各位寫的那一層</a:t>
             </a:r>
             <a:r>
-              <a:rPr sz="1200" lang="zh-TW" dirty="0">
+              <a:rPr sz="1000" lang="zh-TW" dirty="0">
                 <a:solidFill>
                   <a:srgbClr val="000000"/>
                 </a:solidFill>
@@ -4732,11 +6448,154 @@
                 <a:spcPct val="115000"/>
               </a:lnSpc>
               <a:spcAft>
-                <a:spcPts val="600"/>
-              </a:spcAft>
-            </a:pPr>
-            <a:r>
-              <a:rPr sz="1200" lang="zh-TW" dirty="0">
+                <a:spcPts val="500"/>
+              </a:spcAft>
+            </a:pPr>
+            <a:r>
+              <a:rPr sz="1000" b="1" lang="zh-TW" dirty="0">
+                <a:solidFill>
+                  <a:srgbClr val="000000"/>
+                </a:solidFill>
+                <a:latin typeface="Arial Unicode MS"/>
+                <a:ea typeface="Arial Unicode MS"/>
+                <a:cs typeface="Arial Unicode MS"/>
+              </a:rPr>
+              <a:t>▍這一張要做什麼</a:t>
+            </a:r>
+            <a:r>
+              <a:rPr sz="1000" lang="zh-TW" dirty="0">
+                <a:solidFill>
+                  <a:srgbClr val="000000"/>
+                </a:solidFill>
+                <a:latin typeface="Arial Unicode MS"/>
+                <a:ea typeface="Arial Unicode MS"/>
+                <a:cs typeface="Arial Unicode MS"/>
+              </a:rPr>
+              <a:t>
+</a:t>
+            </a:r>
+          </a:p>
+          <a:p>
+            <a:pPr algn="l">
+              <a:lnSpc>
+                <a:spcPct val="115000"/>
+              </a:lnSpc>
+              <a:spcAft>
+                <a:spcPts val="500"/>
+              </a:spcAft>
+            </a:pPr>
+            <a:r>
+              <a:rPr sz="1000" lang="zh-TW" dirty="0">
+                <a:solidFill>
+                  <a:srgbClr val="000000"/>
+                </a:solidFill>
+                <a:latin typeface="Arial Unicode MS"/>
+                <a:ea typeface="Arial Unicode MS"/>
+                <a:cs typeface="Arial Unicode MS"/>
+              </a:rPr>
+              <a:t>第三層：具體場景。每個參數固定成一個值，才跑得起來。
+</a:t>
+            </a:r>
+          </a:p>
+          <a:p>
+            <a:pPr algn="l">
+              <a:lnSpc>
+                <a:spcPct val="115000"/>
+              </a:lnSpc>
+              <a:spcAft>
+                <a:spcPts val="500"/>
+              </a:spcAft>
+            </a:pPr>
+            <a:r>
+              <a:rPr sz="1000" b="1" lang="zh-TW" dirty="0">
+                <a:solidFill>
+                  <a:srgbClr val="000000"/>
+                </a:solidFill>
+                <a:latin typeface="Arial Unicode MS"/>
+                <a:ea typeface="Arial Unicode MS"/>
+                <a:cs typeface="Arial Unicode MS"/>
+              </a:rPr>
+              <a:t>▍畫面上圈這裡</a:t>
+            </a:r>
+            <a:r>
+              <a:rPr sz="1000" lang="zh-TW" dirty="0">
+                <a:solidFill>
+                  <a:srgbClr val="000000"/>
+                </a:solidFill>
+                <a:latin typeface="Arial Unicode MS"/>
+                <a:ea typeface="Arial Unicode MS"/>
+                <a:cs typeface="Arial Unicode MS"/>
+              </a:rPr>
+              <a:t>
+</a:t>
+            </a:r>
+          </a:p>
+          <a:p>
+            <a:pPr algn="l">
+              <a:lnSpc>
+                <a:spcPct val="115000"/>
+              </a:lnSpc>
+              <a:spcAft>
+                <a:spcPts val="500"/>
+              </a:spcAft>
+            </a:pPr>
+            <a:r>
+              <a:rPr sz="1000" lang="zh-TW" dirty="0">
+                <a:solidFill>
+                  <a:srgbClr val="000000"/>
+                </a:solidFill>
+                <a:latin typeface="Arial Unicode MS"/>
+                <a:ea typeface="Arial Unicode MS"/>
+                <a:cs typeface="Arial Unicode MS"/>
+              </a:rPr>
+              <a:t>圈固定下來的那幾個數字，跟上一頁的範圍對照著看。
+</a:t>
+            </a:r>
+          </a:p>
+          <a:p>
+            <a:pPr algn="l">
+              <a:lnSpc>
+                <a:spcPct val="115000"/>
+              </a:lnSpc>
+              <a:spcAft>
+                <a:spcPts val="500"/>
+              </a:spcAft>
+            </a:pPr>
+            <a:r>
+              <a:rPr sz="1000" b="1" lang="zh-TW" dirty="0">
+                <a:solidFill>
+                  <a:srgbClr val="000000"/>
+                </a:solidFill>
+                <a:latin typeface="Arial Unicode MS"/>
+                <a:ea typeface="Arial Unicode MS"/>
+                <a:cs typeface="Arial Unicode MS"/>
+              </a:rPr>
+              <a:t>▍以下照著唸</a:t>
+            </a:r>
+            <a:r>
+              <a:rPr sz="1000" lang="zh-TW" dirty="0">
+                <a:solidFill>
+                  <a:srgbClr val="000000"/>
+                </a:solidFill>
+                <a:latin typeface="Arial Unicode MS"/>
+                <a:ea typeface="Arial Unicode MS"/>
+                <a:cs typeface="Arial Unicode MS"/>
+              </a:rPr>
+              <a:t>
+</a:t>
+            </a:r>
+          </a:p>
+          <a:p>
+            <a:pPr algn="l">
+              <a:lnSpc>
+                <a:spcPct val="115000"/>
+              </a:lnSpc>
+              <a:spcAft>
+                <a:spcPts val="500"/>
+              </a:spcAft>
+            </a:pPr>
+            <a:r>
+              <a:rPr sz="1000" lang="zh-TW" dirty="0">
                 <a:solidFill>
                   <a:srgbClr val="000000"/>
                 </a:solidFill>
@@ -4747,7 +6606,7 @@
               <a:t>第三層：</a:t>
             </a:r>
             <a:r>
-              <a:rPr sz="1200" b="1" lang="zh-TW" dirty="0">
+              <a:rPr sz="1000" b="1" lang="zh-TW" dirty="0">
                 <a:solidFill>
                   <a:srgbClr val="000000"/>
                 </a:solidFill>
@@ -4758,7 +6617,7 @@
               <a:t>具體場景</a:t>
             </a:r>
             <a:r>
-              <a:rPr sz="1200" lang="zh-TW" dirty="0">
+              <a:rPr sz="1000" lang="zh-TW" dirty="0">
                 <a:solidFill>
                   <a:srgbClr val="000000"/>
                 </a:solidFill>
@@ -4776,11 +6635,11 @@
                 <a:spcPct val="115000"/>
               </a:lnSpc>
               <a:spcAft>
-                <a:spcPts val="600"/>
-              </a:spcAft>
-            </a:pPr>
-            <a:r>
-              <a:rPr sz="1200" lang="zh-TW" dirty="0">
+                <a:spcPts val="500"/>
+              </a:spcAft>
+            </a:pPr>
+            <a:r>
+              <a:rPr sz="1000" lang="zh-TW" dirty="0">
                 <a:solidFill>
                   <a:srgbClr val="000000"/>
                 </a:solidFill>
@@ -4798,11 +6657,11 @@
                 <a:spcPct val="115000"/>
               </a:lnSpc>
               <a:spcAft>
-                <a:spcPts val="600"/>
-              </a:spcAft>
-            </a:pPr>
-            <a:r>
-              <a:rPr sz="1200" lang="zh-TW" dirty="0">
+                <a:spcPts val="500"/>
+              </a:spcAft>
+            </a:pPr>
+            <a:r>
+              <a:rPr sz="1000" lang="zh-TW" dirty="0">
                 <a:solidFill>
                   <a:srgbClr val="000000"/>
                 </a:solidFill>
@@ -4813,7 +6672,7 @@
               <a:t>前車</a:t>
             </a:r>
             <a:r>
-              <a:rPr sz="1200" b="1" lang="zh-TW" dirty="0">
+              <a:rPr sz="1000" b="1" lang="zh-TW" dirty="0">
                 <a:solidFill>
                   <a:srgbClr val="000000"/>
                 </a:solidFill>
@@ -4824,7 +6683,7 @@
               <a:t>剛好三十五公尺</a:t>
             </a:r>
             <a:r>
-              <a:rPr sz="1200" lang="zh-TW" dirty="0">
+              <a:rPr sz="1000" lang="zh-TW" dirty="0">
                 <a:solidFill>
                   <a:srgbClr val="000000"/>
                 </a:solidFill>
@@ -4835,7 +6694,7 @@
               <a:t>，減速度</a:t>
             </a:r>
             <a:r>
-              <a:rPr sz="1200" b="1" lang="zh-TW" dirty="0">
+              <a:rPr sz="1000" b="1" lang="zh-TW" dirty="0">
                 <a:solidFill>
                   <a:srgbClr val="000000"/>
                 </a:solidFill>
@@ -4846,7 +6705,7 @@
               <a:t>剛好六</a:t>
             </a:r>
             <a:r>
-              <a:rPr sz="1200" lang="zh-TW" dirty="0">
+              <a:rPr sz="1000" lang="zh-TW" dirty="0">
                 <a:solidFill>
                   <a:srgbClr val="000000"/>
                 </a:solidFill>
@@ -4857,7 +6716,7 @@
               <a:t>，自車</a:t>
             </a:r>
             <a:r>
-              <a:rPr sz="1200" b="1" lang="zh-TW" dirty="0">
+              <a:rPr sz="1000" b="1" lang="zh-TW" dirty="0">
                 <a:solidFill>
                   <a:srgbClr val="000000"/>
                 </a:solidFill>
@@ -4868,7 +6727,7 @@
               <a:t>剛好時速五十</a:t>
             </a:r>
             <a:r>
-              <a:rPr sz="1200" lang="zh-TW" dirty="0">
+              <a:rPr sz="1000" lang="zh-TW" dirty="0">
                 <a:solidFill>
                   <a:srgbClr val="000000"/>
                 </a:solidFill>
@@ -4886,11 +6745,11 @@
                 <a:spcPct val="115000"/>
               </a:lnSpc>
               <a:spcAft>
-                <a:spcPts val="600"/>
-              </a:spcAft>
-            </a:pPr>
-            <a:r>
-              <a:rPr sz="1200" lang="zh-TW" dirty="0">
+                <a:spcPts val="500"/>
+              </a:spcAft>
+            </a:pPr>
+            <a:r>
+              <a:rPr sz="1000" lang="zh-TW" dirty="0">
                 <a:solidFill>
                   <a:srgbClr val="000000"/>
                 </a:solidFill>
@@ -4908,11 +6767,11 @@
                 <a:spcPct val="115000"/>
               </a:lnSpc>
               <a:spcAft>
-                <a:spcPts val="600"/>
-              </a:spcAft>
-            </a:pPr>
-            <a:r>
-              <a:rPr sz="1200" b="1" lang="zh-TW" dirty="0">
+                <a:spcPts val="500"/>
+              </a:spcAft>
+            </a:pPr>
+            <a:r>
+              <a:rPr sz="1000" b="1" lang="zh-TW" dirty="0">
                 <a:solidFill>
                   <a:srgbClr val="000000"/>
                 </a:solidFill>
@@ -4923,7 +6782,7 @@
               <a:t>現在關鍵的一步來了。</a:t>
             </a:r>
             <a:r>
-              <a:rPr sz="1200" lang="zh-TW" dirty="0">
+              <a:rPr sz="1000" lang="zh-TW" dirty="0">
                 <a:solidFill>
                   <a:srgbClr val="000000"/>
                 </a:solidFill>
@@ -4941,11 +6800,11 @@
                 <a:spcPct val="115000"/>
               </a:lnSpc>
               <a:spcAft>
-                <a:spcPts val="600"/>
-              </a:spcAft>
-            </a:pPr>
-            <a:r>
-              <a:rPr sz="1200" lang="zh-TW" dirty="0">
+                <a:spcPts val="500"/>
+              </a:spcAft>
+            </a:pPr>
+            <a:r>
+              <a:rPr sz="1000" lang="zh-TW" dirty="0">
                 <a:solidFill>
                   <a:srgbClr val="000000"/>
                 </a:solidFill>
@@ -4963,11 +6822,11 @@
                 <a:spcPct val="115000"/>
               </a:lnSpc>
               <a:spcAft>
-                <a:spcPts val="600"/>
-              </a:spcAft>
-            </a:pPr>
-            <a:r>
-              <a:rPr sz="1200" lang="zh-TW" dirty="0">
+                <a:spcPts val="500"/>
+              </a:spcAft>
+            </a:pPr>
+            <a:r>
+              <a:rPr sz="1000" lang="zh-TW" dirty="0">
                 <a:solidFill>
                   <a:srgbClr val="000000"/>
                 </a:solidFill>
@@ -4985,11 +6844,11 @@
                 <a:spcPct val="115000"/>
               </a:lnSpc>
               <a:spcAft>
-                <a:spcPts val="600"/>
-              </a:spcAft>
-            </a:pPr>
-            <a:r>
-              <a:rPr sz="1200" lang="zh-TW" dirty="0">
+                <a:spcPts val="500"/>
+              </a:spcAft>
+            </a:pPr>
+            <a:r>
+              <a:rPr sz="1000" lang="zh-TW" dirty="0">
                 <a:solidFill>
                   <a:srgbClr val="000000"/>
                 </a:solidFill>
@@ -5000,7 +6859,7 @@
               <a:t>（在白板上寫）四十一 × 十一 × 七 ＝ </a:t>
             </a:r>
             <a:r>
-              <a:rPr sz="1200" b="1" lang="zh-TW" dirty="0">
+              <a:rPr sz="1000" b="1" lang="zh-TW" dirty="0">
                 <a:solidFill>
                   <a:srgbClr val="000000"/>
                 </a:solidFill>
@@ -5011,7 +6870,7 @@
               <a:t>三千一百五十七個具體場景</a:t>
             </a:r>
             <a:r>
-              <a:rPr sz="1200" lang="zh-TW" dirty="0">
+              <a:rPr sz="1000" lang="zh-TW" dirty="0">
                 <a:solidFill>
                   <a:srgbClr val="000000"/>
                 </a:solidFill>
@@ -5029,11 +6888,11 @@
                 <a:spcPct val="115000"/>
               </a:lnSpc>
               <a:spcAft>
-                <a:spcPts val="600"/>
-              </a:spcAft>
-            </a:pPr>
-            <a:r>
-              <a:rPr sz="1200" lang="zh-TW" dirty="0">
+                <a:spcPts val="500"/>
+              </a:spcAft>
+            </a:pPr>
+            <a:r>
+              <a:rPr sz="1000" lang="zh-TW" dirty="0">
                 <a:solidFill>
                   <a:srgbClr val="000000"/>
                 </a:solidFill>
@@ -5044,7 +6903,7 @@
               <a:t>而這只是</a:t>
             </a:r>
             <a:r>
-              <a:rPr sz="1200" b="1" lang="zh-TW" dirty="0">
+              <a:rPr sz="1000" b="1" lang="zh-TW" dirty="0">
                 <a:solidFill>
                   <a:srgbClr val="000000"/>
                 </a:solidFill>
@@ -5055,7 +6914,7 @@
               <a:t>一個</a:t>
             </a:r>
             <a:r>
-              <a:rPr sz="1200" lang="zh-TW" dirty="0">
+              <a:rPr sz="1000" lang="zh-TW" dirty="0">
                 <a:solidFill>
                   <a:srgbClr val="000000"/>
                 </a:solidFill>
@@ -5073,11 +6932,11 @@
                 <a:spcPct val="115000"/>
               </a:lnSpc>
               <a:spcAft>
-                <a:spcPts val="600"/>
-              </a:spcAft>
-            </a:pPr>
-            <a:r>
-              <a:rPr sz="1200" b="1" lang="zh-TW" dirty="0">
+                <a:spcPts val="500"/>
+              </a:spcAft>
+            </a:pPr>
+            <a:r>
+              <a:rPr sz="1000" b="1" lang="zh-TW" dirty="0">
                 <a:solidFill>
                   <a:srgbClr val="000000"/>
                 </a:solidFill>
@@ -5088,7 +6947,7 @@
               <a:t>這就是模擬真正的用法。</a:t>
             </a:r>
             <a:r>
-              <a:rPr sz="1200" lang="zh-TW" dirty="0">
+              <a:rPr sz="1000" lang="zh-TW" dirty="0">
                 <a:solidFill>
                   <a:srgbClr val="000000"/>
                 </a:solidFill>
@@ -5205,11 +7064,154 @@
                 <a:spcPct val="115000"/>
               </a:lnSpc>
               <a:spcAft>
-                <a:spcPts val="600"/>
-              </a:spcAft>
-            </a:pPr>
-            <a:r>
-              <a:rPr sz="1200" lang="zh-TW" dirty="0">
+                <a:spcPts val="500"/>
+              </a:spcAft>
+            </a:pPr>
+            <a:r>
+              <a:rPr sz="1000" b="1" lang="zh-TW" dirty="0">
+                <a:solidFill>
+                  <a:srgbClr val="000000"/>
+                </a:solidFill>
+                <a:latin typeface="Arial Unicode MS"/>
+                <a:ea typeface="Arial Unicode MS"/>
+                <a:cs typeface="Arial Unicode MS"/>
+              </a:rPr>
+              <a:t>▍這一張要做什麼</a:t>
+            </a:r>
+            <a:r>
+              <a:rPr sz="1000" lang="zh-TW" dirty="0">
+                <a:solidFill>
+                  <a:srgbClr val="000000"/>
+                </a:solidFill>
+                <a:latin typeface="Arial Unicode MS"/>
+                <a:ea typeface="Arial Unicode MS"/>
+                <a:cs typeface="Arial Unicode MS"/>
+              </a:rPr>
+              <a:t>
+</a:t>
+            </a:r>
+          </a:p>
+          <a:p>
+            <a:pPr algn="l">
+              <a:lnSpc>
+                <a:spcPct val="115000"/>
+              </a:lnSpc>
+              <a:spcAft>
+                <a:spcPts val="500"/>
+              </a:spcAft>
+            </a:pPr>
+            <a:r>
+              <a:rPr sz="1000" lang="zh-TW" dirty="0">
+                <a:solidFill>
+                  <a:srgbClr val="000000"/>
+                </a:solidFill>
+                <a:latin typeface="Arial Unicode MS"/>
+                <a:ea typeface="Arial Unicode MS"/>
+                <a:cs typeface="Arial Unicode MS"/>
+              </a:rPr>
+              <a:t>本節的重點頁。模擬真正的用法是掃參數找界線，不是拚里程。
+</a:t>
+            </a:r>
+          </a:p>
+          <a:p>
+            <a:pPr algn="l">
+              <a:lnSpc>
+                <a:spcPct val="115000"/>
+              </a:lnSpc>
+              <a:spcAft>
+                <a:spcPts val="500"/>
+              </a:spcAft>
+            </a:pPr>
+            <a:r>
+              <a:rPr sz="1000" b="1" lang="zh-TW" dirty="0">
+                <a:solidFill>
+                  <a:srgbClr val="000000"/>
+                </a:solidFill>
+                <a:latin typeface="Arial Unicode MS"/>
+                <a:ea typeface="Arial Unicode MS"/>
+                <a:cs typeface="Arial Unicode MS"/>
+              </a:rPr>
+              <a:t>▍畫面上圈這裡</a:t>
+            </a:r>
+            <a:r>
+              <a:rPr sz="1000" lang="zh-TW" dirty="0">
+                <a:solidFill>
+                  <a:srgbClr val="000000"/>
+                </a:solidFill>
+                <a:latin typeface="Arial Unicode MS"/>
+                <a:ea typeface="Arial Unicode MS"/>
+                <a:cs typeface="Arial Unicode MS"/>
+              </a:rPr>
+              <a:t>
+</a:t>
+            </a:r>
+          </a:p>
+          <a:p>
+            <a:pPr algn="l">
+              <a:lnSpc>
+                <a:spcPct val="115000"/>
+              </a:lnSpc>
+              <a:spcAft>
+                <a:spcPts val="500"/>
+              </a:spcAft>
+            </a:pPr>
+            <a:r>
+              <a:rPr sz="1000" lang="zh-TW" dirty="0">
+                <a:solidFill>
+                  <a:srgbClr val="000000"/>
+                </a:solidFill>
+                <a:latin typeface="Arial Unicode MS"/>
+                <a:ea typeface="Arial Unicode MS"/>
+                <a:cs typeface="Arial Unicode MS"/>
+              </a:rPr>
+              <a:t>圈「掃參數」三個字，再圈下方說明裡「找出界線」。這一句第三節第二題會直接用到。
+</a:t>
+            </a:r>
+          </a:p>
+          <a:p>
+            <a:pPr algn="l">
+              <a:lnSpc>
+                <a:spcPct val="115000"/>
+              </a:lnSpc>
+              <a:spcAft>
+                <a:spcPts val="500"/>
+              </a:spcAft>
+            </a:pPr>
+            <a:r>
+              <a:rPr sz="1000" b="1" lang="zh-TW" dirty="0">
+                <a:solidFill>
+                  <a:srgbClr val="000000"/>
+                </a:solidFill>
+                <a:latin typeface="Arial Unicode MS"/>
+                <a:ea typeface="Arial Unicode MS"/>
+                <a:cs typeface="Arial Unicode MS"/>
+              </a:rPr>
+              <a:t>▍以下照著唸</a:t>
+            </a:r>
+            <a:r>
+              <a:rPr sz="1000" lang="zh-TW" dirty="0">
+                <a:solidFill>
+                  <a:srgbClr val="000000"/>
+                </a:solidFill>
+                <a:latin typeface="Arial Unicode MS"/>
+                <a:ea typeface="Arial Unicode MS"/>
+                <a:cs typeface="Arial Unicode MS"/>
+              </a:rPr>
+              <a:t>
+</a:t>
+            </a:r>
+          </a:p>
+          <a:p>
+            <a:pPr algn="l">
+              <a:lnSpc>
+                <a:spcPct val="115000"/>
+              </a:lnSpc>
+              <a:spcAft>
+                <a:spcPts val="500"/>
+              </a:spcAft>
+            </a:pPr>
+            <a:r>
+              <a:rPr sz="1000" lang="zh-TW" dirty="0">
                 <a:solidFill>
                   <a:srgbClr val="000000"/>
                 </a:solidFill>
@@ -5220,7 +7222,7 @@
               <a:t>所以模擬真正的用法是什麼？</a:t>
             </a:r>
             <a:r>
-              <a:rPr sz="1200" b="1" lang="zh-TW" dirty="0">
+              <a:rPr sz="1000" b="1" lang="zh-TW" dirty="0">
                 <a:solidFill>
                   <a:srgbClr val="000000"/>
                 </a:solidFill>
@@ -5231,7 +7233,7 @@
               <a:t>掃參數。</a:t>
             </a:r>
             <a:r>
-              <a:rPr sz="1200" lang="zh-TW" dirty="0">
+              <a:rPr sz="1000" lang="zh-TW" dirty="0">
                 <a:solidFill>
                   <a:srgbClr val="000000"/>
                 </a:solidFill>
@@ -5249,11 +7251,11 @@
                 <a:spcPct val="115000"/>
               </a:lnSpc>
               <a:spcAft>
-                <a:spcPts val="600"/>
-              </a:spcAft>
-            </a:pPr>
-            <a:r>
-              <a:rPr sz="1200" lang="zh-TW" dirty="0">
+                <a:spcPts val="500"/>
+              </a:spcAft>
+            </a:pPr>
+            <a:r>
+              <a:rPr sz="1000" lang="zh-TW" dirty="0">
                 <a:solidFill>
                   <a:srgbClr val="000000"/>
                 </a:solidFill>
@@ -5271,11 +7273,11 @@
                 <a:spcPct val="115000"/>
               </a:lnSpc>
               <a:spcAft>
-                <a:spcPts val="600"/>
-              </a:spcAft>
-            </a:pPr>
-            <a:r>
-              <a:rPr sz="1200" lang="zh-TW" dirty="0">
+                <a:spcPts val="500"/>
+              </a:spcAft>
+            </a:pPr>
+            <a:r>
+              <a:rPr sz="1000" lang="zh-TW" dirty="0">
                 <a:solidFill>
                   <a:srgbClr val="000000"/>
                 </a:solidFill>
@@ -5286,7 +7288,7 @@
               <a:t>跑完三千次之後，你得到的不是「有沒有撞」，而是一條</a:t>
             </a:r>
             <a:r>
-              <a:rPr sz="1200" b="1" lang="zh-TW" dirty="0">
+              <a:rPr sz="1000" b="1" lang="zh-TW" dirty="0">
                 <a:solidFill>
                   <a:srgbClr val="000000"/>
                 </a:solidFill>
@@ -5297,7 +7299,7 @@
               <a:t>界線</a:t>
             </a:r>
             <a:r>
-              <a:rPr sz="1200" lang="zh-TW" dirty="0">
+              <a:rPr sz="1000" lang="zh-TW" dirty="0">
                 <a:solidFill>
                   <a:srgbClr val="000000"/>
                 </a:solidFill>
@@ -5315,11 +7317,11 @@
                 <a:spcPct val="115000"/>
               </a:lnSpc>
               <a:spcAft>
-                <a:spcPts val="600"/>
-              </a:spcAft>
-            </a:pPr>
-            <a:r>
-              <a:rPr sz="1200" lang="zh-TW" dirty="0">
+                <a:spcPts val="500"/>
+              </a:spcAft>
+            </a:pPr>
+            <a:r>
+              <a:rPr sz="1000" lang="zh-TW" dirty="0">
                 <a:solidFill>
                   <a:srgbClr val="000000"/>
                 </a:solidFill>
@@ -5337,11 +7339,11 @@
                 <a:spcPct val="115000"/>
               </a:lnSpc>
               <a:spcAft>
-                <a:spcPts val="600"/>
-              </a:spcAft>
-            </a:pPr>
-            <a:r>
-              <a:rPr sz="1200" lang="zh-TW" dirty="0">
+                <a:spcPts val="500"/>
+              </a:spcAft>
+            </a:pPr>
+            <a:r>
+              <a:rPr sz="1000" lang="zh-TW" dirty="0">
                 <a:solidFill>
                   <a:srgbClr val="000000"/>
                 </a:solidFill>
@@ -5359,11 +7361,11 @@
                 <a:spcPct val="115000"/>
               </a:lnSpc>
               <a:spcAft>
-                <a:spcPts val="600"/>
-              </a:spcAft>
-            </a:pPr>
-            <a:r>
-              <a:rPr sz="1200" lang="zh-TW" dirty="0">
+                <a:spcPts val="500"/>
+              </a:spcAft>
+            </a:pPr>
+            <a:r>
+              <a:rPr sz="1000" lang="zh-TW" dirty="0">
                 <a:solidFill>
                   <a:srgbClr val="000000"/>
                 </a:solidFill>
@@ -5374,7 +7376,7 @@
               <a:t>這條界線就是</a:t>
             </a:r>
             <a:r>
-              <a:rPr sz="1200" b="1" lang="zh-TW" dirty="0">
+              <a:rPr sz="1000" b="1" lang="zh-TW" dirty="0">
                 <a:solidFill>
                   <a:srgbClr val="000000"/>
                 </a:solidFill>
@@ -5385,7 +7387,7 @@
               <a:t>能力邊界</a:t>
             </a:r>
             <a:r>
-              <a:rPr sz="1200" lang="zh-TW" dirty="0">
+              <a:rPr sz="1000" lang="zh-TW" dirty="0">
                 <a:solidFill>
                   <a:srgbClr val="000000"/>
                 </a:solidFill>
@@ -5403,11 +7405,11 @@
                 <a:spcPct val="115000"/>
               </a:lnSpc>
               <a:spcAft>
-                <a:spcPts val="600"/>
-              </a:spcAft>
-            </a:pPr>
-            <a:r>
-              <a:rPr sz="1200" lang="zh-TW" dirty="0">
+                <a:spcPts val="500"/>
+              </a:spcAft>
+            </a:pPr>
+            <a:r>
+              <a:rPr sz="1000" lang="zh-TW" dirty="0">
                 <a:solidFill>
                   <a:srgbClr val="000000"/>
                 </a:solidFill>
@@ -5418,7 +7420,7 @@
               <a:t>（回頭連結）看到了嗎？第二週的 ODD、第三週的感測器邊界、今天的掃參數，講的是同一件事：</a:t>
             </a:r>
             <a:r>
-              <a:rPr sz="1200" b="1" lang="zh-TW" dirty="0">
+              <a:rPr sz="1000" b="1" lang="zh-TW" dirty="0">
                 <a:solidFill>
                   <a:srgbClr val="000000"/>
                 </a:solidFill>
@@ -5429,7 +7431,7 @@
               <a:t>你要說得出自己的界線在哪裡。</a:t>
             </a:r>
             <a:r>
-              <a:rPr sz="1200" lang="zh-TW" dirty="0">
+              <a:rPr sz="1000" lang="zh-TW" dirty="0">
                 <a:solidFill>
                   <a:srgbClr val="000000"/>
                 </a:solidFill>
@@ -5447,11 +7449,11 @@
                 <a:spcPct val="115000"/>
               </a:lnSpc>
               <a:spcAft>
-                <a:spcPts val="600"/>
-              </a:spcAft>
-            </a:pPr>
-            <a:r>
-              <a:rPr sz="1200" lang="zh-TW" dirty="0">
+                <a:spcPts val="500"/>
+              </a:spcAft>
+            </a:pPr>
+            <a:r>
+              <a:rPr sz="1000" lang="zh-TW" dirty="0">
                 <a:solidFill>
                   <a:srgbClr val="000000"/>
                 </a:solidFill>
@@ -5469,11 +7471,11 @@
                 <a:spcPct val="115000"/>
               </a:lnSpc>
               <a:spcAft>
-                <a:spcPts val="600"/>
-              </a:spcAft>
-            </a:pPr>
-            <a:r>
-              <a:rPr sz="1200" b="1" lang="zh-TW" dirty="0">
+                <a:spcPts val="500"/>
+              </a:spcAft>
+            </a:pPr>
+            <a:r>
+              <a:rPr sz="1000" b="1" lang="zh-TW" dirty="0">
                 <a:solidFill>
                   <a:srgbClr val="000000"/>
                 </a:solidFill>
@@ -5590,11 +7592,154 @@
                 <a:spcPct val="115000"/>
               </a:lnSpc>
               <a:spcAft>
-                <a:spcPts val="600"/>
-              </a:spcAft>
-            </a:pPr>
-            <a:r>
-              <a:rPr sz="1200" lang="zh-TW" dirty="0">
+                <a:spcPts val="500"/>
+              </a:spcAft>
+            </a:pPr>
+            <a:r>
+              <a:rPr sz="1000" b="1" lang="zh-TW" dirty="0">
+                <a:solidFill>
+                  <a:srgbClr val="000000"/>
+                </a:solidFill>
+                <a:latin typeface="Arial Unicode MS"/>
+                <a:ea typeface="Arial Unicode MS"/>
+                <a:cs typeface="Arial Unicode MS"/>
+              </a:rPr>
+              <a:t>▍這一張要做什麼</a:t>
+            </a:r>
+            <a:r>
+              <a:rPr sz="1000" lang="zh-TW" dirty="0">
+                <a:solidFill>
+                  <a:srgbClr val="000000"/>
+                </a:solidFill>
+                <a:latin typeface="Arial Unicode MS"/>
+                <a:ea typeface="Arial Unicode MS"/>
+                <a:cs typeface="Arial Unicode MS"/>
+              </a:rPr>
+              <a:t>
+</a:t>
+            </a:r>
+          </a:p>
+          <a:p>
+            <a:pPr algn="l">
+              <a:lnSpc>
+                <a:spcPct val="115000"/>
+              </a:lnSpc>
+              <a:spcAft>
+                <a:spcPts val="500"/>
+              </a:spcAft>
+            </a:pPr>
+            <a:r>
+              <a:rPr sz="1000" lang="zh-TW" dirty="0">
+                <a:solidFill>
+                  <a:srgbClr val="000000"/>
+                </a:solidFill>
+                <a:latin typeface="Arial Unicode MS"/>
+                <a:ea typeface="Arial Unicode MS"/>
+                <a:cs typeface="Arial Unicode MS"/>
+              </a:rPr>
+              <a:t>把抽象的三層接回學生手上的工具，讓他們知道自己一直在做這件事。
+</a:t>
+            </a:r>
+          </a:p>
+          <a:p>
+            <a:pPr algn="l">
+              <a:lnSpc>
+                <a:spcPct val="115000"/>
+              </a:lnSpc>
+              <a:spcAft>
+                <a:spcPts val="500"/>
+              </a:spcAft>
+            </a:pPr>
+            <a:r>
+              <a:rPr sz="1000" b="1" lang="zh-TW" dirty="0">
+                <a:solidFill>
+                  <a:srgbClr val="000000"/>
+                </a:solidFill>
+                <a:latin typeface="Arial Unicode MS"/>
+                <a:ea typeface="Arial Unicode MS"/>
+                <a:cs typeface="Arial Unicode MS"/>
+              </a:rPr>
+              <a:t>▍畫面上圈這裡</a:t>
+            </a:r>
+            <a:r>
+              <a:rPr sz="1000" lang="zh-TW" dirty="0">
+                <a:solidFill>
+                  <a:srgbClr val="000000"/>
+                </a:solidFill>
+                <a:latin typeface="Arial Unicode MS"/>
+                <a:ea typeface="Arial Unicode MS"/>
+                <a:cs typeface="Arial Unicode MS"/>
+              </a:rPr>
+              <a:t>
+</a:t>
+            </a:r>
+          </a:p>
+          <a:p>
+            <a:pPr algn="l">
+              <a:lnSpc>
+                <a:spcPct val="115000"/>
+              </a:lnSpc>
+              <a:spcAft>
+                <a:spcPts val="500"/>
+              </a:spcAft>
+            </a:pPr>
+            <a:r>
+              <a:rPr sz="1000" lang="zh-TW" dirty="0">
+                <a:solidFill>
+                  <a:srgbClr val="000000"/>
+                </a:solidFill>
+                <a:latin typeface="Arial Unicode MS"/>
+                <a:ea typeface="Arial Unicode MS"/>
+                <a:cs typeface="Arial Unicode MS"/>
+              </a:rPr>
+              <a:t>一步一步圈，每圈一步問「這個你上週是不是做過」。
+</a:t>
+            </a:r>
+          </a:p>
+          <a:p>
+            <a:pPr algn="l">
+              <a:lnSpc>
+                <a:spcPct val="115000"/>
+              </a:lnSpc>
+              <a:spcAft>
+                <a:spcPts val="500"/>
+              </a:spcAft>
+            </a:pPr>
+            <a:r>
+              <a:rPr sz="1000" b="1" lang="zh-TW" dirty="0">
+                <a:solidFill>
+                  <a:srgbClr val="000000"/>
+                </a:solidFill>
+                <a:latin typeface="Arial Unicode MS"/>
+                <a:ea typeface="Arial Unicode MS"/>
+                <a:cs typeface="Arial Unicode MS"/>
+              </a:rPr>
+              <a:t>▍以下照著唸</a:t>
+            </a:r>
+            <a:r>
+              <a:rPr sz="1000" lang="zh-TW" dirty="0">
+                <a:solidFill>
+                  <a:srgbClr val="000000"/>
+                </a:solidFill>
+                <a:latin typeface="Arial Unicode MS"/>
+                <a:ea typeface="Arial Unicode MS"/>
+                <a:cs typeface="Arial Unicode MS"/>
+              </a:rPr>
+              <a:t>
+</a:t>
+            </a:r>
+          </a:p>
+          <a:p>
+            <a:pPr algn="l">
+              <a:lnSpc>
+                <a:spcPct val="115000"/>
+              </a:lnSpc>
+              <a:spcAft>
+                <a:spcPts val="500"/>
+              </a:spcAft>
+            </a:pPr>
+            <a:r>
+              <a:rPr sz="1000" lang="zh-TW" dirty="0">
                 <a:solidFill>
                   <a:srgbClr val="000000"/>
                 </a:solidFill>
@@ -5612,11 +7757,11 @@
                 <a:spcPct val="115000"/>
               </a:lnSpc>
               <a:spcAft>
-                <a:spcPts val="600"/>
-              </a:spcAft>
-            </a:pPr>
-            <a:r>
-              <a:rPr sz="1200" b="1" lang="zh-TW" dirty="0">
+                <a:spcPts val="500"/>
+              </a:spcAft>
+            </a:pPr>
+            <a:r>
+              <a:rPr sz="1000" b="1" lang="zh-TW" dirty="0">
                 <a:solidFill>
                   <a:srgbClr val="000000"/>
                 </a:solidFill>
@@ -5627,7 +7772,7 @@
               <a:t>六個預設按鈕</a:t>
             </a:r>
             <a:r>
-              <a:rPr sz="1200" lang="zh-TW" dirty="0">
+              <a:rPr sz="1000" lang="zh-TW" dirty="0">
                 <a:solidFill>
                   <a:srgbClr val="000000"/>
                 </a:solidFill>
@@ -5638,7 +7783,7 @@
               <a:t>——「河內尖峰」「雨夜」——那就是</a:t>
             </a:r>
             <a:r>
-              <a:rPr sz="1200" b="1" lang="zh-TW" dirty="0">
+              <a:rPr sz="1000" b="1" lang="zh-TW" dirty="0">
                 <a:solidFill>
                   <a:srgbClr val="000000"/>
                 </a:solidFill>
@@ -5649,7 +7794,7 @@
               <a:t>功能場景</a:t>
             </a:r>
             <a:r>
-              <a:rPr sz="1200" lang="zh-TW" dirty="0">
+              <a:rPr sz="1000" lang="zh-TW" dirty="0">
                 <a:solidFill>
                   <a:srgbClr val="000000"/>
                 </a:solidFill>
@@ -5667,11 +7812,11 @@
                 <a:spcPct val="115000"/>
               </a:lnSpc>
               <a:spcAft>
-                <a:spcPts val="600"/>
-              </a:spcAft>
-            </a:pPr>
-            <a:r>
-              <a:rPr sz="1200" b="1" lang="zh-TW" dirty="0">
+                <a:spcPts val="500"/>
+              </a:spcAft>
+            </a:pPr>
+            <a:r>
+              <a:rPr sz="1000" b="1" lang="zh-TW" dirty="0">
                 <a:solidFill>
                   <a:srgbClr val="000000"/>
                 </a:solidFill>
@@ -5682,7 +7827,7 @@
               <a:t>滑桿可以拉的範圍</a:t>
             </a:r>
             <a:r>
-              <a:rPr sz="1200" lang="zh-TW" dirty="0">
+              <a:rPr sz="1000" lang="zh-TW" dirty="0">
                 <a:solidFill>
                   <a:srgbClr val="000000"/>
                 </a:solidFill>
@@ -5693,7 +7838,7 @@
               <a:t>——射線三到六十、長度十到一百二十、張角二十到一百八十——那就是</a:t>
             </a:r>
             <a:r>
-              <a:rPr sz="1200" b="1" lang="zh-TW" dirty="0">
+              <a:rPr sz="1000" b="1" lang="zh-TW" dirty="0">
                 <a:solidFill>
                   <a:srgbClr val="000000"/>
                 </a:solidFill>
@@ -5704,7 +7849,7 @@
               <a:t>邏輯場景</a:t>
             </a:r>
             <a:r>
-              <a:rPr sz="1200" lang="zh-TW" dirty="0">
+              <a:rPr sz="1000" lang="zh-TW" dirty="0">
                 <a:solidFill>
                   <a:srgbClr val="000000"/>
                 </a:solidFill>
@@ -5722,11 +7867,11 @@
                 <a:spcPct val="115000"/>
               </a:lnSpc>
               <a:spcAft>
-                <a:spcPts val="600"/>
-              </a:spcAft>
-            </a:pPr>
-            <a:r>
-              <a:rPr sz="1200" b="1" lang="zh-TW" dirty="0">
+                <a:spcPts val="500"/>
+              </a:spcAft>
+            </a:pPr>
+            <a:r>
+              <a:rPr sz="1000" b="1" lang="zh-TW" dirty="0">
                 <a:solidFill>
                   <a:srgbClr val="000000"/>
                 </a:solidFill>
@@ -5737,7 +7882,7 @@
               <a:t>滑桿停在某一個位置</a:t>
             </a:r>
             <a:r>
-              <a:rPr sz="1200" lang="zh-TW" dirty="0">
+              <a:rPr sz="1000" lang="zh-TW" dirty="0">
                 <a:solidFill>
                   <a:srgbClr val="000000"/>
                 </a:solidFill>
@@ -5748,7 +7893,7 @@
               <a:t>——十二條、四十公尺、九十度——那就是</a:t>
             </a:r>
             <a:r>
-              <a:rPr sz="1200" b="1" lang="zh-TW" dirty="0">
+              <a:rPr sz="1000" b="1" lang="zh-TW" dirty="0">
                 <a:solidFill>
                   <a:srgbClr val="000000"/>
                 </a:solidFill>
@@ -5759,7 +7904,7 @@
               <a:t>具體場景</a:t>
             </a:r>
             <a:r>
-              <a:rPr sz="1200" lang="zh-TW" dirty="0">
+              <a:rPr sz="1000" lang="zh-TW" dirty="0">
                 <a:solidFill>
                   <a:srgbClr val="000000"/>
                 </a:solidFill>
@@ -5777,11 +7922,11 @@
                 <a:spcPct val="115000"/>
               </a:lnSpc>
               <a:spcAft>
-                <a:spcPts val="600"/>
-              </a:spcAft>
-            </a:pPr>
-            <a:r>
-              <a:rPr sz="1200" lang="zh-TW" dirty="0">
+                <a:spcPts val="500"/>
+              </a:spcAft>
+            </a:pPr>
+            <a:r>
+              <a:rPr sz="1000" lang="zh-TW" dirty="0">
                 <a:solidFill>
                   <a:srgbClr val="000000"/>
                 </a:solidFill>
@@ -5799,11 +7944,11 @@
                 <a:spcPct val="115000"/>
               </a:lnSpc>
               <a:spcAft>
-                <a:spcPts val="600"/>
-              </a:spcAft>
-            </a:pPr>
-            <a:r>
-              <a:rPr sz="1200" lang="zh-TW" dirty="0">
+                <a:spcPts val="500"/>
+              </a:spcAft>
+            </a:pPr>
+            <a:r>
+              <a:rPr sz="1000" lang="zh-TW" dirty="0">
                 <a:solidFill>
                   <a:srgbClr val="000000"/>
                 </a:solidFill>
@@ -5814,7 +7959,7 @@
               <a:t>所以第三節的任務二，各位要做的事情有一個正式名稱，叫</a:t>
             </a:r>
             <a:r>
-              <a:rPr sz="1200" b="1" lang="zh-TW" dirty="0">
+              <a:rPr sz="1000" b="1" lang="zh-TW" dirty="0">
                 <a:solidFill>
                   <a:srgbClr val="000000"/>
                 </a:solidFill>
@@ -5825,7 +7970,7 @@
               <a:t>掃參數</a:t>
             </a:r>
             <a:r>
-              <a:rPr sz="1200" lang="zh-TW" dirty="0">
+              <a:rPr sz="1000" lang="zh-TW" dirty="0">
                 <a:solidFill>
                   <a:srgbClr val="000000"/>
                 </a:solidFill>
@@ -5843,11 +7988,11 @@
                 <a:spcPct val="115000"/>
               </a:lnSpc>
               <a:spcAft>
-                <a:spcPts val="600"/>
-              </a:spcAft>
-            </a:pPr>
-            <a:r>
-              <a:rPr sz="1200" lang="zh-TW" dirty="0">
+                <a:spcPts val="500"/>
+              </a:spcAft>
+            </a:pPr>
+            <a:r>
+              <a:rPr sz="1000" lang="zh-TW" dirty="0">
                 <a:solidFill>
                   <a:srgbClr val="000000"/>
                 </a:solidFill>
@@ -5858,7 +8003,7 @@
               <a:t>而各組找到的那組數字合起來，會落在某一個範圍——</a:t>
             </a:r>
             <a:r>
-              <a:rPr sz="1200" b="1" lang="zh-TW" dirty="0">
+              <a:rPr sz="1000" b="1" lang="zh-TW" dirty="0">
                 <a:solidFill>
                   <a:srgbClr val="000000"/>
                 </a:solidFill>
@@ -5969,6 +8114,149 @@
         <p:txBody>
           <a:bodyPr vert="horz" wrap="square" anchor="t" lIns="91440" rIns="91440" tIns="45720" bIns="45720"/>
           <a:lstStyle/>
+          <a:p>
+            <a:pPr algn="l">
+              <a:lnSpc>
+                <a:spcPct val="115000"/>
+              </a:lnSpc>
+              <a:spcAft>
+                <a:spcPts val="500"/>
+              </a:spcAft>
+            </a:pPr>
+            <a:r>
+              <a:rPr sz="1000" b="1" lang="zh-TW" dirty="0">
+                <a:solidFill>
+                  <a:srgbClr val="000000"/>
+                </a:solidFill>
+                <a:latin typeface="Arial Unicode MS"/>
+                <a:ea typeface="Arial Unicode MS"/>
+                <a:cs typeface="Arial Unicode MS"/>
+              </a:rPr>
+              <a:t>▍這一張要做什麼</a:t>
+            </a:r>
+            <a:r>
+              <a:rPr sz="1000" lang="zh-TW" dirty="0">
+                <a:solidFill>
+                  <a:srgbClr val="000000"/>
+                </a:solidFill>
+                <a:latin typeface="Arial Unicode MS"/>
+                <a:ea typeface="Arial Unicode MS"/>
+                <a:cs typeface="Arial Unicode MS"/>
+              </a:rPr>
+              <a:t>
+</a:t>
+            </a:r>
+          </a:p>
+          <a:p>
+            <a:pPr algn="l">
+              <a:lnSpc>
+                <a:spcPct val="115000"/>
+              </a:lnSpc>
+              <a:spcAft>
+                <a:spcPts val="500"/>
+              </a:spcAft>
+            </a:pPr>
+            <a:r>
+              <a:rPr sz="1000" lang="zh-TW" dirty="0">
+                <a:solidFill>
+                  <a:srgbClr val="000000"/>
+                </a:solidFill>
+                <a:latin typeface="Arial Unicode MS"/>
+                <a:ea typeface="Arial Unicode MS"/>
+                <a:cs typeface="Arial Unicode MS"/>
+              </a:rPr>
+              <a:t>用 Euro NCAP 的影片看一個具體場景在真實世界長什麼樣。
+</a:t>
+            </a:r>
+          </a:p>
+          <a:p>
+            <a:pPr algn="l">
+              <a:lnSpc>
+                <a:spcPct val="115000"/>
+              </a:lnSpc>
+              <a:spcAft>
+                <a:spcPts val="500"/>
+              </a:spcAft>
+            </a:pPr>
+            <a:r>
+              <a:rPr sz="1000" b="1" lang="zh-TW" dirty="0">
+                <a:solidFill>
+                  <a:srgbClr val="000000"/>
+                </a:solidFill>
+                <a:latin typeface="Arial Unicode MS"/>
+                <a:ea typeface="Arial Unicode MS"/>
+                <a:cs typeface="Arial Unicode MS"/>
+              </a:rPr>
+              <a:t>▍畫面上圈這裡</a:t>
+            </a:r>
+            <a:r>
+              <a:rPr sz="1000" lang="zh-TW" dirty="0">
+                <a:solidFill>
+                  <a:srgbClr val="000000"/>
+                </a:solidFill>
+                <a:latin typeface="Arial Unicode MS"/>
+                <a:ea typeface="Arial Unicode MS"/>
+                <a:cs typeface="Arial Unicode MS"/>
+              </a:rPr>
+              <a:t>
+</a:t>
+            </a:r>
+          </a:p>
+          <a:p>
+            <a:pPr algn="l">
+              <a:lnSpc>
+                <a:spcPct val="115000"/>
+              </a:lnSpc>
+              <a:spcAft>
+                <a:spcPts val="500"/>
+              </a:spcAft>
+            </a:pPr>
+            <a:r>
+              <a:rPr sz="1000" lang="zh-TW" dirty="0">
+                <a:solidFill>
+                  <a:srgbClr val="000000"/>
+                </a:solidFill>
+                <a:latin typeface="Arial Unicode MS"/>
+                <a:ea typeface="Arial Unicode MS"/>
+                <a:cs typeface="Arial Unicode MS"/>
+              </a:rPr>
+              <a:t>播之前圈右邊的看點，特別是「每一次都一樣」那一條。
+</a:t>
+            </a:r>
+          </a:p>
+          <a:p>
+            <a:pPr algn="l">
+              <a:lnSpc>
+                <a:spcPct val="115000"/>
+              </a:lnSpc>
+              <a:spcAft>
+                <a:spcPts val="500"/>
+              </a:spcAft>
+            </a:pPr>
+            <a:r>
+              <a:rPr sz="1000" b="1" lang="zh-TW" dirty="0">
+                <a:solidFill>
+                  <a:srgbClr val="000000"/>
+                </a:solidFill>
+                <a:latin typeface="Arial Unicode MS"/>
+                <a:ea typeface="Arial Unicode MS"/>
+                <a:cs typeface="Arial Unicode MS"/>
+              </a:rPr>
+              <a:t>▍以下照著唸</a:t>
+            </a:r>
+            <a:r>
+              <a:rPr sz="1000" lang="zh-TW" dirty="0">
+                <a:solidFill>
+                  <a:srgbClr val="000000"/>
+                </a:solidFill>
+                <a:latin typeface="Arial Unicode MS"/>
+                <a:ea typeface="Arial Unicode MS"/>
+                <a:cs typeface="Arial Unicode MS"/>
+              </a:rPr>
+              <a:t>
+</a:t>
+            </a:r>
+          </a:p>
           <a:p>
             <a:pPr algn="l">
               <a:lnSpc>

--- a/第四週(10-01)/第四週_第2節_簡報.pptx
+++ b/第四週(10-01)/第四週_第2節_簡報.pptx
@@ -9702,14 +9702,16 @@
         </p:nvSpPr>
         <p:spPr>
           <a:xfrm>
-            <a:off x="1826657" y="1445261"/>
-            <a:ext cx="990124" cy="270034"/>
-          </a:xfrm>
-          <a:prstGeom prst="triangle">
-            <a:avLst/>
+            <a:off x="1583917" y="1167243"/>
+            <a:ext cx="1475604" cy="220491"/>
+          </a:xfrm>
+          <a:prstGeom prst="roundRect">
+            <a:avLst>
+              <a:gd name="adj" fmla="val 16000"/>
+            </a:avLst>
           </a:prstGeom>
           <a:solidFill>
-            <a:srgbClr val="4FA8FF"/>
+            <a:srgbClr val="FFFFFF"/>
           </a:solidFill>
           <a:ln/>
         </p:spPr>
@@ -9722,39 +9724,60 @@
         </p:nvSpPr>
         <p:spPr>
           <a:xfrm>
-            <a:off x="1826657" y="1737798"/>
-            <a:ext cx="990124" cy="78760"/>
+            <a:off x="1583917" y="1167243"/>
+            <a:ext cx="1475604" cy="220491"/>
+          </a:xfrm>
+          <a:prstGeom prst="roundRect">
+            <a:avLst>
+              <a:gd name="adj" fmla="val 9877"/>
+            </a:avLst>
+          </a:prstGeom>
+          <a:ln w="9525">
+            <a:solidFill>
+              <a:srgbClr val="D6DEE6"/>
+            </a:solidFill>
+            <a:prstDash val="solid"/>
+          </a:ln>
+        </p:spPr>
+      </p:sp>
+      <p:sp>
+        <p:nvSpPr>
+          <p:cNvPr id="6" name="Text 4"/>
+          <p:cNvSpPr txBox="1"/>
+          <p:nvPr/>
+        </p:nvSpPr>
+        <p:spPr>
+          <a:xfrm>
+            <a:off x="1583917" y="1167243"/>
+            <a:ext cx="1475604" cy="220491"/>
           </a:xfrm>
           <a:prstGeom prst="rect">
             <a:avLst/>
           </a:prstGeom>
-          <a:solidFill>
-            <a:srgbClr val="4FA8FF"/>
-          </a:solidFill>
-          <a:ln/>
-        </p:spPr>
-      </p:sp>
-      <p:sp>
-        <p:nvSpPr>
-          <p:cNvPr id="6" name="Shape 4"/>
-          <p:cNvSpPr/>
-          <p:nvPr/>
-        </p:nvSpPr>
-        <p:spPr>
-          <a:xfrm>
-            <a:off x="1939171" y="1839060"/>
-            <a:ext cx="112514" cy="360045"/>
-          </a:xfrm>
-          <a:prstGeom prst="rect">
-            <a:avLst/>
-          </a:prstGeom>
-          <a:solidFill>
-            <a:srgbClr val="4FA8FF">
-              <a:alpha val="75000"/>
-            </a:srgbClr>
-          </a:solidFill>
-          <a:ln/>
-        </p:spPr>
+          <a:noFill/>
+          <a:ln/>
+        </p:spPr>
+        <p:txBody>
+          <a:bodyPr wrap="square" lIns="0" tIns="0" rIns="0" bIns="0" rtlCol="0" anchor="ctr"/>
+          <a:lstStyle/>
+          <a:p>
+            <a:pPr algn="ctr" indent="0" marL="0">
+              <a:buNone/>
+            </a:pPr>
+            <a:r>
+              <a:rPr lang="en-US" sz="520" b="1" dirty="0">
+                <a:solidFill>
+                  <a:srgbClr val="4FA8FF"/>
+                </a:solidFill>
+                <a:latin typeface="Arial" pitchFamily="34" charset="0"/>
+                <a:ea typeface="Arial" pitchFamily="34" charset="-122"/>
+                <a:cs typeface="Arial" pitchFamily="34" charset="-120"/>
+              </a:rPr>
+              <a:t>自動緊急煞車　對車</a:t>
+            </a:r>
+            <a:endParaRPr lang="en-US" sz="520" dirty="0"/>
+          </a:p>
+        </p:txBody>
       </p:sp>
       <p:sp>
         <p:nvSpPr>
@@ -9764,16 +9787,16 @@
         </p:nvSpPr>
         <p:spPr>
           <a:xfrm>
-            <a:off x="2164199" y="1839060"/>
-            <a:ext cx="112514" cy="360045"/>
-          </a:xfrm>
-          <a:prstGeom prst="rect">
-            <a:avLst/>
+            <a:off x="1583917" y="1449472"/>
+            <a:ext cx="1475604" cy="220491"/>
+          </a:xfrm>
+          <a:prstGeom prst="roundRect">
+            <a:avLst>
+              <a:gd name="adj" fmla="val 16000"/>
+            </a:avLst>
           </a:prstGeom>
           <a:solidFill>
-            <a:srgbClr val="4FA8FF">
-              <a:alpha val="75000"/>
-            </a:srgbClr>
+            <a:srgbClr val="FFFFFF"/>
           </a:solidFill>
           <a:ln/>
         </p:spPr>
@@ -9786,41 +9809,60 @@
         </p:nvSpPr>
         <p:spPr>
           <a:xfrm>
-            <a:off x="2389227" y="1839060"/>
-            <a:ext cx="112514" cy="360045"/>
+            <a:off x="1583917" y="1449472"/>
+            <a:ext cx="1475604" cy="220491"/>
+          </a:xfrm>
+          <a:prstGeom prst="roundRect">
+            <a:avLst>
+              <a:gd name="adj" fmla="val 9877"/>
+            </a:avLst>
+          </a:prstGeom>
+          <a:ln w="9525">
+            <a:solidFill>
+              <a:srgbClr val="D6DEE6"/>
+            </a:solidFill>
+            <a:prstDash val="solid"/>
+          </a:ln>
+        </p:spPr>
+      </p:sp>
+      <p:sp>
+        <p:nvSpPr>
+          <p:cNvPr id="9" name="Text 7"/>
+          <p:cNvSpPr txBox="1"/>
+          <p:nvPr/>
+        </p:nvSpPr>
+        <p:spPr>
+          <a:xfrm>
+            <a:off x="1583917" y="1449472"/>
+            <a:ext cx="1475604" cy="220491"/>
           </a:xfrm>
           <a:prstGeom prst="rect">
             <a:avLst/>
           </a:prstGeom>
-          <a:solidFill>
-            <a:srgbClr val="4FA8FF">
-              <a:alpha val="75000"/>
-            </a:srgbClr>
-          </a:solidFill>
-          <a:ln/>
-        </p:spPr>
-      </p:sp>
-      <p:sp>
-        <p:nvSpPr>
-          <p:cNvPr id="9" name="Shape 7"/>
-          <p:cNvSpPr/>
-          <p:nvPr/>
-        </p:nvSpPr>
-        <p:spPr>
-          <a:xfrm>
-            <a:off x="2614255" y="1839060"/>
-            <a:ext cx="112514" cy="360045"/>
-          </a:xfrm>
-          <a:prstGeom prst="rect">
-            <a:avLst/>
-          </a:prstGeom>
-          <a:solidFill>
-            <a:srgbClr val="4FA8FF">
-              <a:alpha val="75000"/>
-            </a:srgbClr>
-          </a:solidFill>
-          <a:ln/>
-        </p:spPr>
+          <a:noFill/>
+          <a:ln/>
+        </p:spPr>
+        <p:txBody>
+          <a:bodyPr wrap="square" lIns="0" tIns="0" rIns="0" bIns="0" rtlCol="0" anchor="ctr"/>
+          <a:lstStyle/>
+          <a:p>
+            <a:pPr algn="ctr" indent="0" marL="0">
+              <a:buNone/>
+            </a:pPr>
+            <a:r>
+              <a:rPr lang="en-US" sz="520" b="1" dirty="0">
+                <a:solidFill>
+                  <a:srgbClr val="4FA8FF"/>
+                </a:solidFill>
+                <a:latin typeface="Arial" pitchFamily="34" charset="0"/>
+                <a:ea typeface="Arial" pitchFamily="34" charset="-122"/>
+                <a:cs typeface="Arial" pitchFamily="34" charset="-120"/>
+              </a:rPr>
+              <a:t>自動緊急煞車　對行人</a:t>
+            </a:r>
+            <a:endParaRPr lang="en-US" sz="520" dirty="0"/>
+          </a:p>
+        </p:txBody>
       </p:sp>
       <p:sp>
         <p:nvSpPr>
@@ -9830,21 +9872,171 @@
         </p:nvSpPr>
         <p:spPr>
           <a:xfrm>
-            <a:off x="1804154" y="2210357"/>
-            <a:ext cx="1035129" cy="101263"/>
+            <a:off x="1583917" y="1731701"/>
+            <a:ext cx="1475604" cy="220491"/>
+          </a:xfrm>
+          <a:prstGeom prst="roundRect">
+            <a:avLst>
+              <a:gd name="adj" fmla="val 16000"/>
+            </a:avLst>
+          </a:prstGeom>
+          <a:solidFill>
+            <a:srgbClr val="FFFFFF"/>
+          </a:solidFill>
+          <a:ln/>
+        </p:spPr>
+      </p:sp>
+      <p:sp>
+        <p:nvSpPr>
+          <p:cNvPr id="11" name="Shape 9"/>
+          <p:cNvSpPr/>
+          <p:nvPr/>
+        </p:nvSpPr>
+        <p:spPr>
+          <a:xfrm>
+            <a:off x="1583917" y="1731701"/>
+            <a:ext cx="1475604" cy="220491"/>
+          </a:xfrm>
+          <a:prstGeom prst="roundRect">
+            <a:avLst>
+              <a:gd name="adj" fmla="val 9877"/>
+            </a:avLst>
+          </a:prstGeom>
+          <a:ln w="9525">
+            <a:solidFill>
+              <a:srgbClr val="D6DEE6"/>
+            </a:solidFill>
+            <a:prstDash val="solid"/>
+          </a:ln>
+        </p:spPr>
+      </p:sp>
+      <p:sp>
+        <p:nvSpPr>
+          <p:cNvPr id="12" name="Text 10"/>
+          <p:cNvSpPr txBox="1"/>
+          <p:nvPr/>
+        </p:nvSpPr>
+        <p:spPr>
+          <a:xfrm>
+            <a:off x="1583917" y="1731701"/>
+            <a:ext cx="1475604" cy="220491"/>
           </a:xfrm>
           <a:prstGeom prst="rect">
             <a:avLst/>
           </a:prstGeom>
+          <a:noFill/>
+          <a:ln/>
+        </p:spPr>
+        <p:txBody>
+          <a:bodyPr wrap="square" lIns="0" tIns="0" rIns="0" bIns="0" rtlCol="0" anchor="ctr"/>
+          <a:lstStyle/>
+          <a:p>
+            <a:pPr algn="ctr" indent="0" marL="0">
+              <a:buNone/>
+            </a:pPr>
+            <a:r>
+              <a:rPr lang="en-US" sz="520" b="1" dirty="0">
+                <a:solidFill>
+                  <a:srgbClr val="4FA8FF"/>
+                </a:solidFill>
+                <a:latin typeface="Arial" pitchFamily="34" charset="0"/>
+                <a:ea typeface="Arial" pitchFamily="34" charset="-122"/>
+                <a:cs typeface="Arial" pitchFamily="34" charset="-120"/>
+              </a:rPr>
+              <a:t>自動緊急煞車　對機車</a:t>
+            </a:r>
+            <a:endParaRPr lang="en-US" sz="520" dirty="0"/>
+          </a:p>
+        </p:txBody>
+      </p:sp>
+      <p:sp>
+        <p:nvSpPr>
+          <p:cNvPr id="13" name="Shape 11"/>
+          <p:cNvSpPr/>
+          <p:nvPr/>
+        </p:nvSpPr>
+        <p:spPr>
+          <a:xfrm>
+            <a:off x="2321719" y="2049208"/>
+            <a:ext cx="1" cy="141114"/>
+          </a:xfrm>
+          <a:prstGeom prst="line">
+            <a:avLst/>
+          </a:prstGeom>
+          <a:noFill/>
+          <a:ln w="15240">
+            <a:solidFill>
+              <a:srgbClr val="8FA3B5"/>
+            </a:solidFill>
+            <a:prstDash val="solid"/>
+            <a:tailEnd type="triangle"/>
+          </a:ln>
+        </p:spPr>
+      </p:sp>
+      <p:sp>
+        <p:nvSpPr>
+          <p:cNvPr id="14" name="Shape 12"/>
+          <p:cNvSpPr/>
+          <p:nvPr/>
+        </p:nvSpPr>
+        <p:spPr>
+          <a:xfrm>
+            <a:off x="1794718" y="2225600"/>
+            <a:ext cx="1054003" cy="352786"/>
+          </a:xfrm>
+          <a:prstGeom prst="roundRect">
+            <a:avLst>
+              <a:gd name="adj" fmla="val 20000"/>
+            </a:avLst>
+          </a:prstGeom>
           <a:solidFill>
-            <a:srgbClr val="4FA8FF"/>
+            <a:srgbClr val="2E9E6B"/>
           </a:solidFill>
           <a:ln/>
         </p:spPr>
       </p:sp>
       <p:sp>
         <p:nvSpPr>
-          <p:cNvPr id="11" name="Text 9"/>
+          <p:cNvPr id="15" name="Text 13"/>
+          <p:cNvSpPr txBox="1"/>
+          <p:nvPr/>
+        </p:nvSpPr>
+        <p:spPr>
+          <a:xfrm>
+            <a:off x="1794718" y="2225600"/>
+            <a:ext cx="1054003" cy="352786"/>
+          </a:xfrm>
+          <a:prstGeom prst="rect">
+            <a:avLst/>
+          </a:prstGeom>
+          <a:noFill/>
+          <a:ln/>
+        </p:spPr>
+        <p:txBody>
+          <a:bodyPr wrap="square" lIns="0" tIns="0" rIns="0" bIns="0" rtlCol="0" anchor="ctr"/>
+          <a:lstStyle/>
+          <a:p>
+            <a:pPr algn="ctr" indent="0" marL="0">
+              <a:buNone/>
+            </a:pPr>
+            <a:r>
+              <a:rPr lang="en-US" sz="600" b="1" dirty="0">
+                <a:solidFill>
+                  <a:srgbClr val="FFFFFF"/>
+                </a:solidFill>
+                <a:latin typeface="Arial" pitchFamily="34" charset="0"/>
+                <a:ea typeface="Arial" pitchFamily="34" charset="-122"/>
+                <a:cs typeface="Arial" pitchFamily="34" charset="-120"/>
+              </a:rPr>
+              <a:t>全部通過才准賣</a:t>
+            </a:r>
+            <a:endParaRPr lang="en-US" sz="600" dirty="0"/>
+          </a:p>
+        </p:txBody>
+      </p:sp>
+      <p:sp>
+        <p:nvSpPr>
+          <p:cNvPr id="16" name="Text 14"/>
           <p:cNvSpPr txBox="1"/>
           <p:nvPr/>
         </p:nvSpPr>
@@ -9906,7 +10098,7 @@
       </p:sp>
       <p:sp>
         <p:nvSpPr>
-          <p:cNvPr id="12" name="Text 10"/>
+          <p:cNvPr id="17" name="Text 15"/>
           <p:cNvSpPr txBox="1"/>
           <p:nvPr/>
         </p:nvSpPr>
@@ -9968,7 +10160,7 @@
       </p:sp>
       <p:sp>
         <p:nvSpPr>
-          <p:cNvPr id="13" name="Shape 11"/>
+          <p:cNvPr id="18" name="Shape 16"/>
           <p:cNvSpPr/>
           <p:nvPr/>
         </p:nvSpPr>
@@ -9995,7 +10187,7 @@
       </p:sp>
       <p:sp>
         <p:nvSpPr>
-          <p:cNvPr id="14" name="Text 12"/>
+          <p:cNvPr id="19" name="Text 17"/>
           <p:cNvSpPr txBox="1"/>
           <p:nvPr/>
         </p:nvSpPr>
@@ -10057,7 +10249,7 @@
       </p:sp>
       <p:pic>
         <p:nvPicPr>
-          <p:cNvPr id="16" name="Image 0" descr="/Users/tsengchenghsun/Class/carClass/Claude outputs/第四週(10-1)/src/logo.png">    </p:cNvPr>
+          <p:cNvPr id="21" name="Image 0" descr="/Users/tsengchenghsun/Class/carClass/Claude outputs/第四週(10-1)/src/logo.png">    </p:cNvPr>
           <p:cNvPicPr>
             <a:picLocks noChangeAspect="1"/>
           </p:cNvPicPr>
@@ -10081,7 +10273,7 @@
       </p:pic>
       <p:sp>
         <p:nvSpPr>
-          <p:cNvPr id="17" name="Text 13"/>
+          <p:cNvPr id="22" name="Text 18"/>
           <p:cNvSpPr txBox="1"/>
           <p:nvPr/>
         </p:nvSpPr>
@@ -10120,7 +10312,7 @@
       </p:sp>
       <p:sp>
         <p:nvSpPr>
-          <p:cNvPr id="18" name="Text 14"/>
+          <p:cNvPr id="23" name="Text 19"/>
           <p:cNvSpPr txBox="1"/>
           <p:nvPr/>
         </p:nvSpPr>
@@ -10256,11 +10448,356 @@
         </p:nvSpPr>
         <p:spPr>
           <a:xfrm>
-            <a:off x="1804154" y="1422758"/>
-            <a:ext cx="1035129" cy="900113"/>
-          </a:xfrm>
-          <a:prstGeom prst="triangle">
-            <a:avLst/>
+            <a:off x="1566350" y="1096686"/>
+            <a:ext cx="1510737" cy="740851"/>
+          </a:xfrm>
+          <a:prstGeom prst="roundRect">
+            <a:avLst>
+              <a:gd name="adj" fmla="val 7143"/>
+            </a:avLst>
+          </a:prstGeom>
+          <a:solidFill>
+            <a:srgbClr val="FFFFFF"/>
+          </a:solidFill>
+          <a:ln/>
+        </p:spPr>
+      </p:sp>
+      <p:sp>
+        <p:nvSpPr>
+          <p:cNvPr id="5" name="Shape 3"/>
+          <p:cNvSpPr/>
+          <p:nvPr/>
+        </p:nvSpPr>
+        <p:spPr>
+          <a:xfrm>
+            <a:off x="1566350" y="1096686"/>
+            <a:ext cx="1510737" cy="740851"/>
+          </a:xfrm>
+          <a:prstGeom prst="roundRect">
+            <a:avLst>
+              <a:gd name="adj" fmla="val 3919"/>
+            </a:avLst>
+          </a:prstGeom>
+          <a:ln w="12700">
+            <a:solidFill>
+              <a:srgbClr val="D9463E"/>
+            </a:solidFill>
+            <a:prstDash val="solid"/>
+          </a:ln>
+        </p:spPr>
+      </p:sp>
+      <p:sp>
+        <p:nvSpPr>
+          <p:cNvPr id="6" name="Text 4"/>
+          <p:cNvSpPr txBox="1"/>
+          <p:nvPr/>
+        </p:nvSpPr>
+        <p:spPr>
+          <a:xfrm>
+            <a:off x="1566350" y="1131964"/>
+            <a:ext cx="1510737" cy="194032"/>
+          </a:xfrm>
+          <a:prstGeom prst="rect">
+            <a:avLst/>
+          </a:prstGeom>
+          <a:noFill/>
+          <a:ln/>
+        </p:spPr>
+        <p:txBody>
+          <a:bodyPr wrap="square" lIns="0" tIns="0" rIns="0" bIns="0" rtlCol="0" anchor="ctr"/>
+          <a:lstStyle/>
+          <a:p>
+            <a:pPr algn="ctr" indent="0" marL="0">
+              <a:buNone/>
+            </a:pPr>
+            <a:r>
+              <a:rPr lang="en-US" sz="560" b="1" dirty="0">
+                <a:solidFill>
+                  <a:srgbClr val="D9463E"/>
+                </a:solidFill>
+                <a:latin typeface="Arial" pitchFamily="34" charset="0"/>
+                <a:ea typeface="Arial" pitchFamily="34" charset="-122"/>
+                <a:cs typeface="Arial" pitchFamily="34" charset="-120"/>
+              </a:rPr>
+              <a:t>事故紀錄 #4127</a:t>
+            </a:r>
+            <a:endParaRPr lang="en-US" sz="560" dirty="0"/>
+          </a:p>
+        </p:txBody>
+      </p:sp>
+      <p:sp>
+        <p:nvSpPr>
+          <p:cNvPr id="7" name="Text 5"/>
+          <p:cNvSpPr txBox="1"/>
+          <p:nvPr/>
+        </p:nvSpPr>
+        <p:spPr>
+          <a:xfrm>
+            <a:off x="1656994" y="1325996"/>
+            <a:ext cx="543866" cy="158753"/>
+          </a:xfrm>
+          <a:prstGeom prst="rect">
+            <a:avLst/>
+          </a:prstGeom>
+          <a:noFill/>
+          <a:ln/>
+        </p:spPr>
+        <p:txBody>
+          <a:bodyPr wrap="square" lIns="0" tIns="0" rIns="0" bIns="0" rtlCol="0" anchor="ctr"/>
+          <a:lstStyle/>
+          <a:p>
+            <a:pPr algn="l" indent="0" marL="0">
+              <a:buNone/>
+            </a:pPr>
+            <a:r>
+              <a:rPr lang="en-US" sz="520" b="1" dirty="0">
+                <a:solidFill>
+                  <a:srgbClr val="8FA3B5"/>
+                </a:solidFill>
+                <a:latin typeface="Arial" pitchFamily="34" charset="0"/>
+                <a:ea typeface="Arial" pitchFamily="34" charset="-122"/>
+                <a:cs typeface="Arial" pitchFamily="34" charset="-120"/>
+              </a:rPr>
+              <a:t>車速</a:t>
+            </a:r>
+            <a:endParaRPr lang="en-US" sz="520" dirty="0"/>
+          </a:p>
+        </p:txBody>
+      </p:sp>
+      <p:sp>
+        <p:nvSpPr>
+          <p:cNvPr id="8" name="Text 6"/>
+          <p:cNvSpPr txBox="1"/>
+          <p:nvPr/>
+        </p:nvSpPr>
+        <p:spPr>
+          <a:xfrm>
+            <a:off x="2200860" y="1325996"/>
+            <a:ext cx="815798" cy="158753"/>
+          </a:xfrm>
+          <a:prstGeom prst="rect">
+            <a:avLst/>
+          </a:prstGeom>
+          <a:noFill/>
+          <a:ln/>
+        </p:spPr>
+        <p:txBody>
+          <a:bodyPr wrap="square" lIns="0" tIns="0" rIns="0" bIns="0" rtlCol="0" anchor="ctr"/>
+          <a:lstStyle/>
+          <a:p>
+            <a:pPr algn="l" indent="0" marL="0">
+              <a:buNone/>
+            </a:pPr>
+            <a:r>
+              <a:rPr lang="en-US" sz="520" b="1" dirty="0">
+                <a:solidFill>
+                  <a:srgbClr val="D9463E"/>
+                </a:solidFill>
+                <a:latin typeface="Arial" pitchFamily="34" charset="0"/>
+                <a:ea typeface="Arial" pitchFamily="34" charset="-122"/>
+                <a:cs typeface="Arial" pitchFamily="34" charset="-120"/>
+              </a:rPr>
+              <a:t>48 km/h</a:t>
+            </a:r>
+            <a:endParaRPr lang="en-US" sz="520" dirty="0"/>
+          </a:p>
+        </p:txBody>
+      </p:sp>
+      <p:sp>
+        <p:nvSpPr>
+          <p:cNvPr id="9" name="Text 7"/>
+          <p:cNvSpPr txBox="1"/>
+          <p:nvPr/>
+        </p:nvSpPr>
+        <p:spPr>
+          <a:xfrm>
+            <a:off x="1656994" y="1493570"/>
+            <a:ext cx="543866" cy="158753"/>
+          </a:xfrm>
+          <a:prstGeom prst="rect">
+            <a:avLst/>
+          </a:prstGeom>
+          <a:noFill/>
+          <a:ln/>
+        </p:spPr>
+        <p:txBody>
+          <a:bodyPr wrap="square" lIns="0" tIns="0" rIns="0" bIns="0" rtlCol="0" anchor="ctr"/>
+          <a:lstStyle/>
+          <a:p>
+            <a:pPr algn="l" indent="0" marL="0">
+              <a:buNone/>
+            </a:pPr>
+            <a:r>
+              <a:rPr lang="en-US" sz="520" b="1" dirty="0">
+                <a:solidFill>
+                  <a:srgbClr val="8FA3B5"/>
+                </a:solidFill>
+                <a:latin typeface="Arial" pitchFamily="34" charset="0"/>
+                <a:ea typeface="Arial" pitchFamily="34" charset="-122"/>
+                <a:cs typeface="Arial" pitchFamily="34" charset="-120"/>
+              </a:rPr>
+              <a:t>角度</a:t>
+            </a:r>
+            <a:endParaRPr lang="en-US" sz="520" dirty="0"/>
+          </a:p>
+        </p:txBody>
+      </p:sp>
+      <p:sp>
+        <p:nvSpPr>
+          <p:cNvPr id="10" name="Text 8"/>
+          <p:cNvSpPr txBox="1"/>
+          <p:nvPr/>
+        </p:nvSpPr>
+        <p:spPr>
+          <a:xfrm>
+            <a:off x="2200860" y="1493570"/>
+            <a:ext cx="815798" cy="158753"/>
+          </a:xfrm>
+          <a:prstGeom prst="rect">
+            <a:avLst/>
+          </a:prstGeom>
+          <a:noFill/>
+          <a:ln/>
+        </p:spPr>
+        <p:txBody>
+          <a:bodyPr wrap="square" lIns="0" tIns="0" rIns="0" bIns="0" rtlCol="0" anchor="ctr"/>
+          <a:lstStyle/>
+          <a:p>
+            <a:pPr algn="l" indent="0" marL="0">
+              <a:buNone/>
+            </a:pPr>
+            <a:r>
+              <a:rPr lang="en-US" sz="520" b="1" dirty="0">
+                <a:solidFill>
+                  <a:srgbClr val="D9463E"/>
+                </a:solidFill>
+                <a:latin typeface="Arial" pitchFamily="34" charset="0"/>
+                <a:ea typeface="Arial" pitchFamily="34" charset="-122"/>
+                <a:cs typeface="Arial" pitchFamily="34" charset="-120"/>
+              </a:rPr>
+              <a:t>右後 35°</a:t>
+            </a:r>
+            <a:endParaRPr lang="en-US" sz="520" dirty="0"/>
+          </a:p>
+        </p:txBody>
+      </p:sp>
+      <p:sp>
+        <p:nvSpPr>
+          <p:cNvPr id="11" name="Text 9"/>
+          <p:cNvSpPr txBox="1"/>
+          <p:nvPr/>
+        </p:nvSpPr>
+        <p:spPr>
+          <a:xfrm>
+            <a:off x="1656994" y="1661143"/>
+            <a:ext cx="543866" cy="158753"/>
+          </a:xfrm>
+          <a:prstGeom prst="rect">
+            <a:avLst/>
+          </a:prstGeom>
+          <a:noFill/>
+          <a:ln/>
+        </p:spPr>
+        <p:txBody>
+          <a:bodyPr wrap="square" lIns="0" tIns="0" rIns="0" bIns="0" rtlCol="0" anchor="ctr"/>
+          <a:lstStyle/>
+          <a:p>
+            <a:pPr algn="l" indent="0" marL="0">
+              <a:buNone/>
+            </a:pPr>
+            <a:r>
+              <a:rPr lang="en-US" sz="520" b="1" dirty="0">
+                <a:solidFill>
+                  <a:srgbClr val="8FA3B5"/>
+                </a:solidFill>
+                <a:latin typeface="Arial" pitchFamily="34" charset="0"/>
+                <a:ea typeface="Arial" pitchFamily="34" charset="-122"/>
+                <a:cs typeface="Arial" pitchFamily="34" charset="-120"/>
+              </a:rPr>
+              <a:t>視線</a:t>
+            </a:r>
+            <a:endParaRPr lang="en-US" sz="520" dirty="0"/>
+          </a:p>
+        </p:txBody>
+      </p:sp>
+      <p:sp>
+        <p:nvSpPr>
+          <p:cNvPr id="12" name="Text 10"/>
+          <p:cNvSpPr txBox="1"/>
+          <p:nvPr/>
+        </p:nvSpPr>
+        <p:spPr>
+          <a:xfrm>
+            <a:off x="2200860" y="1661143"/>
+            <a:ext cx="815798" cy="158753"/>
+          </a:xfrm>
+          <a:prstGeom prst="rect">
+            <a:avLst/>
+          </a:prstGeom>
+          <a:noFill/>
+          <a:ln/>
+        </p:spPr>
+        <p:txBody>
+          <a:bodyPr wrap="square" lIns="0" tIns="0" rIns="0" bIns="0" rtlCol="0" anchor="ctr"/>
+          <a:lstStyle/>
+          <a:p>
+            <a:pPr algn="l" indent="0" marL="0">
+              <a:buNone/>
+            </a:pPr>
+            <a:r>
+              <a:rPr lang="en-US" sz="520" b="1" dirty="0">
+                <a:solidFill>
+                  <a:srgbClr val="D9463E"/>
+                </a:solidFill>
+                <a:latin typeface="Arial" pitchFamily="34" charset="0"/>
+                <a:ea typeface="Arial" pitchFamily="34" charset="-122"/>
+                <a:cs typeface="Arial" pitchFamily="34" charset="-120"/>
+              </a:rPr>
+              <a:t>被貨車擋住</a:t>
+            </a:r>
+            <a:endParaRPr lang="en-US" sz="520" dirty="0"/>
+          </a:p>
+        </p:txBody>
+      </p:sp>
+      <p:sp>
+        <p:nvSpPr>
+          <p:cNvPr id="13" name="Shape 11"/>
+          <p:cNvSpPr/>
+          <p:nvPr/>
+        </p:nvSpPr>
+        <p:spPr>
+          <a:xfrm>
+            <a:off x="2321719" y="1908093"/>
+            <a:ext cx="1" cy="176393"/>
+          </a:xfrm>
+          <a:prstGeom prst="line">
+            <a:avLst/>
+          </a:prstGeom>
+          <a:noFill/>
+          <a:ln w="15240">
+            <a:solidFill>
+              <a:srgbClr val="8FA3B5"/>
+            </a:solidFill>
+            <a:prstDash val="solid"/>
+            <a:tailEnd type="triangle"/>
+          </a:ln>
+        </p:spPr>
+      </p:sp>
+      <p:sp>
+        <p:nvSpPr>
+          <p:cNvPr id="14" name="Shape 12"/>
+          <p:cNvSpPr/>
+          <p:nvPr/>
+        </p:nvSpPr>
+        <p:spPr>
+          <a:xfrm>
+            <a:off x="1566350" y="2155044"/>
+            <a:ext cx="1510737" cy="458622"/>
+          </a:xfrm>
+          <a:prstGeom prst="roundRect">
+            <a:avLst>
+              <a:gd name="adj" fmla="val 11538"/>
+            </a:avLst>
           </a:prstGeom>
           <a:solidFill>
             <a:srgbClr val="D9463E"/>
@@ -10270,47 +10807,46 @@
       </p:sp>
       <p:sp>
         <p:nvSpPr>
-          <p:cNvPr id="5" name="Shape 3"/>
-          <p:cNvSpPr/>
-          <p:nvPr/>
-        </p:nvSpPr>
-        <p:spPr>
-          <a:xfrm>
-            <a:off x="2276713" y="1737798"/>
-            <a:ext cx="90012" cy="292536"/>
+          <p:cNvPr id="15" name="Text 13"/>
+          <p:cNvSpPr txBox="1"/>
+          <p:nvPr/>
+        </p:nvSpPr>
+        <p:spPr>
+          <a:xfrm>
+            <a:off x="1566350" y="2155044"/>
+            <a:ext cx="1510737" cy="458622"/>
           </a:xfrm>
           <a:prstGeom prst="rect">
             <a:avLst/>
           </a:prstGeom>
-          <a:solidFill>
-            <a:srgbClr val="FFFFFF"/>
-          </a:solidFill>
-          <a:ln/>
-        </p:spPr>
-      </p:sp>
-      <p:sp>
-        <p:nvSpPr>
-          <p:cNvPr id="6" name="Shape 4"/>
-          <p:cNvSpPr/>
-          <p:nvPr/>
-        </p:nvSpPr>
-        <p:spPr>
-          <a:xfrm>
-            <a:off x="2265462" y="2097843"/>
-            <a:ext cx="112514" cy="112514"/>
-          </a:xfrm>
-          <a:prstGeom prst="ellipse">
-            <a:avLst/>
-          </a:prstGeom>
-          <a:solidFill>
-            <a:srgbClr val="FFFFFF"/>
-          </a:solidFill>
-          <a:ln/>
-        </p:spPr>
-      </p:sp>
-      <p:sp>
-        <p:nvSpPr>
-          <p:cNvPr id="7" name="Text 5"/>
+          <a:noFill/>
+          <a:ln/>
+        </p:spPr>
+        <p:txBody>
+          <a:bodyPr wrap="square" lIns="0" tIns="0" rIns="0" bIns="0" rtlCol="0" anchor="ctr"/>
+          <a:lstStyle/>
+          <a:p>
+            <a:pPr algn="ctr" indent="0" marL="0">
+              <a:buNone/>
+            </a:pPr>
+            <a:r>
+              <a:rPr lang="en-US" sz="560" b="1" dirty="0">
+                <a:solidFill>
+                  <a:srgbClr val="FFFFFF"/>
+                </a:solidFill>
+                <a:latin typeface="Arial" pitchFamily="34" charset="0"/>
+                <a:ea typeface="Arial" pitchFamily="34" charset="-122"/>
+                <a:cs typeface="Arial" pitchFamily="34" charset="-120"/>
+              </a:rPr>
+              <a:t>變成一個可以重跑的場景</a:t>
+            </a:r>
+            <a:endParaRPr lang="en-US" sz="560" dirty="0"/>
+          </a:p>
+        </p:txBody>
+      </p:sp>
+      <p:sp>
+        <p:nvSpPr>
+          <p:cNvPr id="16" name="Text 14"/>
           <p:cNvSpPr txBox="1"/>
           <p:nvPr/>
         </p:nvSpPr>
@@ -10372,7 +10908,7 @@
       </p:sp>
       <p:sp>
         <p:nvSpPr>
-          <p:cNvPr id="8" name="Text 6"/>
+          <p:cNvPr id="17" name="Text 15"/>
           <p:cNvSpPr txBox="1"/>
           <p:nvPr/>
         </p:nvSpPr>
@@ -10434,7 +10970,7 @@
       </p:sp>
       <p:sp>
         <p:nvSpPr>
-          <p:cNvPr id="9" name="Shape 7"/>
+          <p:cNvPr id="18" name="Shape 16"/>
           <p:cNvSpPr/>
           <p:nvPr/>
         </p:nvSpPr>
@@ -10461,7 +10997,7 @@
       </p:sp>
       <p:sp>
         <p:nvSpPr>
-          <p:cNvPr id="10" name="Text 8"/>
+          <p:cNvPr id="19" name="Text 17"/>
           <p:cNvSpPr txBox="1"/>
           <p:nvPr/>
         </p:nvSpPr>
@@ -10523,7 +11059,7 @@
       </p:sp>
       <p:pic>
         <p:nvPicPr>
-          <p:cNvPr id="12" name="Image 0" descr="/Users/tsengchenghsun/Class/carClass/Claude outputs/第四週(10-1)/src/logo.png">    </p:cNvPr>
+          <p:cNvPr id="21" name="Image 0" descr="/Users/tsengchenghsun/Class/carClass/Claude outputs/第四週(10-1)/src/logo.png">    </p:cNvPr>
           <p:cNvPicPr>
             <a:picLocks noChangeAspect="1"/>
           </p:cNvPicPr>
@@ -10547,7 +11083,7 @@
       </p:pic>
       <p:sp>
         <p:nvSpPr>
-          <p:cNvPr id="13" name="Text 9"/>
+          <p:cNvPr id="22" name="Text 18"/>
           <p:cNvSpPr txBox="1"/>
           <p:nvPr/>
         </p:nvSpPr>
@@ -10586,7 +11122,7 @@
       </p:sp>
       <p:sp>
         <p:nvSpPr>
-          <p:cNvPr id="14" name="Text 10"/>
+          <p:cNvPr id="23" name="Text 19"/>
           <p:cNvSpPr txBox="1"/>
           <p:nvPr/>
         </p:nvSpPr>
@@ -14452,20 +14988,37 @@
         </p:nvSpPr>
         <p:spPr>
           <a:xfrm>
-            <a:off x="1939171" y="1377753"/>
-            <a:ext cx="765096" cy="990124"/>
+            <a:off x="1548784" y="1273079"/>
+            <a:ext cx="1545870" cy="776129"/>
           </a:xfrm>
           <a:prstGeom prst="roundRect">
             <a:avLst>
-              <a:gd name="adj" fmla="val 5693"/>
+              <a:gd name="adj" fmla="val 11364"/>
             </a:avLst>
           </a:prstGeom>
           <a:solidFill>
-            <a:srgbClr val="FFFFFF">
-              <a:alpha val="0"/>
-            </a:srgbClr>
+            <a:srgbClr val="FFFFFF"/>
           </a:solidFill>
-          <a:ln w="31750">
+          <a:ln/>
+        </p:spPr>
+      </p:sp>
+      <p:sp>
+        <p:nvSpPr>
+          <p:cNvPr id="5" name="Shape 3"/>
+          <p:cNvSpPr/>
+          <p:nvPr/>
+        </p:nvSpPr>
+        <p:spPr>
+          <a:xfrm>
+            <a:off x="1548784" y="1273079"/>
+            <a:ext cx="1545870" cy="776129"/>
+          </a:xfrm>
+          <a:prstGeom prst="roundRect">
+            <a:avLst>
+              <a:gd name="adj" fmla="val 4676"/>
+            </a:avLst>
+          </a:prstGeom>
+          <a:ln w="12700">
             <a:solidFill>
               <a:srgbClr val="00A896"/>
             </a:solidFill>
@@ -14475,69 +15028,81 @@
       </p:sp>
       <p:sp>
         <p:nvSpPr>
-          <p:cNvPr id="5" name="Shape 3"/>
-          <p:cNvSpPr/>
-          <p:nvPr/>
-        </p:nvSpPr>
-        <p:spPr>
-          <a:xfrm>
-            <a:off x="2051685" y="1580278"/>
-            <a:ext cx="540068" cy="56257"/>
+          <p:cNvPr id="6" name="Text 4"/>
+          <p:cNvSpPr txBox="1"/>
+          <p:nvPr/>
+        </p:nvSpPr>
+        <p:spPr>
+          <a:xfrm>
+            <a:off x="1548784" y="1397259"/>
+            <a:ext cx="1545870" cy="232839"/>
           </a:xfrm>
           <a:prstGeom prst="rect">
             <a:avLst/>
           </a:prstGeom>
-          <a:solidFill>
-            <a:srgbClr val="00A896">
-              <a:alpha val="60000"/>
-            </a:srgbClr>
-          </a:solidFill>
-          <a:ln/>
-        </p:spPr>
-      </p:sp>
-      <p:sp>
-        <p:nvSpPr>
-          <p:cNvPr id="6" name="Shape 4"/>
-          <p:cNvSpPr/>
-          <p:nvPr/>
-        </p:nvSpPr>
-        <p:spPr>
-          <a:xfrm>
-            <a:off x="2051685" y="1737798"/>
-            <a:ext cx="540068" cy="56257"/>
+          <a:noFill/>
+          <a:ln/>
+        </p:spPr>
+        <p:txBody>
+          <a:bodyPr wrap="square" lIns="0" tIns="0" rIns="0" bIns="0" rtlCol="0" anchor="ctr"/>
+          <a:lstStyle/>
+          <a:p>
+            <a:pPr algn="ctr" indent="0" marL="0">
+              <a:buNone/>
+            </a:pPr>
+            <a:r>
+              <a:rPr lang="en-US" sz="710" b="1" dirty="0">
+                <a:solidFill>
+                  <a:srgbClr val="00A896"/>
+                </a:solidFill>
+                <a:latin typeface="Arial" pitchFamily="34" charset="0"/>
+                <a:ea typeface="Arial" pitchFamily="34" charset="-122"/>
+                <a:cs typeface="Arial" pitchFamily="34" charset="-120"/>
+              </a:rPr>
+              <a:t>「前車急煞」</a:t>
+            </a:r>
+            <a:endParaRPr lang="en-US" sz="710" dirty="0"/>
+          </a:p>
+        </p:txBody>
+      </p:sp>
+      <p:sp>
+        <p:nvSpPr>
+          <p:cNvPr id="7" name="Text 5"/>
+          <p:cNvSpPr txBox="1"/>
+          <p:nvPr/>
+        </p:nvSpPr>
+        <p:spPr>
+          <a:xfrm>
+            <a:off x="1548784" y="1707711"/>
+            <a:ext cx="1545870" cy="217316"/>
           </a:xfrm>
           <a:prstGeom prst="rect">
             <a:avLst/>
           </a:prstGeom>
-          <a:solidFill>
-            <a:srgbClr val="00A896">
-              <a:alpha val="60000"/>
-            </a:srgbClr>
-          </a:solidFill>
-          <a:ln/>
-        </p:spPr>
-      </p:sp>
-      <p:sp>
-        <p:nvSpPr>
-          <p:cNvPr id="7" name="Shape 5"/>
-          <p:cNvSpPr/>
-          <p:nvPr/>
-        </p:nvSpPr>
-        <p:spPr>
-          <a:xfrm>
-            <a:off x="2051685" y="1895317"/>
-            <a:ext cx="540068" cy="56257"/>
-          </a:xfrm>
-          <a:prstGeom prst="rect">
-            <a:avLst/>
-          </a:prstGeom>
-          <a:solidFill>
-            <a:srgbClr val="00A896">
-              <a:alpha val="60000"/>
-            </a:srgbClr>
-          </a:solidFill>
-          <a:ln/>
-        </p:spPr>
+          <a:noFill/>
+          <a:ln/>
+        </p:spPr>
+        <p:txBody>
+          <a:bodyPr wrap="square" lIns="0" tIns="0" rIns="0" bIns="0" rtlCol="0" anchor="ctr"/>
+          <a:lstStyle/>
+          <a:p>
+            <a:pPr algn="ctr" indent="0" marL="0">
+              <a:buNone/>
+            </a:pPr>
+            <a:r>
+              <a:rPr lang="en-US" sz="560" b="1" dirty="0">
+                <a:solidFill>
+                  <a:srgbClr val="8FA3B5"/>
+                </a:solidFill>
+                <a:latin typeface="Arial" pitchFamily="34" charset="0"/>
+                <a:ea typeface="Arial" pitchFamily="34" charset="-122"/>
+                <a:cs typeface="Arial" pitchFamily="34" charset="-120"/>
+              </a:rPr>
+              <a:t>誰都看得懂</a:t>
+            </a:r>
+            <a:endParaRPr lang="en-US" sz="560" dirty="0"/>
+          </a:p>
+        </p:txBody>
       </p:sp>
       <p:sp>
         <p:nvSpPr>
@@ -14547,43 +15112,223 @@
         </p:nvSpPr>
         <p:spPr>
           <a:xfrm>
-            <a:off x="2051685" y="2052837"/>
-            <a:ext cx="540068" cy="56257"/>
+            <a:off x="1566350" y="2260879"/>
+            <a:ext cx="456734" cy="299868"/>
           </a:xfrm>
           <a:prstGeom prst="rect">
             <a:avLst/>
           </a:prstGeom>
-          <a:solidFill>
-            <a:srgbClr val="00A896">
-              <a:alpha val="60000"/>
-            </a:srgbClr>
-          </a:solidFill>
-          <a:ln/>
-        </p:spPr>
-      </p:sp>
-      <p:sp>
-        <p:nvSpPr>
-          <p:cNvPr id="9" name="Shape 7"/>
+          <a:ln w="12700">
+            <a:solidFill>
+              <a:srgbClr val="D9463E"/>
+            </a:solidFill>
+            <a:prstDash val="dash"/>
+          </a:ln>
+        </p:spPr>
+      </p:sp>
+      <p:sp>
+        <p:nvSpPr>
+          <p:cNvPr id="9" name="Text 7"/>
+          <p:cNvSpPr txBox="1"/>
+          <p:nvPr/>
+        </p:nvSpPr>
+        <p:spPr>
+          <a:xfrm>
+            <a:off x="1566350" y="2260879"/>
+            <a:ext cx="456734" cy="299868"/>
+          </a:xfrm>
+          <a:prstGeom prst="rect">
+            <a:avLst/>
+          </a:prstGeom>
+          <a:noFill/>
+          <a:ln/>
+        </p:spPr>
+        <p:txBody>
+          <a:bodyPr wrap="square" lIns="0" tIns="0" rIns="0" bIns="0" rtlCol="0" anchor="ctr"/>
+          <a:lstStyle/>
+          <a:p>
+            <a:pPr algn="ctr" indent="0" marL="0">
+              <a:buNone/>
+            </a:pPr>
+            <a:r>
+              <a:rPr lang="en-US" sz="520" b="1" dirty="0">
+                <a:solidFill>
+                  <a:srgbClr val="D9463E"/>
+                </a:solidFill>
+                <a:latin typeface="Arial" pitchFamily="34" charset="0"/>
+                <a:ea typeface="Arial" pitchFamily="34" charset="-122"/>
+                <a:cs typeface="Arial" pitchFamily="34" charset="-120"/>
+              </a:rPr>
+              <a:t>多快</a:t>
+            </a:r>
+            <a:endParaRPr lang="en-US" sz="520" dirty="0"/>
+          </a:p>
+        </p:txBody>
+      </p:sp>
+      <p:sp>
+        <p:nvSpPr>
+          <p:cNvPr id="10" name="Shape 8"/>
           <p:cNvSpPr/>
           <p:nvPr/>
         </p:nvSpPr>
         <p:spPr>
           <a:xfrm>
-            <a:off x="2051685" y="2210357"/>
-            <a:ext cx="270034" cy="56257"/>
+            <a:off x="2102135" y="2260879"/>
+            <a:ext cx="456734" cy="299868"/>
           </a:xfrm>
           <a:prstGeom prst="rect">
             <a:avLst/>
           </a:prstGeom>
-          <a:solidFill>
-            <a:srgbClr val="00A896"/>
-          </a:solidFill>
-          <a:ln/>
-        </p:spPr>
-      </p:sp>
-      <p:sp>
-        <p:nvSpPr>
-          <p:cNvPr id="10" name="Text 8"/>
+          <a:ln w="12700">
+            <a:solidFill>
+              <a:srgbClr val="D9463E"/>
+            </a:solidFill>
+            <a:prstDash val="dash"/>
+          </a:ln>
+        </p:spPr>
+      </p:sp>
+      <p:sp>
+        <p:nvSpPr>
+          <p:cNvPr id="11" name="Text 9"/>
+          <p:cNvSpPr txBox="1"/>
+          <p:nvPr/>
+        </p:nvSpPr>
+        <p:spPr>
+          <a:xfrm>
+            <a:off x="2102135" y="2260879"/>
+            <a:ext cx="456734" cy="299868"/>
+          </a:xfrm>
+          <a:prstGeom prst="rect">
+            <a:avLst/>
+          </a:prstGeom>
+          <a:noFill/>
+          <a:ln/>
+        </p:spPr>
+        <p:txBody>
+          <a:bodyPr wrap="square" lIns="0" tIns="0" rIns="0" bIns="0" rtlCol="0" anchor="ctr"/>
+          <a:lstStyle/>
+          <a:p>
+            <a:pPr algn="ctr" indent="0" marL="0">
+              <a:buNone/>
+            </a:pPr>
+            <a:r>
+              <a:rPr lang="en-US" sz="520" b="1" dirty="0">
+                <a:solidFill>
+                  <a:srgbClr val="D9463E"/>
+                </a:solidFill>
+                <a:latin typeface="Arial" pitchFamily="34" charset="0"/>
+                <a:ea typeface="Arial" pitchFamily="34" charset="-122"/>
+                <a:cs typeface="Arial" pitchFamily="34" charset="-120"/>
+              </a:rPr>
+              <a:t>多近</a:t>
+            </a:r>
+            <a:endParaRPr lang="en-US" sz="520" dirty="0"/>
+          </a:p>
+        </p:txBody>
+      </p:sp>
+      <p:sp>
+        <p:nvSpPr>
+          <p:cNvPr id="12" name="Shape 10"/>
+          <p:cNvSpPr/>
+          <p:nvPr/>
+        </p:nvSpPr>
+        <p:spPr>
+          <a:xfrm>
+            <a:off x="2637920" y="2260879"/>
+            <a:ext cx="456734" cy="299868"/>
+          </a:xfrm>
+          <a:prstGeom prst="rect">
+            <a:avLst/>
+          </a:prstGeom>
+          <a:ln w="12700">
+            <a:solidFill>
+              <a:srgbClr val="D9463E"/>
+            </a:solidFill>
+            <a:prstDash val="dash"/>
+          </a:ln>
+        </p:spPr>
+      </p:sp>
+      <p:sp>
+        <p:nvSpPr>
+          <p:cNvPr id="13" name="Text 11"/>
+          <p:cNvSpPr txBox="1"/>
+          <p:nvPr/>
+        </p:nvSpPr>
+        <p:spPr>
+          <a:xfrm>
+            <a:off x="2637920" y="2260879"/>
+            <a:ext cx="456734" cy="299868"/>
+          </a:xfrm>
+          <a:prstGeom prst="rect">
+            <a:avLst/>
+          </a:prstGeom>
+          <a:noFill/>
+          <a:ln/>
+        </p:spPr>
+        <p:txBody>
+          <a:bodyPr wrap="square" lIns="0" tIns="0" rIns="0" bIns="0" rtlCol="0" anchor="ctr"/>
+          <a:lstStyle/>
+          <a:p>
+            <a:pPr algn="ctr" indent="0" marL="0">
+              <a:buNone/>
+            </a:pPr>
+            <a:r>
+              <a:rPr lang="en-US" sz="520" b="1" dirty="0">
+                <a:solidFill>
+                  <a:srgbClr val="D9463E"/>
+                </a:solidFill>
+                <a:latin typeface="Arial" pitchFamily="34" charset="0"/>
+                <a:ea typeface="Arial" pitchFamily="34" charset="-122"/>
+                <a:cs typeface="Arial" pitchFamily="34" charset="-120"/>
+              </a:rPr>
+              <a:t>多急</a:t>
+            </a:r>
+            <a:endParaRPr lang="en-US" sz="520" dirty="0"/>
+          </a:p>
+        </p:txBody>
+      </p:sp>
+      <p:sp>
+        <p:nvSpPr>
+          <p:cNvPr id="14" name="Text 12"/>
+          <p:cNvSpPr txBox="1"/>
+          <p:nvPr/>
+        </p:nvSpPr>
+        <p:spPr>
+          <a:xfrm>
+            <a:off x="1443383" y="2578387"/>
+            <a:ext cx="1756671" cy="211672"/>
+          </a:xfrm>
+          <a:prstGeom prst="rect">
+            <a:avLst/>
+          </a:prstGeom>
+          <a:noFill/>
+          <a:ln/>
+        </p:spPr>
+        <p:txBody>
+          <a:bodyPr wrap="square" lIns="0" tIns="0" rIns="0" bIns="0" rtlCol="0" anchor="ctr"/>
+          <a:lstStyle/>
+          <a:p>
+            <a:pPr algn="ctr" indent="0" marL="0">
+              <a:buNone/>
+            </a:pPr>
+            <a:r>
+              <a:rPr lang="en-US" sz="520" b="1" dirty="0">
+                <a:solidFill>
+                  <a:srgbClr val="D9463E"/>
+                </a:solidFill>
+                <a:latin typeface="Arial" pitchFamily="34" charset="0"/>
+                <a:ea typeface="Arial" pitchFamily="34" charset="-122"/>
+                <a:cs typeface="Arial" pitchFamily="34" charset="-120"/>
+              </a:rPr>
+              <a:t>三個數字都還沒有</a:t>
+            </a:r>
+            <a:endParaRPr lang="en-US" sz="520" dirty="0"/>
+          </a:p>
+        </p:txBody>
+      </p:sp>
+      <p:sp>
+        <p:nvSpPr>
+          <p:cNvPr id="15" name="Text 13"/>
           <p:cNvSpPr txBox="1"/>
           <p:nvPr/>
         </p:nvSpPr>
@@ -14645,7 +15390,7 @@
       </p:sp>
       <p:sp>
         <p:nvSpPr>
-          <p:cNvPr id="11" name="Text 9"/>
+          <p:cNvPr id="16" name="Text 14"/>
           <p:cNvSpPr txBox="1"/>
           <p:nvPr/>
         </p:nvSpPr>
@@ -14707,7 +15452,7 @@
       </p:sp>
       <p:sp>
         <p:nvSpPr>
-          <p:cNvPr id="12" name="Shape 10"/>
+          <p:cNvPr id="17" name="Shape 15"/>
           <p:cNvSpPr/>
           <p:nvPr/>
         </p:nvSpPr>
@@ -14734,7 +15479,7 @@
       </p:sp>
       <p:sp>
         <p:nvSpPr>
-          <p:cNvPr id="13" name="Text 11"/>
+          <p:cNvPr id="18" name="Text 16"/>
           <p:cNvSpPr txBox="1"/>
           <p:nvPr/>
         </p:nvSpPr>
@@ -14796,7 +15541,7 @@
       </p:sp>
       <p:pic>
         <p:nvPicPr>
-          <p:cNvPr id="15" name="Image 0" descr="/Users/tsengchenghsun/Class/carClass/Claude outputs/第四週(10-1)/src/logo.png">    </p:cNvPr>
+          <p:cNvPr id="20" name="Image 0" descr="/Users/tsengchenghsun/Class/carClass/Claude outputs/第四週(10-1)/src/logo.png">    </p:cNvPr>
           <p:cNvPicPr>
             <a:picLocks noChangeAspect="1"/>
           </p:cNvPicPr>
@@ -14820,7 +15565,7 @@
       </p:pic>
       <p:sp>
         <p:nvSpPr>
-          <p:cNvPr id="16" name="Text 12"/>
+          <p:cNvPr id="21" name="Text 17"/>
           <p:cNvSpPr txBox="1"/>
           <p:nvPr/>
         </p:nvSpPr>
@@ -14859,7 +15604,7 @@
       </p:sp>
       <p:sp>
         <p:nvSpPr>
-          <p:cNvPr id="17" name="Text 13"/>
+          <p:cNvPr id="22" name="Text 18"/>
           <p:cNvSpPr txBox="1"/>
           <p:nvPr/>
         </p:nvSpPr>
